--- a/SuHeo/Báo cáo thực tập - Sơn Hải Vân.pptx
+++ b/SuHeo/Báo cáo thực tập - Sơn Hải Vân.pptx
@@ -4173,7 +4173,7 @@
             </a:avLst>
           </a:prstGeom>
           <a:solidFill>
-            <a:srgbClr val="8C3B2E"/>
+            <a:srgbClr val="1F4E3D"/>
           </a:solidFill>
           <a:ln w="19050">
             <a:solidFill>
@@ -4221,7 +4221,7 @@
             </a:avLst>
           </a:prstGeom>
           <a:solidFill>
-            <a:srgbClr val="B56A3B"/>
+            <a:srgbClr val="3E8C6A"/>
           </a:solidFill>
           <a:ln w="19050">
             <a:solidFill>
@@ -4269,7 +4269,7 @@
             </a:avLst>
           </a:prstGeom>
           <a:solidFill>
-            <a:srgbClr val="4A4F54"/>
+            <a:srgbClr val="2C7A5A"/>
           </a:solidFill>
           <a:ln w="19050">
             <a:solidFill>
@@ -4365,7 +4365,7 @@
             </a:avLst>
           </a:prstGeom>
           <a:solidFill>
-            <a:srgbClr val="243B53"/>
+            <a:srgbClr val="14332A"/>
           </a:solidFill>
           <a:ln w="19050">
             <a:solidFill>
@@ -4986,8 +4986,8 @@
         </p:nvSpPr>
         <p:spPr>
           <a:xfrm>
-            <a:off x="1046988" y="2487168"/>
-            <a:ext cx="603504" cy="603504"/>
+            <a:off x="508640" y="2236000"/>
+            <a:ext cx="330000" cy="330000"/>
           </a:xfrm>
           <a:prstGeom prst="ellipse">
             <a:avLst/>
@@ -5030,8 +5030,8 @@
         </p:nvSpPr>
         <p:spPr>
           <a:xfrm>
-            <a:off x="1046988" y="2487168"/>
-            <a:ext cx="603504" cy="603504"/>
+            <a:off x="508640" y="2236000"/>
+            <a:ext cx="330000" cy="330000"/>
           </a:xfrm>
           <a:prstGeom prst="rect">
             <a:avLst/>
@@ -5046,7 +5046,7 @@
           <a:p>
             <a:pPr algn="ctr"/>
             <a:r>
-              <a:rPr sz="2000" b="1" i="0">
+              <a:rPr sz="1300" b="1" i="0">
                 <a:solidFill>
                   <a:srgbClr val="FFFFFF"/>
                 </a:solidFill>
@@ -5065,7 +5065,7 @@
         </p:nvSpPr>
         <p:spPr>
           <a:xfrm>
-            <a:off x="640080" y="3182112"/>
+            <a:off x="640080" y="3170000"/>
             <a:ext cx="1417320" cy="594360"/>
           </a:xfrm>
           <a:prstGeom prst="rect">
@@ -5196,8 +5196,8 @@
         </p:nvSpPr>
         <p:spPr>
           <a:xfrm>
-            <a:off x="2903220" y="2487168"/>
-            <a:ext cx="603504" cy="603504"/>
+            <a:off x="2364872" y="2236000"/>
+            <a:ext cx="330000" cy="330000"/>
           </a:xfrm>
           <a:prstGeom prst="ellipse">
             <a:avLst/>
@@ -5240,8 +5240,8 @@
         </p:nvSpPr>
         <p:spPr>
           <a:xfrm>
-            <a:off x="2903220" y="2487168"/>
-            <a:ext cx="603504" cy="603504"/>
+            <a:off x="2364872" y="2236000"/>
+            <a:ext cx="330000" cy="330000"/>
           </a:xfrm>
           <a:prstGeom prst="rect">
             <a:avLst/>
@@ -5256,7 +5256,7 @@
           <a:p>
             <a:pPr algn="ctr"/>
             <a:r>
-              <a:rPr sz="2000" b="1" i="0">
+              <a:rPr sz="1300" b="1" i="0">
                 <a:solidFill>
                   <a:srgbClr val="FFFFFF"/>
                 </a:solidFill>
@@ -5275,7 +5275,7 @@
         </p:nvSpPr>
         <p:spPr>
           <a:xfrm>
-            <a:off x="2496312" y="3182112"/>
+            <a:off x="2496312" y="3170000"/>
             <a:ext cx="1417320" cy="594360"/>
           </a:xfrm>
           <a:prstGeom prst="rect">
@@ -5406,8 +5406,8 @@
         </p:nvSpPr>
         <p:spPr>
           <a:xfrm>
-            <a:off x="4759452" y="2487168"/>
-            <a:ext cx="603504" cy="603504"/>
+            <a:off x="4221104" y="2236000"/>
+            <a:ext cx="330000" cy="330000"/>
           </a:xfrm>
           <a:prstGeom prst="ellipse">
             <a:avLst/>
@@ -5450,8 +5450,8 @@
         </p:nvSpPr>
         <p:spPr>
           <a:xfrm>
-            <a:off x="4759452" y="2487168"/>
-            <a:ext cx="603504" cy="603504"/>
+            <a:off x="4221104" y="2236000"/>
+            <a:ext cx="330000" cy="330000"/>
           </a:xfrm>
           <a:prstGeom prst="rect">
             <a:avLst/>
@@ -5466,7 +5466,7 @@
           <a:p>
             <a:pPr algn="ctr"/>
             <a:r>
-              <a:rPr sz="2000" b="1" i="0">
+              <a:rPr sz="1300" b="1" i="0">
                 <a:solidFill>
                   <a:srgbClr val="FFFFFF"/>
                 </a:solidFill>
@@ -5485,7 +5485,7 @@
         </p:nvSpPr>
         <p:spPr>
           <a:xfrm>
-            <a:off x="4352544" y="3182112"/>
+            <a:off x="4352544" y="3170000"/>
             <a:ext cx="1417320" cy="594360"/>
           </a:xfrm>
           <a:prstGeom prst="rect">
@@ -5616,8 +5616,8 @@
         </p:nvSpPr>
         <p:spPr>
           <a:xfrm>
-            <a:off x="6615684" y="2487168"/>
-            <a:ext cx="603504" cy="603504"/>
+            <a:off x="6077336" y="2236000"/>
+            <a:ext cx="330000" cy="330000"/>
           </a:xfrm>
           <a:prstGeom prst="ellipse">
             <a:avLst/>
@@ -5660,8 +5660,8 @@
         </p:nvSpPr>
         <p:spPr>
           <a:xfrm>
-            <a:off x="6615684" y="2487168"/>
-            <a:ext cx="603504" cy="603504"/>
+            <a:off x="6077336" y="2236000"/>
+            <a:ext cx="330000" cy="330000"/>
           </a:xfrm>
           <a:prstGeom prst="rect">
             <a:avLst/>
@@ -5676,7 +5676,7 @@
           <a:p>
             <a:pPr algn="ctr"/>
             <a:r>
-              <a:rPr sz="2000" b="1" i="0">
+              <a:rPr sz="1300" b="1" i="0">
                 <a:solidFill>
                   <a:srgbClr val="FFFFFF"/>
                 </a:solidFill>
@@ -5695,7 +5695,7 @@
         </p:nvSpPr>
         <p:spPr>
           <a:xfrm>
-            <a:off x="6208776" y="3182112"/>
+            <a:off x="6208776" y="3170000"/>
             <a:ext cx="1417320" cy="594360"/>
           </a:xfrm>
           <a:prstGeom prst="rect">
@@ -5826,8 +5826,8 @@
         </p:nvSpPr>
         <p:spPr>
           <a:xfrm>
-            <a:off x="8471916" y="2487168"/>
-            <a:ext cx="603504" cy="603504"/>
+            <a:off x="7933568" y="2236000"/>
+            <a:ext cx="330000" cy="330000"/>
           </a:xfrm>
           <a:prstGeom prst="ellipse">
             <a:avLst/>
@@ -5870,8 +5870,8 @@
         </p:nvSpPr>
         <p:spPr>
           <a:xfrm>
-            <a:off x="8471916" y="2487168"/>
-            <a:ext cx="603504" cy="603504"/>
+            <a:off x="7933568" y="2236000"/>
+            <a:ext cx="330000" cy="330000"/>
           </a:xfrm>
           <a:prstGeom prst="rect">
             <a:avLst/>
@@ -5886,7 +5886,7 @@
           <a:p>
             <a:pPr algn="ctr"/>
             <a:r>
-              <a:rPr sz="2000" b="1" i="0">
+              <a:rPr sz="1300" b="1" i="0">
                 <a:solidFill>
                   <a:srgbClr val="FFFFFF"/>
                 </a:solidFill>
@@ -5905,7 +5905,7 @@
         </p:nvSpPr>
         <p:spPr>
           <a:xfrm>
-            <a:off x="8065008" y="3182112"/>
+            <a:off x="8065008" y="3170000"/>
             <a:ext cx="1417320" cy="594360"/>
           </a:xfrm>
           <a:prstGeom prst="rect">
@@ -6036,8 +6036,8 @@
         </p:nvSpPr>
         <p:spPr>
           <a:xfrm>
-            <a:off x="10328148" y="2487168"/>
-            <a:ext cx="603504" cy="603504"/>
+            <a:off x="9789800" y="2236000"/>
+            <a:ext cx="330000" cy="330000"/>
           </a:xfrm>
           <a:prstGeom prst="ellipse">
             <a:avLst/>
@@ -6080,8 +6080,8 @@
         </p:nvSpPr>
         <p:spPr>
           <a:xfrm>
-            <a:off x="10328148" y="2487168"/>
-            <a:ext cx="603504" cy="603504"/>
+            <a:off x="9789800" y="2236000"/>
+            <a:ext cx="330000" cy="330000"/>
           </a:xfrm>
           <a:prstGeom prst="rect">
             <a:avLst/>
@@ -6096,7 +6096,7 @@
           <a:p>
             <a:pPr algn="ctr"/>
             <a:r>
-              <a:rPr sz="2000" b="1" i="0">
+              <a:rPr sz="1300" b="1" i="0">
                 <a:solidFill>
                   <a:srgbClr val="FFFFFF"/>
                 </a:solidFill>
@@ -6115,7 +6115,7 @@
         </p:nvSpPr>
         <p:spPr>
           <a:xfrm>
-            <a:off x="9921240" y="3182112"/>
+            <a:off x="9921240" y="3170000"/>
             <a:ext cx="1417320" cy="594360"/>
           </a:xfrm>
           <a:prstGeom prst="rect">
@@ -6338,6 +6338,186 @@
           </a:p>
         </p:txBody>
       </p:sp>
+      <p:pic>
+        <p:nvPicPr>
+          <p:cNvPr id="119" name="Picture 118" descr="dinh_luong_g.png"/>
+          <p:cNvPicPr>
+            <a:picLocks noChangeAspect="1"/>
+          </p:cNvPicPr>
+          <p:nvPr/>
+        </p:nvPicPr>
+        <p:blipFill>
+          <a:blip r:embed="rId2">
+            <a:extLst>
+              <a:ext uri="{96DAC541-7B7A-43D3-8B79-37D633B846F1}">
+                <ns0:svgBlip xmlns:ns0="http://schemas.microsoft.com/office/drawing/2016/SVG/main" r:embed="rId9"/>
+              </a:ext>
+            </a:extLst>
+          </a:blip>
+          <a:stretch>
+            <a:fillRect/>
+          </a:stretch>
+        </p:blipFill>
+        <p:spPr>
+          <a:xfrm>
+            <a:off x="1018740" y="2496000"/>
+            <a:ext cx="660000" cy="660000"/>
+          </a:xfrm>
+          <a:prstGeom prst="rect">
+            <a:avLst/>
+          </a:prstGeom>
+        </p:spPr>
+      </p:pic>
+      <p:pic>
+        <p:nvPicPr>
+          <p:cNvPr id="120" name="Picture 119" descr="danh_paste_g.png"/>
+          <p:cNvPicPr>
+            <a:picLocks noChangeAspect="1"/>
+          </p:cNvPicPr>
+          <p:nvPr/>
+        </p:nvPicPr>
+        <p:blipFill>
+          <a:blip r:embed="rId3">
+            <a:extLst>
+              <a:ext uri="{96DAC541-7B7A-43D3-8B79-37D633B846F1}">
+                <ns1:svgBlip xmlns:ns1="http://schemas.microsoft.com/office/drawing/2016/SVG/main" r:embed="rId8"/>
+              </a:ext>
+            </a:extLst>
+          </a:blip>
+          <a:stretch>
+            <a:fillRect/>
+          </a:stretch>
+        </p:blipFill>
+        <p:spPr>
+          <a:xfrm>
+            <a:off x="2874972" y="2496000"/>
+            <a:ext cx="660000" cy="660000"/>
+          </a:xfrm>
+          <a:prstGeom prst="rect">
+            <a:avLst/>
+          </a:prstGeom>
+        </p:spPr>
+      </p:pic>
+      <p:pic>
+        <p:nvPicPr>
+          <p:cNvPr id="121" name="Picture 120" descr="nghien_min_g.png"/>
+          <p:cNvPicPr>
+            <a:picLocks noChangeAspect="1"/>
+          </p:cNvPicPr>
+          <p:nvPr/>
+        </p:nvPicPr>
+        <p:blipFill>
+          <a:blip r:embed="rId4">
+            <a:extLst>
+              <a:ext uri="{96DAC541-7B7A-43D3-8B79-37D633B846F1}">
+                <ns2:svgBlip xmlns:ns2="http://schemas.microsoft.com/office/drawing/2016/SVG/main" r:embed="rId12"/>
+              </a:ext>
+            </a:extLst>
+          </a:blip>
+          <a:stretch>
+            <a:fillRect/>
+          </a:stretch>
+        </p:blipFill>
+        <p:spPr>
+          <a:xfrm>
+            <a:off x="4731204" y="2496000"/>
+            <a:ext cx="660000" cy="660000"/>
+          </a:xfrm>
+          <a:prstGeom prst="rect">
+            <a:avLst/>
+          </a:prstGeom>
+        </p:spPr>
+      </p:pic>
+      <p:pic>
+        <p:nvPicPr>
+          <p:cNvPr id="122" name="Picture 121" descr="ngam_u_g.png"/>
+          <p:cNvPicPr>
+            <a:picLocks noChangeAspect="1"/>
+          </p:cNvPicPr>
+          <p:nvPr/>
+        </p:nvPicPr>
+        <p:blipFill>
+          <a:blip r:embed="rId5">
+            <a:extLst>
+              <a:ext uri="{96DAC541-7B7A-43D3-8B79-37D633B846F1}">
+                <ns3:svgBlip xmlns:ns3="http://schemas.microsoft.com/office/drawing/2016/SVG/main" r:embed="rId11"/>
+              </a:ext>
+            </a:extLst>
+          </a:blip>
+          <a:stretch>
+            <a:fillRect/>
+          </a:stretch>
+        </p:blipFill>
+        <p:spPr>
+          <a:xfrm>
+            <a:off x="6587436" y="2496000"/>
+            <a:ext cx="660000" cy="660000"/>
+          </a:xfrm>
+          <a:prstGeom prst="rect">
+            <a:avLst/>
+          </a:prstGeom>
+        </p:spPr>
+      </p:pic>
+      <p:pic>
+        <p:nvPicPr>
+          <p:cNvPr id="123" name="Picture 122" descr="pha_loang_g.png"/>
+          <p:cNvPicPr>
+            <a:picLocks noChangeAspect="1"/>
+          </p:cNvPicPr>
+          <p:nvPr/>
+        </p:nvPicPr>
+        <p:blipFill>
+          <a:blip r:embed="rId6">
+            <a:extLst>
+              <a:ext uri="{96DAC541-7B7A-43D3-8B79-37D633B846F1}">
+                <ns4:svgBlip xmlns:ns4="http://schemas.microsoft.com/office/drawing/2016/SVG/main" r:embed="rId13"/>
+              </a:ext>
+            </a:extLst>
+          </a:blip>
+          <a:stretch>
+            <a:fillRect/>
+          </a:stretch>
+        </p:blipFill>
+        <p:spPr>
+          <a:xfrm>
+            <a:off x="8443668" y="2496000"/>
+            <a:ext cx="660000" cy="660000"/>
+          </a:xfrm>
+          <a:prstGeom prst="rect">
+            <a:avLst/>
+          </a:prstGeom>
+        </p:spPr>
+      </p:pic>
+      <p:pic>
+        <p:nvPicPr>
+          <p:cNvPr id="124" name="Picture 123" descr="loc_donggoi_g.png"/>
+          <p:cNvPicPr>
+            <a:picLocks noChangeAspect="1"/>
+          </p:cNvPicPr>
+          <p:nvPr/>
+        </p:nvPicPr>
+        <p:blipFill>
+          <a:blip r:embed="rId7">
+            <a:extLst>
+              <a:ext uri="{96DAC541-7B7A-43D3-8B79-37D633B846F1}">
+                <ns5:svgBlip xmlns:ns5="http://schemas.microsoft.com/office/drawing/2016/SVG/main" r:embed="rId10"/>
+              </a:ext>
+            </a:extLst>
+          </a:blip>
+          <a:stretch>
+            <a:fillRect/>
+          </a:stretch>
+        </p:blipFill>
+        <p:spPr>
+          <a:xfrm>
+            <a:off x="10299900" y="2496000"/>
+            <a:ext cx="660000" cy="660000"/>
+          </a:xfrm>
+          <a:prstGeom prst="rect">
+            <a:avLst/>
+          </a:prstGeom>
+        </p:spPr>
+      </p:pic>
     </p:spTree>
   </p:cSld>
   <p:clrMapOvr>
@@ -8315,7 +8495,7 @@
                 </a:solidFill>
                 <a:latin typeface="Cambria"/>
               </a:rPr>
-              <a:t>1</a:t>
+              <a:t/>
             </a:r>
           </a:p>
         </p:txBody>
@@ -8641,7 +8821,7 @@
                 </a:solidFill>
                 <a:latin typeface="Cambria"/>
               </a:rPr>
-              <a:t>2</a:t>
+              <a:t/>
             </a:r>
           </a:p>
         </p:txBody>
@@ -8967,7 +9147,7 @@
                 </a:solidFill>
                 <a:latin typeface="Cambria"/>
               </a:rPr>
-              <a:t>3</a:t>
+              <a:t/>
             </a:r>
           </a:p>
         </p:txBody>
@@ -9293,7 +9473,7 @@
                 </a:solidFill>
                 <a:latin typeface="Cambria"/>
               </a:rPr>
-              <a:t>4</a:t>
+              <a:t/>
             </a:r>
           </a:p>
         </p:txBody>
@@ -9619,7 +9799,7 @@
                 </a:solidFill>
                 <a:latin typeface="Cambria"/>
               </a:rPr>
-              <a:t>5</a:t>
+              <a:t/>
             </a:r>
           </a:p>
         </p:txBody>
@@ -9945,7 +10125,7 @@
                 </a:solidFill>
                 <a:latin typeface="Cambria"/>
               </a:rPr>
-              <a:t>6</a:t>
+              <a:t/>
             </a:r>
           </a:p>
         </p:txBody>
@@ -10223,6 +10403,186 @@
           </a:p>
         </p:txBody>
       </p:sp>
+      <p:pic>
+        <p:nvPicPr>
+          <p:cNvPr id="172" name="Picture 171" descr="dinh_luong_w.png"/>
+          <p:cNvPicPr>
+            <a:picLocks noChangeAspect="1"/>
+          </p:cNvPicPr>
+          <p:nvPr/>
+        </p:nvPicPr>
+        <p:blipFill>
+          <a:blip r:embed="rId2">
+            <a:extLst>
+              <a:ext uri="{96DAC541-7B7A-43D3-8B79-37D633B846F1}">
+                <ns0:svgBlip xmlns:ns0="http://schemas.microsoft.com/office/drawing/2016/SVG/main" r:embed="rId9"/>
+              </a:ext>
+            </a:extLst>
+          </a:blip>
+          <a:stretch>
+            <a:fillRect/>
+          </a:stretch>
+        </p:blipFill>
+        <p:spPr>
+          <a:xfrm>
+            <a:off x="795528" y="1673352"/>
+            <a:ext cx="246888" cy="246888"/>
+          </a:xfrm>
+          <a:prstGeom prst="rect">
+            <a:avLst/>
+          </a:prstGeom>
+        </p:spPr>
+      </p:pic>
+      <p:pic>
+        <p:nvPicPr>
+          <p:cNvPr id="173" name="Picture 172" descr="danh_paste_w.png"/>
+          <p:cNvPicPr>
+            <a:picLocks noChangeAspect="1"/>
+          </p:cNvPicPr>
+          <p:nvPr/>
+        </p:nvPicPr>
+        <p:blipFill>
+          <a:blip r:embed="rId3">
+            <a:extLst>
+              <a:ext uri="{96DAC541-7B7A-43D3-8B79-37D633B846F1}">
+                <ns1:svgBlip xmlns:ns1="http://schemas.microsoft.com/office/drawing/2016/SVG/main" r:embed="rId8"/>
+              </a:ext>
+            </a:extLst>
+          </a:blip>
+          <a:stretch>
+            <a:fillRect/>
+          </a:stretch>
+        </p:blipFill>
+        <p:spPr>
+          <a:xfrm>
+            <a:off x="795528" y="2441448"/>
+            <a:ext cx="246888" cy="246888"/>
+          </a:xfrm>
+          <a:prstGeom prst="rect">
+            <a:avLst/>
+          </a:prstGeom>
+        </p:spPr>
+      </p:pic>
+      <p:pic>
+        <p:nvPicPr>
+          <p:cNvPr id="174" name="Picture 173" descr="nghien_min_g.png"/>
+          <p:cNvPicPr>
+            <a:picLocks noChangeAspect="1"/>
+          </p:cNvPicPr>
+          <p:nvPr/>
+        </p:nvPicPr>
+        <p:blipFill>
+          <a:blip r:embed="rId4">
+            <a:extLst>
+              <a:ext uri="{96DAC541-7B7A-43D3-8B79-37D633B846F1}">
+                <ns2:svgBlip xmlns:ns2="http://schemas.microsoft.com/office/drawing/2016/SVG/main" r:embed="rId12"/>
+              </a:ext>
+            </a:extLst>
+          </a:blip>
+          <a:stretch>
+            <a:fillRect/>
+          </a:stretch>
+        </p:blipFill>
+        <p:spPr>
+          <a:xfrm>
+            <a:off x="795528" y="3209544"/>
+            <a:ext cx="246888" cy="246888"/>
+          </a:xfrm>
+          <a:prstGeom prst="rect">
+            <a:avLst/>
+          </a:prstGeom>
+        </p:spPr>
+      </p:pic>
+      <p:pic>
+        <p:nvPicPr>
+          <p:cNvPr id="175" name="Picture 174" descr="ngam_u_w.png"/>
+          <p:cNvPicPr>
+            <a:picLocks noChangeAspect="1"/>
+          </p:cNvPicPr>
+          <p:nvPr/>
+        </p:nvPicPr>
+        <p:blipFill>
+          <a:blip r:embed="rId5">
+            <a:extLst>
+              <a:ext uri="{96DAC541-7B7A-43D3-8B79-37D633B846F1}">
+                <ns3:svgBlip xmlns:ns3="http://schemas.microsoft.com/office/drawing/2016/SVG/main" r:embed="rId11"/>
+              </a:ext>
+            </a:extLst>
+          </a:blip>
+          <a:stretch>
+            <a:fillRect/>
+          </a:stretch>
+        </p:blipFill>
+        <p:spPr>
+          <a:xfrm>
+            <a:off x="795528" y="3977640"/>
+            <a:ext cx="246888" cy="246888"/>
+          </a:xfrm>
+          <a:prstGeom prst="rect">
+            <a:avLst/>
+          </a:prstGeom>
+        </p:spPr>
+      </p:pic>
+      <p:pic>
+        <p:nvPicPr>
+          <p:cNvPr id="176" name="Picture 175" descr="pha_loang_w.png"/>
+          <p:cNvPicPr>
+            <a:picLocks noChangeAspect="1"/>
+          </p:cNvPicPr>
+          <p:nvPr/>
+        </p:nvPicPr>
+        <p:blipFill>
+          <a:blip r:embed="rId6">
+            <a:extLst>
+              <a:ext uri="{96DAC541-7B7A-43D3-8B79-37D633B846F1}">
+                <ns4:svgBlip xmlns:ns4="http://schemas.microsoft.com/office/drawing/2016/SVG/main" r:embed="rId13"/>
+              </a:ext>
+            </a:extLst>
+          </a:blip>
+          <a:stretch>
+            <a:fillRect/>
+          </a:stretch>
+        </p:blipFill>
+        <p:spPr>
+          <a:xfrm>
+            <a:off x="795528" y="4745736"/>
+            <a:ext cx="246888" cy="246888"/>
+          </a:xfrm>
+          <a:prstGeom prst="rect">
+            <a:avLst/>
+          </a:prstGeom>
+        </p:spPr>
+      </p:pic>
+      <p:pic>
+        <p:nvPicPr>
+          <p:cNvPr id="177" name="Picture 176" descr="loc_donggoi_w.png"/>
+          <p:cNvPicPr>
+            <a:picLocks noChangeAspect="1"/>
+          </p:cNvPicPr>
+          <p:nvPr/>
+        </p:nvPicPr>
+        <p:blipFill>
+          <a:blip r:embed="rId7">
+            <a:extLst>
+              <a:ext uri="{96DAC541-7B7A-43D3-8B79-37D633B846F1}">
+                <ns5:svgBlip xmlns:ns5="http://schemas.microsoft.com/office/drawing/2016/SVG/main" r:embed="rId10"/>
+              </a:ext>
+            </a:extLst>
+          </a:blip>
+          <a:stretch>
+            <a:fillRect/>
+          </a:stretch>
+        </p:blipFill>
+        <p:spPr>
+          <a:xfrm>
+            <a:off x="795528" y="5513832"/>
+            <a:ext cx="246888" cy="246888"/>
+          </a:xfrm>
+          <a:prstGeom prst="rect">
+            <a:avLst/>
+          </a:prstGeom>
+        </p:spPr>
+      </p:pic>
     </p:spTree>
   </p:cSld>
   <p:clrMapOvr>
@@ -12439,8 +12799,8 @@
         </p:nvSpPr>
         <p:spPr>
           <a:xfrm>
-            <a:off x="777240" y="1463040"/>
-            <a:ext cx="3154680" cy="822960"/>
+            <a:off x="1277240" y="1463040"/>
+            <a:ext cx="2654680" cy="822960"/>
           </a:xfrm>
           <a:prstGeom prst="rect">
             <a:avLst/>
@@ -12803,8 +13163,8 @@
         </p:nvSpPr>
         <p:spPr>
           <a:xfrm>
-            <a:off x="4645152" y="1463040"/>
-            <a:ext cx="3154680" cy="822960"/>
+            <a:off x="5145152" y="1463040"/>
+            <a:ext cx="2654680" cy="822960"/>
           </a:xfrm>
           <a:prstGeom prst="rect">
             <a:avLst/>
@@ -13167,8 +13527,8 @@
         </p:nvSpPr>
         <p:spPr>
           <a:xfrm>
-            <a:off x="8513064" y="1463040"/>
-            <a:ext cx="3154680" cy="822960"/>
+            <a:off x="9013064" y="1463040"/>
+            <a:ext cx="2654680" cy="822960"/>
           </a:xfrm>
           <a:prstGeom prst="rect">
             <a:avLst/>
@@ -13455,6 +13815,96 @@
           </a:p>
         </p:txBody>
       </p:sp>
+      <p:pic>
+        <p:nvPicPr>
+          <p:cNvPr id="124" name="Picture 123" descr="danh_paste_w.png"/>
+          <p:cNvPicPr>
+            <a:picLocks noChangeAspect="1"/>
+          </p:cNvPicPr>
+          <p:nvPr/>
+        </p:nvPicPr>
+        <p:blipFill>
+          <a:blip r:embed="rId5">
+            <a:extLst>
+              <a:ext uri="{96DAC541-7B7A-43D3-8B79-37D633B846F1}">
+                <ns0:svgBlip xmlns:ns0="http://schemas.microsoft.com/office/drawing/2016/SVG/main" r:embed="rId8"/>
+              </a:ext>
+            </a:extLst>
+          </a:blip>
+          <a:stretch>
+            <a:fillRect/>
+          </a:stretch>
+        </p:blipFill>
+        <p:spPr>
+          <a:xfrm>
+            <a:off x="698640" y="1664520"/>
+            <a:ext cx="420000" cy="420000"/>
+          </a:xfrm>
+          <a:prstGeom prst="rect">
+            <a:avLst/>
+          </a:prstGeom>
+        </p:spPr>
+      </p:pic>
+      <p:pic>
+        <p:nvPicPr>
+          <p:cNvPr id="125" name="Picture 124" descr="nghien_min_w.png"/>
+          <p:cNvPicPr>
+            <a:picLocks noChangeAspect="1"/>
+          </p:cNvPicPr>
+          <p:nvPr/>
+        </p:nvPicPr>
+        <p:blipFill>
+          <a:blip r:embed="rId6">
+            <a:extLst>
+              <a:ext uri="{96DAC541-7B7A-43D3-8B79-37D633B846F1}">
+                <ns1:svgBlip xmlns:ns1="http://schemas.microsoft.com/office/drawing/2016/SVG/main" r:embed="rId9"/>
+              </a:ext>
+            </a:extLst>
+          </a:blip>
+          <a:stretch>
+            <a:fillRect/>
+          </a:stretch>
+        </p:blipFill>
+        <p:spPr>
+          <a:xfrm>
+            <a:off x="4566552" y="1664520"/>
+            <a:ext cx="420000" cy="420000"/>
+          </a:xfrm>
+          <a:prstGeom prst="rect">
+            <a:avLst/>
+          </a:prstGeom>
+        </p:spPr>
+      </p:pic>
+      <p:pic>
+        <p:nvPicPr>
+          <p:cNvPr id="126" name="Picture 125" descr="pha_loang_w.png"/>
+          <p:cNvPicPr>
+            <a:picLocks noChangeAspect="1"/>
+          </p:cNvPicPr>
+          <p:nvPr/>
+        </p:nvPicPr>
+        <p:blipFill>
+          <a:blip r:embed="rId7">
+            <a:extLst>
+              <a:ext uri="{96DAC541-7B7A-43D3-8B79-37D633B846F1}">
+                <ns2:svgBlip xmlns:ns2="http://schemas.microsoft.com/office/drawing/2016/SVG/main" r:embed="rId10"/>
+              </a:ext>
+            </a:extLst>
+          </a:blip>
+          <a:stretch>
+            <a:fillRect/>
+          </a:stretch>
+        </p:blipFill>
+        <p:spPr>
+          <a:xfrm>
+            <a:off x="8434464" y="1664520"/>
+            <a:ext cx="420000" cy="420000"/>
+          </a:xfrm>
+          <a:prstGeom prst="rect">
+            <a:avLst/>
+          </a:prstGeom>
+        </p:spPr>
+      </p:pic>
     </p:spTree>
   </p:cSld>
   <p:clrMapOvr>
@@ -15898,8 +16348,8 @@
         </p:nvSpPr>
         <p:spPr>
           <a:xfrm>
-            <a:off x="822960" y="1554480"/>
-            <a:ext cx="4937760" cy="822960"/>
+            <a:off x="1342960" y="1554480"/>
+            <a:ext cx="4417760" cy="822960"/>
           </a:xfrm>
           <a:prstGeom prst="rect">
             <a:avLst/>
@@ -16263,8 +16713,8 @@
         </p:nvSpPr>
         <p:spPr>
           <a:xfrm>
-            <a:off x="6492240" y="1554480"/>
-            <a:ext cx="4937760" cy="822960"/>
+            <a:off x="7012240" y="1554480"/>
+            <a:ext cx="4417760" cy="822960"/>
           </a:xfrm>
           <a:prstGeom prst="rect">
             <a:avLst/>
@@ -16527,6 +16977,66 @@
           </a:p>
         </p:txBody>
       </p:sp>
+      <p:pic>
+        <p:nvPicPr>
+          <p:cNvPr id="54" name="Picture 53" descr="stopwatch_w.png"/>
+          <p:cNvPicPr>
+            <a:picLocks noChangeAspect="1"/>
+          </p:cNvPicPr>
+          <p:nvPr/>
+        </p:nvPicPr>
+        <p:blipFill>
+          <a:blip r:embed="rId2">
+            <a:extLst>
+              <a:ext uri="{96DAC541-7B7A-43D3-8B79-37D633B846F1}">
+                <ns0:svgBlip xmlns:ns0="http://schemas.microsoft.com/office/drawing/2016/SVG/main" r:embed="rId5"/>
+              </a:ext>
+            </a:extLst>
+          </a:blip>
+          <a:stretch>
+            <a:fillRect/>
+          </a:stretch>
+        </p:blipFill>
+        <p:spPr>
+          <a:xfrm>
+            <a:off x="698640" y="1750960"/>
+            <a:ext cx="430000" cy="430000"/>
+          </a:xfrm>
+          <a:prstGeom prst="rect">
+            <a:avLst/>
+          </a:prstGeom>
+        </p:spPr>
+      </p:pic>
+      <p:pic>
+        <p:nvPicPr>
+          <p:cNvPr id="55" name="Picture 54" descr="microscope_w.png"/>
+          <p:cNvPicPr>
+            <a:picLocks noChangeAspect="1"/>
+          </p:cNvPicPr>
+          <p:nvPr/>
+        </p:nvPicPr>
+        <p:blipFill>
+          <a:blip r:embed="rId3">
+            <a:extLst>
+              <a:ext uri="{96DAC541-7B7A-43D3-8B79-37D633B846F1}">
+                <ns1:svgBlip xmlns:ns1="http://schemas.microsoft.com/office/drawing/2016/SVG/main" r:embed="rId4"/>
+              </a:ext>
+            </a:extLst>
+          </a:blip>
+          <a:stretch>
+            <a:fillRect/>
+          </a:stretch>
+        </p:blipFill>
+        <p:spPr>
+          <a:xfrm>
+            <a:off x="6367920" y="1750960"/>
+            <a:ext cx="430000" cy="430000"/>
+          </a:xfrm>
+          <a:prstGeom prst="rect">
+            <a:avLst/>
+          </a:prstGeom>
+        </p:spPr>
+      </p:pic>
     </p:spTree>
   </p:cSld>
   <p:clrMapOvr>
@@ -17675,7 +18185,7 @@
                 </a:solidFill>
                 <a:latin typeface="Cambria"/>
               </a:rPr>
-              <a:t>1</a:t>
+              <a:t/>
             </a:r>
           </a:p>
         </p:txBody>
@@ -17941,7 +18451,7 @@
                 </a:solidFill>
                 <a:latin typeface="Cambria"/>
               </a:rPr>
-              <a:t>2</a:t>
+              <a:t/>
             </a:r>
           </a:p>
         </p:txBody>
@@ -18207,7 +18717,7 @@
                 </a:solidFill>
                 <a:latin typeface="Cambria"/>
               </a:rPr>
-              <a:t>3</a:t>
+              <a:t/>
             </a:r>
           </a:p>
         </p:txBody>
@@ -18375,6 +18885,96 @@
           </a:p>
         </p:txBody>
       </p:sp>
+      <p:pic>
+        <p:nvPicPr>
+          <p:cNvPr id="94" name="Picture 93" descr="adhesion_w.png"/>
+          <p:cNvPicPr>
+            <a:picLocks noChangeAspect="1"/>
+          </p:cNvPicPr>
+          <p:nvPr/>
+        </p:nvPicPr>
+        <p:blipFill>
+          <a:blip r:embed="rId2">
+            <a:extLst>
+              <a:ext uri="{96DAC541-7B7A-43D3-8B79-37D633B846F1}">
+                <ns0:svgBlip xmlns:ns0="http://schemas.microsoft.com/office/drawing/2016/SVG/main" r:embed="rId5"/>
+              </a:ext>
+            </a:extLst>
+          </a:blip>
+          <a:stretch>
+            <a:fillRect/>
+          </a:stretch>
+        </p:blipFill>
+        <p:spPr>
+          <a:xfrm>
+            <a:off x="954440" y="2454056"/>
+            <a:ext cx="560000" cy="560000"/>
+          </a:xfrm>
+          <a:prstGeom prst="rect">
+            <a:avLst/>
+          </a:prstGeom>
+        </p:spPr>
+      </p:pic>
+      <p:pic>
+        <p:nvPicPr>
+          <p:cNvPr id="95" name="Picture 94" descr="salt_spray_w.png"/>
+          <p:cNvPicPr>
+            <a:picLocks noChangeAspect="1"/>
+          </p:cNvPicPr>
+          <p:nvPr/>
+        </p:nvPicPr>
+        <p:blipFill>
+          <a:blip r:embed="rId3">
+            <a:extLst>
+              <a:ext uri="{96DAC541-7B7A-43D3-8B79-37D633B846F1}">
+                <ns1:svgBlip xmlns:ns1="http://schemas.microsoft.com/office/drawing/2016/SVG/main" r:embed="rId6"/>
+              </a:ext>
+            </a:extLst>
+          </a:blip>
+          <a:stretch>
+            <a:fillRect/>
+          </a:stretch>
+        </p:blipFill>
+        <p:spPr>
+          <a:xfrm>
+            <a:off x="954440" y="3752504"/>
+            <a:ext cx="560000" cy="560000"/>
+          </a:xfrm>
+          <a:prstGeom prst="rect">
+            <a:avLst/>
+          </a:prstGeom>
+        </p:spPr>
+      </p:pic>
+      <p:pic>
+        <p:nvPicPr>
+          <p:cNvPr id="96" name="Picture 95" descr="sun_uv_w.png"/>
+          <p:cNvPicPr>
+            <a:picLocks noChangeAspect="1"/>
+          </p:cNvPicPr>
+          <p:nvPr/>
+        </p:nvPicPr>
+        <p:blipFill>
+          <a:blip r:embed="rId4">
+            <a:extLst>
+              <a:ext uri="{96DAC541-7B7A-43D3-8B79-37D633B846F1}">
+                <ns2:svgBlip xmlns:ns2="http://schemas.microsoft.com/office/drawing/2016/SVG/main" r:embed="rId7"/>
+              </a:ext>
+            </a:extLst>
+          </a:blip>
+          <a:stretch>
+            <a:fillRect/>
+          </a:stretch>
+        </p:blipFill>
+        <p:spPr>
+          <a:xfrm>
+            <a:off x="954440" y="5050952"/>
+            <a:ext cx="560000" cy="560000"/>
+          </a:xfrm>
+          <a:prstGeom prst="rect">
+            <a:avLst/>
+          </a:prstGeom>
+        </p:spPr>
+      </p:pic>
     </p:spTree>
   </p:cSld>
   <p:clrMapOvr>
@@ -22547,7 +23147,7 @@
             </a:avLst>
           </a:prstGeom>
           <a:solidFill>
-            <a:srgbClr val="8C3B2E"/>
+            <a:srgbClr val="1F4E3D"/>
           </a:solidFill>
           <a:ln w="19050">
             <a:solidFill>
@@ -22595,7 +23195,7 @@
             </a:avLst>
           </a:prstGeom>
           <a:solidFill>
-            <a:srgbClr val="B56A3B"/>
+            <a:srgbClr val="3E8C6A"/>
           </a:solidFill>
           <a:ln w="19050">
             <a:solidFill>
@@ -22643,7 +23243,7 @@
             </a:avLst>
           </a:prstGeom>
           <a:solidFill>
-            <a:srgbClr val="4A4F54"/>
+            <a:srgbClr val="2C7A5A"/>
           </a:solidFill>
           <a:ln w="19050">
             <a:solidFill>
@@ -22739,7 +23339,7 @@
             </a:avLst>
           </a:prstGeom>
           <a:solidFill>
-            <a:srgbClr val="243B53"/>
+            <a:srgbClr val="14332A"/>
           </a:solidFill>
           <a:ln w="19050">
             <a:solidFill>
@@ -25869,7 +26469,7 @@
                 </a:solidFill>
                 <a:latin typeface="Cambria"/>
               </a:rPr>
-              <a:t>1</a:t>
+              <a:t/>
             </a:r>
           </a:p>
         </p:txBody>
@@ -26018,7 +26618,7 @@
                 </a:solidFill>
                 <a:latin typeface="Cambria"/>
               </a:rPr>
-              <a:t>2</a:t>
+              <a:t/>
             </a:r>
           </a:p>
         </p:txBody>
@@ -26167,7 +26767,7 @@
                 </a:solidFill>
                 <a:latin typeface="Cambria"/>
               </a:rPr>
-              <a:t>3</a:t>
+              <a:t/>
             </a:r>
           </a:p>
         </p:txBody>
@@ -26316,7 +26916,7 @@
                 </a:solidFill>
                 <a:latin typeface="Cambria"/>
               </a:rPr>
-              <a:t>4</a:t>
+              <a:t/>
             </a:r>
           </a:p>
         </p:txBody>
@@ -26465,7 +27065,7 @@
                 </a:solidFill>
                 <a:latin typeface="Cambria"/>
               </a:rPr>
-              <a:t>5</a:t>
+              <a:t/>
             </a:r>
           </a:p>
         </p:txBody>
@@ -26614,7 +27214,7 @@
                 </a:solidFill>
                 <a:latin typeface="Cambria"/>
               </a:rPr>
-              <a:t>6</a:t>
+              <a:t/>
             </a:r>
           </a:p>
         </p:txBody>
@@ -26724,6 +27324,186 @@
           </a:p>
         </p:txBody>
       </p:sp>
+      <p:pic>
+        <p:nvPicPr>
+          <p:cNvPr id="124" name="Picture 123" descr="company_w.png"/>
+          <p:cNvPicPr>
+            <a:picLocks noChangeAspect="1"/>
+          </p:cNvPicPr>
+          <p:nvPr/>
+        </p:nvPicPr>
+        <p:blipFill>
+          <a:blip r:embed="rId3">
+            <a:extLst>
+              <a:ext uri="{96DAC541-7B7A-43D3-8B79-37D633B846F1}">
+                <ns0:svgBlip xmlns:ns0="http://schemas.microsoft.com/office/drawing/2016/SVG/main" r:embed="rId9"/>
+              </a:ext>
+            </a:extLst>
+          </a:blip>
+          <a:stretch>
+            <a:fillRect/>
+          </a:stretch>
+        </p:blipFill>
+        <p:spPr>
+          <a:xfrm>
+            <a:off x="4638935" y="944759"/>
+            <a:ext cx="414771" cy="414771"/>
+          </a:xfrm>
+          <a:prstGeom prst="rect">
+            <a:avLst/>
+          </a:prstGeom>
+        </p:spPr>
+      </p:pic>
+      <p:pic>
+        <p:nvPicPr>
+          <p:cNvPr id="125" name="Picture 124" descr="materials_w.png"/>
+          <p:cNvPicPr>
+            <a:picLocks noChangeAspect="1"/>
+          </p:cNvPicPr>
+          <p:nvPr/>
+        </p:nvPicPr>
+        <p:blipFill>
+          <a:blip r:embed="rId4">
+            <a:extLst>
+              <a:ext uri="{96DAC541-7B7A-43D3-8B79-37D633B846F1}">
+                <ns1:svgBlip xmlns:ns1="http://schemas.microsoft.com/office/drawing/2016/SVG/main" r:embed="rId11"/>
+              </a:ext>
+            </a:extLst>
+          </a:blip>
+          <a:stretch>
+            <a:fillRect/>
+          </a:stretch>
+        </p:blipFill>
+        <p:spPr>
+          <a:xfrm>
+            <a:off x="4638935" y="1831727"/>
+            <a:ext cx="414771" cy="414771"/>
+          </a:xfrm>
+          <a:prstGeom prst="rect">
+            <a:avLst/>
+          </a:prstGeom>
+        </p:spPr>
+      </p:pic>
+      <p:pic>
+        <p:nvPicPr>
+          <p:cNvPr id="126" name="Picture 125" descr="gear_proc_w.png"/>
+          <p:cNvPicPr>
+            <a:picLocks noChangeAspect="1"/>
+          </p:cNvPicPr>
+          <p:nvPr/>
+        </p:nvPicPr>
+        <p:blipFill>
+          <a:blip r:embed="rId5">
+            <a:extLst>
+              <a:ext uri="{96DAC541-7B7A-43D3-8B79-37D633B846F1}">
+                <ns2:svgBlip xmlns:ns2="http://schemas.microsoft.com/office/drawing/2016/SVG/main" r:embed="rId10"/>
+              </a:ext>
+            </a:extLst>
+          </a:blip>
+          <a:stretch>
+            <a:fillRect/>
+          </a:stretch>
+        </p:blipFill>
+        <p:spPr>
+          <a:xfrm>
+            <a:off x="4638935" y="2718695"/>
+            <a:ext cx="414771" cy="414771"/>
+          </a:xfrm>
+          <a:prstGeom prst="rect">
+            <a:avLst/>
+          </a:prstGeom>
+        </p:spPr>
+      </p:pic>
+      <p:pic>
+        <p:nvPicPr>
+          <p:cNvPr id="127" name="Picture 126" descr="quality_check_w.png"/>
+          <p:cNvPicPr>
+            <a:picLocks noChangeAspect="1"/>
+          </p:cNvPicPr>
+          <p:nvPr/>
+        </p:nvPicPr>
+        <p:blipFill>
+          <a:blip r:embed="rId6">
+            <a:extLst>
+              <a:ext uri="{96DAC541-7B7A-43D3-8B79-37D633B846F1}">
+                <ns3:svgBlip xmlns:ns3="http://schemas.microsoft.com/office/drawing/2016/SVG/main" r:embed="rId12"/>
+              </a:ext>
+            </a:extLst>
+          </a:blip>
+          <a:stretch>
+            <a:fillRect/>
+          </a:stretch>
+        </p:blipFill>
+        <p:spPr>
+          <a:xfrm>
+            <a:off x="4638935" y="3605663"/>
+            <a:ext cx="414771" cy="414771"/>
+          </a:xfrm>
+          <a:prstGeom prst="rect">
+            <a:avLst/>
+          </a:prstGeom>
+        </p:spPr>
+      </p:pic>
+      <p:pic>
+        <p:nvPicPr>
+          <p:cNvPr id="128" name="Picture 127" descr="warning_tri_g.png"/>
+          <p:cNvPicPr>
+            <a:picLocks noChangeAspect="1"/>
+          </p:cNvPicPr>
+          <p:nvPr/>
+        </p:nvPicPr>
+        <p:blipFill>
+          <a:blip r:embed="rId7">
+            <a:extLst>
+              <a:ext uri="{96DAC541-7B7A-43D3-8B79-37D633B846F1}">
+                <ns4:svgBlip xmlns:ns4="http://schemas.microsoft.com/office/drawing/2016/SVG/main" r:embed="rId14"/>
+              </a:ext>
+            </a:extLst>
+          </a:blip>
+          <a:stretch>
+            <a:fillRect/>
+          </a:stretch>
+        </p:blipFill>
+        <p:spPr>
+          <a:xfrm>
+            <a:off x="4638935" y="4492631"/>
+            <a:ext cx="414771" cy="414771"/>
+          </a:xfrm>
+          <a:prstGeom prst="rect">
+            <a:avLst/>
+          </a:prstGeom>
+        </p:spPr>
+      </p:pic>
+      <p:pic>
+        <p:nvPicPr>
+          <p:cNvPr id="129" name="Picture 128" descr="safety_shield_w.png"/>
+          <p:cNvPicPr>
+            <a:picLocks noChangeAspect="1"/>
+          </p:cNvPicPr>
+          <p:nvPr/>
+        </p:nvPicPr>
+        <p:blipFill>
+          <a:blip r:embed="rId8">
+            <a:extLst>
+              <a:ext uri="{96DAC541-7B7A-43D3-8B79-37D633B846F1}">
+                <ns5:svgBlip xmlns:ns5="http://schemas.microsoft.com/office/drawing/2016/SVG/main" r:embed="rId13"/>
+              </a:ext>
+            </a:extLst>
+          </a:blip>
+          <a:stretch>
+            <a:fillRect/>
+          </a:stretch>
+        </p:blipFill>
+        <p:spPr>
+          <a:xfrm>
+            <a:off x="4638935" y="5379599"/>
+            <a:ext cx="414771" cy="414771"/>
+          </a:xfrm>
+          <a:prstGeom prst="rect">
+            <a:avLst/>
+          </a:prstGeom>
+        </p:spPr>
+      </p:pic>
     </p:spTree>
   </p:cSld>
   <p:clrMapOvr>
@@ -31354,7 +32134,7 @@
             </a:avLst>
           </a:prstGeom>
           <a:solidFill>
-            <a:srgbClr val="8C3B2E"/>
+            <a:srgbClr val="1F4E3D"/>
           </a:solidFill>
           <a:ln w="19050">
             <a:solidFill>
@@ -31402,7 +32182,7 @@
             </a:avLst>
           </a:prstGeom>
           <a:solidFill>
-            <a:srgbClr val="B56A3B"/>
+            <a:srgbClr val="3E8C6A"/>
           </a:solidFill>
           <a:ln w="19050">
             <a:solidFill>
@@ -31450,7 +32230,7 @@
             </a:avLst>
           </a:prstGeom>
           <a:solidFill>
-            <a:srgbClr val="4A4F54"/>
+            <a:srgbClr val="2C7A5A"/>
           </a:solidFill>
           <a:ln w="19050">
             <a:solidFill>
@@ -31546,7 +32326,7 @@
             </a:avLst>
           </a:prstGeom>
           <a:solidFill>
-            <a:srgbClr val="243B53"/>
+            <a:srgbClr val="14332A"/>
           </a:solidFill>
           <a:ln w="19050">
             <a:solidFill>
@@ -32233,7 +33013,7 @@
                 </a:solidFill>
                 <a:latin typeface="Cambria"/>
               </a:rPr>
-              <a:t>!</a:t>
+              <a:t/>
             </a:r>
           </a:p>
         </p:txBody>
@@ -32495,7 +33275,7 @@
                 </a:solidFill>
                 <a:latin typeface="Cambria"/>
               </a:rPr>
-              <a:t>!</a:t>
+              <a:t/>
             </a:r>
           </a:p>
         </p:txBody>
@@ -32757,7 +33537,7 @@
                 </a:solidFill>
                 <a:latin typeface="Cambria"/>
               </a:rPr>
-              <a:t>!</a:t>
+              <a:t/>
             </a:r>
           </a:p>
         </p:txBody>
@@ -33019,7 +33799,7 @@
                 </a:solidFill>
                 <a:latin typeface="Cambria"/>
               </a:rPr>
-              <a:t>!</a:t>
+              <a:t/>
             </a:r>
           </a:p>
         </p:txBody>
@@ -33229,6 +34009,126 @@
           </a:p>
         </p:txBody>
       </p:sp>
+      <p:pic>
+        <p:nvPicPr>
+          <p:cNvPr id="104" name="Picture 103" descr="flame_g.png"/>
+          <p:cNvPicPr>
+            <a:picLocks noChangeAspect="1"/>
+          </p:cNvPicPr>
+          <p:nvPr/>
+        </p:nvPicPr>
+        <p:blipFill>
+          <a:blip r:embed="rId2">
+            <a:extLst>
+              <a:ext uri="{96DAC541-7B7A-43D3-8B79-37D633B846F1}">
+                <ns0:svgBlip xmlns:ns0="http://schemas.microsoft.com/office/drawing/2016/SVG/main" r:embed="rId7"/>
+              </a:ext>
+            </a:extLst>
+          </a:blip>
+          <a:stretch>
+            <a:fillRect/>
+          </a:stretch>
+        </p:blipFill>
+        <p:spPr>
+          <a:xfrm>
+            <a:off x="925373" y="1931213"/>
+            <a:ext cx="307238" cy="307238"/>
+          </a:xfrm>
+          <a:prstGeom prst="rect">
+            <a:avLst/>
+          </a:prstGeom>
+        </p:spPr>
+      </p:pic>
+      <p:pic>
+        <p:nvPicPr>
+          <p:cNvPr id="105" name="Picture 104" descr="gasmask_g.png"/>
+          <p:cNvPicPr>
+            <a:picLocks noChangeAspect="1"/>
+          </p:cNvPicPr>
+          <p:nvPr/>
+        </p:nvPicPr>
+        <p:blipFill>
+          <a:blip r:embed="rId3">
+            <a:extLst>
+              <a:ext uri="{96DAC541-7B7A-43D3-8B79-37D633B846F1}">
+                <ns1:svgBlip xmlns:ns1="http://schemas.microsoft.com/office/drawing/2016/SVG/main" r:embed="rId8"/>
+              </a:ext>
+            </a:extLst>
+          </a:blip>
+          <a:stretch>
+            <a:fillRect/>
+          </a:stretch>
+        </p:blipFill>
+        <p:spPr>
+          <a:xfrm>
+            <a:off x="6548933" y="1931213"/>
+            <a:ext cx="307238" cy="307238"/>
+          </a:xfrm>
+          <a:prstGeom prst="rect">
+            <a:avLst/>
+          </a:prstGeom>
+        </p:spPr>
+      </p:pic>
+      <p:pic>
+        <p:nvPicPr>
+          <p:cNvPr id="106" name="Picture 105" descr="chemical_glove_g.png"/>
+          <p:cNvPicPr>
+            <a:picLocks noChangeAspect="1"/>
+          </p:cNvPicPr>
+          <p:nvPr/>
+        </p:nvPicPr>
+        <p:blipFill>
+          <a:blip r:embed="rId4">
+            <a:extLst>
+              <a:ext uri="{96DAC541-7B7A-43D3-8B79-37D633B846F1}">
+                <ns2:svgBlip xmlns:ns2="http://schemas.microsoft.com/office/drawing/2016/SVG/main" r:embed="rId6"/>
+              </a:ext>
+            </a:extLst>
+          </a:blip>
+          <a:stretch>
+            <a:fillRect/>
+          </a:stretch>
+        </p:blipFill>
+        <p:spPr>
+          <a:xfrm>
+            <a:off x="925373" y="4171493"/>
+            <a:ext cx="307238" cy="307238"/>
+          </a:xfrm>
+          <a:prstGeom prst="rect">
+            <a:avLst/>
+          </a:prstGeom>
+        </p:spPr>
+      </p:pic>
+      <p:pic>
+        <p:nvPicPr>
+          <p:cNvPr id="107" name="Picture 106" descr="gear_proc_g.png"/>
+          <p:cNvPicPr>
+            <a:picLocks noChangeAspect="1"/>
+          </p:cNvPicPr>
+          <p:nvPr/>
+        </p:nvPicPr>
+        <p:blipFill>
+          <a:blip r:embed="rId5">
+            <a:extLst>
+              <a:ext uri="{96DAC541-7B7A-43D3-8B79-37D633B846F1}">
+                <ns3:svgBlip xmlns:ns3="http://schemas.microsoft.com/office/drawing/2016/SVG/main" r:embed="rId9"/>
+              </a:ext>
+            </a:extLst>
+          </a:blip>
+          <a:stretch>
+            <a:fillRect/>
+          </a:stretch>
+        </p:blipFill>
+        <p:spPr>
+          <a:xfrm>
+            <a:off x="6548933" y="4171493"/>
+            <a:ext cx="307238" cy="307238"/>
+          </a:xfrm>
+          <a:prstGeom prst="rect">
+            <a:avLst/>
+          </a:prstGeom>
+        </p:spPr>
+      </p:pic>
     </p:spTree>
   </p:cSld>
   <p:clrMapOvr>
@@ -35017,8 +35917,8 @@
         </p:nvSpPr>
         <p:spPr>
           <a:xfrm>
-            <a:off x="731520" y="1664207"/>
-            <a:ext cx="2606040" cy="1152144"/>
+            <a:off x="1351520" y="1664207"/>
+            <a:ext cx="1986040" cy="1152144"/>
           </a:xfrm>
           <a:prstGeom prst="rect">
             <a:avLst/>
@@ -35273,8 +36173,8 @@
         </p:nvSpPr>
         <p:spPr>
           <a:xfrm>
-            <a:off x="731520" y="3145536"/>
-            <a:ext cx="2606040" cy="1152144"/>
+            <a:off x="1351520" y="3145536"/>
+            <a:ext cx="1986040" cy="1152144"/>
           </a:xfrm>
           <a:prstGeom prst="rect">
             <a:avLst/>
@@ -35529,8 +36429,8 @@
         </p:nvSpPr>
         <p:spPr>
           <a:xfrm>
-            <a:off x="731520" y="4626864"/>
-            <a:ext cx="2606040" cy="1152144"/>
+            <a:off x="1351520" y="4626864"/>
+            <a:ext cx="1986040" cy="1152144"/>
           </a:xfrm>
           <a:prstGeom prst="rect">
             <a:avLst/>
@@ -35713,6 +36613,96 @@
           </a:p>
         </p:txBody>
       </p:sp>
+      <p:pic>
+        <p:nvPicPr>
+          <p:cNvPr id="64" name="Picture 63" descr="smoke_air_w.png"/>
+          <p:cNvPicPr>
+            <a:picLocks noChangeAspect="1"/>
+          </p:cNvPicPr>
+          <p:nvPr/>
+        </p:nvPicPr>
+        <p:blipFill>
+          <a:blip r:embed="rId2">
+            <a:extLst>
+              <a:ext uri="{96DAC541-7B7A-43D3-8B79-37D633B846F1}">
+                <ns0:svgBlip xmlns:ns0="http://schemas.microsoft.com/office/drawing/2016/SVG/main" r:embed="rId5"/>
+              </a:ext>
+            </a:extLst>
+          </a:blip>
+          <a:stretch>
+            <a:fillRect/>
+          </a:stretch>
+        </p:blipFill>
+        <p:spPr>
+          <a:xfrm>
+            <a:off x="698640" y="2000280"/>
+            <a:ext cx="480000" cy="480000"/>
+          </a:xfrm>
+          <a:prstGeom prst="rect">
+            <a:avLst/>
+          </a:prstGeom>
+        </p:spPr>
+      </p:pic>
+      <p:pic>
+        <p:nvPicPr>
+          <p:cNvPr id="65" name="Picture 64" descr="water_waste_w.png"/>
+          <p:cNvPicPr>
+            <a:picLocks noChangeAspect="1"/>
+          </p:cNvPicPr>
+          <p:nvPr/>
+        </p:nvPicPr>
+        <p:blipFill>
+          <a:blip r:embed="rId3">
+            <a:extLst>
+              <a:ext uri="{96DAC541-7B7A-43D3-8B79-37D633B846F1}">
+                <ns1:svgBlip xmlns:ns1="http://schemas.microsoft.com/office/drawing/2016/SVG/main" r:embed="rId7"/>
+              </a:ext>
+            </a:extLst>
+          </a:blip>
+          <a:stretch>
+            <a:fillRect/>
+          </a:stretch>
+        </p:blipFill>
+        <p:spPr>
+          <a:xfrm>
+            <a:off x="698640" y="3481608"/>
+            <a:ext cx="480000" cy="480000"/>
+          </a:xfrm>
+          <a:prstGeom prst="rect">
+            <a:avLst/>
+          </a:prstGeom>
+        </p:spPr>
+      </p:pic>
+      <p:pic>
+        <p:nvPicPr>
+          <p:cNvPr id="66" name="Picture 65" descr="solid_waste_w.png"/>
+          <p:cNvPicPr>
+            <a:picLocks noChangeAspect="1"/>
+          </p:cNvPicPr>
+          <p:nvPr/>
+        </p:nvPicPr>
+        <p:blipFill>
+          <a:blip r:embed="rId4">
+            <a:extLst>
+              <a:ext uri="{96DAC541-7B7A-43D3-8B79-37D633B846F1}">
+                <ns2:svgBlip xmlns:ns2="http://schemas.microsoft.com/office/drawing/2016/SVG/main" r:embed="rId6"/>
+              </a:ext>
+            </a:extLst>
+          </a:blip>
+          <a:stretch>
+            <a:fillRect/>
+          </a:stretch>
+        </p:blipFill>
+        <p:spPr>
+          <a:xfrm>
+            <a:off x="698640" y="4962936"/>
+            <a:ext cx="480000" cy="480000"/>
+          </a:xfrm>
+          <a:prstGeom prst="rect">
+            <a:avLst/>
+          </a:prstGeom>
+        </p:spPr>
+      </p:pic>
     </p:spTree>
   </p:cSld>
   <p:clrMapOvr>
@@ -36724,7 +37714,7 @@
                 </a:solidFill>
                 <a:latin typeface="Cambria"/>
               </a:rPr>
-              <a:t>1</a:t>
+              <a:t/>
             </a:r>
           </a:p>
         </p:txBody>
@@ -36904,7 +37894,7 @@
                 </a:solidFill>
                 <a:latin typeface="Cambria"/>
               </a:rPr>
-              <a:t>2</a:t>
+              <a:t/>
             </a:r>
           </a:p>
         </p:txBody>
@@ -37084,7 +38074,7 @@
                 </a:solidFill>
                 <a:latin typeface="Cambria"/>
               </a:rPr>
-              <a:t>3</a:t>
+              <a:t/>
             </a:r>
           </a:p>
         </p:txBody>
@@ -37179,6 +38169,96 @@
           </a:p>
         </p:txBody>
       </p:sp>
+      <p:pic>
+        <p:nvPicPr>
+          <p:cNvPr id="49" name="Picture 48" descr="grad_check_g.png"/>
+          <p:cNvPicPr>
+            <a:picLocks noChangeAspect="1"/>
+          </p:cNvPicPr>
+          <p:nvPr/>
+        </p:nvPicPr>
+        <p:blipFill>
+          <a:blip r:embed="rId2">
+            <a:extLst>
+              <a:ext uri="{96DAC541-7B7A-43D3-8B79-37D633B846F1}">
+                <ns0:svgBlip xmlns:ns0="http://schemas.microsoft.com/office/drawing/2016/SVG/main" r:embed="rId5"/>
+              </a:ext>
+            </a:extLst>
+          </a:blip>
+          <a:stretch>
+            <a:fillRect/>
+          </a:stretch>
+        </p:blipFill>
+        <p:spPr>
+          <a:xfrm>
+            <a:off x="1182320" y="2462480"/>
+            <a:ext cx="332841" cy="332841"/>
+          </a:xfrm>
+          <a:prstGeom prst="rect">
+            <a:avLst/>
+          </a:prstGeom>
+        </p:spPr>
+      </p:pic>
+      <p:pic>
+        <p:nvPicPr>
+          <p:cNvPr id="50" name="Picture 49" descr="palette_g.png"/>
+          <p:cNvPicPr>
+            <a:picLocks noChangeAspect="1"/>
+          </p:cNvPicPr>
+          <p:nvPr/>
+        </p:nvPicPr>
+        <p:blipFill>
+          <a:blip r:embed="rId3">
+            <a:extLst>
+              <a:ext uri="{96DAC541-7B7A-43D3-8B79-37D633B846F1}">
+                <ns1:svgBlip xmlns:ns1="http://schemas.microsoft.com/office/drawing/2016/SVG/main" r:embed="rId6"/>
+              </a:ext>
+            </a:extLst>
+          </a:blip>
+          <a:stretch>
+            <a:fillRect/>
+          </a:stretch>
+        </p:blipFill>
+        <p:spPr>
+          <a:xfrm>
+            <a:off x="1182320" y="3834080"/>
+            <a:ext cx="332841" cy="332841"/>
+          </a:xfrm>
+          <a:prstGeom prst="rect">
+            <a:avLst/>
+          </a:prstGeom>
+        </p:spPr>
+      </p:pic>
+      <p:pic>
+        <p:nvPicPr>
+          <p:cNvPr id="51" name="Picture 50" descr="qr_code_g.png"/>
+          <p:cNvPicPr>
+            <a:picLocks noChangeAspect="1"/>
+          </p:cNvPicPr>
+          <p:nvPr/>
+        </p:nvPicPr>
+        <p:blipFill>
+          <a:blip r:embed="rId4">
+            <a:extLst>
+              <a:ext uri="{96DAC541-7B7A-43D3-8B79-37D633B846F1}">
+                <ns2:svgBlip xmlns:ns2="http://schemas.microsoft.com/office/drawing/2016/SVG/main" r:embed="rId7"/>
+              </a:ext>
+            </a:extLst>
+          </a:blip>
+          <a:stretch>
+            <a:fillRect/>
+          </a:stretch>
+        </p:blipFill>
+        <p:spPr>
+          <a:xfrm>
+            <a:off x="1182320" y="5205680"/>
+            <a:ext cx="332841" cy="332841"/>
+          </a:xfrm>
+          <a:prstGeom prst="rect">
+            <a:avLst/>
+          </a:prstGeom>
+        </p:spPr>
+      </p:pic>
     </p:spTree>
   </p:cSld>
   <p:clrMapOvr>
@@ -38682,8 +39762,8 @@
         </p:nvSpPr>
         <p:spPr>
           <a:xfrm>
-            <a:off x="5029200" y="1600200"/>
-            <a:ext cx="6400800" cy="457200"/>
+            <a:off x="5589200" y="1600200"/>
+            <a:ext cx="5840800" cy="457200"/>
           </a:xfrm>
           <a:prstGeom prst="rect">
             <a:avLst/>
@@ -38717,8 +39797,8 @@
         </p:nvSpPr>
         <p:spPr>
           <a:xfrm>
-            <a:off x="5029200" y="2057400"/>
-            <a:ext cx="6400800" cy="640080"/>
+            <a:off x="5589200" y="2057400"/>
+            <a:ext cx="5840800" cy="640080"/>
           </a:xfrm>
           <a:prstGeom prst="rect">
             <a:avLst/>
@@ -38850,8 +39930,8 @@
         </p:nvSpPr>
         <p:spPr>
           <a:xfrm>
-            <a:off x="5029200" y="3182112"/>
-            <a:ext cx="6400800" cy="457200"/>
+            <a:off x="5589200" y="3182112"/>
+            <a:ext cx="5840800" cy="457200"/>
           </a:xfrm>
           <a:prstGeom prst="rect">
             <a:avLst/>
@@ -38885,8 +39965,8 @@
         </p:nvSpPr>
         <p:spPr>
           <a:xfrm>
-            <a:off x="5029200" y="3639312"/>
-            <a:ext cx="6400800" cy="640080"/>
+            <a:off x="5589200" y="3639312"/>
+            <a:ext cx="5840800" cy="640080"/>
           </a:xfrm>
           <a:prstGeom prst="rect">
             <a:avLst/>
@@ -39018,8 +40098,8 @@
         </p:nvSpPr>
         <p:spPr>
           <a:xfrm>
-            <a:off x="5029200" y="4764024"/>
-            <a:ext cx="6400800" cy="457200"/>
+            <a:off x="5589200" y="4764024"/>
+            <a:ext cx="5840800" cy="457200"/>
           </a:xfrm>
           <a:prstGeom prst="rect">
             <a:avLst/>
@@ -39053,8 +40133,8 @@
         </p:nvSpPr>
         <p:spPr>
           <a:xfrm>
-            <a:off x="5029200" y="5221224"/>
-            <a:ext cx="6400800" cy="640080"/>
+            <a:off x="5589200" y="5221224"/>
+            <a:ext cx="5840800" cy="640080"/>
           </a:xfrm>
           <a:prstGeom prst="rect">
             <a:avLst/>
@@ -39119,6 +40199,96 @@
           </a:p>
         </p:txBody>
       </p:sp>
+      <p:pic>
+        <p:nvPicPr>
+          <p:cNvPr id="64" name="Picture 63" descr="history_clock_g.png"/>
+          <p:cNvPicPr>
+            <a:picLocks noChangeAspect="1"/>
+          </p:cNvPicPr>
+          <p:nvPr/>
+        </p:nvPicPr>
+        <p:blipFill>
+          <a:blip r:embed="rId3">
+            <a:extLst>
+              <a:ext uri="{96DAC541-7B7A-43D3-8B79-37D633B846F1}">
+                <ns0:svgBlip xmlns:ns0="http://schemas.microsoft.com/office/drawing/2016/SVG/main" r:embed="rId7"/>
+              </a:ext>
+            </a:extLst>
+          </a:blip>
+          <a:stretch>
+            <a:fillRect/>
+          </a:stretch>
+        </p:blipFill>
+        <p:spPr>
+          <a:xfrm>
+            <a:off x="4813440" y="1905980"/>
+            <a:ext cx="440000" cy="440000"/>
+          </a:xfrm>
+          <a:prstGeom prst="rect">
+            <a:avLst/>
+          </a:prstGeom>
+        </p:spPr>
+      </p:pic>
+      <p:pic>
+        <p:nvPicPr>
+          <p:cNvPr id="65" name="Picture 64" descr="paint_can_g.png"/>
+          <p:cNvPicPr>
+            <a:picLocks noChangeAspect="1"/>
+          </p:cNvPicPr>
+          <p:nvPr/>
+        </p:nvPicPr>
+        <p:blipFill>
+          <a:blip r:embed="rId4">
+            <a:extLst>
+              <a:ext uri="{96DAC541-7B7A-43D3-8B79-37D633B846F1}">
+                <ns1:svgBlip xmlns:ns1="http://schemas.microsoft.com/office/drawing/2016/SVG/main" r:embed="rId8"/>
+              </a:ext>
+            </a:extLst>
+          </a:blip>
+          <a:stretch>
+            <a:fillRect/>
+          </a:stretch>
+        </p:blipFill>
+        <p:spPr>
+          <a:xfrm>
+            <a:off x="4813440" y="3487892"/>
+            <a:ext cx="440000" cy="440000"/>
+          </a:xfrm>
+          <a:prstGeom prst="rect">
+            <a:avLst/>
+          </a:prstGeom>
+        </p:spPr>
+      </p:pic>
+      <p:pic>
+        <p:nvPicPr>
+          <p:cNvPr id="66" name="Picture 65" descr="factory_g.png"/>
+          <p:cNvPicPr>
+            <a:picLocks noChangeAspect="1"/>
+          </p:cNvPicPr>
+          <p:nvPr/>
+        </p:nvPicPr>
+        <p:blipFill>
+          <a:blip r:embed="rId5">
+            <a:extLst>
+              <a:ext uri="{96DAC541-7B7A-43D3-8B79-37D633B846F1}">
+                <ns2:svgBlip xmlns:ns2="http://schemas.microsoft.com/office/drawing/2016/SVG/main" r:embed="rId6"/>
+              </a:ext>
+            </a:extLst>
+          </a:blip>
+          <a:stretch>
+            <a:fillRect/>
+          </a:stretch>
+        </p:blipFill>
+        <p:spPr>
+          <a:xfrm>
+            <a:off x="4813440" y="5069804"/>
+            <a:ext cx="440000" cy="440000"/>
+          </a:xfrm>
+          <a:prstGeom prst="rect">
+            <a:avLst/>
+          </a:prstGeom>
+        </p:spPr>
+      </p:pic>
     </p:spTree>
   </p:cSld>
   <p:clrMapOvr>
@@ -40339,8 +41509,8 @@
         </p:nvSpPr>
         <p:spPr>
           <a:xfrm>
-            <a:off x="804672" y="1554480"/>
-            <a:ext cx="3154680" cy="777240"/>
+            <a:off x="1324672" y="1554480"/>
+            <a:ext cx="2634680" cy="777240"/>
           </a:xfrm>
           <a:prstGeom prst="rect">
             <a:avLst/>
@@ -40658,8 +41828,8 @@
         </p:nvSpPr>
         <p:spPr>
           <a:xfrm>
-            <a:off x="4672584" y="1554480"/>
-            <a:ext cx="3154680" cy="777240"/>
+            <a:off x="5192584" y="1554480"/>
+            <a:ext cx="2634680" cy="777240"/>
           </a:xfrm>
           <a:prstGeom prst="rect">
             <a:avLst/>
@@ -40977,8 +42147,8 @@
         </p:nvSpPr>
         <p:spPr>
           <a:xfrm>
-            <a:off x="8540496" y="1554480"/>
-            <a:ext cx="3154680" cy="777240"/>
+            <a:off x="9060496" y="1554480"/>
+            <a:ext cx="2634680" cy="777240"/>
           </a:xfrm>
           <a:prstGeom prst="rect">
             <a:avLst/>
@@ -41220,6 +42390,96 @@
           </a:p>
         </p:txBody>
       </p:sp>
+      <p:pic>
+        <p:nvPicPr>
+          <p:cNvPr id="94" name="Picture 93" descr="target_w.png"/>
+          <p:cNvPicPr>
+            <a:picLocks noChangeAspect="1"/>
+          </p:cNvPicPr>
+          <p:nvPr/>
+        </p:nvPicPr>
+        <p:blipFill>
+          <a:blip r:embed="rId2">
+            <a:extLst>
+              <a:ext uri="{96DAC541-7B7A-43D3-8B79-37D633B846F1}">
+                <ns0:svgBlip xmlns:ns0="http://schemas.microsoft.com/office/drawing/2016/SVG/main" r:embed="rId7"/>
+              </a:ext>
+            </a:extLst>
+          </a:blip>
+          <a:stretch>
+            <a:fillRect/>
+          </a:stretch>
+        </p:blipFill>
+        <p:spPr>
+          <a:xfrm>
+            <a:off x="698640" y="1728100"/>
+            <a:ext cx="430000" cy="430000"/>
+          </a:xfrm>
+          <a:prstGeom prst="rect">
+            <a:avLst/>
+          </a:prstGeom>
+        </p:spPr>
+      </p:pic>
+      <p:pic>
+        <p:nvPicPr>
+          <p:cNvPr id="95" name="Picture 94" descr="org_chart_w.png"/>
+          <p:cNvPicPr>
+            <a:picLocks noChangeAspect="1"/>
+          </p:cNvPicPr>
+          <p:nvPr/>
+        </p:nvPicPr>
+        <p:blipFill>
+          <a:blip r:embed="rId3">
+            <a:extLst>
+              <a:ext uri="{96DAC541-7B7A-43D3-8B79-37D633B846F1}">
+                <ns1:svgBlip xmlns:ns1="http://schemas.microsoft.com/office/drawing/2016/SVG/main" r:embed="rId6"/>
+              </a:ext>
+            </a:extLst>
+          </a:blip>
+          <a:stretch>
+            <a:fillRect/>
+          </a:stretch>
+        </p:blipFill>
+        <p:spPr>
+          <a:xfrm>
+            <a:off x="4566552" y="1728100"/>
+            <a:ext cx="430000" cy="430000"/>
+          </a:xfrm>
+          <a:prstGeom prst="rect">
+            <a:avLst/>
+          </a:prstGeom>
+        </p:spPr>
+      </p:pic>
+      <p:pic>
+        <p:nvPicPr>
+          <p:cNvPr id="96" name="Picture 95" descr="customers_w.png"/>
+          <p:cNvPicPr>
+            <a:picLocks noChangeAspect="1"/>
+          </p:cNvPicPr>
+          <p:nvPr/>
+        </p:nvPicPr>
+        <p:blipFill>
+          <a:blip r:embed="rId4">
+            <a:extLst>
+              <a:ext uri="{96DAC541-7B7A-43D3-8B79-37D633B846F1}">
+                <ns2:svgBlip xmlns:ns2="http://schemas.microsoft.com/office/drawing/2016/SVG/main" r:embed="rId5"/>
+              </a:ext>
+            </a:extLst>
+          </a:blip>
+          <a:stretch>
+            <a:fillRect/>
+          </a:stretch>
+        </p:blipFill>
+        <p:spPr>
+          <a:xfrm>
+            <a:off x="8434464" y="1728100"/>
+            <a:ext cx="430000" cy="430000"/>
+          </a:xfrm>
+          <a:prstGeom prst="rect">
+            <a:avLst/>
+          </a:prstGeom>
+        </p:spPr>
+      </p:pic>
     </p:spTree>
   </p:cSld>
   <p:clrMapOvr>
@@ -43213,7 +44473,7 @@
                 </a:solidFill>
                 <a:latin typeface="Cambria"/>
               </a:rPr>
-              <a:t>1</a:t>
+              <a:t/>
             </a:r>
           </a:p>
         </p:txBody>
@@ -43495,7 +44755,7 @@
                 </a:solidFill>
                 <a:latin typeface="Cambria"/>
               </a:rPr>
-              <a:t>2</a:t>
+              <a:t/>
             </a:r>
           </a:p>
         </p:txBody>
@@ -43777,7 +45037,7 @@
                 </a:solidFill>
                 <a:latin typeface="Cambria"/>
               </a:rPr>
-              <a:t>3</a:t>
+              <a:t/>
             </a:r>
           </a:p>
         </p:txBody>
@@ -44059,7 +45319,7 @@
                 </a:solidFill>
                 <a:latin typeface="Cambria"/>
               </a:rPr>
-              <a:t>4</a:t>
+              <a:t/>
             </a:r>
           </a:p>
         </p:txBody>
@@ -44293,6 +45553,126 @@
           </a:p>
         </p:txBody>
       </p:sp>
+      <p:pic>
+        <p:nvPicPr>
+          <p:cNvPr id="84" name="Picture 83" descr="resin_w.png"/>
+          <p:cNvPicPr>
+            <a:picLocks noChangeAspect="1"/>
+          </p:cNvPicPr>
+          <p:nvPr/>
+        </p:nvPicPr>
+        <p:blipFill>
+          <a:blip r:embed="rId2">
+            <a:extLst>
+              <a:ext uri="{96DAC541-7B7A-43D3-8B79-37D633B846F1}">
+                <ns0:svgBlip xmlns:ns0="http://schemas.microsoft.com/office/drawing/2016/SVG/main" r:embed="rId8"/>
+              </a:ext>
+            </a:extLst>
+          </a:blip>
+          <a:stretch>
+            <a:fillRect/>
+          </a:stretch>
+        </p:blipFill>
+        <p:spPr>
+          <a:xfrm>
+            <a:off x="918058" y="1814170"/>
+            <a:ext cx="358444" cy="358444"/>
+          </a:xfrm>
+          <a:prstGeom prst="rect">
+            <a:avLst/>
+          </a:prstGeom>
+        </p:spPr>
+      </p:pic>
+      <p:pic>
+        <p:nvPicPr>
+          <p:cNvPr id="85" name="Picture 84" descr="solvent_w.png"/>
+          <p:cNvPicPr>
+            <a:picLocks noChangeAspect="1"/>
+          </p:cNvPicPr>
+          <p:nvPr/>
+        </p:nvPicPr>
+        <p:blipFill>
+          <a:blip r:embed="rId3">
+            <a:extLst>
+              <a:ext uri="{96DAC541-7B7A-43D3-8B79-37D633B846F1}">
+                <ns1:svgBlip xmlns:ns1="http://schemas.microsoft.com/office/drawing/2016/SVG/main" r:embed="rId9"/>
+              </a:ext>
+            </a:extLst>
+          </a:blip>
+          <a:stretch>
+            <a:fillRect/>
+          </a:stretch>
+        </p:blipFill>
+        <p:spPr>
+          <a:xfrm>
+            <a:off x="918058" y="2948026"/>
+            <a:ext cx="358444" cy="358444"/>
+          </a:xfrm>
+          <a:prstGeom prst="rect">
+            <a:avLst/>
+          </a:prstGeom>
+        </p:spPr>
+      </p:pic>
+      <p:pic>
+        <p:nvPicPr>
+          <p:cNvPr id="86" name="Picture 85" descr="pigment_g.png"/>
+          <p:cNvPicPr>
+            <a:picLocks noChangeAspect="1"/>
+          </p:cNvPicPr>
+          <p:nvPr/>
+        </p:nvPicPr>
+        <p:blipFill>
+          <a:blip r:embed="rId4">
+            <a:extLst>
+              <a:ext uri="{96DAC541-7B7A-43D3-8B79-37D633B846F1}">
+                <ns2:svgBlip xmlns:ns2="http://schemas.microsoft.com/office/drawing/2016/SVG/main" r:embed="rId7"/>
+              </a:ext>
+            </a:extLst>
+          </a:blip>
+          <a:stretch>
+            <a:fillRect/>
+          </a:stretch>
+        </p:blipFill>
+        <p:spPr>
+          <a:xfrm>
+            <a:off x="918058" y="4081882"/>
+            <a:ext cx="358444" cy="358444"/>
+          </a:xfrm>
+          <a:prstGeom prst="rect">
+            <a:avLst/>
+          </a:prstGeom>
+        </p:spPr>
+      </p:pic>
+      <p:pic>
+        <p:nvPicPr>
+          <p:cNvPr id="87" name="Picture 86" descr="additive_w.png"/>
+          <p:cNvPicPr>
+            <a:picLocks noChangeAspect="1"/>
+          </p:cNvPicPr>
+          <p:nvPr/>
+        </p:nvPicPr>
+        <p:blipFill>
+          <a:blip r:embed="rId5">
+            <a:extLst>
+              <a:ext uri="{96DAC541-7B7A-43D3-8B79-37D633B846F1}">
+                <ns3:svgBlip xmlns:ns3="http://schemas.microsoft.com/office/drawing/2016/SVG/main" r:embed="rId6"/>
+              </a:ext>
+            </a:extLst>
+          </a:blip>
+          <a:stretch>
+            <a:fillRect/>
+          </a:stretch>
+        </p:blipFill>
+        <p:spPr>
+          <a:xfrm>
+            <a:off x="918058" y="5215738"/>
+            <a:ext cx="358444" cy="358444"/>
+          </a:xfrm>
+          <a:prstGeom prst="rect">
+            <a:avLst/>
+          </a:prstGeom>
+        </p:spPr>
+      </p:pic>
     </p:spTree>
   </p:cSld>
   <p:clrMapOvr>

--- a/SuHeo/Báo cáo thực tập - Sơn Hải Vân.pptx
+++ b/SuHeo/Báo cáo thực tập - Sơn Hải Vân.pptx
@@ -6518,6 +6518,186 @@
           </a:prstGeom>
         </p:spPr>
       </p:pic>
+      <p:pic>
+        <p:nvPicPr>
+          <p:cNvPr id="125" name="Picture 124" descr="image.png"/>
+          <p:cNvPicPr>
+            <a:picLocks noChangeAspect="1"/>
+          </p:cNvPicPr>
+          <p:nvPr/>
+        </p:nvPicPr>
+        <p:blipFill>
+          <a:blip r:embed="rId2">
+            <a:extLst>
+              <a:ext uri="{96DAC541-7B7A-43D3-8B79-37D633B846F1}">
+                <ns0:svgBlip xmlns:ns0="http://schemas.microsoft.com/office/drawing/2016/SVG/main" r:embed="rId15"/>
+              </a:ext>
+            </a:extLst>
+          </a:blip>
+          <a:stretch>
+            <a:fillRect/>
+          </a:stretch>
+        </p:blipFill>
+        <p:spPr>
+          <a:xfrm>
+            <a:off x="1018740" y="2496000"/>
+            <a:ext cx="660000" cy="660000"/>
+          </a:xfrm>
+          <a:prstGeom prst="rect">
+            <a:avLst/>
+          </a:prstGeom>
+        </p:spPr>
+      </p:pic>
+      <p:pic>
+        <p:nvPicPr>
+          <p:cNvPr id="126" name="Picture 125" descr="image.png"/>
+          <p:cNvPicPr>
+            <a:picLocks noChangeAspect="1"/>
+          </p:cNvPicPr>
+          <p:nvPr/>
+        </p:nvPicPr>
+        <p:blipFill>
+          <a:blip r:embed="rId3">
+            <a:extLst>
+              <a:ext uri="{96DAC541-7B7A-43D3-8B79-37D633B846F1}">
+                <ns1:svgBlip xmlns:ns1="http://schemas.microsoft.com/office/drawing/2016/SVG/main" r:embed="rId14"/>
+              </a:ext>
+            </a:extLst>
+          </a:blip>
+          <a:stretch>
+            <a:fillRect/>
+          </a:stretch>
+        </p:blipFill>
+        <p:spPr>
+          <a:xfrm>
+            <a:off x="2874972" y="2496000"/>
+            <a:ext cx="660000" cy="660000"/>
+          </a:xfrm>
+          <a:prstGeom prst="rect">
+            <a:avLst/>
+          </a:prstGeom>
+        </p:spPr>
+      </p:pic>
+      <p:pic>
+        <p:nvPicPr>
+          <p:cNvPr id="127" name="Picture 126" descr="image.png"/>
+          <p:cNvPicPr>
+            <a:picLocks noChangeAspect="1"/>
+          </p:cNvPicPr>
+          <p:nvPr/>
+        </p:nvPicPr>
+        <p:blipFill>
+          <a:blip r:embed="rId4">
+            <a:extLst>
+              <a:ext uri="{96DAC541-7B7A-43D3-8B79-37D633B846F1}">
+                <ns2:svgBlip xmlns:ns2="http://schemas.microsoft.com/office/drawing/2016/SVG/main" r:embed="rId18"/>
+              </a:ext>
+            </a:extLst>
+          </a:blip>
+          <a:stretch>
+            <a:fillRect/>
+          </a:stretch>
+        </p:blipFill>
+        <p:spPr>
+          <a:xfrm>
+            <a:off x="4731204" y="2496000"/>
+            <a:ext cx="660000" cy="660000"/>
+          </a:xfrm>
+          <a:prstGeom prst="rect">
+            <a:avLst/>
+          </a:prstGeom>
+        </p:spPr>
+      </p:pic>
+      <p:pic>
+        <p:nvPicPr>
+          <p:cNvPr id="128" name="Picture 127" descr="image.png"/>
+          <p:cNvPicPr>
+            <a:picLocks noChangeAspect="1"/>
+          </p:cNvPicPr>
+          <p:nvPr/>
+        </p:nvPicPr>
+        <p:blipFill>
+          <a:blip r:embed="rId5">
+            <a:extLst>
+              <a:ext uri="{96DAC541-7B7A-43D3-8B79-37D633B846F1}">
+                <ns3:svgBlip xmlns:ns3="http://schemas.microsoft.com/office/drawing/2016/SVG/main" r:embed="rId17"/>
+              </a:ext>
+            </a:extLst>
+          </a:blip>
+          <a:stretch>
+            <a:fillRect/>
+          </a:stretch>
+        </p:blipFill>
+        <p:spPr>
+          <a:xfrm>
+            <a:off x="6587436" y="2496000"/>
+            <a:ext cx="660000" cy="660000"/>
+          </a:xfrm>
+          <a:prstGeom prst="rect">
+            <a:avLst/>
+          </a:prstGeom>
+        </p:spPr>
+      </p:pic>
+      <p:pic>
+        <p:nvPicPr>
+          <p:cNvPr id="129" name="Picture 128" descr="image.png"/>
+          <p:cNvPicPr>
+            <a:picLocks noChangeAspect="1"/>
+          </p:cNvPicPr>
+          <p:nvPr/>
+        </p:nvPicPr>
+        <p:blipFill>
+          <a:blip r:embed="rId6">
+            <a:extLst>
+              <a:ext uri="{96DAC541-7B7A-43D3-8B79-37D633B846F1}">
+                <ns4:svgBlip xmlns:ns4="http://schemas.microsoft.com/office/drawing/2016/SVG/main" r:embed="rId19"/>
+              </a:ext>
+            </a:extLst>
+          </a:blip>
+          <a:stretch>
+            <a:fillRect/>
+          </a:stretch>
+        </p:blipFill>
+        <p:spPr>
+          <a:xfrm>
+            <a:off x="8443668" y="2496000"/>
+            <a:ext cx="660000" cy="660000"/>
+          </a:xfrm>
+          <a:prstGeom prst="rect">
+            <a:avLst/>
+          </a:prstGeom>
+        </p:spPr>
+      </p:pic>
+      <p:pic>
+        <p:nvPicPr>
+          <p:cNvPr id="130" name="Picture 129" descr="image.png"/>
+          <p:cNvPicPr>
+            <a:picLocks noChangeAspect="1"/>
+          </p:cNvPicPr>
+          <p:nvPr/>
+        </p:nvPicPr>
+        <p:blipFill>
+          <a:blip r:embed="rId7">
+            <a:extLst>
+              <a:ext uri="{96DAC541-7B7A-43D3-8B79-37D633B846F1}">
+                <ns5:svgBlip xmlns:ns5="http://schemas.microsoft.com/office/drawing/2016/SVG/main" r:embed="rId16"/>
+              </a:ext>
+            </a:extLst>
+          </a:blip>
+          <a:stretch>
+            <a:fillRect/>
+          </a:stretch>
+        </p:blipFill>
+        <p:spPr>
+          <a:xfrm>
+            <a:off x="10299900" y="2496000"/>
+            <a:ext cx="660000" cy="660000"/>
+          </a:xfrm>
+          <a:prstGeom prst="rect">
+            <a:avLst/>
+          </a:prstGeom>
+        </p:spPr>
+      </p:pic>
     </p:spTree>
   </p:cSld>
   <p:clrMapOvr>
@@ -10583,6 +10763,186 @@
           </a:prstGeom>
         </p:spPr>
       </p:pic>
+      <p:pic>
+        <p:nvPicPr>
+          <p:cNvPr id="178" name="Picture 177" descr="image.png"/>
+          <p:cNvPicPr>
+            <a:picLocks noChangeAspect="1"/>
+          </p:cNvPicPr>
+          <p:nvPr/>
+        </p:nvPicPr>
+        <p:blipFill>
+          <a:blip r:embed="rId2">
+            <a:extLst>
+              <a:ext uri="{96DAC541-7B7A-43D3-8B79-37D633B846F1}">
+                <ns0:svgBlip xmlns:ns0="http://schemas.microsoft.com/office/drawing/2016/SVG/main" r:embed="rId15"/>
+              </a:ext>
+            </a:extLst>
+          </a:blip>
+          <a:stretch>
+            <a:fillRect/>
+          </a:stretch>
+        </p:blipFill>
+        <p:spPr>
+          <a:xfrm>
+            <a:off x="795528" y="1673352"/>
+            <a:ext cx="246888" cy="246888"/>
+          </a:xfrm>
+          <a:prstGeom prst="rect">
+            <a:avLst/>
+          </a:prstGeom>
+        </p:spPr>
+      </p:pic>
+      <p:pic>
+        <p:nvPicPr>
+          <p:cNvPr id="179" name="Picture 178" descr="image.png"/>
+          <p:cNvPicPr>
+            <a:picLocks noChangeAspect="1"/>
+          </p:cNvPicPr>
+          <p:nvPr/>
+        </p:nvPicPr>
+        <p:blipFill>
+          <a:blip r:embed="rId3">
+            <a:extLst>
+              <a:ext uri="{96DAC541-7B7A-43D3-8B79-37D633B846F1}">
+                <ns1:svgBlip xmlns:ns1="http://schemas.microsoft.com/office/drawing/2016/SVG/main" r:embed="rId14"/>
+              </a:ext>
+            </a:extLst>
+          </a:blip>
+          <a:stretch>
+            <a:fillRect/>
+          </a:stretch>
+        </p:blipFill>
+        <p:spPr>
+          <a:xfrm>
+            <a:off x="795528" y="2441448"/>
+            <a:ext cx="246888" cy="246888"/>
+          </a:xfrm>
+          <a:prstGeom prst="rect">
+            <a:avLst/>
+          </a:prstGeom>
+        </p:spPr>
+      </p:pic>
+      <p:pic>
+        <p:nvPicPr>
+          <p:cNvPr id="180" name="Picture 179" descr="image.png"/>
+          <p:cNvPicPr>
+            <a:picLocks noChangeAspect="1"/>
+          </p:cNvPicPr>
+          <p:nvPr/>
+        </p:nvPicPr>
+        <p:blipFill>
+          <a:blip r:embed="rId4">
+            <a:extLst>
+              <a:ext uri="{96DAC541-7B7A-43D3-8B79-37D633B846F1}">
+                <ns2:svgBlip xmlns:ns2="http://schemas.microsoft.com/office/drawing/2016/SVG/main" r:embed="rId18"/>
+              </a:ext>
+            </a:extLst>
+          </a:blip>
+          <a:stretch>
+            <a:fillRect/>
+          </a:stretch>
+        </p:blipFill>
+        <p:spPr>
+          <a:xfrm>
+            <a:off x="795528" y="3209544"/>
+            <a:ext cx="246888" cy="246888"/>
+          </a:xfrm>
+          <a:prstGeom prst="rect">
+            <a:avLst/>
+          </a:prstGeom>
+        </p:spPr>
+      </p:pic>
+      <p:pic>
+        <p:nvPicPr>
+          <p:cNvPr id="181" name="Picture 180" descr="image.png"/>
+          <p:cNvPicPr>
+            <a:picLocks noChangeAspect="1"/>
+          </p:cNvPicPr>
+          <p:nvPr/>
+        </p:nvPicPr>
+        <p:blipFill>
+          <a:blip r:embed="rId5">
+            <a:extLst>
+              <a:ext uri="{96DAC541-7B7A-43D3-8B79-37D633B846F1}">
+                <ns3:svgBlip xmlns:ns3="http://schemas.microsoft.com/office/drawing/2016/SVG/main" r:embed="rId17"/>
+              </a:ext>
+            </a:extLst>
+          </a:blip>
+          <a:stretch>
+            <a:fillRect/>
+          </a:stretch>
+        </p:blipFill>
+        <p:spPr>
+          <a:xfrm>
+            <a:off x="795528" y="3977640"/>
+            <a:ext cx="246888" cy="246888"/>
+          </a:xfrm>
+          <a:prstGeom prst="rect">
+            <a:avLst/>
+          </a:prstGeom>
+        </p:spPr>
+      </p:pic>
+      <p:pic>
+        <p:nvPicPr>
+          <p:cNvPr id="182" name="Picture 181" descr="image.png"/>
+          <p:cNvPicPr>
+            <a:picLocks noChangeAspect="1"/>
+          </p:cNvPicPr>
+          <p:nvPr/>
+        </p:nvPicPr>
+        <p:blipFill>
+          <a:blip r:embed="rId6">
+            <a:extLst>
+              <a:ext uri="{96DAC541-7B7A-43D3-8B79-37D633B846F1}">
+                <ns4:svgBlip xmlns:ns4="http://schemas.microsoft.com/office/drawing/2016/SVG/main" r:embed="rId19"/>
+              </a:ext>
+            </a:extLst>
+          </a:blip>
+          <a:stretch>
+            <a:fillRect/>
+          </a:stretch>
+        </p:blipFill>
+        <p:spPr>
+          <a:xfrm>
+            <a:off x="795528" y="4745736"/>
+            <a:ext cx="246888" cy="246888"/>
+          </a:xfrm>
+          <a:prstGeom prst="rect">
+            <a:avLst/>
+          </a:prstGeom>
+        </p:spPr>
+      </p:pic>
+      <p:pic>
+        <p:nvPicPr>
+          <p:cNvPr id="183" name="Picture 182" descr="image.png"/>
+          <p:cNvPicPr>
+            <a:picLocks noChangeAspect="1"/>
+          </p:cNvPicPr>
+          <p:nvPr/>
+        </p:nvPicPr>
+        <p:blipFill>
+          <a:blip r:embed="rId7">
+            <a:extLst>
+              <a:ext uri="{96DAC541-7B7A-43D3-8B79-37D633B846F1}">
+                <ns5:svgBlip xmlns:ns5="http://schemas.microsoft.com/office/drawing/2016/SVG/main" r:embed="rId16"/>
+              </a:ext>
+            </a:extLst>
+          </a:blip>
+          <a:stretch>
+            <a:fillRect/>
+          </a:stretch>
+        </p:blipFill>
+        <p:spPr>
+          <a:xfrm>
+            <a:off x="795528" y="5513832"/>
+            <a:ext cx="246888" cy="246888"/>
+          </a:xfrm>
+          <a:prstGeom prst="rect">
+            <a:avLst/>
+          </a:prstGeom>
+        </p:spPr>
+      </p:pic>
     </p:spTree>
   </p:cSld>
   <p:clrMapOvr>
@@ -12799,8 +13159,8 @@
         </p:nvSpPr>
         <p:spPr>
           <a:xfrm>
-            <a:off x="1277240" y="1463040"/>
-            <a:ext cx="2654680" cy="822960"/>
+            <a:off x="1777240" y="1463040"/>
+            <a:ext cx="2154680" cy="822960"/>
           </a:xfrm>
           <a:prstGeom prst="rect">
             <a:avLst/>
@@ -13163,8 +13523,8 @@
         </p:nvSpPr>
         <p:spPr>
           <a:xfrm>
-            <a:off x="5145152" y="1463040"/>
-            <a:ext cx="2654680" cy="822960"/>
+            <a:off x="5645152" y="1463040"/>
+            <a:ext cx="2154680" cy="822960"/>
           </a:xfrm>
           <a:prstGeom prst="rect">
             <a:avLst/>
@@ -13527,8 +13887,8 @@
         </p:nvSpPr>
         <p:spPr>
           <a:xfrm>
-            <a:off x="9013064" y="1463040"/>
-            <a:ext cx="2654680" cy="822960"/>
+            <a:off x="9513064" y="1463040"/>
+            <a:ext cx="2154680" cy="822960"/>
           </a:xfrm>
           <a:prstGeom prst="rect">
             <a:avLst/>
@@ -13888,6 +14248,96 @@
             <a:extLst>
               <a:ext uri="{96DAC541-7B7A-43D3-8B79-37D633B846F1}">
                 <ns2:svgBlip xmlns:ns2="http://schemas.microsoft.com/office/drawing/2016/SVG/main" r:embed="rId10"/>
+              </a:ext>
+            </a:extLst>
+          </a:blip>
+          <a:stretch>
+            <a:fillRect/>
+          </a:stretch>
+        </p:blipFill>
+        <p:spPr>
+          <a:xfrm>
+            <a:off x="8434464" y="1664520"/>
+            <a:ext cx="420000" cy="420000"/>
+          </a:xfrm>
+          <a:prstGeom prst="rect">
+            <a:avLst/>
+          </a:prstGeom>
+        </p:spPr>
+      </p:pic>
+      <p:pic>
+        <p:nvPicPr>
+          <p:cNvPr id="127" name="Picture 126" descr="image.png"/>
+          <p:cNvPicPr>
+            <a:picLocks noChangeAspect="1"/>
+          </p:cNvPicPr>
+          <p:nvPr/>
+        </p:nvPicPr>
+        <p:blipFill>
+          <a:blip r:embed="rId5">
+            <a:extLst>
+              <a:ext uri="{96DAC541-7B7A-43D3-8B79-37D633B846F1}">
+                <ns0:svgBlip xmlns:ns0="http://schemas.microsoft.com/office/drawing/2016/SVG/main" r:embed="rId11"/>
+              </a:ext>
+            </a:extLst>
+          </a:blip>
+          <a:stretch>
+            <a:fillRect/>
+          </a:stretch>
+        </p:blipFill>
+        <p:spPr>
+          <a:xfrm>
+            <a:off x="698640" y="1664520"/>
+            <a:ext cx="420000" cy="420000"/>
+          </a:xfrm>
+          <a:prstGeom prst="rect">
+            <a:avLst/>
+          </a:prstGeom>
+        </p:spPr>
+      </p:pic>
+      <p:pic>
+        <p:nvPicPr>
+          <p:cNvPr id="128" name="Picture 127" descr="image.png"/>
+          <p:cNvPicPr>
+            <a:picLocks noChangeAspect="1"/>
+          </p:cNvPicPr>
+          <p:nvPr/>
+        </p:nvPicPr>
+        <p:blipFill>
+          <a:blip r:embed="rId6">
+            <a:extLst>
+              <a:ext uri="{96DAC541-7B7A-43D3-8B79-37D633B846F1}">
+                <ns1:svgBlip xmlns:ns1="http://schemas.microsoft.com/office/drawing/2016/SVG/main" r:embed="rId12"/>
+              </a:ext>
+            </a:extLst>
+          </a:blip>
+          <a:stretch>
+            <a:fillRect/>
+          </a:stretch>
+        </p:blipFill>
+        <p:spPr>
+          <a:xfrm>
+            <a:off x="4566552" y="1664520"/>
+            <a:ext cx="420000" cy="420000"/>
+          </a:xfrm>
+          <a:prstGeom prst="rect">
+            <a:avLst/>
+          </a:prstGeom>
+        </p:spPr>
+      </p:pic>
+      <p:pic>
+        <p:nvPicPr>
+          <p:cNvPr id="129" name="Picture 128" descr="image.png"/>
+          <p:cNvPicPr>
+            <a:picLocks noChangeAspect="1"/>
+          </p:cNvPicPr>
+          <p:nvPr/>
+        </p:nvPicPr>
+        <p:blipFill>
+          <a:blip r:embed="rId7">
+            <a:extLst>
+              <a:ext uri="{96DAC541-7B7A-43D3-8B79-37D633B846F1}">
+                <ns2:svgBlip xmlns:ns2="http://schemas.microsoft.com/office/drawing/2016/SVG/main" r:embed="rId13"/>
               </a:ext>
             </a:extLst>
           </a:blip>
@@ -16348,8 +16798,8 @@
         </p:nvSpPr>
         <p:spPr>
           <a:xfrm>
-            <a:off x="1342960" y="1554480"/>
-            <a:ext cx="4417760" cy="822960"/>
+            <a:off x="1862960" y="1554480"/>
+            <a:ext cx="3897760" cy="822960"/>
           </a:xfrm>
           <a:prstGeom prst="rect">
             <a:avLst/>
@@ -16713,8 +17163,8 @@
         </p:nvSpPr>
         <p:spPr>
           <a:xfrm>
-            <a:off x="7012240" y="1554480"/>
-            <a:ext cx="4417760" cy="822960"/>
+            <a:off x="7532240" y="1554480"/>
+            <a:ext cx="3897760" cy="822960"/>
           </a:xfrm>
           <a:prstGeom prst="rect">
             <a:avLst/>
@@ -17020,6 +17470,66 @@
             <a:extLst>
               <a:ext uri="{96DAC541-7B7A-43D3-8B79-37D633B846F1}">
                 <ns1:svgBlip xmlns:ns1="http://schemas.microsoft.com/office/drawing/2016/SVG/main" r:embed="rId4"/>
+              </a:ext>
+            </a:extLst>
+          </a:blip>
+          <a:stretch>
+            <a:fillRect/>
+          </a:stretch>
+        </p:blipFill>
+        <p:spPr>
+          <a:xfrm>
+            <a:off x="6367920" y="1750960"/>
+            <a:ext cx="430000" cy="430000"/>
+          </a:xfrm>
+          <a:prstGeom prst="rect">
+            <a:avLst/>
+          </a:prstGeom>
+        </p:spPr>
+      </p:pic>
+      <p:pic>
+        <p:nvPicPr>
+          <p:cNvPr id="56" name="Picture 55" descr="image.png"/>
+          <p:cNvPicPr>
+            <a:picLocks noChangeAspect="1"/>
+          </p:cNvPicPr>
+          <p:nvPr/>
+        </p:nvPicPr>
+        <p:blipFill>
+          <a:blip r:embed="rId2">
+            <a:extLst>
+              <a:ext uri="{96DAC541-7B7A-43D3-8B79-37D633B846F1}">
+                <ns0:svgBlip xmlns:ns0="http://schemas.microsoft.com/office/drawing/2016/SVG/main" r:embed="rId7"/>
+              </a:ext>
+            </a:extLst>
+          </a:blip>
+          <a:stretch>
+            <a:fillRect/>
+          </a:stretch>
+        </p:blipFill>
+        <p:spPr>
+          <a:xfrm>
+            <a:off x="698640" y="1750960"/>
+            <a:ext cx="430000" cy="430000"/>
+          </a:xfrm>
+          <a:prstGeom prst="rect">
+            <a:avLst/>
+          </a:prstGeom>
+        </p:spPr>
+      </p:pic>
+      <p:pic>
+        <p:nvPicPr>
+          <p:cNvPr id="57" name="Picture 56" descr="image.png"/>
+          <p:cNvPicPr>
+            <a:picLocks noChangeAspect="1"/>
+          </p:cNvPicPr>
+          <p:nvPr/>
+        </p:nvPicPr>
+        <p:blipFill>
+          <a:blip r:embed="rId3">
+            <a:extLst>
+              <a:ext uri="{96DAC541-7B7A-43D3-8B79-37D633B846F1}">
+                <ns1:svgBlip xmlns:ns1="http://schemas.microsoft.com/office/drawing/2016/SVG/main" r:embed="rId6"/>
               </a:ext>
             </a:extLst>
           </a:blip>
@@ -18975,6 +19485,96 @@
           </a:prstGeom>
         </p:spPr>
       </p:pic>
+      <p:pic>
+        <p:nvPicPr>
+          <p:cNvPr id="97" name="Picture 96" descr="image.png"/>
+          <p:cNvPicPr>
+            <a:picLocks noChangeAspect="1"/>
+          </p:cNvPicPr>
+          <p:nvPr/>
+        </p:nvPicPr>
+        <p:blipFill>
+          <a:blip r:embed="rId2">
+            <a:extLst>
+              <a:ext uri="{96DAC541-7B7A-43D3-8B79-37D633B846F1}">
+                <ns0:svgBlip xmlns:ns0="http://schemas.microsoft.com/office/drawing/2016/SVG/main" r:embed="rId8"/>
+              </a:ext>
+            </a:extLst>
+          </a:blip>
+          <a:stretch>
+            <a:fillRect/>
+          </a:stretch>
+        </p:blipFill>
+        <p:spPr>
+          <a:xfrm>
+            <a:off x="954440" y="2454056"/>
+            <a:ext cx="560000" cy="560000"/>
+          </a:xfrm>
+          <a:prstGeom prst="rect">
+            <a:avLst/>
+          </a:prstGeom>
+        </p:spPr>
+      </p:pic>
+      <p:pic>
+        <p:nvPicPr>
+          <p:cNvPr id="98" name="Picture 97" descr="image.png"/>
+          <p:cNvPicPr>
+            <a:picLocks noChangeAspect="1"/>
+          </p:cNvPicPr>
+          <p:nvPr/>
+        </p:nvPicPr>
+        <p:blipFill>
+          <a:blip r:embed="rId3">
+            <a:extLst>
+              <a:ext uri="{96DAC541-7B7A-43D3-8B79-37D633B846F1}">
+                <ns1:svgBlip xmlns:ns1="http://schemas.microsoft.com/office/drawing/2016/SVG/main" r:embed="rId9"/>
+              </a:ext>
+            </a:extLst>
+          </a:blip>
+          <a:stretch>
+            <a:fillRect/>
+          </a:stretch>
+        </p:blipFill>
+        <p:spPr>
+          <a:xfrm>
+            <a:off x="954440" y="3752504"/>
+            <a:ext cx="560000" cy="560000"/>
+          </a:xfrm>
+          <a:prstGeom prst="rect">
+            <a:avLst/>
+          </a:prstGeom>
+        </p:spPr>
+      </p:pic>
+      <p:pic>
+        <p:nvPicPr>
+          <p:cNvPr id="99" name="Picture 98" descr="image.png"/>
+          <p:cNvPicPr>
+            <a:picLocks noChangeAspect="1"/>
+          </p:cNvPicPr>
+          <p:nvPr/>
+        </p:nvPicPr>
+        <p:blipFill>
+          <a:blip r:embed="rId4">
+            <a:extLst>
+              <a:ext uri="{96DAC541-7B7A-43D3-8B79-37D633B846F1}">
+                <ns2:svgBlip xmlns:ns2="http://schemas.microsoft.com/office/drawing/2016/SVG/main" r:embed="rId10"/>
+              </a:ext>
+            </a:extLst>
+          </a:blip>
+          <a:stretch>
+            <a:fillRect/>
+          </a:stretch>
+        </p:blipFill>
+        <p:spPr>
+          <a:xfrm>
+            <a:off x="954440" y="5050952"/>
+            <a:ext cx="560000" cy="560000"/>
+          </a:xfrm>
+          <a:prstGeom prst="rect">
+            <a:avLst/>
+          </a:prstGeom>
+        </p:spPr>
+      </p:pic>
     </p:spTree>
   </p:cSld>
   <p:clrMapOvr>
@@ -27504,6 +28104,186 @@
           </a:prstGeom>
         </p:spPr>
       </p:pic>
+      <p:pic>
+        <p:nvPicPr>
+          <p:cNvPr id="130" name="Picture 129" descr="image.png"/>
+          <p:cNvPicPr>
+            <a:picLocks noChangeAspect="1"/>
+          </p:cNvPicPr>
+          <p:nvPr/>
+        </p:nvPicPr>
+        <p:blipFill>
+          <a:blip r:embed="rId3">
+            <a:extLst>
+              <a:ext uri="{96DAC541-7B7A-43D3-8B79-37D633B846F1}">
+                <ns0:svgBlip xmlns:ns0="http://schemas.microsoft.com/office/drawing/2016/SVG/main" r:embed="rId15"/>
+              </a:ext>
+            </a:extLst>
+          </a:blip>
+          <a:stretch>
+            <a:fillRect/>
+          </a:stretch>
+        </p:blipFill>
+        <p:spPr>
+          <a:xfrm>
+            <a:off x="4638935" y="944759"/>
+            <a:ext cx="414771" cy="414771"/>
+          </a:xfrm>
+          <a:prstGeom prst="rect">
+            <a:avLst/>
+          </a:prstGeom>
+        </p:spPr>
+      </p:pic>
+      <p:pic>
+        <p:nvPicPr>
+          <p:cNvPr id="131" name="Picture 130" descr="image.png"/>
+          <p:cNvPicPr>
+            <a:picLocks noChangeAspect="1"/>
+          </p:cNvPicPr>
+          <p:nvPr/>
+        </p:nvPicPr>
+        <p:blipFill>
+          <a:blip r:embed="rId4">
+            <a:extLst>
+              <a:ext uri="{96DAC541-7B7A-43D3-8B79-37D633B846F1}">
+                <ns1:svgBlip xmlns:ns1="http://schemas.microsoft.com/office/drawing/2016/SVG/main" r:embed="rId17"/>
+              </a:ext>
+            </a:extLst>
+          </a:blip>
+          <a:stretch>
+            <a:fillRect/>
+          </a:stretch>
+        </p:blipFill>
+        <p:spPr>
+          <a:xfrm>
+            <a:off x="4638935" y="1831727"/>
+            <a:ext cx="414771" cy="414771"/>
+          </a:xfrm>
+          <a:prstGeom prst="rect">
+            <a:avLst/>
+          </a:prstGeom>
+        </p:spPr>
+      </p:pic>
+      <p:pic>
+        <p:nvPicPr>
+          <p:cNvPr id="132" name="Picture 131" descr="image.png"/>
+          <p:cNvPicPr>
+            <a:picLocks noChangeAspect="1"/>
+          </p:cNvPicPr>
+          <p:nvPr/>
+        </p:nvPicPr>
+        <p:blipFill>
+          <a:blip r:embed="rId5">
+            <a:extLst>
+              <a:ext uri="{96DAC541-7B7A-43D3-8B79-37D633B846F1}">
+                <ns2:svgBlip xmlns:ns2="http://schemas.microsoft.com/office/drawing/2016/SVG/main" r:embed="rId16"/>
+              </a:ext>
+            </a:extLst>
+          </a:blip>
+          <a:stretch>
+            <a:fillRect/>
+          </a:stretch>
+        </p:blipFill>
+        <p:spPr>
+          <a:xfrm>
+            <a:off x="4638935" y="2718695"/>
+            <a:ext cx="414771" cy="414771"/>
+          </a:xfrm>
+          <a:prstGeom prst="rect">
+            <a:avLst/>
+          </a:prstGeom>
+        </p:spPr>
+      </p:pic>
+      <p:pic>
+        <p:nvPicPr>
+          <p:cNvPr id="133" name="Picture 132" descr="image.png"/>
+          <p:cNvPicPr>
+            <a:picLocks noChangeAspect="1"/>
+          </p:cNvPicPr>
+          <p:nvPr/>
+        </p:nvPicPr>
+        <p:blipFill>
+          <a:blip r:embed="rId6">
+            <a:extLst>
+              <a:ext uri="{96DAC541-7B7A-43D3-8B79-37D633B846F1}">
+                <ns3:svgBlip xmlns:ns3="http://schemas.microsoft.com/office/drawing/2016/SVG/main" r:embed="rId18"/>
+              </a:ext>
+            </a:extLst>
+          </a:blip>
+          <a:stretch>
+            <a:fillRect/>
+          </a:stretch>
+        </p:blipFill>
+        <p:spPr>
+          <a:xfrm>
+            <a:off x="4638935" y="3605663"/>
+            <a:ext cx="414771" cy="414771"/>
+          </a:xfrm>
+          <a:prstGeom prst="rect">
+            <a:avLst/>
+          </a:prstGeom>
+        </p:spPr>
+      </p:pic>
+      <p:pic>
+        <p:nvPicPr>
+          <p:cNvPr id="134" name="Picture 133" descr="image.png"/>
+          <p:cNvPicPr>
+            <a:picLocks noChangeAspect="1"/>
+          </p:cNvPicPr>
+          <p:nvPr/>
+        </p:nvPicPr>
+        <p:blipFill>
+          <a:blip r:embed="rId7">
+            <a:extLst>
+              <a:ext uri="{96DAC541-7B7A-43D3-8B79-37D633B846F1}">
+                <ns4:svgBlip xmlns:ns4="http://schemas.microsoft.com/office/drawing/2016/SVG/main" r:embed="rId20"/>
+              </a:ext>
+            </a:extLst>
+          </a:blip>
+          <a:stretch>
+            <a:fillRect/>
+          </a:stretch>
+        </p:blipFill>
+        <p:spPr>
+          <a:xfrm>
+            <a:off x="4638935" y="4492631"/>
+            <a:ext cx="414771" cy="414771"/>
+          </a:xfrm>
+          <a:prstGeom prst="rect">
+            <a:avLst/>
+          </a:prstGeom>
+        </p:spPr>
+      </p:pic>
+      <p:pic>
+        <p:nvPicPr>
+          <p:cNvPr id="135" name="Picture 134" descr="image.png"/>
+          <p:cNvPicPr>
+            <a:picLocks noChangeAspect="1"/>
+          </p:cNvPicPr>
+          <p:nvPr/>
+        </p:nvPicPr>
+        <p:blipFill>
+          <a:blip r:embed="rId8">
+            <a:extLst>
+              <a:ext uri="{96DAC541-7B7A-43D3-8B79-37D633B846F1}">
+                <ns5:svgBlip xmlns:ns5="http://schemas.microsoft.com/office/drawing/2016/SVG/main" r:embed="rId19"/>
+              </a:ext>
+            </a:extLst>
+          </a:blip>
+          <a:stretch>
+            <a:fillRect/>
+          </a:stretch>
+        </p:blipFill>
+        <p:spPr>
+          <a:xfrm>
+            <a:off x="4638935" y="5379599"/>
+            <a:ext cx="414771" cy="414771"/>
+          </a:xfrm>
+          <a:prstGeom prst="rect">
+            <a:avLst/>
+          </a:prstGeom>
+        </p:spPr>
+      </p:pic>
     </p:spTree>
   </p:cSld>
   <p:clrMapOvr>
@@ -34129,6 +34909,126 @@
           </a:prstGeom>
         </p:spPr>
       </p:pic>
+      <p:pic>
+        <p:nvPicPr>
+          <p:cNvPr id="108" name="Picture 107" descr="image.png"/>
+          <p:cNvPicPr>
+            <a:picLocks noChangeAspect="1"/>
+          </p:cNvPicPr>
+          <p:nvPr/>
+        </p:nvPicPr>
+        <p:blipFill>
+          <a:blip r:embed="rId2">
+            <a:extLst>
+              <a:ext uri="{96DAC541-7B7A-43D3-8B79-37D633B846F1}">
+                <ns0:svgBlip xmlns:ns0="http://schemas.microsoft.com/office/drawing/2016/SVG/main" r:embed="rId11"/>
+              </a:ext>
+            </a:extLst>
+          </a:blip>
+          <a:stretch>
+            <a:fillRect/>
+          </a:stretch>
+        </p:blipFill>
+        <p:spPr>
+          <a:xfrm>
+            <a:off x="925373" y="1931213"/>
+            <a:ext cx="307238" cy="307238"/>
+          </a:xfrm>
+          <a:prstGeom prst="rect">
+            <a:avLst/>
+          </a:prstGeom>
+        </p:spPr>
+      </p:pic>
+      <p:pic>
+        <p:nvPicPr>
+          <p:cNvPr id="109" name="Picture 108" descr="image.png"/>
+          <p:cNvPicPr>
+            <a:picLocks noChangeAspect="1"/>
+          </p:cNvPicPr>
+          <p:nvPr/>
+        </p:nvPicPr>
+        <p:blipFill>
+          <a:blip r:embed="rId3">
+            <a:extLst>
+              <a:ext uri="{96DAC541-7B7A-43D3-8B79-37D633B846F1}">
+                <ns1:svgBlip xmlns:ns1="http://schemas.microsoft.com/office/drawing/2016/SVG/main" r:embed="rId12"/>
+              </a:ext>
+            </a:extLst>
+          </a:blip>
+          <a:stretch>
+            <a:fillRect/>
+          </a:stretch>
+        </p:blipFill>
+        <p:spPr>
+          <a:xfrm>
+            <a:off x="6548933" y="1931213"/>
+            <a:ext cx="307238" cy="307238"/>
+          </a:xfrm>
+          <a:prstGeom prst="rect">
+            <a:avLst/>
+          </a:prstGeom>
+        </p:spPr>
+      </p:pic>
+      <p:pic>
+        <p:nvPicPr>
+          <p:cNvPr id="110" name="Picture 109" descr="image.png"/>
+          <p:cNvPicPr>
+            <a:picLocks noChangeAspect="1"/>
+          </p:cNvPicPr>
+          <p:nvPr/>
+        </p:nvPicPr>
+        <p:blipFill>
+          <a:blip r:embed="rId4">
+            <a:extLst>
+              <a:ext uri="{96DAC541-7B7A-43D3-8B79-37D633B846F1}">
+                <ns2:svgBlip xmlns:ns2="http://schemas.microsoft.com/office/drawing/2016/SVG/main" r:embed="rId10"/>
+              </a:ext>
+            </a:extLst>
+          </a:blip>
+          <a:stretch>
+            <a:fillRect/>
+          </a:stretch>
+        </p:blipFill>
+        <p:spPr>
+          <a:xfrm>
+            <a:off x="925373" y="4171493"/>
+            <a:ext cx="307238" cy="307238"/>
+          </a:xfrm>
+          <a:prstGeom prst="rect">
+            <a:avLst/>
+          </a:prstGeom>
+        </p:spPr>
+      </p:pic>
+      <p:pic>
+        <p:nvPicPr>
+          <p:cNvPr id="111" name="Picture 110" descr="image.png"/>
+          <p:cNvPicPr>
+            <a:picLocks noChangeAspect="1"/>
+          </p:cNvPicPr>
+          <p:nvPr/>
+        </p:nvPicPr>
+        <p:blipFill>
+          <a:blip r:embed="rId5">
+            <a:extLst>
+              <a:ext uri="{96DAC541-7B7A-43D3-8B79-37D633B846F1}">
+                <ns3:svgBlip xmlns:ns3="http://schemas.microsoft.com/office/drawing/2016/SVG/main" r:embed="rId13"/>
+              </a:ext>
+            </a:extLst>
+          </a:blip>
+          <a:stretch>
+            <a:fillRect/>
+          </a:stretch>
+        </p:blipFill>
+        <p:spPr>
+          <a:xfrm>
+            <a:off x="6548933" y="4171493"/>
+            <a:ext cx="307238" cy="307238"/>
+          </a:xfrm>
+          <a:prstGeom prst="rect">
+            <a:avLst/>
+          </a:prstGeom>
+        </p:spPr>
+      </p:pic>
     </p:spTree>
   </p:cSld>
   <p:clrMapOvr>
@@ -35917,8 +36817,8 @@
         </p:nvSpPr>
         <p:spPr>
           <a:xfrm>
-            <a:off x="1351520" y="1664207"/>
-            <a:ext cx="1986040" cy="1152144"/>
+            <a:off x="1971520" y="1664207"/>
+            <a:ext cx="1366040" cy="1152144"/>
           </a:xfrm>
           <a:prstGeom prst="rect">
             <a:avLst/>
@@ -36173,8 +37073,8 @@
         </p:nvSpPr>
         <p:spPr>
           <a:xfrm>
-            <a:off x="1351520" y="3145536"/>
-            <a:ext cx="1986040" cy="1152144"/>
+            <a:off x="1971520" y="3145536"/>
+            <a:ext cx="1366040" cy="1152144"/>
           </a:xfrm>
           <a:prstGeom prst="rect">
             <a:avLst/>
@@ -36429,8 +37329,8 @@
         </p:nvSpPr>
         <p:spPr>
           <a:xfrm>
-            <a:off x="1351520" y="4626864"/>
-            <a:ext cx="1986040" cy="1152144"/>
+            <a:off x="1971520" y="4626864"/>
+            <a:ext cx="1366040" cy="1152144"/>
           </a:xfrm>
           <a:prstGeom prst="rect">
             <a:avLst/>
@@ -36686,6 +37586,96 @@
             <a:extLst>
               <a:ext uri="{96DAC541-7B7A-43D3-8B79-37D633B846F1}">
                 <ns2:svgBlip xmlns:ns2="http://schemas.microsoft.com/office/drawing/2016/SVG/main" r:embed="rId6"/>
+              </a:ext>
+            </a:extLst>
+          </a:blip>
+          <a:stretch>
+            <a:fillRect/>
+          </a:stretch>
+        </p:blipFill>
+        <p:spPr>
+          <a:xfrm>
+            <a:off x="698640" y="4962936"/>
+            <a:ext cx="480000" cy="480000"/>
+          </a:xfrm>
+          <a:prstGeom prst="rect">
+            <a:avLst/>
+          </a:prstGeom>
+        </p:spPr>
+      </p:pic>
+      <p:pic>
+        <p:nvPicPr>
+          <p:cNvPr id="67" name="Picture 66" descr="image.png"/>
+          <p:cNvPicPr>
+            <a:picLocks noChangeAspect="1"/>
+          </p:cNvPicPr>
+          <p:nvPr/>
+        </p:nvPicPr>
+        <p:blipFill>
+          <a:blip r:embed="rId2">
+            <a:extLst>
+              <a:ext uri="{96DAC541-7B7A-43D3-8B79-37D633B846F1}">
+                <ns0:svgBlip xmlns:ns0="http://schemas.microsoft.com/office/drawing/2016/SVG/main" r:embed="rId8"/>
+              </a:ext>
+            </a:extLst>
+          </a:blip>
+          <a:stretch>
+            <a:fillRect/>
+          </a:stretch>
+        </p:blipFill>
+        <p:spPr>
+          <a:xfrm>
+            <a:off x="698640" y="2000280"/>
+            <a:ext cx="480000" cy="480000"/>
+          </a:xfrm>
+          <a:prstGeom prst="rect">
+            <a:avLst/>
+          </a:prstGeom>
+        </p:spPr>
+      </p:pic>
+      <p:pic>
+        <p:nvPicPr>
+          <p:cNvPr id="68" name="Picture 67" descr="image.png"/>
+          <p:cNvPicPr>
+            <a:picLocks noChangeAspect="1"/>
+          </p:cNvPicPr>
+          <p:nvPr/>
+        </p:nvPicPr>
+        <p:blipFill>
+          <a:blip r:embed="rId3">
+            <a:extLst>
+              <a:ext uri="{96DAC541-7B7A-43D3-8B79-37D633B846F1}">
+                <ns1:svgBlip xmlns:ns1="http://schemas.microsoft.com/office/drawing/2016/SVG/main" r:embed="rId10"/>
+              </a:ext>
+            </a:extLst>
+          </a:blip>
+          <a:stretch>
+            <a:fillRect/>
+          </a:stretch>
+        </p:blipFill>
+        <p:spPr>
+          <a:xfrm>
+            <a:off x="698640" y="3481608"/>
+            <a:ext cx="480000" cy="480000"/>
+          </a:xfrm>
+          <a:prstGeom prst="rect">
+            <a:avLst/>
+          </a:prstGeom>
+        </p:spPr>
+      </p:pic>
+      <p:pic>
+        <p:nvPicPr>
+          <p:cNvPr id="69" name="Picture 68" descr="image.png"/>
+          <p:cNvPicPr>
+            <a:picLocks noChangeAspect="1"/>
+          </p:cNvPicPr>
+          <p:nvPr/>
+        </p:nvPicPr>
+        <p:blipFill>
+          <a:blip r:embed="rId4">
+            <a:extLst>
+              <a:ext uri="{96DAC541-7B7A-43D3-8B79-37D633B846F1}">
+                <ns2:svgBlip xmlns:ns2="http://schemas.microsoft.com/office/drawing/2016/SVG/main" r:embed="rId9"/>
               </a:ext>
             </a:extLst>
           </a:blip>
@@ -38259,6 +39249,96 @@
           </a:prstGeom>
         </p:spPr>
       </p:pic>
+      <p:pic>
+        <p:nvPicPr>
+          <p:cNvPr id="52" name="Picture 51" descr="image.png"/>
+          <p:cNvPicPr>
+            <a:picLocks noChangeAspect="1"/>
+          </p:cNvPicPr>
+          <p:nvPr/>
+        </p:nvPicPr>
+        <p:blipFill>
+          <a:blip r:embed="rId2">
+            <a:extLst>
+              <a:ext uri="{96DAC541-7B7A-43D3-8B79-37D633B846F1}">
+                <ns0:svgBlip xmlns:ns0="http://schemas.microsoft.com/office/drawing/2016/SVG/main" r:embed="rId8"/>
+              </a:ext>
+            </a:extLst>
+          </a:blip>
+          <a:stretch>
+            <a:fillRect/>
+          </a:stretch>
+        </p:blipFill>
+        <p:spPr>
+          <a:xfrm>
+            <a:off x="1182320" y="2462480"/>
+            <a:ext cx="332841" cy="332841"/>
+          </a:xfrm>
+          <a:prstGeom prst="rect">
+            <a:avLst/>
+          </a:prstGeom>
+        </p:spPr>
+      </p:pic>
+      <p:pic>
+        <p:nvPicPr>
+          <p:cNvPr id="53" name="Picture 52" descr="image.png"/>
+          <p:cNvPicPr>
+            <a:picLocks noChangeAspect="1"/>
+          </p:cNvPicPr>
+          <p:nvPr/>
+        </p:nvPicPr>
+        <p:blipFill>
+          <a:blip r:embed="rId3">
+            <a:extLst>
+              <a:ext uri="{96DAC541-7B7A-43D3-8B79-37D633B846F1}">
+                <ns1:svgBlip xmlns:ns1="http://schemas.microsoft.com/office/drawing/2016/SVG/main" r:embed="rId9"/>
+              </a:ext>
+            </a:extLst>
+          </a:blip>
+          <a:stretch>
+            <a:fillRect/>
+          </a:stretch>
+        </p:blipFill>
+        <p:spPr>
+          <a:xfrm>
+            <a:off x="1182320" y="3834080"/>
+            <a:ext cx="332841" cy="332841"/>
+          </a:xfrm>
+          <a:prstGeom prst="rect">
+            <a:avLst/>
+          </a:prstGeom>
+        </p:spPr>
+      </p:pic>
+      <p:pic>
+        <p:nvPicPr>
+          <p:cNvPr id="54" name="Picture 53" descr="image.png"/>
+          <p:cNvPicPr>
+            <a:picLocks noChangeAspect="1"/>
+          </p:cNvPicPr>
+          <p:nvPr/>
+        </p:nvPicPr>
+        <p:blipFill>
+          <a:blip r:embed="rId4">
+            <a:extLst>
+              <a:ext uri="{96DAC541-7B7A-43D3-8B79-37D633B846F1}">
+                <ns2:svgBlip xmlns:ns2="http://schemas.microsoft.com/office/drawing/2016/SVG/main" r:embed="rId10"/>
+              </a:ext>
+            </a:extLst>
+          </a:blip>
+          <a:stretch>
+            <a:fillRect/>
+          </a:stretch>
+        </p:blipFill>
+        <p:spPr>
+          <a:xfrm>
+            <a:off x="1182320" y="5205680"/>
+            <a:ext cx="332841" cy="332841"/>
+          </a:xfrm>
+          <a:prstGeom prst="rect">
+            <a:avLst/>
+          </a:prstGeom>
+        </p:spPr>
+      </p:pic>
     </p:spTree>
   </p:cSld>
   <p:clrMapOvr>
@@ -39762,8 +40842,8 @@
         </p:nvSpPr>
         <p:spPr>
           <a:xfrm>
-            <a:off x="5589200" y="1600200"/>
-            <a:ext cx="5840800" cy="457200"/>
+            <a:off x="6149200" y="1600200"/>
+            <a:ext cx="5280800" cy="457200"/>
           </a:xfrm>
           <a:prstGeom prst="rect">
             <a:avLst/>
@@ -39797,8 +40877,8 @@
         </p:nvSpPr>
         <p:spPr>
           <a:xfrm>
-            <a:off x="5589200" y="2057400"/>
-            <a:ext cx="5840800" cy="640080"/>
+            <a:off x="6149200" y="2057400"/>
+            <a:ext cx="5280800" cy="640080"/>
           </a:xfrm>
           <a:prstGeom prst="rect">
             <a:avLst/>
@@ -39930,8 +41010,8 @@
         </p:nvSpPr>
         <p:spPr>
           <a:xfrm>
-            <a:off x="5589200" y="3182112"/>
-            <a:ext cx="5840800" cy="457200"/>
+            <a:off x="6149200" y="3182112"/>
+            <a:ext cx="5280800" cy="457200"/>
           </a:xfrm>
           <a:prstGeom prst="rect">
             <a:avLst/>
@@ -39965,8 +41045,8 @@
         </p:nvSpPr>
         <p:spPr>
           <a:xfrm>
-            <a:off x="5589200" y="3639312"/>
-            <a:ext cx="5840800" cy="640080"/>
+            <a:off x="6149200" y="3639312"/>
+            <a:ext cx="5280800" cy="640080"/>
           </a:xfrm>
           <a:prstGeom prst="rect">
             <a:avLst/>
@@ -40098,8 +41178,8 @@
         </p:nvSpPr>
         <p:spPr>
           <a:xfrm>
-            <a:off x="5589200" y="4764024"/>
-            <a:ext cx="5840800" cy="457200"/>
+            <a:off x="6149200" y="4764024"/>
+            <a:ext cx="5280800" cy="457200"/>
           </a:xfrm>
           <a:prstGeom prst="rect">
             <a:avLst/>
@@ -40133,8 +41213,8 @@
         </p:nvSpPr>
         <p:spPr>
           <a:xfrm>
-            <a:off x="5589200" y="5221224"/>
-            <a:ext cx="5840800" cy="640080"/>
+            <a:off x="6149200" y="5221224"/>
+            <a:ext cx="5280800" cy="640080"/>
           </a:xfrm>
           <a:prstGeom prst="rect">
             <a:avLst/>
@@ -40272,6 +41352,96 @@
             <a:extLst>
               <a:ext uri="{96DAC541-7B7A-43D3-8B79-37D633B846F1}">
                 <ns2:svgBlip xmlns:ns2="http://schemas.microsoft.com/office/drawing/2016/SVG/main" r:embed="rId6"/>
+              </a:ext>
+            </a:extLst>
+          </a:blip>
+          <a:stretch>
+            <a:fillRect/>
+          </a:stretch>
+        </p:blipFill>
+        <p:spPr>
+          <a:xfrm>
+            <a:off x="4813440" y="5069804"/>
+            <a:ext cx="440000" cy="440000"/>
+          </a:xfrm>
+          <a:prstGeom prst="rect">
+            <a:avLst/>
+          </a:prstGeom>
+        </p:spPr>
+      </p:pic>
+      <p:pic>
+        <p:nvPicPr>
+          <p:cNvPr id="67" name="Picture 66" descr="image.png"/>
+          <p:cNvPicPr>
+            <a:picLocks noChangeAspect="1"/>
+          </p:cNvPicPr>
+          <p:nvPr/>
+        </p:nvPicPr>
+        <p:blipFill>
+          <a:blip r:embed="rId3">
+            <a:extLst>
+              <a:ext uri="{96DAC541-7B7A-43D3-8B79-37D633B846F1}">
+                <ns0:svgBlip xmlns:ns0="http://schemas.microsoft.com/office/drawing/2016/SVG/main" r:embed="rId10"/>
+              </a:ext>
+            </a:extLst>
+          </a:blip>
+          <a:stretch>
+            <a:fillRect/>
+          </a:stretch>
+        </p:blipFill>
+        <p:spPr>
+          <a:xfrm>
+            <a:off x="4813440" y="1905980"/>
+            <a:ext cx="440000" cy="440000"/>
+          </a:xfrm>
+          <a:prstGeom prst="rect">
+            <a:avLst/>
+          </a:prstGeom>
+        </p:spPr>
+      </p:pic>
+      <p:pic>
+        <p:nvPicPr>
+          <p:cNvPr id="68" name="Picture 67" descr="image.png"/>
+          <p:cNvPicPr>
+            <a:picLocks noChangeAspect="1"/>
+          </p:cNvPicPr>
+          <p:nvPr/>
+        </p:nvPicPr>
+        <p:blipFill>
+          <a:blip r:embed="rId4">
+            <a:extLst>
+              <a:ext uri="{96DAC541-7B7A-43D3-8B79-37D633B846F1}">
+                <ns1:svgBlip xmlns:ns1="http://schemas.microsoft.com/office/drawing/2016/SVG/main" r:embed="rId11"/>
+              </a:ext>
+            </a:extLst>
+          </a:blip>
+          <a:stretch>
+            <a:fillRect/>
+          </a:stretch>
+        </p:blipFill>
+        <p:spPr>
+          <a:xfrm>
+            <a:off x="4813440" y="3487892"/>
+            <a:ext cx="440000" cy="440000"/>
+          </a:xfrm>
+          <a:prstGeom prst="rect">
+            <a:avLst/>
+          </a:prstGeom>
+        </p:spPr>
+      </p:pic>
+      <p:pic>
+        <p:nvPicPr>
+          <p:cNvPr id="69" name="Picture 68" descr="image.png"/>
+          <p:cNvPicPr>
+            <a:picLocks noChangeAspect="1"/>
+          </p:cNvPicPr>
+          <p:nvPr/>
+        </p:nvPicPr>
+        <p:blipFill>
+          <a:blip r:embed="rId5">
+            <a:extLst>
+              <a:ext uri="{96DAC541-7B7A-43D3-8B79-37D633B846F1}">
+                <ns2:svgBlip xmlns:ns2="http://schemas.microsoft.com/office/drawing/2016/SVG/main" r:embed="rId9"/>
               </a:ext>
             </a:extLst>
           </a:blip>
@@ -41509,8 +42679,8 @@
         </p:nvSpPr>
         <p:spPr>
           <a:xfrm>
-            <a:off x="1324672" y="1554480"/>
-            <a:ext cx="2634680" cy="777240"/>
+            <a:off x="1844672" y="1554480"/>
+            <a:ext cx="2114680" cy="777240"/>
           </a:xfrm>
           <a:prstGeom prst="rect">
             <a:avLst/>
@@ -41828,8 +42998,8 @@
         </p:nvSpPr>
         <p:spPr>
           <a:xfrm>
-            <a:off x="5192584" y="1554480"/>
-            <a:ext cx="2634680" cy="777240"/>
+            <a:off x="5712584" y="1554480"/>
+            <a:ext cx="2114680" cy="777240"/>
           </a:xfrm>
           <a:prstGeom prst="rect">
             <a:avLst/>
@@ -42147,8 +43317,8 @@
         </p:nvSpPr>
         <p:spPr>
           <a:xfrm>
-            <a:off x="9060496" y="1554480"/>
-            <a:ext cx="2634680" cy="777240"/>
+            <a:off x="9580496" y="1554480"/>
+            <a:ext cx="2114680" cy="777240"/>
           </a:xfrm>
           <a:prstGeom prst="rect">
             <a:avLst/>
@@ -42463,6 +43633,96 @@
             <a:extLst>
               <a:ext uri="{96DAC541-7B7A-43D3-8B79-37D633B846F1}">
                 <ns2:svgBlip xmlns:ns2="http://schemas.microsoft.com/office/drawing/2016/SVG/main" r:embed="rId5"/>
+              </a:ext>
+            </a:extLst>
+          </a:blip>
+          <a:stretch>
+            <a:fillRect/>
+          </a:stretch>
+        </p:blipFill>
+        <p:spPr>
+          <a:xfrm>
+            <a:off x="8434464" y="1728100"/>
+            <a:ext cx="430000" cy="430000"/>
+          </a:xfrm>
+          <a:prstGeom prst="rect">
+            <a:avLst/>
+          </a:prstGeom>
+        </p:spPr>
+      </p:pic>
+      <p:pic>
+        <p:nvPicPr>
+          <p:cNvPr id="97" name="Picture 96" descr="image.png"/>
+          <p:cNvPicPr>
+            <a:picLocks noChangeAspect="1"/>
+          </p:cNvPicPr>
+          <p:nvPr/>
+        </p:nvPicPr>
+        <p:blipFill>
+          <a:blip r:embed="rId2">
+            <a:extLst>
+              <a:ext uri="{96DAC541-7B7A-43D3-8B79-37D633B846F1}">
+                <ns0:svgBlip xmlns:ns0="http://schemas.microsoft.com/office/drawing/2016/SVG/main" r:embed="rId10"/>
+              </a:ext>
+            </a:extLst>
+          </a:blip>
+          <a:stretch>
+            <a:fillRect/>
+          </a:stretch>
+        </p:blipFill>
+        <p:spPr>
+          <a:xfrm>
+            <a:off x="698640" y="1728100"/>
+            <a:ext cx="430000" cy="430000"/>
+          </a:xfrm>
+          <a:prstGeom prst="rect">
+            <a:avLst/>
+          </a:prstGeom>
+        </p:spPr>
+      </p:pic>
+      <p:pic>
+        <p:nvPicPr>
+          <p:cNvPr id="98" name="Picture 97" descr="image.png"/>
+          <p:cNvPicPr>
+            <a:picLocks noChangeAspect="1"/>
+          </p:cNvPicPr>
+          <p:nvPr/>
+        </p:nvPicPr>
+        <p:blipFill>
+          <a:blip r:embed="rId3">
+            <a:extLst>
+              <a:ext uri="{96DAC541-7B7A-43D3-8B79-37D633B846F1}">
+                <ns1:svgBlip xmlns:ns1="http://schemas.microsoft.com/office/drawing/2016/SVG/main" r:embed="rId9"/>
+              </a:ext>
+            </a:extLst>
+          </a:blip>
+          <a:stretch>
+            <a:fillRect/>
+          </a:stretch>
+        </p:blipFill>
+        <p:spPr>
+          <a:xfrm>
+            <a:off x="4566552" y="1728100"/>
+            <a:ext cx="430000" cy="430000"/>
+          </a:xfrm>
+          <a:prstGeom prst="rect">
+            <a:avLst/>
+          </a:prstGeom>
+        </p:spPr>
+      </p:pic>
+      <p:pic>
+        <p:nvPicPr>
+          <p:cNvPr id="99" name="Picture 98" descr="image.png"/>
+          <p:cNvPicPr>
+            <a:picLocks noChangeAspect="1"/>
+          </p:cNvPicPr>
+          <p:nvPr/>
+        </p:nvPicPr>
+        <p:blipFill>
+          <a:blip r:embed="rId4">
+            <a:extLst>
+              <a:ext uri="{96DAC541-7B7A-43D3-8B79-37D633B846F1}">
+                <ns2:svgBlip xmlns:ns2="http://schemas.microsoft.com/office/drawing/2016/SVG/main" r:embed="rId8"/>
               </a:ext>
             </a:extLst>
           </a:blip>
@@ -45673,6 +46933,246 @@
           </a:prstGeom>
         </p:spPr>
       </p:pic>
+      <p:pic>
+        <p:nvPicPr>
+          <p:cNvPr id="88" name="Picture 87" descr="image.png"/>
+          <p:cNvPicPr>
+            <a:picLocks noChangeAspect="1"/>
+          </p:cNvPicPr>
+          <p:nvPr/>
+        </p:nvPicPr>
+        <p:blipFill>
+          <a:blip r:embed="rId2">
+            <a:extLst>
+              <a:ext uri="{96DAC541-7B7A-43D3-8B79-37D633B846F1}">
+                <ns0:svgBlip xmlns:ns0="http://schemas.microsoft.com/office/drawing/2016/SVG/main" r:embed="rId20"/>
+              </a:ext>
+            </a:extLst>
+          </a:blip>
+          <a:stretch>
+            <a:fillRect/>
+          </a:stretch>
+        </p:blipFill>
+        <p:spPr>
+          <a:xfrm>
+            <a:off x="918058" y="1814170"/>
+            <a:ext cx="358444" cy="358444"/>
+          </a:xfrm>
+          <a:prstGeom prst="rect">
+            <a:avLst/>
+          </a:prstGeom>
+        </p:spPr>
+      </p:pic>
+      <p:pic>
+        <p:nvPicPr>
+          <p:cNvPr id="89" name="Picture 88" descr="image.png"/>
+          <p:cNvPicPr>
+            <a:picLocks noChangeAspect="1"/>
+          </p:cNvPicPr>
+          <p:nvPr/>
+        </p:nvPicPr>
+        <p:blipFill>
+          <a:blip r:embed="rId3">
+            <a:extLst>
+              <a:ext uri="{96DAC541-7B7A-43D3-8B79-37D633B846F1}">
+                <ns1:svgBlip xmlns:ns1="http://schemas.microsoft.com/office/drawing/2016/SVG/main" r:embed="rId21"/>
+              </a:ext>
+            </a:extLst>
+          </a:blip>
+          <a:stretch>
+            <a:fillRect/>
+          </a:stretch>
+        </p:blipFill>
+        <p:spPr>
+          <a:xfrm>
+            <a:off x="918058" y="2948026"/>
+            <a:ext cx="358444" cy="358444"/>
+          </a:xfrm>
+          <a:prstGeom prst="rect">
+            <a:avLst/>
+          </a:prstGeom>
+        </p:spPr>
+      </p:pic>
+      <p:pic>
+        <p:nvPicPr>
+          <p:cNvPr id="90" name="Picture 89" descr="image.png"/>
+          <p:cNvPicPr>
+            <a:picLocks noChangeAspect="1"/>
+          </p:cNvPicPr>
+          <p:nvPr/>
+        </p:nvPicPr>
+        <p:blipFill>
+          <a:blip r:embed="rId4">
+            <a:extLst>
+              <a:ext uri="{96DAC541-7B7A-43D3-8B79-37D633B846F1}">
+                <ns2:svgBlip xmlns:ns2="http://schemas.microsoft.com/office/drawing/2016/SVG/main" r:embed="rId19"/>
+              </a:ext>
+            </a:extLst>
+          </a:blip>
+          <a:stretch>
+            <a:fillRect/>
+          </a:stretch>
+        </p:blipFill>
+        <p:spPr>
+          <a:xfrm>
+            <a:off x="918058" y="4081882"/>
+            <a:ext cx="358444" cy="358444"/>
+          </a:xfrm>
+          <a:prstGeom prst="rect">
+            <a:avLst/>
+          </a:prstGeom>
+        </p:spPr>
+      </p:pic>
+      <p:pic>
+        <p:nvPicPr>
+          <p:cNvPr id="91" name="Picture 90" descr="image.png"/>
+          <p:cNvPicPr>
+            <a:picLocks noChangeAspect="1"/>
+          </p:cNvPicPr>
+          <p:nvPr/>
+        </p:nvPicPr>
+        <p:blipFill>
+          <a:blip r:embed="rId5">
+            <a:extLst>
+              <a:ext uri="{96DAC541-7B7A-43D3-8B79-37D633B846F1}">
+                <ns3:svgBlip xmlns:ns3="http://schemas.microsoft.com/office/drawing/2016/SVG/main" r:embed="rId14"/>
+              </a:ext>
+            </a:extLst>
+          </a:blip>
+          <a:stretch>
+            <a:fillRect/>
+          </a:stretch>
+        </p:blipFill>
+        <p:spPr>
+          <a:xfrm>
+            <a:off x="918058" y="5215738"/>
+            <a:ext cx="358444" cy="358444"/>
+          </a:xfrm>
+          <a:prstGeom prst="rect">
+            <a:avLst/>
+          </a:prstGeom>
+        </p:spPr>
+      </p:pic>
+      <p:pic>
+        <p:nvPicPr>
+          <p:cNvPr id="92" name="Picture 91" descr="chart7_nhua.png"/>
+          <p:cNvPicPr>
+            <a:picLocks noChangeAspect="1"/>
+          </p:cNvPicPr>
+          <p:nvPr/>
+        </p:nvPicPr>
+        <p:blipFill>
+          <a:blip r:embed="rId10">
+            <a:extLst>
+              <a:ext uri="{96DAC541-7B7A-43D3-8B79-37D633B846F1}">
+                <ns4:svgBlip xmlns:ns4="http://schemas.microsoft.com/office/drawing/2016/SVG/main" r:embed="rId17"/>
+              </a:ext>
+            </a:extLst>
+          </a:blip>
+          <a:stretch>
+            <a:fillRect/>
+          </a:stretch>
+        </p:blipFill>
+        <p:spPr>
+          <a:xfrm>
+            <a:off x="3931920" y="2264280"/>
+            <a:ext cx="1234440" cy="145890"/>
+          </a:xfrm>
+          <a:prstGeom prst="rect">
+            <a:avLst/>
+          </a:prstGeom>
+        </p:spPr>
+      </p:pic>
+      <p:pic>
+        <p:nvPicPr>
+          <p:cNvPr id="93" name="Picture 92" descr="chart7_dungmoi.png"/>
+          <p:cNvPicPr>
+            <a:picLocks noChangeAspect="1"/>
+          </p:cNvPicPr>
+          <p:nvPr/>
+        </p:nvPicPr>
+        <p:blipFill>
+          <a:blip r:embed="rId11">
+            <a:extLst>
+              <a:ext uri="{96DAC541-7B7A-43D3-8B79-37D633B846F1}">
+                <ns5:svgBlip xmlns:ns5="http://schemas.microsoft.com/office/drawing/2016/SVG/main" r:embed="rId16"/>
+              </a:ext>
+            </a:extLst>
+          </a:blip>
+          <a:stretch>
+            <a:fillRect/>
+          </a:stretch>
+        </p:blipFill>
+        <p:spPr>
+          <a:xfrm>
+            <a:off x="3931920" y="3398136"/>
+            <a:ext cx="1234440" cy="145890"/>
+          </a:xfrm>
+          <a:prstGeom prst="rect">
+            <a:avLst/>
+          </a:prstGeom>
+        </p:spPr>
+      </p:pic>
+      <p:pic>
+        <p:nvPicPr>
+          <p:cNvPr id="94" name="Picture 93" descr="chart7_bot.png"/>
+          <p:cNvPicPr>
+            <a:picLocks noChangeAspect="1"/>
+          </p:cNvPicPr>
+          <p:nvPr/>
+        </p:nvPicPr>
+        <p:blipFill>
+          <a:blip r:embed="rId12">
+            <a:extLst>
+              <a:ext uri="{96DAC541-7B7A-43D3-8B79-37D633B846F1}">
+                <ns6:svgBlip xmlns:ns6="http://schemas.microsoft.com/office/drawing/2016/SVG/main" r:embed="rId15"/>
+              </a:ext>
+            </a:extLst>
+          </a:blip>
+          <a:stretch>
+            <a:fillRect/>
+          </a:stretch>
+        </p:blipFill>
+        <p:spPr>
+          <a:xfrm>
+            <a:off x="3931920" y="4531992"/>
+            <a:ext cx="1234440" cy="145890"/>
+          </a:xfrm>
+          <a:prstGeom prst="rect">
+            <a:avLst/>
+          </a:prstGeom>
+        </p:spPr>
+      </p:pic>
+      <p:pic>
+        <p:nvPicPr>
+          <p:cNvPr id="95" name="Picture 94" descr="chart7_phugia.png"/>
+          <p:cNvPicPr>
+            <a:picLocks noChangeAspect="1"/>
+          </p:cNvPicPr>
+          <p:nvPr/>
+        </p:nvPicPr>
+        <p:blipFill>
+          <a:blip r:embed="rId13">
+            <a:extLst>
+              <a:ext uri="{96DAC541-7B7A-43D3-8B79-37D633B846F1}">
+                <ns7:svgBlip xmlns:ns7="http://schemas.microsoft.com/office/drawing/2016/SVG/main" r:embed="rId18"/>
+              </a:ext>
+            </a:extLst>
+          </a:blip>
+          <a:stretch>
+            <a:fillRect/>
+          </a:stretch>
+        </p:blipFill>
+        <p:spPr>
+          <a:xfrm>
+            <a:off x="3931920" y="5665848"/>
+            <a:ext cx="1234440" cy="145890"/>
+          </a:xfrm>
+          <a:prstGeom prst="rect">
+            <a:avLst/>
+          </a:prstGeom>
+        </p:spPr>
+      </p:pic>
     </p:spTree>
   </p:cSld>
   <p:clrMapOvr>
@@ -47129,7 +48629,7 @@
                 </a:solidFill>
                 <a:latin typeface="Calibri"/>
               </a:rPr>
-              <a:t>30–45%</a:t>
+              <a:t/>
             </a:r>
           </a:p>
         </p:txBody>
@@ -47332,7 +48832,7 @@
                 </a:solidFill>
                 <a:latin typeface="Calibri"/>
               </a:rPr>
-              <a:t>46–55%</a:t>
+              <a:t/>
             </a:r>
           </a:p>
         </p:txBody>
@@ -47535,7 +49035,7 @@
                 </a:solidFill>
                 <a:latin typeface="Calibri"/>
               </a:rPr>
-              <a:t>56–70%</a:t>
+              <a:t/>
             </a:r>
           </a:p>
         </p:txBody>
@@ -47697,6 +49197,96 @@
           </a:p>
         </p:txBody>
       </p:sp>
+      <p:pic>
+        <p:nvPicPr>
+          <p:cNvPr id="64" name="Picture 63" descr="chart8_gay.png"/>
+          <p:cNvPicPr>
+            <a:picLocks noChangeAspect="1"/>
+          </p:cNvPicPr>
+          <p:nvPr/>
+        </p:nvPicPr>
+        <p:blipFill>
+          <a:blip r:embed="rId2">
+            <a:extLst>
+              <a:ext uri="{96DAC541-7B7A-43D3-8B79-37D633B846F1}">
+                <ns0:svgBlip xmlns:ns0="http://schemas.microsoft.com/office/drawing/2016/SVG/main" r:embed="rId6"/>
+              </a:ext>
+            </a:extLst>
+          </a:blip>
+          <a:stretch>
+            <a:fillRect/>
+          </a:stretch>
+        </p:blipFill>
+        <p:spPr>
+          <a:xfrm>
+            <a:off x="3931920" y="2416310"/>
+            <a:ext cx="2100000" cy="470900"/>
+          </a:xfrm>
+          <a:prstGeom prst="rect">
+            <a:avLst/>
+          </a:prstGeom>
+        </p:spPr>
+      </p:pic>
+      <p:pic>
+        <p:nvPicPr>
+          <p:cNvPr id="65" name="Picture 64" descr="chart8_trung.png"/>
+          <p:cNvPicPr>
+            <a:picLocks noChangeAspect="1"/>
+          </p:cNvPicPr>
+          <p:nvPr/>
+        </p:nvPicPr>
+        <p:blipFill>
+          <a:blip r:embed="rId3">
+            <a:extLst>
+              <a:ext uri="{96DAC541-7B7A-43D3-8B79-37D633B846F1}">
+                <ns1:svgBlip xmlns:ns1="http://schemas.microsoft.com/office/drawing/2016/SVG/main" r:embed="rId7"/>
+              </a:ext>
+            </a:extLst>
+          </a:blip>
+          <a:stretch>
+            <a:fillRect/>
+          </a:stretch>
+        </p:blipFill>
+        <p:spPr>
+          <a:xfrm>
+            <a:off x="3931920" y="3422150"/>
+            <a:ext cx="2100000" cy="470900"/>
+          </a:xfrm>
+          <a:prstGeom prst="rect">
+            <a:avLst/>
+          </a:prstGeom>
+        </p:spPr>
+      </p:pic>
+      <p:pic>
+        <p:nvPicPr>
+          <p:cNvPr id="66" name="Picture 65" descr="chart8_beo.png"/>
+          <p:cNvPicPr>
+            <a:picLocks noChangeAspect="1"/>
+          </p:cNvPicPr>
+          <p:nvPr/>
+        </p:nvPicPr>
+        <p:blipFill>
+          <a:blip r:embed="rId4">
+            <a:extLst>
+              <a:ext uri="{96DAC541-7B7A-43D3-8B79-37D633B846F1}">
+                <ns2:svgBlip xmlns:ns2="http://schemas.microsoft.com/office/drawing/2016/SVG/main" r:embed="rId5"/>
+              </a:ext>
+            </a:extLst>
+          </a:blip>
+          <a:stretch>
+            <a:fillRect/>
+          </a:stretch>
+        </p:blipFill>
+        <p:spPr>
+          <a:xfrm>
+            <a:off x="3931920" y="4427990"/>
+            <a:ext cx="2100000" cy="470900"/>
+          </a:xfrm>
+          <a:prstGeom prst="rect">
+            <a:avLst/>
+          </a:prstGeom>
+        </p:spPr>
+      </p:pic>
     </p:spTree>
   </p:cSld>
   <p:clrMapOvr>

--- a/SuHeo/Báo cáo thực tập - Sơn Hải Vân.pptx
+++ b/SuHeo/Báo cáo thực tập - Sơn Hải Vân.pptx
@@ -9,18 +9,24 @@
     <p:sldId id="257" r:id="rId8"/>
     <p:sldId id="258" r:id="rId9"/>
     <p:sldId id="259" r:id="rId10"/>
+    <p:sldId id="280" r:id="rId31"/>
     <p:sldId id="260" r:id="rId11"/>
     <p:sldId id="261" r:id="rId12"/>
     <p:sldId id="262" r:id="rId13"/>
+    <p:sldId id="281" r:id="rId32"/>
     <p:sldId id="263" r:id="rId14"/>
     <p:sldId id="264" r:id="rId15"/>
     <p:sldId id="265" r:id="rId16"/>
     <p:sldId id="266" r:id="rId17"/>
     <p:sldId id="267" r:id="rId18"/>
-    <p:sldId id="268" r:id="rId19"/>
+    <p:sldId id="282" r:id="rId33"/>
+    <p:sldId id="284" r:id="rId35"/>
+    <p:sldId id="285" r:id="rId36"/>
+    <p:sldId id="286" r:id="rId37"/>
     <p:sldId id="269" r:id="rId20"/>
     <p:sldId id="270" r:id="rId21"/>
     <p:sldId id="271" r:id="rId22"/>
+    <p:sldId id="283" r:id="rId34"/>
     <p:sldId id="272" r:id="rId23"/>
     <p:sldId id="273" r:id="rId24"/>
     <p:sldId id="274" r:id="rId25"/>
@@ -6333,7 +6339,7 @@
                 </a:solidFill>
                 <a:latin typeface="Calibri"/>
               </a:rPr>
-              <a:t>11</a:t>
+              <a:t>13</a:t>
             </a:r>
           </a:p>
         </p:txBody>
@@ -6681,6 +6687,186 @@
             <a:extLst>
               <a:ext uri="{96DAC541-7B7A-43D3-8B79-37D633B846F1}">
                 <ns5:svgBlip xmlns:ns5="http://schemas.microsoft.com/office/drawing/2016/SVG/main" r:embed="rId16"/>
+              </a:ext>
+            </a:extLst>
+          </a:blip>
+          <a:stretch>
+            <a:fillRect/>
+          </a:stretch>
+        </p:blipFill>
+        <p:spPr>
+          <a:xfrm>
+            <a:off x="10299900" y="2496000"/>
+            <a:ext cx="660000" cy="660000"/>
+          </a:xfrm>
+          <a:prstGeom prst="rect">
+            <a:avLst/>
+          </a:prstGeom>
+        </p:spPr>
+      </p:pic>
+      <p:pic>
+        <p:nvPicPr>
+          <p:cNvPr id="131" name="Picture 130" descr="image.png"/>
+          <p:cNvPicPr>
+            <a:picLocks noChangeAspect="1"/>
+          </p:cNvPicPr>
+          <p:nvPr/>
+        </p:nvPicPr>
+        <p:blipFill>
+          <a:blip r:embed="rId2">
+            <a:extLst>
+              <a:ext uri="{96DAC541-7B7A-43D3-8B79-37D633B846F1}">
+                <ns0:svgBlip xmlns:ns0="http://schemas.microsoft.com/office/drawing/2016/SVG/main" r:embed="rId21"/>
+              </a:ext>
+            </a:extLst>
+          </a:blip>
+          <a:stretch>
+            <a:fillRect/>
+          </a:stretch>
+        </p:blipFill>
+        <p:spPr>
+          <a:xfrm>
+            <a:off x="1018740" y="2496000"/>
+            <a:ext cx="660000" cy="660000"/>
+          </a:xfrm>
+          <a:prstGeom prst="rect">
+            <a:avLst/>
+          </a:prstGeom>
+        </p:spPr>
+      </p:pic>
+      <p:pic>
+        <p:nvPicPr>
+          <p:cNvPr id="132" name="Picture 131" descr="image.png"/>
+          <p:cNvPicPr>
+            <a:picLocks noChangeAspect="1"/>
+          </p:cNvPicPr>
+          <p:nvPr/>
+        </p:nvPicPr>
+        <p:blipFill>
+          <a:blip r:embed="rId3">
+            <a:extLst>
+              <a:ext uri="{96DAC541-7B7A-43D3-8B79-37D633B846F1}">
+                <ns1:svgBlip xmlns:ns1="http://schemas.microsoft.com/office/drawing/2016/SVG/main" r:embed="rId20"/>
+              </a:ext>
+            </a:extLst>
+          </a:blip>
+          <a:stretch>
+            <a:fillRect/>
+          </a:stretch>
+        </p:blipFill>
+        <p:spPr>
+          <a:xfrm>
+            <a:off x="2874972" y="2496000"/>
+            <a:ext cx="660000" cy="660000"/>
+          </a:xfrm>
+          <a:prstGeom prst="rect">
+            <a:avLst/>
+          </a:prstGeom>
+        </p:spPr>
+      </p:pic>
+      <p:pic>
+        <p:nvPicPr>
+          <p:cNvPr id="133" name="Picture 132" descr="image.png"/>
+          <p:cNvPicPr>
+            <a:picLocks noChangeAspect="1"/>
+          </p:cNvPicPr>
+          <p:nvPr/>
+        </p:nvPicPr>
+        <p:blipFill>
+          <a:blip r:embed="rId4">
+            <a:extLst>
+              <a:ext uri="{96DAC541-7B7A-43D3-8B79-37D633B846F1}">
+                <ns2:svgBlip xmlns:ns2="http://schemas.microsoft.com/office/drawing/2016/SVG/main" r:embed="rId24"/>
+              </a:ext>
+            </a:extLst>
+          </a:blip>
+          <a:stretch>
+            <a:fillRect/>
+          </a:stretch>
+        </p:blipFill>
+        <p:spPr>
+          <a:xfrm>
+            <a:off x="4731204" y="2496000"/>
+            <a:ext cx="660000" cy="660000"/>
+          </a:xfrm>
+          <a:prstGeom prst="rect">
+            <a:avLst/>
+          </a:prstGeom>
+        </p:spPr>
+      </p:pic>
+      <p:pic>
+        <p:nvPicPr>
+          <p:cNvPr id="134" name="Picture 133" descr="image.png"/>
+          <p:cNvPicPr>
+            <a:picLocks noChangeAspect="1"/>
+          </p:cNvPicPr>
+          <p:nvPr/>
+        </p:nvPicPr>
+        <p:blipFill>
+          <a:blip r:embed="rId5">
+            <a:extLst>
+              <a:ext uri="{96DAC541-7B7A-43D3-8B79-37D633B846F1}">
+                <ns3:svgBlip xmlns:ns3="http://schemas.microsoft.com/office/drawing/2016/SVG/main" r:embed="rId23"/>
+              </a:ext>
+            </a:extLst>
+          </a:blip>
+          <a:stretch>
+            <a:fillRect/>
+          </a:stretch>
+        </p:blipFill>
+        <p:spPr>
+          <a:xfrm>
+            <a:off x="6587436" y="2496000"/>
+            <a:ext cx="660000" cy="660000"/>
+          </a:xfrm>
+          <a:prstGeom prst="rect">
+            <a:avLst/>
+          </a:prstGeom>
+        </p:spPr>
+      </p:pic>
+      <p:pic>
+        <p:nvPicPr>
+          <p:cNvPr id="135" name="Picture 134" descr="image.png"/>
+          <p:cNvPicPr>
+            <a:picLocks noChangeAspect="1"/>
+          </p:cNvPicPr>
+          <p:nvPr/>
+        </p:nvPicPr>
+        <p:blipFill>
+          <a:blip r:embed="rId6">
+            <a:extLst>
+              <a:ext uri="{96DAC541-7B7A-43D3-8B79-37D633B846F1}">
+                <ns4:svgBlip xmlns:ns4="http://schemas.microsoft.com/office/drawing/2016/SVG/main" r:embed="rId25"/>
+              </a:ext>
+            </a:extLst>
+          </a:blip>
+          <a:stretch>
+            <a:fillRect/>
+          </a:stretch>
+        </p:blipFill>
+        <p:spPr>
+          <a:xfrm>
+            <a:off x="8443668" y="2496000"/>
+            <a:ext cx="660000" cy="660000"/>
+          </a:xfrm>
+          <a:prstGeom prst="rect">
+            <a:avLst/>
+          </a:prstGeom>
+        </p:spPr>
+      </p:pic>
+      <p:pic>
+        <p:nvPicPr>
+          <p:cNvPr id="136" name="Picture 135" descr="image.png"/>
+          <p:cNvPicPr>
+            <a:picLocks noChangeAspect="1"/>
+          </p:cNvPicPr>
+          <p:nvPr/>
+        </p:nvPicPr>
+        <p:blipFill>
+          <a:blip r:embed="rId7">
+            <a:extLst>
+              <a:ext uri="{96DAC541-7B7A-43D3-8B79-37D633B846F1}">
+                <ns5:svgBlip xmlns:ns5="http://schemas.microsoft.com/office/drawing/2016/SVG/main" r:embed="rId22"/>
               </a:ext>
             </a:extLst>
           </a:blip>
@@ -10578,7 +10764,7 @@
                 </a:solidFill>
                 <a:latin typeface="Calibri"/>
               </a:rPr>
-              <a:t>12</a:t>
+              <a:t>14</a:t>
             </a:r>
           </a:p>
         </p:txBody>
@@ -10926,6 +11112,186 @@
             <a:extLst>
               <a:ext uri="{96DAC541-7B7A-43D3-8B79-37D633B846F1}">
                 <ns5:svgBlip xmlns:ns5="http://schemas.microsoft.com/office/drawing/2016/SVG/main" r:embed="rId16"/>
+              </a:ext>
+            </a:extLst>
+          </a:blip>
+          <a:stretch>
+            <a:fillRect/>
+          </a:stretch>
+        </p:blipFill>
+        <p:spPr>
+          <a:xfrm>
+            <a:off x="795528" y="5513832"/>
+            <a:ext cx="246888" cy="246888"/>
+          </a:xfrm>
+          <a:prstGeom prst="rect">
+            <a:avLst/>
+          </a:prstGeom>
+        </p:spPr>
+      </p:pic>
+      <p:pic>
+        <p:nvPicPr>
+          <p:cNvPr id="184" name="Picture 183" descr="image.png"/>
+          <p:cNvPicPr>
+            <a:picLocks noChangeAspect="1"/>
+          </p:cNvPicPr>
+          <p:nvPr/>
+        </p:nvPicPr>
+        <p:blipFill>
+          <a:blip r:embed="rId2">
+            <a:extLst>
+              <a:ext uri="{96DAC541-7B7A-43D3-8B79-37D633B846F1}">
+                <ns0:svgBlip xmlns:ns0="http://schemas.microsoft.com/office/drawing/2016/SVG/main" r:embed="rId21"/>
+              </a:ext>
+            </a:extLst>
+          </a:blip>
+          <a:stretch>
+            <a:fillRect/>
+          </a:stretch>
+        </p:blipFill>
+        <p:spPr>
+          <a:xfrm>
+            <a:off x="795528" y="1673352"/>
+            <a:ext cx="246888" cy="246888"/>
+          </a:xfrm>
+          <a:prstGeom prst="rect">
+            <a:avLst/>
+          </a:prstGeom>
+        </p:spPr>
+      </p:pic>
+      <p:pic>
+        <p:nvPicPr>
+          <p:cNvPr id="185" name="Picture 184" descr="image.png"/>
+          <p:cNvPicPr>
+            <a:picLocks noChangeAspect="1"/>
+          </p:cNvPicPr>
+          <p:nvPr/>
+        </p:nvPicPr>
+        <p:blipFill>
+          <a:blip r:embed="rId3">
+            <a:extLst>
+              <a:ext uri="{96DAC541-7B7A-43D3-8B79-37D633B846F1}">
+                <ns1:svgBlip xmlns:ns1="http://schemas.microsoft.com/office/drawing/2016/SVG/main" r:embed="rId20"/>
+              </a:ext>
+            </a:extLst>
+          </a:blip>
+          <a:stretch>
+            <a:fillRect/>
+          </a:stretch>
+        </p:blipFill>
+        <p:spPr>
+          <a:xfrm>
+            <a:off x="795528" y="2441448"/>
+            <a:ext cx="246888" cy="246888"/>
+          </a:xfrm>
+          <a:prstGeom prst="rect">
+            <a:avLst/>
+          </a:prstGeom>
+        </p:spPr>
+      </p:pic>
+      <p:pic>
+        <p:nvPicPr>
+          <p:cNvPr id="186" name="Picture 185" descr="image.png"/>
+          <p:cNvPicPr>
+            <a:picLocks noChangeAspect="1"/>
+          </p:cNvPicPr>
+          <p:nvPr/>
+        </p:nvPicPr>
+        <p:blipFill>
+          <a:blip r:embed="rId4">
+            <a:extLst>
+              <a:ext uri="{96DAC541-7B7A-43D3-8B79-37D633B846F1}">
+                <ns2:svgBlip xmlns:ns2="http://schemas.microsoft.com/office/drawing/2016/SVG/main" r:embed="rId24"/>
+              </a:ext>
+            </a:extLst>
+          </a:blip>
+          <a:stretch>
+            <a:fillRect/>
+          </a:stretch>
+        </p:blipFill>
+        <p:spPr>
+          <a:xfrm>
+            <a:off x="795528" y="3209544"/>
+            <a:ext cx="246888" cy="246888"/>
+          </a:xfrm>
+          <a:prstGeom prst="rect">
+            <a:avLst/>
+          </a:prstGeom>
+        </p:spPr>
+      </p:pic>
+      <p:pic>
+        <p:nvPicPr>
+          <p:cNvPr id="187" name="Picture 186" descr="image.png"/>
+          <p:cNvPicPr>
+            <a:picLocks noChangeAspect="1"/>
+          </p:cNvPicPr>
+          <p:nvPr/>
+        </p:nvPicPr>
+        <p:blipFill>
+          <a:blip r:embed="rId5">
+            <a:extLst>
+              <a:ext uri="{96DAC541-7B7A-43D3-8B79-37D633B846F1}">
+                <ns3:svgBlip xmlns:ns3="http://schemas.microsoft.com/office/drawing/2016/SVG/main" r:embed="rId23"/>
+              </a:ext>
+            </a:extLst>
+          </a:blip>
+          <a:stretch>
+            <a:fillRect/>
+          </a:stretch>
+        </p:blipFill>
+        <p:spPr>
+          <a:xfrm>
+            <a:off x="795528" y="3977640"/>
+            <a:ext cx="246888" cy="246888"/>
+          </a:xfrm>
+          <a:prstGeom prst="rect">
+            <a:avLst/>
+          </a:prstGeom>
+        </p:spPr>
+      </p:pic>
+      <p:pic>
+        <p:nvPicPr>
+          <p:cNvPr id="188" name="Picture 187" descr="image.png"/>
+          <p:cNvPicPr>
+            <a:picLocks noChangeAspect="1"/>
+          </p:cNvPicPr>
+          <p:nvPr/>
+        </p:nvPicPr>
+        <p:blipFill>
+          <a:blip r:embed="rId6">
+            <a:extLst>
+              <a:ext uri="{96DAC541-7B7A-43D3-8B79-37D633B846F1}">
+                <ns4:svgBlip xmlns:ns4="http://schemas.microsoft.com/office/drawing/2016/SVG/main" r:embed="rId25"/>
+              </a:ext>
+            </a:extLst>
+          </a:blip>
+          <a:stretch>
+            <a:fillRect/>
+          </a:stretch>
+        </p:blipFill>
+        <p:spPr>
+          <a:xfrm>
+            <a:off x="795528" y="4745736"/>
+            <a:ext cx="246888" cy="246888"/>
+          </a:xfrm>
+          <a:prstGeom prst="rect">
+            <a:avLst/>
+          </a:prstGeom>
+        </p:spPr>
+      </p:pic>
+      <p:pic>
+        <p:nvPicPr>
+          <p:cNvPr id="189" name="Picture 188" descr="image.png"/>
+          <p:cNvPicPr>
+            <a:picLocks noChangeAspect="1"/>
+          </p:cNvPicPr>
+          <p:nvPr/>
+        </p:nvPicPr>
+        <p:blipFill>
+          <a:blip r:embed="rId7">
+            <a:extLst>
+              <a:ext uri="{96DAC541-7B7A-43D3-8B79-37D633B846F1}">
+                <ns5:svgBlip xmlns:ns5="http://schemas.microsoft.com/office/drawing/2016/SVG/main" r:embed="rId22"/>
               </a:ext>
             </a:extLst>
           </a:blip>
@@ -12795,3274 +13161,6 @@
                                   <p:cTn id="171" dur="550"/>
                                   <p:tgtEl>
                                     <p:spTgt spid="53"/>
-                                  </p:tgtEl>
-                                </p:cBhvr>
-                              </p:animEffect>
-                            </p:childTnLst>
-                          </p:cTn>
-                        </p:par>
-                      </p:childTnLst>
-                    </p:cTn>
-                  </p:par>
-                </p:childTnLst>
-              </p:cTn>
-              <p:prevCondLst>
-                <p:cond evt="onPrev" delay="0">
-                  <p:tgtEl>
-                    <p:sldTgt/>
-                  </p:tgtEl>
-                </p:cond>
-              </p:prevCondLst>
-              <p:nextCondLst>
-                <p:cond evt="onNext" delay="0">
-                  <p:tgtEl>
-                    <p:sldTgt/>
-                  </p:tgtEl>
-                </p:cond>
-              </p:nextCondLst>
-            </p:seq>
-          </p:childTnLst>
-        </p:cTn>
-      </p:par>
-    </p:tnLst>
-  </p:timing>
-</p:sld>
-</file>
-
-<file path=ppt/slides/slide13.xml><?xml version="1.0" encoding="utf-8"?>
-<p:sld xmlns:a="http://schemas.openxmlformats.org/drawingml/2006/main" xmlns:p="http://schemas.openxmlformats.org/presentationml/2006/main" xmlns:r="http://schemas.openxmlformats.org/officeDocument/2006/relationships">
-  <p:cSld>
-    <p:spTree>
-      <p:nvGrpSpPr>
-        <p:cNvPr id="1" name=""/>
-        <p:cNvGrpSpPr/>
-        <p:nvPr/>
-      </p:nvGrpSpPr>
-      <p:grpSpPr/>
-      <p:sp>
-        <p:nvSpPr>
-          <p:cNvPr id="2" name="Rectangle 1"/>
-          <p:cNvSpPr/>
-          <p:nvPr/>
-        </p:nvSpPr>
-        <p:spPr>
-          <a:xfrm>
-            <a:off x="0" y="0"/>
-            <a:ext cx="12191695" cy="6858000"/>
-          </a:xfrm>
-          <a:prstGeom prst="rect">
-            <a:avLst/>
-          </a:prstGeom>
-          <a:solidFill>
-            <a:srgbClr val="FFFFFF"/>
-          </a:solidFill>
-          <a:ln>
-            <a:noFill/>
-          </a:ln>
-          <a:effectLst/>
-        </p:spPr>
-        <p:style>
-          <a:lnRef idx="1">
-            <a:schemeClr val="accent1"/>
-          </a:lnRef>
-          <a:fillRef idx="3">
-            <a:schemeClr val="accent1"/>
-          </a:fillRef>
-          <a:effectRef idx="2">
-            <a:schemeClr val="accent1"/>
-          </a:effectRef>
-          <a:fontRef idx="minor">
-            <a:schemeClr val="lt1"/>
-          </a:fontRef>
-        </p:style>
-        <p:txBody>
-          <a:bodyPr rtlCol="0" anchor="ctr"/>
-          <a:lstStyle/>
-          <a:p>
-            <a:pPr algn="ctr"/>
-          </a:p>
-        </p:txBody>
-      </p:sp>
-      <p:sp>
-        <p:nvSpPr>
-          <p:cNvPr id="3" name="Oval 2"/>
-          <p:cNvSpPr/>
-          <p:nvPr/>
-        </p:nvSpPr>
-        <p:spPr>
-          <a:xfrm>
-            <a:off x="548640" y="502920"/>
-            <a:ext cx="640080" cy="640080"/>
-          </a:xfrm>
-          <a:prstGeom prst="ellipse">
-            <a:avLst/>
-          </a:prstGeom>
-          <a:solidFill>
-            <a:srgbClr val="1F4E3D"/>
-          </a:solidFill>
-          <a:ln>
-            <a:noFill/>
-          </a:ln>
-          <a:effectLst/>
-        </p:spPr>
-        <p:style>
-          <a:lnRef idx="1">
-            <a:schemeClr val="accent1"/>
-          </a:lnRef>
-          <a:fillRef idx="3">
-            <a:schemeClr val="accent1"/>
-          </a:fillRef>
-          <a:effectRef idx="2">
-            <a:schemeClr val="accent1"/>
-          </a:effectRef>
-          <a:fontRef idx="minor">
-            <a:schemeClr val="lt1"/>
-          </a:fontRef>
-        </p:style>
-        <p:txBody>
-          <a:bodyPr rtlCol="0" anchor="ctr"/>
-          <a:lstStyle/>
-          <a:p>
-            <a:pPr algn="ctr"/>
-          </a:p>
-        </p:txBody>
-      </p:sp>
-      <p:sp>
-        <p:nvSpPr>
-          <p:cNvPr id="4" name="TextBox 3"/>
-          <p:cNvSpPr txBox="1"/>
-          <p:nvPr/>
-        </p:nvSpPr>
-        <p:spPr>
-          <a:xfrm>
-            <a:off x="548640" y="502920"/>
-            <a:ext cx="640080" cy="640080"/>
-          </a:xfrm>
-          <a:prstGeom prst="rect">
-            <a:avLst/>
-          </a:prstGeom>
-          <a:noFill/>
-        </p:spPr>
-        <p:txBody>
-          <a:bodyPr wrap="square" anchor="ctr" lIns="0" rIns="0" tIns="0" bIns="0">
-            <a:spAutoFit/>
-          </a:bodyPr>
-          <a:lstStyle/>
-          <a:p>
-            <a:pPr algn="ctr"/>
-            <a:r>
-              <a:rPr sz="2600" b="1" i="0">
-                <a:solidFill>
-                  <a:srgbClr val="FFFFFF"/>
-                </a:solidFill>
-                <a:latin typeface="Cambria"/>
-              </a:rPr>
-              <a:t>3</a:t>
-            </a:r>
-          </a:p>
-        </p:txBody>
-      </p:sp>
-      <p:sp>
-        <p:nvSpPr>
-          <p:cNvPr id="5" name="TextBox 4"/>
-          <p:cNvSpPr txBox="1"/>
-          <p:nvPr/>
-        </p:nvSpPr>
-        <p:spPr>
-          <a:xfrm>
-            <a:off x="1371600" y="457200"/>
-            <a:ext cx="10241280" cy="822960"/>
-          </a:xfrm>
-          <a:prstGeom prst="rect">
-            <a:avLst/>
-          </a:prstGeom>
-          <a:noFill/>
-        </p:spPr>
-        <p:txBody>
-          <a:bodyPr wrap="square" anchor="t" lIns="0" rIns="0" tIns="0" bIns="0">
-            <a:spAutoFit/>
-          </a:bodyPr>
-          <a:lstStyle/>
-          <a:p>
-            <a:pPr algn="l">
-              <a:spcAft>
-                <a:spcPts val="200"/>
-              </a:spcAft>
-            </a:pPr>
-            <a:r>
-              <a:rPr sz="1250" b="1" i="0">
-                <a:solidFill>
-                  <a:srgbClr val="2C7A5A"/>
-                </a:solidFill>
-                <a:latin typeface="Calibri"/>
-              </a:rPr>
-              <a:t>3. THIẾT BỊ SẢN XUẤT CHÍNH</a:t>
-            </a:r>
-          </a:p>
-          <a:p>
-            <a:pPr algn="l"/>
-            <a:r>
-              <a:rPr sz="2700" b="1" i="0">
-                <a:solidFill>
-                  <a:srgbClr val="1F4E3D"/>
-                </a:solidFill>
-                <a:latin typeface="Cambria"/>
-              </a:rPr>
-              <a:t>Cấu tạo · nguyên lý · vận hành</a:t>
-            </a:r>
-          </a:p>
-        </p:txBody>
-      </p:sp>
-      <p:sp>
-        <p:nvSpPr>
-          <p:cNvPr id="6" name="Rounded Rectangle 5"/>
-          <p:cNvSpPr/>
-          <p:nvPr/>
-        </p:nvSpPr>
-        <p:spPr>
-          <a:xfrm>
-            <a:off x="548640" y="1463040"/>
-            <a:ext cx="3611880" cy="4617720"/>
-          </a:xfrm>
-          <a:prstGeom prst="roundRect">
-            <a:avLst>
-              <a:gd name="adj" fmla="val 6000"/>
-            </a:avLst>
-          </a:prstGeom>
-          <a:solidFill>
-            <a:srgbClr val="EEF4F0"/>
-          </a:solidFill>
-          <a:ln w="12700">
-            <a:solidFill>
-              <a:srgbClr val="D5E1DA"/>
-            </a:solidFill>
-          </a:ln>
-          <a:effectLst/>
-        </p:spPr>
-        <p:style>
-          <a:lnRef idx="1">
-            <a:schemeClr val="accent1"/>
-          </a:lnRef>
-          <a:fillRef idx="3">
-            <a:schemeClr val="accent1"/>
-          </a:fillRef>
-          <a:effectRef idx="2">
-            <a:schemeClr val="accent1"/>
-          </a:effectRef>
-          <a:fontRef idx="minor">
-            <a:schemeClr val="lt1"/>
-          </a:fontRef>
-        </p:style>
-        <p:txBody>
-          <a:bodyPr rtlCol="0" anchor="ctr"/>
-          <a:lstStyle/>
-          <a:p>
-            <a:pPr algn="ctr"/>
-          </a:p>
-        </p:txBody>
-      </p:sp>
-      <p:sp>
-        <p:nvSpPr>
-          <p:cNvPr id="7" name="Rounded Rectangle 6"/>
-          <p:cNvSpPr/>
-          <p:nvPr/>
-        </p:nvSpPr>
-        <p:spPr>
-          <a:xfrm>
-            <a:off x="548640" y="1463040"/>
-            <a:ext cx="3611880" cy="822960"/>
-          </a:xfrm>
-          <a:prstGeom prst="roundRect">
-            <a:avLst>
-              <a:gd name="adj" fmla="val 6000"/>
-            </a:avLst>
-          </a:prstGeom>
-          <a:solidFill>
-            <a:srgbClr val="2C7A5A"/>
-          </a:solidFill>
-          <a:ln>
-            <a:noFill/>
-          </a:ln>
-          <a:effectLst/>
-        </p:spPr>
-        <p:style>
-          <a:lnRef idx="1">
-            <a:schemeClr val="accent1"/>
-          </a:lnRef>
-          <a:fillRef idx="3">
-            <a:schemeClr val="accent1"/>
-          </a:fillRef>
-          <a:effectRef idx="2">
-            <a:schemeClr val="accent1"/>
-          </a:effectRef>
-          <a:fontRef idx="minor">
-            <a:schemeClr val="lt1"/>
-          </a:fontRef>
-        </p:style>
-        <p:txBody>
-          <a:bodyPr rtlCol="0" anchor="ctr"/>
-          <a:lstStyle/>
-          <a:p>
-            <a:pPr algn="ctr"/>
-          </a:p>
-        </p:txBody>
-      </p:sp>
-      <p:sp>
-        <p:nvSpPr>
-          <p:cNvPr id="8" name="Rectangle 7"/>
-          <p:cNvSpPr/>
-          <p:nvPr/>
-        </p:nvSpPr>
-        <p:spPr>
-          <a:xfrm>
-            <a:off x="548640" y="1920240"/>
-            <a:ext cx="3611880" cy="365760"/>
-          </a:xfrm>
-          <a:prstGeom prst="rect">
-            <a:avLst/>
-          </a:prstGeom>
-          <a:solidFill>
-            <a:srgbClr val="2C7A5A"/>
-          </a:solidFill>
-          <a:ln>
-            <a:noFill/>
-          </a:ln>
-          <a:effectLst/>
-        </p:spPr>
-        <p:style>
-          <a:lnRef idx="1">
-            <a:schemeClr val="accent1"/>
-          </a:lnRef>
-          <a:fillRef idx="3">
-            <a:schemeClr val="accent1"/>
-          </a:fillRef>
-          <a:effectRef idx="2">
-            <a:schemeClr val="accent1"/>
-          </a:effectRef>
-          <a:fontRef idx="minor">
-            <a:schemeClr val="lt1"/>
-          </a:fontRef>
-        </p:style>
-        <p:txBody>
-          <a:bodyPr rtlCol="0" anchor="ctr"/>
-          <a:lstStyle/>
-          <a:p>
-            <a:pPr algn="ctr"/>
-          </a:p>
-        </p:txBody>
-      </p:sp>
-      <p:sp>
-        <p:nvSpPr>
-          <p:cNvPr id="9" name="TextBox 8"/>
-          <p:cNvSpPr txBox="1"/>
-          <p:nvPr/>
-        </p:nvSpPr>
-        <p:spPr>
-          <a:xfrm>
-            <a:off x="1777240" y="1463040"/>
-            <a:ext cx="2154680" cy="822960"/>
-          </a:xfrm>
-          <a:prstGeom prst="rect">
-            <a:avLst/>
-          </a:prstGeom>
-          <a:noFill/>
-        </p:spPr>
-        <p:txBody>
-          <a:bodyPr wrap="square" anchor="ctr" lIns="0" rIns="0" tIns="0" bIns="0">
-            <a:spAutoFit/>
-          </a:bodyPr>
-          <a:lstStyle/>
-          <a:p>
-            <a:pPr algn="l">
-              <a:spcAft>
-                <a:spcPts val="100"/>
-              </a:spcAft>
-            </a:pPr>
-            <a:r>
-              <a:rPr sz="1600" b="1" i="0">
-                <a:solidFill>
-                  <a:srgbClr val="FFFFFF"/>
-                </a:solidFill>
-                <a:latin typeface="Calibri"/>
-              </a:rPr>
-              <a:t>Máy đánh paste</a:t>
-            </a:r>
-          </a:p>
-          <a:p>
-            <a:pPr algn="l"/>
-            <a:r>
-              <a:rPr sz="1300" b="0" i="0">
-                <a:solidFill>
-                  <a:srgbClr val="E9F2EC"/>
-                </a:solidFill>
-                <a:latin typeface="Calibri"/>
-              </a:rPr>
-              <a:t>Mã: ĐP01B</a:t>
-            </a:r>
-          </a:p>
-        </p:txBody>
-      </p:sp>
-      <p:pic>
-        <p:nvPicPr>
-          <p:cNvPr id="10" name="Picture 9" descr="eq_mixer.jpg"/>
-          <p:cNvPicPr>
-            <a:picLocks noChangeAspect="1"/>
-          </p:cNvPicPr>
-          <p:nvPr/>
-        </p:nvPicPr>
-        <p:blipFill>
-          <a:blip r:embed="rId2"/>
-          <a:srcRect t="33020" b="33020"/>
-          <a:stretch>
-            <a:fillRect/>
-          </a:stretch>
-        </p:blipFill>
-        <p:spPr>
-          <a:xfrm>
-            <a:off x="713232" y="2395728"/>
-            <a:ext cx="3282696" cy="1280160"/>
-          </a:xfrm>
-          <a:prstGeom prst="rect">
-            <a:avLst/>
-          </a:prstGeom>
-          <a:ln w="25400">
-            <a:solidFill>
-              <a:srgbClr val="FFFFFF"/>
-            </a:solidFill>
-          </a:ln>
-          <a:effectLst/>
-        </p:spPr>
-      </p:pic>
-      <p:sp>
-        <p:nvSpPr>
-          <p:cNvPr id="11" name="TextBox 10"/>
-          <p:cNvSpPr txBox="1"/>
-          <p:nvPr/>
-        </p:nvSpPr>
-        <p:spPr>
-          <a:xfrm>
-            <a:off x="749808" y="3794760"/>
-            <a:ext cx="3209544" cy="749808"/>
-          </a:xfrm>
-          <a:prstGeom prst="rect">
-            <a:avLst/>
-          </a:prstGeom>
-          <a:noFill/>
-        </p:spPr>
-        <p:txBody>
-          <a:bodyPr wrap="square" anchor="t" lIns="0" rIns="0" tIns="0" bIns="0">
-            <a:spAutoFit/>
-          </a:bodyPr>
-          <a:lstStyle/>
-          <a:p>
-            <a:pPr algn="l">
-              <a:lnSpc>
-                <a:spcPct val="100000"/>
-              </a:lnSpc>
-            </a:pPr>
-            <a:r>
-              <a:rPr sz="1350" b="1" i="0">
-                <a:solidFill>
-                  <a:srgbClr val="2C7A5A"/>
-                </a:solidFill>
-                <a:latin typeface="Calibri"/>
-              </a:rPr>
-              <a:t>Cấu tạo: </a:t>
-            </a:r>
-            <a:r>
-              <a:rPr sz="1350" b="0" i="0">
-                <a:solidFill>
-                  <a:srgbClr val="222B28"/>
-                </a:solidFill>
-                <a:latin typeface="Calibri"/>
-              </a:rPr>
-              <a:t>Động cơ 5–20 HP, trục &amp; cánh khuấy inox 304, bồn inox.</a:t>
-            </a:r>
-          </a:p>
-        </p:txBody>
-      </p:sp>
-      <p:sp>
-        <p:nvSpPr>
-          <p:cNvPr id="12" name="TextBox 11"/>
-          <p:cNvSpPr txBox="1"/>
-          <p:nvPr/>
-        </p:nvSpPr>
-        <p:spPr>
-          <a:xfrm>
-            <a:off x="749808" y="4553712"/>
-            <a:ext cx="3209544" cy="749808"/>
-          </a:xfrm>
-          <a:prstGeom prst="rect">
-            <a:avLst/>
-          </a:prstGeom>
-          <a:noFill/>
-        </p:spPr>
-        <p:txBody>
-          <a:bodyPr wrap="square" anchor="t" lIns="0" rIns="0" tIns="0" bIns="0">
-            <a:spAutoFit/>
-          </a:bodyPr>
-          <a:lstStyle/>
-          <a:p>
-            <a:pPr algn="l">
-              <a:lnSpc>
-                <a:spcPct val="100000"/>
-              </a:lnSpc>
-            </a:pPr>
-            <a:r>
-              <a:rPr sz="1350" b="1" i="0">
-                <a:solidFill>
-                  <a:srgbClr val="2C7A5A"/>
-                </a:solidFill>
-                <a:latin typeface="Calibri"/>
-              </a:rPr>
-              <a:t>Nguyên lý: </a:t>
-            </a:r>
-            <a:r>
-              <a:rPr sz="1350" b="0" i="0">
-                <a:solidFill>
-                  <a:srgbClr val="222B28"/>
-                </a:solidFill>
-                <a:latin typeface="Calibri"/>
-              </a:rPr>
-              <a:t>Quay 900–1200 v/p tạo lực cắt, phân tán bột màu/độn vào nhựa.</a:t>
-            </a:r>
-          </a:p>
-        </p:txBody>
-      </p:sp>
-      <p:sp>
-        <p:nvSpPr>
-          <p:cNvPr id="13" name="TextBox 12"/>
-          <p:cNvSpPr txBox="1"/>
-          <p:nvPr/>
-        </p:nvSpPr>
-        <p:spPr>
-          <a:xfrm>
-            <a:off x="749808" y="5312664"/>
-            <a:ext cx="3209544" cy="749808"/>
-          </a:xfrm>
-          <a:prstGeom prst="rect">
-            <a:avLst/>
-          </a:prstGeom>
-          <a:noFill/>
-        </p:spPr>
-        <p:txBody>
-          <a:bodyPr wrap="square" anchor="t" lIns="0" rIns="0" tIns="0" bIns="0">
-            <a:spAutoFit/>
-          </a:bodyPr>
-          <a:lstStyle/>
-          <a:p>
-            <a:pPr algn="l">
-              <a:lnSpc>
-                <a:spcPct val="100000"/>
-              </a:lnSpc>
-            </a:pPr>
-            <a:r>
-              <a:rPr sz="1350" b="1" i="0">
-                <a:solidFill>
-                  <a:srgbClr val="2C7A5A"/>
-                </a:solidFill>
-                <a:latin typeface="Calibri"/>
-              </a:rPr>
-              <a:t>Thao tác: </a:t>
-            </a:r>
-            <a:r>
-              <a:rPr sz="1350" b="0" i="0">
-                <a:solidFill>
-                  <a:srgbClr val="222B28"/>
-                </a:solidFill>
-                <a:latin typeface="Calibri"/>
-              </a:rPr>
-              <a:t>Hạ cánh khuấy ngập paste, tăng tốc dần, kiểm soát nhiệt.</a:t>
-            </a:r>
-          </a:p>
-        </p:txBody>
-      </p:sp>
-      <p:sp>
-        <p:nvSpPr>
-          <p:cNvPr id="14" name="Rounded Rectangle 13"/>
-          <p:cNvSpPr/>
-          <p:nvPr/>
-        </p:nvSpPr>
-        <p:spPr>
-          <a:xfrm>
-            <a:off x="4416552" y="1463040"/>
-            <a:ext cx="3611880" cy="4617720"/>
-          </a:xfrm>
-          <a:prstGeom prst="roundRect">
-            <a:avLst>
-              <a:gd name="adj" fmla="val 6000"/>
-            </a:avLst>
-          </a:prstGeom>
-          <a:solidFill>
-            <a:srgbClr val="EEF4F0"/>
-          </a:solidFill>
-          <a:ln w="12700">
-            <a:solidFill>
-              <a:srgbClr val="D5E1DA"/>
-            </a:solidFill>
-          </a:ln>
-          <a:effectLst/>
-        </p:spPr>
-        <p:style>
-          <a:lnRef idx="1">
-            <a:schemeClr val="accent1"/>
-          </a:lnRef>
-          <a:fillRef idx="3">
-            <a:schemeClr val="accent1"/>
-          </a:fillRef>
-          <a:effectRef idx="2">
-            <a:schemeClr val="accent1"/>
-          </a:effectRef>
-          <a:fontRef idx="minor">
-            <a:schemeClr val="lt1"/>
-          </a:fontRef>
-        </p:style>
-        <p:txBody>
-          <a:bodyPr rtlCol="0" anchor="ctr"/>
-          <a:lstStyle/>
-          <a:p>
-            <a:pPr algn="ctr"/>
-          </a:p>
-        </p:txBody>
-      </p:sp>
-      <p:sp>
-        <p:nvSpPr>
-          <p:cNvPr id="15" name="Rounded Rectangle 14"/>
-          <p:cNvSpPr/>
-          <p:nvPr/>
-        </p:nvSpPr>
-        <p:spPr>
-          <a:xfrm>
-            <a:off x="4416552" y="1463040"/>
-            <a:ext cx="3611880" cy="822960"/>
-          </a:xfrm>
-          <a:prstGeom prst="roundRect">
-            <a:avLst>
-              <a:gd name="adj" fmla="val 6000"/>
-            </a:avLst>
-          </a:prstGeom>
-          <a:solidFill>
-            <a:srgbClr val="1F4E3D"/>
-          </a:solidFill>
-          <a:ln>
-            <a:noFill/>
-          </a:ln>
-          <a:effectLst/>
-        </p:spPr>
-        <p:style>
-          <a:lnRef idx="1">
-            <a:schemeClr val="accent1"/>
-          </a:lnRef>
-          <a:fillRef idx="3">
-            <a:schemeClr val="accent1"/>
-          </a:fillRef>
-          <a:effectRef idx="2">
-            <a:schemeClr val="accent1"/>
-          </a:effectRef>
-          <a:fontRef idx="minor">
-            <a:schemeClr val="lt1"/>
-          </a:fontRef>
-        </p:style>
-        <p:txBody>
-          <a:bodyPr rtlCol="0" anchor="ctr"/>
-          <a:lstStyle/>
-          <a:p>
-            <a:pPr algn="ctr"/>
-          </a:p>
-        </p:txBody>
-      </p:sp>
-      <p:sp>
-        <p:nvSpPr>
-          <p:cNvPr id="16" name="Rectangle 15"/>
-          <p:cNvSpPr/>
-          <p:nvPr/>
-        </p:nvSpPr>
-        <p:spPr>
-          <a:xfrm>
-            <a:off x="4416552" y="1920240"/>
-            <a:ext cx="3611880" cy="365760"/>
-          </a:xfrm>
-          <a:prstGeom prst="rect">
-            <a:avLst/>
-          </a:prstGeom>
-          <a:solidFill>
-            <a:srgbClr val="1F4E3D"/>
-          </a:solidFill>
-          <a:ln>
-            <a:noFill/>
-          </a:ln>
-          <a:effectLst/>
-        </p:spPr>
-        <p:style>
-          <a:lnRef idx="1">
-            <a:schemeClr val="accent1"/>
-          </a:lnRef>
-          <a:fillRef idx="3">
-            <a:schemeClr val="accent1"/>
-          </a:fillRef>
-          <a:effectRef idx="2">
-            <a:schemeClr val="accent1"/>
-          </a:effectRef>
-          <a:fontRef idx="minor">
-            <a:schemeClr val="lt1"/>
-          </a:fontRef>
-        </p:style>
-        <p:txBody>
-          <a:bodyPr rtlCol="0" anchor="ctr"/>
-          <a:lstStyle/>
-          <a:p>
-            <a:pPr algn="ctr"/>
-          </a:p>
-        </p:txBody>
-      </p:sp>
-      <p:sp>
-        <p:nvSpPr>
-          <p:cNvPr id="17" name="TextBox 16"/>
-          <p:cNvSpPr txBox="1"/>
-          <p:nvPr/>
-        </p:nvSpPr>
-        <p:spPr>
-          <a:xfrm>
-            <a:off x="5645152" y="1463040"/>
-            <a:ext cx="2154680" cy="822960"/>
-          </a:xfrm>
-          <a:prstGeom prst="rect">
-            <a:avLst/>
-          </a:prstGeom>
-          <a:noFill/>
-        </p:spPr>
-        <p:txBody>
-          <a:bodyPr wrap="square" anchor="ctr" lIns="0" rIns="0" tIns="0" bIns="0">
-            <a:spAutoFit/>
-          </a:bodyPr>
-          <a:lstStyle/>
-          <a:p>
-            <a:pPr algn="l">
-              <a:spcAft>
-                <a:spcPts val="100"/>
-              </a:spcAft>
-            </a:pPr>
-            <a:r>
-              <a:rPr sz="1600" b="1" i="0">
-                <a:solidFill>
-                  <a:srgbClr val="FFFFFF"/>
-                </a:solidFill>
-                <a:latin typeface="Calibri"/>
-              </a:rPr>
-              <a:t>Máy nghiền mịn</a:t>
-            </a:r>
-          </a:p>
-          <a:p>
-            <a:pPr algn="l"/>
-            <a:r>
-              <a:rPr sz="1300" b="0" i="0">
-                <a:solidFill>
-                  <a:srgbClr val="E9F2EC"/>
-                </a:solidFill>
-                <a:latin typeface="Calibri"/>
-              </a:rPr>
-              <a:t>Mã: NM06</a:t>
-            </a:r>
-          </a:p>
-        </p:txBody>
-      </p:sp>
-      <p:pic>
-        <p:nvPicPr>
-          <p:cNvPr id="18" name="Picture 17" descr="eq_mill.jpg"/>
-          <p:cNvPicPr>
-            <a:picLocks noChangeAspect="1"/>
-          </p:cNvPicPr>
-          <p:nvPr/>
-        </p:nvPicPr>
-        <p:blipFill>
-          <a:blip r:embed="rId3"/>
-          <a:srcRect t="25041" b="25041"/>
-          <a:stretch>
-            <a:fillRect/>
-          </a:stretch>
-        </p:blipFill>
-        <p:spPr>
-          <a:xfrm>
-            <a:off x="4581144" y="2395728"/>
-            <a:ext cx="3282696" cy="1280160"/>
-          </a:xfrm>
-          <a:prstGeom prst="rect">
-            <a:avLst/>
-          </a:prstGeom>
-          <a:ln w="25400">
-            <a:solidFill>
-              <a:srgbClr val="FFFFFF"/>
-            </a:solidFill>
-          </a:ln>
-          <a:effectLst/>
-        </p:spPr>
-      </p:pic>
-      <p:sp>
-        <p:nvSpPr>
-          <p:cNvPr id="19" name="TextBox 18"/>
-          <p:cNvSpPr txBox="1"/>
-          <p:nvPr/>
-        </p:nvSpPr>
-        <p:spPr>
-          <a:xfrm>
-            <a:off x="4617720" y="3794760"/>
-            <a:ext cx="3209544" cy="749808"/>
-          </a:xfrm>
-          <a:prstGeom prst="rect">
-            <a:avLst/>
-          </a:prstGeom>
-          <a:noFill/>
-        </p:spPr>
-        <p:txBody>
-          <a:bodyPr wrap="square" anchor="t" lIns="0" rIns="0" tIns="0" bIns="0">
-            <a:spAutoFit/>
-          </a:bodyPr>
-          <a:lstStyle/>
-          <a:p>
-            <a:pPr algn="l">
-              <a:lnSpc>
-                <a:spcPct val="100000"/>
-              </a:lnSpc>
-            </a:pPr>
-            <a:r>
-              <a:rPr sz="1350" b="1" i="0">
-                <a:solidFill>
-                  <a:srgbClr val="1F4E3D"/>
-                </a:solidFill>
-                <a:latin typeface="Calibri"/>
-              </a:rPr>
-              <a:t>Cấu tạo: </a:t>
-            </a:r>
-            <a:r>
-              <a:rPr sz="1350" b="0" i="0">
-                <a:solidFill>
-                  <a:srgbClr val="222B28"/>
-                </a:solidFill>
-                <a:latin typeface="Calibri"/>
-              </a:rPr>
-              <a:t>Động cơ 30–60 HP, rổ nghiền inox chứa bi sứ/thủy tinh.</a:t>
-            </a:r>
-          </a:p>
-        </p:txBody>
-      </p:sp>
-      <p:sp>
-        <p:nvSpPr>
-          <p:cNvPr id="20" name="TextBox 19"/>
-          <p:cNvSpPr txBox="1"/>
-          <p:nvPr/>
-        </p:nvSpPr>
-        <p:spPr>
-          <a:xfrm>
-            <a:off x="4617720" y="4553712"/>
-            <a:ext cx="3209544" cy="749808"/>
-          </a:xfrm>
-          <a:prstGeom prst="rect">
-            <a:avLst/>
-          </a:prstGeom>
-          <a:noFill/>
-        </p:spPr>
-        <p:txBody>
-          <a:bodyPr wrap="square" anchor="t" lIns="0" rIns="0" tIns="0" bIns="0">
-            <a:spAutoFit/>
-          </a:bodyPr>
-          <a:lstStyle/>
-          <a:p>
-            <a:pPr algn="l">
-              <a:lnSpc>
-                <a:spcPct val="100000"/>
-              </a:lnSpc>
-            </a:pPr>
-            <a:r>
-              <a:rPr sz="1350" b="1" i="0">
-                <a:solidFill>
-                  <a:srgbClr val="1F4E3D"/>
-                </a:solidFill>
-                <a:latin typeface="Calibri"/>
-              </a:rPr>
-              <a:t>Nguyên lý: </a:t>
-            </a:r>
-            <a:r>
-              <a:rPr sz="1350" b="0" i="0">
-                <a:solidFill>
-                  <a:srgbClr val="222B28"/>
-                </a:solidFill>
-                <a:latin typeface="Calibri"/>
-              </a:rPr>
-              <a:t>Va đập + ma sát của bi nghiền, giảm hạt xuống 10–20 µm.</a:t>
-            </a:r>
-          </a:p>
-        </p:txBody>
-      </p:sp>
-      <p:sp>
-        <p:nvSpPr>
-          <p:cNvPr id="21" name="TextBox 20"/>
-          <p:cNvSpPr txBox="1"/>
-          <p:nvPr/>
-        </p:nvSpPr>
-        <p:spPr>
-          <a:xfrm>
-            <a:off x="4617720" y="5312664"/>
-            <a:ext cx="3209544" cy="749808"/>
-          </a:xfrm>
-          <a:prstGeom prst="rect">
-            <a:avLst/>
-          </a:prstGeom>
-          <a:noFill/>
-        </p:spPr>
-        <p:txBody>
-          <a:bodyPr wrap="square" anchor="t" lIns="0" rIns="0" tIns="0" bIns="0">
-            <a:spAutoFit/>
-          </a:bodyPr>
-          <a:lstStyle/>
-          <a:p>
-            <a:pPr algn="l">
-              <a:lnSpc>
-                <a:spcPct val="100000"/>
-              </a:lnSpc>
-            </a:pPr>
-            <a:r>
-              <a:rPr sz="1350" b="1" i="0">
-                <a:solidFill>
-                  <a:srgbClr val="1F4E3D"/>
-                </a:solidFill>
-                <a:latin typeface="Calibri"/>
-              </a:rPr>
-              <a:t>Thao tác: </a:t>
-            </a:r>
-            <a:r>
-              <a:rPr sz="1350" b="0" i="0">
-                <a:solidFill>
-                  <a:srgbClr val="222B28"/>
-                </a:solidFill>
-                <a:latin typeface="Calibri"/>
-              </a:rPr>
-              <a:t>Tuần hoàn paste qua rổ đến khi đạt độ mịn Hegman.</a:t>
-            </a:r>
-          </a:p>
-        </p:txBody>
-      </p:sp>
-      <p:sp>
-        <p:nvSpPr>
-          <p:cNvPr id="22" name="Rounded Rectangle 21"/>
-          <p:cNvSpPr/>
-          <p:nvPr/>
-        </p:nvSpPr>
-        <p:spPr>
-          <a:xfrm>
-            <a:off x="8284464" y="1463040"/>
-            <a:ext cx="3611880" cy="4617720"/>
-          </a:xfrm>
-          <a:prstGeom prst="roundRect">
-            <a:avLst>
-              <a:gd name="adj" fmla="val 6000"/>
-            </a:avLst>
-          </a:prstGeom>
-          <a:solidFill>
-            <a:srgbClr val="EEF4F0"/>
-          </a:solidFill>
-          <a:ln w="12700">
-            <a:solidFill>
-              <a:srgbClr val="D5E1DA"/>
-            </a:solidFill>
-          </a:ln>
-          <a:effectLst/>
-        </p:spPr>
-        <p:style>
-          <a:lnRef idx="1">
-            <a:schemeClr val="accent1"/>
-          </a:lnRef>
-          <a:fillRef idx="3">
-            <a:schemeClr val="accent1"/>
-          </a:fillRef>
-          <a:effectRef idx="2">
-            <a:schemeClr val="accent1"/>
-          </a:effectRef>
-          <a:fontRef idx="minor">
-            <a:schemeClr val="lt1"/>
-          </a:fontRef>
-        </p:style>
-        <p:txBody>
-          <a:bodyPr rtlCol="0" anchor="ctr"/>
-          <a:lstStyle/>
-          <a:p>
-            <a:pPr algn="ctr"/>
-          </a:p>
-        </p:txBody>
-      </p:sp>
-      <p:sp>
-        <p:nvSpPr>
-          <p:cNvPr id="23" name="Rounded Rectangle 22"/>
-          <p:cNvSpPr/>
-          <p:nvPr/>
-        </p:nvSpPr>
-        <p:spPr>
-          <a:xfrm>
-            <a:off x="8284464" y="1463040"/>
-            <a:ext cx="3611880" cy="822960"/>
-          </a:xfrm>
-          <a:prstGeom prst="roundRect">
-            <a:avLst>
-              <a:gd name="adj" fmla="val 6000"/>
-            </a:avLst>
-          </a:prstGeom>
-          <a:solidFill>
-            <a:srgbClr val="C88A2E"/>
-          </a:solidFill>
-          <a:ln>
-            <a:noFill/>
-          </a:ln>
-          <a:effectLst/>
-        </p:spPr>
-        <p:style>
-          <a:lnRef idx="1">
-            <a:schemeClr val="accent1"/>
-          </a:lnRef>
-          <a:fillRef idx="3">
-            <a:schemeClr val="accent1"/>
-          </a:fillRef>
-          <a:effectRef idx="2">
-            <a:schemeClr val="accent1"/>
-          </a:effectRef>
-          <a:fontRef idx="minor">
-            <a:schemeClr val="lt1"/>
-          </a:fontRef>
-        </p:style>
-        <p:txBody>
-          <a:bodyPr rtlCol="0" anchor="ctr"/>
-          <a:lstStyle/>
-          <a:p>
-            <a:pPr algn="ctr"/>
-          </a:p>
-        </p:txBody>
-      </p:sp>
-      <p:sp>
-        <p:nvSpPr>
-          <p:cNvPr id="24" name="Rectangle 23"/>
-          <p:cNvSpPr/>
-          <p:nvPr/>
-        </p:nvSpPr>
-        <p:spPr>
-          <a:xfrm>
-            <a:off x="8284464" y="1920240"/>
-            <a:ext cx="3611880" cy="365760"/>
-          </a:xfrm>
-          <a:prstGeom prst="rect">
-            <a:avLst/>
-          </a:prstGeom>
-          <a:solidFill>
-            <a:srgbClr val="C88A2E"/>
-          </a:solidFill>
-          <a:ln>
-            <a:noFill/>
-          </a:ln>
-          <a:effectLst/>
-        </p:spPr>
-        <p:style>
-          <a:lnRef idx="1">
-            <a:schemeClr val="accent1"/>
-          </a:lnRef>
-          <a:fillRef idx="3">
-            <a:schemeClr val="accent1"/>
-          </a:fillRef>
-          <a:effectRef idx="2">
-            <a:schemeClr val="accent1"/>
-          </a:effectRef>
-          <a:fontRef idx="minor">
-            <a:schemeClr val="lt1"/>
-          </a:fontRef>
-        </p:style>
-        <p:txBody>
-          <a:bodyPr rtlCol="0" anchor="ctr"/>
-          <a:lstStyle/>
-          <a:p>
-            <a:pPr algn="ctr"/>
-          </a:p>
-        </p:txBody>
-      </p:sp>
-      <p:sp>
-        <p:nvSpPr>
-          <p:cNvPr id="25" name="TextBox 24"/>
-          <p:cNvSpPr txBox="1"/>
-          <p:nvPr/>
-        </p:nvSpPr>
-        <p:spPr>
-          <a:xfrm>
-            <a:off x="9513064" y="1463040"/>
-            <a:ext cx="2154680" cy="822960"/>
-          </a:xfrm>
-          <a:prstGeom prst="rect">
-            <a:avLst/>
-          </a:prstGeom>
-          <a:noFill/>
-        </p:spPr>
-        <p:txBody>
-          <a:bodyPr wrap="square" anchor="ctr" lIns="0" rIns="0" tIns="0" bIns="0">
-            <a:spAutoFit/>
-          </a:bodyPr>
-          <a:lstStyle/>
-          <a:p>
-            <a:pPr algn="l">
-              <a:spcAft>
-                <a:spcPts val="100"/>
-              </a:spcAft>
-            </a:pPr>
-            <a:r>
-              <a:rPr sz="1600" b="1" i="0">
-                <a:solidFill>
-                  <a:srgbClr val="FFFFFF"/>
-                </a:solidFill>
-                <a:latin typeface="Calibri"/>
-              </a:rPr>
-              <a:t>Máy pha loãng</a:t>
-            </a:r>
-          </a:p>
-          <a:p>
-            <a:pPr algn="l"/>
-            <a:r>
-              <a:rPr sz="1300" b="0" i="0">
-                <a:solidFill>
-                  <a:srgbClr val="E9F2EC"/>
-                </a:solidFill>
-                <a:latin typeface="Calibri"/>
-              </a:rPr>
-              <a:t>Mã: PL01–03</a:t>
-            </a:r>
-          </a:p>
-        </p:txBody>
-      </p:sp>
-      <p:pic>
-        <p:nvPicPr>
-          <p:cNvPr id="26" name="Picture 25" descr="eq_line.jpg"/>
-          <p:cNvPicPr>
-            <a:picLocks noChangeAspect="1"/>
-          </p:cNvPicPr>
-          <p:nvPr/>
-        </p:nvPicPr>
-        <p:blipFill>
-          <a:blip r:embed="rId4"/>
-          <a:srcRect t="24000" b="24000"/>
-          <a:stretch>
-            <a:fillRect/>
-          </a:stretch>
-        </p:blipFill>
-        <p:spPr>
-          <a:xfrm>
-            <a:off x="8449056" y="2395728"/>
-            <a:ext cx="3282696" cy="1280160"/>
-          </a:xfrm>
-          <a:prstGeom prst="rect">
-            <a:avLst/>
-          </a:prstGeom>
-          <a:ln w="25400">
-            <a:solidFill>
-              <a:srgbClr val="FFFFFF"/>
-            </a:solidFill>
-          </a:ln>
-          <a:effectLst/>
-        </p:spPr>
-      </p:pic>
-      <p:sp>
-        <p:nvSpPr>
-          <p:cNvPr id="27" name="TextBox 26"/>
-          <p:cNvSpPr txBox="1"/>
-          <p:nvPr/>
-        </p:nvSpPr>
-        <p:spPr>
-          <a:xfrm>
-            <a:off x="8485632" y="3794760"/>
-            <a:ext cx="3209544" cy="749808"/>
-          </a:xfrm>
-          <a:prstGeom prst="rect">
-            <a:avLst/>
-          </a:prstGeom>
-          <a:noFill/>
-        </p:spPr>
-        <p:txBody>
-          <a:bodyPr wrap="square" anchor="t" lIns="0" rIns="0" tIns="0" bIns="0">
-            <a:spAutoFit/>
-          </a:bodyPr>
-          <a:lstStyle/>
-          <a:p>
-            <a:pPr algn="l">
-              <a:lnSpc>
-                <a:spcPct val="100000"/>
-              </a:lnSpc>
-            </a:pPr>
-            <a:r>
-              <a:rPr sz="1350" b="1" i="0">
-                <a:solidFill>
-                  <a:srgbClr val="C88A2E"/>
-                </a:solidFill>
-                <a:latin typeface="Calibri"/>
-              </a:rPr>
-              <a:t>Cấu tạo: </a:t>
-            </a:r>
-            <a:r>
-              <a:rPr sz="1350" b="0" i="0">
-                <a:solidFill>
-                  <a:srgbClr val="222B28"/>
-                </a:solidFill>
-                <a:latin typeface="Calibri"/>
-              </a:rPr>
-              <a:t>Bồn inox, cánh khuấy thủy lực 4 cánh, van xả đáy côn.</a:t>
-            </a:r>
-          </a:p>
-        </p:txBody>
-      </p:sp>
-      <p:sp>
-        <p:nvSpPr>
-          <p:cNvPr id="28" name="TextBox 27"/>
-          <p:cNvSpPr txBox="1"/>
-          <p:nvPr/>
-        </p:nvSpPr>
-        <p:spPr>
-          <a:xfrm>
-            <a:off x="8485632" y="4553712"/>
-            <a:ext cx="3209544" cy="749808"/>
-          </a:xfrm>
-          <a:prstGeom prst="rect">
-            <a:avLst/>
-          </a:prstGeom>
-          <a:noFill/>
-        </p:spPr>
-        <p:txBody>
-          <a:bodyPr wrap="square" anchor="t" lIns="0" rIns="0" tIns="0" bIns="0">
-            <a:spAutoFit/>
-          </a:bodyPr>
-          <a:lstStyle/>
-          <a:p>
-            <a:pPr algn="l">
-              <a:lnSpc>
-                <a:spcPct val="100000"/>
-              </a:lnSpc>
-            </a:pPr>
-            <a:r>
-              <a:rPr sz="1350" b="1" i="0">
-                <a:solidFill>
-                  <a:srgbClr val="C88A2E"/>
-                </a:solidFill>
-                <a:latin typeface="Calibri"/>
-              </a:rPr>
-              <a:t>Nguyên lý: </a:t>
-            </a:r>
-            <a:r>
-              <a:rPr sz="1350" b="0" i="0">
-                <a:solidFill>
-                  <a:srgbClr val="222B28"/>
-                </a:solidFill>
-                <a:latin typeface="Calibri"/>
-              </a:rPr>
-              <a:t>Khuấy tạo dòng đối lưu, chỉnh độ nhớt bằng dung môi.</a:t>
-            </a:r>
-          </a:p>
-        </p:txBody>
-      </p:sp>
-      <p:sp>
-        <p:nvSpPr>
-          <p:cNvPr id="29" name="TextBox 28"/>
-          <p:cNvSpPr txBox="1"/>
-          <p:nvPr/>
-        </p:nvSpPr>
-        <p:spPr>
-          <a:xfrm>
-            <a:off x="8485632" y="5312664"/>
-            <a:ext cx="3209544" cy="749808"/>
-          </a:xfrm>
-          <a:prstGeom prst="rect">
-            <a:avLst/>
-          </a:prstGeom>
-          <a:noFill/>
-        </p:spPr>
-        <p:txBody>
-          <a:bodyPr wrap="square" anchor="t" lIns="0" rIns="0" tIns="0" bIns="0">
-            <a:spAutoFit/>
-          </a:bodyPr>
-          <a:lstStyle/>
-          <a:p>
-            <a:pPr algn="l">
-              <a:lnSpc>
-                <a:spcPct val="100000"/>
-              </a:lnSpc>
-            </a:pPr>
-            <a:r>
-              <a:rPr sz="1350" b="1" i="0">
-                <a:solidFill>
-                  <a:srgbClr val="C88A2E"/>
-                </a:solidFill>
-                <a:latin typeface="Calibri"/>
-              </a:rPr>
-              <a:t>Thao tác: </a:t>
-            </a:r>
-            <a:r>
-              <a:rPr sz="1350" b="0" i="0">
-                <a:solidFill>
-                  <a:srgbClr val="222B28"/>
-                </a:solidFill>
-                <a:latin typeface="Calibri"/>
-              </a:rPr>
-              <a:t>Bổ sung dung môi từ từ, đo KU đến thông số đích.</a:t>
-            </a:r>
-          </a:p>
-        </p:txBody>
-      </p:sp>
-      <p:sp>
-        <p:nvSpPr>
-          <p:cNvPr id="30" name="TextBox 29"/>
-          <p:cNvSpPr txBox="1"/>
-          <p:nvPr/>
-        </p:nvSpPr>
-        <p:spPr>
-          <a:xfrm>
-            <a:off x="548640" y="6473952"/>
-            <a:ext cx="7315200" cy="292608"/>
-          </a:xfrm>
-          <a:prstGeom prst="rect">
-            <a:avLst/>
-          </a:prstGeom>
-          <a:noFill/>
-        </p:spPr>
-        <p:txBody>
-          <a:bodyPr wrap="square" anchor="t" lIns="0" rIns="0" tIns="0" bIns="0">
-            <a:spAutoFit/>
-          </a:bodyPr>
-          <a:lstStyle/>
-          <a:p>
-            <a:pPr algn="l"/>
-            <a:r>
-              <a:rPr sz="1100" b="0" i="0">
-                <a:solidFill>
-                  <a:srgbClr val="5C6B64"/>
-                </a:solidFill>
-                <a:latin typeface="Calibri"/>
-              </a:rPr>
-              <a:t>Báo cáo thực tập  ·  Công ty TNHH Sơn Hải Vân</a:t>
-            </a:r>
-          </a:p>
-        </p:txBody>
-      </p:sp>
-      <p:sp>
-        <p:nvSpPr>
-          <p:cNvPr id="31" name="TextBox 30"/>
-          <p:cNvSpPr txBox="1"/>
-          <p:nvPr/>
-        </p:nvSpPr>
-        <p:spPr>
-          <a:xfrm>
-            <a:off x="10972800" y="6473952"/>
-            <a:ext cx="731520" cy="292608"/>
-          </a:xfrm>
-          <a:prstGeom prst="rect">
-            <a:avLst/>
-          </a:prstGeom>
-          <a:noFill/>
-        </p:spPr>
-        <p:txBody>
-          <a:bodyPr wrap="square" anchor="t" lIns="0" rIns="0" tIns="0" bIns="0">
-            <a:spAutoFit/>
-          </a:bodyPr>
-          <a:lstStyle/>
-          <a:p>
-            <a:pPr algn="r"/>
-            <a:r>
-              <a:rPr sz="1100" b="1" i="0">
-                <a:solidFill>
-                  <a:srgbClr val="2C7A5A"/>
-                </a:solidFill>
-                <a:latin typeface="Calibri"/>
-              </a:rPr>
-              <a:t>13</a:t>
-            </a:r>
-          </a:p>
-        </p:txBody>
-      </p:sp>
-      <p:pic>
-        <p:nvPicPr>
-          <p:cNvPr id="124" name="Picture 123" descr="danh_paste_w.png"/>
-          <p:cNvPicPr>
-            <a:picLocks noChangeAspect="1"/>
-          </p:cNvPicPr>
-          <p:nvPr/>
-        </p:nvPicPr>
-        <p:blipFill>
-          <a:blip r:embed="rId5">
-            <a:extLst>
-              <a:ext uri="{96DAC541-7B7A-43D3-8B79-37D633B846F1}">
-                <ns0:svgBlip xmlns:ns0="http://schemas.microsoft.com/office/drawing/2016/SVG/main" r:embed="rId8"/>
-              </a:ext>
-            </a:extLst>
-          </a:blip>
-          <a:stretch>
-            <a:fillRect/>
-          </a:stretch>
-        </p:blipFill>
-        <p:spPr>
-          <a:xfrm>
-            <a:off x="698640" y="1664520"/>
-            <a:ext cx="420000" cy="420000"/>
-          </a:xfrm>
-          <a:prstGeom prst="rect">
-            <a:avLst/>
-          </a:prstGeom>
-        </p:spPr>
-      </p:pic>
-      <p:pic>
-        <p:nvPicPr>
-          <p:cNvPr id="125" name="Picture 124" descr="nghien_min_w.png"/>
-          <p:cNvPicPr>
-            <a:picLocks noChangeAspect="1"/>
-          </p:cNvPicPr>
-          <p:nvPr/>
-        </p:nvPicPr>
-        <p:blipFill>
-          <a:blip r:embed="rId6">
-            <a:extLst>
-              <a:ext uri="{96DAC541-7B7A-43D3-8B79-37D633B846F1}">
-                <ns1:svgBlip xmlns:ns1="http://schemas.microsoft.com/office/drawing/2016/SVG/main" r:embed="rId9"/>
-              </a:ext>
-            </a:extLst>
-          </a:blip>
-          <a:stretch>
-            <a:fillRect/>
-          </a:stretch>
-        </p:blipFill>
-        <p:spPr>
-          <a:xfrm>
-            <a:off x="4566552" y="1664520"/>
-            <a:ext cx="420000" cy="420000"/>
-          </a:xfrm>
-          <a:prstGeom prst="rect">
-            <a:avLst/>
-          </a:prstGeom>
-        </p:spPr>
-      </p:pic>
-      <p:pic>
-        <p:nvPicPr>
-          <p:cNvPr id="126" name="Picture 125" descr="pha_loang_w.png"/>
-          <p:cNvPicPr>
-            <a:picLocks noChangeAspect="1"/>
-          </p:cNvPicPr>
-          <p:nvPr/>
-        </p:nvPicPr>
-        <p:blipFill>
-          <a:blip r:embed="rId7">
-            <a:extLst>
-              <a:ext uri="{96DAC541-7B7A-43D3-8B79-37D633B846F1}">
-                <ns2:svgBlip xmlns:ns2="http://schemas.microsoft.com/office/drawing/2016/SVG/main" r:embed="rId10"/>
-              </a:ext>
-            </a:extLst>
-          </a:blip>
-          <a:stretch>
-            <a:fillRect/>
-          </a:stretch>
-        </p:blipFill>
-        <p:spPr>
-          <a:xfrm>
-            <a:off x="8434464" y="1664520"/>
-            <a:ext cx="420000" cy="420000"/>
-          </a:xfrm>
-          <a:prstGeom prst="rect">
-            <a:avLst/>
-          </a:prstGeom>
-        </p:spPr>
-      </p:pic>
-      <p:pic>
-        <p:nvPicPr>
-          <p:cNvPr id="127" name="Picture 126" descr="image.png"/>
-          <p:cNvPicPr>
-            <a:picLocks noChangeAspect="1"/>
-          </p:cNvPicPr>
-          <p:nvPr/>
-        </p:nvPicPr>
-        <p:blipFill>
-          <a:blip r:embed="rId5">
-            <a:extLst>
-              <a:ext uri="{96DAC541-7B7A-43D3-8B79-37D633B846F1}">
-                <ns0:svgBlip xmlns:ns0="http://schemas.microsoft.com/office/drawing/2016/SVG/main" r:embed="rId11"/>
-              </a:ext>
-            </a:extLst>
-          </a:blip>
-          <a:stretch>
-            <a:fillRect/>
-          </a:stretch>
-        </p:blipFill>
-        <p:spPr>
-          <a:xfrm>
-            <a:off x="698640" y="1664520"/>
-            <a:ext cx="420000" cy="420000"/>
-          </a:xfrm>
-          <a:prstGeom prst="rect">
-            <a:avLst/>
-          </a:prstGeom>
-        </p:spPr>
-      </p:pic>
-      <p:pic>
-        <p:nvPicPr>
-          <p:cNvPr id="128" name="Picture 127" descr="image.png"/>
-          <p:cNvPicPr>
-            <a:picLocks noChangeAspect="1"/>
-          </p:cNvPicPr>
-          <p:nvPr/>
-        </p:nvPicPr>
-        <p:blipFill>
-          <a:blip r:embed="rId6">
-            <a:extLst>
-              <a:ext uri="{96DAC541-7B7A-43D3-8B79-37D633B846F1}">
-                <ns1:svgBlip xmlns:ns1="http://schemas.microsoft.com/office/drawing/2016/SVG/main" r:embed="rId12"/>
-              </a:ext>
-            </a:extLst>
-          </a:blip>
-          <a:stretch>
-            <a:fillRect/>
-          </a:stretch>
-        </p:blipFill>
-        <p:spPr>
-          <a:xfrm>
-            <a:off x="4566552" y="1664520"/>
-            <a:ext cx="420000" cy="420000"/>
-          </a:xfrm>
-          <a:prstGeom prst="rect">
-            <a:avLst/>
-          </a:prstGeom>
-        </p:spPr>
-      </p:pic>
-      <p:pic>
-        <p:nvPicPr>
-          <p:cNvPr id="129" name="Picture 128" descr="image.png"/>
-          <p:cNvPicPr>
-            <a:picLocks noChangeAspect="1"/>
-          </p:cNvPicPr>
-          <p:nvPr/>
-        </p:nvPicPr>
-        <p:blipFill>
-          <a:blip r:embed="rId7">
-            <a:extLst>
-              <a:ext uri="{96DAC541-7B7A-43D3-8B79-37D633B846F1}">
-                <ns2:svgBlip xmlns:ns2="http://schemas.microsoft.com/office/drawing/2016/SVG/main" r:embed="rId13"/>
-              </a:ext>
-            </a:extLst>
-          </a:blip>
-          <a:stretch>
-            <a:fillRect/>
-          </a:stretch>
-        </p:blipFill>
-        <p:spPr>
-          <a:xfrm>
-            <a:off x="8434464" y="1664520"/>
-            <a:ext cx="420000" cy="420000"/>
-          </a:xfrm>
-          <a:prstGeom prst="rect">
-            <a:avLst/>
-          </a:prstGeom>
-        </p:spPr>
-      </p:pic>
-    </p:spTree>
-  </p:cSld>
-  <p:clrMapOvr>
-    <a:masterClrMapping/>
-  </p:clrMapOvr>
-  <p:timing>
-    <p:tnLst>
-      <p:par>
-        <p:cTn id="2" dur="indefinite" restart="never" nodeType="tmRoot">
-          <p:childTnLst>
-            <p:seq concurrent="1" nextAc="seek">
-              <p:cTn id="3" dur="indefinite" nodeType="mainSeq">
-                <p:childTnLst>
-                  <p:par>
-                    <p:cTn id="4" fill="hold">
-                      <p:stCondLst>
-                        <p:cond delay="0"/>
-                      </p:stCondLst>
-                      <p:childTnLst>
-                        <p:par>
-                          <p:cTn id="5" presetID="47" presetClass="entr" presetSubtype="8" fill="hold" grpId="0" nodeType="clickEffect">
-                            <p:stCondLst>
-                              <p:cond delay="0"/>
-                            </p:stCondLst>
-                            <p:childTnLst>
-                              <p:set>
-                                <p:cBhvr>
-                                  <p:cTn id="6" dur="1" fill="hold">
-                                    <p:stCondLst>
-                                      <p:cond delay="0"/>
-                                    </p:stCondLst>
-                                  </p:cTn>
-                                  <p:tgtEl>
-                                    <p:spTgt spid="6"/>
-                                  </p:tgtEl>
-                                  <p:attrNameLst>
-                                    <p:attrName>style.visibility</p:attrName>
-                                  </p:attrNameLst>
-                                </p:cBhvr>
-                                <p:to>
-                                  <p:strVal val="visible"/>
-                                </p:to>
-                              </p:set>
-                              <p:anim calcmode="lin" valueType="num">
-                                <p:cBhvr additive="base">
-                                  <p:cTn id="7" dur="550">
-                                    <p:stCondLst>
-                                      <p:cond delay="0"/>
-                                    </p:stCondLst>
-                                  </p:cTn>
-                                  <p:tgtEl>
-                                    <p:spTgt spid="6"/>
-                                  </p:tgtEl>
-                                  <p:attrNameLst>
-                                    <p:attrName>ppt_y</p:attrName>
-                                  </p:attrNameLst>
-                                </p:cBhvr>
-                                <p:tavLst>
-                                  <p:tav tm="0">
-                                    <p:val>
-                                      <p:strVal val="#ppt_y+0.12"/>
-                                    </p:val>
-                                  </p:tav>
-                                  <p:tav tm="100000">
-                                    <p:val>
-                                      <p:strVal val="#ppt_y"/>
-                                    </p:val>
-                                  </p:tav>
-                                </p:tavLst>
-                              </p:anim>
-                              <p:animEffect transition="in" filter="fade">
-                                <p:cBhvr>
-                                  <p:cTn id="8" dur="550"/>
-                                  <p:tgtEl>
-                                    <p:spTgt spid="6"/>
-                                  </p:tgtEl>
-                                </p:cBhvr>
-                              </p:animEffect>
-                            </p:childTnLst>
-                          </p:cTn>
-                        </p:par>
-                      </p:childTnLst>
-                    </p:cTn>
-                  </p:par>
-                  <p:par>
-                    <p:cTn id="9" fill="hold">
-                      <p:stCondLst>
-                        <p:cond delay="90"/>
-                      </p:stCondLst>
-                      <p:childTnLst>
-                        <p:par>
-                          <p:cTn id="10" presetID="47" presetClass="entr" presetSubtype="8" fill="hold" grpId="0" nodeType="afterEffect">
-                            <p:stCondLst>
-                              <p:cond delay="0"/>
-                            </p:stCondLst>
-                            <p:childTnLst>
-                              <p:set>
-                                <p:cBhvr>
-                                  <p:cTn id="11" dur="1" fill="hold">
-                                    <p:stCondLst>
-                                      <p:cond delay="0"/>
-                                    </p:stCondLst>
-                                  </p:cTn>
-                                  <p:tgtEl>
-                                    <p:spTgt spid="7"/>
-                                  </p:tgtEl>
-                                  <p:attrNameLst>
-                                    <p:attrName>style.visibility</p:attrName>
-                                  </p:attrNameLst>
-                                </p:cBhvr>
-                                <p:to>
-                                  <p:strVal val="visible"/>
-                                </p:to>
-                              </p:set>
-                              <p:anim calcmode="lin" valueType="num">
-                                <p:cBhvr additive="base">
-                                  <p:cTn id="12" dur="550">
-                                    <p:stCondLst>
-                                      <p:cond delay="0"/>
-                                    </p:stCondLst>
-                                  </p:cTn>
-                                  <p:tgtEl>
-                                    <p:spTgt spid="7"/>
-                                  </p:tgtEl>
-                                  <p:attrNameLst>
-                                    <p:attrName>ppt_y</p:attrName>
-                                  </p:attrNameLst>
-                                </p:cBhvr>
-                                <p:tavLst>
-                                  <p:tav tm="0">
-                                    <p:val>
-                                      <p:strVal val="#ppt_y+0.12"/>
-                                    </p:val>
-                                  </p:tav>
-                                  <p:tav tm="100000">
-                                    <p:val>
-                                      <p:strVal val="#ppt_y"/>
-                                    </p:val>
-                                  </p:tav>
-                                </p:tavLst>
-                              </p:anim>
-                              <p:animEffect transition="in" filter="fade">
-                                <p:cBhvr>
-                                  <p:cTn id="13" dur="550"/>
-                                  <p:tgtEl>
-                                    <p:spTgt spid="7"/>
-                                  </p:tgtEl>
-                                </p:cBhvr>
-                              </p:animEffect>
-                            </p:childTnLst>
-                          </p:cTn>
-                        </p:par>
-                      </p:childTnLst>
-                    </p:cTn>
-                  </p:par>
-                  <p:par>
-                    <p:cTn id="14" fill="hold">
-                      <p:stCondLst>
-                        <p:cond delay="180"/>
-                      </p:stCondLst>
-                      <p:childTnLst>
-                        <p:par>
-                          <p:cTn id="15" presetID="47" presetClass="entr" presetSubtype="8" fill="hold" grpId="0" nodeType="afterEffect">
-                            <p:stCondLst>
-                              <p:cond delay="0"/>
-                            </p:stCondLst>
-                            <p:childTnLst>
-                              <p:set>
-                                <p:cBhvr>
-                                  <p:cTn id="16" dur="1" fill="hold">
-                                    <p:stCondLst>
-                                      <p:cond delay="0"/>
-                                    </p:stCondLst>
-                                  </p:cTn>
-                                  <p:tgtEl>
-                                    <p:spTgt spid="8"/>
-                                  </p:tgtEl>
-                                  <p:attrNameLst>
-                                    <p:attrName>style.visibility</p:attrName>
-                                  </p:attrNameLst>
-                                </p:cBhvr>
-                                <p:to>
-                                  <p:strVal val="visible"/>
-                                </p:to>
-                              </p:set>
-                              <p:anim calcmode="lin" valueType="num">
-                                <p:cBhvr additive="base">
-                                  <p:cTn id="17" dur="550">
-                                    <p:stCondLst>
-                                      <p:cond delay="0"/>
-                                    </p:stCondLst>
-                                  </p:cTn>
-                                  <p:tgtEl>
-                                    <p:spTgt spid="8"/>
-                                  </p:tgtEl>
-                                  <p:attrNameLst>
-                                    <p:attrName>ppt_y</p:attrName>
-                                  </p:attrNameLst>
-                                </p:cBhvr>
-                                <p:tavLst>
-                                  <p:tav tm="0">
-                                    <p:val>
-                                      <p:strVal val="#ppt_y+0.12"/>
-                                    </p:val>
-                                  </p:tav>
-                                  <p:tav tm="100000">
-                                    <p:val>
-                                      <p:strVal val="#ppt_y"/>
-                                    </p:val>
-                                  </p:tav>
-                                </p:tavLst>
-                              </p:anim>
-                              <p:animEffect transition="in" filter="fade">
-                                <p:cBhvr>
-                                  <p:cTn id="18" dur="550"/>
-                                  <p:tgtEl>
-                                    <p:spTgt spid="8"/>
-                                  </p:tgtEl>
-                                </p:cBhvr>
-                              </p:animEffect>
-                            </p:childTnLst>
-                          </p:cTn>
-                        </p:par>
-                      </p:childTnLst>
-                    </p:cTn>
-                  </p:par>
-                  <p:par>
-                    <p:cTn id="19" fill="hold">
-                      <p:stCondLst>
-                        <p:cond delay="270"/>
-                      </p:stCondLst>
-                      <p:childTnLst>
-                        <p:par>
-                          <p:cTn id="20" presetID="47" presetClass="entr" presetSubtype="8" fill="hold" grpId="0" nodeType="afterEffect">
-                            <p:stCondLst>
-                              <p:cond delay="0"/>
-                            </p:stCondLst>
-                            <p:childTnLst>
-                              <p:set>
-                                <p:cBhvr>
-                                  <p:cTn id="21" dur="1" fill="hold">
-                                    <p:stCondLst>
-                                      <p:cond delay="0"/>
-                                    </p:stCondLst>
-                                  </p:cTn>
-                                  <p:tgtEl>
-                                    <p:spTgt spid="9"/>
-                                  </p:tgtEl>
-                                  <p:attrNameLst>
-                                    <p:attrName>style.visibility</p:attrName>
-                                  </p:attrNameLst>
-                                </p:cBhvr>
-                                <p:to>
-                                  <p:strVal val="visible"/>
-                                </p:to>
-                              </p:set>
-                              <p:anim calcmode="lin" valueType="num">
-                                <p:cBhvr additive="base">
-                                  <p:cTn id="22" dur="550">
-                                    <p:stCondLst>
-                                      <p:cond delay="0"/>
-                                    </p:stCondLst>
-                                  </p:cTn>
-                                  <p:tgtEl>
-                                    <p:spTgt spid="9"/>
-                                  </p:tgtEl>
-                                  <p:attrNameLst>
-                                    <p:attrName>ppt_y</p:attrName>
-                                  </p:attrNameLst>
-                                </p:cBhvr>
-                                <p:tavLst>
-                                  <p:tav tm="0">
-                                    <p:val>
-                                      <p:strVal val="#ppt_y+0.12"/>
-                                    </p:val>
-                                  </p:tav>
-                                  <p:tav tm="100000">
-                                    <p:val>
-                                      <p:strVal val="#ppt_y"/>
-                                    </p:val>
-                                  </p:tav>
-                                </p:tavLst>
-                              </p:anim>
-                              <p:animEffect transition="in" filter="fade">
-                                <p:cBhvr>
-                                  <p:cTn id="23" dur="550"/>
-                                  <p:tgtEl>
-                                    <p:spTgt spid="9"/>
-                                  </p:tgtEl>
-                                </p:cBhvr>
-                              </p:animEffect>
-                            </p:childTnLst>
-                          </p:cTn>
-                        </p:par>
-                      </p:childTnLst>
-                    </p:cTn>
-                  </p:par>
-                  <p:par>
-                    <p:cTn id="24" fill="hold">
-                      <p:stCondLst>
-                        <p:cond delay="360"/>
-                      </p:stCondLst>
-                      <p:childTnLst>
-                        <p:par>
-                          <p:cTn id="25" presetID="47" presetClass="entr" presetSubtype="8" fill="hold" grpId="0" nodeType="afterEffect">
-                            <p:stCondLst>
-                              <p:cond delay="0"/>
-                            </p:stCondLst>
-                            <p:childTnLst>
-                              <p:set>
-                                <p:cBhvr>
-                                  <p:cTn id="26" dur="1" fill="hold">
-                                    <p:stCondLst>
-                                      <p:cond delay="0"/>
-                                    </p:stCondLst>
-                                  </p:cTn>
-                                  <p:tgtEl>
-                                    <p:spTgt spid="10"/>
-                                  </p:tgtEl>
-                                  <p:attrNameLst>
-                                    <p:attrName>style.visibility</p:attrName>
-                                  </p:attrNameLst>
-                                </p:cBhvr>
-                                <p:to>
-                                  <p:strVal val="visible"/>
-                                </p:to>
-                              </p:set>
-                              <p:anim calcmode="lin" valueType="num">
-                                <p:cBhvr additive="base">
-                                  <p:cTn id="27" dur="550">
-                                    <p:stCondLst>
-                                      <p:cond delay="0"/>
-                                    </p:stCondLst>
-                                  </p:cTn>
-                                  <p:tgtEl>
-                                    <p:spTgt spid="10"/>
-                                  </p:tgtEl>
-                                  <p:attrNameLst>
-                                    <p:attrName>ppt_y</p:attrName>
-                                  </p:attrNameLst>
-                                </p:cBhvr>
-                                <p:tavLst>
-                                  <p:tav tm="0">
-                                    <p:val>
-                                      <p:strVal val="#ppt_y+0.12"/>
-                                    </p:val>
-                                  </p:tav>
-                                  <p:tav tm="100000">
-                                    <p:val>
-                                      <p:strVal val="#ppt_y"/>
-                                    </p:val>
-                                  </p:tav>
-                                </p:tavLst>
-                              </p:anim>
-                              <p:animEffect transition="in" filter="fade">
-                                <p:cBhvr>
-                                  <p:cTn id="28" dur="550"/>
-                                  <p:tgtEl>
-                                    <p:spTgt spid="10"/>
-                                  </p:tgtEl>
-                                </p:cBhvr>
-                              </p:animEffect>
-                            </p:childTnLst>
-                          </p:cTn>
-                        </p:par>
-                      </p:childTnLst>
-                    </p:cTn>
-                  </p:par>
-                  <p:par>
-                    <p:cTn id="29" fill="hold">
-                      <p:stCondLst>
-                        <p:cond delay="450"/>
-                      </p:stCondLst>
-                      <p:childTnLst>
-                        <p:par>
-                          <p:cTn id="30" presetID="47" presetClass="entr" presetSubtype="8" fill="hold" grpId="0" nodeType="afterEffect">
-                            <p:stCondLst>
-                              <p:cond delay="0"/>
-                            </p:stCondLst>
-                            <p:childTnLst>
-                              <p:set>
-                                <p:cBhvr>
-                                  <p:cTn id="31" dur="1" fill="hold">
-                                    <p:stCondLst>
-                                      <p:cond delay="0"/>
-                                    </p:stCondLst>
-                                  </p:cTn>
-                                  <p:tgtEl>
-                                    <p:spTgt spid="11"/>
-                                  </p:tgtEl>
-                                  <p:attrNameLst>
-                                    <p:attrName>style.visibility</p:attrName>
-                                  </p:attrNameLst>
-                                </p:cBhvr>
-                                <p:to>
-                                  <p:strVal val="visible"/>
-                                </p:to>
-                              </p:set>
-                              <p:anim calcmode="lin" valueType="num">
-                                <p:cBhvr additive="base">
-                                  <p:cTn id="32" dur="550">
-                                    <p:stCondLst>
-                                      <p:cond delay="0"/>
-                                    </p:stCondLst>
-                                  </p:cTn>
-                                  <p:tgtEl>
-                                    <p:spTgt spid="11"/>
-                                  </p:tgtEl>
-                                  <p:attrNameLst>
-                                    <p:attrName>ppt_y</p:attrName>
-                                  </p:attrNameLst>
-                                </p:cBhvr>
-                                <p:tavLst>
-                                  <p:tav tm="0">
-                                    <p:val>
-                                      <p:strVal val="#ppt_y+0.12"/>
-                                    </p:val>
-                                  </p:tav>
-                                  <p:tav tm="100000">
-                                    <p:val>
-                                      <p:strVal val="#ppt_y"/>
-                                    </p:val>
-                                  </p:tav>
-                                </p:tavLst>
-                              </p:anim>
-                              <p:animEffect transition="in" filter="fade">
-                                <p:cBhvr>
-                                  <p:cTn id="33" dur="550"/>
-                                  <p:tgtEl>
-                                    <p:spTgt spid="11"/>
-                                  </p:tgtEl>
-                                </p:cBhvr>
-                              </p:animEffect>
-                            </p:childTnLst>
-                          </p:cTn>
-                        </p:par>
-                      </p:childTnLst>
-                    </p:cTn>
-                  </p:par>
-                  <p:par>
-                    <p:cTn id="34" fill="hold">
-                      <p:stCondLst>
-                        <p:cond delay="540"/>
-                      </p:stCondLst>
-                      <p:childTnLst>
-                        <p:par>
-                          <p:cTn id="35" presetID="47" presetClass="entr" presetSubtype="8" fill="hold" grpId="0" nodeType="afterEffect">
-                            <p:stCondLst>
-                              <p:cond delay="0"/>
-                            </p:stCondLst>
-                            <p:childTnLst>
-                              <p:set>
-                                <p:cBhvr>
-                                  <p:cTn id="36" dur="1" fill="hold">
-                                    <p:stCondLst>
-                                      <p:cond delay="0"/>
-                                    </p:stCondLst>
-                                  </p:cTn>
-                                  <p:tgtEl>
-                                    <p:spTgt spid="12"/>
-                                  </p:tgtEl>
-                                  <p:attrNameLst>
-                                    <p:attrName>style.visibility</p:attrName>
-                                  </p:attrNameLst>
-                                </p:cBhvr>
-                                <p:to>
-                                  <p:strVal val="visible"/>
-                                </p:to>
-                              </p:set>
-                              <p:anim calcmode="lin" valueType="num">
-                                <p:cBhvr additive="base">
-                                  <p:cTn id="37" dur="550">
-                                    <p:stCondLst>
-                                      <p:cond delay="0"/>
-                                    </p:stCondLst>
-                                  </p:cTn>
-                                  <p:tgtEl>
-                                    <p:spTgt spid="12"/>
-                                  </p:tgtEl>
-                                  <p:attrNameLst>
-                                    <p:attrName>ppt_y</p:attrName>
-                                  </p:attrNameLst>
-                                </p:cBhvr>
-                                <p:tavLst>
-                                  <p:tav tm="0">
-                                    <p:val>
-                                      <p:strVal val="#ppt_y+0.12"/>
-                                    </p:val>
-                                  </p:tav>
-                                  <p:tav tm="100000">
-                                    <p:val>
-                                      <p:strVal val="#ppt_y"/>
-                                    </p:val>
-                                  </p:tav>
-                                </p:tavLst>
-                              </p:anim>
-                              <p:animEffect transition="in" filter="fade">
-                                <p:cBhvr>
-                                  <p:cTn id="38" dur="550"/>
-                                  <p:tgtEl>
-                                    <p:spTgt spid="12"/>
-                                  </p:tgtEl>
-                                </p:cBhvr>
-                              </p:animEffect>
-                            </p:childTnLst>
-                          </p:cTn>
-                        </p:par>
-                      </p:childTnLst>
-                    </p:cTn>
-                  </p:par>
-                  <p:par>
-                    <p:cTn id="39" fill="hold">
-                      <p:stCondLst>
-                        <p:cond delay="630"/>
-                      </p:stCondLst>
-                      <p:childTnLst>
-                        <p:par>
-                          <p:cTn id="40" presetID="47" presetClass="entr" presetSubtype="8" fill="hold" grpId="0" nodeType="afterEffect">
-                            <p:stCondLst>
-                              <p:cond delay="0"/>
-                            </p:stCondLst>
-                            <p:childTnLst>
-                              <p:set>
-                                <p:cBhvr>
-                                  <p:cTn id="41" dur="1" fill="hold">
-                                    <p:stCondLst>
-                                      <p:cond delay="0"/>
-                                    </p:stCondLst>
-                                  </p:cTn>
-                                  <p:tgtEl>
-                                    <p:spTgt spid="13"/>
-                                  </p:tgtEl>
-                                  <p:attrNameLst>
-                                    <p:attrName>style.visibility</p:attrName>
-                                  </p:attrNameLst>
-                                </p:cBhvr>
-                                <p:to>
-                                  <p:strVal val="visible"/>
-                                </p:to>
-                              </p:set>
-                              <p:anim calcmode="lin" valueType="num">
-                                <p:cBhvr additive="base">
-                                  <p:cTn id="42" dur="550">
-                                    <p:stCondLst>
-                                      <p:cond delay="0"/>
-                                    </p:stCondLst>
-                                  </p:cTn>
-                                  <p:tgtEl>
-                                    <p:spTgt spid="13"/>
-                                  </p:tgtEl>
-                                  <p:attrNameLst>
-                                    <p:attrName>ppt_y</p:attrName>
-                                  </p:attrNameLst>
-                                </p:cBhvr>
-                                <p:tavLst>
-                                  <p:tav tm="0">
-                                    <p:val>
-                                      <p:strVal val="#ppt_y+0.12"/>
-                                    </p:val>
-                                  </p:tav>
-                                  <p:tav tm="100000">
-                                    <p:val>
-                                      <p:strVal val="#ppt_y"/>
-                                    </p:val>
-                                  </p:tav>
-                                </p:tavLst>
-                              </p:anim>
-                              <p:animEffect transition="in" filter="fade">
-                                <p:cBhvr>
-                                  <p:cTn id="43" dur="550"/>
-                                  <p:tgtEl>
-                                    <p:spTgt spid="13"/>
-                                  </p:tgtEl>
-                                </p:cBhvr>
-                              </p:animEffect>
-                            </p:childTnLst>
-                          </p:cTn>
-                        </p:par>
-                      </p:childTnLst>
-                    </p:cTn>
-                  </p:par>
-                  <p:par>
-                    <p:cTn id="44" fill="hold">
-                      <p:stCondLst>
-                        <p:cond delay="0"/>
-                      </p:stCondLst>
-                      <p:childTnLst>
-                        <p:par>
-                          <p:cTn id="45" presetID="47" presetClass="entr" presetSubtype="8" fill="hold" grpId="0" nodeType="clickEffect">
-                            <p:stCondLst>
-                              <p:cond delay="0"/>
-                            </p:stCondLst>
-                            <p:childTnLst>
-                              <p:set>
-                                <p:cBhvr>
-                                  <p:cTn id="46" dur="1" fill="hold">
-                                    <p:stCondLst>
-                                      <p:cond delay="0"/>
-                                    </p:stCondLst>
-                                  </p:cTn>
-                                  <p:tgtEl>
-                                    <p:spTgt spid="14"/>
-                                  </p:tgtEl>
-                                  <p:attrNameLst>
-                                    <p:attrName>style.visibility</p:attrName>
-                                  </p:attrNameLst>
-                                </p:cBhvr>
-                                <p:to>
-                                  <p:strVal val="visible"/>
-                                </p:to>
-                              </p:set>
-                              <p:anim calcmode="lin" valueType="num">
-                                <p:cBhvr additive="base">
-                                  <p:cTn id="47" dur="550">
-                                    <p:stCondLst>
-                                      <p:cond delay="0"/>
-                                    </p:stCondLst>
-                                  </p:cTn>
-                                  <p:tgtEl>
-                                    <p:spTgt spid="14"/>
-                                  </p:tgtEl>
-                                  <p:attrNameLst>
-                                    <p:attrName>ppt_y</p:attrName>
-                                  </p:attrNameLst>
-                                </p:cBhvr>
-                                <p:tavLst>
-                                  <p:tav tm="0">
-                                    <p:val>
-                                      <p:strVal val="#ppt_y+0.12"/>
-                                    </p:val>
-                                  </p:tav>
-                                  <p:tav tm="100000">
-                                    <p:val>
-                                      <p:strVal val="#ppt_y"/>
-                                    </p:val>
-                                  </p:tav>
-                                </p:tavLst>
-                              </p:anim>
-                              <p:animEffect transition="in" filter="fade">
-                                <p:cBhvr>
-                                  <p:cTn id="48" dur="550"/>
-                                  <p:tgtEl>
-                                    <p:spTgt spid="14"/>
-                                  </p:tgtEl>
-                                </p:cBhvr>
-                              </p:animEffect>
-                            </p:childTnLst>
-                          </p:cTn>
-                        </p:par>
-                      </p:childTnLst>
-                    </p:cTn>
-                  </p:par>
-                  <p:par>
-                    <p:cTn id="49" fill="hold">
-                      <p:stCondLst>
-                        <p:cond delay="90"/>
-                      </p:stCondLst>
-                      <p:childTnLst>
-                        <p:par>
-                          <p:cTn id="50" presetID="47" presetClass="entr" presetSubtype="8" fill="hold" grpId="0" nodeType="afterEffect">
-                            <p:stCondLst>
-                              <p:cond delay="0"/>
-                            </p:stCondLst>
-                            <p:childTnLst>
-                              <p:set>
-                                <p:cBhvr>
-                                  <p:cTn id="51" dur="1" fill="hold">
-                                    <p:stCondLst>
-                                      <p:cond delay="0"/>
-                                    </p:stCondLst>
-                                  </p:cTn>
-                                  <p:tgtEl>
-                                    <p:spTgt spid="15"/>
-                                  </p:tgtEl>
-                                  <p:attrNameLst>
-                                    <p:attrName>style.visibility</p:attrName>
-                                  </p:attrNameLst>
-                                </p:cBhvr>
-                                <p:to>
-                                  <p:strVal val="visible"/>
-                                </p:to>
-                              </p:set>
-                              <p:anim calcmode="lin" valueType="num">
-                                <p:cBhvr additive="base">
-                                  <p:cTn id="52" dur="550">
-                                    <p:stCondLst>
-                                      <p:cond delay="0"/>
-                                    </p:stCondLst>
-                                  </p:cTn>
-                                  <p:tgtEl>
-                                    <p:spTgt spid="15"/>
-                                  </p:tgtEl>
-                                  <p:attrNameLst>
-                                    <p:attrName>ppt_y</p:attrName>
-                                  </p:attrNameLst>
-                                </p:cBhvr>
-                                <p:tavLst>
-                                  <p:tav tm="0">
-                                    <p:val>
-                                      <p:strVal val="#ppt_y+0.12"/>
-                                    </p:val>
-                                  </p:tav>
-                                  <p:tav tm="100000">
-                                    <p:val>
-                                      <p:strVal val="#ppt_y"/>
-                                    </p:val>
-                                  </p:tav>
-                                </p:tavLst>
-                              </p:anim>
-                              <p:animEffect transition="in" filter="fade">
-                                <p:cBhvr>
-                                  <p:cTn id="53" dur="550"/>
-                                  <p:tgtEl>
-                                    <p:spTgt spid="15"/>
-                                  </p:tgtEl>
-                                </p:cBhvr>
-                              </p:animEffect>
-                            </p:childTnLst>
-                          </p:cTn>
-                        </p:par>
-                      </p:childTnLst>
-                    </p:cTn>
-                  </p:par>
-                  <p:par>
-                    <p:cTn id="54" fill="hold">
-                      <p:stCondLst>
-                        <p:cond delay="180"/>
-                      </p:stCondLst>
-                      <p:childTnLst>
-                        <p:par>
-                          <p:cTn id="55" presetID="47" presetClass="entr" presetSubtype="8" fill="hold" grpId="0" nodeType="afterEffect">
-                            <p:stCondLst>
-                              <p:cond delay="0"/>
-                            </p:stCondLst>
-                            <p:childTnLst>
-                              <p:set>
-                                <p:cBhvr>
-                                  <p:cTn id="56" dur="1" fill="hold">
-                                    <p:stCondLst>
-                                      <p:cond delay="0"/>
-                                    </p:stCondLst>
-                                  </p:cTn>
-                                  <p:tgtEl>
-                                    <p:spTgt spid="16"/>
-                                  </p:tgtEl>
-                                  <p:attrNameLst>
-                                    <p:attrName>style.visibility</p:attrName>
-                                  </p:attrNameLst>
-                                </p:cBhvr>
-                                <p:to>
-                                  <p:strVal val="visible"/>
-                                </p:to>
-                              </p:set>
-                              <p:anim calcmode="lin" valueType="num">
-                                <p:cBhvr additive="base">
-                                  <p:cTn id="57" dur="550">
-                                    <p:stCondLst>
-                                      <p:cond delay="0"/>
-                                    </p:stCondLst>
-                                  </p:cTn>
-                                  <p:tgtEl>
-                                    <p:spTgt spid="16"/>
-                                  </p:tgtEl>
-                                  <p:attrNameLst>
-                                    <p:attrName>ppt_y</p:attrName>
-                                  </p:attrNameLst>
-                                </p:cBhvr>
-                                <p:tavLst>
-                                  <p:tav tm="0">
-                                    <p:val>
-                                      <p:strVal val="#ppt_y+0.12"/>
-                                    </p:val>
-                                  </p:tav>
-                                  <p:tav tm="100000">
-                                    <p:val>
-                                      <p:strVal val="#ppt_y"/>
-                                    </p:val>
-                                  </p:tav>
-                                </p:tavLst>
-                              </p:anim>
-                              <p:animEffect transition="in" filter="fade">
-                                <p:cBhvr>
-                                  <p:cTn id="58" dur="550"/>
-                                  <p:tgtEl>
-                                    <p:spTgt spid="16"/>
-                                  </p:tgtEl>
-                                </p:cBhvr>
-                              </p:animEffect>
-                            </p:childTnLst>
-                          </p:cTn>
-                        </p:par>
-                      </p:childTnLst>
-                    </p:cTn>
-                  </p:par>
-                  <p:par>
-                    <p:cTn id="59" fill="hold">
-                      <p:stCondLst>
-                        <p:cond delay="270"/>
-                      </p:stCondLst>
-                      <p:childTnLst>
-                        <p:par>
-                          <p:cTn id="60" presetID="47" presetClass="entr" presetSubtype="8" fill="hold" grpId="0" nodeType="afterEffect">
-                            <p:stCondLst>
-                              <p:cond delay="0"/>
-                            </p:stCondLst>
-                            <p:childTnLst>
-                              <p:set>
-                                <p:cBhvr>
-                                  <p:cTn id="61" dur="1" fill="hold">
-                                    <p:stCondLst>
-                                      <p:cond delay="0"/>
-                                    </p:stCondLst>
-                                  </p:cTn>
-                                  <p:tgtEl>
-                                    <p:spTgt spid="17"/>
-                                  </p:tgtEl>
-                                  <p:attrNameLst>
-                                    <p:attrName>style.visibility</p:attrName>
-                                  </p:attrNameLst>
-                                </p:cBhvr>
-                                <p:to>
-                                  <p:strVal val="visible"/>
-                                </p:to>
-                              </p:set>
-                              <p:anim calcmode="lin" valueType="num">
-                                <p:cBhvr additive="base">
-                                  <p:cTn id="62" dur="550">
-                                    <p:stCondLst>
-                                      <p:cond delay="0"/>
-                                    </p:stCondLst>
-                                  </p:cTn>
-                                  <p:tgtEl>
-                                    <p:spTgt spid="17"/>
-                                  </p:tgtEl>
-                                  <p:attrNameLst>
-                                    <p:attrName>ppt_y</p:attrName>
-                                  </p:attrNameLst>
-                                </p:cBhvr>
-                                <p:tavLst>
-                                  <p:tav tm="0">
-                                    <p:val>
-                                      <p:strVal val="#ppt_y+0.12"/>
-                                    </p:val>
-                                  </p:tav>
-                                  <p:tav tm="100000">
-                                    <p:val>
-                                      <p:strVal val="#ppt_y"/>
-                                    </p:val>
-                                  </p:tav>
-                                </p:tavLst>
-                              </p:anim>
-                              <p:animEffect transition="in" filter="fade">
-                                <p:cBhvr>
-                                  <p:cTn id="63" dur="550"/>
-                                  <p:tgtEl>
-                                    <p:spTgt spid="17"/>
-                                  </p:tgtEl>
-                                </p:cBhvr>
-                              </p:animEffect>
-                            </p:childTnLst>
-                          </p:cTn>
-                        </p:par>
-                      </p:childTnLst>
-                    </p:cTn>
-                  </p:par>
-                  <p:par>
-                    <p:cTn id="64" fill="hold">
-                      <p:stCondLst>
-                        <p:cond delay="360"/>
-                      </p:stCondLst>
-                      <p:childTnLst>
-                        <p:par>
-                          <p:cTn id="65" presetID="47" presetClass="entr" presetSubtype="8" fill="hold" grpId="0" nodeType="afterEffect">
-                            <p:stCondLst>
-                              <p:cond delay="0"/>
-                            </p:stCondLst>
-                            <p:childTnLst>
-                              <p:set>
-                                <p:cBhvr>
-                                  <p:cTn id="66" dur="1" fill="hold">
-                                    <p:stCondLst>
-                                      <p:cond delay="0"/>
-                                    </p:stCondLst>
-                                  </p:cTn>
-                                  <p:tgtEl>
-                                    <p:spTgt spid="18"/>
-                                  </p:tgtEl>
-                                  <p:attrNameLst>
-                                    <p:attrName>style.visibility</p:attrName>
-                                  </p:attrNameLst>
-                                </p:cBhvr>
-                                <p:to>
-                                  <p:strVal val="visible"/>
-                                </p:to>
-                              </p:set>
-                              <p:anim calcmode="lin" valueType="num">
-                                <p:cBhvr additive="base">
-                                  <p:cTn id="67" dur="550">
-                                    <p:stCondLst>
-                                      <p:cond delay="0"/>
-                                    </p:stCondLst>
-                                  </p:cTn>
-                                  <p:tgtEl>
-                                    <p:spTgt spid="18"/>
-                                  </p:tgtEl>
-                                  <p:attrNameLst>
-                                    <p:attrName>ppt_y</p:attrName>
-                                  </p:attrNameLst>
-                                </p:cBhvr>
-                                <p:tavLst>
-                                  <p:tav tm="0">
-                                    <p:val>
-                                      <p:strVal val="#ppt_y+0.12"/>
-                                    </p:val>
-                                  </p:tav>
-                                  <p:tav tm="100000">
-                                    <p:val>
-                                      <p:strVal val="#ppt_y"/>
-                                    </p:val>
-                                  </p:tav>
-                                </p:tavLst>
-                              </p:anim>
-                              <p:animEffect transition="in" filter="fade">
-                                <p:cBhvr>
-                                  <p:cTn id="68" dur="550"/>
-                                  <p:tgtEl>
-                                    <p:spTgt spid="18"/>
-                                  </p:tgtEl>
-                                </p:cBhvr>
-                              </p:animEffect>
-                            </p:childTnLst>
-                          </p:cTn>
-                        </p:par>
-                      </p:childTnLst>
-                    </p:cTn>
-                  </p:par>
-                  <p:par>
-                    <p:cTn id="69" fill="hold">
-                      <p:stCondLst>
-                        <p:cond delay="450"/>
-                      </p:stCondLst>
-                      <p:childTnLst>
-                        <p:par>
-                          <p:cTn id="70" presetID="47" presetClass="entr" presetSubtype="8" fill="hold" grpId="0" nodeType="afterEffect">
-                            <p:stCondLst>
-                              <p:cond delay="0"/>
-                            </p:stCondLst>
-                            <p:childTnLst>
-                              <p:set>
-                                <p:cBhvr>
-                                  <p:cTn id="71" dur="1" fill="hold">
-                                    <p:stCondLst>
-                                      <p:cond delay="0"/>
-                                    </p:stCondLst>
-                                  </p:cTn>
-                                  <p:tgtEl>
-                                    <p:spTgt spid="19"/>
-                                  </p:tgtEl>
-                                  <p:attrNameLst>
-                                    <p:attrName>style.visibility</p:attrName>
-                                  </p:attrNameLst>
-                                </p:cBhvr>
-                                <p:to>
-                                  <p:strVal val="visible"/>
-                                </p:to>
-                              </p:set>
-                              <p:anim calcmode="lin" valueType="num">
-                                <p:cBhvr additive="base">
-                                  <p:cTn id="72" dur="550">
-                                    <p:stCondLst>
-                                      <p:cond delay="0"/>
-                                    </p:stCondLst>
-                                  </p:cTn>
-                                  <p:tgtEl>
-                                    <p:spTgt spid="19"/>
-                                  </p:tgtEl>
-                                  <p:attrNameLst>
-                                    <p:attrName>ppt_y</p:attrName>
-                                  </p:attrNameLst>
-                                </p:cBhvr>
-                                <p:tavLst>
-                                  <p:tav tm="0">
-                                    <p:val>
-                                      <p:strVal val="#ppt_y+0.12"/>
-                                    </p:val>
-                                  </p:tav>
-                                  <p:tav tm="100000">
-                                    <p:val>
-                                      <p:strVal val="#ppt_y"/>
-                                    </p:val>
-                                  </p:tav>
-                                </p:tavLst>
-                              </p:anim>
-                              <p:animEffect transition="in" filter="fade">
-                                <p:cBhvr>
-                                  <p:cTn id="73" dur="550"/>
-                                  <p:tgtEl>
-                                    <p:spTgt spid="19"/>
-                                  </p:tgtEl>
-                                </p:cBhvr>
-                              </p:animEffect>
-                            </p:childTnLst>
-                          </p:cTn>
-                        </p:par>
-                      </p:childTnLst>
-                    </p:cTn>
-                  </p:par>
-                  <p:par>
-                    <p:cTn id="74" fill="hold">
-                      <p:stCondLst>
-                        <p:cond delay="540"/>
-                      </p:stCondLst>
-                      <p:childTnLst>
-                        <p:par>
-                          <p:cTn id="75" presetID="47" presetClass="entr" presetSubtype="8" fill="hold" grpId="0" nodeType="afterEffect">
-                            <p:stCondLst>
-                              <p:cond delay="0"/>
-                            </p:stCondLst>
-                            <p:childTnLst>
-                              <p:set>
-                                <p:cBhvr>
-                                  <p:cTn id="76" dur="1" fill="hold">
-                                    <p:stCondLst>
-                                      <p:cond delay="0"/>
-                                    </p:stCondLst>
-                                  </p:cTn>
-                                  <p:tgtEl>
-                                    <p:spTgt spid="20"/>
-                                  </p:tgtEl>
-                                  <p:attrNameLst>
-                                    <p:attrName>style.visibility</p:attrName>
-                                  </p:attrNameLst>
-                                </p:cBhvr>
-                                <p:to>
-                                  <p:strVal val="visible"/>
-                                </p:to>
-                              </p:set>
-                              <p:anim calcmode="lin" valueType="num">
-                                <p:cBhvr additive="base">
-                                  <p:cTn id="77" dur="550">
-                                    <p:stCondLst>
-                                      <p:cond delay="0"/>
-                                    </p:stCondLst>
-                                  </p:cTn>
-                                  <p:tgtEl>
-                                    <p:spTgt spid="20"/>
-                                  </p:tgtEl>
-                                  <p:attrNameLst>
-                                    <p:attrName>ppt_y</p:attrName>
-                                  </p:attrNameLst>
-                                </p:cBhvr>
-                                <p:tavLst>
-                                  <p:tav tm="0">
-                                    <p:val>
-                                      <p:strVal val="#ppt_y+0.12"/>
-                                    </p:val>
-                                  </p:tav>
-                                  <p:tav tm="100000">
-                                    <p:val>
-                                      <p:strVal val="#ppt_y"/>
-                                    </p:val>
-                                  </p:tav>
-                                </p:tavLst>
-                              </p:anim>
-                              <p:animEffect transition="in" filter="fade">
-                                <p:cBhvr>
-                                  <p:cTn id="78" dur="550"/>
-                                  <p:tgtEl>
-                                    <p:spTgt spid="20"/>
-                                  </p:tgtEl>
-                                </p:cBhvr>
-                              </p:animEffect>
-                            </p:childTnLst>
-                          </p:cTn>
-                        </p:par>
-                      </p:childTnLst>
-                    </p:cTn>
-                  </p:par>
-                  <p:par>
-                    <p:cTn id="79" fill="hold">
-                      <p:stCondLst>
-                        <p:cond delay="630"/>
-                      </p:stCondLst>
-                      <p:childTnLst>
-                        <p:par>
-                          <p:cTn id="80" presetID="47" presetClass="entr" presetSubtype="8" fill="hold" grpId="0" nodeType="afterEffect">
-                            <p:stCondLst>
-                              <p:cond delay="0"/>
-                            </p:stCondLst>
-                            <p:childTnLst>
-                              <p:set>
-                                <p:cBhvr>
-                                  <p:cTn id="81" dur="1" fill="hold">
-                                    <p:stCondLst>
-                                      <p:cond delay="0"/>
-                                    </p:stCondLst>
-                                  </p:cTn>
-                                  <p:tgtEl>
-                                    <p:spTgt spid="21"/>
-                                  </p:tgtEl>
-                                  <p:attrNameLst>
-                                    <p:attrName>style.visibility</p:attrName>
-                                  </p:attrNameLst>
-                                </p:cBhvr>
-                                <p:to>
-                                  <p:strVal val="visible"/>
-                                </p:to>
-                              </p:set>
-                              <p:anim calcmode="lin" valueType="num">
-                                <p:cBhvr additive="base">
-                                  <p:cTn id="82" dur="550">
-                                    <p:stCondLst>
-                                      <p:cond delay="0"/>
-                                    </p:stCondLst>
-                                  </p:cTn>
-                                  <p:tgtEl>
-                                    <p:spTgt spid="21"/>
-                                  </p:tgtEl>
-                                  <p:attrNameLst>
-                                    <p:attrName>ppt_y</p:attrName>
-                                  </p:attrNameLst>
-                                </p:cBhvr>
-                                <p:tavLst>
-                                  <p:tav tm="0">
-                                    <p:val>
-                                      <p:strVal val="#ppt_y+0.12"/>
-                                    </p:val>
-                                  </p:tav>
-                                  <p:tav tm="100000">
-                                    <p:val>
-                                      <p:strVal val="#ppt_y"/>
-                                    </p:val>
-                                  </p:tav>
-                                </p:tavLst>
-                              </p:anim>
-                              <p:animEffect transition="in" filter="fade">
-                                <p:cBhvr>
-                                  <p:cTn id="83" dur="550"/>
-                                  <p:tgtEl>
-                                    <p:spTgt spid="21"/>
-                                  </p:tgtEl>
-                                </p:cBhvr>
-                              </p:animEffect>
-                            </p:childTnLst>
-                          </p:cTn>
-                        </p:par>
-                      </p:childTnLst>
-                    </p:cTn>
-                  </p:par>
-                  <p:par>
-                    <p:cTn id="84" fill="hold">
-                      <p:stCondLst>
-                        <p:cond delay="0"/>
-                      </p:stCondLst>
-                      <p:childTnLst>
-                        <p:par>
-                          <p:cTn id="85" presetID="47" presetClass="entr" presetSubtype="8" fill="hold" grpId="0" nodeType="clickEffect">
-                            <p:stCondLst>
-                              <p:cond delay="0"/>
-                            </p:stCondLst>
-                            <p:childTnLst>
-                              <p:set>
-                                <p:cBhvr>
-                                  <p:cTn id="86" dur="1" fill="hold">
-                                    <p:stCondLst>
-                                      <p:cond delay="0"/>
-                                    </p:stCondLst>
-                                  </p:cTn>
-                                  <p:tgtEl>
-                                    <p:spTgt spid="22"/>
-                                  </p:tgtEl>
-                                  <p:attrNameLst>
-                                    <p:attrName>style.visibility</p:attrName>
-                                  </p:attrNameLst>
-                                </p:cBhvr>
-                                <p:to>
-                                  <p:strVal val="visible"/>
-                                </p:to>
-                              </p:set>
-                              <p:anim calcmode="lin" valueType="num">
-                                <p:cBhvr additive="base">
-                                  <p:cTn id="87" dur="550">
-                                    <p:stCondLst>
-                                      <p:cond delay="0"/>
-                                    </p:stCondLst>
-                                  </p:cTn>
-                                  <p:tgtEl>
-                                    <p:spTgt spid="22"/>
-                                  </p:tgtEl>
-                                  <p:attrNameLst>
-                                    <p:attrName>ppt_y</p:attrName>
-                                  </p:attrNameLst>
-                                </p:cBhvr>
-                                <p:tavLst>
-                                  <p:tav tm="0">
-                                    <p:val>
-                                      <p:strVal val="#ppt_y+0.12"/>
-                                    </p:val>
-                                  </p:tav>
-                                  <p:tav tm="100000">
-                                    <p:val>
-                                      <p:strVal val="#ppt_y"/>
-                                    </p:val>
-                                  </p:tav>
-                                </p:tavLst>
-                              </p:anim>
-                              <p:animEffect transition="in" filter="fade">
-                                <p:cBhvr>
-                                  <p:cTn id="88" dur="550"/>
-                                  <p:tgtEl>
-                                    <p:spTgt spid="22"/>
-                                  </p:tgtEl>
-                                </p:cBhvr>
-                              </p:animEffect>
-                            </p:childTnLst>
-                          </p:cTn>
-                        </p:par>
-                      </p:childTnLst>
-                    </p:cTn>
-                  </p:par>
-                  <p:par>
-                    <p:cTn id="89" fill="hold">
-                      <p:stCondLst>
-                        <p:cond delay="90"/>
-                      </p:stCondLst>
-                      <p:childTnLst>
-                        <p:par>
-                          <p:cTn id="90" presetID="47" presetClass="entr" presetSubtype="8" fill="hold" grpId="0" nodeType="afterEffect">
-                            <p:stCondLst>
-                              <p:cond delay="0"/>
-                            </p:stCondLst>
-                            <p:childTnLst>
-                              <p:set>
-                                <p:cBhvr>
-                                  <p:cTn id="91" dur="1" fill="hold">
-                                    <p:stCondLst>
-                                      <p:cond delay="0"/>
-                                    </p:stCondLst>
-                                  </p:cTn>
-                                  <p:tgtEl>
-                                    <p:spTgt spid="23"/>
-                                  </p:tgtEl>
-                                  <p:attrNameLst>
-                                    <p:attrName>style.visibility</p:attrName>
-                                  </p:attrNameLst>
-                                </p:cBhvr>
-                                <p:to>
-                                  <p:strVal val="visible"/>
-                                </p:to>
-                              </p:set>
-                              <p:anim calcmode="lin" valueType="num">
-                                <p:cBhvr additive="base">
-                                  <p:cTn id="92" dur="550">
-                                    <p:stCondLst>
-                                      <p:cond delay="0"/>
-                                    </p:stCondLst>
-                                  </p:cTn>
-                                  <p:tgtEl>
-                                    <p:spTgt spid="23"/>
-                                  </p:tgtEl>
-                                  <p:attrNameLst>
-                                    <p:attrName>ppt_y</p:attrName>
-                                  </p:attrNameLst>
-                                </p:cBhvr>
-                                <p:tavLst>
-                                  <p:tav tm="0">
-                                    <p:val>
-                                      <p:strVal val="#ppt_y+0.12"/>
-                                    </p:val>
-                                  </p:tav>
-                                  <p:tav tm="100000">
-                                    <p:val>
-                                      <p:strVal val="#ppt_y"/>
-                                    </p:val>
-                                  </p:tav>
-                                </p:tavLst>
-                              </p:anim>
-                              <p:animEffect transition="in" filter="fade">
-                                <p:cBhvr>
-                                  <p:cTn id="93" dur="550"/>
-                                  <p:tgtEl>
-                                    <p:spTgt spid="23"/>
-                                  </p:tgtEl>
-                                </p:cBhvr>
-                              </p:animEffect>
-                            </p:childTnLst>
-                          </p:cTn>
-                        </p:par>
-                      </p:childTnLst>
-                    </p:cTn>
-                  </p:par>
-                  <p:par>
-                    <p:cTn id="94" fill="hold">
-                      <p:stCondLst>
-                        <p:cond delay="180"/>
-                      </p:stCondLst>
-                      <p:childTnLst>
-                        <p:par>
-                          <p:cTn id="95" presetID="47" presetClass="entr" presetSubtype="8" fill="hold" grpId="0" nodeType="afterEffect">
-                            <p:stCondLst>
-                              <p:cond delay="0"/>
-                            </p:stCondLst>
-                            <p:childTnLst>
-                              <p:set>
-                                <p:cBhvr>
-                                  <p:cTn id="96" dur="1" fill="hold">
-                                    <p:stCondLst>
-                                      <p:cond delay="0"/>
-                                    </p:stCondLst>
-                                  </p:cTn>
-                                  <p:tgtEl>
-                                    <p:spTgt spid="24"/>
-                                  </p:tgtEl>
-                                  <p:attrNameLst>
-                                    <p:attrName>style.visibility</p:attrName>
-                                  </p:attrNameLst>
-                                </p:cBhvr>
-                                <p:to>
-                                  <p:strVal val="visible"/>
-                                </p:to>
-                              </p:set>
-                              <p:anim calcmode="lin" valueType="num">
-                                <p:cBhvr additive="base">
-                                  <p:cTn id="97" dur="550">
-                                    <p:stCondLst>
-                                      <p:cond delay="0"/>
-                                    </p:stCondLst>
-                                  </p:cTn>
-                                  <p:tgtEl>
-                                    <p:spTgt spid="24"/>
-                                  </p:tgtEl>
-                                  <p:attrNameLst>
-                                    <p:attrName>ppt_y</p:attrName>
-                                  </p:attrNameLst>
-                                </p:cBhvr>
-                                <p:tavLst>
-                                  <p:tav tm="0">
-                                    <p:val>
-                                      <p:strVal val="#ppt_y+0.12"/>
-                                    </p:val>
-                                  </p:tav>
-                                  <p:tav tm="100000">
-                                    <p:val>
-                                      <p:strVal val="#ppt_y"/>
-                                    </p:val>
-                                  </p:tav>
-                                </p:tavLst>
-                              </p:anim>
-                              <p:animEffect transition="in" filter="fade">
-                                <p:cBhvr>
-                                  <p:cTn id="98" dur="550"/>
-                                  <p:tgtEl>
-                                    <p:spTgt spid="24"/>
-                                  </p:tgtEl>
-                                </p:cBhvr>
-                              </p:animEffect>
-                            </p:childTnLst>
-                          </p:cTn>
-                        </p:par>
-                      </p:childTnLst>
-                    </p:cTn>
-                  </p:par>
-                  <p:par>
-                    <p:cTn id="99" fill="hold">
-                      <p:stCondLst>
-                        <p:cond delay="270"/>
-                      </p:stCondLst>
-                      <p:childTnLst>
-                        <p:par>
-                          <p:cTn id="100" presetID="47" presetClass="entr" presetSubtype="8" fill="hold" grpId="0" nodeType="afterEffect">
-                            <p:stCondLst>
-                              <p:cond delay="0"/>
-                            </p:stCondLst>
-                            <p:childTnLst>
-                              <p:set>
-                                <p:cBhvr>
-                                  <p:cTn id="101" dur="1" fill="hold">
-                                    <p:stCondLst>
-                                      <p:cond delay="0"/>
-                                    </p:stCondLst>
-                                  </p:cTn>
-                                  <p:tgtEl>
-                                    <p:spTgt spid="25"/>
-                                  </p:tgtEl>
-                                  <p:attrNameLst>
-                                    <p:attrName>style.visibility</p:attrName>
-                                  </p:attrNameLst>
-                                </p:cBhvr>
-                                <p:to>
-                                  <p:strVal val="visible"/>
-                                </p:to>
-                              </p:set>
-                              <p:anim calcmode="lin" valueType="num">
-                                <p:cBhvr additive="base">
-                                  <p:cTn id="102" dur="550">
-                                    <p:stCondLst>
-                                      <p:cond delay="0"/>
-                                    </p:stCondLst>
-                                  </p:cTn>
-                                  <p:tgtEl>
-                                    <p:spTgt spid="25"/>
-                                  </p:tgtEl>
-                                  <p:attrNameLst>
-                                    <p:attrName>ppt_y</p:attrName>
-                                  </p:attrNameLst>
-                                </p:cBhvr>
-                                <p:tavLst>
-                                  <p:tav tm="0">
-                                    <p:val>
-                                      <p:strVal val="#ppt_y+0.12"/>
-                                    </p:val>
-                                  </p:tav>
-                                  <p:tav tm="100000">
-                                    <p:val>
-                                      <p:strVal val="#ppt_y"/>
-                                    </p:val>
-                                  </p:tav>
-                                </p:tavLst>
-                              </p:anim>
-                              <p:animEffect transition="in" filter="fade">
-                                <p:cBhvr>
-                                  <p:cTn id="103" dur="550"/>
-                                  <p:tgtEl>
-                                    <p:spTgt spid="25"/>
-                                  </p:tgtEl>
-                                </p:cBhvr>
-                              </p:animEffect>
-                            </p:childTnLst>
-                          </p:cTn>
-                        </p:par>
-                      </p:childTnLst>
-                    </p:cTn>
-                  </p:par>
-                  <p:par>
-                    <p:cTn id="104" fill="hold">
-                      <p:stCondLst>
-                        <p:cond delay="360"/>
-                      </p:stCondLst>
-                      <p:childTnLst>
-                        <p:par>
-                          <p:cTn id="105" presetID="47" presetClass="entr" presetSubtype="8" fill="hold" grpId="0" nodeType="afterEffect">
-                            <p:stCondLst>
-                              <p:cond delay="0"/>
-                            </p:stCondLst>
-                            <p:childTnLst>
-                              <p:set>
-                                <p:cBhvr>
-                                  <p:cTn id="106" dur="1" fill="hold">
-                                    <p:stCondLst>
-                                      <p:cond delay="0"/>
-                                    </p:stCondLst>
-                                  </p:cTn>
-                                  <p:tgtEl>
-                                    <p:spTgt spid="26"/>
-                                  </p:tgtEl>
-                                  <p:attrNameLst>
-                                    <p:attrName>style.visibility</p:attrName>
-                                  </p:attrNameLst>
-                                </p:cBhvr>
-                                <p:to>
-                                  <p:strVal val="visible"/>
-                                </p:to>
-                              </p:set>
-                              <p:anim calcmode="lin" valueType="num">
-                                <p:cBhvr additive="base">
-                                  <p:cTn id="107" dur="550">
-                                    <p:stCondLst>
-                                      <p:cond delay="0"/>
-                                    </p:stCondLst>
-                                  </p:cTn>
-                                  <p:tgtEl>
-                                    <p:spTgt spid="26"/>
-                                  </p:tgtEl>
-                                  <p:attrNameLst>
-                                    <p:attrName>ppt_y</p:attrName>
-                                  </p:attrNameLst>
-                                </p:cBhvr>
-                                <p:tavLst>
-                                  <p:tav tm="0">
-                                    <p:val>
-                                      <p:strVal val="#ppt_y+0.12"/>
-                                    </p:val>
-                                  </p:tav>
-                                  <p:tav tm="100000">
-                                    <p:val>
-                                      <p:strVal val="#ppt_y"/>
-                                    </p:val>
-                                  </p:tav>
-                                </p:tavLst>
-                              </p:anim>
-                              <p:animEffect transition="in" filter="fade">
-                                <p:cBhvr>
-                                  <p:cTn id="108" dur="550"/>
-                                  <p:tgtEl>
-                                    <p:spTgt spid="26"/>
-                                  </p:tgtEl>
-                                </p:cBhvr>
-                              </p:animEffect>
-                            </p:childTnLst>
-                          </p:cTn>
-                        </p:par>
-                      </p:childTnLst>
-                    </p:cTn>
-                  </p:par>
-                  <p:par>
-                    <p:cTn id="109" fill="hold">
-                      <p:stCondLst>
-                        <p:cond delay="450"/>
-                      </p:stCondLst>
-                      <p:childTnLst>
-                        <p:par>
-                          <p:cTn id="110" presetID="47" presetClass="entr" presetSubtype="8" fill="hold" grpId="0" nodeType="afterEffect">
-                            <p:stCondLst>
-                              <p:cond delay="0"/>
-                            </p:stCondLst>
-                            <p:childTnLst>
-                              <p:set>
-                                <p:cBhvr>
-                                  <p:cTn id="111" dur="1" fill="hold">
-                                    <p:stCondLst>
-                                      <p:cond delay="0"/>
-                                    </p:stCondLst>
-                                  </p:cTn>
-                                  <p:tgtEl>
-                                    <p:spTgt spid="27"/>
-                                  </p:tgtEl>
-                                  <p:attrNameLst>
-                                    <p:attrName>style.visibility</p:attrName>
-                                  </p:attrNameLst>
-                                </p:cBhvr>
-                                <p:to>
-                                  <p:strVal val="visible"/>
-                                </p:to>
-                              </p:set>
-                              <p:anim calcmode="lin" valueType="num">
-                                <p:cBhvr additive="base">
-                                  <p:cTn id="112" dur="550">
-                                    <p:stCondLst>
-                                      <p:cond delay="0"/>
-                                    </p:stCondLst>
-                                  </p:cTn>
-                                  <p:tgtEl>
-                                    <p:spTgt spid="27"/>
-                                  </p:tgtEl>
-                                  <p:attrNameLst>
-                                    <p:attrName>ppt_y</p:attrName>
-                                  </p:attrNameLst>
-                                </p:cBhvr>
-                                <p:tavLst>
-                                  <p:tav tm="0">
-                                    <p:val>
-                                      <p:strVal val="#ppt_y+0.12"/>
-                                    </p:val>
-                                  </p:tav>
-                                  <p:tav tm="100000">
-                                    <p:val>
-                                      <p:strVal val="#ppt_y"/>
-                                    </p:val>
-                                  </p:tav>
-                                </p:tavLst>
-                              </p:anim>
-                              <p:animEffect transition="in" filter="fade">
-                                <p:cBhvr>
-                                  <p:cTn id="113" dur="550"/>
-                                  <p:tgtEl>
-                                    <p:spTgt spid="27"/>
-                                  </p:tgtEl>
-                                </p:cBhvr>
-                              </p:animEffect>
-                            </p:childTnLst>
-                          </p:cTn>
-                        </p:par>
-                      </p:childTnLst>
-                    </p:cTn>
-                  </p:par>
-                  <p:par>
-                    <p:cTn id="114" fill="hold">
-                      <p:stCondLst>
-                        <p:cond delay="540"/>
-                      </p:stCondLst>
-                      <p:childTnLst>
-                        <p:par>
-                          <p:cTn id="115" presetID="47" presetClass="entr" presetSubtype="8" fill="hold" grpId="0" nodeType="afterEffect">
-                            <p:stCondLst>
-                              <p:cond delay="0"/>
-                            </p:stCondLst>
-                            <p:childTnLst>
-                              <p:set>
-                                <p:cBhvr>
-                                  <p:cTn id="116" dur="1" fill="hold">
-                                    <p:stCondLst>
-                                      <p:cond delay="0"/>
-                                    </p:stCondLst>
-                                  </p:cTn>
-                                  <p:tgtEl>
-                                    <p:spTgt spid="28"/>
-                                  </p:tgtEl>
-                                  <p:attrNameLst>
-                                    <p:attrName>style.visibility</p:attrName>
-                                  </p:attrNameLst>
-                                </p:cBhvr>
-                                <p:to>
-                                  <p:strVal val="visible"/>
-                                </p:to>
-                              </p:set>
-                              <p:anim calcmode="lin" valueType="num">
-                                <p:cBhvr additive="base">
-                                  <p:cTn id="117" dur="550">
-                                    <p:stCondLst>
-                                      <p:cond delay="0"/>
-                                    </p:stCondLst>
-                                  </p:cTn>
-                                  <p:tgtEl>
-                                    <p:spTgt spid="28"/>
-                                  </p:tgtEl>
-                                  <p:attrNameLst>
-                                    <p:attrName>ppt_y</p:attrName>
-                                  </p:attrNameLst>
-                                </p:cBhvr>
-                                <p:tavLst>
-                                  <p:tav tm="0">
-                                    <p:val>
-                                      <p:strVal val="#ppt_y+0.12"/>
-                                    </p:val>
-                                  </p:tav>
-                                  <p:tav tm="100000">
-                                    <p:val>
-                                      <p:strVal val="#ppt_y"/>
-                                    </p:val>
-                                  </p:tav>
-                                </p:tavLst>
-                              </p:anim>
-                              <p:animEffect transition="in" filter="fade">
-                                <p:cBhvr>
-                                  <p:cTn id="118" dur="550"/>
-                                  <p:tgtEl>
-                                    <p:spTgt spid="28"/>
-                                  </p:tgtEl>
-                                </p:cBhvr>
-                              </p:animEffect>
-                            </p:childTnLst>
-                          </p:cTn>
-                        </p:par>
-                      </p:childTnLst>
-                    </p:cTn>
-                  </p:par>
-                  <p:par>
-                    <p:cTn id="119" fill="hold">
-                      <p:stCondLst>
-                        <p:cond delay="630"/>
-                      </p:stCondLst>
-                      <p:childTnLst>
-                        <p:par>
-                          <p:cTn id="120" presetID="47" presetClass="entr" presetSubtype="8" fill="hold" grpId="0" nodeType="afterEffect">
-                            <p:stCondLst>
-                              <p:cond delay="0"/>
-                            </p:stCondLst>
-                            <p:childTnLst>
-                              <p:set>
-                                <p:cBhvr>
-                                  <p:cTn id="121" dur="1" fill="hold">
-                                    <p:stCondLst>
-                                      <p:cond delay="0"/>
-                                    </p:stCondLst>
-                                  </p:cTn>
-                                  <p:tgtEl>
-                                    <p:spTgt spid="29"/>
-                                  </p:tgtEl>
-                                  <p:attrNameLst>
-                                    <p:attrName>style.visibility</p:attrName>
-                                  </p:attrNameLst>
-                                </p:cBhvr>
-                                <p:to>
-                                  <p:strVal val="visible"/>
-                                </p:to>
-                              </p:set>
-                              <p:anim calcmode="lin" valueType="num">
-                                <p:cBhvr additive="base">
-                                  <p:cTn id="122" dur="550">
-                                    <p:stCondLst>
-                                      <p:cond delay="0"/>
-                                    </p:stCondLst>
-                                  </p:cTn>
-                                  <p:tgtEl>
-                                    <p:spTgt spid="29"/>
-                                  </p:tgtEl>
-                                  <p:attrNameLst>
-                                    <p:attrName>ppt_y</p:attrName>
-                                  </p:attrNameLst>
-                                </p:cBhvr>
-                                <p:tavLst>
-                                  <p:tav tm="0">
-                                    <p:val>
-                                      <p:strVal val="#ppt_y+0.12"/>
-                                    </p:val>
-                                  </p:tav>
-                                  <p:tav tm="100000">
-                                    <p:val>
-                                      <p:strVal val="#ppt_y"/>
-                                    </p:val>
-                                  </p:tav>
-                                </p:tavLst>
-                              </p:anim>
-                              <p:animEffect transition="in" filter="fade">
-                                <p:cBhvr>
-                                  <p:cTn id="123" dur="550"/>
-                                  <p:tgtEl>
-                                    <p:spTgt spid="29"/>
                                   </p:tgtEl>
                                 </p:cBhvr>
                               </p:animEffect>
@@ -16798,8 +13896,8 @@
         </p:nvSpPr>
         <p:spPr>
           <a:xfrm>
-            <a:off x="1862960" y="1554480"/>
-            <a:ext cx="3897760" cy="822960"/>
+            <a:off x="2382960" y="1554480"/>
+            <a:ext cx="3377760" cy="822960"/>
           </a:xfrm>
           <a:prstGeom prst="rect">
             <a:avLst/>
@@ -17163,8 +14261,8 @@
         </p:nvSpPr>
         <p:spPr>
           <a:xfrm>
-            <a:off x="7532240" y="1554480"/>
-            <a:ext cx="3897760" cy="822960"/>
+            <a:off x="8052240" y="1554480"/>
+            <a:ext cx="3377760" cy="822960"/>
           </a:xfrm>
           <a:prstGeom prst="rect">
             <a:avLst/>
@@ -17422,7 +14520,7 @@
                 </a:solidFill>
                 <a:latin typeface="Calibri"/>
               </a:rPr>
-              <a:t>15</a:t>
+              <a:t>20</a:t>
             </a:r>
           </a:p>
         </p:txBody>
@@ -17530,6 +14628,66 @@
             <a:extLst>
               <a:ext uri="{96DAC541-7B7A-43D3-8B79-37D633B846F1}">
                 <ns1:svgBlip xmlns:ns1="http://schemas.microsoft.com/office/drawing/2016/SVG/main" r:embed="rId6"/>
+              </a:ext>
+            </a:extLst>
+          </a:blip>
+          <a:stretch>
+            <a:fillRect/>
+          </a:stretch>
+        </p:blipFill>
+        <p:spPr>
+          <a:xfrm>
+            <a:off x="6367920" y="1750960"/>
+            <a:ext cx="430000" cy="430000"/>
+          </a:xfrm>
+          <a:prstGeom prst="rect">
+            <a:avLst/>
+          </a:prstGeom>
+        </p:spPr>
+      </p:pic>
+      <p:pic>
+        <p:nvPicPr>
+          <p:cNvPr id="58" name="Picture 57" descr="image.png"/>
+          <p:cNvPicPr>
+            <a:picLocks noChangeAspect="1"/>
+          </p:cNvPicPr>
+          <p:nvPr/>
+        </p:nvPicPr>
+        <p:blipFill>
+          <a:blip r:embed="rId2">
+            <a:extLst>
+              <a:ext uri="{96DAC541-7B7A-43D3-8B79-37D633B846F1}">
+                <ns0:svgBlip xmlns:ns0="http://schemas.microsoft.com/office/drawing/2016/SVG/main" r:embed="rId9"/>
+              </a:ext>
+            </a:extLst>
+          </a:blip>
+          <a:stretch>
+            <a:fillRect/>
+          </a:stretch>
+        </p:blipFill>
+        <p:spPr>
+          <a:xfrm>
+            <a:off x="698640" y="1750960"/>
+            <a:ext cx="430000" cy="430000"/>
+          </a:xfrm>
+          <a:prstGeom prst="rect">
+            <a:avLst/>
+          </a:prstGeom>
+        </p:spPr>
+      </p:pic>
+      <p:pic>
+        <p:nvPicPr>
+          <p:cNvPr id="59" name="Picture 58" descr="image.png"/>
+          <p:cNvPicPr>
+            <a:picLocks noChangeAspect="1"/>
+          </p:cNvPicPr>
+          <p:nvPr/>
+        </p:nvPicPr>
+        <p:blipFill>
+          <a:blip r:embed="rId3">
+            <a:extLst>
+              <a:ext uri="{96DAC541-7B7A-43D3-8B79-37D633B846F1}">
+                <ns1:svgBlip xmlns:ns1="http://schemas.microsoft.com/office/drawing/2016/SVG/main" r:embed="rId8"/>
               </a:ext>
             </a:extLst>
           </a:blip>
@@ -19390,7 +16548,7 @@
                 </a:solidFill>
                 <a:latin typeface="Calibri"/>
               </a:rPr>
-              <a:t>16</a:t>
+              <a:t>21</a:t>
             </a:r>
           </a:p>
         </p:txBody>
@@ -19558,6 +16716,96 @@
             <a:extLst>
               <a:ext uri="{96DAC541-7B7A-43D3-8B79-37D633B846F1}">
                 <ns2:svgBlip xmlns:ns2="http://schemas.microsoft.com/office/drawing/2016/SVG/main" r:embed="rId10"/>
+              </a:ext>
+            </a:extLst>
+          </a:blip>
+          <a:stretch>
+            <a:fillRect/>
+          </a:stretch>
+        </p:blipFill>
+        <p:spPr>
+          <a:xfrm>
+            <a:off x="954440" y="5050952"/>
+            <a:ext cx="560000" cy="560000"/>
+          </a:xfrm>
+          <a:prstGeom prst="rect">
+            <a:avLst/>
+          </a:prstGeom>
+        </p:spPr>
+      </p:pic>
+      <p:pic>
+        <p:nvPicPr>
+          <p:cNvPr id="100" name="Picture 99" descr="image.png"/>
+          <p:cNvPicPr>
+            <a:picLocks noChangeAspect="1"/>
+          </p:cNvPicPr>
+          <p:nvPr/>
+        </p:nvPicPr>
+        <p:blipFill>
+          <a:blip r:embed="rId2">
+            <a:extLst>
+              <a:ext uri="{96DAC541-7B7A-43D3-8B79-37D633B846F1}">
+                <ns0:svgBlip xmlns:ns0="http://schemas.microsoft.com/office/drawing/2016/SVG/main" r:embed="rId11"/>
+              </a:ext>
+            </a:extLst>
+          </a:blip>
+          <a:stretch>
+            <a:fillRect/>
+          </a:stretch>
+        </p:blipFill>
+        <p:spPr>
+          <a:xfrm>
+            <a:off x="954440" y="2454056"/>
+            <a:ext cx="560000" cy="560000"/>
+          </a:xfrm>
+          <a:prstGeom prst="rect">
+            <a:avLst/>
+          </a:prstGeom>
+        </p:spPr>
+      </p:pic>
+      <p:pic>
+        <p:nvPicPr>
+          <p:cNvPr id="101" name="Picture 100" descr="image.png"/>
+          <p:cNvPicPr>
+            <a:picLocks noChangeAspect="1"/>
+          </p:cNvPicPr>
+          <p:nvPr/>
+        </p:nvPicPr>
+        <p:blipFill>
+          <a:blip r:embed="rId3">
+            <a:extLst>
+              <a:ext uri="{96DAC541-7B7A-43D3-8B79-37D633B846F1}">
+                <ns1:svgBlip xmlns:ns1="http://schemas.microsoft.com/office/drawing/2016/SVG/main" r:embed="rId12"/>
+              </a:ext>
+            </a:extLst>
+          </a:blip>
+          <a:stretch>
+            <a:fillRect/>
+          </a:stretch>
+        </p:blipFill>
+        <p:spPr>
+          <a:xfrm>
+            <a:off x="954440" y="3752504"/>
+            <a:ext cx="560000" cy="560000"/>
+          </a:xfrm>
+          <a:prstGeom prst="rect">
+            <a:avLst/>
+          </a:prstGeom>
+        </p:spPr>
+      </p:pic>
+      <p:pic>
+        <p:nvPicPr>
+          <p:cNvPr id="102" name="Picture 101" descr="image.png"/>
+          <p:cNvPicPr>
+            <a:picLocks noChangeAspect="1"/>
+          </p:cNvPicPr>
+          <p:nvPr/>
+        </p:nvPicPr>
+        <p:blipFill>
+          <a:blip r:embed="rId4">
+            <a:extLst>
+              <a:ext uri="{96DAC541-7B7A-43D3-8B79-37D633B846F1}">
+                <ns2:svgBlip xmlns:ns2="http://schemas.microsoft.com/office/drawing/2016/SVG/main" r:embed="rId13"/>
               </a:ext>
             </a:extLst>
           </a:blip>
@@ -21976,7 +19224,7 @@
                 </a:solidFill>
                 <a:latin typeface="Calibri"/>
               </a:rPr>
-              <a:t>17</a:t>
+              <a:t>23</a:t>
             </a:r>
           </a:p>
         </p:txBody>
@@ -25672,7 +22920,7 @@
                 </a:solidFill>
                 <a:latin typeface="Calibri"/>
               </a:rPr>
-              <a:t>19</a:t>
+              <a:t>25</a:t>
             </a:r>
           </a:p>
         </p:txBody>
@@ -28284,6 +25532,186 @@
           </a:prstGeom>
         </p:spPr>
       </p:pic>
+      <p:pic>
+        <p:nvPicPr>
+          <p:cNvPr id="136" name="Picture 135" descr="image.png"/>
+          <p:cNvPicPr>
+            <a:picLocks noChangeAspect="1"/>
+          </p:cNvPicPr>
+          <p:nvPr/>
+        </p:nvPicPr>
+        <p:blipFill>
+          <a:blip r:embed="rId3">
+            <a:extLst>
+              <a:ext uri="{96DAC541-7B7A-43D3-8B79-37D633B846F1}">
+                <ns0:svgBlip xmlns:ns0="http://schemas.microsoft.com/office/drawing/2016/SVG/main" r:embed="rId21"/>
+              </a:ext>
+            </a:extLst>
+          </a:blip>
+          <a:stretch>
+            <a:fillRect/>
+          </a:stretch>
+        </p:blipFill>
+        <p:spPr>
+          <a:xfrm>
+            <a:off x="4638935" y="944759"/>
+            <a:ext cx="414771" cy="414771"/>
+          </a:xfrm>
+          <a:prstGeom prst="rect">
+            <a:avLst/>
+          </a:prstGeom>
+        </p:spPr>
+      </p:pic>
+      <p:pic>
+        <p:nvPicPr>
+          <p:cNvPr id="137" name="Picture 136" descr="image.png"/>
+          <p:cNvPicPr>
+            <a:picLocks noChangeAspect="1"/>
+          </p:cNvPicPr>
+          <p:nvPr/>
+        </p:nvPicPr>
+        <p:blipFill>
+          <a:blip r:embed="rId4">
+            <a:extLst>
+              <a:ext uri="{96DAC541-7B7A-43D3-8B79-37D633B846F1}">
+                <ns1:svgBlip xmlns:ns1="http://schemas.microsoft.com/office/drawing/2016/SVG/main" r:embed="rId23"/>
+              </a:ext>
+            </a:extLst>
+          </a:blip>
+          <a:stretch>
+            <a:fillRect/>
+          </a:stretch>
+        </p:blipFill>
+        <p:spPr>
+          <a:xfrm>
+            <a:off x="4638935" y="1831727"/>
+            <a:ext cx="414771" cy="414771"/>
+          </a:xfrm>
+          <a:prstGeom prst="rect">
+            <a:avLst/>
+          </a:prstGeom>
+        </p:spPr>
+      </p:pic>
+      <p:pic>
+        <p:nvPicPr>
+          <p:cNvPr id="138" name="Picture 137" descr="image.png"/>
+          <p:cNvPicPr>
+            <a:picLocks noChangeAspect="1"/>
+          </p:cNvPicPr>
+          <p:nvPr/>
+        </p:nvPicPr>
+        <p:blipFill>
+          <a:blip r:embed="rId5">
+            <a:extLst>
+              <a:ext uri="{96DAC541-7B7A-43D3-8B79-37D633B846F1}">
+                <ns2:svgBlip xmlns:ns2="http://schemas.microsoft.com/office/drawing/2016/SVG/main" r:embed="rId22"/>
+              </a:ext>
+            </a:extLst>
+          </a:blip>
+          <a:stretch>
+            <a:fillRect/>
+          </a:stretch>
+        </p:blipFill>
+        <p:spPr>
+          <a:xfrm>
+            <a:off x="4638935" y="2718695"/>
+            <a:ext cx="414771" cy="414771"/>
+          </a:xfrm>
+          <a:prstGeom prst="rect">
+            <a:avLst/>
+          </a:prstGeom>
+        </p:spPr>
+      </p:pic>
+      <p:pic>
+        <p:nvPicPr>
+          <p:cNvPr id="139" name="Picture 138" descr="image.png"/>
+          <p:cNvPicPr>
+            <a:picLocks noChangeAspect="1"/>
+          </p:cNvPicPr>
+          <p:nvPr/>
+        </p:nvPicPr>
+        <p:blipFill>
+          <a:blip r:embed="rId6">
+            <a:extLst>
+              <a:ext uri="{96DAC541-7B7A-43D3-8B79-37D633B846F1}">
+                <ns3:svgBlip xmlns:ns3="http://schemas.microsoft.com/office/drawing/2016/SVG/main" r:embed="rId24"/>
+              </a:ext>
+            </a:extLst>
+          </a:blip>
+          <a:stretch>
+            <a:fillRect/>
+          </a:stretch>
+        </p:blipFill>
+        <p:spPr>
+          <a:xfrm>
+            <a:off x="4638935" y="3605663"/>
+            <a:ext cx="414771" cy="414771"/>
+          </a:xfrm>
+          <a:prstGeom prst="rect">
+            <a:avLst/>
+          </a:prstGeom>
+        </p:spPr>
+      </p:pic>
+      <p:pic>
+        <p:nvPicPr>
+          <p:cNvPr id="140" name="Picture 139" descr="image.png"/>
+          <p:cNvPicPr>
+            <a:picLocks noChangeAspect="1"/>
+          </p:cNvPicPr>
+          <p:nvPr/>
+        </p:nvPicPr>
+        <p:blipFill>
+          <a:blip r:embed="rId7">
+            <a:extLst>
+              <a:ext uri="{96DAC541-7B7A-43D3-8B79-37D633B846F1}">
+                <ns4:svgBlip xmlns:ns4="http://schemas.microsoft.com/office/drawing/2016/SVG/main" r:embed="rId26"/>
+              </a:ext>
+            </a:extLst>
+          </a:blip>
+          <a:stretch>
+            <a:fillRect/>
+          </a:stretch>
+        </p:blipFill>
+        <p:spPr>
+          <a:xfrm>
+            <a:off x="4638935" y="4492631"/>
+            <a:ext cx="414771" cy="414771"/>
+          </a:xfrm>
+          <a:prstGeom prst="rect">
+            <a:avLst/>
+          </a:prstGeom>
+        </p:spPr>
+      </p:pic>
+      <p:pic>
+        <p:nvPicPr>
+          <p:cNvPr id="141" name="Picture 140" descr="image.png"/>
+          <p:cNvPicPr>
+            <a:picLocks noChangeAspect="1"/>
+          </p:cNvPicPr>
+          <p:nvPr/>
+        </p:nvPicPr>
+        <p:blipFill>
+          <a:blip r:embed="rId8">
+            <a:extLst>
+              <a:ext uri="{96DAC541-7B7A-43D3-8B79-37D633B846F1}">
+                <ns5:svgBlip xmlns:ns5="http://schemas.microsoft.com/office/drawing/2016/SVG/main" r:embed="rId25"/>
+              </a:ext>
+            </a:extLst>
+          </a:blip>
+          <a:stretch>
+            <a:fillRect/>
+          </a:stretch>
+        </p:blipFill>
+        <p:spPr>
+          <a:xfrm>
+            <a:off x="4638935" y="5379599"/>
+            <a:ext cx="414771" cy="414771"/>
+          </a:xfrm>
+          <a:prstGeom prst="rect">
+            <a:avLst/>
+          </a:prstGeom>
+        </p:spPr>
+      </p:pic>
     </p:spTree>
   </p:cSld>
   <p:clrMapOvr>
@@ -31143,7 +28571,7 @@
                 </a:solidFill>
                 <a:latin typeface="Calibri"/>
               </a:rPr>
-              <a:t>20</a:t>
+              <a:t>26</a:t>
             </a:r>
           </a:p>
         </p:txBody>
@@ -34784,7 +32212,7 @@
                 </a:solidFill>
                 <a:latin typeface="Calibri"/>
               </a:rPr>
-              <a:t>22</a:t>
+              <a:t>28</a:t>
             </a:r>
           </a:p>
         </p:txBody>
@@ -35012,6 +32440,126 @@
             <a:extLst>
               <a:ext uri="{96DAC541-7B7A-43D3-8B79-37D633B846F1}">
                 <ns3:svgBlip xmlns:ns3="http://schemas.microsoft.com/office/drawing/2016/SVG/main" r:embed="rId13"/>
+              </a:ext>
+            </a:extLst>
+          </a:blip>
+          <a:stretch>
+            <a:fillRect/>
+          </a:stretch>
+        </p:blipFill>
+        <p:spPr>
+          <a:xfrm>
+            <a:off x="6548933" y="4171493"/>
+            <a:ext cx="307238" cy="307238"/>
+          </a:xfrm>
+          <a:prstGeom prst="rect">
+            <a:avLst/>
+          </a:prstGeom>
+        </p:spPr>
+      </p:pic>
+      <p:pic>
+        <p:nvPicPr>
+          <p:cNvPr id="112" name="Picture 111" descr="image.png"/>
+          <p:cNvPicPr>
+            <a:picLocks noChangeAspect="1"/>
+          </p:cNvPicPr>
+          <p:nvPr/>
+        </p:nvPicPr>
+        <p:blipFill>
+          <a:blip r:embed="rId2">
+            <a:extLst>
+              <a:ext uri="{96DAC541-7B7A-43D3-8B79-37D633B846F1}">
+                <ns0:svgBlip xmlns:ns0="http://schemas.microsoft.com/office/drawing/2016/SVG/main" r:embed="rId15"/>
+              </a:ext>
+            </a:extLst>
+          </a:blip>
+          <a:stretch>
+            <a:fillRect/>
+          </a:stretch>
+        </p:blipFill>
+        <p:spPr>
+          <a:xfrm>
+            <a:off x="925373" y="1931213"/>
+            <a:ext cx="307238" cy="307238"/>
+          </a:xfrm>
+          <a:prstGeom prst="rect">
+            <a:avLst/>
+          </a:prstGeom>
+        </p:spPr>
+      </p:pic>
+      <p:pic>
+        <p:nvPicPr>
+          <p:cNvPr id="113" name="Picture 112" descr="image.png"/>
+          <p:cNvPicPr>
+            <a:picLocks noChangeAspect="1"/>
+          </p:cNvPicPr>
+          <p:nvPr/>
+        </p:nvPicPr>
+        <p:blipFill>
+          <a:blip r:embed="rId3">
+            <a:extLst>
+              <a:ext uri="{96DAC541-7B7A-43D3-8B79-37D633B846F1}">
+                <ns1:svgBlip xmlns:ns1="http://schemas.microsoft.com/office/drawing/2016/SVG/main" r:embed="rId16"/>
+              </a:ext>
+            </a:extLst>
+          </a:blip>
+          <a:stretch>
+            <a:fillRect/>
+          </a:stretch>
+        </p:blipFill>
+        <p:spPr>
+          <a:xfrm>
+            <a:off x="6548933" y="1931213"/>
+            <a:ext cx="307238" cy="307238"/>
+          </a:xfrm>
+          <a:prstGeom prst="rect">
+            <a:avLst/>
+          </a:prstGeom>
+        </p:spPr>
+      </p:pic>
+      <p:pic>
+        <p:nvPicPr>
+          <p:cNvPr id="114" name="Picture 113" descr="image.png"/>
+          <p:cNvPicPr>
+            <a:picLocks noChangeAspect="1"/>
+          </p:cNvPicPr>
+          <p:nvPr/>
+        </p:nvPicPr>
+        <p:blipFill>
+          <a:blip r:embed="rId4">
+            <a:extLst>
+              <a:ext uri="{96DAC541-7B7A-43D3-8B79-37D633B846F1}">
+                <ns2:svgBlip xmlns:ns2="http://schemas.microsoft.com/office/drawing/2016/SVG/main" r:embed="rId14"/>
+              </a:ext>
+            </a:extLst>
+          </a:blip>
+          <a:stretch>
+            <a:fillRect/>
+          </a:stretch>
+        </p:blipFill>
+        <p:spPr>
+          <a:xfrm>
+            <a:off x="925373" y="4171493"/>
+            <a:ext cx="307238" cy="307238"/>
+          </a:xfrm>
+          <a:prstGeom prst="rect">
+            <a:avLst/>
+          </a:prstGeom>
+        </p:spPr>
+      </p:pic>
+      <p:pic>
+        <p:nvPicPr>
+          <p:cNvPr id="115" name="Picture 114" descr="image.png"/>
+          <p:cNvPicPr>
+            <a:picLocks noChangeAspect="1"/>
+          </p:cNvPicPr>
+          <p:nvPr/>
+        </p:nvPicPr>
+        <p:blipFill>
+          <a:blip r:embed="rId5">
+            <a:extLst>
+              <a:ext uri="{96DAC541-7B7A-43D3-8B79-37D633B846F1}">
+                <ns3:svgBlip xmlns:ns3="http://schemas.microsoft.com/office/drawing/2016/SVG/main" r:embed="rId17"/>
               </a:ext>
             </a:extLst>
           </a:blip>
@@ -36817,8 +34365,8 @@
         </p:nvSpPr>
         <p:spPr>
           <a:xfrm>
-            <a:off x="1971520" y="1664207"/>
-            <a:ext cx="1366040" cy="1152144"/>
+            <a:off x="2591520" y="1664207"/>
+            <a:ext cx="746040" cy="1152144"/>
           </a:xfrm>
           <a:prstGeom prst="rect">
             <a:avLst/>
@@ -37073,8 +34621,8 @@
         </p:nvSpPr>
         <p:spPr>
           <a:xfrm>
-            <a:off x="1971520" y="3145536"/>
-            <a:ext cx="1366040" cy="1152144"/>
+            <a:off x="2591520" y="3145536"/>
+            <a:ext cx="746040" cy="1152144"/>
           </a:xfrm>
           <a:prstGeom prst="rect">
             <a:avLst/>
@@ -37329,8 +34877,8 @@
         </p:nvSpPr>
         <p:spPr>
           <a:xfrm>
-            <a:off x="1971520" y="4626864"/>
-            <a:ext cx="1366040" cy="1152144"/>
+            <a:off x="2591520" y="4626864"/>
+            <a:ext cx="746040" cy="1152144"/>
           </a:xfrm>
           <a:prstGeom prst="rect">
             <a:avLst/>
@@ -37508,7 +35056,7 @@
                 </a:solidFill>
                 <a:latin typeface="Calibri"/>
               </a:rPr>
-              <a:t>23</a:t>
+              <a:t>29</a:t>
             </a:r>
           </a:p>
         </p:txBody>
@@ -37676,6 +35224,96 @@
             <a:extLst>
               <a:ext uri="{96DAC541-7B7A-43D3-8B79-37D633B846F1}">
                 <ns2:svgBlip xmlns:ns2="http://schemas.microsoft.com/office/drawing/2016/SVG/main" r:embed="rId9"/>
+              </a:ext>
+            </a:extLst>
+          </a:blip>
+          <a:stretch>
+            <a:fillRect/>
+          </a:stretch>
+        </p:blipFill>
+        <p:spPr>
+          <a:xfrm>
+            <a:off x="698640" y="4962936"/>
+            <a:ext cx="480000" cy="480000"/>
+          </a:xfrm>
+          <a:prstGeom prst="rect">
+            <a:avLst/>
+          </a:prstGeom>
+        </p:spPr>
+      </p:pic>
+      <p:pic>
+        <p:nvPicPr>
+          <p:cNvPr id="70" name="Picture 69" descr="image.png"/>
+          <p:cNvPicPr>
+            <a:picLocks noChangeAspect="1"/>
+          </p:cNvPicPr>
+          <p:nvPr/>
+        </p:nvPicPr>
+        <p:blipFill>
+          <a:blip r:embed="rId2">
+            <a:extLst>
+              <a:ext uri="{96DAC541-7B7A-43D3-8B79-37D633B846F1}">
+                <ns0:svgBlip xmlns:ns0="http://schemas.microsoft.com/office/drawing/2016/SVG/main" r:embed="rId11"/>
+              </a:ext>
+            </a:extLst>
+          </a:blip>
+          <a:stretch>
+            <a:fillRect/>
+          </a:stretch>
+        </p:blipFill>
+        <p:spPr>
+          <a:xfrm>
+            <a:off x="698640" y="2000280"/>
+            <a:ext cx="480000" cy="480000"/>
+          </a:xfrm>
+          <a:prstGeom prst="rect">
+            <a:avLst/>
+          </a:prstGeom>
+        </p:spPr>
+      </p:pic>
+      <p:pic>
+        <p:nvPicPr>
+          <p:cNvPr id="71" name="Picture 70" descr="image.png"/>
+          <p:cNvPicPr>
+            <a:picLocks noChangeAspect="1"/>
+          </p:cNvPicPr>
+          <p:nvPr/>
+        </p:nvPicPr>
+        <p:blipFill>
+          <a:blip r:embed="rId3">
+            <a:extLst>
+              <a:ext uri="{96DAC541-7B7A-43D3-8B79-37D633B846F1}">
+                <ns1:svgBlip xmlns:ns1="http://schemas.microsoft.com/office/drawing/2016/SVG/main" r:embed="rId13"/>
+              </a:ext>
+            </a:extLst>
+          </a:blip>
+          <a:stretch>
+            <a:fillRect/>
+          </a:stretch>
+        </p:blipFill>
+        <p:spPr>
+          <a:xfrm>
+            <a:off x="698640" y="3481608"/>
+            <a:ext cx="480000" cy="480000"/>
+          </a:xfrm>
+          <a:prstGeom prst="rect">
+            <a:avLst/>
+          </a:prstGeom>
+        </p:spPr>
+      </p:pic>
+      <p:pic>
+        <p:nvPicPr>
+          <p:cNvPr id="72" name="Picture 71" descr="image.png"/>
+          <p:cNvPicPr>
+            <a:picLocks noChangeAspect="1"/>
+          </p:cNvPicPr>
+          <p:nvPr/>
+        </p:nvPicPr>
+        <p:blipFill>
+          <a:blip r:embed="rId4">
+            <a:extLst>
+              <a:ext uri="{96DAC541-7B7A-43D3-8B79-37D633B846F1}">
+                <ns2:svgBlip xmlns:ns2="http://schemas.microsoft.com/office/drawing/2016/SVG/main" r:embed="rId12"/>
               </a:ext>
             </a:extLst>
           </a:blip>
@@ -39339,6 +36977,96 @@
           </a:prstGeom>
         </p:spPr>
       </p:pic>
+      <p:pic>
+        <p:nvPicPr>
+          <p:cNvPr id="55" name="Picture 54" descr="image.png"/>
+          <p:cNvPicPr>
+            <a:picLocks noChangeAspect="1"/>
+          </p:cNvPicPr>
+          <p:nvPr/>
+        </p:nvPicPr>
+        <p:blipFill>
+          <a:blip r:embed="rId2">
+            <a:extLst>
+              <a:ext uri="{96DAC541-7B7A-43D3-8B79-37D633B846F1}">
+                <ns0:svgBlip xmlns:ns0="http://schemas.microsoft.com/office/drawing/2016/SVG/main" r:embed="rId11"/>
+              </a:ext>
+            </a:extLst>
+          </a:blip>
+          <a:stretch>
+            <a:fillRect/>
+          </a:stretch>
+        </p:blipFill>
+        <p:spPr>
+          <a:xfrm>
+            <a:off x="1182320" y="2462480"/>
+            <a:ext cx="332841" cy="332841"/>
+          </a:xfrm>
+          <a:prstGeom prst="rect">
+            <a:avLst/>
+          </a:prstGeom>
+        </p:spPr>
+      </p:pic>
+      <p:pic>
+        <p:nvPicPr>
+          <p:cNvPr id="56" name="Picture 55" descr="image.png"/>
+          <p:cNvPicPr>
+            <a:picLocks noChangeAspect="1"/>
+          </p:cNvPicPr>
+          <p:nvPr/>
+        </p:nvPicPr>
+        <p:blipFill>
+          <a:blip r:embed="rId3">
+            <a:extLst>
+              <a:ext uri="{96DAC541-7B7A-43D3-8B79-37D633B846F1}">
+                <ns1:svgBlip xmlns:ns1="http://schemas.microsoft.com/office/drawing/2016/SVG/main" r:embed="rId12"/>
+              </a:ext>
+            </a:extLst>
+          </a:blip>
+          <a:stretch>
+            <a:fillRect/>
+          </a:stretch>
+        </p:blipFill>
+        <p:spPr>
+          <a:xfrm>
+            <a:off x="1182320" y="3834080"/>
+            <a:ext cx="332841" cy="332841"/>
+          </a:xfrm>
+          <a:prstGeom prst="rect">
+            <a:avLst/>
+          </a:prstGeom>
+        </p:spPr>
+      </p:pic>
+      <p:pic>
+        <p:nvPicPr>
+          <p:cNvPr id="57" name="Picture 56" descr="image.png"/>
+          <p:cNvPicPr>
+            <a:picLocks noChangeAspect="1"/>
+          </p:cNvPicPr>
+          <p:nvPr/>
+        </p:nvPicPr>
+        <p:blipFill>
+          <a:blip r:embed="rId4">
+            <a:extLst>
+              <a:ext uri="{96DAC541-7B7A-43D3-8B79-37D633B846F1}">
+                <ns2:svgBlip xmlns:ns2="http://schemas.microsoft.com/office/drawing/2016/SVG/main" r:embed="rId13"/>
+              </a:ext>
+            </a:extLst>
+          </a:blip>
+          <a:stretch>
+            <a:fillRect/>
+          </a:stretch>
+        </p:blipFill>
+        <p:spPr>
+          <a:xfrm>
+            <a:off x="1182320" y="5205680"/>
+            <a:ext cx="332841" cy="332841"/>
+          </a:xfrm>
+          <a:prstGeom prst="rect">
+            <a:avLst/>
+          </a:prstGeom>
+        </p:spPr>
+      </p:pic>
     </p:spTree>
   </p:cSld>
   <p:clrMapOvr>
@@ -40016,6 +37744,1898 @@
 </p:sld>
 </file>
 
+<file path=ppt/slides/slide25.xml><?xml version="1.0" encoding="utf-8"?>
+<p:sld xmlns:a="http://schemas.openxmlformats.org/drawingml/2006/main" xmlns:p="http://schemas.openxmlformats.org/presentationml/2006/main" xmlns:r="http://schemas.openxmlformats.org/officeDocument/2006/relationships">
+  <p:cSld>
+    <p:spTree>
+      <p:nvGrpSpPr>
+        <p:cNvPr id="1" name=""/>
+        <p:cNvGrpSpPr/>
+        <p:nvPr/>
+      </p:nvGrpSpPr>
+      <p:grpSpPr/>
+      <p:sp>
+        <p:nvSpPr>
+          <p:cNvPr id="2" name="Rectangle 1"/>
+          <p:cNvSpPr/>
+          <p:nvPr/>
+        </p:nvSpPr>
+        <p:spPr>
+          <a:xfrm>
+            <a:off x="0" y="0"/>
+            <a:ext cx="12191695" cy="6858000"/>
+          </a:xfrm>
+          <a:prstGeom prst="rect">
+            <a:avLst/>
+          </a:prstGeom>
+          <a:solidFill>
+            <a:srgbClr val="FFFFFF"/>
+          </a:solidFill>
+          <a:ln>
+            <a:noFill/>
+          </a:ln>
+          <a:effectLst/>
+        </p:spPr>
+        <p:style>
+          <a:lnRef idx="1">
+            <a:schemeClr val="accent1"/>
+          </a:lnRef>
+          <a:fillRef idx="3">
+            <a:schemeClr val="accent1"/>
+          </a:fillRef>
+          <a:effectRef idx="2">
+            <a:schemeClr val="accent1"/>
+          </a:effectRef>
+          <a:fontRef idx="minor">
+            <a:schemeClr val="lt1"/>
+          </a:fontRef>
+        </p:style>
+        <p:txBody>
+          <a:bodyPr rtlCol="0" anchor="ctr"/>
+          <a:lstStyle/>
+          <a:p>
+            <a:pPr algn="ctr"/>
+          </a:p>
+        </p:txBody>
+      </p:sp>
+      <p:sp>
+        <p:nvSpPr>
+          <p:cNvPr id="3" name="Oval 2"/>
+          <p:cNvSpPr/>
+          <p:nvPr/>
+        </p:nvSpPr>
+        <p:spPr>
+          <a:xfrm>
+            <a:off x="548640" y="502920"/>
+            <a:ext cx="640080" cy="640080"/>
+          </a:xfrm>
+          <a:prstGeom prst="ellipse">
+            <a:avLst/>
+          </a:prstGeom>
+          <a:solidFill>
+            <a:srgbClr val="1F4E3D"/>
+          </a:solidFill>
+          <a:ln>
+            <a:noFill/>
+          </a:ln>
+          <a:effectLst/>
+        </p:spPr>
+        <p:style>
+          <a:lnRef idx="1">
+            <a:schemeClr val="accent1"/>
+          </a:lnRef>
+          <a:fillRef idx="3">
+            <a:schemeClr val="accent1"/>
+          </a:fillRef>
+          <a:effectRef idx="2">
+            <a:schemeClr val="accent1"/>
+          </a:effectRef>
+          <a:fontRef idx="minor">
+            <a:schemeClr val="lt1"/>
+          </a:fontRef>
+        </p:style>
+        <p:txBody>
+          <a:bodyPr rtlCol="0" anchor="ctr" wrap="none"/>
+          <a:lstStyle/>
+          <a:p>
+            <a:pPr algn="ctr"/>
+            <a:r>
+              <a:rPr sz="2400" b="1" i="0">
+                <a:solidFill>
+                  <a:srgbClr val="FFFFFF"/>
+                </a:solidFill>
+              </a:rPr>
+              <a:t>1</a:t>
+            </a:r>
+          </a:p>
+        </p:txBody>
+      </p:sp>
+      <p:sp>
+        <p:nvSpPr>
+          <p:cNvPr id="4" name="TextBox 3"/>
+          <p:cNvSpPr txBox="1"/>
+          <p:nvPr/>
+        </p:nvSpPr>
+        <p:spPr>
+          <a:xfrm>
+            <a:off x="1371600" y="440000"/>
+            <a:ext cx="9500000" cy="360000"/>
+          </a:xfrm>
+          <a:prstGeom prst="rect">
+            <a:avLst/>
+          </a:prstGeom>
+          <a:noFill/>
+        </p:spPr>
+        <p:txBody>
+          <a:bodyPr wrap="none">
+            <a:spAutoFit/>
+          </a:bodyPr>
+          <a:lstStyle/>
+          <a:p>
+            <a:r>
+              <a:rPr sz="1250" b="1" i="0">
+                <a:solidFill>
+                  <a:srgbClr val="C88A2E"/>
+                </a:solidFill>
+              </a:rPr>
+              <a:t>1. TỔNG QUAN</a:t>
+            </a:r>
+          </a:p>
+        </p:txBody>
+      </p:sp>
+      <p:sp>
+        <p:nvSpPr>
+          <p:cNvPr id="5" name="TextBox 4"/>
+          <p:cNvSpPr txBox="1"/>
+          <p:nvPr/>
+        </p:nvSpPr>
+        <p:spPr>
+          <a:xfrm>
+            <a:off x="1371600" y="760000"/>
+            <a:ext cx="10300000" cy="900000"/>
+          </a:xfrm>
+          <a:prstGeom prst="rect">
+            <a:avLst/>
+          </a:prstGeom>
+          <a:noFill/>
+        </p:spPr>
+        <p:txBody>
+          <a:bodyPr wrap="square">
+            <a:spAutoFit/>
+          </a:bodyPr>
+          <a:lstStyle/>
+          <a:p>
+            <a:r>
+              <a:rPr sz="3000" b="1" i="0">
+                <a:solidFill>
+                  <a:srgbClr val="1F4E3D"/>
+                </a:solidFill>
+              </a:rPr>
+              <a:t>Chặng đường phát triển</a:t>
+            </a:r>
+          </a:p>
+        </p:txBody>
+      </p:sp>
+      <p:sp>
+        <p:nvSpPr>
+          <p:cNvPr id="6" name="TextBox 5"/>
+          <p:cNvSpPr txBox="1"/>
+          <p:nvPr/>
+        </p:nvSpPr>
+        <p:spPr>
+          <a:xfrm>
+            <a:off x="548640" y="6473952"/>
+            <a:ext cx="8000000" cy="292608"/>
+          </a:xfrm>
+          <a:prstGeom prst="rect">
+            <a:avLst/>
+          </a:prstGeom>
+          <a:noFill/>
+        </p:spPr>
+        <p:txBody>
+          <a:bodyPr wrap="none">
+            <a:spAutoFit/>
+          </a:bodyPr>
+          <a:lstStyle/>
+          <a:p>
+            <a:r>
+              <a:rPr sz="1000" b="0" i="0">
+                <a:solidFill>
+                  <a:srgbClr val="6E7F77"/>
+                </a:solidFill>
+              </a:rPr>
+              <a:t>Báo cáo thực tập  ·  Công ty TNHH Sơn Hải Vân</a:t>
+            </a:r>
+          </a:p>
+        </p:txBody>
+      </p:sp>
+      <p:sp>
+        <p:nvSpPr>
+          <p:cNvPr id="7" name="TextBox 6"/>
+          <p:cNvSpPr txBox="1"/>
+          <p:nvPr/>
+        </p:nvSpPr>
+        <p:spPr>
+          <a:xfrm>
+            <a:off x="11300000" y="6473952"/>
+            <a:ext cx="650000" cy="292608"/>
+          </a:xfrm>
+          <a:prstGeom prst="rect">
+            <a:avLst/>
+          </a:prstGeom>
+          <a:noFill/>
+        </p:spPr>
+        <p:txBody>
+          <a:bodyPr wrap="none">
+            <a:spAutoFit/>
+          </a:bodyPr>
+          <a:lstStyle/>
+          <a:p>
+            <a:pPr algn="r"/>
+            <a:r>
+              <a:rPr sz="1100" b="1" i="0">
+                <a:solidFill>
+                  <a:srgbClr val="6E7F77"/>
+                </a:solidFill>
+              </a:rPr>
+              <a:t>5</a:t>
+            </a:r>
+          </a:p>
+        </p:txBody>
+      </p:sp>
+      <p:pic>
+        <p:nvPicPr>
+          <p:cNvPr id="8" name="Picture 7" descr="big_timeline.png"/>
+          <p:cNvPicPr>
+            <a:picLocks noChangeAspect="1"/>
+          </p:cNvPicPr>
+          <p:nvPr/>
+        </p:nvPicPr>
+        <p:blipFill>
+          <a:blip r:embed="rId2">
+            <a:extLst>
+              <a:ext uri="{96DAC541-7B7A-43D3-8B79-37D633B846F1}">
+                <ns0:svgBlip xmlns:ns0="http://schemas.microsoft.com/office/drawing/2016/SVG/main" r:embed="rId3"/>
+              </a:ext>
+            </a:extLst>
+          </a:blip>
+          <a:stretch>
+            <a:fillRect/>
+          </a:stretch>
+        </p:blipFill>
+        <p:spPr>
+          <a:xfrm>
+            <a:off x="995847" y="1780000"/>
+            <a:ext cx="10200000" cy="4123404"/>
+          </a:xfrm>
+          <a:prstGeom prst="rect">
+            <a:avLst/>
+          </a:prstGeom>
+        </p:spPr>
+      </p:pic>
+      <p:sp>
+        <p:nvSpPr>
+          <p:cNvPr id="9" name="TextBox 8"/>
+          <p:cNvSpPr txBox="1"/>
+          <p:nvPr/>
+        </p:nvSpPr>
+        <p:spPr>
+          <a:xfrm>
+            <a:off x="700000" y="5450000"/>
+            <a:ext cx="10800000" cy="360000"/>
+          </a:xfrm>
+          <a:prstGeom prst="rect">
+            <a:avLst/>
+          </a:prstGeom>
+          <a:noFill/>
+        </p:spPr>
+        <p:txBody>
+          <a:bodyPr wrap="none">
+            <a:spAutoFit/>
+          </a:bodyPr>
+          <a:lstStyle/>
+          <a:p>
+            <a:pPr algn="ctr"/>
+            <a:r>
+              <a:rPr sz="1300" b="0" i="1">
+                <a:solidFill>
+                  <a:srgbClr val="6E7F77"/>
+                </a:solidFill>
+              </a:rPr>
+              <a:t>Từ khởi đầu 2008 đến doanh nghiệp sản xuất sơn bảo vệ chuyên dụng hiện nay.</a:t>
+            </a:r>
+          </a:p>
+        </p:txBody>
+      </p:sp>
+    </p:spTree>
+  </p:cSld>
+  <p:clrMapOvr>
+    <a:masterClrMapping/>
+  </p:clrMapOvr>
+</p:sld>
+</file>
+
+<file path=ppt/slides/slide26.xml><?xml version="1.0" encoding="utf-8"?>
+<p:sld xmlns:a="http://schemas.openxmlformats.org/drawingml/2006/main" xmlns:p="http://schemas.openxmlformats.org/presentationml/2006/main" xmlns:r="http://schemas.openxmlformats.org/officeDocument/2006/relationships">
+  <p:cSld>
+    <p:spTree>
+      <p:nvGrpSpPr>
+        <p:cNvPr id="1" name=""/>
+        <p:cNvGrpSpPr/>
+        <p:nvPr/>
+      </p:nvGrpSpPr>
+      <p:grpSpPr/>
+      <p:sp>
+        <p:nvSpPr>
+          <p:cNvPr id="2" name="Rectangle 1"/>
+          <p:cNvSpPr/>
+          <p:nvPr/>
+        </p:nvSpPr>
+        <p:spPr>
+          <a:xfrm>
+            <a:off x="0" y="0"/>
+            <a:ext cx="12191695" cy="6858000"/>
+          </a:xfrm>
+          <a:prstGeom prst="rect">
+            <a:avLst/>
+          </a:prstGeom>
+          <a:solidFill>
+            <a:srgbClr val="FFFFFF"/>
+          </a:solidFill>
+          <a:ln>
+            <a:noFill/>
+          </a:ln>
+          <a:effectLst/>
+        </p:spPr>
+        <p:style>
+          <a:lnRef idx="1">
+            <a:schemeClr val="accent1"/>
+          </a:lnRef>
+          <a:fillRef idx="3">
+            <a:schemeClr val="accent1"/>
+          </a:fillRef>
+          <a:effectRef idx="2">
+            <a:schemeClr val="accent1"/>
+          </a:effectRef>
+          <a:fontRef idx="minor">
+            <a:schemeClr val="lt1"/>
+          </a:fontRef>
+        </p:style>
+        <p:txBody>
+          <a:bodyPr rtlCol="0" anchor="ctr"/>
+          <a:lstStyle/>
+          <a:p>
+            <a:pPr algn="ctr"/>
+          </a:p>
+        </p:txBody>
+      </p:sp>
+      <p:sp>
+        <p:nvSpPr>
+          <p:cNvPr id="3" name="Oval 2"/>
+          <p:cNvSpPr/>
+          <p:nvPr/>
+        </p:nvSpPr>
+        <p:spPr>
+          <a:xfrm>
+            <a:off x="548640" y="502920"/>
+            <a:ext cx="640080" cy="640080"/>
+          </a:xfrm>
+          <a:prstGeom prst="ellipse">
+            <a:avLst/>
+          </a:prstGeom>
+          <a:solidFill>
+            <a:srgbClr val="1F4E3D"/>
+          </a:solidFill>
+          <a:ln>
+            <a:noFill/>
+          </a:ln>
+          <a:effectLst/>
+        </p:spPr>
+        <p:style>
+          <a:lnRef idx="1">
+            <a:schemeClr val="accent1"/>
+          </a:lnRef>
+          <a:fillRef idx="3">
+            <a:schemeClr val="accent1"/>
+          </a:fillRef>
+          <a:effectRef idx="2">
+            <a:schemeClr val="accent1"/>
+          </a:effectRef>
+          <a:fontRef idx="minor">
+            <a:schemeClr val="lt1"/>
+          </a:fontRef>
+        </p:style>
+        <p:txBody>
+          <a:bodyPr rtlCol="0" anchor="ctr" wrap="none"/>
+          <a:lstStyle/>
+          <a:p>
+            <a:pPr algn="ctr"/>
+            <a:r>
+              <a:rPr sz="2400" b="1" i="0">
+                <a:solidFill>
+                  <a:srgbClr val="FFFFFF"/>
+                </a:solidFill>
+              </a:rPr>
+              <a:t>2</a:t>
+            </a:r>
+          </a:p>
+        </p:txBody>
+      </p:sp>
+      <p:sp>
+        <p:nvSpPr>
+          <p:cNvPr id="4" name="TextBox 3"/>
+          <p:cNvSpPr txBox="1"/>
+          <p:nvPr/>
+        </p:nvSpPr>
+        <p:spPr>
+          <a:xfrm>
+            <a:off x="1371600" y="440000"/>
+            <a:ext cx="9500000" cy="360000"/>
+          </a:xfrm>
+          <a:prstGeom prst="rect">
+            <a:avLst/>
+          </a:prstGeom>
+          <a:noFill/>
+        </p:spPr>
+        <p:txBody>
+          <a:bodyPr wrap="none">
+            <a:spAutoFit/>
+          </a:bodyPr>
+          <a:lstStyle/>
+          <a:p>
+            <a:r>
+              <a:rPr sz="1250" b="1" i="0">
+                <a:solidFill>
+                  <a:srgbClr val="C88A2E"/>
+                </a:solidFill>
+              </a:rPr>
+              <a:t>2. NGUYÊN VẬT LIỆU</a:t>
+            </a:r>
+          </a:p>
+        </p:txBody>
+      </p:sp>
+      <p:sp>
+        <p:nvSpPr>
+          <p:cNvPr id="5" name="TextBox 4"/>
+          <p:cNvSpPr txBox="1"/>
+          <p:nvPr/>
+        </p:nvSpPr>
+        <p:spPr>
+          <a:xfrm>
+            <a:off x="1371600" y="760000"/>
+            <a:ext cx="10300000" cy="900000"/>
+          </a:xfrm>
+          <a:prstGeom prst="rect">
+            <a:avLst/>
+          </a:prstGeom>
+          <a:noFill/>
+        </p:spPr>
+        <p:txBody>
+          <a:bodyPr wrap="square">
+            <a:spAutoFit/>
+          </a:bodyPr>
+          <a:lstStyle/>
+          <a:p>
+            <a:r>
+              <a:rPr sz="3000" b="1" i="0">
+                <a:solidFill>
+                  <a:srgbClr val="1F4E3D"/>
+                </a:solidFill>
+              </a:rPr>
+              <a:t>Tỉ lệ thành phần một công thức sơn điển hình</a:t>
+            </a:r>
+          </a:p>
+        </p:txBody>
+      </p:sp>
+      <p:sp>
+        <p:nvSpPr>
+          <p:cNvPr id="6" name="TextBox 5"/>
+          <p:cNvSpPr txBox="1"/>
+          <p:nvPr/>
+        </p:nvSpPr>
+        <p:spPr>
+          <a:xfrm>
+            <a:off x="548640" y="6473952"/>
+            <a:ext cx="8000000" cy="292608"/>
+          </a:xfrm>
+          <a:prstGeom prst="rect">
+            <a:avLst/>
+          </a:prstGeom>
+          <a:noFill/>
+        </p:spPr>
+        <p:txBody>
+          <a:bodyPr wrap="none">
+            <a:spAutoFit/>
+          </a:bodyPr>
+          <a:lstStyle/>
+          <a:p>
+            <a:r>
+              <a:rPr sz="1000" b="0" i="0">
+                <a:solidFill>
+                  <a:srgbClr val="6E7F77"/>
+                </a:solidFill>
+              </a:rPr>
+              <a:t>Báo cáo thực tập  ·  Công ty TNHH Sơn Hải Vân</a:t>
+            </a:r>
+          </a:p>
+        </p:txBody>
+      </p:sp>
+      <p:sp>
+        <p:nvSpPr>
+          <p:cNvPr id="7" name="TextBox 6"/>
+          <p:cNvSpPr txBox="1"/>
+          <p:nvPr/>
+        </p:nvSpPr>
+        <p:spPr>
+          <a:xfrm>
+            <a:off x="11300000" y="6473952"/>
+            <a:ext cx="650000" cy="292608"/>
+          </a:xfrm>
+          <a:prstGeom prst="rect">
+            <a:avLst/>
+          </a:prstGeom>
+          <a:noFill/>
+        </p:spPr>
+        <p:txBody>
+          <a:bodyPr wrap="none">
+            <a:spAutoFit/>
+          </a:bodyPr>
+          <a:lstStyle/>
+          <a:p>
+            <a:pPr algn="r"/>
+            <a:r>
+              <a:rPr sz="1100" b="1" i="0">
+                <a:solidFill>
+                  <a:srgbClr val="6E7F77"/>
+                </a:solidFill>
+              </a:rPr>
+              <a:t>9</a:t>
+            </a:r>
+          </a:p>
+        </p:txBody>
+      </p:sp>
+      <p:pic>
+        <p:nvPicPr>
+          <p:cNvPr id="8" name="Picture 7" descr="big_doughnut.png"/>
+          <p:cNvPicPr>
+            <a:picLocks noChangeAspect="1"/>
+          </p:cNvPicPr>
+          <p:nvPr/>
+        </p:nvPicPr>
+        <p:blipFill>
+          <a:blip r:embed="rId2">
+            <a:extLst>
+              <a:ext uri="{96DAC541-7B7A-43D3-8B79-37D633B846F1}">
+                <ns0:svgBlip xmlns:ns0="http://schemas.microsoft.com/office/drawing/2016/SVG/main" r:embed="rId3"/>
+              </a:ext>
+            </a:extLst>
+          </a:blip>
+          <a:stretch>
+            <a:fillRect/>
+          </a:stretch>
+        </p:blipFill>
+        <p:spPr>
+          <a:xfrm>
+            <a:off x="2270847" y="1780000"/>
+            <a:ext cx="7650000" cy="4250000"/>
+          </a:xfrm>
+          <a:prstGeom prst="rect">
+            <a:avLst/>
+          </a:prstGeom>
+        </p:spPr>
+      </p:pic>
+      <p:sp>
+        <p:nvSpPr>
+          <p:cNvPr id="9" name="TextBox 8"/>
+          <p:cNvSpPr txBox="1"/>
+          <p:nvPr/>
+        </p:nvSpPr>
+        <p:spPr>
+          <a:xfrm>
+            <a:off x="700000" y="6080000"/>
+            <a:ext cx="10800000" cy="360000"/>
+          </a:xfrm>
+          <a:prstGeom prst="rect">
+            <a:avLst/>
+          </a:prstGeom>
+          <a:noFill/>
+        </p:spPr>
+        <p:txBody>
+          <a:bodyPr wrap="none">
+            <a:spAutoFit/>
+          </a:bodyPr>
+          <a:lstStyle/>
+          <a:p>
+            <a:pPr algn="ctr"/>
+            <a:r>
+              <a:rPr sz="1300" b="0" i="1">
+                <a:solidFill>
+                  <a:srgbClr val="6E7F77"/>
+                </a:solidFill>
+              </a:rPr>
+              <a:t>Tỉ lệ minh họa — thay đổi theo loại sơn; sơn tàu biển giàu nhựa &amp; bột độn chống ăn mòn hơn.</a:t>
+            </a:r>
+          </a:p>
+        </p:txBody>
+      </p:sp>
+    </p:spTree>
+  </p:cSld>
+  <p:clrMapOvr>
+    <a:masterClrMapping/>
+  </p:clrMapOvr>
+</p:sld>
+</file>
+
+<file path=ppt/slides/slide27.xml><?xml version="1.0" encoding="utf-8"?>
+<p:sld xmlns:a="http://schemas.openxmlformats.org/drawingml/2006/main" xmlns:p="http://schemas.openxmlformats.org/presentationml/2006/main" xmlns:r="http://schemas.openxmlformats.org/officeDocument/2006/relationships">
+  <p:cSld>
+    <p:spTree>
+      <p:nvGrpSpPr>
+        <p:cNvPr id="1" name=""/>
+        <p:cNvGrpSpPr/>
+        <p:nvPr/>
+      </p:nvGrpSpPr>
+      <p:grpSpPr/>
+      <p:sp>
+        <p:nvSpPr>
+          <p:cNvPr id="2" name="Rectangle 1"/>
+          <p:cNvSpPr/>
+          <p:nvPr/>
+        </p:nvSpPr>
+        <p:spPr>
+          <a:xfrm>
+            <a:off x="0" y="0"/>
+            <a:ext cx="12191695" cy="6858000"/>
+          </a:xfrm>
+          <a:prstGeom prst="rect">
+            <a:avLst/>
+          </a:prstGeom>
+          <a:solidFill>
+            <a:srgbClr val="FFFFFF"/>
+          </a:solidFill>
+          <a:ln>
+            <a:noFill/>
+          </a:ln>
+          <a:effectLst/>
+        </p:spPr>
+        <p:style>
+          <a:lnRef idx="1">
+            <a:schemeClr val="accent1"/>
+          </a:lnRef>
+          <a:fillRef idx="3">
+            <a:schemeClr val="accent1"/>
+          </a:fillRef>
+          <a:effectRef idx="2">
+            <a:schemeClr val="accent1"/>
+          </a:effectRef>
+          <a:fontRef idx="minor">
+            <a:schemeClr val="lt1"/>
+          </a:fontRef>
+        </p:style>
+        <p:txBody>
+          <a:bodyPr rtlCol="0" anchor="ctr"/>
+          <a:lstStyle/>
+          <a:p>
+            <a:pPr algn="ctr"/>
+          </a:p>
+        </p:txBody>
+      </p:sp>
+      <p:sp>
+        <p:nvSpPr>
+          <p:cNvPr id="3" name="Oval 2"/>
+          <p:cNvSpPr/>
+          <p:nvPr/>
+        </p:nvSpPr>
+        <p:spPr>
+          <a:xfrm>
+            <a:off x="548640" y="502920"/>
+            <a:ext cx="640080" cy="640080"/>
+          </a:xfrm>
+          <a:prstGeom prst="ellipse">
+            <a:avLst/>
+          </a:prstGeom>
+          <a:solidFill>
+            <a:srgbClr val="1F4E3D"/>
+          </a:solidFill>
+          <a:ln>
+            <a:noFill/>
+          </a:ln>
+          <a:effectLst/>
+        </p:spPr>
+        <p:style>
+          <a:lnRef idx="1">
+            <a:schemeClr val="accent1"/>
+          </a:lnRef>
+          <a:fillRef idx="3">
+            <a:schemeClr val="accent1"/>
+          </a:fillRef>
+          <a:effectRef idx="2">
+            <a:schemeClr val="accent1"/>
+          </a:effectRef>
+          <a:fontRef idx="minor">
+            <a:schemeClr val="lt1"/>
+          </a:fontRef>
+        </p:style>
+        <p:txBody>
+          <a:bodyPr rtlCol="0" anchor="ctr" wrap="none"/>
+          <a:lstStyle/>
+          <a:p>
+            <a:pPr algn="ctr"/>
+            <a:r>
+              <a:rPr sz="2400" b="1" i="0">
+                <a:solidFill>
+                  <a:srgbClr val="FFFFFF"/>
+                </a:solidFill>
+              </a:rPr>
+              <a:t>3</a:t>
+            </a:r>
+          </a:p>
+        </p:txBody>
+      </p:sp>
+      <p:sp>
+        <p:nvSpPr>
+          <p:cNvPr id="4" name="TextBox 3"/>
+          <p:cNvSpPr txBox="1"/>
+          <p:nvPr/>
+        </p:nvSpPr>
+        <p:spPr>
+          <a:xfrm>
+            <a:off x="1371600" y="440000"/>
+            <a:ext cx="9500000" cy="360000"/>
+          </a:xfrm>
+          <a:prstGeom prst="rect">
+            <a:avLst/>
+          </a:prstGeom>
+          <a:noFill/>
+        </p:spPr>
+        <p:txBody>
+          <a:bodyPr wrap="none">
+            <a:spAutoFit/>
+          </a:bodyPr>
+          <a:lstStyle/>
+          <a:p>
+            <a:r>
+              <a:rPr sz="1250" b="1" i="0">
+                <a:solidFill>
+                  <a:srgbClr val="C88A2E"/>
+                </a:solidFill>
+              </a:rPr>
+              <a:t>3. QUY TRÌNH CÔNG NGHỆ</a:t>
+            </a:r>
+          </a:p>
+        </p:txBody>
+      </p:sp>
+      <p:sp>
+        <p:nvSpPr>
+          <p:cNvPr id="5" name="TextBox 4"/>
+          <p:cNvSpPr txBox="1"/>
+          <p:nvPr/>
+        </p:nvSpPr>
+        <p:spPr>
+          <a:xfrm>
+            <a:off x="1371600" y="760000"/>
+            <a:ext cx="10300000" cy="900000"/>
+          </a:xfrm>
+          <a:prstGeom prst="rect">
+            <a:avLst/>
+          </a:prstGeom>
+          <a:noFill/>
+        </p:spPr>
+        <p:txBody>
+          <a:bodyPr wrap="square">
+            <a:spAutoFit/>
+          </a:bodyPr>
+          <a:lstStyle/>
+          <a:p>
+            <a:r>
+              <a:rPr sz="3000" b="1" i="0">
+                <a:solidFill>
+                  <a:srgbClr val="1F4E3D"/>
+                </a:solidFill>
+              </a:rPr>
+              <a:t>Thời gian tương đối giữa các công đoạn</a:t>
+            </a:r>
+          </a:p>
+        </p:txBody>
+      </p:sp>
+      <p:sp>
+        <p:nvSpPr>
+          <p:cNvPr id="6" name="TextBox 5"/>
+          <p:cNvSpPr txBox="1"/>
+          <p:nvPr/>
+        </p:nvSpPr>
+        <p:spPr>
+          <a:xfrm>
+            <a:off x="548640" y="6473952"/>
+            <a:ext cx="8000000" cy="292608"/>
+          </a:xfrm>
+          <a:prstGeom prst="rect">
+            <a:avLst/>
+          </a:prstGeom>
+          <a:noFill/>
+        </p:spPr>
+        <p:txBody>
+          <a:bodyPr wrap="none">
+            <a:spAutoFit/>
+          </a:bodyPr>
+          <a:lstStyle/>
+          <a:p>
+            <a:r>
+              <a:rPr sz="1000" b="0" i="0">
+                <a:solidFill>
+                  <a:srgbClr val="6E7F77"/>
+                </a:solidFill>
+              </a:rPr>
+              <a:t>Báo cáo thực tập  ·  Công ty TNHH Sơn Hải Vân</a:t>
+            </a:r>
+          </a:p>
+        </p:txBody>
+      </p:sp>
+      <p:sp>
+        <p:nvSpPr>
+          <p:cNvPr id="7" name="TextBox 6"/>
+          <p:cNvSpPr txBox="1"/>
+          <p:nvPr/>
+        </p:nvSpPr>
+        <p:spPr>
+          <a:xfrm>
+            <a:off x="11300000" y="6473952"/>
+            <a:ext cx="650000" cy="292608"/>
+          </a:xfrm>
+          <a:prstGeom prst="rect">
+            <a:avLst/>
+          </a:prstGeom>
+          <a:noFill/>
+        </p:spPr>
+        <p:txBody>
+          <a:bodyPr wrap="none">
+            <a:spAutoFit/>
+          </a:bodyPr>
+          <a:lstStyle/>
+          <a:p>
+            <a:pPr algn="r"/>
+            <a:r>
+              <a:rPr sz="1100" b="1" i="0">
+                <a:solidFill>
+                  <a:srgbClr val="6E7F77"/>
+                </a:solidFill>
+              </a:rPr>
+              <a:t>15</a:t>
+            </a:r>
+          </a:p>
+        </p:txBody>
+      </p:sp>
+      <p:pic>
+        <p:nvPicPr>
+          <p:cNvPr id="8" name="Picture 7" descr="big_columns.png"/>
+          <p:cNvPicPr>
+            <a:picLocks noChangeAspect="1"/>
+          </p:cNvPicPr>
+          <p:nvPr/>
+        </p:nvPicPr>
+        <p:blipFill>
+          <a:blip r:embed="rId2">
+            <a:extLst>
+              <a:ext uri="{96DAC541-7B7A-43D3-8B79-37D633B846F1}">
+                <ns0:svgBlip xmlns:ns0="http://schemas.microsoft.com/office/drawing/2016/SVG/main" r:embed="rId3"/>
+              </a:ext>
+            </a:extLst>
+          </a:blip>
+          <a:stretch>
+            <a:fillRect/>
+          </a:stretch>
+        </p:blipFill>
+        <p:spPr>
+          <a:xfrm>
+            <a:off x="1862247" y="1780000"/>
+            <a:ext cx="8467200" cy="4320000"/>
+          </a:xfrm>
+          <a:prstGeom prst="rect">
+            <a:avLst/>
+          </a:prstGeom>
+        </p:spPr>
+      </p:pic>
+    </p:spTree>
+  </p:cSld>
+  <p:clrMapOvr>
+    <a:masterClrMapping/>
+  </p:clrMapOvr>
+</p:sld>
+</file>
+
+<file path=ppt/slides/slide28.xml><?xml version="1.0" encoding="utf-8"?>
+<p:sld xmlns:a="http://schemas.openxmlformats.org/drawingml/2006/main" xmlns:p="http://schemas.openxmlformats.org/presentationml/2006/main" xmlns:r="http://schemas.openxmlformats.org/officeDocument/2006/relationships">
+  <p:cSld>
+    <p:spTree>
+      <p:nvGrpSpPr>
+        <p:cNvPr id="1" name=""/>
+        <p:cNvGrpSpPr/>
+        <p:nvPr/>
+      </p:nvGrpSpPr>
+      <p:grpSpPr/>
+      <p:sp>
+        <p:nvSpPr>
+          <p:cNvPr id="2" name="Rectangle 1"/>
+          <p:cNvSpPr/>
+          <p:nvPr/>
+        </p:nvSpPr>
+        <p:spPr>
+          <a:xfrm>
+            <a:off x="0" y="0"/>
+            <a:ext cx="12191695" cy="6858000"/>
+          </a:xfrm>
+          <a:prstGeom prst="rect">
+            <a:avLst/>
+          </a:prstGeom>
+          <a:solidFill>
+            <a:srgbClr val="FFFFFF"/>
+          </a:solidFill>
+          <a:ln>
+            <a:noFill/>
+          </a:ln>
+          <a:effectLst/>
+        </p:spPr>
+        <p:style>
+          <a:lnRef idx="1">
+            <a:schemeClr val="accent1"/>
+          </a:lnRef>
+          <a:fillRef idx="3">
+            <a:schemeClr val="accent1"/>
+          </a:fillRef>
+          <a:effectRef idx="2">
+            <a:schemeClr val="accent1"/>
+          </a:effectRef>
+          <a:fontRef idx="minor">
+            <a:schemeClr val="lt1"/>
+          </a:fontRef>
+        </p:style>
+        <p:txBody>
+          <a:bodyPr rtlCol="0" anchor="ctr"/>
+          <a:lstStyle/>
+          <a:p>
+            <a:pPr algn="ctr"/>
+          </a:p>
+        </p:txBody>
+      </p:sp>
+      <p:sp>
+        <p:nvSpPr>
+          <p:cNvPr id="3" name="Oval 2"/>
+          <p:cNvSpPr/>
+          <p:nvPr/>
+        </p:nvSpPr>
+        <p:spPr>
+          <a:xfrm>
+            <a:off x="548640" y="502920"/>
+            <a:ext cx="640080" cy="640080"/>
+          </a:xfrm>
+          <a:prstGeom prst="ellipse">
+            <a:avLst/>
+          </a:prstGeom>
+          <a:solidFill>
+            <a:srgbClr val="1F4E3D"/>
+          </a:solidFill>
+          <a:ln>
+            <a:noFill/>
+          </a:ln>
+          <a:effectLst/>
+        </p:spPr>
+        <p:style>
+          <a:lnRef idx="1">
+            <a:schemeClr val="accent1"/>
+          </a:lnRef>
+          <a:fillRef idx="3">
+            <a:schemeClr val="accent1"/>
+          </a:fillRef>
+          <a:effectRef idx="2">
+            <a:schemeClr val="accent1"/>
+          </a:effectRef>
+          <a:fontRef idx="minor">
+            <a:schemeClr val="lt1"/>
+          </a:fontRef>
+        </p:style>
+        <p:txBody>
+          <a:bodyPr rtlCol="0" anchor="ctr" wrap="none"/>
+          <a:lstStyle/>
+          <a:p>
+            <a:pPr algn="ctr"/>
+            <a:r>
+              <a:rPr sz="2400" b="1" i="0">
+                <a:solidFill>
+                  <a:srgbClr val="FFFFFF"/>
+                </a:solidFill>
+              </a:rPr>
+              <a:t>4</a:t>
+            </a:r>
+          </a:p>
+        </p:txBody>
+      </p:sp>
+      <p:sp>
+        <p:nvSpPr>
+          <p:cNvPr id="4" name="TextBox 3"/>
+          <p:cNvSpPr txBox="1"/>
+          <p:nvPr/>
+        </p:nvSpPr>
+        <p:spPr>
+          <a:xfrm>
+            <a:off x="1371600" y="440000"/>
+            <a:ext cx="9500000" cy="360000"/>
+          </a:xfrm>
+          <a:prstGeom prst="rect">
+            <a:avLst/>
+          </a:prstGeom>
+          <a:noFill/>
+        </p:spPr>
+        <p:txBody>
+          <a:bodyPr wrap="none">
+            <a:spAutoFit/>
+          </a:bodyPr>
+          <a:lstStyle/>
+          <a:p>
+            <a:r>
+              <a:rPr sz="1250" b="1" i="0">
+                <a:solidFill>
+                  <a:srgbClr val="C88A2E"/>
+                </a:solidFill>
+              </a:rPr>
+              <a:t>4. KIỂM SOÁT CHẤT LƯỢNG</a:t>
+            </a:r>
+          </a:p>
+        </p:txBody>
+      </p:sp>
+      <p:sp>
+        <p:nvSpPr>
+          <p:cNvPr id="5" name="TextBox 4"/>
+          <p:cNvSpPr txBox="1"/>
+          <p:nvPr/>
+        </p:nvSpPr>
+        <p:spPr>
+          <a:xfrm>
+            <a:off x="1371600" y="760000"/>
+            <a:ext cx="10300000" cy="900000"/>
+          </a:xfrm>
+          <a:prstGeom prst="rect">
+            <a:avLst/>
+          </a:prstGeom>
+          <a:noFill/>
+        </p:spPr>
+        <p:txBody>
+          <a:bodyPr wrap="square">
+            <a:spAutoFit/>
+          </a:bodyPr>
+          <a:lstStyle/>
+          <a:p>
+            <a:r>
+              <a:rPr sz="3000" b="1" i="0">
+                <a:solidFill>
+                  <a:srgbClr val="1F4E3D"/>
+                </a:solidFill>
+              </a:rPr>
+              <a:t>Sơn tàu biển vs sơn trang trí — theo tiêu chí KCS</a:t>
+            </a:r>
+          </a:p>
+        </p:txBody>
+      </p:sp>
+      <p:sp>
+        <p:nvSpPr>
+          <p:cNvPr id="6" name="TextBox 5"/>
+          <p:cNvSpPr txBox="1"/>
+          <p:nvPr/>
+        </p:nvSpPr>
+        <p:spPr>
+          <a:xfrm>
+            <a:off x="548640" y="6473952"/>
+            <a:ext cx="8000000" cy="292608"/>
+          </a:xfrm>
+          <a:prstGeom prst="rect">
+            <a:avLst/>
+          </a:prstGeom>
+          <a:noFill/>
+        </p:spPr>
+        <p:txBody>
+          <a:bodyPr wrap="none">
+            <a:spAutoFit/>
+          </a:bodyPr>
+          <a:lstStyle/>
+          <a:p>
+            <a:r>
+              <a:rPr sz="1000" b="0" i="0">
+                <a:solidFill>
+                  <a:srgbClr val="6E7F77"/>
+                </a:solidFill>
+              </a:rPr>
+              <a:t>Báo cáo thực tập  ·  Công ty TNHH Sơn Hải Vân</a:t>
+            </a:r>
+          </a:p>
+        </p:txBody>
+      </p:sp>
+      <p:sp>
+        <p:nvSpPr>
+          <p:cNvPr id="7" name="TextBox 6"/>
+          <p:cNvSpPr txBox="1"/>
+          <p:nvPr/>
+        </p:nvSpPr>
+        <p:spPr>
+          <a:xfrm>
+            <a:off x="11300000" y="6473952"/>
+            <a:ext cx="650000" cy="292608"/>
+          </a:xfrm>
+          <a:prstGeom prst="rect">
+            <a:avLst/>
+          </a:prstGeom>
+          <a:noFill/>
+        </p:spPr>
+        <p:txBody>
+          <a:bodyPr wrap="none">
+            <a:spAutoFit/>
+          </a:bodyPr>
+          <a:lstStyle/>
+          <a:p>
+            <a:pPr algn="r"/>
+            <a:r>
+              <a:rPr sz="1100" b="1" i="0">
+                <a:solidFill>
+                  <a:srgbClr val="6E7F77"/>
+                </a:solidFill>
+              </a:rPr>
+              <a:t>22</a:t>
+            </a:r>
+          </a:p>
+        </p:txBody>
+      </p:sp>
+      <p:pic>
+        <p:nvPicPr>
+          <p:cNvPr id="8" name="Picture 7" descr="big_radar.png"/>
+          <p:cNvPicPr>
+            <a:picLocks noChangeAspect="1"/>
+          </p:cNvPicPr>
+          <p:nvPr/>
+        </p:nvPicPr>
+        <p:blipFill>
+          <a:blip r:embed="rId2">
+            <a:extLst>
+              <a:ext uri="{96DAC541-7B7A-43D3-8B79-37D633B846F1}">
+                <ns0:svgBlip xmlns:ns0="http://schemas.microsoft.com/office/drawing/2016/SVG/main" r:embed="rId3"/>
+              </a:ext>
+            </a:extLst>
+          </a:blip>
+          <a:stretch>
+            <a:fillRect/>
+          </a:stretch>
+        </p:blipFill>
+        <p:spPr>
+          <a:xfrm>
+            <a:off x="3963035" y="1780000"/>
+            <a:ext cx="4265625" cy="4550000"/>
+          </a:xfrm>
+          <a:prstGeom prst="rect">
+            <a:avLst/>
+          </a:prstGeom>
+        </p:spPr>
+      </p:pic>
+    </p:spTree>
+  </p:cSld>
+  <p:clrMapOvr>
+    <a:masterClrMapping/>
+  </p:clrMapOvr>
+</p:sld>
+</file>
+
+<file path=ppt/slides/slide29.xml><?xml version="1.0" encoding="utf-8"?>
+<p:sld xmlns:a="http://schemas.openxmlformats.org/drawingml/2006/main" xmlns:p="http://schemas.openxmlformats.org/presentationml/2006/main" xmlns:r="http://schemas.openxmlformats.org/officeDocument/2006/relationships">
+  <p:cSld>
+    <p:spTree>
+      <p:nvGrpSpPr>
+        <p:cNvPr id="1" name=""/>
+        <p:cNvGrpSpPr/>
+        <p:nvPr/>
+      </p:nvGrpSpPr>
+      <p:grpSpPr/>
+      <p:sp>
+        <p:nvSpPr>
+          <p:cNvPr id="2" name="Rectangle 1"/>
+          <p:cNvSpPr/>
+          <p:nvPr/>
+        </p:nvSpPr>
+        <p:spPr>
+          <a:xfrm>
+            <a:off x="0" y="0"/>
+            <a:ext cx="12191695" cy="6858000"/>
+          </a:xfrm>
+          <a:prstGeom prst="rect">
+            <a:avLst/>
+          </a:prstGeom>
+          <a:solidFill>
+            <a:srgbClr val="FFFFFF"/>
+          </a:solidFill>
+          <a:ln>
+            <a:noFill/>
+          </a:ln>
+          <a:effectLst/>
+        </p:spPr>
+        <p:style>
+          <a:lnRef idx="1">
+            <a:schemeClr val="accent1"/>
+          </a:lnRef>
+          <a:fillRef idx="3">
+            <a:schemeClr val="accent1"/>
+          </a:fillRef>
+          <a:effectRef idx="2">
+            <a:schemeClr val="accent1"/>
+          </a:effectRef>
+          <a:fontRef idx="minor">
+            <a:schemeClr val="lt1"/>
+          </a:fontRef>
+        </p:style>
+        <p:txBody>
+          <a:bodyPr rtlCol="0" anchor="ctr"/>
+          <a:lstStyle/>
+          <a:p>
+            <a:pPr algn="ctr"/>
+          </a:p>
+        </p:txBody>
+      </p:sp>
+      <p:sp>
+        <p:nvSpPr>
+          <p:cNvPr id="3" name="Oval 2"/>
+          <p:cNvSpPr/>
+          <p:nvPr/>
+        </p:nvSpPr>
+        <p:spPr>
+          <a:xfrm>
+            <a:off x="548640" y="502920"/>
+            <a:ext cx="640080" cy="640080"/>
+          </a:xfrm>
+          <a:prstGeom prst="ellipse">
+            <a:avLst/>
+          </a:prstGeom>
+          <a:solidFill>
+            <a:srgbClr val="1F4E3D"/>
+          </a:solidFill>
+          <a:ln>
+            <a:noFill/>
+          </a:ln>
+          <a:effectLst/>
+        </p:spPr>
+        <p:style>
+          <a:lnRef idx="1">
+            <a:schemeClr val="accent1"/>
+          </a:lnRef>
+          <a:fillRef idx="3">
+            <a:schemeClr val="accent1"/>
+          </a:fillRef>
+          <a:effectRef idx="2">
+            <a:schemeClr val="accent1"/>
+          </a:effectRef>
+          <a:fontRef idx="minor">
+            <a:schemeClr val="lt1"/>
+          </a:fontRef>
+        </p:style>
+        <p:txBody>
+          <a:bodyPr rtlCol="0" anchor="ctr" wrap="none"/>
+          <a:lstStyle/>
+          <a:p>
+            <a:pPr algn="ctr"/>
+            <a:r>
+              <a:rPr sz="2400" b="1" i="0">
+                <a:solidFill>
+                  <a:srgbClr val="FFFFFF"/>
+                </a:solidFill>
+              </a:rPr>
+              <a:t>3</a:t>
+            </a:r>
+          </a:p>
+        </p:txBody>
+      </p:sp>
+      <p:sp>
+        <p:nvSpPr>
+          <p:cNvPr id="4" name="TextBox 3"/>
+          <p:cNvSpPr txBox="1"/>
+          <p:nvPr/>
+        </p:nvSpPr>
+        <p:spPr>
+          <a:xfrm>
+            <a:off x="1371600" y="440000"/>
+            <a:ext cx="9500000" cy="360000"/>
+          </a:xfrm>
+          <a:prstGeom prst="rect">
+            <a:avLst/>
+          </a:prstGeom>
+          <a:noFill/>
+        </p:spPr>
+        <p:txBody>
+          <a:bodyPr wrap="none">
+            <a:spAutoFit/>
+          </a:bodyPr>
+          <a:lstStyle/>
+          <a:p>
+            <a:r>
+              <a:rPr sz="1250" b="1" i="0">
+                <a:solidFill>
+                  <a:srgbClr val="C88A2E"/>
+                </a:solidFill>
+              </a:rPr>
+              <a:t>3. THIẾT BỊ SẢN XUẤT CHÍNH</a:t>
+            </a:r>
+          </a:p>
+        </p:txBody>
+      </p:sp>
+      <p:sp>
+        <p:nvSpPr>
+          <p:cNvPr id="5" name="TextBox 4"/>
+          <p:cNvSpPr txBox="1"/>
+          <p:nvPr/>
+        </p:nvSpPr>
+        <p:spPr>
+          <a:xfrm>
+            <a:off x="1371600" y="760000"/>
+            <a:ext cx="10300000" cy="900000"/>
+          </a:xfrm>
+          <a:prstGeom prst="rect">
+            <a:avLst/>
+          </a:prstGeom>
+          <a:noFill/>
+        </p:spPr>
+        <p:txBody>
+          <a:bodyPr wrap="square">
+            <a:spAutoFit/>
+          </a:bodyPr>
+          <a:lstStyle/>
+          <a:p>
+            <a:r>
+              <a:rPr sz="3000" b="1" i="0">
+                <a:solidFill>
+                  <a:srgbClr val="1F4E3D"/>
+                </a:solidFill>
+              </a:rPr>
+              <a:t>Máy đánh paste</a:t>
+            </a:r>
+          </a:p>
+        </p:txBody>
+      </p:sp>
+      <p:sp>
+        <p:nvSpPr>
+          <p:cNvPr id="6" name="TextBox 5"/>
+          <p:cNvSpPr txBox="1"/>
+          <p:nvPr/>
+        </p:nvSpPr>
+        <p:spPr>
+          <a:xfrm>
+            <a:off x="548640" y="6473952"/>
+            <a:ext cx="8000000" cy="292608"/>
+          </a:xfrm>
+          <a:prstGeom prst="rect">
+            <a:avLst/>
+          </a:prstGeom>
+          <a:noFill/>
+        </p:spPr>
+        <p:txBody>
+          <a:bodyPr wrap="none">
+            <a:spAutoFit/>
+          </a:bodyPr>
+          <a:lstStyle/>
+          <a:p>
+            <a:r>
+              <a:rPr sz="1000" b="0" i="0">
+                <a:solidFill>
+                  <a:srgbClr val="6E7F77"/>
+                </a:solidFill>
+              </a:rPr>
+              <a:t>Báo cáo thực tập  ·  Công ty TNHH Sơn Hải Vân</a:t>
+            </a:r>
+          </a:p>
+        </p:txBody>
+      </p:sp>
+      <p:sp>
+        <p:nvSpPr>
+          <p:cNvPr id="7" name="TextBox 6"/>
+          <p:cNvSpPr txBox="1"/>
+          <p:nvPr/>
+        </p:nvSpPr>
+        <p:spPr>
+          <a:xfrm>
+            <a:off x="11300000" y="6473952"/>
+            <a:ext cx="650000" cy="292608"/>
+          </a:xfrm>
+          <a:prstGeom prst="rect">
+            <a:avLst/>
+          </a:prstGeom>
+          <a:noFill/>
+        </p:spPr>
+        <p:txBody>
+          <a:bodyPr wrap="none">
+            <a:spAutoFit/>
+          </a:bodyPr>
+          <a:lstStyle/>
+          <a:p>
+            <a:pPr algn="r"/>
+            <a:r>
+              <a:rPr sz="1100" b="1" i="0">
+                <a:solidFill>
+                  <a:srgbClr val="6E7F77"/>
+                </a:solidFill>
+              </a:rPr>
+              <a:t>16</a:t>
+            </a:r>
+          </a:p>
+        </p:txBody>
+      </p:sp>
+      <p:sp>
+        <p:nvSpPr>
+          <p:cNvPr id="8" name="Rounded Rectangle 7"/>
+          <p:cNvSpPr/>
+          <p:nvPr/>
+        </p:nvSpPr>
+        <p:spPr>
+          <a:xfrm>
+            <a:off x="9700000" y="820000"/>
+            <a:ext cx="1900000" cy="470000"/>
+          </a:xfrm>
+          <a:prstGeom prst="roundRect">
+            <a:avLst/>
+          </a:prstGeom>
+          <a:solidFill>
+            <a:srgbClr val="C88A2E"/>
+          </a:solidFill>
+          <a:ln>
+            <a:noFill/>
+          </a:ln>
+          <a:effectLst/>
+        </p:spPr>
+        <p:style>
+          <a:lnRef idx="1">
+            <a:schemeClr val="accent1"/>
+          </a:lnRef>
+          <a:fillRef idx="3">
+            <a:schemeClr val="accent1"/>
+          </a:fillRef>
+          <a:effectRef idx="2">
+            <a:schemeClr val="accent1"/>
+          </a:effectRef>
+          <a:fontRef idx="minor">
+            <a:schemeClr val="lt1"/>
+          </a:fontRef>
+        </p:style>
+        <p:txBody>
+          <a:bodyPr rtlCol="0" anchor="ctr" wrap="none"/>
+          <a:lstStyle/>
+          <a:p>
+            <a:pPr algn="ctr"/>
+            <a:r>
+              <a:rPr sz="1400" b="1" i="0">
+                <a:solidFill>
+                  <a:srgbClr val="FFFFFF"/>
+                </a:solidFill>
+              </a:rPr>
+              <a:t>Mã: ĐP01B</a:t>
+            </a:r>
+          </a:p>
+        </p:txBody>
+      </p:sp>
+      <p:pic>
+        <p:nvPicPr>
+          <p:cNvPr id="9" name="Picture 8" descr="image.jpg"/>
+          <p:cNvPicPr>
+            <a:picLocks noChangeAspect="1"/>
+          </p:cNvPicPr>
+          <p:nvPr/>
+        </p:nvPicPr>
+        <p:blipFill>
+          <a:blip r:embed="rId2"/>
+          <a:stretch>
+            <a:fillRect/>
+          </a:stretch>
+        </p:blipFill>
+        <p:spPr>
+          <a:xfrm>
+            <a:off x="548640" y="1820000"/>
+            <a:ext cx="4950000" cy="5658407"/>
+          </a:xfrm>
+          <a:prstGeom prst="rect">
+            <a:avLst/>
+          </a:prstGeom>
+        </p:spPr>
+      </p:pic>
+      <p:sp>
+        <p:nvSpPr>
+          <p:cNvPr id="10" name="Rounded Rectangle 9"/>
+          <p:cNvSpPr/>
+          <p:nvPr/>
+        </p:nvSpPr>
+        <p:spPr>
+          <a:xfrm>
+            <a:off x="5900000" y="1820000"/>
+            <a:ext cx="5750000" cy="1230000"/>
+          </a:xfrm>
+          <a:prstGeom prst="roundRect">
+            <a:avLst/>
+          </a:prstGeom>
+          <a:solidFill>
+            <a:srgbClr val="EEF4F0"/>
+          </a:solidFill>
+          <a:ln>
+            <a:noFill/>
+          </a:ln>
+          <a:effectLst/>
+        </p:spPr>
+        <p:style>
+          <a:lnRef idx="1">
+            <a:schemeClr val="accent1"/>
+          </a:lnRef>
+          <a:fillRef idx="3">
+            <a:schemeClr val="accent1"/>
+          </a:fillRef>
+          <a:effectRef idx="2">
+            <a:schemeClr val="accent1"/>
+          </a:effectRef>
+          <a:fontRef idx="minor">
+            <a:schemeClr val="lt1"/>
+          </a:fontRef>
+        </p:style>
+        <p:txBody>
+          <a:bodyPr rtlCol="0" anchor="ctr"/>
+          <a:lstStyle/>
+          <a:p>
+            <a:pPr algn="ctr"/>
+          </a:p>
+        </p:txBody>
+      </p:sp>
+      <p:sp>
+        <p:nvSpPr>
+          <p:cNvPr id="11" name="Rounded Rectangle 10"/>
+          <p:cNvSpPr/>
+          <p:nvPr/>
+        </p:nvSpPr>
+        <p:spPr>
+          <a:xfrm>
+            <a:off x="5900000" y="1820000"/>
+            <a:ext cx="70000" cy="1230000"/>
+          </a:xfrm>
+          <a:prstGeom prst="roundRect">
+            <a:avLst/>
+          </a:prstGeom>
+          <a:solidFill>
+            <a:srgbClr val="2C7A5A"/>
+          </a:solidFill>
+          <a:ln>
+            <a:noFill/>
+          </a:ln>
+          <a:effectLst/>
+        </p:spPr>
+        <p:style>
+          <a:lnRef idx="1">
+            <a:schemeClr val="accent1"/>
+          </a:lnRef>
+          <a:fillRef idx="3">
+            <a:schemeClr val="accent1"/>
+          </a:fillRef>
+          <a:effectRef idx="2">
+            <a:schemeClr val="accent1"/>
+          </a:effectRef>
+          <a:fontRef idx="minor">
+            <a:schemeClr val="lt1"/>
+          </a:fontRef>
+        </p:style>
+        <p:txBody>
+          <a:bodyPr rtlCol="0" anchor="ctr"/>
+          <a:lstStyle/>
+          <a:p>
+            <a:pPr algn="ctr"/>
+          </a:p>
+        </p:txBody>
+      </p:sp>
+      <p:sp>
+        <p:nvSpPr>
+          <p:cNvPr id="12" name="TextBox 11"/>
+          <p:cNvSpPr txBox="1"/>
+          <p:nvPr/>
+        </p:nvSpPr>
+        <p:spPr>
+          <a:xfrm>
+            <a:off x="6140000" y="1940000"/>
+            <a:ext cx="5310000" cy="1020000"/>
+          </a:xfrm>
+          <a:prstGeom prst="rect">
+            <a:avLst/>
+          </a:prstGeom>
+          <a:noFill/>
+        </p:spPr>
+        <p:txBody>
+          <a:bodyPr wrap="square" anchor="ctr">
+            <a:spAutoFit/>
+          </a:bodyPr>
+          <a:lstStyle/>
+          <a:p>
+            <a:r>
+              <a:rPr sz="1500" b="1" i="0">
+                <a:solidFill>
+                  <a:srgbClr val="1F4E3D"/>
+                </a:solidFill>
+              </a:rPr>
+              <a:t>Cấu tạo</a:t>
+            </a:r>
+          </a:p>
+          <a:p>
+            <a:r>
+              <a:rPr sz="1450" b="0" i="0">
+                <a:solidFill>
+                  <a:srgbClr val="34404A"/>
+                </a:solidFill>
+              </a:rPr>
+              <a:t>Động cơ 5–20 HP, trục &amp; cánh khuấy inox 304, bồn chứa inox.</a:t>
+            </a:r>
+          </a:p>
+        </p:txBody>
+      </p:sp>
+      <p:sp>
+        <p:nvSpPr>
+          <p:cNvPr id="13" name="Rounded Rectangle 12"/>
+          <p:cNvSpPr/>
+          <p:nvPr/>
+        </p:nvSpPr>
+        <p:spPr>
+          <a:xfrm>
+            <a:off x="5900000" y="3200000"/>
+            <a:ext cx="5750000" cy="1230000"/>
+          </a:xfrm>
+          <a:prstGeom prst="roundRect">
+            <a:avLst/>
+          </a:prstGeom>
+          <a:solidFill>
+            <a:srgbClr val="EEF4F0"/>
+          </a:solidFill>
+          <a:ln>
+            <a:noFill/>
+          </a:ln>
+          <a:effectLst/>
+        </p:spPr>
+        <p:style>
+          <a:lnRef idx="1">
+            <a:schemeClr val="accent1"/>
+          </a:lnRef>
+          <a:fillRef idx="3">
+            <a:schemeClr val="accent1"/>
+          </a:fillRef>
+          <a:effectRef idx="2">
+            <a:schemeClr val="accent1"/>
+          </a:effectRef>
+          <a:fontRef idx="minor">
+            <a:schemeClr val="lt1"/>
+          </a:fontRef>
+        </p:style>
+        <p:txBody>
+          <a:bodyPr rtlCol="0" anchor="ctr"/>
+          <a:lstStyle/>
+          <a:p>
+            <a:pPr algn="ctr"/>
+          </a:p>
+        </p:txBody>
+      </p:sp>
+      <p:sp>
+        <p:nvSpPr>
+          <p:cNvPr id="14" name="Rounded Rectangle 13"/>
+          <p:cNvSpPr/>
+          <p:nvPr/>
+        </p:nvSpPr>
+        <p:spPr>
+          <a:xfrm>
+            <a:off x="5900000" y="3200000"/>
+            <a:ext cx="70000" cy="1230000"/>
+          </a:xfrm>
+          <a:prstGeom prst="roundRect">
+            <a:avLst/>
+          </a:prstGeom>
+          <a:solidFill>
+            <a:srgbClr val="2C7A5A"/>
+          </a:solidFill>
+          <a:ln>
+            <a:noFill/>
+          </a:ln>
+          <a:effectLst/>
+        </p:spPr>
+        <p:style>
+          <a:lnRef idx="1">
+            <a:schemeClr val="accent1"/>
+          </a:lnRef>
+          <a:fillRef idx="3">
+            <a:schemeClr val="accent1"/>
+          </a:fillRef>
+          <a:effectRef idx="2">
+            <a:schemeClr val="accent1"/>
+          </a:effectRef>
+          <a:fontRef idx="minor">
+            <a:schemeClr val="lt1"/>
+          </a:fontRef>
+        </p:style>
+        <p:txBody>
+          <a:bodyPr rtlCol="0" anchor="ctr"/>
+          <a:lstStyle/>
+          <a:p>
+            <a:pPr algn="ctr"/>
+          </a:p>
+        </p:txBody>
+      </p:sp>
+      <p:sp>
+        <p:nvSpPr>
+          <p:cNvPr id="15" name="TextBox 14"/>
+          <p:cNvSpPr txBox="1"/>
+          <p:nvPr/>
+        </p:nvSpPr>
+        <p:spPr>
+          <a:xfrm>
+            <a:off x="6140000" y="3320000"/>
+            <a:ext cx="5310000" cy="1020000"/>
+          </a:xfrm>
+          <a:prstGeom prst="rect">
+            <a:avLst/>
+          </a:prstGeom>
+          <a:noFill/>
+        </p:spPr>
+        <p:txBody>
+          <a:bodyPr wrap="square" anchor="ctr">
+            <a:spAutoFit/>
+          </a:bodyPr>
+          <a:lstStyle/>
+          <a:p>
+            <a:r>
+              <a:rPr sz="1500" b="1" i="0">
+                <a:solidFill>
+                  <a:srgbClr val="1F4E3D"/>
+                </a:solidFill>
+              </a:rPr>
+              <a:t>Nguyên lý</a:t>
+            </a:r>
+          </a:p>
+          <a:p>
+            <a:r>
+              <a:rPr sz="1450" b="0" i="0">
+                <a:solidFill>
+                  <a:srgbClr val="34404A"/>
+                </a:solidFill>
+              </a:rPr>
+              <a:t>Quay 900–1200 v/p tạo lực cắt, phân tán bột màu / bột độn vào nhựa.</a:t>
+            </a:r>
+          </a:p>
+        </p:txBody>
+      </p:sp>
+      <p:sp>
+        <p:nvSpPr>
+          <p:cNvPr id="16" name="Rounded Rectangle 15"/>
+          <p:cNvSpPr/>
+          <p:nvPr/>
+        </p:nvSpPr>
+        <p:spPr>
+          <a:xfrm>
+            <a:off x="5900000" y="4580000"/>
+            <a:ext cx="5750000" cy="1230000"/>
+          </a:xfrm>
+          <a:prstGeom prst="roundRect">
+            <a:avLst/>
+          </a:prstGeom>
+          <a:solidFill>
+            <a:srgbClr val="EEF4F0"/>
+          </a:solidFill>
+          <a:ln>
+            <a:noFill/>
+          </a:ln>
+          <a:effectLst/>
+        </p:spPr>
+        <p:style>
+          <a:lnRef idx="1">
+            <a:schemeClr val="accent1"/>
+          </a:lnRef>
+          <a:fillRef idx="3">
+            <a:schemeClr val="accent1"/>
+          </a:fillRef>
+          <a:effectRef idx="2">
+            <a:schemeClr val="accent1"/>
+          </a:effectRef>
+          <a:fontRef idx="minor">
+            <a:schemeClr val="lt1"/>
+          </a:fontRef>
+        </p:style>
+        <p:txBody>
+          <a:bodyPr rtlCol="0" anchor="ctr"/>
+          <a:lstStyle/>
+          <a:p>
+            <a:pPr algn="ctr"/>
+          </a:p>
+        </p:txBody>
+      </p:sp>
+      <p:sp>
+        <p:nvSpPr>
+          <p:cNvPr id="17" name="Rounded Rectangle 16"/>
+          <p:cNvSpPr/>
+          <p:nvPr/>
+        </p:nvSpPr>
+        <p:spPr>
+          <a:xfrm>
+            <a:off x="5900000" y="4580000"/>
+            <a:ext cx="70000" cy="1230000"/>
+          </a:xfrm>
+          <a:prstGeom prst="roundRect">
+            <a:avLst/>
+          </a:prstGeom>
+          <a:solidFill>
+            <a:srgbClr val="2C7A5A"/>
+          </a:solidFill>
+          <a:ln>
+            <a:noFill/>
+          </a:ln>
+          <a:effectLst/>
+        </p:spPr>
+        <p:style>
+          <a:lnRef idx="1">
+            <a:schemeClr val="accent1"/>
+          </a:lnRef>
+          <a:fillRef idx="3">
+            <a:schemeClr val="accent1"/>
+          </a:fillRef>
+          <a:effectRef idx="2">
+            <a:schemeClr val="accent1"/>
+          </a:effectRef>
+          <a:fontRef idx="minor">
+            <a:schemeClr val="lt1"/>
+          </a:fontRef>
+        </p:style>
+        <p:txBody>
+          <a:bodyPr rtlCol="0" anchor="ctr"/>
+          <a:lstStyle/>
+          <a:p>
+            <a:pPr algn="ctr"/>
+          </a:p>
+        </p:txBody>
+      </p:sp>
+      <p:sp>
+        <p:nvSpPr>
+          <p:cNvPr id="18" name="TextBox 17"/>
+          <p:cNvSpPr txBox="1"/>
+          <p:nvPr/>
+        </p:nvSpPr>
+        <p:spPr>
+          <a:xfrm>
+            <a:off x="6140000" y="4700000"/>
+            <a:ext cx="5310000" cy="1020000"/>
+          </a:xfrm>
+          <a:prstGeom prst="rect">
+            <a:avLst/>
+          </a:prstGeom>
+          <a:noFill/>
+        </p:spPr>
+        <p:txBody>
+          <a:bodyPr wrap="square" anchor="ctr">
+            <a:spAutoFit/>
+          </a:bodyPr>
+          <a:lstStyle/>
+          <a:p>
+            <a:r>
+              <a:rPr sz="1500" b="1" i="0">
+                <a:solidFill>
+                  <a:srgbClr val="1F4E3D"/>
+                </a:solidFill>
+              </a:rPr>
+              <a:t>Thao tác</a:t>
+            </a:r>
+          </a:p>
+          <a:p>
+            <a:r>
+              <a:rPr sz="1450" b="0" i="0">
+                <a:solidFill>
+                  <a:srgbClr val="34404A"/>
+                </a:solidFill>
+              </a:rPr>
+              <a:t>Hạ cánh khuấy ngập paste, tăng tốc dần, kiểm soát nhiệt độ mẻ.</a:t>
+            </a:r>
+          </a:p>
+        </p:txBody>
+      </p:sp>
+    </p:spTree>
+  </p:cSld>
+  <p:clrMapOvr>
+    <a:masterClrMapping/>
+  </p:clrMapOvr>
+</p:sld>
+</file>
+
 <file path=ppt/slides/slide3.xml><?xml version="1.0" encoding="utf-8"?>
 <p:sld xmlns:a="http://schemas.openxmlformats.org/drawingml/2006/main" xmlns:p="http://schemas.openxmlformats.org/presentationml/2006/main" xmlns:r="http://schemas.openxmlformats.org/officeDocument/2006/relationships">
   <p:cSld>
@@ -40375,6 +39995,1319 @@
                 <a:latin typeface="Calibri"/>
               </a:rPr>
               <a:t>Ảnh: U.S. Navy (Public Domain) — minh họa sơn tàu biển</a:t>
+            </a:r>
+          </a:p>
+        </p:txBody>
+      </p:sp>
+    </p:spTree>
+  </p:cSld>
+  <p:clrMapOvr>
+    <a:masterClrMapping/>
+  </p:clrMapOvr>
+</p:sld>
+</file>
+
+<file path=ppt/slides/slide30.xml><?xml version="1.0" encoding="utf-8"?>
+<p:sld xmlns:a="http://schemas.openxmlformats.org/drawingml/2006/main" xmlns:p="http://schemas.openxmlformats.org/presentationml/2006/main" xmlns:r="http://schemas.openxmlformats.org/officeDocument/2006/relationships">
+  <p:cSld>
+    <p:spTree>
+      <p:nvGrpSpPr>
+        <p:cNvPr id="1" name=""/>
+        <p:cNvGrpSpPr/>
+        <p:nvPr/>
+      </p:nvGrpSpPr>
+      <p:grpSpPr/>
+      <p:sp>
+        <p:nvSpPr>
+          <p:cNvPr id="2" name="Rectangle 1"/>
+          <p:cNvSpPr/>
+          <p:nvPr/>
+        </p:nvSpPr>
+        <p:spPr>
+          <a:xfrm>
+            <a:off x="0" y="0"/>
+            <a:ext cx="12191695" cy="6858000"/>
+          </a:xfrm>
+          <a:prstGeom prst="rect">
+            <a:avLst/>
+          </a:prstGeom>
+          <a:solidFill>
+            <a:srgbClr val="FFFFFF"/>
+          </a:solidFill>
+          <a:ln>
+            <a:noFill/>
+          </a:ln>
+          <a:effectLst/>
+        </p:spPr>
+        <p:style>
+          <a:lnRef idx="1">
+            <a:schemeClr val="accent1"/>
+          </a:lnRef>
+          <a:fillRef idx="3">
+            <a:schemeClr val="accent1"/>
+          </a:fillRef>
+          <a:effectRef idx="2">
+            <a:schemeClr val="accent1"/>
+          </a:effectRef>
+          <a:fontRef idx="minor">
+            <a:schemeClr val="lt1"/>
+          </a:fontRef>
+        </p:style>
+        <p:txBody>
+          <a:bodyPr rtlCol="0" anchor="ctr"/>
+          <a:lstStyle/>
+          <a:p>
+            <a:pPr algn="ctr"/>
+          </a:p>
+        </p:txBody>
+      </p:sp>
+      <p:sp>
+        <p:nvSpPr>
+          <p:cNvPr id="3" name="Oval 2"/>
+          <p:cNvSpPr/>
+          <p:nvPr/>
+        </p:nvSpPr>
+        <p:spPr>
+          <a:xfrm>
+            <a:off x="548640" y="502920"/>
+            <a:ext cx="640080" cy="640080"/>
+          </a:xfrm>
+          <a:prstGeom prst="ellipse">
+            <a:avLst/>
+          </a:prstGeom>
+          <a:solidFill>
+            <a:srgbClr val="1F4E3D"/>
+          </a:solidFill>
+          <a:ln>
+            <a:noFill/>
+          </a:ln>
+          <a:effectLst/>
+        </p:spPr>
+        <p:style>
+          <a:lnRef idx="1">
+            <a:schemeClr val="accent1"/>
+          </a:lnRef>
+          <a:fillRef idx="3">
+            <a:schemeClr val="accent1"/>
+          </a:fillRef>
+          <a:effectRef idx="2">
+            <a:schemeClr val="accent1"/>
+          </a:effectRef>
+          <a:fontRef idx="minor">
+            <a:schemeClr val="lt1"/>
+          </a:fontRef>
+        </p:style>
+        <p:txBody>
+          <a:bodyPr rtlCol="0" anchor="ctr" wrap="none"/>
+          <a:lstStyle/>
+          <a:p>
+            <a:pPr algn="ctr"/>
+            <a:r>
+              <a:rPr sz="2400" b="1" i="0">
+                <a:solidFill>
+                  <a:srgbClr val="FFFFFF"/>
+                </a:solidFill>
+              </a:rPr>
+              <a:t>3</a:t>
+            </a:r>
+          </a:p>
+        </p:txBody>
+      </p:sp>
+      <p:sp>
+        <p:nvSpPr>
+          <p:cNvPr id="4" name="TextBox 3"/>
+          <p:cNvSpPr txBox="1"/>
+          <p:nvPr/>
+        </p:nvSpPr>
+        <p:spPr>
+          <a:xfrm>
+            <a:off x="1371600" y="440000"/>
+            <a:ext cx="9500000" cy="360000"/>
+          </a:xfrm>
+          <a:prstGeom prst="rect">
+            <a:avLst/>
+          </a:prstGeom>
+          <a:noFill/>
+        </p:spPr>
+        <p:txBody>
+          <a:bodyPr wrap="none">
+            <a:spAutoFit/>
+          </a:bodyPr>
+          <a:lstStyle/>
+          <a:p>
+            <a:r>
+              <a:rPr sz="1250" b="1" i="0">
+                <a:solidFill>
+                  <a:srgbClr val="C88A2E"/>
+                </a:solidFill>
+              </a:rPr>
+              <a:t>3. THIẾT BỊ SẢN XUẤT CHÍNH</a:t>
+            </a:r>
+          </a:p>
+        </p:txBody>
+      </p:sp>
+      <p:sp>
+        <p:nvSpPr>
+          <p:cNvPr id="5" name="TextBox 4"/>
+          <p:cNvSpPr txBox="1"/>
+          <p:nvPr/>
+        </p:nvSpPr>
+        <p:spPr>
+          <a:xfrm>
+            <a:off x="1371600" y="760000"/>
+            <a:ext cx="10300000" cy="900000"/>
+          </a:xfrm>
+          <a:prstGeom prst="rect">
+            <a:avLst/>
+          </a:prstGeom>
+          <a:noFill/>
+        </p:spPr>
+        <p:txBody>
+          <a:bodyPr wrap="square">
+            <a:spAutoFit/>
+          </a:bodyPr>
+          <a:lstStyle/>
+          <a:p>
+            <a:r>
+              <a:rPr sz="3000" b="1" i="0">
+                <a:solidFill>
+                  <a:srgbClr val="1F4E3D"/>
+                </a:solidFill>
+              </a:rPr>
+              <a:t>Máy nghiền mịn</a:t>
+            </a:r>
+          </a:p>
+        </p:txBody>
+      </p:sp>
+      <p:sp>
+        <p:nvSpPr>
+          <p:cNvPr id="6" name="TextBox 5"/>
+          <p:cNvSpPr txBox="1"/>
+          <p:nvPr/>
+        </p:nvSpPr>
+        <p:spPr>
+          <a:xfrm>
+            <a:off x="548640" y="6473952"/>
+            <a:ext cx="8000000" cy="292608"/>
+          </a:xfrm>
+          <a:prstGeom prst="rect">
+            <a:avLst/>
+          </a:prstGeom>
+          <a:noFill/>
+        </p:spPr>
+        <p:txBody>
+          <a:bodyPr wrap="none">
+            <a:spAutoFit/>
+          </a:bodyPr>
+          <a:lstStyle/>
+          <a:p>
+            <a:r>
+              <a:rPr sz="1000" b="0" i="0">
+                <a:solidFill>
+                  <a:srgbClr val="6E7F77"/>
+                </a:solidFill>
+              </a:rPr>
+              <a:t>Báo cáo thực tập  ·  Công ty TNHH Sơn Hải Vân</a:t>
+            </a:r>
+          </a:p>
+        </p:txBody>
+      </p:sp>
+      <p:sp>
+        <p:nvSpPr>
+          <p:cNvPr id="7" name="TextBox 6"/>
+          <p:cNvSpPr txBox="1"/>
+          <p:nvPr/>
+        </p:nvSpPr>
+        <p:spPr>
+          <a:xfrm>
+            <a:off x="11300000" y="6473952"/>
+            <a:ext cx="650000" cy="292608"/>
+          </a:xfrm>
+          <a:prstGeom prst="rect">
+            <a:avLst/>
+          </a:prstGeom>
+          <a:noFill/>
+        </p:spPr>
+        <p:txBody>
+          <a:bodyPr wrap="none">
+            <a:spAutoFit/>
+          </a:bodyPr>
+          <a:lstStyle/>
+          <a:p>
+            <a:pPr algn="r"/>
+            <a:r>
+              <a:rPr sz="1100" b="1" i="0">
+                <a:solidFill>
+                  <a:srgbClr val="6E7F77"/>
+                </a:solidFill>
+              </a:rPr>
+              <a:t>17</a:t>
+            </a:r>
+          </a:p>
+        </p:txBody>
+      </p:sp>
+      <p:sp>
+        <p:nvSpPr>
+          <p:cNvPr id="8" name="Rounded Rectangle 7"/>
+          <p:cNvSpPr/>
+          <p:nvPr/>
+        </p:nvSpPr>
+        <p:spPr>
+          <a:xfrm>
+            <a:off x="9700000" y="820000"/>
+            <a:ext cx="1900000" cy="470000"/>
+          </a:xfrm>
+          <a:prstGeom prst="roundRect">
+            <a:avLst/>
+          </a:prstGeom>
+          <a:solidFill>
+            <a:srgbClr val="C88A2E"/>
+          </a:solidFill>
+          <a:ln>
+            <a:noFill/>
+          </a:ln>
+          <a:effectLst/>
+        </p:spPr>
+        <p:style>
+          <a:lnRef idx="1">
+            <a:schemeClr val="accent1"/>
+          </a:lnRef>
+          <a:fillRef idx="3">
+            <a:schemeClr val="accent1"/>
+          </a:fillRef>
+          <a:effectRef idx="2">
+            <a:schemeClr val="accent1"/>
+          </a:effectRef>
+          <a:fontRef idx="minor">
+            <a:schemeClr val="lt1"/>
+          </a:fontRef>
+        </p:style>
+        <p:txBody>
+          <a:bodyPr rtlCol="0" anchor="ctr" wrap="none"/>
+          <a:lstStyle/>
+          <a:p>
+            <a:pPr algn="ctr"/>
+            <a:r>
+              <a:rPr sz="1400" b="1" i="0">
+                <a:solidFill>
+                  <a:srgbClr val="FFFFFF"/>
+                </a:solidFill>
+              </a:rPr>
+              <a:t>Mã: NM06</a:t>
+            </a:r>
+          </a:p>
+        </p:txBody>
+      </p:sp>
+      <p:pic>
+        <p:nvPicPr>
+          <p:cNvPr id="9" name="Picture 8" descr="image.jpg"/>
+          <p:cNvPicPr>
+            <a:picLocks noChangeAspect="1"/>
+          </p:cNvPicPr>
+          <p:nvPr/>
+        </p:nvPicPr>
+        <p:blipFill>
+          <a:blip r:embed="rId2"/>
+          <a:stretch>
+            <a:fillRect/>
+          </a:stretch>
+        </p:blipFill>
+        <p:spPr>
+          <a:xfrm>
+            <a:off x="6750000" y="2009565"/>
+            <a:ext cx="4900000" cy="3820870"/>
+          </a:xfrm>
+          <a:prstGeom prst="rect">
+            <a:avLst/>
+          </a:prstGeom>
+        </p:spPr>
+      </p:pic>
+      <p:sp>
+        <p:nvSpPr>
+          <p:cNvPr id="10" name="Rectangle 9"/>
+          <p:cNvSpPr/>
+          <p:nvPr/>
+        </p:nvSpPr>
+        <p:spPr>
+          <a:xfrm>
+            <a:off x="905000" y="2050000"/>
+            <a:ext cx="30000" cy="2500000"/>
+          </a:xfrm>
+          <a:prstGeom prst="rect">
+            <a:avLst/>
+          </a:prstGeom>
+          <a:solidFill>
+            <a:srgbClr val="B9D8C9"/>
+          </a:solidFill>
+          <a:ln>
+            <a:noFill/>
+          </a:ln>
+          <a:effectLst/>
+        </p:spPr>
+        <p:style>
+          <a:lnRef idx="1">
+            <a:schemeClr val="accent1"/>
+          </a:lnRef>
+          <a:fillRef idx="3">
+            <a:schemeClr val="accent1"/>
+          </a:fillRef>
+          <a:effectRef idx="2">
+            <a:schemeClr val="accent1"/>
+          </a:effectRef>
+          <a:fontRef idx="minor">
+            <a:schemeClr val="lt1"/>
+          </a:fontRef>
+        </p:style>
+        <p:txBody>
+          <a:bodyPr rtlCol="0" anchor="ctr"/>
+          <a:lstStyle/>
+          <a:p>
+            <a:pPr algn="ctr"/>
+          </a:p>
+        </p:txBody>
+      </p:sp>
+      <p:sp>
+        <p:nvSpPr>
+          <p:cNvPr id="11" name="Oval 10"/>
+          <p:cNvSpPr/>
+          <p:nvPr/>
+        </p:nvSpPr>
+        <p:spPr>
+          <a:xfrm>
+            <a:off x="700000" y="1900000"/>
+            <a:ext cx="440000" cy="440000"/>
+          </a:xfrm>
+          <a:prstGeom prst="ellipse">
+            <a:avLst/>
+          </a:prstGeom>
+          <a:solidFill>
+            <a:srgbClr val="2C7A5A"/>
+          </a:solidFill>
+          <a:ln>
+            <a:noFill/>
+          </a:ln>
+          <a:effectLst/>
+        </p:spPr>
+        <p:style>
+          <a:lnRef idx="1">
+            <a:schemeClr val="accent1"/>
+          </a:lnRef>
+          <a:fillRef idx="3">
+            <a:schemeClr val="accent1"/>
+          </a:fillRef>
+          <a:effectRef idx="2">
+            <a:schemeClr val="accent1"/>
+          </a:effectRef>
+          <a:fontRef idx="minor">
+            <a:schemeClr val="lt1"/>
+          </a:fontRef>
+        </p:style>
+        <p:txBody>
+          <a:bodyPr rtlCol="0" anchor="ctr"/>
+          <a:lstStyle/>
+          <a:p>
+            <a:pPr algn="ctr"/>
+            <a:r>
+              <a:rPr sz="1700" b="1" i="0">
+                <a:solidFill>
+                  <a:srgbClr val="FFFFFF"/>
+                </a:solidFill>
+              </a:rPr>
+              <a:t>1</a:t>
+            </a:r>
+          </a:p>
+        </p:txBody>
+      </p:sp>
+      <p:sp>
+        <p:nvSpPr>
+          <p:cNvPr id="12" name="TextBox 11"/>
+          <p:cNvSpPr txBox="1"/>
+          <p:nvPr/>
+        </p:nvSpPr>
+        <p:spPr>
+          <a:xfrm>
+            <a:off x="1300000" y="1840000"/>
+            <a:ext cx="5200000" cy="1150000"/>
+          </a:xfrm>
+          <a:prstGeom prst="rect">
+            <a:avLst/>
+          </a:prstGeom>
+          <a:noFill/>
+        </p:spPr>
+        <p:txBody>
+          <a:bodyPr wrap="square">
+            <a:spAutoFit/>
+          </a:bodyPr>
+          <a:lstStyle/>
+          <a:p>
+            <a:r>
+              <a:rPr sz="1650" b="1" i="0">
+                <a:solidFill>
+                  <a:srgbClr val="1F4E3D"/>
+                </a:solidFill>
+              </a:rPr>
+              <a:t>Cấu tạo</a:t>
+            </a:r>
+          </a:p>
+          <a:p>
+            <a:r>
+              <a:rPr sz="1450" b="0" i="0">
+                <a:solidFill>
+                  <a:srgbClr val="34404A"/>
+                </a:solidFill>
+              </a:rPr>
+              <a:t>Động cơ 30–60 HP, rổ nghiền inox chứa bi sứ / thủy tinh.</a:t>
+            </a:r>
+          </a:p>
+        </p:txBody>
+      </p:sp>
+      <p:sp>
+        <p:nvSpPr>
+          <p:cNvPr id="13" name="Oval 12"/>
+          <p:cNvSpPr/>
+          <p:nvPr/>
+        </p:nvSpPr>
+        <p:spPr>
+          <a:xfrm>
+            <a:off x="700000" y="3190000"/>
+            <a:ext cx="440000" cy="440000"/>
+          </a:xfrm>
+          <a:prstGeom prst="ellipse">
+            <a:avLst/>
+          </a:prstGeom>
+          <a:solidFill>
+            <a:srgbClr val="2C7A5A"/>
+          </a:solidFill>
+          <a:ln>
+            <a:noFill/>
+          </a:ln>
+          <a:effectLst/>
+        </p:spPr>
+        <p:style>
+          <a:lnRef idx="1">
+            <a:schemeClr val="accent1"/>
+          </a:lnRef>
+          <a:fillRef idx="3">
+            <a:schemeClr val="accent1"/>
+          </a:fillRef>
+          <a:effectRef idx="2">
+            <a:schemeClr val="accent1"/>
+          </a:effectRef>
+          <a:fontRef idx="minor">
+            <a:schemeClr val="lt1"/>
+          </a:fontRef>
+        </p:style>
+        <p:txBody>
+          <a:bodyPr rtlCol="0" anchor="ctr"/>
+          <a:lstStyle/>
+          <a:p>
+            <a:pPr algn="ctr"/>
+            <a:r>
+              <a:rPr sz="1700" b="1" i="0">
+                <a:solidFill>
+                  <a:srgbClr val="FFFFFF"/>
+                </a:solidFill>
+              </a:rPr>
+              <a:t>2</a:t>
+            </a:r>
+          </a:p>
+        </p:txBody>
+      </p:sp>
+      <p:sp>
+        <p:nvSpPr>
+          <p:cNvPr id="14" name="TextBox 13"/>
+          <p:cNvSpPr txBox="1"/>
+          <p:nvPr/>
+        </p:nvSpPr>
+        <p:spPr>
+          <a:xfrm>
+            <a:off x="1300000" y="3130000"/>
+            <a:ext cx="5200000" cy="1150000"/>
+          </a:xfrm>
+          <a:prstGeom prst="rect">
+            <a:avLst/>
+          </a:prstGeom>
+          <a:noFill/>
+        </p:spPr>
+        <p:txBody>
+          <a:bodyPr wrap="square">
+            <a:spAutoFit/>
+          </a:bodyPr>
+          <a:lstStyle/>
+          <a:p>
+            <a:r>
+              <a:rPr sz="1650" b="1" i="0">
+                <a:solidFill>
+                  <a:srgbClr val="1F4E3D"/>
+                </a:solidFill>
+              </a:rPr>
+              <a:t>Nguyên lý</a:t>
+            </a:r>
+          </a:p>
+          <a:p>
+            <a:r>
+              <a:rPr sz="1450" b="0" i="0">
+                <a:solidFill>
+                  <a:srgbClr val="34404A"/>
+                </a:solidFill>
+              </a:rPr>
+              <a:t>Va đập và ma sát của bi nghiền, giảm kích thước hạt xuống 10–20 µm.</a:t>
+            </a:r>
+          </a:p>
+        </p:txBody>
+      </p:sp>
+      <p:sp>
+        <p:nvSpPr>
+          <p:cNvPr id="15" name="Oval 14"/>
+          <p:cNvSpPr/>
+          <p:nvPr/>
+        </p:nvSpPr>
+        <p:spPr>
+          <a:xfrm>
+            <a:off x="700000" y="4480000"/>
+            <a:ext cx="440000" cy="440000"/>
+          </a:xfrm>
+          <a:prstGeom prst="ellipse">
+            <a:avLst/>
+          </a:prstGeom>
+          <a:solidFill>
+            <a:srgbClr val="2C7A5A"/>
+          </a:solidFill>
+          <a:ln>
+            <a:noFill/>
+          </a:ln>
+          <a:effectLst/>
+        </p:spPr>
+        <p:style>
+          <a:lnRef idx="1">
+            <a:schemeClr val="accent1"/>
+          </a:lnRef>
+          <a:fillRef idx="3">
+            <a:schemeClr val="accent1"/>
+          </a:fillRef>
+          <a:effectRef idx="2">
+            <a:schemeClr val="accent1"/>
+          </a:effectRef>
+          <a:fontRef idx="minor">
+            <a:schemeClr val="lt1"/>
+          </a:fontRef>
+        </p:style>
+        <p:txBody>
+          <a:bodyPr rtlCol="0" anchor="ctr"/>
+          <a:lstStyle/>
+          <a:p>
+            <a:pPr algn="ctr"/>
+            <a:r>
+              <a:rPr sz="1700" b="1" i="0">
+                <a:solidFill>
+                  <a:srgbClr val="FFFFFF"/>
+                </a:solidFill>
+              </a:rPr>
+              <a:t>3</a:t>
+            </a:r>
+          </a:p>
+        </p:txBody>
+      </p:sp>
+      <p:sp>
+        <p:nvSpPr>
+          <p:cNvPr id="16" name="TextBox 15"/>
+          <p:cNvSpPr txBox="1"/>
+          <p:nvPr/>
+        </p:nvSpPr>
+        <p:spPr>
+          <a:xfrm>
+            <a:off x="1300000" y="4420000"/>
+            <a:ext cx="5200000" cy="1150000"/>
+          </a:xfrm>
+          <a:prstGeom prst="rect">
+            <a:avLst/>
+          </a:prstGeom>
+          <a:noFill/>
+        </p:spPr>
+        <p:txBody>
+          <a:bodyPr wrap="square">
+            <a:spAutoFit/>
+          </a:bodyPr>
+          <a:lstStyle/>
+          <a:p>
+            <a:r>
+              <a:rPr sz="1650" b="1" i="0">
+                <a:solidFill>
+                  <a:srgbClr val="1F4E3D"/>
+                </a:solidFill>
+              </a:rPr>
+              <a:t>Thao tác</a:t>
+            </a:r>
+          </a:p>
+          <a:p>
+            <a:r>
+              <a:rPr sz="1450" b="0" i="0">
+                <a:solidFill>
+                  <a:srgbClr val="34404A"/>
+                </a:solidFill>
+              </a:rPr>
+              <a:t>Tuần hoàn paste qua rổ nghiền đến khi đạt độ mịn Hegman chuẩn.</a:t>
+            </a:r>
+          </a:p>
+        </p:txBody>
+      </p:sp>
+    </p:spTree>
+  </p:cSld>
+  <p:clrMapOvr>
+    <a:masterClrMapping/>
+  </p:clrMapOvr>
+</p:sld>
+</file>
+
+<file path=ppt/slides/slide31.xml><?xml version="1.0" encoding="utf-8"?>
+<p:sld xmlns:a="http://schemas.openxmlformats.org/drawingml/2006/main" xmlns:p="http://schemas.openxmlformats.org/presentationml/2006/main" xmlns:r="http://schemas.openxmlformats.org/officeDocument/2006/relationships">
+  <p:cSld>
+    <p:spTree>
+      <p:nvGrpSpPr>
+        <p:cNvPr id="1" name=""/>
+        <p:cNvGrpSpPr/>
+        <p:nvPr/>
+      </p:nvGrpSpPr>
+      <p:grpSpPr/>
+      <p:sp>
+        <p:nvSpPr>
+          <p:cNvPr id="2" name="Rectangle 1"/>
+          <p:cNvSpPr/>
+          <p:nvPr/>
+        </p:nvSpPr>
+        <p:spPr>
+          <a:xfrm>
+            <a:off x="0" y="0"/>
+            <a:ext cx="12191695" cy="6858000"/>
+          </a:xfrm>
+          <a:prstGeom prst="rect">
+            <a:avLst/>
+          </a:prstGeom>
+          <a:solidFill>
+            <a:srgbClr val="FFFFFF"/>
+          </a:solidFill>
+          <a:ln>
+            <a:noFill/>
+          </a:ln>
+          <a:effectLst/>
+        </p:spPr>
+        <p:style>
+          <a:lnRef idx="1">
+            <a:schemeClr val="accent1"/>
+          </a:lnRef>
+          <a:fillRef idx="3">
+            <a:schemeClr val="accent1"/>
+          </a:fillRef>
+          <a:effectRef idx="2">
+            <a:schemeClr val="accent1"/>
+          </a:effectRef>
+          <a:fontRef idx="minor">
+            <a:schemeClr val="lt1"/>
+          </a:fontRef>
+        </p:style>
+        <p:txBody>
+          <a:bodyPr rtlCol="0" anchor="ctr"/>
+          <a:lstStyle/>
+          <a:p>
+            <a:pPr algn="ctr"/>
+          </a:p>
+        </p:txBody>
+      </p:sp>
+      <p:sp>
+        <p:nvSpPr>
+          <p:cNvPr id="3" name="Oval 2"/>
+          <p:cNvSpPr/>
+          <p:nvPr/>
+        </p:nvSpPr>
+        <p:spPr>
+          <a:xfrm>
+            <a:off x="548640" y="502920"/>
+            <a:ext cx="640080" cy="640080"/>
+          </a:xfrm>
+          <a:prstGeom prst="ellipse">
+            <a:avLst/>
+          </a:prstGeom>
+          <a:solidFill>
+            <a:srgbClr val="1F4E3D"/>
+          </a:solidFill>
+          <a:ln>
+            <a:noFill/>
+          </a:ln>
+          <a:effectLst/>
+        </p:spPr>
+        <p:style>
+          <a:lnRef idx="1">
+            <a:schemeClr val="accent1"/>
+          </a:lnRef>
+          <a:fillRef idx="3">
+            <a:schemeClr val="accent1"/>
+          </a:fillRef>
+          <a:effectRef idx="2">
+            <a:schemeClr val="accent1"/>
+          </a:effectRef>
+          <a:fontRef idx="minor">
+            <a:schemeClr val="lt1"/>
+          </a:fontRef>
+        </p:style>
+        <p:txBody>
+          <a:bodyPr rtlCol="0" anchor="ctr" wrap="none"/>
+          <a:lstStyle/>
+          <a:p>
+            <a:pPr algn="ctr"/>
+            <a:r>
+              <a:rPr sz="2400" b="1" i="0">
+                <a:solidFill>
+                  <a:srgbClr val="FFFFFF"/>
+                </a:solidFill>
+              </a:rPr>
+              <a:t>3</a:t>
+            </a:r>
+          </a:p>
+        </p:txBody>
+      </p:sp>
+      <p:sp>
+        <p:nvSpPr>
+          <p:cNvPr id="4" name="TextBox 3"/>
+          <p:cNvSpPr txBox="1"/>
+          <p:nvPr/>
+        </p:nvSpPr>
+        <p:spPr>
+          <a:xfrm>
+            <a:off x="1371600" y="440000"/>
+            <a:ext cx="9500000" cy="360000"/>
+          </a:xfrm>
+          <a:prstGeom prst="rect">
+            <a:avLst/>
+          </a:prstGeom>
+          <a:noFill/>
+        </p:spPr>
+        <p:txBody>
+          <a:bodyPr wrap="none">
+            <a:spAutoFit/>
+          </a:bodyPr>
+          <a:lstStyle/>
+          <a:p>
+            <a:r>
+              <a:rPr sz="1250" b="1" i="0">
+                <a:solidFill>
+                  <a:srgbClr val="C88A2E"/>
+                </a:solidFill>
+              </a:rPr>
+              <a:t>3. THIẾT BỊ SẢN XUẤT CHÍNH</a:t>
+            </a:r>
+          </a:p>
+        </p:txBody>
+      </p:sp>
+      <p:sp>
+        <p:nvSpPr>
+          <p:cNvPr id="5" name="TextBox 4"/>
+          <p:cNvSpPr txBox="1"/>
+          <p:nvPr/>
+        </p:nvSpPr>
+        <p:spPr>
+          <a:xfrm>
+            <a:off x="1371600" y="760000"/>
+            <a:ext cx="10300000" cy="900000"/>
+          </a:xfrm>
+          <a:prstGeom prst="rect">
+            <a:avLst/>
+          </a:prstGeom>
+          <a:noFill/>
+        </p:spPr>
+        <p:txBody>
+          <a:bodyPr wrap="square">
+            <a:spAutoFit/>
+          </a:bodyPr>
+          <a:lstStyle/>
+          <a:p>
+            <a:r>
+              <a:rPr sz="3000" b="1" i="0">
+                <a:solidFill>
+                  <a:srgbClr val="1F4E3D"/>
+                </a:solidFill>
+              </a:rPr>
+              <a:t>Máy pha loãng</a:t>
+            </a:r>
+          </a:p>
+        </p:txBody>
+      </p:sp>
+      <p:sp>
+        <p:nvSpPr>
+          <p:cNvPr id="6" name="TextBox 5"/>
+          <p:cNvSpPr txBox="1"/>
+          <p:nvPr/>
+        </p:nvSpPr>
+        <p:spPr>
+          <a:xfrm>
+            <a:off x="548640" y="6473952"/>
+            <a:ext cx="8000000" cy="292608"/>
+          </a:xfrm>
+          <a:prstGeom prst="rect">
+            <a:avLst/>
+          </a:prstGeom>
+          <a:noFill/>
+        </p:spPr>
+        <p:txBody>
+          <a:bodyPr wrap="none">
+            <a:spAutoFit/>
+          </a:bodyPr>
+          <a:lstStyle/>
+          <a:p>
+            <a:r>
+              <a:rPr sz="1000" b="0" i="0">
+                <a:solidFill>
+                  <a:srgbClr val="6E7F77"/>
+                </a:solidFill>
+              </a:rPr>
+              <a:t>Báo cáo thực tập  ·  Công ty TNHH Sơn Hải Vân</a:t>
+            </a:r>
+          </a:p>
+        </p:txBody>
+      </p:sp>
+      <p:sp>
+        <p:nvSpPr>
+          <p:cNvPr id="7" name="TextBox 6"/>
+          <p:cNvSpPr txBox="1"/>
+          <p:nvPr/>
+        </p:nvSpPr>
+        <p:spPr>
+          <a:xfrm>
+            <a:off x="11300000" y="6473952"/>
+            <a:ext cx="650000" cy="292608"/>
+          </a:xfrm>
+          <a:prstGeom prst="rect">
+            <a:avLst/>
+          </a:prstGeom>
+          <a:noFill/>
+        </p:spPr>
+        <p:txBody>
+          <a:bodyPr wrap="none">
+            <a:spAutoFit/>
+          </a:bodyPr>
+          <a:lstStyle/>
+          <a:p>
+            <a:pPr algn="r"/>
+            <a:r>
+              <a:rPr sz="1100" b="1" i="0">
+                <a:solidFill>
+                  <a:srgbClr val="6E7F77"/>
+                </a:solidFill>
+              </a:rPr>
+              <a:t>18</a:t>
+            </a:r>
+          </a:p>
+        </p:txBody>
+      </p:sp>
+      <p:sp>
+        <p:nvSpPr>
+          <p:cNvPr id="8" name="Rounded Rectangle 7"/>
+          <p:cNvSpPr/>
+          <p:nvPr/>
+        </p:nvSpPr>
+        <p:spPr>
+          <a:xfrm>
+            <a:off x="9700000" y="820000"/>
+            <a:ext cx="1900000" cy="470000"/>
+          </a:xfrm>
+          <a:prstGeom prst="roundRect">
+            <a:avLst/>
+          </a:prstGeom>
+          <a:solidFill>
+            <a:srgbClr val="C88A2E"/>
+          </a:solidFill>
+          <a:ln>
+            <a:noFill/>
+          </a:ln>
+          <a:effectLst/>
+        </p:spPr>
+        <p:style>
+          <a:lnRef idx="1">
+            <a:schemeClr val="accent1"/>
+          </a:lnRef>
+          <a:fillRef idx="3">
+            <a:schemeClr val="accent1"/>
+          </a:fillRef>
+          <a:effectRef idx="2">
+            <a:schemeClr val="accent1"/>
+          </a:effectRef>
+          <a:fontRef idx="minor">
+            <a:schemeClr val="lt1"/>
+          </a:fontRef>
+        </p:style>
+        <p:txBody>
+          <a:bodyPr rtlCol="0" anchor="ctr" wrap="none"/>
+          <a:lstStyle/>
+          <a:p>
+            <a:pPr algn="ctr"/>
+            <a:r>
+              <a:rPr sz="1400" b="1" i="0">
+                <a:solidFill>
+                  <a:srgbClr val="FFFFFF"/>
+                </a:solidFill>
+              </a:rPr>
+              <a:t>Mã: PL01–03</a:t>
+            </a:r>
+          </a:p>
+        </p:txBody>
+      </p:sp>
+      <p:sp>
+        <p:nvSpPr>
+          <p:cNvPr id="9" name="Rounded Rectangle 8"/>
+          <p:cNvSpPr/>
+          <p:nvPr/>
+        </p:nvSpPr>
+        <p:spPr>
+          <a:xfrm>
+            <a:off x="6620000" y="1900000"/>
+            <a:ext cx="5030000" cy="3450000"/>
+          </a:xfrm>
+          <a:prstGeom prst="roundRect">
+            <a:avLst/>
+          </a:prstGeom>
+          <a:solidFill>
+            <a:srgbClr val="1F4E3D"/>
+          </a:solidFill>
+          <a:ln>
+            <a:noFill/>
+          </a:ln>
+          <a:effectLst/>
+        </p:spPr>
+        <p:style>
+          <a:lnRef idx="1">
+            <a:schemeClr val="accent1"/>
+          </a:lnRef>
+          <a:fillRef idx="3">
+            <a:schemeClr val="accent1"/>
+          </a:fillRef>
+          <a:effectRef idx="2">
+            <a:schemeClr val="accent1"/>
+          </a:effectRef>
+          <a:fontRef idx="minor">
+            <a:schemeClr val="lt1"/>
+          </a:fontRef>
+        </p:style>
+        <p:txBody>
+          <a:bodyPr rtlCol="0" anchor="ctr"/>
+          <a:lstStyle/>
+          <a:p>
+            <a:pPr algn="ctr"/>
+          </a:p>
+        </p:txBody>
+      </p:sp>
+      <p:pic>
+        <p:nvPicPr>
+          <p:cNvPr id="10" name="Picture 9" descr="image.jpg"/>
+          <p:cNvPicPr>
+            <a:picLocks noChangeAspect="1"/>
+          </p:cNvPicPr>
+          <p:nvPr/>
+        </p:nvPicPr>
+        <p:blipFill>
+          <a:blip r:embed="rId2"/>
+          <a:stretch>
+            <a:fillRect/>
+          </a:stretch>
+        </p:blipFill>
+        <p:spPr>
+          <a:xfrm>
+            <a:off x="6820000" y="2080000"/>
+            <a:ext cx="4630000" cy="3468164"/>
+          </a:xfrm>
+          <a:prstGeom prst="rect">
+            <a:avLst/>
+          </a:prstGeom>
+        </p:spPr>
+      </p:pic>
+      <p:sp>
+        <p:nvSpPr>
+          <p:cNvPr id="11" name="TextBox 10"/>
+          <p:cNvSpPr txBox="1"/>
+          <p:nvPr/>
+        </p:nvSpPr>
+        <p:spPr>
+          <a:xfrm>
+            <a:off x="560000" y="1780000"/>
+            <a:ext cx="5600000" cy="430000"/>
+          </a:xfrm>
+          <a:prstGeom prst="rect">
+            <a:avLst/>
+          </a:prstGeom>
+          <a:noFill/>
+        </p:spPr>
+        <p:txBody>
+          <a:bodyPr wrap="none">
+            <a:spAutoFit/>
+          </a:bodyPr>
+          <a:lstStyle/>
+          <a:p>
+            <a:r>
+              <a:rPr sz="1600" b="1" i="0">
+                <a:solidFill>
+                  <a:srgbClr val="C88A2E"/>
+                </a:solidFill>
+              </a:rPr>
+              <a:t>Thông số kỹ thuật</a:t>
+            </a:r>
+          </a:p>
+        </p:txBody>
+      </p:sp>
+      <p:sp>
+        <p:nvSpPr>
+          <p:cNvPr id="12" name="Rounded Rectangle 11"/>
+          <p:cNvSpPr/>
+          <p:nvPr/>
+        </p:nvSpPr>
+        <p:spPr>
+          <a:xfrm>
+            <a:off x="548640" y="2320000"/>
+            <a:ext cx="5750000" cy="1120000"/>
+          </a:xfrm>
+          <a:prstGeom prst="roundRect">
+            <a:avLst/>
+          </a:prstGeom>
+          <a:solidFill>
+            <a:srgbClr val="EEF4F0"/>
+          </a:solidFill>
+          <a:ln>
+            <a:noFill/>
+          </a:ln>
+          <a:effectLst/>
+        </p:spPr>
+        <p:style>
+          <a:lnRef idx="1">
+            <a:schemeClr val="accent1"/>
+          </a:lnRef>
+          <a:fillRef idx="3">
+            <a:schemeClr val="accent1"/>
+          </a:fillRef>
+          <a:effectRef idx="2">
+            <a:schemeClr val="accent1"/>
+          </a:effectRef>
+          <a:fontRef idx="minor">
+            <a:schemeClr val="lt1"/>
+          </a:fontRef>
+        </p:style>
+        <p:txBody>
+          <a:bodyPr rtlCol="0" anchor="ctr"/>
+          <a:lstStyle/>
+          <a:p>
+            <a:pPr algn="ctr"/>
+          </a:p>
+        </p:txBody>
+      </p:sp>
+      <p:sp>
+        <p:nvSpPr>
+          <p:cNvPr id="13" name="TextBox 12"/>
+          <p:cNvSpPr txBox="1"/>
+          <p:nvPr/>
+        </p:nvSpPr>
+        <p:spPr>
+          <a:xfrm>
+            <a:off x="808640" y="2410000"/>
+            <a:ext cx="5270000" cy="950000"/>
+          </a:xfrm>
+          <a:prstGeom prst="rect">
+            <a:avLst/>
+          </a:prstGeom>
+          <a:noFill/>
+        </p:spPr>
+        <p:txBody>
+          <a:bodyPr wrap="square" anchor="ctr">
+            <a:spAutoFit/>
+          </a:bodyPr>
+          <a:lstStyle/>
+          <a:p>
+            <a:r>
+              <a:rPr sz="1450" b="1" i="0">
+                <a:solidFill>
+                  <a:srgbClr val="1F4E3D"/>
+                </a:solidFill>
+              </a:rPr>
+              <a:t>Cấu tạo</a:t>
+            </a:r>
+          </a:p>
+          <a:p>
+            <a:r>
+              <a:rPr sz="1400" b="0" i="0">
+                <a:solidFill>
+                  <a:srgbClr val="34404A"/>
+                </a:solidFill>
+              </a:rPr>
+              <a:t>Bồn inox, cánh khuấy thủy lực 4 cánh, van xả đáy hình côn.</a:t>
+            </a:r>
+          </a:p>
+        </p:txBody>
+      </p:sp>
+      <p:sp>
+        <p:nvSpPr>
+          <p:cNvPr id="14" name="Rounded Rectangle 13"/>
+          <p:cNvSpPr/>
+          <p:nvPr/>
+        </p:nvSpPr>
+        <p:spPr>
+          <a:xfrm>
+            <a:off x="548640" y="3570000"/>
+            <a:ext cx="5750000" cy="1120000"/>
+          </a:xfrm>
+          <a:prstGeom prst="roundRect">
+            <a:avLst/>
+          </a:prstGeom>
+          <a:solidFill>
+            <a:srgbClr val="E4EEE8"/>
+          </a:solidFill>
+          <a:ln>
+            <a:noFill/>
+          </a:ln>
+          <a:effectLst/>
+        </p:spPr>
+        <p:style>
+          <a:lnRef idx="1">
+            <a:schemeClr val="accent1"/>
+          </a:lnRef>
+          <a:fillRef idx="3">
+            <a:schemeClr val="accent1"/>
+          </a:fillRef>
+          <a:effectRef idx="2">
+            <a:schemeClr val="accent1"/>
+          </a:effectRef>
+          <a:fontRef idx="minor">
+            <a:schemeClr val="lt1"/>
+          </a:fontRef>
+        </p:style>
+        <p:txBody>
+          <a:bodyPr rtlCol="0" anchor="ctr"/>
+          <a:lstStyle/>
+          <a:p>
+            <a:pPr algn="ctr"/>
+          </a:p>
+        </p:txBody>
+      </p:sp>
+      <p:sp>
+        <p:nvSpPr>
+          <p:cNvPr id="15" name="TextBox 14"/>
+          <p:cNvSpPr txBox="1"/>
+          <p:nvPr/>
+        </p:nvSpPr>
+        <p:spPr>
+          <a:xfrm>
+            <a:off x="808640" y="3660000"/>
+            <a:ext cx="5270000" cy="950000"/>
+          </a:xfrm>
+          <a:prstGeom prst="rect">
+            <a:avLst/>
+          </a:prstGeom>
+          <a:noFill/>
+        </p:spPr>
+        <p:txBody>
+          <a:bodyPr wrap="square" anchor="ctr">
+            <a:spAutoFit/>
+          </a:bodyPr>
+          <a:lstStyle/>
+          <a:p>
+            <a:r>
+              <a:rPr sz="1450" b="1" i="0">
+                <a:solidFill>
+                  <a:srgbClr val="1F4E3D"/>
+                </a:solidFill>
+              </a:rPr>
+              <a:t>Nguyên lý</a:t>
+            </a:r>
+          </a:p>
+          <a:p>
+            <a:r>
+              <a:rPr sz="1400" b="0" i="0">
+                <a:solidFill>
+                  <a:srgbClr val="34404A"/>
+                </a:solidFill>
+              </a:rPr>
+              <a:t>Khuấy tạo dòng đối lưu, chỉnh độ nhớt bằng dung môi.</a:t>
+            </a:r>
+          </a:p>
+        </p:txBody>
+      </p:sp>
+      <p:sp>
+        <p:nvSpPr>
+          <p:cNvPr id="16" name="Rounded Rectangle 15"/>
+          <p:cNvSpPr/>
+          <p:nvPr/>
+        </p:nvSpPr>
+        <p:spPr>
+          <a:xfrm>
+            <a:off x="548640" y="4820000"/>
+            <a:ext cx="5750000" cy="1120000"/>
+          </a:xfrm>
+          <a:prstGeom prst="roundRect">
+            <a:avLst/>
+          </a:prstGeom>
+          <a:solidFill>
+            <a:srgbClr val="EEF4F0"/>
+          </a:solidFill>
+          <a:ln>
+            <a:noFill/>
+          </a:ln>
+          <a:effectLst/>
+        </p:spPr>
+        <p:style>
+          <a:lnRef idx="1">
+            <a:schemeClr val="accent1"/>
+          </a:lnRef>
+          <a:fillRef idx="3">
+            <a:schemeClr val="accent1"/>
+          </a:fillRef>
+          <a:effectRef idx="2">
+            <a:schemeClr val="accent1"/>
+          </a:effectRef>
+          <a:fontRef idx="minor">
+            <a:schemeClr val="lt1"/>
+          </a:fontRef>
+        </p:style>
+        <p:txBody>
+          <a:bodyPr rtlCol="0" anchor="ctr"/>
+          <a:lstStyle/>
+          <a:p>
+            <a:pPr algn="ctr"/>
+          </a:p>
+        </p:txBody>
+      </p:sp>
+      <p:sp>
+        <p:nvSpPr>
+          <p:cNvPr id="17" name="TextBox 16"/>
+          <p:cNvSpPr txBox="1"/>
+          <p:nvPr/>
+        </p:nvSpPr>
+        <p:spPr>
+          <a:xfrm>
+            <a:off x="808640" y="4910000"/>
+            <a:ext cx="5270000" cy="950000"/>
+          </a:xfrm>
+          <a:prstGeom prst="rect">
+            <a:avLst/>
+          </a:prstGeom>
+          <a:noFill/>
+        </p:spPr>
+        <p:txBody>
+          <a:bodyPr wrap="square" anchor="ctr">
+            <a:spAutoFit/>
+          </a:bodyPr>
+          <a:lstStyle/>
+          <a:p>
+            <a:r>
+              <a:rPr sz="1450" b="1" i="0">
+                <a:solidFill>
+                  <a:srgbClr val="1F4E3D"/>
+                </a:solidFill>
+              </a:rPr>
+              <a:t>Thao tác</a:t>
+            </a:r>
+          </a:p>
+          <a:p>
+            <a:r>
+              <a:rPr sz="1400" b="0" i="0">
+                <a:solidFill>
+                  <a:srgbClr val="34404A"/>
+                </a:solidFill>
+              </a:rPr>
+              <a:t>Bổ sung dung môi từ từ, đo KU đến khi đạt thông số đích.</a:t>
             </a:r>
           </a:p>
         </p:txBody>
@@ -40842,8 +41775,8 @@
         </p:nvSpPr>
         <p:spPr>
           <a:xfrm>
-            <a:off x="6149200" y="1600200"/>
-            <a:ext cx="5280800" cy="457200"/>
+            <a:off x="6709200" y="1600200"/>
+            <a:ext cx="4720800" cy="457200"/>
           </a:xfrm>
           <a:prstGeom prst="rect">
             <a:avLst/>
@@ -40877,8 +41810,8 @@
         </p:nvSpPr>
         <p:spPr>
           <a:xfrm>
-            <a:off x="6149200" y="2057400"/>
-            <a:ext cx="5280800" cy="640080"/>
+            <a:off x="6709200" y="2057400"/>
+            <a:ext cx="4720800" cy="640080"/>
           </a:xfrm>
           <a:prstGeom prst="rect">
             <a:avLst/>
@@ -41010,8 +41943,8 @@
         </p:nvSpPr>
         <p:spPr>
           <a:xfrm>
-            <a:off x="6149200" y="3182112"/>
-            <a:ext cx="5280800" cy="457200"/>
+            <a:off x="6709200" y="3182112"/>
+            <a:ext cx="4720800" cy="457200"/>
           </a:xfrm>
           <a:prstGeom prst="rect">
             <a:avLst/>
@@ -41045,8 +41978,8 @@
         </p:nvSpPr>
         <p:spPr>
           <a:xfrm>
-            <a:off x="6149200" y="3639312"/>
-            <a:ext cx="5280800" cy="640080"/>
+            <a:off x="6709200" y="3639312"/>
+            <a:ext cx="4720800" cy="640080"/>
           </a:xfrm>
           <a:prstGeom prst="rect">
             <a:avLst/>
@@ -41178,8 +42111,8 @@
         </p:nvSpPr>
         <p:spPr>
           <a:xfrm>
-            <a:off x="6149200" y="4764024"/>
-            <a:ext cx="5280800" cy="457200"/>
+            <a:off x="6709200" y="4764024"/>
+            <a:ext cx="4720800" cy="457200"/>
           </a:xfrm>
           <a:prstGeom prst="rect">
             <a:avLst/>
@@ -41213,8 +42146,8 @@
         </p:nvSpPr>
         <p:spPr>
           <a:xfrm>
-            <a:off x="6149200" y="5221224"/>
-            <a:ext cx="5280800" cy="640080"/>
+            <a:off x="6709200" y="5221224"/>
+            <a:ext cx="4720800" cy="640080"/>
           </a:xfrm>
           <a:prstGeom prst="rect">
             <a:avLst/>
@@ -41442,6 +42375,96 @@
             <a:extLst>
               <a:ext uri="{96DAC541-7B7A-43D3-8B79-37D633B846F1}">
                 <ns2:svgBlip xmlns:ns2="http://schemas.microsoft.com/office/drawing/2016/SVG/main" r:embed="rId9"/>
+              </a:ext>
+            </a:extLst>
+          </a:blip>
+          <a:stretch>
+            <a:fillRect/>
+          </a:stretch>
+        </p:blipFill>
+        <p:spPr>
+          <a:xfrm>
+            <a:off x="4813440" y="5069804"/>
+            <a:ext cx="440000" cy="440000"/>
+          </a:xfrm>
+          <a:prstGeom prst="rect">
+            <a:avLst/>
+          </a:prstGeom>
+        </p:spPr>
+      </p:pic>
+      <p:pic>
+        <p:nvPicPr>
+          <p:cNvPr id="70" name="Picture 69" descr="image.png"/>
+          <p:cNvPicPr>
+            <a:picLocks noChangeAspect="1"/>
+          </p:cNvPicPr>
+          <p:nvPr/>
+        </p:nvPicPr>
+        <p:blipFill>
+          <a:blip r:embed="rId3">
+            <a:extLst>
+              <a:ext uri="{96DAC541-7B7A-43D3-8B79-37D633B846F1}">
+                <ns0:svgBlip xmlns:ns0="http://schemas.microsoft.com/office/drawing/2016/SVG/main" r:embed="rId13"/>
+              </a:ext>
+            </a:extLst>
+          </a:blip>
+          <a:stretch>
+            <a:fillRect/>
+          </a:stretch>
+        </p:blipFill>
+        <p:spPr>
+          <a:xfrm>
+            <a:off x="4813440" y="1905980"/>
+            <a:ext cx="440000" cy="440000"/>
+          </a:xfrm>
+          <a:prstGeom prst="rect">
+            <a:avLst/>
+          </a:prstGeom>
+        </p:spPr>
+      </p:pic>
+      <p:pic>
+        <p:nvPicPr>
+          <p:cNvPr id="71" name="Picture 70" descr="image.png"/>
+          <p:cNvPicPr>
+            <a:picLocks noChangeAspect="1"/>
+          </p:cNvPicPr>
+          <p:nvPr/>
+        </p:nvPicPr>
+        <p:blipFill>
+          <a:blip r:embed="rId4">
+            <a:extLst>
+              <a:ext uri="{96DAC541-7B7A-43D3-8B79-37D633B846F1}">
+                <ns1:svgBlip xmlns:ns1="http://schemas.microsoft.com/office/drawing/2016/SVG/main" r:embed="rId14"/>
+              </a:ext>
+            </a:extLst>
+          </a:blip>
+          <a:stretch>
+            <a:fillRect/>
+          </a:stretch>
+        </p:blipFill>
+        <p:spPr>
+          <a:xfrm>
+            <a:off x="4813440" y="3487892"/>
+            <a:ext cx="440000" cy="440000"/>
+          </a:xfrm>
+          <a:prstGeom prst="rect">
+            <a:avLst/>
+          </a:prstGeom>
+        </p:spPr>
+      </p:pic>
+      <p:pic>
+        <p:nvPicPr>
+          <p:cNvPr id="72" name="Picture 71" descr="image.png"/>
+          <p:cNvPicPr>
+            <a:picLocks noChangeAspect="1"/>
+          </p:cNvPicPr>
+          <p:nvPr/>
+        </p:nvPicPr>
+        <p:blipFill>
+          <a:blip r:embed="rId5">
+            <a:extLst>
+              <a:ext uri="{96DAC541-7B7A-43D3-8B79-37D633B846F1}">
+                <ns2:svgBlip xmlns:ns2="http://schemas.microsoft.com/office/drawing/2016/SVG/main" r:embed="rId12"/>
               </a:ext>
             </a:extLst>
           </a:blip>
@@ -42679,8 +43702,8 @@
         </p:nvSpPr>
         <p:spPr>
           <a:xfrm>
-            <a:off x="1844672" y="1554480"/>
-            <a:ext cx="2114680" cy="777240"/>
+            <a:off x="2364672" y="1554480"/>
+            <a:ext cx="1594680" cy="777240"/>
           </a:xfrm>
           <a:prstGeom prst="rect">
             <a:avLst/>
@@ -42998,8 +44021,8 @@
         </p:nvSpPr>
         <p:spPr>
           <a:xfrm>
-            <a:off x="5712584" y="1554480"/>
-            <a:ext cx="2114680" cy="777240"/>
+            <a:off x="6232584" y="1554480"/>
+            <a:ext cx="1594680" cy="777240"/>
           </a:xfrm>
           <a:prstGeom prst="rect">
             <a:avLst/>
@@ -43317,8 +44340,8 @@
         </p:nvSpPr>
         <p:spPr>
           <a:xfrm>
-            <a:off x="9580496" y="1554480"/>
-            <a:ext cx="2114680" cy="777240"/>
+            <a:off x="10100496" y="1554480"/>
+            <a:ext cx="1594680" cy="777240"/>
           </a:xfrm>
           <a:prstGeom prst="rect">
             <a:avLst/>
@@ -43555,7 +44578,7 @@
                 </a:solidFill>
                 <a:latin typeface="Calibri"/>
               </a:rPr>
-              <a:t>5</a:t>
+              <a:t>6</a:t>
             </a:r>
           </a:p>
         </p:txBody>
@@ -43723,6 +44746,96 @@
             <a:extLst>
               <a:ext uri="{96DAC541-7B7A-43D3-8B79-37D633B846F1}">
                 <ns2:svgBlip xmlns:ns2="http://schemas.microsoft.com/office/drawing/2016/SVG/main" r:embed="rId8"/>
+              </a:ext>
+            </a:extLst>
+          </a:blip>
+          <a:stretch>
+            <a:fillRect/>
+          </a:stretch>
+        </p:blipFill>
+        <p:spPr>
+          <a:xfrm>
+            <a:off x="8434464" y="1728100"/>
+            <a:ext cx="430000" cy="430000"/>
+          </a:xfrm>
+          <a:prstGeom prst="rect">
+            <a:avLst/>
+          </a:prstGeom>
+        </p:spPr>
+      </p:pic>
+      <p:pic>
+        <p:nvPicPr>
+          <p:cNvPr id="100" name="Picture 99" descr="image.png"/>
+          <p:cNvPicPr>
+            <a:picLocks noChangeAspect="1"/>
+          </p:cNvPicPr>
+          <p:nvPr/>
+        </p:nvPicPr>
+        <p:blipFill>
+          <a:blip r:embed="rId2">
+            <a:extLst>
+              <a:ext uri="{96DAC541-7B7A-43D3-8B79-37D633B846F1}">
+                <ns0:svgBlip xmlns:ns0="http://schemas.microsoft.com/office/drawing/2016/SVG/main" r:embed="rId13"/>
+              </a:ext>
+            </a:extLst>
+          </a:blip>
+          <a:stretch>
+            <a:fillRect/>
+          </a:stretch>
+        </p:blipFill>
+        <p:spPr>
+          <a:xfrm>
+            <a:off x="698640" y="1728100"/>
+            <a:ext cx="430000" cy="430000"/>
+          </a:xfrm>
+          <a:prstGeom prst="rect">
+            <a:avLst/>
+          </a:prstGeom>
+        </p:spPr>
+      </p:pic>
+      <p:pic>
+        <p:nvPicPr>
+          <p:cNvPr id="101" name="Picture 100" descr="image.png"/>
+          <p:cNvPicPr>
+            <a:picLocks noChangeAspect="1"/>
+          </p:cNvPicPr>
+          <p:nvPr/>
+        </p:nvPicPr>
+        <p:blipFill>
+          <a:blip r:embed="rId3">
+            <a:extLst>
+              <a:ext uri="{96DAC541-7B7A-43D3-8B79-37D633B846F1}">
+                <ns1:svgBlip xmlns:ns1="http://schemas.microsoft.com/office/drawing/2016/SVG/main" r:embed="rId12"/>
+              </a:ext>
+            </a:extLst>
+          </a:blip>
+          <a:stretch>
+            <a:fillRect/>
+          </a:stretch>
+        </p:blipFill>
+        <p:spPr>
+          <a:xfrm>
+            <a:off x="4566552" y="1728100"/>
+            <a:ext cx="430000" cy="430000"/>
+          </a:xfrm>
+          <a:prstGeom prst="rect">
+            <a:avLst/>
+          </a:prstGeom>
+        </p:spPr>
+      </p:pic>
+      <p:pic>
+        <p:nvPicPr>
+          <p:cNvPr id="102" name="Picture 101" descr="image.png"/>
+          <p:cNvPicPr>
+            <a:picLocks noChangeAspect="1"/>
+          </p:cNvPicPr>
+          <p:nvPr/>
+        </p:nvPicPr>
+        <p:blipFill>
+          <a:blip r:embed="rId4">
+            <a:extLst>
+              <a:ext uri="{96DAC541-7B7A-43D3-8B79-37D633B846F1}">
+                <ns2:svgBlip xmlns:ns2="http://schemas.microsoft.com/office/drawing/2016/SVG/main" r:embed="rId11"/>
               </a:ext>
             </a:extLst>
           </a:blip>
@@ -46808,7 +47921,7 @@
                 </a:solidFill>
                 <a:latin typeface="Calibri"/>
               </a:rPr>
-              <a:t>7</a:t>
+              <a:t>8</a:t>
             </a:r>
           </a:p>
         </p:txBody>
@@ -47156,6 +48269,246 @@
             <a:extLst>
               <a:ext uri="{96DAC541-7B7A-43D3-8B79-37D633B846F1}">
                 <ns7:svgBlip xmlns:ns7="http://schemas.microsoft.com/office/drawing/2016/SVG/main" r:embed="rId18"/>
+              </a:ext>
+            </a:extLst>
+          </a:blip>
+          <a:stretch>
+            <a:fillRect/>
+          </a:stretch>
+        </p:blipFill>
+        <p:spPr>
+          <a:xfrm>
+            <a:off x="3931920" y="5665848"/>
+            <a:ext cx="1234440" cy="145890"/>
+          </a:xfrm>
+          <a:prstGeom prst="rect">
+            <a:avLst/>
+          </a:prstGeom>
+        </p:spPr>
+      </p:pic>
+      <p:pic>
+        <p:nvPicPr>
+          <p:cNvPr id="96" name="Picture 95" descr="image.png"/>
+          <p:cNvPicPr>
+            <a:picLocks noChangeAspect="1"/>
+          </p:cNvPicPr>
+          <p:nvPr/>
+        </p:nvPicPr>
+        <p:blipFill>
+          <a:blip r:embed="rId2">
+            <a:extLst>
+              <a:ext uri="{96DAC541-7B7A-43D3-8B79-37D633B846F1}">
+                <ns0:svgBlip xmlns:ns0="http://schemas.microsoft.com/office/drawing/2016/SVG/main" r:embed="rId28"/>
+              </a:ext>
+            </a:extLst>
+          </a:blip>
+          <a:stretch>
+            <a:fillRect/>
+          </a:stretch>
+        </p:blipFill>
+        <p:spPr>
+          <a:xfrm>
+            <a:off x="918058" y="1814170"/>
+            <a:ext cx="358444" cy="358444"/>
+          </a:xfrm>
+          <a:prstGeom prst="rect">
+            <a:avLst/>
+          </a:prstGeom>
+        </p:spPr>
+      </p:pic>
+      <p:pic>
+        <p:nvPicPr>
+          <p:cNvPr id="97" name="Picture 96" descr="image.png"/>
+          <p:cNvPicPr>
+            <a:picLocks noChangeAspect="1"/>
+          </p:cNvPicPr>
+          <p:nvPr/>
+        </p:nvPicPr>
+        <p:blipFill>
+          <a:blip r:embed="rId3">
+            <a:extLst>
+              <a:ext uri="{96DAC541-7B7A-43D3-8B79-37D633B846F1}">
+                <ns1:svgBlip xmlns:ns1="http://schemas.microsoft.com/office/drawing/2016/SVG/main" r:embed="rId29"/>
+              </a:ext>
+            </a:extLst>
+          </a:blip>
+          <a:stretch>
+            <a:fillRect/>
+          </a:stretch>
+        </p:blipFill>
+        <p:spPr>
+          <a:xfrm>
+            <a:off x="918058" y="2948026"/>
+            <a:ext cx="358444" cy="358444"/>
+          </a:xfrm>
+          <a:prstGeom prst="rect">
+            <a:avLst/>
+          </a:prstGeom>
+        </p:spPr>
+      </p:pic>
+      <p:pic>
+        <p:nvPicPr>
+          <p:cNvPr id="98" name="Picture 97" descr="image.png"/>
+          <p:cNvPicPr>
+            <a:picLocks noChangeAspect="1"/>
+          </p:cNvPicPr>
+          <p:nvPr/>
+        </p:nvPicPr>
+        <p:blipFill>
+          <a:blip r:embed="rId4">
+            <a:extLst>
+              <a:ext uri="{96DAC541-7B7A-43D3-8B79-37D633B846F1}">
+                <ns2:svgBlip xmlns:ns2="http://schemas.microsoft.com/office/drawing/2016/SVG/main" r:embed="rId27"/>
+              </a:ext>
+            </a:extLst>
+          </a:blip>
+          <a:stretch>
+            <a:fillRect/>
+          </a:stretch>
+        </p:blipFill>
+        <p:spPr>
+          <a:xfrm>
+            <a:off x="918058" y="4081882"/>
+            <a:ext cx="358444" cy="358444"/>
+          </a:xfrm>
+          <a:prstGeom prst="rect">
+            <a:avLst/>
+          </a:prstGeom>
+        </p:spPr>
+      </p:pic>
+      <p:pic>
+        <p:nvPicPr>
+          <p:cNvPr id="99" name="Picture 98" descr="image.png"/>
+          <p:cNvPicPr>
+            <a:picLocks noChangeAspect="1"/>
+          </p:cNvPicPr>
+          <p:nvPr/>
+        </p:nvPicPr>
+        <p:blipFill>
+          <a:blip r:embed="rId5">
+            <a:extLst>
+              <a:ext uri="{96DAC541-7B7A-43D3-8B79-37D633B846F1}">
+                <ns3:svgBlip xmlns:ns3="http://schemas.microsoft.com/office/drawing/2016/SVG/main" r:embed="rId22"/>
+              </a:ext>
+            </a:extLst>
+          </a:blip>
+          <a:stretch>
+            <a:fillRect/>
+          </a:stretch>
+        </p:blipFill>
+        <p:spPr>
+          <a:xfrm>
+            <a:off x="918058" y="5215738"/>
+            <a:ext cx="358444" cy="358444"/>
+          </a:xfrm>
+          <a:prstGeom prst="rect">
+            <a:avLst/>
+          </a:prstGeom>
+        </p:spPr>
+      </p:pic>
+      <p:pic>
+        <p:nvPicPr>
+          <p:cNvPr id="100" name="Picture 99" descr="image.png"/>
+          <p:cNvPicPr>
+            <a:picLocks noChangeAspect="1"/>
+          </p:cNvPicPr>
+          <p:nvPr/>
+        </p:nvPicPr>
+        <p:blipFill>
+          <a:blip r:embed="rId10">
+            <a:extLst>
+              <a:ext uri="{96DAC541-7B7A-43D3-8B79-37D633B846F1}">
+                <ns4:svgBlip xmlns:ns4="http://schemas.microsoft.com/office/drawing/2016/SVG/main" r:embed="rId25"/>
+              </a:ext>
+            </a:extLst>
+          </a:blip>
+          <a:stretch>
+            <a:fillRect/>
+          </a:stretch>
+        </p:blipFill>
+        <p:spPr>
+          <a:xfrm>
+            <a:off x="3931920" y="2264280"/>
+            <a:ext cx="1234440" cy="145890"/>
+          </a:xfrm>
+          <a:prstGeom prst="rect">
+            <a:avLst/>
+          </a:prstGeom>
+        </p:spPr>
+      </p:pic>
+      <p:pic>
+        <p:nvPicPr>
+          <p:cNvPr id="101" name="Picture 100" descr="image.png"/>
+          <p:cNvPicPr>
+            <a:picLocks noChangeAspect="1"/>
+          </p:cNvPicPr>
+          <p:nvPr/>
+        </p:nvPicPr>
+        <p:blipFill>
+          <a:blip r:embed="rId11">
+            <a:extLst>
+              <a:ext uri="{96DAC541-7B7A-43D3-8B79-37D633B846F1}">
+                <ns5:svgBlip xmlns:ns5="http://schemas.microsoft.com/office/drawing/2016/SVG/main" r:embed="rId24"/>
+              </a:ext>
+            </a:extLst>
+          </a:blip>
+          <a:stretch>
+            <a:fillRect/>
+          </a:stretch>
+        </p:blipFill>
+        <p:spPr>
+          <a:xfrm>
+            <a:off x="3931920" y="3398136"/>
+            <a:ext cx="1234440" cy="145890"/>
+          </a:xfrm>
+          <a:prstGeom prst="rect">
+            <a:avLst/>
+          </a:prstGeom>
+        </p:spPr>
+      </p:pic>
+      <p:pic>
+        <p:nvPicPr>
+          <p:cNvPr id="102" name="Picture 101" descr="image.png"/>
+          <p:cNvPicPr>
+            <a:picLocks noChangeAspect="1"/>
+          </p:cNvPicPr>
+          <p:nvPr/>
+        </p:nvPicPr>
+        <p:blipFill>
+          <a:blip r:embed="rId12">
+            <a:extLst>
+              <a:ext uri="{96DAC541-7B7A-43D3-8B79-37D633B846F1}">
+                <ns6:svgBlip xmlns:ns6="http://schemas.microsoft.com/office/drawing/2016/SVG/main" r:embed="rId23"/>
+              </a:ext>
+            </a:extLst>
+          </a:blip>
+          <a:stretch>
+            <a:fillRect/>
+          </a:stretch>
+        </p:blipFill>
+        <p:spPr>
+          <a:xfrm>
+            <a:off x="3931920" y="4531992"/>
+            <a:ext cx="1234440" cy="145890"/>
+          </a:xfrm>
+          <a:prstGeom prst="rect">
+            <a:avLst/>
+          </a:prstGeom>
+        </p:spPr>
+      </p:pic>
+      <p:pic>
+        <p:nvPicPr>
+          <p:cNvPr id="103" name="Picture 102" descr="image.png"/>
+          <p:cNvPicPr>
+            <a:picLocks noChangeAspect="1"/>
+          </p:cNvPicPr>
+          <p:nvPr/>
+        </p:nvPicPr>
+        <p:blipFill>
+          <a:blip r:embed="rId13">
+            <a:extLst>
+              <a:ext uri="{96DAC541-7B7A-43D3-8B79-37D633B846F1}">
+                <ns7:svgBlip xmlns:ns7="http://schemas.microsoft.com/office/drawing/2016/SVG/main" r:embed="rId26"/>
               </a:ext>
             </a:extLst>
           </a:blip>
@@ -49192,7 +50545,7 @@
                 </a:solidFill>
                 <a:latin typeface="Calibri"/>
               </a:rPr>
-              <a:t>8</a:t>
+              <a:t>10</a:t>
             </a:r>
           </a:p>
         </p:txBody>
@@ -49270,6 +50623,96 @@
             <a:extLst>
               <a:ext uri="{96DAC541-7B7A-43D3-8B79-37D633B846F1}">
                 <ns2:svgBlip xmlns:ns2="http://schemas.microsoft.com/office/drawing/2016/SVG/main" r:embed="rId5"/>
+              </a:ext>
+            </a:extLst>
+          </a:blip>
+          <a:stretch>
+            <a:fillRect/>
+          </a:stretch>
+        </p:blipFill>
+        <p:spPr>
+          <a:xfrm>
+            <a:off x="3931920" y="4427990"/>
+            <a:ext cx="2100000" cy="470900"/>
+          </a:xfrm>
+          <a:prstGeom prst="rect">
+            <a:avLst/>
+          </a:prstGeom>
+        </p:spPr>
+      </p:pic>
+      <p:pic>
+        <p:nvPicPr>
+          <p:cNvPr id="67" name="Picture 66" descr="chart8_gay.png"/>
+          <p:cNvPicPr>
+            <a:picLocks noChangeAspect="1"/>
+          </p:cNvPicPr>
+          <p:nvPr/>
+        </p:nvPicPr>
+        <p:blipFill>
+          <a:blip r:embed="rId8">
+            <a:extLst>
+              <a:ext uri="{96DAC541-7B7A-43D3-8B79-37D633B846F1}">
+                <ns0:svgBlip xmlns:ns0="http://schemas.microsoft.com/office/drawing/2016/SVG/main" r:embed="rId12"/>
+              </a:ext>
+            </a:extLst>
+          </a:blip>
+          <a:stretch>
+            <a:fillRect/>
+          </a:stretch>
+        </p:blipFill>
+        <p:spPr>
+          <a:xfrm>
+            <a:off x="3931920" y="2416310"/>
+            <a:ext cx="2100000" cy="470900"/>
+          </a:xfrm>
+          <a:prstGeom prst="rect">
+            <a:avLst/>
+          </a:prstGeom>
+        </p:spPr>
+      </p:pic>
+      <p:pic>
+        <p:nvPicPr>
+          <p:cNvPr id="68" name="Picture 67" descr="chart8_trung.png"/>
+          <p:cNvPicPr>
+            <a:picLocks noChangeAspect="1"/>
+          </p:cNvPicPr>
+          <p:nvPr/>
+        </p:nvPicPr>
+        <p:blipFill>
+          <a:blip r:embed="rId9">
+            <a:extLst>
+              <a:ext uri="{96DAC541-7B7A-43D3-8B79-37D633B846F1}">
+                <ns1:svgBlip xmlns:ns1="http://schemas.microsoft.com/office/drawing/2016/SVG/main" r:embed="rId13"/>
+              </a:ext>
+            </a:extLst>
+          </a:blip>
+          <a:stretch>
+            <a:fillRect/>
+          </a:stretch>
+        </p:blipFill>
+        <p:spPr>
+          <a:xfrm>
+            <a:off x="3931920" y="3422150"/>
+            <a:ext cx="2100000" cy="470900"/>
+          </a:xfrm>
+          <a:prstGeom prst="rect">
+            <a:avLst/>
+          </a:prstGeom>
+        </p:spPr>
+      </p:pic>
+      <p:pic>
+        <p:nvPicPr>
+          <p:cNvPr id="69" name="Picture 68" descr="chart8_beo.png"/>
+          <p:cNvPicPr>
+            <a:picLocks noChangeAspect="1"/>
+          </p:cNvPicPr>
+          <p:nvPr/>
+        </p:nvPicPr>
+        <p:blipFill>
+          <a:blip r:embed="rId10">
+            <a:extLst>
+              <a:ext uri="{96DAC541-7B7A-43D3-8B79-37D633B846F1}">
+                <ns2:svgBlip xmlns:ns2="http://schemas.microsoft.com/office/drawing/2016/SVG/main" r:embed="rId11"/>
               </a:ext>
             </a:extLst>
           </a:blip>
@@ -51135,7 +52578,7 @@
                 </a:solidFill>
                 <a:latin typeface="Calibri"/>
               </a:rPr>
-              <a:t>9</a:t>
+              <a:t>11</a:t>
             </a:r>
           </a:p>
         </p:txBody>

--- a/SuHeo/Báo cáo thực tập - Sơn Hải Vân.pptx
+++ b/SuHeo/Báo cáo thực tập - Sơn Hải Vân.pptx
@@ -3282,7 +3282,7 @@
           <a:lstStyle/>
           <a:p>
             <a:r>
-              <a:rPr sz="2400" b="1" i="0">
+              <a:rPr sz="2000" b="1" i="0">
                 <a:solidFill>
                   <a:srgbClr val="CFE2D8"/>
                 </a:solidFill>
@@ -3391,7 +3391,7 @@
           <a:lstStyle/>
           <a:p>
             <a:r>
-              <a:rPr sz="2400" b="0" i="0">
+              <a:rPr sz="2000" b="0" i="0">
                 <a:solidFill>
                   <a:srgbClr val="CFE2D8"/>
                 </a:solidFill>
@@ -3401,7 +3401,7 @@
           </a:p>
           <a:p>
             <a:r>
-              <a:rPr sz="2400" b="0" i="0">
+              <a:rPr sz="2000" b="0" i="0">
                 <a:solidFill>
                   <a:srgbClr val="CFE2D8"/>
                 </a:solidFill>
@@ -3548,7 +3548,7 @@
           <a:lstStyle/>
           <a:p>
             <a:r>
-              <a:rPr sz="2400" b="1" i="0">
+              <a:rPr sz="2000" b="1" i="0">
                 <a:solidFill>
                   <a:srgbClr val="C88A2E"/>
                 </a:solidFill>
@@ -3799,7 +3799,7 @@
           <a:lstStyle/>
           <a:p>
             <a:r>
-              <a:rPr sz="2600" b="1" i="0">
+              <a:rPr sz="2158" b="1" i="0">
                 <a:solidFill>
                   <a:srgbClr val="1F4E3D"/>
                 </a:solidFill>
@@ -3862,7 +3862,7 @@
           <a:lstStyle/>
           <a:p>
             <a:r>
-              <a:rPr sz="2400" b="0" i="0">
+              <a:rPr sz="2000" b="0" i="0">
                 <a:solidFill>
                   <a:srgbClr val="34404A"/>
                 </a:solidFill>
@@ -3939,7 +3939,7 @@
           <a:lstStyle/>
           <a:p>
             <a:r>
-              <a:rPr sz="2600" b="1" i="0">
+              <a:rPr sz="2158" b="1" i="0">
                 <a:solidFill>
                   <a:srgbClr val="1F4E3D"/>
                 </a:solidFill>
@@ -4002,7 +4002,7 @@
           <a:lstStyle/>
           <a:p>
             <a:r>
-              <a:rPr sz="2400" b="0" i="0">
+              <a:rPr sz="2000" b="0" i="0">
                 <a:solidFill>
                   <a:srgbClr val="34404A"/>
                 </a:solidFill>
@@ -4079,7 +4079,7 @@
           <a:lstStyle/>
           <a:p>
             <a:r>
-              <a:rPr sz="2600" b="1" i="0">
+              <a:rPr sz="2158" b="1" i="0">
                 <a:solidFill>
                   <a:srgbClr val="1F4E3D"/>
                 </a:solidFill>
@@ -4142,7 +4142,7 @@
           <a:lstStyle/>
           <a:p>
             <a:r>
-              <a:rPr sz="2400" b="0" i="0">
+              <a:rPr sz="2000" b="0" i="0">
                 <a:solidFill>
                   <a:srgbClr val="34404A"/>
                 </a:solidFill>
@@ -4289,7 +4289,7 @@
           <a:lstStyle/>
           <a:p>
             <a:r>
-              <a:rPr sz="2400" b="1" i="0">
+              <a:rPr sz="2000" b="1" i="0">
                 <a:solidFill>
                   <a:srgbClr val="C88A2E"/>
                 </a:solidFill>
@@ -4540,7 +4540,7 @@
           <a:lstStyle/>
           <a:p>
             <a:r>
-              <a:rPr sz="2500" b="1" i="0">
+              <a:rPr sz="2075" b="1" i="0">
                 <a:solidFill>
                   <a:srgbClr val="FFFFFF"/>
                 </a:solidFill>
@@ -4550,7 +4550,7 @@
           </a:p>
           <a:p>
             <a:r>
-              <a:rPr sz="2400" b="0" i="0">
+              <a:rPr sz="2000" b="0" i="0">
                 <a:solidFill>
                   <a:srgbClr val="EAF3EE"/>
                 </a:solidFill>
@@ -4627,7 +4627,7 @@
           <a:lstStyle/>
           <a:p>
             <a:r>
-              <a:rPr sz="2500" b="1" i="0">
+              <a:rPr sz="2075" b="1" i="0">
                 <a:solidFill>
                   <a:srgbClr val="FFFFFF"/>
                 </a:solidFill>
@@ -4637,7 +4637,7 @@
           </a:p>
           <a:p>
             <a:r>
-              <a:rPr sz="2400" b="0" i="0">
+              <a:rPr sz="2000" b="0" i="0">
                 <a:solidFill>
                   <a:srgbClr val="EAF3EE"/>
                 </a:solidFill>
@@ -4714,7 +4714,7 @@
           <a:lstStyle/>
           <a:p>
             <a:r>
-              <a:rPr sz="2500" b="1" i="0">
+              <a:rPr sz="2075" b="1" i="0">
                 <a:solidFill>
                   <a:srgbClr val="FFFFFF"/>
                 </a:solidFill>
@@ -4724,7 +4724,7 @@
           </a:p>
           <a:p>
             <a:r>
-              <a:rPr sz="2400" b="0" i="0">
+              <a:rPr sz="2000" b="0" i="0">
                 <a:solidFill>
                   <a:srgbClr val="EAF3EE"/>
                 </a:solidFill>
@@ -4801,7 +4801,7 @@
           <a:lstStyle/>
           <a:p>
             <a:r>
-              <a:rPr sz="2500" b="1" i="0">
+              <a:rPr sz="2075" b="1" i="0">
                 <a:solidFill>
                   <a:srgbClr val="FFFFFF"/>
                 </a:solidFill>
@@ -4811,7 +4811,7 @@
           </a:p>
           <a:p>
             <a:r>
-              <a:rPr sz="2400" b="0" i="0">
+              <a:rPr sz="2000" b="0" i="0">
                 <a:solidFill>
                   <a:srgbClr val="EAF3EE"/>
                 </a:solidFill>
@@ -5051,7 +5051,7 @@
           <a:lstStyle/>
           <a:p>
             <a:r>
-              <a:rPr sz="2400" b="1" i="0">
+              <a:rPr sz="2000" b="1" i="0">
                 <a:solidFill>
                   <a:srgbClr val="C88A2E"/>
                 </a:solidFill>
@@ -5231,7 +5231,7 @@
           <a:lstStyle/>
           <a:p>
             <a:r>
-              <a:rPr sz="2400" b="1" i="0">
+              <a:rPr sz="2000" b="1" i="0">
                 <a:solidFill>
                   <a:srgbClr val="C88A2E"/>
                 </a:solidFill>
@@ -5556,7 +5556,7 @@
           <a:lstStyle/>
           <a:p>
             <a:r>
-              <a:rPr sz="2500" b="1" i="0">
+              <a:rPr sz="2075" b="1" i="0">
                 <a:solidFill>
                   <a:srgbClr val="1F4E3D"/>
                 </a:solidFill>
@@ -5566,7 +5566,7 @@
           </a:p>
           <a:p>
             <a:r>
-              <a:rPr sz="2400" b="0" i="0">
+              <a:rPr sz="2000" b="0" i="0">
                 <a:solidFill>
                   <a:srgbClr val="34404A"/>
                 </a:solidFill>
@@ -5717,7 +5717,7 @@
           <a:lstStyle/>
           <a:p>
             <a:r>
-              <a:rPr sz="2500" b="1" i="0">
+              <a:rPr sz="2075" b="1" i="0">
                 <a:solidFill>
                   <a:srgbClr val="1F4E3D"/>
                 </a:solidFill>
@@ -5727,7 +5727,7 @@
           </a:p>
           <a:p>
             <a:r>
-              <a:rPr sz="2400" b="0" i="0">
+              <a:rPr sz="2000" b="0" i="0">
                 <a:solidFill>
                   <a:srgbClr val="34404A"/>
                 </a:solidFill>
@@ -5878,7 +5878,7 @@
           <a:lstStyle/>
           <a:p>
             <a:r>
-              <a:rPr sz="2500" b="1" i="0">
+              <a:rPr sz="2075" b="1" i="0">
                 <a:solidFill>
                   <a:srgbClr val="1F4E3D"/>
                 </a:solidFill>
@@ -5888,7 +5888,7 @@
           </a:p>
           <a:p>
             <a:r>
-              <a:rPr sz="2400" b="0" i="0">
+              <a:rPr sz="2000" b="0" i="0">
                 <a:solidFill>
                   <a:srgbClr val="34404A"/>
                 </a:solidFill>
@@ -6039,7 +6039,7 @@
           <a:lstStyle/>
           <a:p>
             <a:r>
-              <a:rPr sz="2500" b="1" i="0">
+              <a:rPr sz="2075" b="1" i="0">
                 <a:solidFill>
                   <a:srgbClr val="1F4E3D"/>
                 </a:solidFill>
@@ -6049,7 +6049,7 @@
           </a:p>
           <a:p>
             <a:r>
-              <a:rPr sz="2400" b="0" i="0">
+              <a:rPr sz="2000" b="0" i="0">
                 <a:solidFill>
                   <a:srgbClr val="34404A"/>
                 </a:solidFill>
@@ -6200,7 +6200,7 @@
           <a:lstStyle/>
           <a:p>
             <a:r>
-              <a:rPr sz="2500" b="1" i="0">
+              <a:rPr sz="2075" b="1" i="0">
                 <a:solidFill>
                   <a:srgbClr val="1F4E3D"/>
                 </a:solidFill>
@@ -6210,7 +6210,7 @@
           </a:p>
           <a:p>
             <a:r>
-              <a:rPr sz="2400" b="0" i="0">
+              <a:rPr sz="2000" b="0" i="0">
                 <a:solidFill>
                   <a:srgbClr val="34404A"/>
                 </a:solidFill>
@@ -6361,7 +6361,7 @@
           <a:lstStyle/>
           <a:p>
             <a:r>
-              <a:rPr sz="2500" b="1" i="0">
+              <a:rPr sz="2075" b="1" i="0">
                 <a:solidFill>
                   <a:srgbClr val="1F4E3D"/>
                 </a:solidFill>
@@ -6371,7 +6371,7 @@
           </a:p>
           <a:p>
             <a:r>
-              <a:rPr sz="2400" b="0" i="0">
+              <a:rPr sz="2000" b="0" i="0">
                 <a:solidFill>
                   <a:srgbClr val="34404A"/>
                 </a:solidFill>
@@ -6518,7 +6518,7 @@
           <a:lstStyle/>
           <a:p>
             <a:r>
-              <a:rPr sz="2400" b="1" i="0">
+              <a:rPr sz="2000" b="1" i="0">
                 <a:solidFill>
                   <a:srgbClr val="C88A2E"/>
                 </a:solidFill>
@@ -6869,7 +6869,7 @@
           <a:lstStyle/>
           <a:p>
             <a:r>
-              <a:rPr sz="2400" b="1" i="0">
+              <a:rPr sz="2000" b="1" i="0">
                 <a:solidFill>
                   <a:srgbClr val="C88A2E"/>
                 </a:solidFill>
@@ -7238,7 +7238,7 @@
           <a:lstStyle/>
           <a:p>
             <a:r>
-              <a:rPr sz="2500" b="1" i="0">
+              <a:rPr sz="2075" b="1" i="0">
                 <a:solidFill>
                   <a:srgbClr val="1F4E3D"/>
                 </a:solidFill>
@@ -7248,7 +7248,7 @@
           </a:p>
           <a:p>
             <a:r>
-              <a:rPr sz="2400" b="0" i="0">
+              <a:rPr sz="2000" b="0" i="0">
                 <a:solidFill>
                   <a:srgbClr val="34404A"/>
                 </a:solidFill>
@@ -7258,7 +7258,7 @@
           </a:p>
           <a:p>
             <a:r>
-              <a:rPr sz="2400" b="0" i="0">
+              <a:rPr sz="2000" b="0" i="0">
                 <a:solidFill>
                   <a:srgbClr val="34404A"/>
                 </a:solidFill>
@@ -7453,7 +7453,7 @@
           <a:lstStyle/>
           <a:p>
             <a:r>
-              <a:rPr sz="2500" b="1" i="0">
+              <a:rPr sz="2075" b="1" i="0">
                 <a:solidFill>
                   <a:srgbClr val="1F4E3D"/>
                 </a:solidFill>
@@ -7463,7 +7463,7 @@
           </a:p>
           <a:p>
             <a:r>
-              <a:rPr sz="2400" b="0" i="0">
+              <a:rPr sz="2000" b="0" i="0">
                 <a:solidFill>
                   <a:srgbClr val="34404A"/>
                 </a:solidFill>
@@ -7473,7 +7473,7 @@
           </a:p>
           <a:p>
             <a:r>
-              <a:rPr sz="2400" b="0" i="0">
+              <a:rPr sz="2000" b="0" i="0">
                 <a:solidFill>
                   <a:srgbClr val="34404A"/>
                 </a:solidFill>
@@ -7668,7 +7668,7 @@
           <a:lstStyle/>
           <a:p>
             <a:r>
-              <a:rPr sz="2500" b="1" i="0">
+              <a:rPr sz="2075" b="1" i="0">
                 <a:solidFill>
                   <a:srgbClr val="1F4E3D"/>
                 </a:solidFill>
@@ -7678,7 +7678,7 @@
           </a:p>
           <a:p>
             <a:r>
-              <a:rPr sz="2400" b="0" i="0">
+              <a:rPr sz="2000" b="0" i="0">
                 <a:solidFill>
                   <a:srgbClr val="34404A"/>
                 </a:solidFill>
@@ -7688,7 +7688,7 @@
           </a:p>
           <a:p>
             <a:r>
-              <a:rPr sz="2400" b="0" i="0">
+              <a:rPr sz="2000" b="0" i="0">
                 <a:solidFill>
                   <a:srgbClr val="34404A"/>
                 </a:solidFill>
@@ -7835,7 +7835,7 @@
           <a:lstStyle/>
           <a:p>
             <a:r>
-              <a:rPr sz="2400" b="1" i="0">
+              <a:rPr sz="2000" b="1" i="0">
                 <a:solidFill>
                   <a:srgbClr val="C88A2E"/>
                 </a:solidFill>
@@ -8204,7 +8204,7 @@
           <a:lstStyle/>
           <a:p>
             <a:r>
-              <a:rPr sz="2500" b="1" i="0">
+              <a:rPr sz="2075" b="1" i="0">
                 <a:solidFill>
                   <a:srgbClr val="1F4E3D"/>
                 </a:solidFill>
@@ -8214,7 +8214,7 @@
           </a:p>
           <a:p>
             <a:r>
-              <a:rPr sz="2400" b="0" i="0">
+              <a:rPr sz="2000" b="0" i="0">
                 <a:solidFill>
                   <a:srgbClr val="34404A"/>
                 </a:solidFill>
@@ -8224,7 +8224,7 @@
           </a:p>
           <a:p>
             <a:r>
-              <a:rPr sz="2400" b="0" i="0">
+              <a:rPr sz="2000" b="0" i="0">
                 <a:solidFill>
                   <a:srgbClr val="34404A"/>
                 </a:solidFill>
@@ -8419,7 +8419,7 @@
           <a:lstStyle/>
           <a:p>
             <a:r>
-              <a:rPr sz="2500" b="1" i="0">
+              <a:rPr sz="2075" b="1" i="0">
                 <a:solidFill>
                   <a:srgbClr val="1F4E3D"/>
                 </a:solidFill>
@@ -8429,7 +8429,7 @@
           </a:p>
           <a:p>
             <a:r>
-              <a:rPr sz="2400" b="0" i="0">
+              <a:rPr sz="2000" b="0" i="0">
                 <a:solidFill>
                   <a:srgbClr val="34404A"/>
                 </a:solidFill>
@@ -8439,7 +8439,7 @@
           </a:p>
           <a:p>
             <a:r>
-              <a:rPr sz="2400" b="0" i="0">
+              <a:rPr sz="2000" b="0" i="0">
                 <a:solidFill>
                   <a:srgbClr val="34404A"/>
                 </a:solidFill>
@@ -8634,7 +8634,7 @@
           <a:lstStyle/>
           <a:p>
             <a:r>
-              <a:rPr sz="2500" b="1" i="0">
+              <a:rPr sz="2075" b="1" i="0">
                 <a:solidFill>
                   <a:srgbClr val="1F4E3D"/>
                 </a:solidFill>
@@ -8644,7 +8644,7 @@
           </a:p>
           <a:p>
             <a:r>
-              <a:rPr sz="2400" b="0" i="0">
+              <a:rPr sz="2000" b="0" i="0">
                 <a:solidFill>
                   <a:srgbClr val="34404A"/>
                 </a:solidFill>
@@ -8654,7 +8654,7 @@
           </a:p>
           <a:p>
             <a:r>
-              <a:rPr sz="2400" b="0" i="0">
+              <a:rPr sz="2000" b="0" i="0">
                 <a:solidFill>
                   <a:srgbClr val="34404A"/>
                 </a:solidFill>
@@ -8801,7 +8801,7 @@
           <a:lstStyle/>
           <a:p>
             <a:r>
-              <a:rPr sz="2400" b="1" i="0">
+              <a:rPr sz="2000" b="1" i="0">
                 <a:solidFill>
                   <a:srgbClr val="C88A2E"/>
                 </a:solidFill>
@@ -9027,7 +9027,7 @@
           <a:p>
             <a:pPr algn="ctr"/>
             <a:r>
-              <a:rPr sz="2400" b="1" i="0">
+              <a:rPr sz="2000" b="1" i="0">
                 <a:solidFill>
                   <a:srgbClr val="FFFFFF"/>
                 </a:solidFill>
@@ -9172,7 +9172,7 @@
           <a:lstStyle/>
           <a:p>
             <a:r>
-              <a:rPr sz="2400" b="1" i="0">
+              <a:rPr sz="2000" b="1" i="0">
                 <a:solidFill>
                   <a:srgbClr val="1F4E3D"/>
                 </a:solidFill>
@@ -9182,7 +9182,7 @@
           </a:p>
           <a:p>
             <a:r>
-              <a:rPr sz="2400" b="0" i="0">
+              <a:rPr sz="2000" b="0" i="0">
                 <a:solidFill>
                   <a:srgbClr val="34404A"/>
                 </a:solidFill>
@@ -9303,7 +9303,7 @@
           <a:lstStyle/>
           <a:p>
             <a:r>
-              <a:rPr sz="2400" b="1" i="0">
+              <a:rPr sz="2000" b="1" i="0">
                 <a:solidFill>
                   <a:srgbClr val="1F4E3D"/>
                 </a:solidFill>
@@ -9313,7 +9313,7 @@
           </a:p>
           <a:p>
             <a:r>
-              <a:rPr sz="2400" b="0" i="0">
+              <a:rPr sz="2000" b="0" i="0">
                 <a:solidFill>
                   <a:srgbClr val="34404A"/>
                 </a:solidFill>
@@ -9434,7 +9434,7 @@
           <a:lstStyle/>
           <a:p>
             <a:r>
-              <a:rPr sz="2400" b="1" i="0">
+              <a:rPr sz="2000" b="1" i="0">
                 <a:solidFill>
                   <a:srgbClr val="1F4E3D"/>
                 </a:solidFill>
@@ -9444,7 +9444,7 @@
           </a:p>
           <a:p>
             <a:r>
-              <a:rPr sz="2400" b="0" i="0">
+              <a:rPr sz="2000" b="0" i="0">
                 <a:solidFill>
                   <a:srgbClr val="34404A"/>
                 </a:solidFill>
@@ -9591,7 +9591,7 @@
           <a:lstStyle/>
           <a:p>
             <a:r>
-              <a:rPr sz="2400" b="1" i="0">
+              <a:rPr sz="2000" b="1" i="0">
                 <a:solidFill>
                   <a:srgbClr val="C88A2E"/>
                 </a:solidFill>
@@ -9817,7 +9817,7 @@
           <a:p>
             <a:pPr algn="ctr"/>
             <a:r>
-              <a:rPr sz="2400" b="1" i="0">
+              <a:rPr sz="2000" b="1" i="0">
                 <a:solidFill>
                   <a:srgbClr val="FFFFFF"/>
                 </a:solidFill>
@@ -9937,7 +9937,7 @@
           <a:p>
             <a:pPr algn="ctr"/>
             <a:r>
-              <a:rPr sz="2400" b="1" i="0">
+              <a:rPr sz="2000" b="1" i="0">
                 <a:solidFill>
                   <a:srgbClr val="FFFFFF"/>
                 </a:solidFill>
@@ -9970,7 +9970,7 @@
           <a:lstStyle/>
           <a:p>
             <a:r>
-              <a:rPr sz="2500" b="1" i="0">
+              <a:rPr sz="2075" b="1" i="0">
                 <a:solidFill>
                   <a:srgbClr val="1F4E3D"/>
                 </a:solidFill>
@@ -9980,7 +9980,7 @@
           </a:p>
           <a:p>
             <a:r>
-              <a:rPr sz="2400" b="0" i="0">
+              <a:rPr sz="2000" b="0" i="0">
                 <a:solidFill>
                   <a:srgbClr val="34404A"/>
                 </a:solidFill>
@@ -10032,7 +10032,7 @@
           <a:p>
             <a:pPr algn="ctr"/>
             <a:r>
-              <a:rPr sz="2400" b="1" i="0">
+              <a:rPr sz="2000" b="1" i="0">
                 <a:solidFill>
                   <a:srgbClr val="FFFFFF"/>
                 </a:solidFill>
@@ -10065,7 +10065,7 @@
           <a:lstStyle/>
           <a:p>
             <a:r>
-              <a:rPr sz="2500" b="1" i="0">
+              <a:rPr sz="2075" b="1" i="0">
                 <a:solidFill>
                   <a:srgbClr val="1F4E3D"/>
                 </a:solidFill>
@@ -10075,7 +10075,7 @@
           </a:p>
           <a:p>
             <a:r>
-              <a:rPr sz="2400" b="0" i="0">
+              <a:rPr sz="2000" b="0" i="0">
                 <a:solidFill>
                   <a:srgbClr val="34404A"/>
                 </a:solidFill>
@@ -10127,7 +10127,7 @@
           <a:p>
             <a:pPr algn="ctr"/>
             <a:r>
-              <a:rPr sz="2400" b="1" i="0">
+              <a:rPr sz="2000" b="1" i="0">
                 <a:solidFill>
                   <a:srgbClr val="FFFFFF"/>
                 </a:solidFill>
@@ -10160,7 +10160,7 @@
           <a:lstStyle/>
           <a:p>
             <a:r>
-              <a:rPr sz="2500" b="1" i="0">
+              <a:rPr sz="2075" b="1" i="0">
                 <a:solidFill>
                   <a:srgbClr val="1F4E3D"/>
                 </a:solidFill>
@@ -10170,7 +10170,7 @@
           </a:p>
           <a:p>
             <a:r>
-              <a:rPr sz="2400" b="0" i="0">
+              <a:rPr sz="2000" b="0" i="0">
                 <a:solidFill>
                   <a:srgbClr val="34404A"/>
                 </a:solidFill>
@@ -10317,7 +10317,7 @@
           <a:lstStyle/>
           <a:p>
             <a:r>
-              <a:rPr sz="2400" b="1" i="0">
+              <a:rPr sz="2000" b="1" i="0">
                 <a:solidFill>
                   <a:srgbClr val="C88A2E"/>
                 </a:solidFill>
@@ -10543,7 +10543,7 @@
           <a:p>
             <a:pPr algn="ctr"/>
             <a:r>
-              <a:rPr sz="2400" b="1" i="0">
+              <a:rPr sz="2000" b="1" i="0">
                 <a:solidFill>
                   <a:srgbClr val="FFFFFF"/>
                 </a:solidFill>
@@ -10644,7 +10644,7 @@
           <a:lstStyle/>
           <a:p>
             <a:r>
-              <a:rPr sz="2400" b="1" i="0">
+              <a:rPr sz="2000" b="1" i="0">
                 <a:solidFill>
                   <a:srgbClr val="C88A2E"/>
                 </a:solidFill>
@@ -10721,7 +10721,7 @@
           <a:lstStyle/>
           <a:p>
             <a:r>
-              <a:rPr sz="2400" b="1" i="0">
+              <a:rPr sz="2000" b="1" i="0">
                 <a:solidFill>
                   <a:srgbClr val="1F4E3D"/>
                 </a:solidFill>
@@ -10731,7 +10731,7 @@
           </a:p>
           <a:p>
             <a:r>
-              <a:rPr sz="2400" b="0" i="0">
+              <a:rPr sz="2000" b="0" i="0">
                 <a:solidFill>
                   <a:srgbClr val="34404A"/>
                 </a:solidFill>
@@ -10808,7 +10808,7 @@
           <a:lstStyle/>
           <a:p>
             <a:r>
-              <a:rPr sz="2400" b="1" i="0">
+              <a:rPr sz="2000" b="1" i="0">
                 <a:solidFill>
                   <a:srgbClr val="1F4E3D"/>
                 </a:solidFill>
@@ -10818,7 +10818,7 @@
           </a:p>
           <a:p>
             <a:r>
-              <a:rPr sz="2400" b="0" i="0">
+              <a:rPr sz="2000" b="0" i="0">
                 <a:solidFill>
                   <a:srgbClr val="34404A"/>
                 </a:solidFill>
@@ -10895,7 +10895,7 @@
           <a:lstStyle/>
           <a:p>
             <a:r>
-              <a:rPr sz="2400" b="1" i="0">
+              <a:rPr sz="2000" b="1" i="0">
                 <a:solidFill>
                   <a:srgbClr val="1F4E3D"/>
                 </a:solidFill>
@@ -10905,7 +10905,7 @@
           </a:p>
           <a:p>
             <a:r>
-              <a:rPr sz="2400" b="0" i="0">
+              <a:rPr sz="2000" b="0" i="0">
                 <a:solidFill>
                   <a:srgbClr val="34404A"/>
                 </a:solidFill>
@@ -11052,7 +11052,7 @@
           <a:lstStyle/>
           <a:p>
             <a:r>
-              <a:rPr sz="2400" b="1" i="0">
+              <a:rPr sz="2000" b="1" i="0">
                 <a:solidFill>
                   <a:srgbClr val="C88A2E"/>
                 </a:solidFill>
@@ -11333,7 +11333,7 @@
           <a:lstStyle/>
           <a:p>
             <a:r>
-              <a:rPr sz="2500" b="0" i="0">
+              <a:rPr sz="2075" b="0" i="0">
                 <a:solidFill>
                   <a:srgbClr val="14332A"/>
                 </a:solidFill>
@@ -11440,7 +11440,7 @@
           <a:lstStyle/>
           <a:p>
             <a:r>
-              <a:rPr sz="2500" b="0" i="0">
+              <a:rPr sz="2075" b="0" i="0">
                 <a:solidFill>
                   <a:srgbClr val="14332A"/>
                 </a:solidFill>
@@ -11547,7 +11547,7 @@
           <a:lstStyle/>
           <a:p>
             <a:r>
-              <a:rPr sz="2500" b="0" i="0">
+              <a:rPr sz="2075" b="0" i="0">
                 <a:solidFill>
                   <a:srgbClr val="14332A"/>
                 </a:solidFill>
@@ -11654,7 +11654,7 @@
           <a:lstStyle/>
           <a:p>
             <a:r>
-              <a:rPr sz="2500" b="0" i="0">
+              <a:rPr sz="2075" b="0" i="0">
                 <a:solidFill>
                   <a:srgbClr val="14332A"/>
                 </a:solidFill>
@@ -11761,7 +11761,7 @@
           <a:lstStyle/>
           <a:p>
             <a:r>
-              <a:rPr sz="2500" b="0" i="0">
+              <a:rPr sz="2075" b="0" i="0">
                 <a:solidFill>
                   <a:srgbClr val="14332A"/>
                 </a:solidFill>
@@ -11868,7 +11868,7 @@
           <a:lstStyle/>
           <a:p>
             <a:r>
-              <a:rPr sz="2500" b="0" i="0">
+              <a:rPr sz="2075" b="0" i="0">
                 <a:solidFill>
                   <a:srgbClr val="14332A"/>
                 </a:solidFill>
@@ -12108,7 +12108,7 @@
           <a:lstStyle/>
           <a:p>
             <a:r>
-              <a:rPr sz="2400" b="1" i="0">
+              <a:rPr sz="2000" b="1" i="0">
                 <a:solidFill>
                   <a:srgbClr val="C88A2E"/>
                 </a:solidFill>
@@ -12288,7 +12288,7 @@
           <a:lstStyle/>
           <a:p>
             <a:r>
-              <a:rPr sz="2400" b="1" i="0">
+              <a:rPr sz="2000" b="1" i="0">
                 <a:solidFill>
                   <a:srgbClr val="C88A2E"/>
                 </a:solidFill>
@@ -12569,7 +12569,7 @@
           <a:lstStyle/>
           <a:p>
             <a:r>
-              <a:rPr sz="2400" b="0" i="1">
+              <a:rPr sz="2000" b="0" i="1">
                 <a:solidFill>
                   <a:srgbClr val="34404A"/>
                 </a:solidFill>
@@ -12602,7 +12602,7 @@
           <a:lstStyle/>
           <a:p>
             <a:r>
-              <a:rPr sz="2400" b="1" i="0">
+              <a:rPr sz="2000" b="1" i="0">
                 <a:solidFill>
                   <a:srgbClr val="2C7A5A"/>
                 </a:solidFill>
@@ -12610,7 +12610,7 @@
               <a:t>✔  </a:t>
             </a:r>
             <a:r>
-              <a:rPr sz="2400" b="0" i="0">
+              <a:rPr sz="2000" b="0" i="0">
                 <a:solidFill>
                   <a:srgbClr val="14332A"/>
                 </a:solidFill>
@@ -12643,7 +12643,7 @@
           <a:lstStyle/>
           <a:p>
             <a:r>
-              <a:rPr sz="2400" b="1" i="0">
+              <a:rPr sz="2000" b="1" i="0">
                 <a:solidFill>
                   <a:srgbClr val="2C7A5A"/>
                 </a:solidFill>
@@ -12651,7 +12651,7 @@
               <a:t>✔  </a:t>
             </a:r>
             <a:r>
-              <a:rPr sz="2400" b="0" i="0">
+              <a:rPr sz="2000" b="0" i="0">
                 <a:solidFill>
                   <a:srgbClr val="14332A"/>
                 </a:solidFill>
@@ -12684,7 +12684,7 @@
           <a:lstStyle/>
           <a:p>
             <a:r>
-              <a:rPr sz="2400" b="1" i="0">
+              <a:rPr sz="2000" b="1" i="0">
                 <a:solidFill>
                   <a:srgbClr val="2C7A5A"/>
                 </a:solidFill>
@@ -12692,7 +12692,7 @@
               <a:t>✔  </a:t>
             </a:r>
             <a:r>
-              <a:rPr sz="2400" b="0" i="0">
+              <a:rPr sz="2000" b="0" i="0">
                 <a:solidFill>
                   <a:srgbClr val="14332A"/>
                 </a:solidFill>
@@ -12725,7 +12725,7 @@
           <a:lstStyle/>
           <a:p>
             <a:r>
-              <a:rPr sz="2400" b="1" i="0">
+              <a:rPr sz="2000" b="1" i="0">
                 <a:solidFill>
                   <a:srgbClr val="2C7A5A"/>
                 </a:solidFill>
@@ -12733,7 +12733,7 @@
               <a:t>✔  </a:t>
             </a:r>
             <a:r>
-              <a:rPr sz="2400" b="0" i="0">
+              <a:rPr sz="2000" b="0" i="0">
                 <a:solidFill>
                   <a:srgbClr val="14332A"/>
                 </a:solidFill>
@@ -12766,7 +12766,7 @@
           <a:lstStyle/>
           <a:p>
             <a:r>
-              <a:rPr sz="2400" b="1" i="0">
+              <a:rPr sz="2000" b="1" i="0">
                 <a:solidFill>
                   <a:srgbClr val="2C7A5A"/>
                 </a:solidFill>
@@ -12774,7 +12774,7 @@
               <a:t>✔  </a:t>
             </a:r>
             <a:r>
-              <a:rPr sz="2400" b="0" i="0">
+              <a:rPr sz="2000" b="0" i="0">
                 <a:solidFill>
                   <a:srgbClr val="14332A"/>
                 </a:solidFill>
@@ -12807,7 +12807,7 @@
           <a:lstStyle/>
           <a:p>
             <a:r>
-              <a:rPr sz="2400" b="1" i="0">
+              <a:rPr sz="2000" b="1" i="0">
                 <a:solidFill>
                   <a:srgbClr val="2C7A5A"/>
                 </a:solidFill>
@@ -12815,7 +12815,7 @@
               <a:t>✔  </a:t>
             </a:r>
             <a:r>
-              <a:rPr sz="2400" b="0" i="0">
+              <a:rPr sz="2000" b="0" i="0">
                 <a:solidFill>
                   <a:srgbClr val="14332A"/>
                 </a:solidFill>
@@ -12962,7 +12962,7 @@
           <a:lstStyle/>
           <a:p>
             <a:r>
-              <a:rPr sz="2400" b="1" i="0">
+              <a:rPr sz="2000" b="1" i="0">
                 <a:solidFill>
                   <a:srgbClr val="C88A2E"/>
                 </a:solidFill>
@@ -13243,7 +13243,7 @@
           <a:lstStyle/>
           <a:p>
             <a:r>
-              <a:rPr sz="2400" b="0" i="1">
+              <a:rPr sz="2000" b="0" i="1">
                 <a:solidFill>
                   <a:srgbClr val="34404A"/>
                 </a:solidFill>
@@ -13276,7 +13276,7 @@
           <a:lstStyle/>
           <a:p>
             <a:r>
-              <a:rPr sz="2400" b="1" i="0">
+              <a:rPr sz="2000" b="1" i="0">
                 <a:solidFill>
                   <a:srgbClr val="2C7A5A"/>
                 </a:solidFill>
@@ -13284,7 +13284,7 @@
               <a:t>✔  </a:t>
             </a:r>
             <a:r>
-              <a:rPr sz="2400" b="0" i="0">
+              <a:rPr sz="2000" b="0" i="0">
                 <a:solidFill>
                   <a:srgbClr val="14332A"/>
                 </a:solidFill>
@@ -13317,7 +13317,7 @@
           <a:lstStyle/>
           <a:p>
             <a:r>
-              <a:rPr sz="2400" b="1" i="0">
+              <a:rPr sz="2000" b="1" i="0">
                 <a:solidFill>
                   <a:srgbClr val="2C7A5A"/>
                 </a:solidFill>
@@ -13325,7 +13325,7 @@
               <a:t>✔  </a:t>
             </a:r>
             <a:r>
-              <a:rPr sz="2400" b="0" i="0">
+              <a:rPr sz="2000" b="0" i="0">
                 <a:solidFill>
                   <a:srgbClr val="14332A"/>
                 </a:solidFill>
@@ -13358,7 +13358,7 @@
           <a:lstStyle/>
           <a:p>
             <a:r>
-              <a:rPr sz="2400" b="1" i="0">
+              <a:rPr sz="2000" b="1" i="0">
                 <a:solidFill>
                   <a:srgbClr val="2C7A5A"/>
                 </a:solidFill>
@@ -13366,7 +13366,7 @@
               <a:t>✔  </a:t>
             </a:r>
             <a:r>
-              <a:rPr sz="2400" b="0" i="0">
+              <a:rPr sz="2000" b="0" i="0">
                 <a:solidFill>
                   <a:srgbClr val="14332A"/>
                 </a:solidFill>
@@ -13399,7 +13399,7 @@
           <a:lstStyle/>
           <a:p>
             <a:r>
-              <a:rPr sz="2400" b="1" i="0">
+              <a:rPr sz="2000" b="1" i="0">
                 <a:solidFill>
                   <a:srgbClr val="2C7A5A"/>
                 </a:solidFill>
@@ -13407,7 +13407,7 @@
               <a:t>✔  </a:t>
             </a:r>
             <a:r>
-              <a:rPr sz="2400" b="0" i="0">
+              <a:rPr sz="2000" b="0" i="0">
                 <a:solidFill>
                   <a:srgbClr val="14332A"/>
                 </a:solidFill>
@@ -13440,7 +13440,7 @@
           <a:lstStyle/>
           <a:p>
             <a:r>
-              <a:rPr sz="2400" b="1" i="0">
+              <a:rPr sz="2000" b="1" i="0">
                 <a:solidFill>
                   <a:srgbClr val="2C7A5A"/>
                 </a:solidFill>
@@ -13448,7 +13448,7 @@
               <a:t>✔  </a:t>
             </a:r>
             <a:r>
-              <a:rPr sz="2400" b="0" i="0">
+              <a:rPr sz="2000" b="0" i="0">
                 <a:solidFill>
                   <a:srgbClr val="14332A"/>
                 </a:solidFill>
@@ -13481,7 +13481,7 @@
           <a:lstStyle/>
           <a:p>
             <a:r>
-              <a:rPr sz="2400" b="1" i="0">
+              <a:rPr sz="2000" b="1" i="0">
                 <a:solidFill>
                   <a:srgbClr val="2C7A5A"/>
                 </a:solidFill>
@@ -13489,7 +13489,7 @@
               <a:t>✔  </a:t>
             </a:r>
             <a:r>
-              <a:rPr sz="2400" b="0" i="0">
+              <a:rPr sz="2000" b="0" i="0">
                 <a:solidFill>
                   <a:srgbClr val="14332A"/>
                 </a:solidFill>
@@ -13636,7 +13636,7 @@
           <a:lstStyle/>
           <a:p>
             <a:r>
-              <a:rPr sz="2400" b="1" i="0">
+              <a:rPr sz="2000" b="1" i="0">
                 <a:solidFill>
                   <a:srgbClr val="C88A2E"/>
                 </a:solidFill>
@@ -13987,7 +13987,7 @@
           <a:lstStyle/>
           <a:p>
             <a:r>
-              <a:rPr sz="2400" b="1" i="0">
+              <a:rPr sz="2000" b="1" i="0">
                 <a:solidFill>
                   <a:srgbClr val="C88A2E"/>
                 </a:solidFill>
@@ -14356,7 +14356,7 @@
           <a:lstStyle/>
           <a:p>
             <a:r>
-              <a:rPr sz="2500" b="1" i="0">
+              <a:rPr sz="2075" b="1" i="0">
                 <a:solidFill>
                   <a:srgbClr val="1F4E3D"/>
                 </a:solidFill>
@@ -14366,7 +14366,7 @@
           </a:p>
           <a:p>
             <a:r>
-              <a:rPr sz="2400" b="0" i="0">
+              <a:rPr sz="2000" b="0" i="0">
                 <a:solidFill>
                   <a:srgbClr val="34404A"/>
                 </a:solidFill>
@@ -14561,7 +14561,7 @@
           <a:lstStyle/>
           <a:p>
             <a:r>
-              <a:rPr sz="2500" b="1" i="0">
+              <a:rPr sz="2075" b="1" i="0">
                 <a:solidFill>
                   <a:srgbClr val="1F4E3D"/>
                 </a:solidFill>
@@ -14571,7 +14571,7 @@
           </a:p>
           <a:p>
             <a:r>
-              <a:rPr sz="2400" b="0" i="0">
+              <a:rPr sz="2000" b="0" i="0">
                 <a:solidFill>
                   <a:srgbClr val="34404A"/>
                 </a:solidFill>
@@ -14766,7 +14766,7 @@
           <a:lstStyle/>
           <a:p>
             <a:r>
-              <a:rPr sz="2500" b="1" i="0">
+              <a:rPr sz="2075" b="1" i="0">
                 <a:solidFill>
                   <a:srgbClr val="1F4E3D"/>
                 </a:solidFill>
@@ -14776,7 +14776,7 @@
           </a:p>
           <a:p>
             <a:r>
-              <a:rPr sz="2400" b="0" i="0">
+              <a:rPr sz="2000" b="0" i="0">
                 <a:solidFill>
                   <a:srgbClr val="34404A"/>
                 </a:solidFill>
@@ -14923,7 +14923,7 @@
           <a:lstStyle/>
           <a:p>
             <a:r>
-              <a:rPr sz="2400" b="1" i="0">
+              <a:rPr sz="2000" b="1" i="0">
                 <a:solidFill>
                   <a:srgbClr val="C88A2E"/>
                 </a:solidFill>
@@ -15204,7 +15204,7 @@
           <a:lstStyle/>
           <a:p>
             <a:r>
-              <a:rPr sz="2500" b="1" i="0">
+              <a:rPr sz="2075" b="1" i="0">
                 <a:solidFill>
                   <a:srgbClr val="1F4E3D"/>
                 </a:solidFill>
@@ -15214,7 +15214,7 @@
           </a:p>
           <a:p>
             <a:r>
-              <a:rPr sz="2400" b="0" i="0">
+              <a:rPr sz="2000" b="0" i="0">
                 <a:solidFill>
                   <a:srgbClr val="34404A"/>
                 </a:solidFill>
@@ -15321,7 +15321,7 @@
           <a:lstStyle/>
           <a:p>
             <a:r>
-              <a:rPr sz="2500" b="1" i="0">
+              <a:rPr sz="2075" b="1" i="0">
                 <a:solidFill>
                   <a:srgbClr val="1F4E3D"/>
                 </a:solidFill>
@@ -15331,7 +15331,7 @@
           </a:p>
           <a:p>
             <a:r>
-              <a:rPr sz="2400" b="0" i="0">
+              <a:rPr sz="2000" b="0" i="0">
                 <a:solidFill>
                   <a:srgbClr val="34404A"/>
                 </a:solidFill>
@@ -15438,7 +15438,7 @@
           <a:lstStyle/>
           <a:p>
             <a:r>
-              <a:rPr sz="2500" b="1" i="0">
+              <a:rPr sz="2075" b="1" i="0">
                 <a:solidFill>
                   <a:srgbClr val="1F4E3D"/>
                 </a:solidFill>
@@ -15448,7 +15448,7 @@
           </a:p>
           <a:p>
             <a:r>
-              <a:rPr sz="2400" b="0" i="0">
+              <a:rPr sz="2000" b="0" i="0">
                 <a:solidFill>
                   <a:srgbClr val="34404A"/>
                 </a:solidFill>
@@ -15688,7 +15688,7 @@
           <a:lstStyle/>
           <a:p>
             <a:r>
-              <a:rPr sz="2400" b="1" i="0">
+              <a:rPr sz="2000" b="1" i="0">
                 <a:solidFill>
                   <a:srgbClr val="C88A2E"/>
                 </a:solidFill>
@@ -15868,7 +15868,7 @@
           <a:lstStyle/>
           <a:p>
             <a:r>
-              <a:rPr sz="2400" b="1" i="0">
+              <a:rPr sz="2000" b="1" i="0">
                 <a:solidFill>
                   <a:srgbClr val="C88A2E"/>
                 </a:solidFill>
@@ -16237,7 +16237,7 @@
           <a:lstStyle/>
           <a:p>
             <a:r>
-              <a:rPr sz="2500" b="1" i="0">
+              <a:rPr sz="2075" b="1" i="0">
                 <a:solidFill>
                   <a:srgbClr val="1F4E3D"/>
                 </a:solidFill>
@@ -16247,7 +16247,7 @@
           </a:p>
           <a:p>
             <a:r>
-              <a:rPr sz="2400" b="0" i="0">
+              <a:rPr sz="2000" b="0" i="0">
                 <a:solidFill>
                   <a:srgbClr val="34404A"/>
                 </a:solidFill>
@@ -16257,7 +16257,7 @@
           </a:p>
           <a:p>
             <a:r>
-              <a:rPr sz="2400" b="0" i="0">
+              <a:rPr sz="2000" b="0" i="0">
                 <a:solidFill>
                   <a:srgbClr val="34404A"/>
                 </a:solidFill>
@@ -16452,7 +16452,7 @@
           <a:lstStyle/>
           <a:p>
             <a:r>
-              <a:rPr sz="2500" b="1" i="0">
+              <a:rPr sz="2075" b="1" i="0">
                 <a:solidFill>
                   <a:srgbClr val="1F4E3D"/>
                 </a:solidFill>
@@ -16462,7 +16462,7 @@
           </a:p>
           <a:p>
             <a:r>
-              <a:rPr sz="2400" b="0" i="0">
+              <a:rPr sz="2000" b="0" i="0">
                 <a:solidFill>
                   <a:srgbClr val="34404A"/>
                 </a:solidFill>
@@ -16472,7 +16472,7 @@
           </a:p>
           <a:p>
             <a:r>
-              <a:rPr sz="2400" b="0" i="0">
+              <a:rPr sz="2000" b="0" i="0">
                 <a:solidFill>
                   <a:srgbClr val="34404A"/>
                 </a:solidFill>
@@ -16619,7 +16619,7 @@
           <a:lstStyle/>
           <a:p>
             <a:r>
-              <a:rPr sz="2400" b="1" i="0">
+              <a:rPr sz="2000" b="1" i="0">
                 <a:solidFill>
                   <a:srgbClr val="C88A2E"/>
                 </a:solidFill>
@@ -16988,7 +16988,7 @@
           <a:lstStyle/>
           <a:p>
             <a:r>
-              <a:rPr sz="2500" b="1" i="0">
+              <a:rPr sz="2075" b="1" i="0">
                 <a:solidFill>
                   <a:srgbClr val="1F4E3D"/>
                 </a:solidFill>
@@ -16998,7 +16998,7 @@
           </a:p>
           <a:p>
             <a:r>
-              <a:rPr sz="2400" b="0" i="0">
+              <a:rPr sz="2000" b="0" i="0">
                 <a:solidFill>
                   <a:srgbClr val="34404A"/>
                 </a:solidFill>
@@ -17008,7 +17008,7 @@
           </a:p>
           <a:p>
             <a:r>
-              <a:rPr sz="2400" b="0" i="0">
+              <a:rPr sz="2000" b="0" i="0">
                 <a:solidFill>
                   <a:srgbClr val="34404A"/>
                 </a:solidFill>
@@ -17203,7 +17203,7 @@
           <a:lstStyle/>
           <a:p>
             <a:r>
-              <a:rPr sz="2500" b="1" i="0">
+              <a:rPr sz="2075" b="1" i="0">
                 <a:solidFill>
                   <a:srgbClr val="1F4E3D"/>
                 </a:solidFill>
@@ -17213,7 +17213,7 @@
           </a:p>
           <a:p>
             <a:r>
-              <a:rPr sz="2400" b="0" i="0">
+              <a:rPr sz="2000" b="0" i="0">
                 <a:solidFill>
                   <a:srgbClr val="34404A"/>
                 </a:solidFill>
@@ -17223,7 +17223,7 @@
           </a:p>
           <a:p>
             <a:r>
-              <a:rPr sz="2400" b="0" i="0">
+              <a:rPr sz="2000" b="0" i="0">
                 <a:solidFill>
                   <a:srgbClr val="34404A"/>
                 </a:solidFill>
@@ -17370,7 +17370,7 @@
           <a:lstStyle/>
           <a:p>
             <a:r>
-              <a:rPr sz="2400" b="1" i="0">
+              <a:rPr sz="2000" b="1" i="0">
                 <a:solidFill>
                   <a:srgbClr val="C88A2E"/>
                 </a:solidFill>
@@ -17651,7 +17651,7 @@
           <a:lstStyle/>
           <a:p>
             <a:r>
-              <a:rPr sz="2500" b="1" i="0">
+              <a:rPr sz="2075" b="1" i="0">
                 <a:solidFill>
                   <a:srgbClr val="1F4E3D"/>
                 </a:solidFill>
@@ -17661,7 +17661,7 @@
           </a:p>
           <a:p>
             <a:r>
-              <a:rPr sz="2400" b="0" i="0">
+              <a:rPr sz="2000" b="0" i="0">
                 <a:solidFill>
                   <a:srgbClr val="34404A"/>
                 </a:solidFill>
@@ -17768,7 +17768,7 @@
           <a:lstStyle/>
           <a:p>
             <a:r>
-              <a:rPr sz="2500" b="1" i="0">
+              <a:rPr sz="2075" b="1" i="0">
                 <a:solidFill>
                   <a:srgbClr val="1F4E3D"/>
                 </a:solidFill>
@@ -17778,7 +17778,7 @@
           </a:p>
           <a:p>
             <a:r>
-              <a:rPr sz="2400" b="0" i="0">
+              <a:rPr sz="2000" b="0" i="0">
                 <a:solidFill>
                   <a:srgbClr val="34404A"/>
                 </a:solidFill>
@@ -17885,7 +17885,7 @@
           <a:lstStyle/>
           <a:p>
             <a:r>
-              <a:rPr sz="2500" b="1" i="0">
+              <a:rPr sz="2075" b="1" i="0">
                 <a:solidFill>
                   <a:srgbClr val="1F4E3D"/>
                 </a:solidFill>
@@ -17895,7 +17895,7 @@
           </a:p>
           <a:p>
             <a:r>
-              <a:rPr sz="2400" b="0" i="0">
+              <a:rPr sz="2000" b="0" i="0">
                 <a:solidFill>
                   <a:srgbClr val="34404A"/>
                 </a:solidFill>
@@ -18135,7 +18135,7 @@
           <a:lstStyle/>
           <a:p>
             <a:r>
-              <a:rPr sz="2400" b="1" i="0">
+              <a:rPr sz="2000" b="1" i="0">
                 <a:solidFill>
                   <a:srgbClr val="C88A2E"/>
                 </a:solidFill>
@@ -18408,7 +18408,7 @@
           <a:lstStyle/>
           <a:p>
             <a:r>
-              <a:rPr sz="2400" b="1" i="0">
+              <a:rPr sz="2000" b="1" i="0">
                 <a:solidFill>
                   <a:srgbClr val="C88A2E"/>
                 </a:solidFill>
@@ -18588,7 +18588,7 @@
           <a:lstStyle/>
           <a:p>
             <a:r>
-              <a:rPr sz="2400" b="1" i="0">
+              <a:rPr sz="2000" b="1" i="0">
                 <a:solidFill>
                   <a:srgbClr val="C88A2E"/>
                 </a:solidFill>
@@ -18913,7 +18913,7 @@
           <a:lstStyle/>
           <a:p>
             <a:r>
-              <a:rPr sz="2500" b="1" i="0">
+              <a:rPr sz="2075" b="1" i="0">
                 <a:solidFill>
                   <a:srgbClr val="1F4E3D"/>
                 </a:solidFill>
@@ -18923,7 +18923,7 @@
           </a:p>
           <a:p>
             <a:r>
-              <a:rPr sz="2400" b="1" i="0">
+              <a:rPr sz="2000" b="1" i="0">
                 <a:solidFill>
                   <a:srgbClr val="C88A2E"/>
                 </a:solidFill>
@@ -18931,7 +18931,7 @@
               <a:t>Nguy cơ: </a:t>
             </a:r>
             <a:r>
-              <a:rPr sz="2400" b="0" i="0">
+              <a:rPr sz="2000" b="0" i="0">
                 <a:solidFill>
                   <a:srgbClr val="34404A"/>
                 </a:solidFill>
@@ -18941,7 +18941,7 @@
           </a:p>
           <a:p>
             <a:r>
-              <a:rPr sz="2400" b="1" i="0">
+              <a:rPr sz="2000" b="1" i="0">
                 <a:solidFill>
                   <a:srgbClr val="2C7A5A"/>
                 </a:solidFill>
@@ -18949,7 +18949,7 @@
               <a:t>Biện pháp: </a:t>
             </a:r>
             <a:r>
-              <a:rPr sz="2400" b="0" i="0">
+              <a:rPr sz="2000" b="0" i="0">
                 <a:solidFill>
                   <a:srgbClr val="34404A"/>
                 </a:solidFill>
@@ -19100,7 +19100,7 @@
           <a:lstStyle/>
           <a:p>
             <a:r>
-              <a:rPr sz="2500" b="1" i="0">
+              <a:rPr sz="2075" b="1" i="0">
                 <a:solidFill>
                   <a:srgbClr val="1F4E3D"/>
                 </a:solidFill>
@@ -19110,7 +19110,7 @@
           </a:p>
           <a:p>
             <a:r>
-              <a:rPr sz="2400" b="1" i="0">
+              <a:rPr sz="2000" b="1" i="0">
                 <a:solidFill>
                   <a:srgbClr val="C88A2E"/>
                 </a:solidFill>
@@ -19118,7 +19118,7 @@
               <a:t>Nguy cơ: </a:t>
             </a:r>
             <a:r>
-              <a:rPr sz="2400" b="0" i="0">
+              <a:rPr sz="2000" b="0" i="0">
                 <a:solidFill>
                   <a:srgbClr val="34404A"/>
                 </a:solidFill>
@@ -19128,7 +19128,7 @@
           </a:p>
           <a:p>
             <a:r>
-              <a:rPr sz="2400" b="1" i="0">
+              <a:rPr sz="2000" b="1" i="0">
                 <a:solidFill>
                   <a:srgbClr val="2C7A5A"/>
                 </a:solidFill>
@@ -19136,7 +19136,7 @@
               <a:t>Biện pháp: </a:t>
             </a:r>
             <a:r>
-              <a:rPr sz="2400" b="0" i="0">
+              <a:rPr sz="2000" b="0" i="0">
                 <a:solidFill>
                   <a:srgbClr val="34404A"/>
                 </a:solidFill>
@@ -19283,7 +19283,7 @@
           <a:lstStyle/>
           <a:p>
             <a:r>
-              <a:rPr sz="2400" b="1" i="0">
+              <a:rPr sz="2000" b="1" i="0">
                 <a:solidFill>
                   <a:srgbClr val="C88A2E"/>
                 </a:solidFill>
@@ -19608,7 +19608,7 @@
           <a:lstStyle/>
           <a:p>
             <a:r>
-              <a:rPr sz="2500" b="1" i="0">
+              <a:rPr sz="2075" b="1" i="0">
                 <a:solidFill>
                   <a:srgbClr val="1F4E3D"/>
                 </a:solidFill>
@@ -19618,7 +19618,7 @@
           </a:p>
           <a:p>
             <a:r>
-              <a:rPr sz="2400" b="1" i="0">
+              <a:rPr sz="2000" b="1" i="0">
                 <a:solidFill>
                   <a:srgbClr val="C88A2E"/>
                 </a:solidFill>
@@ -19626,7 +19626,7 @@
               <a:t>Nguy cơ: </a:t>
             </a:r>
             <a:r>
-              <a:rPr sz="2400" b="0" i="0">
+              <a:rPr sz="2000" b="0" i="0">
                 <a:solidFill>
                   <a:srgbClr val="34404A"/>
                 </a:solidFill>
@@ -19636,7 +19636,7 @@
           </a:p>
           <a:p>
             <a:r>
-              <a:rPr sz="2400" b="1" i="0">
+              <a:rPr sz="2000" b="1" i="0">
                 <a:solidFill>
                   <a:srgbClr val="2C7A5A"/>
                 </a:solidFill>
@@ -19644,7 +19644,7 @@
               <a:t>Biện pháp: </a:t>
             </a:r>
             <a:r>
-              <a:rPr sz="2400" b="0" i="0">
+              <a:rPr sz="2000" b="0" i="0">
                 <a:solidFill>
                   <a:srgbClr val="34404A"/>
                 </a:solidFill>
@@ -19795,7 +19795,7 @@
           <a:lstStyle/>
           <a:p>
             <a:r>
-              <a:rPr sz="2500" b="1" i="0">
+              <a:rPr sz="2075" b="1" i="0">
                 <a:solidFill>
                   <a:srgbClr val="1F4E3D"/>
                 </a:solidFill>
@@ -19805,7 +19805,7 @@
           </a:p>
           <a:p>
             <a:r>
-              <a:rPr sz="2400" b="1" i="0">
+              <a:rPr sz="2000" b="1" i="0">
                 <a:solidFill>
                   <a:srgbClr val="C88A2E"/>
                 </a:solidFill>
@@ -19813,7 +19813,7 @@
               <a:t>Nguy cơ: </a:t>
             </a:r>
             <a:r>
-              <a:rPr sz="2400" b="0" i="0">
+              <a:rPr sz="2000" b="0" i="0">
                 <a:solidFill>
                   <a:srgbClr val="34404A"/>
                 </a:solidFill>
@@ -19823,7 +19823,7 @@
           </a:p>
           <a:p>
             <a:r>
-              <a:rPr sz="2400" b="1" i="0">
+              <a:rPr sz="2000" b="1" i="0">
                 <a:solidFill>
                   <a:srgbClr val="2C7A5A"/>
                 </a:solidFill>
@@ -19831,7 +19831,7 @@
               <a:t>Biện pháp: </a:t>
             </a:r>
             <a:r>
-              <a:rPr sz="2400" b="0" i="0">
+              <a:rPr sz="2000" b="0" i="0">
                 <a:solidFill>
                   <a:srgbClr val="34404A"/>
                 </a:solidFill>
@@ -19978,7 +19978,7 @@
           <a:lstStyle/>
           <a:p>
             <a:r>
-              <a:rPr sz="2400" b="1" i="0">
+              <a:rPr sz="2000" b="1" i="0">
                 <a:solidFill>
                   <a:srgbClr val="C88A2E"/>
                 </a:solidFill>
@@ -20347,7 +20347,7 @@
           <a:lstStyle/>
           <a:p>
             <a:r>
-              <a:rPr sz="2500" b="1" i="0">
+              <a:rPr sz="2075" b="1" i="0">
                 <a:solidFill>
                   <a:srgbClr val="1F4E3D"/>
                 </a:solidFill>
@@ -20357,7 +20357,7 @@
           </a:p>
           <a:p>
             <a:r>
-              <a:rPr sz="2400" b="0" i="0">
+              <a:rPr sz="2000" b="0" i="0">
                 <a:solidFill>
                   <a:srgbClr val="34404A"/>
                 </a:solidFill>
@@ -20552,7 +20552,7 @@
           <a:lstStyle/>
           <a:p>
             <a:r>
-              <a:rPr sz="2500" b="1" i="0">
+              <a:rPr sz="2075" b="1" i="0">
                 <a:solidFill>
                   <a:srgbClr val="1F4E3D"/>
                 </a:solidFill>
@@ -20562,7 +20562,7 @@
           </a:p>
           <a:p>
             <a:r>
-              <a:rPr sz="2400" b="0" i="0">
+              <a:rPr sz="2000" b="0" i="0">
                 <a:solidFill>
                   <a:srgbClr val="34404A"/>
                 </a:solidFill>
@@ -20757,7 +20757,7 @@
           <a:lstStyle/>
           <a:p>
             <a:r>
-              <a:rPr sz="2500" b="1" i="0">
+              <a:rPr sz="2075" b="1" i="0">
                 <a:solidFill>
                   <a:srgbClr val="1F4E3D"/>
                 </a:solidFill>
@@ -20767,7 +20767,7 @@
           </a:p>
           <a:p>
             <a:r>
-              <a:rPr sz="2400" b="0" i="0">
+              <a:rPr sz="2000" b="0" i="0">
                 <a:solidFill>
                   <a:srgbClr val="34404A"/>
                 </a:solidFill>
@@ -20914,7 +20914,7 @@
           <a:lstStyle/>
           <a:p>
             <a:r>
-              <a:rPr sz="2400" b="1" i="0">
+              <a:rPr sz="2000" b="1" i="0">
                 <a:solidFill>
                   <a:srgbClr val="C88A2E"/>
                 </a:solidFill>
@@ -21195,7 +21195,7 @@
           <a:lstStyle/>
           <a:p>
             <a:r>
-              <a:rPr sz="2500" b="1" i="0">
+              <a:rPr sz="2075" b="1" i="0">
                 <a:solidFill>
                   <a:srgbClr val="1F4E3D"/>
                 </a:solidFill>
@@ -21205,7 +21205,7 @@
           </a:p>
           <a:p>
             <a:r>
-              <a:rPr sz="2400" b="0" i="0">
+              <a:rPr sz="2000" b="0" i="0">
                 <a:solidFill>
                   <a:srgbClr val="34404A"/>
                 </a:solidFill>
@@ -21312,7 +21312,7 @@
           <a:lstStyle/>
           <a:p>
             <a:r>
-              <a:rPr sz="2500" b="1" i="0">
+              <a:rPr sz="2075" b="1" i="0">
                 <a:solidFill>
                   <a:srgbClr val="1F4E3D"/>
                 </a:solidFill>
@@ -21322,7 +21322,7 @@
           </a:p>
           <a:p>
             <a:r>
-              <a:rPr sz="2400" b="0" i="0">
+              <a:rPr sz="2000" b="0" i="0">
                 <a:solidFill>
                   <a:srgbClr val="34404A"/>
                 </a:solidFill>
@@ -21429,7 +21429,7 @@
           <a:lstStyle/>
           <a:p>
             <a:r>
-              <a:rPr sz="2500" b="1" i="0">
+              <a:rPr sz="2075" b="1" i="0">
                 <a:solidFill>
                   <a:srgbClr val="1F4E3D"/>
                 </a:solidFill>
@@ -21439,7 +21439,7 @@
           </a:p>
           <a:p>
             <a:r>
-              <a:rPr sz="2400" b="0" i="0">
+              <a:rPr sz="2000" b="0" i="0">
                 <a:solidFill>
                   <a:srgbClr val="34404A"/>
                 </a:solidFill>
@@ -21807,7 +21807,7 @@
           <a:lstStyle/>
           <a:p>
             <a:r>
-              <a:rPr sz="2400" b="1" i="0">
+              <a:rPr sz="2000" b="1" i="0">
                 <a:solidFill>
                   <a:srgbClr val="C88A2E"/>
                 </a:solidFill>
@@ -22088,7 +22088,7 @@
           <a:lstStyle/>
           <a:p>
             <a:r>
-              <a:rPr sz="2500" b="1" i="0">
+              <a:rPr sz="2075" b="1" i="0">
                 <a:solidFill>
                   <a:srgbClr val="1F4E3D"/>
                 </a:solidFill>
@@ -22098,7 +22098,7 @@
           </a:p>
           <a:p>
             <a:r>
-              <a:rPr sz="2400" b="0" i="0">
+              <a:rPr sz="2000" b="0" i="0">
                 <a:solidFill>
                   <a:srgbClr val="34404A"/>
                 </a:solidFill>
@@ -22205,7 +22205,7 @@
           <a:lstStyle/>
           <a:p>
             <a:r>
-              <a:rPr sz="2500" b="1" i="0">
+              <a:rPr sz="2075" b="1" i="0">
                 <a:solidFill>
                   <a:srgbClr val="1F4E3D"/>
                 </a:solidFill>
@@ -22215,7 +22215,7 @@
           </a:p>
           <a:p>
             <a:r>
-              <a:rPr sz="2400" b="0" i="0">
+              <a:rPr sz="2000" b="0" i="0">
                 <a:solidFill>
                   <a:srgbClr val="34404A"/>
                 </a:solidFill>
@@ -22322,7 +22322,7 @@
           <a:lstStyle/>
           <a:p>
             <a:r>
-              <a:rPr sz="2500" b="1" i="0">
+              <a:rPr sz="2075" b="1" i="0">
                 <a:solidFill>
                   <a:srgbClr val="1F4E3D"/>
                 </a:solidFill>
@@ -22332,7 +22332,7 @@
           </a:p>
           <a:p>
             <a:r>
-              <a:rPr sz="2400" b="0" i="0">
+              <a:rPr sz="2000" b="0" i="0">
                 <a:solidFill>
                   <a:srgbClr val="34404A"/>
                 </a:solidFill>
@@ -22479,7 +22479,7 @@
           <a:lstStyle/>
           <a:p>
             <a:r>
-              <a:rPr sz="2400" b="1" i="0">
+              <a:rPr sz="2000" b="1" i="0">
                 <a:solidFill>
                   <a:srgbClr val="C88A2E"/>
                 </a:solidFill>
@@ -22830,7 +22830,7 @@
           <a:lstStyle/>
           <a:p>
             <a:r>
-              <a:rPr sz="2400" b="1" i="0">
+              <a:rPr sz="2000" b="1" i="0">
                 <a:solidFill>
                   <a:srgbClr val="C88A2E"/>
                 </a:solidFill>
@@ -23111,7 +23111,7 @@
           <a:lstStyle/>
           <a:p>
             <a:r>
-              <a:rPr sz="2500" b="0" i="0">
+              <a:rPr sz="2075" b="0" i="0">
                 <a:solidFill>
                   <a:srgbClr val="14332A"/>
                 </a:solidFill>
@@ -23218,7 +23218,7 @@
           <a:lstStyle/>
           <a:p>
             <a:r>
-              <a:rPr sz="2500" b="0" i="0">
+              <a:rPr sz="2075" b="0" i="0">
                 <a:solidFill>
                   <a:srgbClr val="14332A"/>
                 </a:solidFill>
@@ -23325,7 +23325,7 @@
           <a:lstStyle/>
           <a:p>
             <a:r>
-              <a:rPr sz="2500" b="0" i="0">
+              <a:rPr sz="2075" b="0" i="0">
                 <a:solidFill>
                   <a:srgbClr val="14332A"/>
                 </a:solidFill>
@@ -23432,7 +23432,7 @@
           <a:lstStyle/>
           <a:p>
             <a:r>
-              <a:rPr sz="2500" b="0" i="0">
+              <a:rPr sz="2075" b="0" i="0">
                 <a:solidFill>
                   <a:srgbClr val="14332A"/>
                 </a:solidFill>
@@ -23672,7 +23672,7 @@
           <a:lstStyle/>
           <a:p>
             <a:r>
-              <a:rPr sz="2400" b="1" i="0">
+              <a:rPr sz="2000" b="1" i="0">
                 <a:solidFill>
                   <a:srgbClr val="C88A2E"/>
                 </a:solidFill>
@@ -23852,7 +23852,7 @@
           <a:lstStyle/>
           <a:p>
             <a:r>
-              <a:rPr sz="2400" b="1" i="0">
+              <a:rPr sz="2000" b="1" i="0">
                 <a:solidFill>
                   <a:srgbClr val="C88A2E"/>
                 </a:solidFill>
@@ -24133,7 +24133,7 @@
           <a:lstStyle/>
           <a:p>
             <a:r>
-              <a:rPr sz="2500" b="1" i="0">
+              <a:rPr sz="2075" b="1" i="0">
                 <a:solidFill>
                   <a:srgbClr val="1F4E3D"/>
                 </a:solidFill>
@@ -24143,7 +24143,7 @@
           </a:p>
           <a:p>
             <a:r>
-              <a:rPr sz="2400" b="0" i="0">
+              <a:rPr sz="2000" b="0" i="0">
                 <a:solidFill>
                   <a:srgbClr val="34404A"/>
                 </a:solidFill>
@@ -24250,7 +24250,7 @@
           <a:lstStyle/>
           <a:p>
             <a:r>
-              <a:rPr sz="2500" b="1" i="0">
+              <a:rPr sz="2075" b="1" i="0">
                 <a:solidFill>
                   <a:srgbClr val="1F4E3D"/>
                 </a:solidFill>
@@ -24260,7 +24260,7 @@
           </a:p>
           <a:p>
             <a:r>
-              <a:rPr sz="2400" b="0" i="0">
+              <a:rPr sz="2000" b="0" i="0">
                 <a:solidFill>
                   <a:srgbClr val="34404A"/>
                 </a:solidFill>
@@ -24367,7 +24367,7 @@
           <a:lstStyle/>
           <a:p>
             <a:r>
-              <a:rPr sz="2500" b="1" i="0">
+              <a:rPr sz="2075" b="1" i="0">
                 <a:solidFill>
                   <a:srgbClr val="1F4E3D"/>
                 </a:solidFill>
@@ -24377,7 +24377,7 @@
           </a:p>
           <a:p>
             <a:r>
-              <a:rPr sz="2400" b="0" i="0">
+              <a:rPr sz="2000" b="0" i="0">
                 <a:solidFill>
                   <a:srgbClr val="34404A"/>
                 </a:solidFill>
@@ -24484,7 +24484,7 @@
           <a:lstStyle/>
           <a:p>
             <a:r>
-              <a:rPr sz="2500" b="1" i="0">
+              <a:rPr sz="2075" b="1" i="0">
                 <a:solidFill>
                   <a:srgbClr val="1F4E3D"/>
                 </a:solidFill>
@@ -24494,7 +24494,7 @@
           </a:p>
           <a:p>
             <a:r>
-              <a:rPr sz="2400" b="0" i="0">
+              <a:rPr sz="2000" b="0" i="0">
                 <a:solidFill>
                   <a:srgbClr val="34404A"/>
                 </a:solidFill>
@@ -24641,7 +24641,7 @@
           <a:lstStyle/>
           <a:p>
             <a:r>
-              <a:rPr sz="2400" b="1" i="0">
+              <a:rPr sz="2000" b="1" i="0">
                 <a:solidFill>
                   <a:srgbClr val="C88A2E"/>
                 </a:solidFill>
@@ -24879,7 +24879,7 @@
           <a:p>
             <a:pPr algn="ctr"/>
             <a:r>
-              <a:rPr sz="2400" b="0" i="1">
+              <a:rPr sz="2000" b="0" i="1">
                 <a:solidFill>
                   <a:srgbClr val="5B6E66"/>
                 </a:solidFill>

--- a/SuHeo/Báo cáo thực tập - Sơn Hải Vân.pptx
+++ b/SuHeo/Báo cáo thực tập - Sơn Hải Vân.pptx
@@ -3178,7 +3178,7 @@
           <a:blip r:embed="rId2">
             <a:extLst>
               <a:ext uri="{96DAC541-7B7A-43D3-8B79-37D633B846F1}">
-                <ns0:svgBlip xmlns:ns0="http://schemas.microsoft.com/office/drawing/2016/SVG/main" r:embed="rId7"/>
+                <ns0:svgBlip xmlns:ns0="http://schemas.microsoft.com/office/drawing/2016/SVG/main" r:embed="rId5"/>
               </a:ext>
             </a:extLst>
           </a:blip>
@@ -3241,7 +3241,7 @@
           <a:blip r:embed="rId3">
             <a:extLst>
               <a:ext uri="{96DAC541-7B7A-43D3-8B79-37D633B846F1}">
-                <ns1:svgBlip xmlns:ns1="http://schemas.microsoft.com/office/drawing/2016/SVG/main" r:embed="rId6"/>
+                <ns1:svgBlip xmlns:ns1="http://schemas.microsoft.com/office/drawing/2016/SVG/main" r:embed="rId4"/>
               </a:ext>
             </a:extLst>
           </a:blip>
@@ -3259,39 +3259,9 @@
           </a:prstGeom>
         </p:spPr>
       </p:pic>
-      <p:pic>
-        <p:nvPicPr>
-          <p:cNvPr id="6" name="Picture 5" descr="deco_drip_white.png"/>
-          <p:cNvPicPr>
-            <a:picLocks noChangeAspect="1"/>
-          </p:cNvPicPr>
-          <p:nvPr/>
-        </p:nvPicPr>
-        <p:blipFill>
-          <a:blip r:embed="rId4">
-            <a:extLst>
-              <a:ext uri="{96DAC541-7B7A-43D3-8B79-37D633B846F1}">
-                <ns2:svgBlip xmlns:ns2="http://schemas.microsoft.com/office/drawing/2016/SVG/main" r:embed="rId5"/>
-              </a:ext>
-            </a:extLst>
-          </a:blip>
-          <a:stretch>
-            <a:fillRect/>
-          </a:stretch>
-        </p:blipFill>
-        <p:spPr>
-          <a:xfrm>
-            <a:off x="11150000" y="5550000"/>
-            <a:ext cx="720000" cy="960000"/>
-          </a:xfrm>
-          <a:prstGeom prst="rect">
-            <a:avLst/>
-          </a:prstGeom>
-        </p:spPr>
-      </p:pic>
-      <p:sp>
-        <p:nvSpPr>
-          <p:cNvPr id="7" name="TextBox 6"/>
+      <p:sp>
+        <p:nvSpPr>
+          <p:cNvPr id="6" name="TextBox 5"/>
           <p:cNvSpPr txBox="1"/>
           <p:nvPr/>
         </p:nvSpPr>
@@ -3324,7 +3294,7 @@
       </p:sp>
       <p:sp>
         <p:nvSpPr>
-          <p:cNvPr id="8" name="TextBox 7"/>
+          <p:cNvPr id="7" name="TextBox 6"/>
           <p:cNvSpPr txBox="1"/>
           <p:nvPr/>
         </p:nvSpPr>
@@ -3367,7 +3337,7 @@
       </p:sp>
       <p:sp>
         <p:nvSpPr>
-          <p:cNvPr id="9" name="TextBox 8"/>
+          <p:cNvPr id="8" name="TextBox 7"/>
           <p:cNvSpPr txBox="1"/>
           <p:nvPr/>
         </p:nvSpPr>
@@ -3400,7 +3370,7 @@
       </p:sp>
       <p:sp>
         <p:nvSpPr>
-          <p:cNvPr id="10" name="TextBox 9"/>
+          <p:cNvPr id="9" name="TextBox 8"/>
           <p:cNvSpPr txBox="1"/>
           <p:nvPr/>
         </p:nvSpPr>
@@ -5045,7 +5015,7 @@
           <a:blip r:embed="rId2">
             <a:extLst>
               <a:ext uri="{96DAC541-7B7A-43D3-8B79-37D633B846F1}">
-                <ns0:svgBlip xmlns:ns0="http://schemas.microsoft.com/office/drawing/2016/SVG/main" r:embed="rId6"/>
+                <ns0:svgBlip xmlns:ns0="http://schemas.microsoft.com/office/drawing/2016/SVG/main" r:embed="rId4"/>
               </a:ext>
             </a:extLst>
           </a:blip>
@@ -5108,7 +5078,7 @@
           <a:blip r:embed="rId3">
             <a:extLst>
               <a:ext uri="{96DAC541-7B7A-43D3-8B79-37D633B846F1}">
-                <ns1:svgBlip xmlns:ns1="http://schemas.microsoft.com/office/drawing/2016/SVG/main" r:embed="rId7"/>
+                <ns1:svgBlip xmlns:ns1="http://schemas.microsoft.com/office/drawing/2016/SVG/main" r:embed="rId5"/>
               </a:ext>
             </a:extLst>
           </a:blip>
@@ -5126,39 +5096,9 @@
           </a:prstGeom>
         </p:spPr>
       </p:pic>
-      <p:pic>
-        <p:nvPicPr>
-          <p:cNvPr id="6" name="Picture 5" descr="deco_drip_white.png"/>
-          <p:cNvPicPr>
-            <a:picLocks noChangeAspect="1"/>
-          </p:cNvPicPr>
-          <p:nvPr/>
-        </p:nvPicPr>
-        <p:blipFill>
-          <a:blip r:embed="rId4">
-            <a:extLst>
-              <a:ext uri="{96DAC541-7B7A-43D3-8B79-37D633B846F1}">
-                <ns2:svgBlip xmlns:ns2="http://schemas.microsoft.com/office/drawing/2016/SVG/main" r:embed="rId5"/>
-              </a:ext>
-            </a:extLst>
-          </a:blip>
-          <a:stretch>
-            <a:fillRect/>
-          </a:stretch>
-        </p:blipFill>
-        <p:spPr>
-          <a:xfrm>
-            <a:off x="780000" y="4820000"/>
-            <a:ext cx="880000" cy="1180000"/>
-          </a:xfrm>
-          <a:prstGeom prst="rect">
-            <a:avLst/>
-          </a:prstGeom>
-        </p:spPr>
-      </p:pic>
-      <p:sp>
-        <p:nvSpPr>
-          <p:cNvPr id="7" name="Rounded Rectangle 6"/>
+      <p:sp>
+        <p:nvSpPr>
+          <p:cNvPr id="6" name="Rounded Rectangle 5"/>
           <p:cNvSpPr/>
           <p:nvPr/>
         </p:nvSpPr>
@@ -5202,7 +5142,7 @@
       </p:sp>
       <p:sp>
         <p:nvSpPr>
-          <p:cNvPr id="8" name="Oval 7"/>
+          <p:cNvPr id="7" name="Oval 6"/>
           <p:cNvSpPr/>
           <p:nvPr/>
         </p:nvSpPr>
@@ -5254,7 +5194,7 @@
       </p:sp>
       <p:sp>
         <p:nvSpPr>
-          <p:cNvPr id="9" name="TextBox 8"/>
+          <p:cNvPr id="8" name="TextBox 7"/>
           <p:cNvSpPr txBox="1"/>
           <p:nvPr/>
         </p:nvSpPr>
@@ -5287,7 +5227,7 @@
       </p:sp>
       <p:sp>
         <p:nvSpPr>
-          <p:cNvPr id="10" name="TextBox 9"/>
+          <p:cNvPr id="9" name="TextBox 8"/>
           <p:cNvSpPr txBox="1"/>
           <p:nvPr/>
         </p:nvSpPr>
@@ -7459,20 +7399,20 @@
       </p:sp>
       <p:sp>
         <p:nvSpPr>
-          <p:cNvPr id="12" name="Rounded Rectangle 11"/>
+          <p:cNvPr id="12" name="Rectangle 11"/>
           <p:cNvSpPr/>
           <p:nvPr/>
         </p:nvSpPr>
         <p:spPr>
           <a:xfrm>
-            <a:off x="548640" y="1830000"/>
-            <a:ext cx="11090000" cy="1336666"/>
-          </a:xfrm>
-          <a:prstGeom prst="roundRect">
+            <a:off x="925000" y="2575000"/>
+            <a:ext cx="30000" cy="2980000"/>
+          </a:xfrm>
+          <a:prstGeom prst="rect">
             <a:avLst/>
           </a:prstGeom>
           <a:solidFill>
-            <a:srgbClr val="EEF4F0"/>
+            <a:srgbClr val="CFE2D8"/>
           </a:solidFill>
           <a:ln>
             <a:noFill/>
@@ -7503,16 +7443,16 @@
       </p:sp>
       <p:sp>
         <p:nvSpPr>
-          <p:cNvPr id="13" name="Rounded Rectangle 12"/>
+          <p:cNvPr id="13" name="Oval 12"/>
           <p:cNvSpPr/>
           <p:nvPr/>
         </p:nvSpPr>
         <p:spPr>
           <a:xfrm>
-            <a:off x="548640" y="1830000"/>
-            <a:ext cx="80000" cy="1336666"/>
-          </a:xfrm>
-          <a:prstGeom prst="roundRect">
+            <a:off x="700000" y="2330000"/>
+            <a:ext cx="490000" cy="490000"/>
+          </a:xfrm>
+          <a:prstGeom prst="ellipse">
             <a:avLst/>
           </a:prstGeom>
           <a:solidFill>
@@ -7542,6 +7482,14 @@
           <a:lstStyle/>
           <a:p>
             <a:pPr algn="ctr"/>
+            <a:r>
+              <a:rPr sz="2200" b="1" i="0">
+                <a:solidFill>
+                  <a:srgbClr val="FFFFFF"/>
+                </a:solidFill>
+              </a:rPr>
+              <a:t>1</a:t>
+            </a:r>
           </a:p>
         </p:txBody>
       </p:sp>
@@ -7553,8 +7501,8 @@
         </p:nvSpPr>
         <p:spPr>
           <a:xfrm>
-            <a:off x="848640" y="2168333"/>
-            <a:ext cx="660000" cy="660000"/>
+            <a:off x="1400000" y="2277000"/>
+            <a:ext cx="596000" cy="596000"/>
           </a:xfrm>
           <a:prstGeom prst="ellipse">
             <a:avLst/>
@@ -7611,8 +7559,8 @@
         </p:blipFill>
         <p:spPr>
           <a:xfrm>
-            <a:off x="980640" y="2300333"/>
-            <a:ext cx="396000" cy="396000"/>
+            <a:off x="1519200" y="2396200"/>
+            <a:ext cx="357600" cy="357600"/>
           </a:xfrm>
           <a:prstGeom prst="rect">
             <a:avLst/>
@@ -7627,8 +7575,8 @@
         </p:nvSpPr>
         <p:spPr>
           <a:xfrm>
-            <a:off x="1848640" y="1830000"/>
-            <a:ext cx="9130000" cy="1336666"/>
+            <a:off x="2296000" y="1830000"/>
+            <a:ext cx="8600000" cy="1490000"/>
           </a:xfrm>
           <a:prstGeom prst="rect">
             <a:avLst/>
@@ -7642,12 +7590,12 @@
           <a:lstStyle/>
           <a:p>
             <a:r>
-              <a:rPr sz="2158" b="1" i="0">
+              <a:rPr sz="2075" b="1" i="0">
                 <a:solidFill>
                   <a:srgbClr val="1F4E3D"/>
                 </a:solidFill>
               </a:rPr>
-              <a:t>1 · Định lượng</a:t>
+              <a:t>Định lượng</a:t>
             </a:r>
           </a:p>
           <a:p>
@@ -7674,60 +7622,16 @@
       </p:sp>
       <p:sp>
         <p:nvSpPr>
-          <p:cNvPr id="17" name="Rounded Rectangle 16"/>
+          <p:cNvPr id="17" name="Oval 16"/>
           <p:cNvSpPr/>
           <p:nvPr/>
         </p:nvSpPr>
         <p:spPr>
           <a:xfrm>
-            <a:off x="548640" y="3396666"/>
-            <a:ext cx="11090000" cy="1336666"/>
-          </a:xfrm>
-          <a:prstGeom prst="roundRect">
-            <a:avLst/>
-          </a:prstGeom>
-          <a:solidFill>
-            <a:srgbClr val="EEF4F0"/>
-          </a:solidFill>
-          <a:ln>
-            <a:noFill/>
-          </a:ln>
-          <a:effectLst/>
-        </p:spPr>
-        <p:style>
-          <a:lnRef idx="1">
-            <a:schemeClr val="accent1"/>
-          </a:lnRef>
-          <a:fillRef idx="3">
-            <a:schemeClr val="accent1"/>
-          </a:fillRef>
-          <a:effectRef idx="2">
-            <a:schemeClr val="accent1"/>
-          </a:effectRef>
-          <a:fontRef idx="minor">
-            <a:schemeClr val="lt1"/>
-          </a:fontRef>
-        </p:style>
-        <p:txBody>
-          <a:bodyPr rtlCol="0" anchor="ctr"/>
-          <a:lstStyle/>
-          <a:p>
-            <a:pPr algn="ctr"/>
-          </a:p>
-        </p:txBody>
-      </p:sp>
-      <p:sp>
-        <p:nvSpPr>
-          <p:cNvPr id="18" name="Rounded Rectangle 17"/>
-          <p:cNvSpPr/>
-          <p:nvPr/>
-        </p:nvSpPr>
-        <p:spPr>
-          <a:xfrm>
-            <a:off x="548640" y="3396666"/>
-            <a:ext cx="80000" cy="1336666"/>
-          </a:xfrm>
-          <a:prstGeom prst="roundRect">
+            <a:off x="700000" y="3820000"/>
+            <a:ext cx="490000" cy="490000"/>
+          </a:xfrm>
+          <a:prstGeom prst="ellipse">
             <a:avLst/>
           </a:prstGeom>
           <a:solidFill>
@@ -7757,19 +7661,27 @@
           <a:lstStyle/>
           <a:p>
             <a:pPr algn="ctr"/>
-          </a:p>
-        </p:txBody>
-      </p:sp>
-      <p:sp>
-        <p:nvSpPr>
-          <p:cNvPr id="19" name="Oval 18"/>
+            <a:r>
+              <a:rPr sz="2200" b="1" i="0">
+                <a:solidFill>
+                  <a:srgbClr val="FFFFFF"/>
+                </a:solidFill>
+              </a:rPr>
+              <a:t>2</a:t>
+            </a:r>
+          </a:p>
+        </p:txBody>
+      </p:sp>
+      <p:sp>
+        <p:nvSpPr>
+          <p:cNvPr id="18" name="Oval 17"/>
           <p:cNvSpPr/>
           <p:nvPr/>
         </p:nvSpPr>
         <p:spPr>
           <a:xfrm>
-            <a:off x="848640" y="3734999"/>
-            <a:ext cx="660000" cy="660000"/>
+            <a:off x="1400000" y="3767000"/>
+            <a:ext cx="596000" cy="596000"/>
           </a:xfrm>
           <a:prstGeom prst="ellipse">
             <a:avLst/>
@@ -7806,7 +7718,7 @@
       </p:sp>
       <p:pic>
         <p:nvPicPr>
-          <p:cNvPr id="20" name="Picture 19" descr="danh_paste_w.png"/>
+          <p:cNvPr id="19" name="Picture 18" descr="danh_paste_w.png"/>
           <p:cNvPicPr>
             <a:picLocks noChangeAspect="1"/>
           </p:cNvPicPr>
@@ -7826,8 +7738,8 @@
         </p:blipFill>
         <p:spPr>
           <a:xfrm>
-            <a:off x="980640" y="3866999"/>
-            <a:ext cx="396000" cy="396000"/>
+            <a:off x="1519200" y="3886200"/>
+            <a:ext cx="357600" cy="357600"/>
           </a:xfrm>
           <a:prstGeom prst="rect">
             <a:avLst/>
@@ -7836,14 +7748,14 @@
       </p:pic>
       <p:sp>
         <p:nvSpPr>
-          <p:cNvPr id="21" name="TextBox 20"/>
+          <p:cNvPr id="20" name="TextBox 19"/>
           <p:cNvSpPr txBox="1"/>
           <p:nvPr/>
         </p:nvSpPr>
         <p:spPr>
           <a:xfrm>
-            <a:off x="1848640" y="3396666"/>
-            <a:ext cx="9130000" cy="1336666"/>
+            <a:off x="2296000" y="3320000"/>
+            <a:ext cx="8600000" cy="1490000"/>
           </a:xfrm>
           <a:prstGeom prst="rect">
             <a:avLst/>
@@ -7857,12 +7769,12 @@
           <a:lstStyle/>
           <a:p>
             <a:r>
-              <a:rPr sz="2158" b="1" i="0">
+              <a:rPr sz="2075" b="1" i="0">
                 <a:solidFill>
                   <a:srgbClr val="1F4E3D"/>
                 </a:solidFill>
               </a:rPr>
-              <a:t>2 · Đánh paste</a:t>
+              <a:t>Đánh paste</a:t>
             </a:r>
           </a:p>
           <a:p>
@@ -7889,60 +7801,16 @@
       </p:sp>
       <p:sp>
         <p:nvSpPr>
-          <p:cNvPr id="22" name="Rounded Rectangle 21"/>
+          <p:cNvPr id="21" name="Oval 20"/>
           <p:cNvSpPr/>
           <p:nvPr/>
         </p:nvSpPr>
         <p:spPr>
           <a:xfrm>
-            <a:off x="548640" y="4963332"/>
-            <a:ext cx="11090000" cy="1336666"/>
-          </a:xfrm>
-          <a:prstGeom prst="roundRect">
-            <a:avLst/>
-          </a:prstGeom>
-          <a:solidFill>
-            <a:srgbClr val="EEF4F0"/>
-          </a:solidFill>
-          <a:ln>
-            <a:noFill/>
-          </a:ln>
-          <a:effectLst/>
-        </p:spPr>
-        <p:style>
-          <a:lnRef idx="1">
-            <a:schemeClr val="accent1"/>
-          </a:lnRef>
-          <a:fillRef idx="3">
-            <a:schemeClr val="accent1"/>
-          </a:fillRef>
-          <a:effectRef idx="2">
-            <a:schemeClr val="accent1"/>
-          </a:effectRef>
-          <a:fontRef idx="minor">
-            <a:schemeClr val="lt1"/>
-          </a:fontRef>
-        </p:style>
-        <p:txBody>
-          <a:bodyPr rtlCol="0" anchor="ctr"/>
-          <a:lstStyle/>
-          <a:p>
-            <a:pPr algn="ctr"/>
-          </a:p>
-        </p:txBody>
-      </p:sp>
-      <p:sp>
-        <p:nvSpPr>
-          <p:cNvPr id="23" name="Rounded Rectangle 22"/>
-          <p:cNvSpPr/>
-          <p:nvPr/>
-        </p:nvSpPr>
-        <p:spPr>
-          <a:xfrm>
-            <a:off x="548640" y="4963332"/>
-            <a:ext cx="80000" cy="1336666"/>
-          </a:xfrm>
-          <a:prstGeom prst="roundRect">
+            <a:off x="700000" y="5310000"/>
+            <a:ext cx="490000" cy="490000"/>
+          </a:xfrm>
+          <a:prstGeom prst="ellipse">
             <a:avLst/>
           </a:prstGeom>
           <a:solidFill>
@@ -7972,19 +7840,27 @@
           <a:lstStyle/>
           <a:p>
             <a:pPr algn="ctr"/>
-          </a:p>
-        </p:txBody>
-      </p:sp>
-      <p:sp>
-        <p:nvSpPr>
-          <p:cNvPr id="24" name="Oval 23"/>
+            <a:r>
+              <a:rPr sz="2200" b="1" i="0">
+                <a:solidFill>
+                  <a:srgbClr val="FFFFFF"/>
+                </a:solidFill>
+              </a:rPr>
+              <a:t>3</a:t>
+            </a:r>
+          </a:p>
+        </p:txBody>
+      </p:sp>
+      <p:sp>
+        <p:nvSpPr>
+          <p:cNvPr id="22" name="Oval 21"/>
           <p:cNvSpPr/>
           <p:nvPr/>
         </p:nvSpPr>
         <p:spPr>
           <a:xfrm>
-            <a:off x="848640" y="5301665"/>
-            <a:ext cx="660000" cy="660000"/>
+            <a:off x="1400000" y="5257000"/>
+            <a:ext cx="596000" cy="596000"/>
           </a:xfrm>
           <a:prstGeom prst="ellipse">
             <a:avLst/>
@@ -8021,7 +7897,7 @@
       </p:sp>
       <p:pic>
         <p:nvPicPr>
-          <p:cNvPr id="25" name="Picture 24" descr="nghien_min_w.png"/>
+          <p:cNvPr id="23" name="Picture 22" descr="nghien_min_w.png"/>
           <p:cNvPicPr>
             <a:picLocks noChangeAspect="1"/>
           </p:cNvPicPr>
@@ -8041,8 +7917,8 @@
         </p:blipFill>
         <p:spPr>
           <a:xfrm>
-            <a:off x="980640" y="5433665"/>
-            <a:ext cx="396000" cy="396000"/>
+            <a:off x="1519200" y="5376200"/>
+            <a:ext cx="357600" cy="357600"/>
           </a:xfrm>
           <a:prstGeom prst="rect">
             <a:avLst/>
@@ -8051,14 +7927,14 @@
       </p:pic>
       <p:sp>
         <p:nvSpPr>
-          <p:cNvPr id="26" name="TextBox 25"/>
+          <p:cNvPr id="24" name="TextBox 23"/>
           <p:cNvSpPr txBox="1"/>
           <p:nvPr/>
         </p:nvSpPr>
         <p:spPr>
           <a:xfrm>
-            <a:off x="1848640" y="4963332"/>
-            <a:ext cx="9130000" cy="1336666"/>
+            <a:off x="2296000" y="4810000"/>
+            <a:ext cx="8600000" cy="1490000"/>
           </a:xfrm>
           <a:prstGeom prst="rect">
             <a:avLst/>
@@ -8072,12 +7948,12 @@
           <a:lstStyle/>
           <a:p>
             <a:r>
-              <a:rPr sz="2158" b="1" i="0">
+              <a:rPr sz="2075" b="1" i="0">
                 <a:solidFill>
                   <a:srgbClr val="1F4E3D"/>
                 </a:solidFill>
               </a:rPr>
-              <a:t>3 · Nghiền mịn</a:t>
+              <a:t>Nghiền mịn</a:t>
             </a:r>
           </a:p>
           <a:p>
@@ -8485,20 +8361,20 @@
       </p:sp>
       <p:sp>
         <p:nvSpPr>
-          <p:cNvPr id="12" name="Rounded Rectangle 11"/>
+          <p:cNvPr id="12" name="Rectangle 11"/>
           <p:cNvSpPr/>
           <p:nvPr/>
         </p:nvSpPr>
         <p:spPr>
           <a:xfrm>
-            <a:off x="548640" y="1830000"/>
-            <a:ext cx="11090000" cy="1336666"/>
-          </a:xfrm>
-          <a:prstGeom prst="roundRect">
+            <a:off x="925000" y="2575000"/>
+            <a:ext cx="30000" cy="2980000"/>
+          </a:xfrm>
+          <a:prstGeom prst="rect">
             <a:avLst/>
           </a:prstGeom>
           <a:solidFill>
-            <a:srgbClr val="EEF4F0"/>
+            <a:srgbClr val="CFE2D8"/>
           </a:solidFill>
           <a:ln>
             <a:noFill/>
@@ -8529,16 +8405,16 @@
       </p:sp>
       <p:sp>
         <p:nvSpPr>
-          <p:cNvPr id="13" name="Rounded Rectangle 12"/>
+          <p:cNvPr id="13" name="Oval 12"/>
           <p:cNvSpPr/>
           <p:nvPr/>
         </p:nvSpPr>
         <p:spPr>
           <a:xfrm>
-            <a:off x="548640" y="1830000"/>
-            <a:ext cx="80000" cy="1336666"/>
-          </a:xfrm>
-          <a:prstGeom prst="roundRect">
+            <a:off x="700000" y="2330000"/>
+            <a:ext cx="490000" cy="490000"/>
+          </a:xfrm>
+          <a:prstGeom prst="ellipse">
             <a:avLst/>
           </a:prstGeom>
           <a:solidFill>
@@ -8568,6 +8444,14 @@
           <a:lstStyle/>
           <a:p>
             <a:pPr algn="ctr"/>
+            <a:r>
+              <a:rPr sz="2200" b="1" i="0">
+                <a:solidFill>
+                  <a:srgbClr val="FFFFFF"/>
+                </a:solidFill>
+              </a:rPr>
+              <a:t>4</a:t>
+            </a:r>
           </a:p>
         </p:txBody>
       </p:sp>
@@ -8579,8 +8463,8 @@
         </p:nvSpPr>
         <p:spPr>
           <a:xfrm>
-            <a:off x="848640" y="2168333"/>
-            <a:ext cx="660000" cy="660000"/>
+            <a:off x="1400000" y="2277000"/>
+            <a:ext cx="596000" cy="596000"/>
           </a:xfrm>
           <a:prstGeom prst="ellipse">
             <a:avLst/>
@@ -8637,8 +8521,8 @@
         </p:blipFill>
         <p:spPr>
           <a:xfrm>
-            <a:off x="980640" y="2300333"/>
-            <a:ext cx="396000" cy="396000"/>
+            <a:off x="1519200" y="2396200"/>
+            <a:ext cx="357600" cy="357600"/>
           </a:xfrm>
           <a:prstGeom prst="rect">
             <a:avLst/>
@@ -8653,8 +8537,8 @@
         </p:nvSpPr>
         <p:spPr>
           <a:xfrm>
-            <a:off x="1848640" y="1830000"/>
-            <a:ext cx="9130000" cy="1336666"/>
+            <a:off x="2296000" y="1830000"/>
+            <a:ext cx="8600000" cy="1490000"/>
           </a:xfrm>
           <a:prstGeom prst="rect">
             <a:avLst/>
@@ -8668,12 +8552,12 @@
           <a:lstStyle/>
           <a:p>
             <a:r>
-              <a:rPr sz="2158" b="1" i="0">
+              <a:rPr sz="2075" b="1" i="0">
                 <a:solidFill>
                   <a:srgbClr val="1F4E3D"/>
                 </a:solidFill>
               </a:rPr>
-              <a:t>4 · Ngâm ủ</a:t>
+              <a:t>Ngâm ủ</a:t>
             </a:r>
           </a:p>
           <a:p>
@@ -8700,60 +8584,16 @@
       </p:sp>
       <p:sp>
         <p:nvSpPr>
-          <p:cNvPr id="17" name="Rounded Rectangle 16"/>
+          <p:cNvPr id="17" name="Oval 16"/>
           <p:cNvSpPr/>
           <p:nvPr/>
         </p:nvSpPr>
         <p:spPr>
           <a:xfrm>
-            <a:off x="548640" y="3396666"/>
-            <a:ext cx="11090000" cy="1336666"/>
-          </a:xfrm>
-          <a:prstGeom prst="roundRect">
-            <a:avLst/>
-          </a:prstGeom>
-          <a:solidFill>
-            <a:srgbClr val="EEF4F0"/>
-          </a:solidFill>
-          <a:ln>
-            <a:noFill/>
-          </a:ln>
-          <a:effectLst/>
-        </p:spPr>
-        <p:style>
-          <a:lnRef idx="1">
-            <a:schemeClr val="accent1"/>
-          </a:lnRef>
-          <a:fillRef idx="3">
-            <a:schemeClr val="accent1"/>
-          </a:fillRef>
-          <a:effectRef idx="2">
-            <a:schemeClr val="accent1"/>
-          </a:effectRef>
-          <a:fontRef idx="minor">
-            <a:schemeClr val="lt1"/>
-          </a:fontRef>
-        </p:style>
-        <p:txBody>
-          <a:bodyPr rtlCol="0" anchor="ctr"/>
-          <a:lstStyle/>
-          <a:p>
-            <a:pPr algn="ctr"/>
-          </a:p>
-        </p:txBody>
-      </p:sp>
-      <p:sp>
-        <p:nvSpPr>
-          <p:cNvPr id="18" name="Rounded Rectangle 17"/>
-          <p:cNvSpPr/>
-          <p:nvPr/>
-        </p:nvSpPr>
-        <p:spPr>
-          <a:xfrm>
-            <a:off x="548640" y="3396666"/>
-            <a:ext cx="80000" cy="1336666"/>
-          </a:xfrm>
-          <a:prstGeom prst="roundRect">
+            <a:off x="700000" y="3820000"/>
+            <a:ext cx="490000" cy="490000"/>
+          </a:xfrm>
+          <a:prstGeom prst="ellipse">
             <a:avLst/>
           </a:prstGeom>
           <a:solidFill>
@@ -8783,19 +8623,27 @@
           <a:lstStyle/>
           <a:p>
             <a:pPr algn="ctr"/>
-          </a:p>
-        </p:txBody>
-      </p:sp>
-      <p:sp>
-        <p:nvSpPr>
-          <p:cNvPr id="19" name="Oval 18"/>
+            <a:r>
+              <a:rPr sz="2200" b="1" i="0">
+                <a:solidFill>
+                  <a:srgbClr val="FFFFFF"/>
+                </a:solidFill>
+              </a:rPr>
+              <a:t>5</a:t>
+            </a:r>
+          </a:p>
+        </p:txBody>
+      </p:sp>
+      <p:sp>
+        <p:nvSpPr>
+          <p:cNvPr id="18" name="Oval 17"/>
           <p:cNvSpPr/>
           <p:nvPr/>
         </p:nvSpPr>
         <p:spPr>
           <a:xfrm>
-            <a:off x="848640" y="3734999"/>
-            <a:ext cx="660000" cy="660000"/>
+            <a:off x="1400000" y="3767000"/>
+            <a:ext cx="596000" cy="596000"/>
           </a:xfrm>
           <a:prstGeom prst="ellipse">
             <a:avLst/>
@@ -8832,7 +8680,7 @@
       </p:sp>
       <p:pic>
         <p:nvPicPr>
-          <p:cNvPr id="20" name="Picture 19" descr="pha_loang_w.png"/>
+          <p:cNvPr id="19" name="Picture 18" descr="pha_loang_w.png"/>
           <p:cNvPicPr>
             <a:picLocks noChangeAspect="1"/>
           </p:cNvPicPr>
@@ -8852,8 +8700,8 @@
         </p:blipFill>
         <p:spPr>
           <a:xfrm>
-            <a:off x="980640" y="3866999"/>
-            <a:ext cx="396000" cy="396000"/>
+            <a:off x="1519200" y="3886200"/>
+            <a:ext cx="357600" cy="357600"/>
           </a:xfrm>
           <a:prstGeom prst="rect">
             <a:avLst/>
@@ -8862,14 +8710,14 @@
       </p:pic>
       <p:sp>
         <p:nvSpPr>
-          <p:cNvPr id="21" name="TextBox 20"/>
+          <p:cNvPr id="20" name="TextBox 19"/>
           <p:cNvSpPr txBox="1"/>
           <p:nvPr/>
         </p:nvSpPr>
         <p:spPr>
           <a:xfrm>
-            <a:off x="1848640" y="3396666"/>
-            <a:ext cx="9130000" cy="1336666"/>
+            <a:off x="2296000" y="3320000"/>
+            <a:ext cx="8600000" cy="1490000"/>
           </a:xfrm>
           <a:prstGeom prst="rect">
             <a:avLst/>
@@ -8883,12 +8731,12 @@
           <a:lstStyle/>
           <a:p>
             <a:r>
-              <a:rPr sz="2158" b="1" i="0">
+              <a:rPr sz="2075" b="1" i="0">
                 <a:solidFill>
                   <a:srgbClr val="1F4E3D"/>
                 </a:solidFill>
               </a:rPr>
-              <a:t>5 · Pha loãng</a:t>
+              <a:t>Pha loãng</a:t>
             </a:r>
           </a:p>
           <a:p>
@@ -8915,60 +8763,16 @@
       </p:sp>
       <p:sp>
         <p:nvSpPr>
-          <p:cNvPr id="22" name="Rounded Rectangle 21"/>
+          <p:cNvPr id="21" name="Oval 20"/>
           <p:cNvSpPr/>
           <p:nvPr/>
         </p:nvSpPr>
         <p:spPr>
           <a:xfrm>
-            <a:off x="548640" y="4963332"/>
-            <a:ext cx="11090000" cy="1336666"/>
-          </a:xfrm>
-          <a:prstGeom prst="roundRect">
-            <a:avLst/>
-          </a:prstGeom>
-          <a:solidFill>
-            <a:srgbClr val="EEF4F0"/>
-          </a:solidFill>
-          <a:ln>
-            <a:noFill/>
-          </a:ln>
-          <a:effectLst/>
-        </p:spPr>
-        <p:style>
-          <a:lnRef idx="1">
-            <a:schemeClr val="accent1"/>
-          </a:lnRef>
-          <a:fillRef idx="3">
-            <a:schemeClr val="accent1"/>
-          </a:fillRef>
-          <a:effectRef idx="2">
-            <a:schemeClr val="accent1"/>
-          </a:effectRef>
-          <a:fontRef idx="minor">
-            <a:schemeClr val="lt1"/>
-          </a:fontRef>
-        </p:style>
-        <p:txBody>
-          <a:bodyPr rtlCol="0" anchor="ctr"/>
-          <a:lstStyle/>
-          <a:p>
-            <a:pPr algn="ctr"/>
-          </a:p>
-        </p:txBody>
-      </p:sp>
-      <p:sp>
-        <p:nvSpPr>
-          <p:cNvPr id="23" name="Rounded Rectangle 22"/>
-          <p:cNvSpPr/>
-          <p:nvPr/>
-        </p:nvSpPr>
-        <p:spPr>
-          <a:xfrm>
-            <a:off x="548640" y="4963332"/>
-            <a:ext cx="80000" cy="1336666"/>
-          </a:xfrm>
-          <a:prstGeom prst="roundRect">
+            <a:off x="700000" y="5310000"/>
+            <a:ext cx="490000" cy="490000"/>
+          </a:xfrm>
+          <a:prstGeom prst="ellipse">
             <a:avLst/>
           </a:prstGeom>
           <a:solidFill>
@@ -8998,19 +8802,27 @@
           <a:lstStyle/>
           <a:p>
             <a:pPr algn="ctr"/>
-          </a:p>
-        </p:txBody>
-      </p:sp>
-      <p:sp>
-        <p:nvSpPr>
-          <p:cNvPr id="24" name="Oval 23"/>
+            <a:r>
+              <a:rPr sz="2200" b="1" i="0">
+                <a:solidFill>
+                  <a:srgbClr val="FFFFFF"/>
+                </a:solidFill>
+              </a:rPr>
+              <a:t>6</a:t>
+            </a:r>
+          </a:p>
+        </p:txBody>
+      </p:sp>
+      <p:sp>
+        <p:nvSpPr>
+          <p:cNvPr id="22" name="Oval 21"/>
           <p:cNvSpPr/>
           <p:nvPr/>
         </p:nvSpPr>
         <p:spPr>
           <a:xfrm>
-            <a:off x="848640" y="5301665"/>
-            <a:ext cx="660000" cy="660000"/>
+            <a:off x="1400000" y="5257000"/>
+            <a:ext cx="596000" cy="596000"/>
           </a:xfrm>
           <a:prstGeom prst="ellipse">
             <a:avLst/>
@@ -9047,7 +8859,7 @@
       </p:sp>
       <p:pic>
         <p:nvPicPr>
-          <p:cNvPr id="25" name="Picture 24" descr="loc_donggoi_w.png"/>
+          <p:cNvPr id="23" name="Picture 22" descr="loc_donggoi_w.png"/>
           <p:cNvPicPr>
             <a:picLocks noChangeAspect="1"/>
           </p:cNvPicPr>
@@ -9067,8 +8879,8 @@
         </p:blipFill>
         <p:spPr>
           <a:xfrm>
-            <a:off x="980640" y="5433665"/>
-            <a:ext cx="396000" cy="396000"/>
+            <a:off x="1519200" y="5376200"/>
+            <a:ext cx="357600" cy="357600"/>
           </a:xfrm>
           <a:prstGeom prst="rect">
             <a:avLst/>
@@ -9077,14 +8889,14 @@
       </p:pic>
       <p:sp>
         <p:nvSpPr>
-          <p:cNvPr id="26" name="TextBox 25"/>
+          <p:cNvPr id="24" name="TextBox 23"/>
           <p:cNvSpPr txBox="1"/>
           <p:nvPr/>
         </p:nvSpPr>
         <p:spPr>
           <a:xfrm>
-            <a:off x="1848640" y="4963332"/>
-            <a:ext cx="9130000" cy="1336666"/>
+            <a:off x="2296000" y="4810000"/>
+            <a:ext cx="8600000" cy="1490000"/>
           </a:xfrm>
           <a:prstGeom prst="rect">
             <a:avLst/>
@@ -9098,12 +8910,12 @@
           <a:lstStyle/>
           <a:p>
             <a:r>
-              <a:rPr sz="2158" b="1" i="0">
+              <a:rPr sz="2075" b="1" i="0">
                 <a:solidFill>
                   <a:srgbClr val="1F4E3D"/>
                 </a:solidFill>
               </a:rPr>
-              <a:t>6 · Lọc &amp; đóng gói</a:t>
+              <a:t>Lọc &amp; đóng gói</a:t>
             </a:r>
           </a:p>
           <a:p>
@@ -11942,16 +11754,60 @@
       </p:sp>
       <p:sp>
         <p:nvSpPr>
-          <p:cNvPr id="12" name="Oval 11"/>
+          <p:cNvPr id="12" name="Rounded Rectangle 11"/>
           <p:cNvSpPr/>
           <p:nvPr/>
         </p:nvSpPr>
         <p:spPr>
           <a:xfrm>
-            <a:off x="660000" y="1979000"/>
-            <a:ext cx="447000" cy="447000"/>
-          </a:xfrm>
-          <a:prstGeom prst="ellipse">
+            <a:off x="548640" y="1830000"/>
+            <a:ext cx="3510000" cy="2100000"/>
+          </a:xfrm>
+          <a:prstGeom prst="roundRect">
+            <a:avLst/>
+          </a:prstGeom>
+          <a:solidFill>
+            <a:srgbClr val="EEF4F0"/>
+          </a:solidFill>
+          <a:ln>
+            <a:noFill/>
+          </a:ln>
+          <a:effectLst/>
+        </p:spPr>
+        <p:style>
+          <a:lnRef idx="1">
+            <a:schemeClr val="accent1"/>
+          </a:lnRef>
+          <a:fillRef idx="3">
+            <a:schemeClr val="accent1"/>
+          </a:fillRef>
+          <a:effectRef idx="2">
+            <a:schemeClr val="accent1"/>
+          </a:effectRef>
+          <a:fontRef idx="minor">
+            <a:schemeClr val="lt1"/>
+          </a:fontRef>
+        </p:style>
+        <p:txBody>
+          <a:bodyPr rtlCol="0" anchor="ctr"/>
+          <a:lstStyle/>
+          <a:p>
+            <a:pPr algn="ctr"/>
+          </a:p>
+        </p:txBody>
+      </p:sp>
+      <p:sp>
+        <p:nvSpPr>
+          <p:cNvPr id="13" name="Rounded Rectangle 12"/>
+          <p:cNvSpPr/>
+          <p:nvPr/>
+        </p:nvSpPr>
+        <p:spPr>
+          <a:xfrm>
+            <a:off x="548640" y="1830000"/>
+            <a:ext cx="3510000" cy="70000"/>
+          </a:xfrm>
+          <a:prstGeom prst="roundRect">
             <a:avLst/>
           </a:prstGeom>
           <a:solidFill>
@@ -11984,9 +11840,53 @@
           </a:p>
         </p:txBody>
       </p:sp>
+      <p:sp>
+        <p:nvSpPr>
+          <p:cNvPr id="14" name="Oval 13"/>
+          <p:cNvSpPr/>
+          <p:nvPr/>
+        </p:nvSpPr>
+        <p:spPr>
+          <a:xfrm>
+            <a:off x="1893640" y="2060000"/>
+            <a:ext cx="820000" cy="820000"/>
+          </a:xfrm>
+          <a:prstGeom prst="ellipse">
+            <a:avLst/>
+          </a:prstGeom>
+          <a:solidFill>
+            <a:srgbClr val="1F4E3D"/>
+          </a:solidFill>
+          <a:ln>
+            <a:noFill/>
+          </a:ln>
+          <a:effectLst/>
+        </p:spPr>
+        <p:style>
+          <a:lnRef idx="1">
+            <a:schemeClr val="accent1"/>
+          </a:lnRef>
+          <a:fillRef idx="3">
+            <a:schemeClr val="accent1"/>
+          </a:fillRef>
+          <a:effectRef idx="2">
+            <a:schemeClr val="accent1"/>
+          </a:effectRef>
+          <a:fontRef idx="minor">
+            <a:schemeClr val="lt1"/>
+          </a:fontRef>
+        </p:style>
+        <p:txBody>
+          <a:bodyPr rtlCol="0" anchor="ctr"/>
+          <a:lstStyle/>
+          <a:p>
+            <a:pPr algn="ctr"/>
+          </a:p>
+        </p:txBody>
+      </p:sp>
       <p:pic>
         <p:nvPicPr>
-          <p:cNvPr id="13" name="Picture 12" descr="company_w.png"/>
+          <p:cNvPr id="15" name="Picture 14" descr="company_w.png"/>
           <p:cNvPicPr>
             <a:picLocks noChangeAspect="1"/>
           </p:cNvPicPr>
@@ -12006,8 +11906,8 @@
         </p:blipFill>
         <p:spPr>
           <a:xfrm>
-            <a:off x="749400" y="2068400"/>
-            <a:ext cx="268200" cy="268200"/>
+            <a:off x="2057640" y="2224000"/>
+            <a:ext cx="492000" cy="492000"/>
           </a:xfrm>
           <a:prstGeom prst="rect">
             <a:avLst/>
@@ -12016,14 +11916,14 @@
       </p:pic>
       <p:sp>
         <p:nvSpPr>
-          <p:cNvPr id="14" name="TextBox 13"/>
+          <p:cNvPr id="16" name="TextBox 15"/>
           <p:cNvSpPr txBox="1"/>
           <p:nvPr/>
         </p:nvSpPr>
         <p:spPr>
           <a:xfrm>
-            <a:off x="1467000" y="1830000"/>
-            <a:ext cx="9700000" cy="745000"/>
+            <a:off x="668640" y="2940000"/>
+            <a:ext cx="3270000" cy="920000"/>
           </a:xfrm>
           <a:prstGeom prst="rect">
             <a:avLst/>
@@ -12031,15 +11931,16 @@
           <a:noFill/>
         </p:spPr>
         <p:txBody>
-          <a:bodyPr wrap="square" lIns="50000" rIns="50000" tIns="20000" bIns="20000" anchor="ctr">
+          <a:bodyPr wrap="square" lIns="50000" rIns="50000" tIns="20000" bIns="20000" anchor="t">
             <a:spAutoFit/>
           </a:bodyPr>
           <a:lstStyle/>
           <a:p>
-            <a:r>
-              <a:rPr sz="2075" b="0" i="0">
-                <a:solidFill>
-                  <a:srgbClr val="14332A"/>
+            <a:pPr algn="ctr"/>
+            <a:r>
+              <a:rPr sz="2000" b="1" i="0">
+                <a:solidFill>
+                  <a:srgbClr val="1F4E3D"/>
                 </a:solidFill>
               </a:rPr>
               <a:t>Tổng quan về công ty</a:t>
@@ -12049,16 +11950,60 @@
       </p:sp>
       <p:sp>
         <p:nvSpPr>
-          <p:cNvPr id="15" name="Oval 14"/>
+          <p:cNvPr id="17" name="Rounded Rectangle 16"/>
           <p:cNvSpPr/>
           <p:nvPr/>
         </p:nvSpPr>
         <p:spPr>
           <a:xfrm>
-            <a:off x="660000" y="2724000"/>
-            <a:ext cx="447000" cy="447000"/>
-          </a:xfrm>
-          <a:prstGeom prst="ellipse">
+            <a:off x="4338640" y="1830000"/>
+            <a:ext cx="3510000" cy="2100000"/>
+          </a:xfrm>
+          <a:prstGeom prst="roundRect">
+            <a:avLst/>
+          </a:prstGeom>
+          <a:solidFill>
+            <a:srgbClr val="EEF4F0"/>
+          </a:solidFill>
+          <a:ln>
+            <a:noFill/>
+          </a:ln>
+          <a:effectLst/>
+        </p:spPr>
+        <p:style>
+          <a:lnRef idx="1">
+            <a:schemeClr val="accent1"/>
+          </a:lnRef>
+          <a:fillRef idx="3">
+            <a:schemeClr val="accent1"/>
+          </a:fillRef>
+          <a:effectRef idx="2">
+            <a:schemeClr val="accent1"/>
+          </a:effectRef>
+          <a:fontRef idx="minor">
+            <a:schemeClr val="lt1"/>
+          </a:fontRef>
+        </p:style>
+        <p:txBody>
+          <a:bodyPr rtlCol="0" anchor="ctr"/>
+          <a:lstStyle/>
+          <a:p>
+            <a:pPr algn="ctr"/>
+          </a:p>
+        </p:txBody>
+      </p:sp>
+      <p:sp>
+        <p:nvSpPr>
+          <p:cNvPr id="18" name="Rounded Rectangle 17"/>
+          <p:cNvSpPr/>
+          <p:nvPr/>
+        </p:nvSpPr>
+        <p:spPr>
+          <a:xfrm>
+            <a:off x="4338640" y="1830000"/>
+            <a:ext cx="3510000" cy="70000"/>
+          </a:xfrm>
+          <a:prstGeom prst="roundRect">
             <a:avLst/>
           </a:prstGeom>
           <a:solidFill>
@@ -12091,9 +12036,53 @@
           </a:p>
         </p:txBody>
       </p:sp>
+      <p:sp>
+        <p:nvSpPr>
+          <p:cNvPr id="19" name="Oval 18"/>
+          <p:cNvSpPr/>
+          <p:nvPr/>
+        </p:nvSpPr>
+        <p:spPr>
+          <a:xfrm>
+            <a:off x="5683640" y="2060000"/>
+            <a:ext cx="820000" cy="820000"/>
+          </a:xfrm>
+          <a:prstGeom prst="ellipse">
+            <a:avLst/>
+          </a:prstGeom>
+          <a:solidFill>
+            <a:srgbClr val="1F4E3D"/>
+          </a:solidFill>
+          <a:ln>
+            <a:noFill/>
+          </a:ln>
+          <a:effectLst/>
+        </p:spPr>
+        <p:style>
+          <a:lnRef idx="1">
+            <a:schemeClr val="accent1"/>
+          </a:lnRef>
+          <a:fillRef idx="3">
+            <a:schemeClr val="accent1"/>
+          </a:fillRef>
+          <a:effectRef idx="2">
+            <a:schemeClr val="accent1"/>
+          </a:effectRef>
+          <a:fontRef idx="minor">
+            <a:schemeClr val="lt1"/>
+          </a:fontRef>
+        </p:style>
+        <p:txBody>
+          <a:bodyPr rtlCol="0" anchor="ctr"/>
+          <a:lstStyle/>
+          <a:p>
+            <a:pPr algn="ctr"/>
+          </a:p>
+        </p:txBody>
+      </p:sp>
       <p:pic>
         <p:nvPicPr>
-          <p:cNvPr id="16" name="Picture 15" descr="materials_w.png"/>
+          <p:cNvPr id="20" name="Picture 19" descr="materials_w.png"/>
           <p:cNvPicPr>
             <a:picLocks noChangeAspect="1"/>
           </p:cNvPicPr>
@@ -12113,8 +12102,8 @@
         </p:blipFill>
         <p:spPr>
           <a:xfrm>
-            <a:off x="749400" y="2813400"/>
-            <a:ext cx="268200" cy="268200"/>
+            <a:off x="5847640" y="2224000"/>
+            <a:ext cx="492000" cy="492000"/>
           </a:xfrm>
           <a:prstGeom prst="rect">
             <a:avLst/>
@@ -12123,14 +12112,14 @@
       </p:pic>
       <p:sp>
         <p:nvSpPr>
-          <p:cNvPr id="17" name="TextBox 16"/>
+          <p:cNvPr id="21" name="TextBox 20"/>
           <p:cNvSpPr txBox="1"/>
           <p:nvPr/>
         </p:nvSpPr>
         <p:spPr>
           <a:xfrm>
-            <a:off x="1467000" y="2575000"/>
-            <a:ext cx="9700000" cy="745000"/>
+            <a:off x="4458640" y="2940000"/>
+            <a:ext cx="3270000" cy="920000"/>
           </a:xfrm>
           <a:prstGeom prst="rect">
             <a:avLst/>
@@ -12138,15 +12127,16 @@
           <a:noFill/>
         </p:spPr>
         <p:txBody>
-          <a:bodyPr wrap="square" lIns="50000" rIns="50000" tIns="20000" bIns="20000" anchor="ctr">
+          <a:bodyPr wrap="square" lIns="50000" rIns="50000" tIns="20000" bIns="20000" anchor="t">
             <a:spAutoFit/>
           </a:bodyPr>
           <a:lstStyle/>
           <a:p>
-            <a:r>
-              <a:rPr sz="2075" b="0" i="0">
-                <a:solidFill>
-                  <a:srgbClr val="14332A"/>
+            <a:pPr algn="ctr"/>
+            <a:r>
+              <a:rPr sz="2000" b="1" i="0">
+                <a:solidFill>
+                  <a:srgbClr val="1F4E3D"/>
                 </a:solidFill>
               </a:rPr>
               <a:t>Nguyên vật liệu</a:t>
@@ -12156,16 +12146,60 @@
       </p:sp>
       <p:sp>
         <p:nvSpPr>
-          <p:cNvPr id="18" name="Oval 17"/>
+          <p:cNvPr id="22" name="Rounded Rectangle 21"/>
           <p:cNvSpPr/>
           <p:nvPr/>
         </p:nvSpPr>
         <p:spPr>
           <a:xfrm>
-            <a:off x="660000" y="3469000"/>
-            <a:ext cx="447000" cy="447000"/>
-          </a:xfrm>
-          <a:prstGeom prst="ellipse">
+            <a:off x="8128640" y="1830000"/>
+            <a:ext cx="3510000" cy="2100000"/>
+          </a:xfrm>
+          <a:prstGeom prst="roundRect">
+            <a:avLst/>
+          </a:prstGeom>
+          <a:solidFill>
+            <a:srgbClr val="EEF4F0"/>
+          </a:solidFill>
+          <a:ln>
+            <a:noFill/>
+          </a:ln>
+          <a:effectLst/>
+        </p:spPr>
+        <p:style>
+          <a:lnRef idx="1">
+            <a:schemeClr val="accent1"/>
+          </a:lnRef>
+          <a:fillRef idx="3">
+            <a:schemeClr val="accent1"/>
+          </a:fillRef>
+          <a:effectRef idx="2">
+            <a:schemeClr val="accent1"/>
+          </a:effectRef>
+          <a:fontRef idx="minor">
+            <a:schemeClr val="lt1"/>
+          </a:fontRef>
+        </p:style>
+        <p:txBody>
+          <a:bodyPr rtlCol="0" anchor="ctr"/>
+          <a:lstStyle/>
+          <a:p>
+            <a:pPr algn="ctr"/>
+          </a:p>
+        </p:txBody>
+      </p:sp>
+      <p:sp>
+        <p:nvSpPr>
+          <p:cNvPr id="23" name="Rounded Rectangle 22"/>
+          <p:cNvSpPr/>
+          <p:nvPr/>
+        </p:nvSpPr>
+        <p:spPr>
+          <a:xfrm>
+            <a:off x="8128640" y="1830000"/>
+            <a:ext cx="3510000" cy="70000"/>
+          </a:xfrm>
+          <a:prstGeom prst="roundRect">
             <a:avLst/>
           </a:prstGeom>
           <a:solidFill>
@@ -12198,9 +12232,53 @@
           </a:p>
         </p:txBody>
       </p:sp>
+      <p:sp>
+        <p:nvSpPr>
+          <p:cNvPr id="24" name="Oval 23"/>
+          <p:cNvSpPr/>
+          <p:nvPr/>
+        </p:nvSpPr>
+        <p:spPr>
+          <a:xfrm>
+            <a:off x="9473640" y="2060000"/>
+            <a:ext cx="820000" cy="820000"/>
+          </a:xfrm>
+          <a:prstGeom prst="ellipse">
+            <a:avLst/>
+          </a:prstGeom>
+          <a:solidFill>
+            <a:srgbClr val="1F4E3D"/>
+          </a:solidFill>
+          <a:ln>
+            <a:noFill/>
+          </a:ln>
+          <a:effectLst/>
+        </p:spPr>
+        <p:style>
+          <a:lnRef idx="1">
+            <a:schemeClr val="accent1"/>
+          </a:lnRef>
+          <a:fillRef idx="3">
+            <a:schemeClr val="accent1"/>
+          </a:fillRef>
+          <a:effectRef idx="2">
+            <a:schemeClr val="accent1"/>
+          </a:effectRef>
+          <a:fontRef idx="minor">
+            <a:schemeClr val="lt1"/>
+          </a:fontRef>
+        </p:style>
+        <p:txBody>
+          <a:bodyPr rtlCol="0" anchor="ctr"/>
+          <a:lstStyle/>
+          <a:p>
+            <a:pPr algn="ctr"/>
+          </a:p>
+        </p:txBody>
+      </p:sp>
       <p:pic>
         <p:nvPicPr>
-          <p:cNvPr id="19" name="Picture 18" descr="gear_proc_w.png"/>
+          <p:cNvPr id="25" name="Picture 24" descr="gear_proc_w.png"/>
           <p:cNvPicPr>
             <a:picLocks noChangeAspect="1"/>
           </p:cNvPicPr>
@@ -12220,8 +12298,8 @@
         </p:blipFill>
         <p:spPr>
           <a:xfrm>
-            <a:off x="749400" y="3558400"/>
-            <a:ext cx="268200" cy="268200"/>
+            <a:off x="9637640" y="2224000"/>
+            <a:ext cx="492000" cy="492000"/>
           </a:xfrm>
           <a:prstGeom prst="rect">
             <a:avLst/>
@@ -12230,14 +12308,14 @@
       </p:pic>
       <p:sp>
         <p:nvSpPr>
-          <p:cNvPr id="20" name="TextBox 19"/>
+          <p:cNvPr id="26" name="TextBox 25"/>
           <p:cNvSpPr txBox="1"/>
           <p:nvPr/>
         </p:nvSpPr>
         <p:spPr>
           <a:xfrm>
-            <a:off x="1467000" y="3320000"/>
-            <a:ext cx="9700000" cy="745000"/>
+            <a:off x="8248640" y="2940000"/>
+            <a:ext cx="3270000" cy="920000"/>
           </a:xfrm>
           <a:prstGeom prst="rect">
             <a:avLst/>
@@ -12245,15 +12323,16 @@
           <a:noFill/>
         </p:spPr>
         <p:txBody>
-          <a:bodyPr wrap="square" lIns="50000" rIns="50000" tIns="20000" bIns="20000" anchor="ctr">
+          <a:bodyPr wrap="square" lIns="50000" rIns="50000" tIns="20000" bIns="20000" anchor="t">
             <a:spAutoFit/>
           </a:bodyPr>
           <a:lstStyle/>
           <a:p>
-            <a:r>
-              <a:rPr sz="2075" b="0" i="0">
-                <a:solidFill>
-                  <a:srgbClr val="14332A"/>
+            <a:pPr algn="ctr"/>
+            <a:r>
+              <a:rPr sz="2000" b="1" i="0">
+                <a:solidFill>
+                  <a:srgbClr val="1F4E3D"/>
                 </a:solidFill>
               </a:rPr>
               <a:t>Quy trình công nghệ &amp; thiết bị</a:t>
@@ -12263,16 +12342,60 @@
       </p:sp>
       <p:sp>
         <p:nvSpPr>
-          <p:cNvPr id="21" name="Oval 20"/>
+          <p:cNvPr id="27" name="Rounded Rectangle 26"/>
           <p:cNvSpPr/>
           <p:nvPr/>
         </p:nvSpPr>
         <p:spPr>
           <a:xfrm>
-            <a:off x="660000" y="4214000"/>
-            <a:ext cx="447000" cy="447000"/>
-          </a:xfrm>
-          <a:prstGeom prst="ellipse">
+            <a:off x="548640" y="4200000"/>
+            <a:ext cx="3510000" cy="2100000"/>
+          </a:xfrm>
+          <a:prstGeom prst="roundRect">
+            <a:avLst/>
+          </a:prstGeom>
+          <a:solidFill>
+            <a:srgbClr val="EEF4F0"/>
+          </a:solidFill>
+          <a:ln>
+            <a:noFill/>
+          </a:ln>
+          <a:effectLst/>
+        </p:spPr>
+        <p:style>
+          <a:lnRef idx="1">
+            <a:schemeClr val="accent1"/>
+          </a:lnRef>
+          <a:fillRef idx="3">
+            <a:schemeClr val="accent1"/>
+          </a:fillRef>
+          <a:effectRef idx="2">
+            <a:schemeClr val="accent1"/>
+          </a:effectRef>
+          <a:fontRef idx="minor">
+            <a:schemeClr val="lt1"/>
+          </a:fontRef>
+        </p:style>
+        <p:txBody>
+          <a:bodyPr rtlCol="0" anchor="ctr"/>
+          <a:lstStyle/>
+          <a:p>
+            <a:pPr algn="ctr"/>
+          </a:p>
+        </p:txBody>
+      </p:sp>
+      <p:sp>
+        <p:nvSpPr>
+          <p:cNvPr id="28" name="Rounded Rectangle 27"/>
+          <p:cNvSpPr/>
+          <p:nvPr/>
+        </p:nvSpPr>
+        <p:spPr>
+          <a:xfrm>
+            <a:off x="548640" y="4200000"/>
+            <a:ext cx="3510000" cy="70000"/>
+          </a:xfrm>
+          <a:prstGeom prst="roundRect">
             <a:avLst/>
           </a:prstGeom>
           <a:solidFill>
@@ -12305,9 +12428,53 @@
           </a:p>
         </p:txBody>
       </p:sp>
+      <p:sp>
+        <p:nvSpPr>
+          <p:cNvPr id="29" name="Oval 28"/>
+          <p:cNvSpPr/>
+          <p:nvPr/>
+        </p:nvSpPr>
+        <p:spPr>
+          <a:xfrm>
+            <a:off x="1893640" y="4430000"/>
+            <a:ext cx="820000" cy="820000"/>
+          </a:xfrm>
+          <a:prstGeom prst="ellipse">
+            <a:avLst/>
+          </a:prstGeom>
+          <a:solidFill>
+            <a:srgbClr val="1F4E3D"/>
+          </a:solidFill>
+          <a:ln>
+            <a:noFill/>
+          </a:ln>
+          <a:effectLst/>
+        </p:spPr>
+        <p:style>
+          <a:lnRef idx="1">
+            <a:schemeClr val="accent1"/>
+          </a:lnRef>
+          <a:fillRef idx="3">
+            <a:schemeClr val="accent1"/>
+          </a:fillRef>
+          <a:effectRef idx="2">
+            <a:schemeClr val="accent1"/>
+          </a:effectRef>
+          <a:fontRef idx="minor">
+            <a:schemeClr val="lt1"/>
+          </a:fontRef>
+        </p:style>
+        <p:txBody>
+          <a:bodyPr rtlCol="0" anchor="ctr"/>
+          <a:lstStyle/>
+          <a:p>
+            <a:pPr algn="ctr"/>
+          </a:p>
+        </p:txBody>
+      </p:sp>
       <p:pic>
         <p:nvPicPr>
-          <p:cNvPr id="22" name="Picture 21" descr="quality_check_w.png"/>
+          <p:cNvPr id="30" name="Picture 29" descr="quality_check_w.png"/>
           <p:cNvPicPr>
             <a:picLocks noChangeAspect="1"/>
           </p:cNvPicPr>
@@ -12327,8 +12494,8 @@
         </p:blipFill>
         <p:spPr>
           <a:xfrm>
-            <a:off x="749400" y="4303400"/>
-            <a:ext cx="268200" cy="268200"/>
+            <a:off x="2057640" y="4594000"/>
+            <a:ext cx="492000" cy="492000"/>
           </a:xfrm>
           <a:prstGeom prst="rect">
             <a:avLst/>
@@ -12337,14 +12504,14 @@
       </p:pic>
       <p:sp>
         <p:nvSpPr>
-          <p:cNvPr id="23" name="TextBox 22"/>
+          <p:cNvPr id="31" name="TextBox 30"/>
           <p:cNvSpPr txBox="1"/>
           <p:nvPr/>
         </p:nvSpPr>
         <p:spPr>
           <a:xfrm>
-            <a:off x="1467000" y="4065000"/>
-            <a:ext cx="9700000" cy="745000"/>
+            <a:off x="668640" y="5310000"/>
+            <a:ext cx="3270000" cy="920000"/>
           </a:xfrm>
           <a:prstGeom prst="rect">
             <a:avLst/>
@@ -12352,15 +12519,16 @@
           <a:noFill/>
         </p:spPr>
         <p:txBody>
-          <a:bodyPr wrap="square" lIns="50000" rIns="50000" tIns="20000" bIns="20000" anchor="ctr">
+          <a:bodyPr wrap="square" lIns="50000" rIns="50000" tIns="20000" bIns="20000" anchor="t">
             <a:spAutoFit/>
           </a:bodyPr>
           <a:lstStyle/>
           <a:p>
-            <a:r>
-              <a:rPr sz="2075" b="0" i="0">
-                <a:solidFill>
-                  <a:srgbClr val="14332A"/>
+            <a:pPr algn="ctr"/>
+            <a:r>
+              <a:rPr sz="2000" b="1" i="0">
+                <a:solidFill>
+                  <a:srgbClr val="1F4E3D"/>
                 </a:solidFill>
               </a:rPr>
               <a:t>Kiểm soát chất lượng (KCS)</a:t>
@@ -12370,16 +12538,60 @@
       </p:sp>
       <p:sp>
         <p:nvSpPr>
-          <p:cNvPr id="24" name="Oval 23"/>
+          <p:cNvPr id="32" name="Rounded Rectangle 31"/>
           <p:cNvSpPr/>
           <p:nvPr/>
         </p:nvSpPr>
         <p:spPr>
           <a:xfrm>
-            <a:off x="660000" y="4959000"/>
-            <a:ext cx="447000" cy="447000"/>
-          </a:xfrm>
-          <a:prstGeom prst="ellipse">
+            <a:off x="4338640" y="4200000"/>
+            <a:ext cx="3510000" cy="2100000"/>
+          </a:xfrm>
+          <a:prstGeom prst="roundRect">
+            <a:avLst/>
+          </a:prstGeom>
+          <a:solidFill>
+            <a:srgbClr val="EEF4F0"/>
+          </a:solidFill>
+          <a:ln>
+            <a:noFill/>
+          </a:ln>
+          <a:effectLst/>
+        </p:spPr>
+        <p:style>
+          <a:lnRef idx="1">
+            <a:schemeClr val="accent1"/>
+          </a:lnRef>
+          <a:fillRef idx="3">
+            <a:schemeClr val="accent1"/>
+          </a:fillRef>
+          <a:effectRef idx="2">
+            <a:schemeClr val="accent1"/>
+          </a:effectRef>
+          <a:fontRef idx="minor">
+            <a:schemeClr val="lt1"/>
+          </a:fontRef>
+        </p:style>
+        <p:txBody>
+          <a:bodyPr rtlCol="0" anchor="ctr"/>
+          <a:lstStyle/>
+          <a:p>
+            <a:pPr algn="ctr"/>
+          </a:p>
+        </p:txBody>
+      </p:sp>
+      <p:sp>
+        <p:nvSpPr>
+          <p:cNvPr id="33" name="Rounded Rectangle 32"/>
+          <p:cNvSpPr/>
+          <p:nvPr/>
+        </p:nvSpPr>
+        <p:spPr>
+          <a:xfrm>
+            <a:off x="4338640" y="4200000"/>
+            <a:ext cx="3510000" cy="70000"/>
+          </a:xfrm>
+          <a:prstGeom prst="roundRect">
             <a:avLst/>
           </a:prstGeom>
           <a:solidFill>
@@ -12412,9 +12624,53 @@
           </a:p>
         </p:txBody>
       </p:sp>
+      <p:sp>
+        <p:nvSpPr>
+          <p:cNvPr id="34" name="Oval 33"/>
+          <p:cNvSpPr/>
+          <p:nvPr/>
+        </p:nvSpPr>
+        <p:spPr>
+          <a:xfrm>
+            <a:off x="5683640" y="4430000"/>
+            <a:ext cx="820000" cy="820000"/>
+          </a:xfrm>
+          <a:prstGeom prst="ellipse">
+            <a:avLst/>
+          </a:prstGeom>
+          <a:solidFill>
+            <a:srgbClr val="1F4E3D"/>
+          </a:solidFill>
+          <a:ln>
+            <a:noFill/>
+          </a:ln>
+          <a:effectLst/>
+        </p:spPr>
+        <p:style>
+          <a:lnRef idx="1">
+            <a:schemeClr val="accent1"/>
+          </a:lnRef>
+          <a:fillRef idx="3">
+            <a:schemeClr val="accent1"/>
+          </a:fillRef>
+          <a:effectRef idx="2">
+            <a:schemeClr val="accent1"/>
+          </a:effectRef>
+          <a:fontRef idx="minor">
+            <a:schemeClr val="lt1"/>
+          </a:fontRef>
+        </p:style>
+        <p:txBody>
+          <a:bodyPr rtlCol="0" anchor="ctr"/>
+          <a:lstStyle/>
+          <a:p>
+            <a:pPr algn="ctr"/>
+          </a:p>
+        </p:txBody>
+      </p:sp>
       <p:pic>
         <p:nvPicPr>
-          <p:cNvPr id="25" name="Picture 24" descr="warning_tri_w.png"/>
+          <p:cNvPr id="35" name="Picture 34" descr="warning_tri_w.png"/>
           <p:cNvPicPr>
             <a:picLocks noChangeAspect="1"/>
           </p:cNvPicPr>
@@ -12434,8 +12690,8 @@
         </p:blipFill>
         <p:spPr>
           <a:xfrm>
-            <a:off x="749400" y="5048400"/>
-            <a:ext cx="268200" cy="268200"/>
+            <a:off x="5847640" y="4594000"/>
+            <a:ext cx="492000" cy="492000"/>
           </a:xfrm>
           <a:prstGeom prst="rect">
             <a:avLst/>
@@ -12444,14 +12700,14 @@
       </p:pic>
       <p:sp>
         <p:nvSpPr>
-          <p:cNvPr id="26" name="TextBox 25"/>
+          <p:cNvPr id="36" name="TextBox 35"/>
           <p:cNvSpPr txBox="1"/>
           <p:nvPr/>
         </p:nvSpPr>
         <p:spPr>
           <a:xfrm>
-            <a:off x="1467000" y="4810000"/>
-            <a:ext cx="9700000" cy="745000"/>
+            <a:off x="4458640" y="5310000"/>
+            <a:ext cx="3270000" cy="920000"/>
           </a:xfrm>
           <a:prstGeom prst="rect">
             <a:avLst/>
@@ -12459,15 +12715,16 @@
           <a:noFill/>
         </p:spPr>
         <p:txBody>
-          <a:bodyPr wrap="square" lIns="50000" rIns="50000" tIns="20000" bIns="20000" anchor="ctr">
+          <a:bodyPr wrap="square" lIns="50000" rIns="50000" tIns="20000" bIns="20000" anchor="t">
             <a:spAutoFit/>
           </a:bodyPr>
           <a:lstStyle/>
           <a:p>
-            <a:r>
-              <a:rPr sz="2075" b="0" i="0">
-                <a:solidFill>
-                  <a:srgbClr val="14332A"/>
+            <a:pPr algn="ctr"/>
+            <a:r>
+              <a:rPr sz="2000" b="1" i="0">
+                <a:solidFill>
+                  <a:srgbClr val="1F4E3D"/>
                 </a:solidFill>
               </a:rPr>
               <a:t>Những sự cố thường gặp</a:t>
@@ -12477,16 +12734,60 @@
       </p:sp>
       <p:sp>
         <p:nvSpPr>
-          <p:cNvPr id="27" name="Oval 26"/>
+          <p:cNvPr id="37" name="Rounded Rectangle 36"/>
           <p:cNvSpPr/>
           <p:nvPr/>
         </p:nvSpPr>
         <p:spPr>
           <a:xfrm>
-            <a:off x="660000" y="5704000"/>
-            <a:ext cx="447000" cy="447000"/>
-          </a:xfrm>
-          <a:prstGeom prst="ellipse">
+            <a:off x="8128640" y="4200000"/>
+            <a:ext cx="3510000" cy="2100000"/>
+          </a:xfrm>
+          <a:prstGeom prst="roundRect">
+            <a:avLst/>
+          </a:prstGeom>
+          <a:solidFill>
+            <a:srgbClr val="EEF4F0"/>
+          </a:solidFill>
+          <a:ln>
+            <a:noFill/>
+          </a:ln>
+          <a:effectLst/>
+        </p:spPr>
+        <p:style>
+          <a:lnRef idx="1">
+            <a:schemeClr val="accent1"/>
+          </a:lnRef>
+          <a:fillRef idx="3">
+            <a:schemeClr val="accent1"/>
+          </a:fillRef>
+          <a:effectRef idx="2">
+            <a:schemeClr val="accent1"/>
+          </a:effectRef>
+          <a:fontRef idx="minor">
+            <a:schemeClr val="lt1"/>
+          </a:fontRef>
+        </p:style>
+        <p:txBody>
+          <a:bodyPr rtlCol="0" anchor="ctr"/>
+          <a:lstStyle/>
+          <a:p>
+            <a:pPr algn="ctr"/>
+          </a:p>
+        </p:txBody>
+      </p:sp>
+      <p:sp>
+        <p:nvSpPr>
+          <p:cNvPr id="38" name="Rounded Rectangle 37"/>
+          <p:cNvSpPr/>
+          <p:nvPr/>
+        </p:nvSpPr>
+        <p:spPr>
+          <a:xfrm>
+            <a:off x="8128640" y="4200000"/>
+            <a:ext cx="3510000" cy="70000"/>
+          </a:xfrm>
+          <a:prstGeom prst="roundRect">
             <a:avLst/>
           </a:prstGeom>
           <a:solidFill>
@@ -12519,9 +12820,53 @@
           </a:p>
         </p:txBody>
       </p:sp>
+      <p:sp>
+        <p:nvSpPr>
+          <p:cNvPr id="39" name="Oval 38"/>
+          <p:cNvSpPr/>
+          <p:nvPr/>
+        </p:nvSpPr>
+        <p:spPr>
+          <a:xfrm>
+            <a:off x="9473640" y="4430000"/>
+            <a:ext cx="820000" cy="820000"/>
+          </a:xfrm>
+          <a:prstGeom prst="ellipse">
+            <a:avLst/>
+          </a:prstGeom>
+          <a:solidFill>
+            <a:srgbClr val="1F4E3D"/>
+          </a:solidFill>
+          <a:ln>
+            <a:noFill/>
+          </a:ln>
+          <a:effectLst/>
+        </p:spPr>
+        <p:style>
+          <a:lnRef idx="1">
+            <a:schemeClr val="accent1"/>
+          </a:lnRef>
+          <a:fillRef idx="3">
+            <a:schemeClr val="accent1"/>
+          </a:fillRef>
+          <a:effectRef idx="2">
+            <a:schemeClr val="accent1"/>
+          </a:effectRef>
+          <a:fontRef idx="minor">
+            <a:schemeClr val="lt1"/>
+          </a:fontRef>
+        </p:style>
+        <p:txBody>
+          <a:bodyPr rtlCol="0" anchor="ctr"/>
+          <a:lstStyle/>
+          <a:p>
+            <a:pPr algn="ctr"/>
+          </a:p>
+        </p:txBody>
+      </p:sp>
       <p:pic>
         <p:nvPicPr>
-          <p:cNvPr id="28" name="Picture 27" descr="safety_shield_w.png"/>
+          <p:cNvPr id="40" name="Picture 39" descr="safety_shield_w.png"/>
           <p:cNvPicPr>
             <a:picLocks noChangeAspect="1"/>
           </p:cNvPicPr>
@@ -12541,8 +12886,8 @@
         </p:blipFill>
         <p:spPr>
           <a:xfrm>
-            <a:off x="749400" y="5793400"/>
-            <a:ext cx="268200" cy="268200"/>
+            <a:off x="9637640" y="4594000"/>
+            <a:ext cx="492000" cy="492000"/>
           </a:xfrm>
           <a:prstGeom prst="rect">
             <a:avLst/>
@@ -12551,14 +12896,14 @@
       </p:pic>
       <p:sp>
         <p:nvSpPr>
-          <p:cNvPr id="29" name="TextBox 28"/>
+          <p:cNvPr id="41" name="TextBox 40"/>
           <p:cNvSpPr txBox="1"/>
           <p:nvPr/>
         </p:nvSpPr>
         <p:spPr>
           <a:xfrm>
-            <a:off x="1467000" y="5555000"/>
-            <a:ext cx="9700000" cy="745000"/>
+            <a:off x="8248640" y="5310000"/>
+            <a:ext cx="3270000" cy="920000"/>
           </a:xfrm>
           <a:prstGeom prst="rect">
             <a:avLst/>
@@ -12566,15 +12911,16 @@
           <a:noFill/>
         </p:spPr>
         <p:txBody>
-          <a:bodyPr wrap="square" lIns="50000" rIns="50000" tIns="20000" bIns="20000" anchor="ctr">
+          <a:bodyPr wrap="square" lIns="50000" rIns="50000" tIns="20000" bIns="20000" anchor="t">
             <a:spAutoFit/>
           </a:bodyPr>
           <a:lstStyle/>
           <a:p>
-            <a:r>
-              <a:rPr sz="2075" b="0" i="0">
-                <a:solidFill>
-                  <a:srgbClr val="14332A"/>
+            <a:pPr algn="ctr"/>
+            <a:r>
+              <a:rPr sz="2000" b="1" i="0">
+                <a:solidFill>
+                  <a:srgbClr val="1F4E3D"/>
                 </a:solidFill>
               </a:rPr>
               <a:t>An toàn lao động &amp; môi trường</a:t>
@@ -12656,7 +13002,7 @@
           <a:blip r:embed="rId2">
             <a:extLst>
               <a:ext uri="{96DAC541-7B7A-43D3-8B79-37D633B846F1}">
-                <ns0:svgBlip xmlns:ns0="http://schemas.microsoft.com/office/drawing/2016/SVG/main" r:embed="rId6"/>
+                <ns0:svgBlip xmlns:ns0="http://schemas.microsoft.com/office/drawing/2016/SVG/main" r:embed="rId4"/>
               </a:ext>
             </a:extLst>
           </a:blip>
@@ -12719,7 +13065,7 @@
           <a:blip r:embed="rId3">
             <a:extLst>
               <a:ext uri="{96DAC541-7B7A-43D3-8B79-37D633B846F1}">
-                <ns1:svgBlip xmlns:ns1="http://schemas.microsoft.com/office/drawing/2016/SVG/main" r:embed="rId7"/>
+                <ns1:svgBlip xmlns:ns1="http://schemas.microsoft.com/office/drawing/2016/SVG/main" r:embed="rId5"/>
               </a:ext>
             </a:extLst>
           </a:blip>
@@ -12737,39 +13083,9 @@
           </a:prstGeom>
         </p:spPr>
       </p:pic>
-      <p:pic>
-        <p:nvPicPr>
-          <p:cNvPr id="6" name="Picture 5" descr="deco_drip_white.png"/>
-          <p:cNvPicPr>
-            <a:picLocks noChangeAspect="1"/>
-          </p:cNvPicPr>
-          <p:nvPr/>
-        </p:nvPicPr>
-        <p:blipFill>
-          <a:blip r:embed="rId4">
-            <a:extLst>
-              <a:ext uri="{96DAC541-7B7A-43D3-8B79-37D633B846F1}">
-                <ns2:svgBlip xmlns:ns2="http://schemas.microsoft.com/office/drawing/2016/SVG/main" r:embed="rId5"/>
-              </a:ext>
-            </a:extLst>
-          </a:blip>
-          <a:stretch>
-            <a:fillRect/>
-          </a:stretch>
-        </p:blipFill>
-        <p:spPr>
-          <a:xfrm>
-            <a:off x="780000" y="4820000"/>
-            <a:ext cx="880000" cy="1180000"/>
-          </a:xfrm>
-          <a:prstGeom prst="rect">
-            <a:avLst/>
-          </a:prstGeom>
-        </p:spPr>
-      </p:pic>
-      <p:sp>
-        <p:nvSpPr>
-          <p:cNvPr id="7" name="Rounded Rectangle 6"/>
+      <p:sp>
+        <p:nvSpPr>
+          <p:cNvPr id="6" name="Rounded Rectangle 5"/>
           <p:cNvSpPr/>
           <p:nvPr/>
         </p:nvSpPr>
@@ -12813,7 +13129,7 @@
       </p:sp>
       <p:sp>
         <p:nvSpPr>
-          <p:cNvPr id="8" name="Oval 7"/>
+          <p:cNvPr id="7" name="Oval 6"/>
           <p:cNvSpPr/>
           <p:nvPr/>
         </p:nvSpPr>
@@ -12865,7 +13181,7 @@
       </p:sp>
       <p:sp>
         <p:nvSpPr>
-          <p:cNvPr id="9" name="TextBox 8"/>
+          <p:cNvPr id="8" name="TextBox 7"/>
           <p:cNvSpPr txBox="1"/>
           <p:nvPr/>
         </p:nvSpPr>
@@ -12898,7 +13214,7 @@
       </p:sp>
       <p:sp>
         <p:nvSpPr>
-          <p:cNvPr id="10" name="TextBox 9"/>
+          <p:cNvPr id="9" name="TextBox 8"/>
           <p:cNvSpPr txBox="1"/>
           <p:nvPr/>
         </p:nvSpPr>
@@ -15198,7 +15514,7 @@
         <p:spPr>
           <a:xfrm>
             <a:off x="548640" y="1830000"/>
-            <a:ext cx="11090000" cy="1336666"/>
+            <a:ext cx="3496666" cy="4470000"/>
           </a:xfrm>
           <a:prstGeom prst="roundRect">
             <a:avLst/>
@@ -15242,13 +15558,13 @@
         <p:spPr>
           <a:xfrm>
             <a:off x="548640" y="1830000"/>
-            <a:ext cx="80000" cy="1336666"/>
+            <a:ext cx="3496666" cy="130000"/>
           </a:xfrm>
           <a:prstGeom prst="roundRect">
             <a:avLst/>
           </a:prstGeom>
           <a:solidFill>
-            <a:srgbClr val="2C7A5A"/>
+            <a:srgbClr val="1F4E3D"/>
           </a:solidFill>
           <a:ln>
             <a:noFill/>
@@ -15285,8 +15601,8 @@
         </p:nvSpPr>
         <p:spPr>
           <a:xfrm>
-            <a:off x="848640" y="2168333"/>
-            <a:ext cx="660000" cy="660000"/>
+            <a:off x="1906973" y="2210000"/>
+            <a:ext cx="780000" cy="780000"/>
           </a:xfrm>
           <a:prstGeom prst="ellipse">
             <a:avLst/>
@@ -15343,8 +15659,8 @@
         </p:blipFill>
         <p:spPr>
           <a:xfrm>
-            <a:off x="980640" y="2300333"/>
-            <a:ext cx="396000" cy="396000"/>
+            <a:off x="2062973" y="2366000"/>
+            <a:ext cx="468000" cy="468000"/>
           </a:xfrm>
           <a:prstGeom prst="rect">
             <a:avLst/>
@@ -15359,8 +15675,8 @@
         </p:nvSpPr>
         <p:spPr>
           <a:xfrm>
-            <a:off x="1848640" y="1830000"/>
-            <a:ext cx="9130000" cy="1336666"/>
+            <a:off x="728640" y="3080000"/>
+            <a:ext cx="3136666" cy="2870000"/>
           </a:xfrm>
           <a:prstGeom prst="rect">
             <a:avLst/>
@@ -15368,13 +15684,14 @@
           <a:noFill/>
         </p:spPr>
         <p:txBody>
-          <a:bodyPr wrap="square" lIns="50000" rIns="50000" tIns="20000" bIns="20000" anchor="ctr">
+          <a:bodyPr wrap="square" lIns="50000" rIns="50000" tIns="20000" bIns="20000" anchor="t">
             <a:spAutoFit/>
           </a:bodyPr>
           <a:lstStyle/>
           <a:p>
-            <a:r>
-              <a:rPr sz="2158" b="1" i="0">
+            <a:pPr algn="ctr"/>
+            <a:r>
+              <a:rPr sz="2000" b="1" i="0">
                 <a:solidFill>
                   <a:srgbClr val="1F4E3D"/>
                 </a:solidFill>
@@ -15383,13 +15700,25 @@
             </a:r>
           </a:p>
           <a:p>
+            <a:pPr algn="ctr"/>
             <a:r>
               <a:rPr sz="2000" b="0" i="0">
                 <a:solidFill>
                   <a:srgbClr val="34404A"/>
                 </a:solidFill>
               </a:rPr>
-              <a:t>ISO 4624 / ASTM D4541 — đo bằng MPa</a:t>
+              <a:t>ISO 4624 / ASTM D4541</a:t>
+            </a:r>
+          </a:p>
+          <a:p>
+            <a:pPr algn="ctr"/>
+            <a:r>
+              <a:rPr sz="2000" b="0" i="0">
+                <a:solidFill>
+                  <a:srgbClr val="34404A"/>
+                </a:solidFill>
+              </a:rPr>
+              <a:t>Đo bằng MPa</a:t>
             </a:r>
           </a:p>
         </p:txBody>
@@ -15402,8 +15731,8 @@
         </p:nvSpPr>
         <p:spPr>
           <a:xfrm>
-            <a:off x="548640" y="3396666"/>
-            <a:ext cx="11090000" cy="1336666"/>
+            <a:off x="4345306" y="1830000"/>
+            <a:ext cx="3496666" cy="4470000"/>
           </a:xfrm>
           <a:prstGeom prst="roundRect">
             <a:avLst/>
@@ -15446,8 +15775,8 @@
         </p:nvSpPr>
         <p:spPr>
           <a:xfrm>
-            <a:off x="548640" y="3396666"/>
-            <a:ext cx="80000" cy="1336666"/>
+            <a:off x="4345306" y="1830000"/>
+            <a:ext cx="3496666" cy="130000"/>
           </a:xfrm>
           <a:prstGeom prst="roundRect">
             <a:avLst/>
@@ -15490,14 +15819,14 @@
         </p:nvSpPr>
         <p:spPr>
           <a:xfrm>
-            <a:off x="848640" y="3734999"/>
-            <a:ext cx="660000" cy="660000"/>
+            <a:off x="5703639" y="2210000"/>
+            <a:ext cx="780000" cy="780000"/>
           </a:xfrm>
           <a:prstGeom prst="ellipse">
             <a:avLst/>
           </a:prstGeom>
           <a:solidFill>
-            <a:srgbClr val="1F4E3D"/>
+            <a:srgbClr val="2C7A5A"/>
           </a:solidFill>
           <a:ln>
             <a:noFill/>
@@ -15548,8 +15877,8 @@
         </p:blipFill>
         <p:spPr>
           <a:xfrm>
-            <a:off x="980640" y="3866999"/>
-            <a:ext cx="396000" cy="396000"/>
+            <a:off x="5859639" y="2366000"/>
+            <a:ext cx="468000" cy="468000"/>
           </a:xfrm>
           <a:prstGeom prst="rect">
             <a:avLst/>
@@ -15564,8 +15893,8 @@
         </p:nvSpPr>
         <p:spPr>
           <a:xfrm>
-            <a:off x="1848640" y="3396666"/>
-            <a:ext cx="9130000" cy="1336666"/>
+            <a:off x="4525306" y="3080000"/>
+            <a:ext cx="3136666" cy="2870000"/>
           </a:xfrm>
           <a:prstGeom prst="rect">
             <a:avLst/>
@@ -15573,28 +15902,41 @@
           <a:noFill/>
         </p:spPr>
         <p:txBody>
-          <a:bodyPr wrap="square" lIns="50000" rIns="50000" tIns="20000" bIns="20000" anchor="ctr">
+          <a:bodyPr wrap="square" lIns="50000" rIns="50000" tIns="20000" bIns="20000" anchor="t">
             <a:spAutoFit/>
           </a:bodyPr>
           <a:lstStyle/>
           <a:p>
-            <a:r>
-              <a:rPr sz="2158" b="1" i="0">
+            <a:pPr algn="ctr"/>
+            <a:r>
+              <a:rPr sz="2000" b="1" i="0">
                 <a:solidFill>
                   <a:srgbClr val="1F4E3D"/>
                 </a:solidFill>
               </a:rPr>
-              <a:t>Phun sương muối 1000 giờ</a:t>
-            </a:r>
-          </a:p>
-          <a:p>
+              <a:t>Phun sương muối</a:t>
+            </a:r>
+          </a:p>
+          <a:p>
+            <a:pPr algn="ctr"/>
             <a:r>
               <a:rPr sz="2000" b="0" i="0">
                 <a:solidFill>
                   <a:srgbClr val="34404A"/>
                 </a:solidFill>
               </a:rPr>
-              <a:t>NaCl 5% ở 35°C — mô phỏng khí hậu biển</a:t>
+              <a:t>1000 giờ · NaCl 5%</a:t>
+            </a:r>
+          </a:p>
+          <a:p>
+            <a:pPr algn="ctr"/>
+            <a:r>
+              <a:rPr sz="2000" b="0" i="0">
+                <a:solidFill>
+                  <a:srgbClr val="34404A"/>
+                </a:solidFill>
+              </a:rPr>
+              <a:t>ở 35°C</a:t>
             </a:r>
           </a:p>
         </p:txBody>
@@ -15607,8 +15949,8 @@
         </p:nvSpPr>
         <p:spPr>
           <a:xfrm>
-            <a:off x="548640" y="4963332"/>
-            <a:ext cx="11090000" cy="1336666"/>
+            <a:off x="8141972" y="1830000"/>
+            <a:ext cx="3496666" cy="4470000"/>
           </a:xfrm>
           <a:prstGeom prst="roundRect">
             <a:avLst/>
@@ -15651,14 +15993,14 @@
         </p:nvSpPr>
         <p:spPr>
           <a:xfrm>
-            <a:off x="548640" y="4963332"/>
-            <a:ext cx="80000" cy="1336666"/>
+            <a:off x="8141972" y="1830000"/>
+            <a:ext cx="3496666" cy="130000"/>
           </a:xfrm>
           <a:prstGeom prst="roundRect">
             <a:avLst/>
           </a:prstGeom>
           <a:solidFill>
-            <a:srgbClr val="2C7A5A"/>
+            <a:srgbClr val="7BA893"/>
           </a:solidFill>
           <a:ln>
             <a:noFill/>
@@ -15695,14 +16037,14 @@
         </p:nvSpPr>
         <p:spPr>
           <a:xfrm>
-            <a:off x="848640" y="5301665"/>
-            <a:ext cx="660000" cy="660000"/>
+            <a:off x="9500305" y="2210000"/>
+            <a:ext cx="780000" cy="780000"/>
           </a:xfrm>
           <a:prstGeom prst="ellipse">
             <a:avLst/>
           </a:prstGeom>
           <a:solidFill>
-            <a:srgbClr val="1F4E3D"/>
+            <a:srgbClr val="7BA893"/>
           </a:solidFill>
           <a:ln>
             <a:noFill/>
@@ -15753,8 +16095,8 @@
         </p:blipFill>
         <p:spPr>
           <a:xfrm>
-            <a:off x="980640" y="5433665"/>
-            <a:ext cx="396000" cy="396000"/>
+            <a:off x="9656305" y="2366000"/>
+            <a:ext cx="468000" cy="468000"/>
           </a:xfrm>
           <a:prstGeom prst="rect">
             <a:avLst/>
@@ -15769,8 +16111,8 @@
         </p:nvSpPr>
         <p:spPr>
           <a:xfrm>
-            <a:off x="1848640" y="4963332"/>
-            <a:ext cx="9130000" cy="1336666"/>
+            <a:off x="8321972" y="3080000"/>
+            <a:ext cx="3136666" cy="2870000"/>
           </a:xfrm>
           <a:prstGeom prst="rect">
             <a:avLst/>
@@ -15778,28 +16120,41 @@
           <a:noFill/>
         </p:spPr>
         <p:txBody>
-          <a:bodyPr wrap="square" lIns="50000" rIns="50000" tIns="20000" bIns="20000" anchor="ctr">
+          <a:bodyPr wrap="square" lIns="50000" rIns="50000" tIns="20000" bIns="20000" anchor="t">
             <a:spAutoFit/>
           </a:bodyPr>
           <a:lstStyle/>
           <a:p>
-            <a:r>
-              <a:rPr sz="2158" b="1" i="0">
+            <a:pPr algn="ctr"/>
+            <a:r>
+              <a:rPr sz="2000" b="1" i="0">
                 <a:solidFill>
                   <a:srgbClr val="1F4E3D"/>
                 </a:solidFill>
               </a:rPr>
-              <a:t>Lão hóa nhanh QUV</a:t>
-            </a:r>
-          </a:p>
-          <a:p>
+              <a:t>Lão hóa QUV</a:t>
+            </a:r>
+          </a:p>
+          <a:p>
+            <a:pPr algn="ctr"/>
             <a:r>
               <a:rPr sz="2000" b="0" i="0">
                 <a:solidFill>
                   <a:srgbClr val="34404A"/>
                 </a:solidFill>
               </a:rPr>
-              <a:t>Chu trình UV-A / UV-B — phấn hóa, phai màu</a:t>
+              <a:t>Chu trình UV-A / UV-B</a:t>
+            </a:r>
+          </a:p>
+          <a:p>
+            <a:pPr algn="ctr"/>
+            <a:r>
+              <a:rPr sz="2000" b="0" i="0">
+                <a:solidFill>
+                  <a:srgbClr val="34404A"/>
+                </a:solidFill>
+              </a:rPr>
+              <a:t>phấn hóa, phai màu</a:t>
             </a:r>
           </a:p>
         </p:txBody>
@@ -15878,7 +16233,7 @@
           <a:blip r:embed="rId2">
             <a:extLst>
               <a:ext uri="{96DAC541-7B7A-43D3-8B79-37D633B846F1}">
-                <ns0:svgBlip xmlns:ns0="http://schemas.microsoft.com/office/drawing/2016/SVG/main" r:embed="rId10"/>
+                <ns0:svgBlip xmlns:ns0="http://schemas.microsoft.com/office/drawing/2016/SVG/main" r:embed="rId11"/>
               </a:ext>
             </a:extLst>
           </a:blip>
@@ -15908,7 +16263,7 @@
           <a:blip r:embed="rId3">
             <a:extLst>
               <a:ext uri="{96DAC541-7B7A-43D3-8B79-37D633B846F1}">
-                <ns1:svgBlip xmlns:ns1="http://schemas.microsoft.com/office/drawing/2016/SVG/main" r:embed="rId13"/>
+                <ns1:svgBlip xmlns:ns1="http://schemas.microsoft.com/office/drawing/2016/SVG/main" r:embed="rId15"/>
               </a:ext>
             </a:extLst>
           </a:blip>
@@ -16056,7 +16411,7 @@
           <a:blip r:embed="rId4">
             <a:extLst>
               <a:ext uri="{96DAC541-7B7A-43D3-8B79-37D633B846F1}">
-                <ns2:svgBlip xmlns:ns2="http://schemas.microsoft.com/office/drawing/2016/SVG/main" r:embed="rId9"/>
+                <ns2:svgBlip xmlns:ns2="http://schemas.microsoft.com/office/drawing/2016/SVG/main" r:embed="rId10"/>
               </a:ext>
             </a:extLst>
           </a:blip>
@@ -16187,14 +16542,102 @@
       </p:sp>
       <p:sp>
         <p:nvSpPr>
-          <p:cNvPr id="12" name="Oval 11"/>
+          <p:cNvPr id="12" name="Rounded Rectangle 11"/>
           <p:cNvSpPr/>
           <p:nvPr/>
         </p:nvSpPr>
         <p:spPr>
           <a:xfrm>
-            <a:off x="640000" y="2426600"/>
-            <a:ext cx="716800" cy="716800"/>
+            <a:off x="548640" y="1830000"/>
+            <a:ext cx="5405000" cy="2100000"/>
+          </a:xfrm>
+          <a:prstGeom prst="roundRect">
+            <a:avLst/>
+          </a:prstGeom>
+          <a:solidFill>
+            <a:srgbClr val="EEF4F0"/>
+          </a:solidFill>
+          <a:ln>
+            <a:noFill/>
+          </a:ln>
+          <a:effectLst/>
+        </p:spPr>
+        <p:style>
+          <a:lnRef idx="1">
+            <a:schemeClr val="accent1"/>
+          </a:lnRef>
+          <a:fillRef idx="3">
+            <a:schemeClr val="accent1"/>
+          </a:fillRef>
+          <a:effectRef idx="2">
+            <a:schemeClr val="accent1"/>
+          </a:effectRef>
+          <a:fontRef idx="minor">
+            <a:schemeClr val="lt1"/>
+          </a:fontRef>
+        </p:style>
+        <p:txBody>
+          <a:bodyPr rtlCol="0" anchor="ctr"/>
+          <a:lstStyle/>
+          <a:p>
+            <a:pPr algn="ctr"/>
+          </a:p>
+        </p:txBody>
+      </p:sp>
+      <p:sp>
+        <p:nvSpPr>
+          <p:cNvPr id="13" name="Rounded Rectangle 12"/>
+          <p:cNvSpPr/>
+          <p:nvPr/>
+        </p:nvSpPr>
+        <p:spPr>
+          <a:xfrm>
+            <a:off x="548640" y="1830000"/>
+            <a:ext cx="5405000" cy="70000"/>
+          </a:xfrm>
+          <a:prstGeom prst="roundRect">
+            <a:avLst/>
+          </a:prstGeom>
+          <a:solidFill>
+            <a:srgbClr val="2C7A5A"/>
+          </a:solidFill>
+          <a:ln>
+            <a:noFill/>
+          </a:ln>
+          <a:effectLst/>
+        </p:spPr>
+        <p:style>
+          <a:lnRef idx="1">
+            <a:schemeClr val="accent1"/>
+          </a:lnRef>
+          <a:fillRef idx="3">
+            <a:schemeClr val="accent1"/>
+          </a:fillRef>
+          <a:effectRef idx="2">
+            <a:schemeClr val="accent1"/>
+          </a:effectRef>
+          <a:fontRef idx="minor">
+            <a:schemeClr val="lt1"/>
+          </a:fontRef>
+        </p:style>
+        <p:txBody>
+          <a:bodyPr rtlCol="0" anchor="ctr"/>
+          <a:lstStyle/>
+          <a:p>
+            <a:pPr algn="ctr"/>
+          </a:p>
+        </p:txBody>
+      </p:sp>
+      <p:sp>
+        <p:nvSpPr>
+          <p:cNvPr id="14" name="Oval 13"/>
+          <p:cNvSpPr/>
+          <p:nvPr/>
+        </p:nvSpPr>
+        <p:spPr>
+          <a:xfrm>
+            <a:off x="848640" y="2070000"/>
+            <a:ext cx="640000" cy="640000"/>
           </a:xfrm>
           <a:prstGeom prst="ellipse">
             <a:avLst/>
@@ -16231,7 +16674,7 @@
       </p:sp>
       <p:pic>
         <p:nvPicPr>
-          <p:cNvPr id="13" name="Picture 12" descr="adhesion_w.png"/>
+          <p:cNvPr id="15" name="Picture 14" descr="adhesion_w.png"/>
           <p:cNvPicPr>
             <a:picLocks noChangeAspect="1"/>
           </p:cNvPicPr>
@@ -16241,7 +16684,7 @@
           <a:blip r:embed="rId5">
             <a:extLst>
               <a:ext uri="{96DAC541-7B7A-43D3-8B79-37D633B846F1}">
-                <ns3:svgBlip xmlns:ns3="http://schemas.microsoft.com/office/drawing/2016/SVG/main" r:embed="rId8"/>
+                <ns3:svgBlip xmlns:ns3="http://schemas.microsoft.com/office/drawing/2016/SVG/main" r:embed="rId9"/>
               </a:ext>
             </a:extLst>
           </a:blip>
@@ -16251,8 +16694,8 @@
         </p:blipFill>
         <p:spPr>
           <a:xfrm>
-            <a:off x="783360" y="2569960"/>
-            <a:ext cx="430080" cy="430080"/>
+            <a:off x="976640" y="2198000"/>
+            <a:ext cx="384000" cy="384000"/>
           </a:xfrm>
           <a:prstGeom prst="rect">
             <a:avLst/>
@@ -16261,14 +16704,14 @@
       </p:pic>
       <p:sp>
         <p:nvSpPr>
-          <p:cNvPr id="14" name="TextBox 13"/>
+          <p:cNvPr id="16" name="TextBox 15"/>
           <p:cNvSpPr txBox="1"/>
           <p:nvPr/>
         </p:nvSpPr>
         <p:spPr>
           <a:xfrm>
-            <a:off x="1736800" y="2145000"/>
-            <a:ext cx="9800000" cy="1280000"/>
+            <a:off x="848640" y="2760000"/>
+            <a:ext cx="4845000" cy="1040000"/>
           </a:xfrm>
           <a:prstGeom prst="rect">
             <a:avLst/>
@@ -16276,13 +16719,13 @@
           <a:noFill/>
         </p:spPr>
         <p:txBody>
-          <a:bodyPr wrap="square" lIns="50000" rIns="50000" tIns="20000" bIns="20000" anchor="ctr">
+          <a:bodyPr wrap="square" lIns="50000" rIns="50000" tIns="20000" bIns="20000">
             <a:spAutoFit/>
           </a:bodyPr>
           <a:lstStyle/>
           <a:p>
             <a:r>
-              <a:rPr sz="2075" b="1" i="0">
+              <a:rPr sz="2000" b="1" i="0">
                 <a:solidFill>
                   <a:srgbClr val="1F4E3D"/>
                 </a:solidFill>
@@ -16297,21 +16740,109 @@
                   <a:srgbClr val="34404A"/>
                 </a:solidFill>
               </a:rPr>
-              <a:t>Đo lực kéo đứt màng sơn (MPa)</a:t>
-            </a:r>
-          </a:p>
-        </p:txBody>
-      </p:sp>
-      <p:sp>
-        <p:nvSpPr>
-          <p:cNvPr id="15" name="Oval 14"/>
+              <a:t>Đo lực kéo đứt màng (MPa)</a:t>
+            </a:r>
+          </a:p>
+        </p:txBody>
+      </p:sp>
+      <p:sp>
+        <p:nvSpPr>
+          <p:cNvPr id="17" name="Rounded Rectangle 16"/>
           <p:cNvSpPr/>
           <p:nvPr/>
         </p:nvSpPr>
         <p:spPr>
           <a:xfrm>
-            <a:off x="640000" y="3706600"/>
-            <a:ext cx="716800" cy="716800"/>
+            <a:off x="6233640" y="1830000"/>
+            <a:ext cx="5405000" cy="2100000"/>
+          </a:xfrm>
+          <a:prstGeom prst="roundRect">
+            <a:avLst/>
+          </a:prstGeom>
+          <a:solidFill>
+            <a:srgbClr val="EEF4F0"/>
+          </a:solidFill>
+          <a:ln>
+            <a:noFill/>
+          </a:ln>
+          <a:effectLst/>
+        </p:spPr>
+        <p:style>
+          <a:lnRef idx="1">
+            <a:schemeClr val="accent1"/>
+          </a:lnRef>
+          <a:fillRef idx="3">
+            <a:schemeClr val="accent1"/>
+          </a:fillRef>
+          <a:effectRef idx="2">
+            <a:schemeClr val="accent1"/>
+          </a:effectRef>
+          <a:fontRef idx="minor">
+            <a:schemeClr val="lt1"/>
+          </a:fontRef>
+        </p:style>
+        <p:txBody>
+          <a:bodyPr rtlCol="0" anchor="ctr"/>
+          <a:lstStyle/>
+          <a:p>
+            <a:pPr algn="ctr"/>
+          </a:p>
+        </p:txBody>
+      </p:sp>
+      <p:sp>
+        <p:nvSpPr>
+          <p:cNvPr id="18" name="Rounded Rectangle 17"/>
+          <p:cNvSpPr/>
+          <p:nvPr/>
+        </p:nvSpPr>
+        <p:spPr>
+          <a:xfrm>
+            <a:off x="6233640" y="1830000"/>
+            <a:ext cx="5405000" cy="70000"/>
+          </a:xfrm>
+          <a:prstGeom prst="roundRect">
+            <a:avLst/>
+          </a:prstGeom>
+          <a:solidFill>
+            <a:srgbClr val="2C7A5A"/>
+          </a:solidFill>
+          <a:ln>
+            <a:noFill/>
+          </a:ln>
+          <a:effectLst/>
+        </p:spPr>
+        <p:style>
+          <a:lnRef idx="1">
+            <a:schemeClr val="accent1"/>
+          </a:lnRef>
+          <a:fillRef idx="3">
+            <a:schemeClr val="accent1"/>
+          </a:fillRef>
+          <a:effectRef idx="2">
+            <a:schemeClr val="accent1"/>
+          </a:effectRef>
+          <a:fontRef idx="minor">
+            <a:schemeClr val="lt1"/>
+          </a:fontRef>
+        </p:style>
+        <p:txBody>
+          <a:bodyPr rtlCol="0" anchor="ctr"/>
+          <a:lstStyle/>
+          <a:p>
+            <a:pPr algn="ctr"/>
+          </a:p>
+        </p:txBody>
+      </p:sp>
+      <p:sp>
+        <p:nvSpPr>
+          <p:cNvPr id="19" name="Oval 18"/>
+          <p:cNvSpPr/>
+          <p:nvPr/>
+        </p:nvSpPr>
+        <p:spPr>
+          <a:xfrm>
+            <a:off x="6533640" y="2070000"/>
+            <a:ext cx="640000" cy="640000"/>
           </a:xfrm>
           <a:prstGeom prst="ellipse">
             <a:avLst/>
@@ -16348,7 +16879,7 @@
       </p:sp>
       <p:pic>
         <p:nvPicPr>
-          <p:cNvPr id="16" name="Picture 15" descr="quality_check_w.png"/>
+          <p:cNvPr id="20" name="Picture 19" descr="quality_check_w.png"/>
           <p:cNvPicPr>
             <a:picLocks noChangeAspect="1"/>
           </p:cNvPicPr>
@@ -16358,7 +16889,7 @@
           <a:blip r:embed="rId6">
             <a:extLst>
               <a:ext uri="{96DAC541-7B7A-43D3-8B79-37D633B846F1}">
-                <ns4:svgBlip xmlns:ns4="http://schemas.microsoft.com/office/drawing/2016/SVG/main" r:embed="rId12"/>
+                <ns4:svgBlip xmlns:ns4="http://schemas.microsoft.com/office/drawing/2016/SVG/main" r:embed="rId14"/>
               </a:ext>
             </a:extLst>
           </a:blip>
@@ -16368,8 +16899,8 @@
         </p:blipFill>
         <p:spPr>
           <a:xfrm>
-            <a:off x="783360" y="3849960"/>
-            <a:ext cx="430080" cy="430080"/>
+            <a:off x="6661640" y="2198000"/>
+            <a:ext cx="384000" cy="384000"/>
           </a:xfrm>
           <a:prstGeom prst="rect">
             <a:avLst/>
@@ -16378,14 +16909,14 @@
       </p:pic>
       <p:sp>
         <p:nvSpPr>
-          <p:cNvPr id="17" name="TextBox 16"/>
+          <p:cNvPr id="21" name="TextBox 20"/>
           <p:cNvSpPr txBox="1"/>
           <p:nvPr/>
         </p:nvSpPr>
         <p:spPr>
           <a:xfrm>
-            <a:off x="1736800" y="3425000"/>
-            <a:ext cx="9800000" cy="1280000"/>
+            <a:off x="6533640" y="2760000"/>
+            <a:ext cx="4845000" cy="1040000"/>
           </a:xfrm>
           <a:prstGeom prst="rect">
             <a:avLst/>
@@ -16393,13 +16924,13 @@
           <a:noFill/>
         </p:spPr>
         <p:txBody>
-          <a:bodyPr wrap="square" lIns="50000" rIns="50000" tIns="20000" bIns="20000" anchor="ctr">
+          <a:bodyPr wrap="square" lIns="50000" rIns="50000" tIns="20000" bIns="20000">
             <a:spAutoFit/>
           </a:bodyPr>
           <a:lstStyle/>
           <a:p>
             <a:r>
-              <a:rPr sz="2075" b="1" i="0">
+              <a:rPr sz="2000" b="1" i="0">
                 <a:solidFill>
                   <a:srgbClr val="1F4E3D"/>
                 </a:solidFill>
@@ -16414,21 +16945,109 @@
                   <a:srgbClr val="34404A"/>
                 </a:solidFill>
               </a:rPr>
-              <a:t>Kiểm tra độ mịn hạt sau nghiền</a:t>
-            </a:r>
-          </a:p>
-        </p:txBody>
-      </p:sp>
-      <p:sp>
-        <p:nvSpPr>
-          <p:cNvPr id="18" name="Oval 17"/>
+              <a:t>Độ mịn hạt sau nghiền</a:t>
+            </a:r>
+          </a:p>
+        </p:txBody>
+      </p:sp>
+      <p:sp>
+        <p:nvSpPr>
+          <p:cNvPr id="22" name="Rounded Rectangle 21"/>
           <p:cNvSpPr/>
           <p:nvPr/>
         </p:nvSpPr>
         <p:spPr>
           <a:xfrm>
-            <a:off x="640000" y="4986600"/>
-            <a:ext cx="716800" cy="716800"/>
+            <a:off x="548640" y="4200000"/>
+            <a:ext cx="5405000" cy="2100000"/>
+          </a:xfrm>
+          <a:prstGeom prst="roundRect">
+            <a:avLst/>
+          </a:prstGeom>
+          <a:solidFill>
+            <a:srgbClr val="EEF4F0"/>
+          </a:solidFill>
+          <a:ln>
+            <a:noFill/>
+          </a:ln>
+          <a:effectLst/>
+        </p:spPr>
+        <p:style>
+          <a:lnRef idx="1">
+            <a:schemeClr val="accent1"/>
+          </a:lnRef>
+          <a:fillRef idx="3">
+            <a:schemeClr val="accent1"/>
+          </a:fillRef>
+          <a:effectRef idx="2">
+            <a:schemeClr val="accent1"/>
+          </a:effectRef>
+          <a:fontRef idx="minor">
+            <a:schemeClr val="lt1"/>
+          </a:fontRef>
+        </p:style>
+        <p:txBody>
+          <a:bodyPr rtlCol="0" anchor="ctr"/>
+          <a:lstStyle/>
+          <a:p>
+            <a:pPr algn="ctr"/>
+          </a:p>
+        </p:txBody>
+      </p:sp>
+      <p:sp>
+        <p:nvSpPr>
+          <p:cNvPr id="23" name="Rounded Rectangle 22"/>
+          <p:cNvSpPr/>
+          <p:nvPr/>
+        </p:nvSpPr>
+        <p:spPr>
+          <a:xfrm>
+            <a:off x="548640" y="4200000"/>
+            <a:ext cx="5405000" cy="70000"/>
+          </a:xfrm>
+          <a:prstGeom prst="roundRect">
+            <a:avLst/>
+          </a:prstGeom>
+          <a:solidFill>
+            <a:srgbClr val="2C7A5A"/>
+          </a:solidFill>
+          <a:ln>
+            <a:noFill/>
+          </a:ln>
+          <a:effectLst/>
+        </p:spPr>
+        <p:style>
+          <a:lnRef idx="1">
+            <a:schemeClr val="accent1"/>
+          </a:lnRef>
+          <a:fillRef idx="3">
+            <a:schemeClr val="accent1"/>
+          </a:fillRef>
+          <a:effectRef idx="2">
+            <a:schemeClr val="accent1"/>
+          </a:effectRef>
+          <a:fontRef idx="minor">
+            <a:schemeClr val="lt1"/>
+          </a:fontRef>
+        </p:style>
+        <p:txBody>
+          <a:bodyPr rtlCol="0" anchor="ctr"/>
+          <a:lstStyle/>
+          <a:p>
+            <a:pPr algn="ctr"/>
+          </a:p>
+        </p:txBody>
+      </p:sp>
+      <p:sp>
+        <p:nvSpPr>
+          <p:cNvPr id="24" name="Oval 23"/>
+          <p:cNvSpPr/>
+          <p:nvPr/>
+        </p:nvSpPr>
+        <p:spPr>
+          <a:xfrm>
+            <a:off x="848640" y="4440000"/>
+            <a:ext cx="640000" cy="640000"/>
           </a:xfrm>
           <a:prstGeom prst="ellipse">
             <a:avLst/>
@@ -16465,7 +17084,7 @@
       </p:sp>
       <p:pic>
         <p:nvPicPr>
-          <p:cNvPr id="19" name="Picture 18" descr="microscope_w.png"/>
+          <p:cNvPr id="25" name="Picture 24" descr="microscope_w.png"/>
           <p:cNvPicPr>
             <a:picLocks noChangeAspect="1"/>
           </p:cNvPicPr>
@@ -16475,7 +17094,7 @@
           <a:blip r:embed="rId7">
             <a:extLst>
               <a:ext uri="{96DAC541-7B7A-43D3-8B79-37D633B846F1}">
-                <ns5:svgBlip xmlns:ns5="http://schemas.microsoft.com/office/drawing/2016/SVG/main" r:embed="rId11"/>
+                <ns5:svgBlip xmlns:ns5="http://schemas.microsoft.com/office/drawing/2016/SVG/main" r:embed="rId13"/>
               </a:ext>
             </a:extLst>
           </a:blip>
@@ -16485,8 +17104,8 @@
         </p:blipFill>
         <p:spPr>
           <a:xfrm>
-            <a:off x="783360" y="5129960"/>
-            <a:ext cx="430080" cy="430080"/>
+            <a:off x="976640" y="4568000"/>
+            <a:ext cx="384000" cy="384000"/>
           </a:xfrm>
           <a:prstGeom prst="rect">
             <a:avLst/>
@@ -16495,14 +17114,14 @@
       </p:pic>
       <p:sp>
         <p:nvSpPr>
-          <p:cNvPr id="20" name="TextBox 19"/>
+          <p:cNvPr id="26" name="TextBox 25"/>
           <p:cNvSpPr txBox="1"/>
           <p:nvPr/>
         </p:nvSpPr>
         <p:spPr>
           <a:xfrm>
-            <a:off x="1736800" y="4705000"/>
-            <a:ext cx="9800000" cy="1280000"/>
+            <a:off x="848640" y="5130000"/>
+            <a:ext cx="4845000" cy="1040000"/>
           </a:xfrm>
           <a:prstGeom prst="rect">
             <a:avLst/>
@@ -16510,13 +17129,13 @@
           <a:noFill/>
         </p:spPr>
         <p:txBody>
-          <a:bodyPr wrap="square" lIns="50000" rIns="50000" tIns="20000" bIns="20000" anchor="ctr">
+          <a:bodyPr wrap="square" lIns="50000" rIns="50000" tIns="20000" bIns="20000">
             <a:spAutoFit/>
           </a:bodyPr>
           <a:lstStyle/>
           <a:p>
             <a:r>
-              <a:rPr sz="2075" b="1" i="0">
+              <a:rPr sz="2000" b="1" i="0">
                 <a:solidFill>
                   <a:srgbClr val="1F4E3D"/>
                 </a:solidFill>
@@ -16531,7 +17150,212 @@
                   <a:srgbClr val="34404A"/>
                 </a:solidFill>
               </a:rPr>
-              <a:t>Đánh giá độ bền dài hạn của màng</a:t>
+              <a:t>Đánh giá độ bền dài hạn</a:t>
+            </a:r>
+          </a:p>
+        </p:txBody>
+      </p:sp>
+      <p:sp>
+        <p:nvSpPr>
+          <p:cNvPr id="27" name="Rounded Rectangle 26"/>
+          <p:cNvSpPr/>
+          <p:nvPr/>
+        </p:nvSpPr>
+        <p:spPr>
+          <a:xfrm>
+            <a:off x="6233640" y="4200000"/>
+            <a:ext cx="5405000" cy="2100000"/>
+          </a:xfrm>
+          <a:prstGeom prst="roundRect">
+            <a:avLst/>
+          </a:prstGeom>
+          <a:solidFill>
+            <a:srgbClr val="EEF4F0"/>
+          </a:solidFill>
+          <a:ln>
+            <a:noFill/>
+          </a:ln>
+          <a:effectLst/>
+        </p:spPr>
+        <p:style>
+          <a:lnRef idx="1">
+            <a:schemeClr val="accent1"/>
+          </a:lnRef>
+          <a:fillRef idx="3">
+            <a:schemeClr val="accent1"/>
+          </a:fillRef>
+          <a:effectRef idx="2">
+            <a:schemeClr val="accent1"/>
+          </a:effectRef>
+          <a:fontRef idx="minor">
+            <a:schemeClr val="lt1"/>
+          </a:fontRef>
+        </p:style>
+        <p:txBody>
+          <a:bodyPr rtlCol="0" anchor="ctr"/>
+          <a:lstStyle/>
+          <a:p>
+            <a:pPr algn="ctr"/>
+          </a:p>
+        </p:txBody>
+      </p:sp>
+      <p:sp>
+        <p:nvSpPr>
+          <p:cNvPr id="28" name="Rounded Rectangle 27"/>
+          <p:cNvSpPr/>
+          <p:nvPr/>
+        </p:nvSpPr>
+        <p:spPr>
+          <a:xfrm>
+            <a:off x="6233640" y="4200000"/>
+            <a:ext cx="5405000" cy="70000"/>
+          </a:xfrm>
+          <a:prstGeom prst="roundRect">
+            <a:avLst/>
+          </a:prstGeom>
+          <a:solidFill>
+            <a:srgbClr val="2C7A5A"/>
+          </a:solidFill>
+          <a:ln>
+            <a:noFill/>
+          </a:ln>
+          <a:effectLst/>
+        </p:spPr>
+        <p:style>
+          <a:lnRef idx="1">
+            <a:schemeClr val="accent1"/>
+          </a:lnRef>
+          <a:fillRef idx="3">
+            <a:schemeClr val="accent1"/>
+          </a:fillRef>
+          <a:effectRef idx="2">
+            <a:schemeClr val="accent1"/>
+          </a:effectRef>
+          <a:fontRef idx="minor">
+            <a:schemeClr val="lt1"/>
+          </a:fontRef>
+        </p:style>
+        <p:txBody>
+          <a:bodyPr rtlCol="0" anchor="ctr"/>
+          <a:lstStyle/>
+          <a:p>
+            <a:pPr algn="ctr"/>
+          </a:p>
+        </p:txBody>
+      </p:sp>
+      <p:sp>
+        <p:nvSpPr>
+          <p:cNvPr id="29" name="Oval 28"/>
+          <p:cNvSpPr/>
+          <p:nvPr/>
+        </p:nvSpPr>
+        <p:spPr>
+          <a:xfrm>
+            <a:off x="6533640" y="4440000"/>
+            <a:ext cx="640000" cy="640000"/>
+          </a:xfrm>
+          <a:prstGeom prst="ellipse">
+            <a:avLst/>
+          </a:prstGeom>
+          <a:solidFill>
+            <a:srgbClr val="1F4E3D"/>
+          </a:solidFill>
+          <a:ln>
+            <a:noFill/>
+          </a:ln>
+          <a:effectLst/>
+        </p:spPr>
+        <p:style>
+          <a:lnRef idx="1">
+            <a:schemeClr val="accent1"/>
+          </a:lnRef>
+          <a:fillRef idx="3">
+            <a:schemeClr val="accent1"/>
+          </a:fillRef>
+          <a:effectRef idx="2">
+            <a:schemeClr val="accent1"/>
+          </a:effectRef>
+          <a:fontRef idx="minor">
+            <a:schemeClr val="lt1"/>
+          </a:fontRef>
+        </p:style>
+        <p:txBody>
+          <a:bodyPr rtlCol="0" anchor="ctr"/>
+          <a:lstStyle/>
+          <a:p>
+            <a:pPr algn="ctr"/>
+          </a:p>
+        </p:txBody>
+      </p:sp>
+      <p:pic>
+        <p:nvPicPr>
+          <p:cNvPr id="30" name="Picture 29" descr="materials_w.png"/>
+          <p:cNvPicPr>
+            <a:picLocks noChangeAspect="1"/>
+          </p:cNvPicPr>
+          <p:nvPr/>
+        </p:nvPicPr>
+        <p:blipFill>
+          <a:blip r:embed="rId8">
+            <a:extLst>
+              <a:ext uri="{96DAC541-7B7A-43D3-8B79-37D633B846F1}">
+                <ns6:svgBlip xmlns:ns6="http://schemas.microsoft.com/office/drawing/2016/SVG/main" r:embed="rId12"/>
+              </a:ext>
+            </a:extLst>
+          </a:blip>
+          <a:stretch>
+            <a:fillRect/>
+          </a:stretch>
+        </p:blipFill>
+        <p:spPr>
+          <a:xfrm>
+            <a:off x="6661640" y="4568000"/>
+            <a:ext cx="384000" cy="384000"/>
+          </a:xfrm>
+          <a:prstGeom prst="rect">
+            <a:avLst/>
+          </a:prstGeom>
+        </p:spPr>
+      </p:pic>
+      <p:sp>
+        <p:nvSpPr>
+          <p:cNvPr id="31" name="TextBox 30"/>
+          <p:cNvSpPr txBox="1"/>
+          <p:nvPr/>
+        </p:nvSpPr>
+        <p:spPr>
+          <a:xfrm>
+            <a:off x="6533640" y="5130000"/>
+            <a:ext cx="4845000" cy="1040000"/>
+          </a:xfrm>
+          <a:prstGeom prst="rect">
+            <a:avLst/>
+          </a:prstGeom>
+          <a:noFill/>
+        </p:spPr>
+        <p:txBody>
+          <a:bodyPr wrap="square" lIns="50000" rIns="50000" tIns="20000" bIns="20000">
+            <a:spAutoFit/>
+          </a:bodyPr>
+          <a:lstStyle/>
+          <a:p>
+            <a:r>
+              <a:rPr sz="2000" b="1" i="0">
+                <a:solidFill>
+                  <a:srgbClr val="1F4E3D"/>
+                </a:solidFill>
+              </a:rPr>
+              <a:t>Cốc / thùng chứa mẫu</a:t>
+            </a:r>
+          </a:p>
+          <a:p>
+            <a:r>
+              <a:rPr sz="2000" b="0" i="0">
+                <a:solidFill>
+                  <a:srgbClr val="34404A"/>
+                </a:solidFill>
+              </a:rPr>
+              <a:t>Chứa &amp; pha mẫu sơn</a:t>
             </a:r>
           </a:p>
         </p:txBody>
@@ -16610,7 +17434,7 @@
           <a:blip r:embed="rId2">
             <a:extLst>
               <a:ext uri="{96DAC541-7B7A-43D3-8B79-37D633B846F1}">
-                <ns0:svgBlip xmlns:ns0="http://schemas.microsoft.com/office/drawing/2016/SVG/main" r:embed="rId6"/>
+                <ns0:svgBlip xmlns:ns0="http://schemas.microsoft.com/office/drawing/2016/SVG/main" r:embed="rId4"/>
               </a:ext>
             </a:extLst>
           </a:blip>
@@ -16673,7 +17497,7 @@
           <a:blip r:embed="rId3">
             <a:extLst>
               <a:ext uri="{96DAC541-7B7A-43D3-8B79-37D633B846F1}">
-                <ns1:svgBlip xmlns:ns1="http://schemas.microsoft.com/office/drawing/2016/SVG/main" r:embed="rId7"/>
+                <ns1:svgBlip xmlns:ns1="http://schemas.microsoft.com/office/drawing/2016/SVG/main" r:embed="rId5"/>
               </a:ext>
             </a:extLst>
           </a:blip>
@@ -16691,39 +17515,9 @@
           </a:prstGeom>
         </p:spPr>
       </p:pic>
-      <p:pic>
-        <p:nvPicPr>
-          <p:cNvPr id="6" name="Picture 5" descr="deco_drip_white.png"/>
-          <p:cNvPicPr>
-            <a:picLocks noChangeAspect="1"/>
-          </p:cNvPicPr>
-          <p:nvPr/>
-        </p:nvPicPr>
-        <p:blipFill>
-          <a:blip r:embed="rId4">
-            <a:extLst>
-              <a:ext uri="{96DAC541-7B7A-43D3-8B79-37D633B846F1}">
-                <ns2:svgBlip xmlns:ns2="http://schemas.microsoft.com/office/drawing/2016/SVG/main" r:embed="rId5"/>
-              </a:ext>
-            </a:extLst>
-          </a:blip>
-          <a:stretch>
-            <a:fillRect/>
-          </a:stretch>
-        </p:blipFill>
-        <p:spPr>
-          <a:xfrm>
-            <a:off x="780000" y="4820000"/>
-            <a:ext cx="880000" cy="1180000"/>
-          </a:xfrm>
-          <a:prstGeom prst="rect">
-            <a:avLst/>
-          </a:prstGeom>
-        </p:spPr>
-      </p:pic>
-      <p:sp>
-        <p:nvSpPr>
-          <p:cNvPr id="7" name="Rounded Rectangle 6"/>
+      <p:sp>
+        <p:nvSpPr>
+          <p:cNvPr id="6" name="Rounded Rectangle 5"/>
           <p:cNvSpPr/>
           <p:nvPr/>
         </p:nvSpPr>
@@ -16767,7 +17561,7 @@
       </p:sp>
       <p:sp>
         <p:nvSpPr>
-          <p:cNvPr id="8" name="Oval 7"/>
+          <p:cNvPr id="7" name="Oval 6"/>
           <p:cNvSpPr/>
           <p:nvPr/>
         </p:nvSpPr>
@@ -16819,7 +17613,7 @@
       </p:sp>
       <p:sp>
         <p:nvSpPr>
-          <p:cNvPr id="9" name="TextBox 8"/>
+          <p:cNvPr id="8" name="TextBox 7"/>
           <p:cNvSpPr txBox="1"/>
           <p:nvPr/>
         </p:nvSpPr>
@@ -16852,7 +17646,7 @@
       </p:sp>
       <p:sp>
         <p:nvSpPr>
-          <p:cNvPr id="10" name="TextBox 9"/>
+          <p:cNvPr id="9" name="TextBox 8"/>
           <p:cNvSpPr txBox="1"/>
           <p:nvPr/>
         </p:nvSpPr>
@@ -17118,7 +17912,7 @@
                   <a:srgbClr val="1F4E3D"/>
                 </a:solidFill>
               </a:rPr>
-              <a:t>Bốn sự cố điển hình (1/2)</a:t>
+              <a:t>Sự cố điển hình (1/2)</a:t>
             </a:r>
           </a:p>
         </p:txBody>
@@ -17273,97 +18067,9 @@
         <p:spPr>
           <a:xfrm>
             <a:off x="548640" y="1830000"/>
-            <a:ext cx="11090000" cy="2120000"/>
+            <a:ext cx="3550000" cy="2110000"/>
           </a:xfrm>
           <a:prstGeom prst="roundRect">
-            <a:avLst/>
-          </a:prstGeom>
-          <a:solidFill>
-            <a:srgbClr val="EEF4F0"/>
-          </a:solidFill>
-          <a:ln>
-            <a:noFill/>
-          </a:ln>
-          <a:effectLst/>
-        </p:spPr>
-        <p:style>
-          <a:lnRef idx="1">
-            <a:schemeClr val="accent1"/>
-          </a:lnRef>
-          <a:fillRef idx="3">
-            <a:schemeClr val="accent1"/>
-          </a:fillRef>
-          <a:effectRef idx="2">
-            <a:schemeClr val="accent1"/>
-          </a:effectRef>
-          <a:fontRef idx="minor">
-            <a:schemeClr val="lt1"/>
-          </a:fontRef>
-        </p:style>
-        <p:txBody>
-          <a:bodyPr rtlCol="0" anchor="ctr"/>
-          <a:lstStyle/>
-          <a:p>
-            <a:pPr algn="ctr"/>
-          </a:p>
-        </p:txBody>
-      </p:sp>
-      <p:sp>
-        <p:nvSpPr>
-          <p:cNvPr id="13" name="Rounded Rectangle 12"/>
-          <p:cNvSpPr/>
-          <p:nvPr/>
-        </p:nvSpPr>
-        <p:spPr>
-          <a:xfrm>
-            <a:off x="548640" y="1830000"/>
-            <a:ext cx="80000" cy="2120000"/>
-          </a:xfrm>
-          <a:prstGeom prst="roundRect">
-            <a:avLst/>
-          </a:prstGeom>
-          <a:solidFill>
-            <a:srgbClr val="2C7A5A"/>
-          </a:solidFill>
-          <a:ln>
-            <a:noFill/>
-          </a:ln>
-          <a:effectLst/>
-        </p:spPr>
-        <p:style>
-          <a:lnRef idx="1">
-            <a:schemeClr val="accent1"/>
-          </a:lnRef>
-          <a:fillRef idx="3">
-            <a:schemeClr val="accent1"/>
-          </a:fillRef>
-          <a:effectRef idx="2">
-            <a:schemeClr val="accent1"/>
-          </a:effectRef>
-          <a:fontRef idx="minor">
-            <a:schemeClr val="lt1"/>
-          </a:fontRef>
-        </p:style>
-        <p:txBody>
-          <a:bodyPr rtlCol="0" anchor="ctr"/>
-          <a:lstStyle/>
-          <a:p>
-            <a:pPr algn="ctr"/>
-          </a:p>
-        </p:txBody>
-      </p:sp>
-      <p:sp>
-        <p:nvSpPr>
-          <p:cNvPr id="14" name="Oval 13"/>
-          <p:cNvSpPr/>
-          <p:nvPr/>
-        </p:nvSpPr>
-        <p:spPr>
-          <a:xfrm>
-            <a:off x="848640" y="2560000"/>
-            <a:ext cx="660000" cy="660000"/>
-          </a:xfrm>
-          <a:prstGeom prst="ellipse">
             <a:avLst/>
           </a:prstGeom>
           <a:solidFill>
@@ -17396,9 +18102,53 @@
           </a:p>
         </p:txBody>
       </p:sp>
+      <p:sp>
+        <p:nvSpPr>
+          <p:cNvPr id="13" name="Oval 12"/>
+          <p:cNvSpPr/>
+          <p:nvPr/>
+        </p:nvSpPr>
+        <p:spPr>
+          <a:xfrm>
+            <a:off x="848640" y="2130000"/>
+            <a:ext cx="640000" cy="640000"/>
+          </a:xfrm>
+          <a:prstGeom prst="ellipse">
+            <a:avLst/>
+          </a:prstGeom>
+          <a:solidFill>
+            <a:srgbClr val="C88A2E"/>
+          </a:solidFill>
+          <a:ln>
+            <a:noFill/>
+          </a:ln>
+          <a:effectLst/>
+        </p:spPr>
+        <p:style>
+          <a:lnRef idx="1">
+            <a:schemeClr val="accent1"/>
+          </a:lnRef>
+          <a:fillRef idx="3">
+            <a:schemeClr val="accent1"/>
+          </a:fillRef>
+          <a:effectRef idx="2">
+            <a:schemeClr val="accent1"/>
+          </a:effectRef>
+          <a:fontRef idx="minor">
+            <a:schemeClr val="lt1"/>
+          </a:fontRef>
+        </p:style>
+        <p:txBody>
+          <a:bodyPr rtlCol="0" anchor="ctr"/>
+          <a:lstStyle/>
+          <a:p>
+            <a:pPr algn="ctr"/>
+          </a:p>
+        </p:txBody>
+      </p:sp>
       <p:pic>
         <p:nvPicPr>
-          <p:cNvPr id="15" name="Picture 14" descr="warning_tri_w.png"/>
+          <p:cNvPr id="14" name="Picture 13" descr="warning_tri_w.png"/>
           <p:cNvPicPr>
             <a:picLocks noChangeAspect="1"/>
           </p:cNvPicPr>
@@ -17418,8 +18168,8 @@
         </p:blipFill>
         <p:spPr>
           <a:xfrm>
-            <a:off x="980640" y="2692000"/>
-            <a:ext cx="396000" cy="396000"/>
+            <a:off x="976640" y="2258000"/>
+            <a:ext cx="384000" cy="384000"/>
           </a:xfrm>
           <a:prstGeom prst="rect">
             <a:avLst/>
@@ -17428,14 +18178,91 @@
       </p:pic>
       <p:sp>
         <p:nvSpPr>
-          <p:cNvPr id="16" name="TextBox 15"/>
+          <p:cNvPr id="15" name="TextBox 14"/>
           <p:cNvSpPr txBox="1"/>
           <p:nvPr/>
         </p:nvSpPr>
         <p:spPr>
           <a:xfrm>
-            <a:off x="1848640" y="1830000"/>
-            <a:ext cx="9130000" cy="2120000"/>
+            <a:off x="828640" y="2870000"/>
+            <a:ext cx="3050000" cy="910000"/>
+          </a:xfrm>
+          <a:prstGeom prst="rect">
+            <a:avLst/>
+          </a:prstGeom>
+          <a:noFill/>
+        </p:spPr>
+        <p:txBody>
+          <a:bodyPr wrap="square" lIns="50000" rIns="50000" tIns="20000" bIns="20000" anchor="t">
+            <a:spAutoFit/>
+          </a:bodyPr>
+          <a:lstStyle/>
+          <a:p>
+            <a:r>
+              <a:rPr sz="2000" b="1" i="0">
+                <a:solidFill>
+                  <a:srgbClr val="FFFFFF"/>
+                </a:solidFill>
+              </a:rPr>
+              <a:t>Sốc nhựa</a:t>
+            </a:r>
+          </a:p>
+        </p:txBody>
+      </p:sp>
+      <p:sp>
+        <p:nvSpPr>
+          <p:cNvPr id="16" name="Rounded Rectangle 15"/>
+          <p:cNvSpPr/>
+          <p:nvPr/>
+        </p:nvSpPr>
+        <p:spPr>
+          <a:xfrm>
+            <a:off x="4298640" y="1830000"/>
+            <a:ext cx="3570000" cy="2110000"/>
+          </a:xfrm>
+          <a:prstGeom prst="roundRect">
+            <a:avLst/>
+          </a:prstGeom>
+          <a:solidFill>
+            <a:srgbClr val="F6EEDF"/>
+          </a:solidFill>
+          <a:ln>
+            <a:noFill/>
+          </a:ln>
+          <a:effectLst/>
+        </p:spPr>
+        <p:style>
+          <a:lnRef idx="1">
+            <a:schemeClr val="accent1"/>
+          </a:lnRef>
+          <a:fillRef idx="3">
+            <a:schemeClr val="accent1"/>
+          </a:fillRef>
+          <a:effectRef idx="2">
+            <a:schemeClr val="accent1"/>
+          </a:effectRef>
+          <a:fontRef idx="minor">
+            <a:schemeClr val="lt1"/>
+          </a:fontRef>
+        </p:style>
+        <p:txBody>
+          <a:bodyPr rtlCol="0" anchor="ctr"/>
+          <a:lstStyle/>
+          <a:p>
+            <a:pPr algn="ctr"/>
+          </a:p>
+        </p:txBody>
+      </p:sp>
+      <p:sp>
+        <p:nvSpPr>
+          <p:cNvPr id="17" name="TextBox 16"/>
+          <p:cNvSpPr txBox="1"/>
+          <p:nvPr/>
+        </p:nvSpPr>
+        <p:spPr>
+          <a:xfrm>
+            <a:off x="4538640" y="1980000"/>
+            <a:ext cx="3110000" cy="1810000"/>
           </a:xfrm>
           <a:prstGeom prst="rect">
             <a:avLst/>
@@ -17449,12 +18276,12 @@
           <a:lstStyle/>
           <a:p>
             <a:r>
-              <a:rPr sz="2158" b="1" i="0">
-                <a:solidFill>
-                  <a:srgbClr val="1F4E3D"/>
-                </a:solidFill>
-              </a:rPr>
-              <a:t>Sốc nhựa — vón cục, kết tủa</a:t>
+              <a:rPr sz="2000" b="1" i="0">
+                <a:solidFill>
+                  <a:srgbClr val="C88A2E"/>
+                </a:solidFill>
+              </a:rPr>
+              <a:t>Nguyên nhân</a:t>
             </a:r>
           </a:p>
           <a:p>
@@ -17464,31 +18291,21 @@
                   <a:srgbClr val="34404A"/>
                 </a:solidFill>
               </a:rPr>
-              <a:t>Nguyên nhân: dung môi mới có chỉ số KB thấp</a:t>
-            </a:r>
-          </a:p>
-          <a:p>
-            <a:r>
-              <a:rPr sz="2000" b="0" i="0">
-                <a:solidFill>
-                  <a:srgbClr val="34404A"/>
-                </a:solidFill>
-              </a:rPr>
-              <a:t>Xử lý: châm dung môi phân cực + khuấy nghiền</a:t>
-            </a:r>
-          </a:p>
-        </p:txBody>
-      </p:sp>
-      <p:sp>
-        <p:nvSpPr>
-          <p:cNvPr id="17" name="Rounded Rectangle 16"/>
+              <a:t>dung môi mới có chỉ số KB thấp</a:t>
+            </a:r>
+          </a:p>
+        </p:txBody>
+      </p:sp>
+      <p:sp>
+        <p:nvSpPr>
+          <p:cNvPr id="18" name="Rounded Rectangle 17"/>
           <p:cNvSpPr/>
           <p:nvPr/>
         </p:nvSpPr>
         <p:spPr>
           <a:xfrm>
-            <a:off x="548640" y="4180000"/>
-            <a:ext cx="11090000" cy="2120000"/>
+            <a:off x="8068640" y="1830000"/>
+            <a:ext cx="3570000" cy="2110000"/>
           </a:xfrm>
           <a:prstGeom prst="roundRect">
             <a:avLst/>
@@ -17525,60 +18342,59 @@
       </p:sp>
       <p:sp>
         <p:nvSpPr>
-          <p:cNvPr id="18" name="Rounded Rectangle 17"/>
+          <p:cNvPr id="19" name="TextBox 18"/>
+          <p:cNvSpPr txBox="1"/>
+          <p:nvPr/>
+        </p:nvSpPr>
+        <p:spPr>
+          <a:xfrm>
+            <a:off x="8308640" y="1980000"/>
+            <a:ext cx="3110000" cy="1810000"/>
+          </a:xfrm>
+          <a:prstGeom prst="rect">
+            <a:avLst/>
+          </a:prstGeom>
+          <a:noFill/>
+        </p:spPr>
+        <p:txBody>
+          <a:bodyPr wrap="square" lIns="50000" rIns="50000" tIns="20000" bIns="20000" anchor="ctr">
+            <a:spAutoFit/>
+          </a:bodyPr>
+          <a:lstStyle/>
+          <a:p>
+            <a:r>
+              <a:rPr sz="2000" b="1" i="0">
+                <a:solidFill>
+                  <a:srgbClr val="2C7A5A"/>
+                </a:solidFill>
+              </a:rPr>
+              <a:t>Xử lý</a:t>
+            </a:r>
+          </a:p>
+          <a:p>
+            <a:r>
+              <a:rPr sz="2000" b="0" i="0">
+                <a:solidFill>
+                  <a:srgbClr val="34404A"/>
+                </a:solidFill>
+              </a:rPr>
+              <a:t>châm dung môi phân cực + khuấy nghiền</a:t>
+            </a:r>
+          </a:p>
+        </p:txBody>
+      </p:sp>
+      <p:sp>
+        <p:nvSpPr>
+          <p:cNvPr id="20" name="Rounded Rectangle 19"/>
           <p:cNvSpPr/>
           <p:nvPr/>
         </p:nvSpPr>
         <p:spPr>
           <a:xfrm>
-            <a:off x="548640" y="4180000"/>
-            <a:ext cx="80000" cy="2120000"/>
+            <a:off x="548640" y="4190000"/>
+            <a:ext cx="3550000" cy="2110000"/>
           </a:xfrm>
           <a:prstGeom prst="roundRect">
-            <a:avLst/>
-          </a:prstGeom>
-          <a:solidFill>
-            <a:srgbClr val="2C7A5A"/>
-          </a:solidFill>
-          <a:ln>
-            <a:noFill/>
-          </a:ln>
-          <a:effectLst/>
-        </p:spPr>
-        <p:style>
-          <a:lnRef idx="1">
-            <a:schemeClr val="accent1"/>
-          </a:lnRef>
-          <a:fillRef idx="3">
-            <a:schemeClr val="accent1"/>
-          </a:fillRef>
-          <a:effectRef idx="2">
-            <a:schemeClr val="accent1"/>
-          </a:effectRef>
-          <a:fontRef idx="minor">
-            <a:schemeClr val="lt1"/>
-          </a:fontRef>
-        </p:style>
-        <p:txBody>
-          <a:bodyPr rtlCol="0" anchor="ctr"/>
-          <a:lstStyle/>
-          <a:p>
-            <a:pPr algn="ctr"/>
-          </a:p>
-        </p:txBody>
-      </p:sp>
-      <p:sp>
-        <p:nvSpPr>
-          <p:cNvPr id="19" name="Oval 18"/>
-          <p:cNvSpPr/>
-          <p:nvPr/>
-        </p:nvSpPr>
-        <p:spPr>
-          <a:xfrm>
-            <a:off x="848640" y="4910000"/>
-            <a:ext cx="660000" cy="660000"/>
-          </a:xfrm>
-          <a:prstGeom prst="ellipse">
             <a:avLst/>
           </a:prstGeom>
           <a:solidFill>
@@ -17611,9 +18427,53 @@
           </a:p>
         </p:txBody>
       </p:sp>
+      <p:sp>
+        <p:nvSpPr>
+          <p:cNvPr id="21" name="Oval 20"/>
+          <p:cNvSpPr/>
+          <p:nvPr/>
+        </p:nvSpPr>
+        <p:spPr>
+          <a:xfrm>
+            <a:off x="848640" y="4490000"/>
+            <a:ext cx="640000" cy="640000"/>
+          </a:xfrm>
+          <a:prstGeom prst="ellipse">
+            <a:avLst/>
+          </a:prstGeom>
+          <a:solidFill>
+            <a:srgbClr val="C88A2E"/>
+          </a:solidFill>
+          <a:ln>
+            <a:noFill/>
+          </a:ln>
+          <a:effectLst/>
+        </p:spPr>
+        <p:style>
+          <a:lnRef idx="1">
+            <a:schemeClr val="accent1"/>
+          </a:lnRef>
+          <a:fillRef idx="3">
+            <a:schemeClr val="accent1"/>
+          </a:fillRef>
+          <a:effectRef idx="2">
+            <a:schemeClr val="accent1"/>
+          </a:effectRef>
+          <a:fontRef idx="minor">
+            <a:schemeClr val="lt1"/>
+          </a:fontRef>
+        </p:style>
+        <p:txBody>
+          <a:bodyPr rtlCol="0" anchor="ctr"/>
+          <a:lstStyle/>
+          <a:p>
+            <a:pPr algn="ctr"/>
+          </a:p>
+        </p:txBody>
+      </p:sp>
       <p:pic>
         <p:nvPicPr>
-          <p:cNvPr id="20" name="Picture 19" descr="warning_tri_w.png"/>
+          <p:cNvPr id="22" name="Picture 21" descr="warning_tri_w.png"/>
           <p:cNvPicPr>
             <a:picLocks noChangeAspect="1"/>
           </p:cNvPicPr>
@@ -17633,8 +18493,8 @@
         </p:blipFill>
         <p:spPr>
           <a:xfrm>
-            <a:off x="980640" y="5042000"/>
-            <a:ext cx="396000" cy="396000"/>
+            <a:off x="976640" y="4618000"/>
+            <a:ext cx="384000" cy="384000"/>
           </a:xfrm>
           <a:prstGeom prst="rect">
             <a:avLst/>
@@ -17643,14 +18503,91 @@
       </p:pic>
       <p:sp>
         <p:nvSpPr>
-          <p:cNvPr id="21" name="TextBox 20"/>
+          <p:cNvPr id="23" name="TextBox 22"/>
           <p:cNvSpPr txBox="1"/>
           <p:nvPr/>
         </p:nvSpPr>
         <p:spPr>
           <a:xfrm>
-            <a:off x="1848640" y="4180000"/>
-            <a:ext cx="9130000" cy="2120000"/>
+            <a:off x="828640" y="5230000"/>
+            <a:ext cx="3050000" cy="910000"/>
+          </a:xfrm>
+          <a:prstGeom prst="rect">
+            <a:avLst/>
+          </a:prstGeom>
+          <a:noFill/>
+        </p:spPr>
+        <p:txBody>
+          <a:bodyPr wrap="square" lIns="50000" rIns="50000" tIns="20000" bIns="20000" anchor="t">
+            <a:spAutoFit/>
+          </a:bodyPr>
+          <a:lstStyle/>
+          <a:p>
+            <a:r>
+              <a:rPr sz="2000" b="1" i="0">
+                <a:solidFill>
+                  <a:srgbClr val="FFFFFF"/>
+                </a:solidFill>
+              </a:rPr>
+              <a:t>Chảy xệ màng</a:t>
+            </a:r>
+          </a:p>
+        </p:txBody>
+      </p:sp>
+      <p:sp>
+        <p:nvSpPr>
+          <p:cNvPr id="24" name="Rounded Rectangle 23"/>
+          <p:cNvSpPr/>
+          <p:nvPr/>
+        </p:nvSpPr>
+        <p:spPr>
+          <a:xfrm>
+            <a:off x="4298640" y="4190000"/>
+            <a:ext cx="3570000" cy="2110000"/>
+          </a:xfrm>
+          <a:prstGeom prst="roundRect">
+            <a:avLst/>
+          </a:prstGeom>
+          <a:solidFill>
+            <a:srgbClr val="F6EEDF"/>
+          </a:solidFill>
+          <a:ln>
+            <a:noFill/>
+          </a:ln>
+          <a:effectLst/>
+        </p:spPr>
+        <p:style>
+          <a:lnRef idx="1">
+            <a:schemeClr val="accent1"/>
+          </a:lnRef>
+          <a:fillRef idx="3">
+            <a:schemeClr val="accent1"/>
+          </a:fillRef>
+          <a:effectRef idx="2">
+            <a:schemeClr val="accent1"/>
+          </a:effectRef>
+          <a:fontRef idx="minor">
+            <a:schemeClr val="lt1"/>
+          </a:fontRef>
+        </p:style>
+        <p:txBody>
+          <a:bodyPr rtlCol="0" anchor="ctr"/>
+          <a:lstStyle/>
+          <a:p>
+            <a:pPr algn="ctr"/>
+          </a:p>
+        </p:txBody>
+      </p:sp>
+      <p:sp>
+        <p:nvSpPr>
+          <p:cNvPr id="25" name="TextBox 24"/>
+          <p:cNvSpPr txBox="1"/>
+          <p:nvPr/>
+        </p:nvSpPr>
+        <p:spPr>
+          <a:xfrm>
+            <a:off x="4538640" y="4340000"/>
+            <a:ext cx="3110000" cy="1810000"/>
           </a:xfrm>
           <a:prstGeom prst="rect">
             <a:avLst/>
@@ -17664,12 +18601,12 @@
           <a:lstStyle/>
           <a:p>
             <a:r>
-              <a:rPr sz="2158" b="1" i="0">
-                <a:solidFill>
-                  <a:srgbClr val="1F4E3D"/>
-                </a:solidFill>
-              </a:rPr>
-              <a:t>Chảy xệ màng khi thi công</a:t>
+              <a:rPr sz="2000" b="1" i="0">
+                <a:solidFill>
+                  <a:srgbClr val="C88A2E"/>
+                </a:solidFill>
+              </a:rPr>
+              <a:t>Nguyên nhân</a:t>
             </a:r>
           </a:p>
           <a:p>
@@ -17679,7 +18616,84 @@
                   <a:srgbClr val="34404A"/>
                 </a:solidFill>
               </a:rPr>
-              <a:t>Nguyên nhân: dung môi bay hơi chậm, KB lệch</a:t>
+              <a:t>dung môi bay hơi chậm, KB lệch</a:t>
+            </a:r>
+          </a:p>
+        </p:txBody>
+      </p:sp>
+      <p:sp>
+        <p:nvSpPr>
+          <p:cNvPr id="26" name="Rounded Rectangle 25"/>
+          <p:cNvSpPr/>
+          <p:nvPr/>
+        </p:nvSpPr>
+        <p:spPr>
+          <a:xfrm>
+            <a:off x="8068640" y="4190000"/>
+            <a:ext cx="3570000" cy="2110000"/>
+          </a:xfrm>
+          <a:prstGeom prst="roundRect">
+            <a:avLst/>
+          </a:prstGeom>
+          <a:solidFill>
+            <a:srgbClr val="EEF4F0"/>
+          </a:solidFill>
+          <a:ln>
+            <a:noFill/>
+          </a:ln>
+          <a:effectLst/>
+        </p:spPr>
+        <p:style>
+          <a:lnRef idx="1">
+            <a:schemeClr val="accent1"/>
+          </a:lnRef>
+          <a:fillRef idx="3">
+            <a:schemeClr val="accent1"/>
+          </a:fillRef>
+          <a:effectRef idx="2">
+            <a:schemeClr val="accent1"/>
+          </a:effectRef>
+          <a:fontRef idx="minor">
+            <a:schemeClr val="lt1"/>
+          </a:fontRef>
+        </p:style>
+        <p:txBody>
+          <a:bodyPr rtlCol="0" anchor="ctr"/>
+          <a:lstStyle/>
+          <a:p>
+            <a:pPr algn="ctr"/>
+          </a:p>
+        </p:txBody>
+      </p:sp>
+      <p:sp>
+        <p:nvSpPr>
+          <p:cNvPr id="27" name="TextBox 26"/>
+          <p:cNvSpPr txBox="1"/>
+          <p:nvPr/>
+        </p:nvSpPr>
+        <p:spPr>
+          <a:xfrm>
+            <a:off x="8308640" y="4340000"/>
+            <a:ext cx="3110000" cy="1810000"/>
+          </a:xfrm>
+          <a:prstGeom prst="rect">
+            <a:avLst/>
+          </a:prstGeom>
+          <a:noFill/>
+        </p:spPr>
+        <p:txBody>
+          <a:bodyPr wrap="square" lIns="50000" rIns="50000" tIns="20000" bIns="20000" anchor="ctr">
+            <a:spAutoFit/>
+          </a:bodyPr>
+          <a:lstStyle/>
+          <a:p>
+            <a:r>
+              <a:rPr sz="2000" b="1" i="0">
+                <a:solidFill>
+                  <a:srgbClr val="2C7A5A"/>
+                </a:solidFill>
+              </a:rPr>
+              <a:t>Xử lý</a:t>
             </a:r>
           </a:p>
           <a:p>
@@ -17689,7 +18703,7 @@
                   <a:srgbClr val="34404A"/>
                 </a:solidFill>
               </a:rPr>
-              <a:t>Xử lý: hiệu chỉnh hệ dung môi, kiểm độ nhớt</a:t>
+              <a:t>hiệu chỉnh hệ dung môi, kiểm độ nhớt</a:t>
             </a:r>
           </a:p>
         </p:txBody>
@@ -17929,7 +18943,7 @@
                   <a:srgbClr val="1F4E3D"/>
                 </a:solidFill>
               </a:rPr>
-              <a:t>Bốn sự cố điển hình (2/2)</a:t>
+              <a:t>Sự cố điển hình (2/2)</a:t>
             </a:r>
           </a:p>
         </p:txBody>
@@ -18084,97 +19098,9 @@
         <p:spPr>
           <a:xfrm>
             <a:off x="548640" y="1830000"/>
-            <a:ext cx="11090000" cy="2120000"/>
+            <a:ext cx="3550000" cy="2110000"/>
           </a:xfrm>
           <a:prstGeom prst="roundRect">
-            <a:avLst/>
-          </a:prstGeom>
-          <a:solidFill>
-            <a:srgbClr val="EEF4F0"/>
-          </a:solidFill>
-          <a:ln>
-            <a:noFill/>
-          </a:ln>
-          <a:effectLst/>
-        </p:spPr>
-        <p:style>
-          <a:lnRef idx="1">
-            <a:schemeClr val="accent1"/>
-          </a:lnRef>
-          <a:fillRef idx="3">
-            <a:schemeClr val="accent1"/>
-          </a:fillRef>
-          <a:effectRef idx="2">
-            <a:schemeClr val="accent1"/>
-          </a:effectRef>
-          <a:fontRef idx="minor">
-            <a:schemeClr val="lt1"/>
-          </a:fontRef>
-        </p:style>
-        <p:txBody>
-          <a:bodyPr rtlCol="0" anchor="ctr"/>
-          <a:lstStyle/>
-          <a:p>
-            <a:pPr algn="ctr"/>
-          </a:p>
-        </p:txBody>
-      </p:sp>
-      <p:sp>
-        <p:nvSpPr>
-          <p:cNvPr id="13" name="Rounded Rectangle 12"/>
-          <p:cNvSpPr/>
-          <p:nvPr/>
-        </p:nvSpPr>
-        <p:spPr>
-          <a:xfrm>
-            <a:off x="548640" y="1830000"/>
-            <a:ext cx="80000" cy="2120000"/>
-          </a:xfrm>
-          <a:prstGeom prst="roundRect">
-            <a:avLst/>
-          </a:prstGeom>
-          <a:solidFill>
-            <a:srgbClr val="2C7A5A"/>
-          </a:solidFill>
-          <a:ln>
-            <a:noFill/>
-          </a:ln>
-          <a:effectLst/>
-        </p:spPr>
-        <p:style>
-          <a:lnRef idx="1">
-            <a:schemeClr val="accent1"/>
-          </a:lnRef>
-          <a:fillRef idx="3">
-            <a:schemeClr val="accent1"/>
-          </a:fillRef>
-          <a:effectRef idx="2">
-            <a:schemeClr val="accent1"/>
-          </a:effectRef>
-          <a:fontRef idx="minor">
-            <a:schemeClr val="lt1"/>
-          </a:fontRef>
-        </p:style>
-        <p:txBody>
-          <a:bodyPr rtlCol="0" anchor="ctr"/>
-          <a:lstStyle/>
-          <a:p>
-            <a:pPr algn="ctr"/>
-          </a:p>
-        </p:txBody>
-      </p:sp>
-      <p:sp>
-        <p:nvSpPr>
-          <p:cNvPr id="14" name="Oval 13"/>
-          <p:cNvSpPr/>
-          <p:nvPr/>
-        </p:nvSpPr>
-        <p:spPr>
-          <a:xfrm>
-            <a:off x="848640" y="2560000"/>
-            <a:ext cx="660000" cy="660000"/>
-          </a:xfrm>
-          <a:prstGeom prst="ellipse">
             <a:avLst/>
           </a:prstGeom>
           <a:solidFill>
@@ -18207,9 +19133,53 @@
           </a:p>
         </p:txBody>
       </p:sp>
+      <p:sp>
+        <p:nvSpPr>
+          <p:cNvPr id="13" name="Oval 12"/>
+          <p:cNvSpPr/>
+          <p:nvPr/>
+        </p:nvSpPr>
+        <p:spPr>
+          <a:xfrm>
+            <a:off x="848640" y="2130000"/>
+            <a:ext cx="640000" cy="640000"/>
+          </a:xfrm>
+          <a:prstGeom prst="ellipse">
+            <a:avLst/>
+          </a:prstGeom>
+          <a:solidFill>
+            <a:srgbClr val="C88A2E"/>
+          </a:solidFill>
+          <a:ln>
+            <a:noFill/>
+          </a:ln>
+          <a:effectLst/>
+        </p:spPr>
+        <p:style>
+          <a:lnRef idx="1">
+            <a:schemeClr val="accent1"/>
+          </a:lnRef>
+          <a:fillRef idx="3">
+            <a:schemeClr val="accent1"/>
+          </a:fillRef>
+          <a:effectRef idx="2">
+            <a:schemeClr val="accent1"/>
+          </a:effectRef>
+          <a:fontRef idx="minor">
+            <a:schemeClr val="lt1"/>
+          </a:fontRef>
+        </p:style>
+        <p:txBody>
+          <a:bodyPr rtlCol="0" anchor="ctr"/>
+          <a:lstStyle/>
+          <a:p>
+            <a:pPr algn="ctr"/>
+          </a:p>
+        </p:txBody>
+      </p:sp>
       <p:pic>
         <p:nvPicPr>
-          <p:cNvPr id="15" name="Picture 14" descr="warning_tri_w.png"/>
+          <p:cNvPr id="14" name="Picture 13" descr="warning_tri_w.png"/>
           <p:cNvPicPr>
             <a:picLocks noChangeAspect="1"/>
           </p:cNvPicPr>
@@ -18229,8 +19199,8 @@
         </p:blipFill>
         <p:spPr>
           <a:xfrm>
-            <a:off x="980640" y="2692000"/>
-            <a:ext cx="396000" cy="396000"/>
+            <a:off x="976640" y="2258000"/>
+            <a:ext cx="384000" cy="384000"/>
           </a:xfrm>
           <a:prstGeom prst="rect">
             <a:avLst/>
@@ -18239,14 +19209,91 @@
       </p:pic>
       <p:sp>
         <p:nvSpPr>
-          <p:cNvPr id="16" name="TextBox 15"/>
+          <p:cNvPr id="15" name="TextBox 14"/>
           <p:cNvSpPr txBox="1"/>
           <p:nvPr/>
         </p:nvSpPr>
         <p:spPr>
           <a:xfrm>
-            <a:off x="1848640" y="1830000"/>
-            <a:ext cx="9130000" cy="2120000"/>
+            <a:off x="828640" y="2870000"/>
+            <a:ext cx="3050000" cy="910000"/>
+          </a:xfrm>
+          <a:prstGeom prst="rect">
+            <a:avLst/>
+          </a:prstGeom>
+          <a:noFill/>
+        </p:spPr>
+        <p:txBody>
+          <a:bodyPr wrap="square" lIns="50000" rIns="50000" tIns="20000" bIns="20000" anchor="t">
+            <a:spAutoFit/>
+          </a:bodyPr>
+          <a:lstStyle/>
+          <a:p>
+            <a:r>
+              <a:rPr sz="2000" b="1" i="0">
+                <a:solidFill>
+                  <a:srgbClr val="FFFFFF"/>
+                </a:solidFill>
+              </a:rPr>
+              <a:t>Lắng cứng đáy bồn</a:t>
+            </a:r>
+          </a:p>
+        </p:txBody>
+      </p:sp>
+      <p:sp>
+        <p:nvSpPr>
+          <p:cNvPr id="16" name="Rounded Rectangle 15"/>
+          <p:cNvSpPr/>
+          <p:nvPr/>
+        </p:nvSpPr>
+        <p:spPr>
+          <a:xfrm>
+            <a:off x="4298640" y="1830000"/>
+            <a:ext cx="3570000" cy="2110000"/>
+          </a:xfrm>
+          <a:prstGeom prst="roundRect">
+            <a:avLst/>
+          </a:prstGeom>
+          <a:solidFill>
+            <a:srgbClr val="F6EEDF"/>
+          </a:solidFill>
+          <a:ln>
+            <a:noFill/>
+          </a:ln>
+          <a:effectLst/>
+        </p:spPr>
+        <p:style>
+          <a:lnRef idx="1">
+            <a:schemeClr val="accent1"/>
+          </a:lnRef>
+          <a:fillRef idx="3">
+            <a:schemeClr val="accent1"/>
+          </a:fillRef>
+          <a:effectRef idx="2">
+            <a:schemeClr val="accent1"/>
+          </a:effectRef>
+          <a:fontRef idx="minor">
+            <a:schemeClr val="lt1"/>
+          </a:fontRef>
+        </p:style>
+        <p:txBody>
+          <a:bodyPr rtlCol="0" anchor="ctr"/>
+          <a:lstStyle/>
+          <a:p>
+            <a:pPr algn="ctr"/>
+          </a:p>
+        </p:txBody>
+      </p:sp>
+      <p:sp>
+        <p:nvSpPr>
+          <p:cNvPr id="17" name="TextBox 16"/>
+          <p:cNvSpPr txBox="1"/>
+          <p:nvPr/>
+        </p:nvSpPr>
+        <p:spPr>
+          <a:xfrm>
+            <a:off x="4538640" y="1980000"/>
+            <a:ext cx="3110000" cy="1810000"/>
           </a:xfrm>
           <a:prstGeom prst="rect">
             <a:avLst/>
@@ -18260,12 +19307,12 @@
           <a:lstStyle/>
           <a:p>
             <a:r>
-              <a:rPr sz="2158" b="1" i="0">
-                <a:solidFill>
-                  <a:srgbClr val="1F4E3D"/>
-                </a:solidFill>
-              </a:rPr>
-              <a:t>Lắng cứng đáy bồn</a:t>
+              <a:rPr sz="2000" b="1" i="0">
+                <a:solidFill>
+                  <a:srgbClr val="C88A2E"/>
+                </a:solidFill>
+              </a:rPr>
+              <a:t>Nguyên nhân</a:t>
             </a:r>
           </a:p>
           <a:p>
@@ -18275,31 +19322,21 @@
                   <a:srgbClr val="34404A"/>
                 </a:solidFill>
               </a:rPr>
-              <a:t>Nguyên nhân: độ hút dầu bột mới vượt PVC</a:t>
-            </a:r>
-          </a:p>
-          <a:p>
-            <a:r>
-              <a:rPr sz="2000" b="0" i="0">
-                <a:solidFill>
-                  <a:srgbClr val="34404A"/>
-                </a:solidFill>
-              </a:rPr>
-              <a:t>Xử lý: tính lại tỉ lệ, thêm chất chống lắng</a:t>
-            </a:r>
-          </a:p>
-        </p:txBody>
-      </p:sp>
-      <p:sp>
-        <p:nvSpPr>
-          <p:cNvPr id="17" name="Rounded Rectangle 16"/>
+              <a:t>độ hút dầu bột mới vượt PVC</a:t>
+            </a:r>
+          </a:p>
+        </p:txBody>
+      </p:sp>
+      <p:sp>
+        <p:nvSpPr>
+          <p:cNvPr id="18" name="Rounded Rectangle 17"/>
           <p:cNvSpPr/>
           <p:nvPr/>
         </p:nvSpPr>
         <p:spPr>
           <a:xfrm>
-            <a:off x="548640" y="4180000"/>
-            <a:ext cx="11090000" cy="2120000"/>
+            <a:off x="8068640" y="1830000"/>
+            <a:ext cx="3570000" cy="2110000"/>
           </a:xfrm>
           <a:prstGeom prst="roundRect">
             <a:avLst/>
@@ -18336,60 +19373,59 @@
       </p:sp>
       <p:sp>
         <p:nvSpPr>
-          <p:cNvPr id="18" name="Rounded Rectangle 17"/>
+          <p:cNvPr id="19" name="TextBox 18"/>
+          <p:cNvSpPr txBox="1"/>
+          <p:nvPr/>
+        </p:nvSpPr>
+        <p:spPr>
+          <a:xfrm>
+            <a:off x="8308640" y="1980000"/>
+            <a:ext cx="3110000" cy="1810000"/>
+          </a:xfrm>
+          <a:prstGeom prst="rect">
+            <a:avLst/>
+          </a:prstGeom>
+          <a:noFill/>
+        </p:spPr>
+        <p:txBody>
+          <a:bodyPr wrap="square" lIns="50000" rIns="50000" tIns="20000" bIns="20000" anchor="ctr">
+            <a:spAutoFit/>
+          </a:bodyPr>
+          <a:lstStyle/>
+          <a:p>
+            <a:r>
+              <a:rPr sz="2000" b="1" i="0">
+                <a:solidFill>
+                  <a:srgbClr val="2C7A5A"/>
+                </a:solidFill>
+              </a:rPr>
+              <a:t>Xử lý</a:t>
+            </a:r>
+          </a:p>
+          <a:p>
+            <a:r>
+              <a:rPr sz="2000" b="0" i="0">
+                <a:solidFill>
+                  <a:srgbClr val="34404A"/>
+                </a:solidFill>
+              </a:rPr>
+              <a:t>tính lại tỉ lệ, thêm chất chống lắng</a:t>
+            </a:r>
+          </a:p>
+        </p:txBody>
+      </p:sp>
+      <p:sp>
+        <p:nvSpPr>
+          <p:cNvPr id="20" name="Rounded Rectangle 19"/>
           <p:cNvSpPr/>
           <p:nvPr/>
         </p:nvSpPr>
         <p:spPr>
           <a:xfrm>
-            <a:off x="548640" y="4180000"/>
-            <a:ext cx="80000" cy="2120000"/>
+            <a:off x="548640" y="4190000"/>
+            <a:ext cx="3550000" cy="2110000"/>
           </a:xfrm>
           <a:prstGeom prst="roundRect">
-            <a:avLst/>
-          </a:prstGeom>
-          <a:solidFill>
-            <a:srgbClr val="2C7A5A"/>
-          </a:solidFill>
-          <a:ln>
-            <a:noFill/>
-          </a:ln>
-          <a:effectLst/>
-        </p:spPr>
-        <p:style>
-          <a:lnRef idx="1">
-            <a:schemeClr val="accent1"/>
-          </a:lnRef>
-          <a:fillRef idx="3">
-            <a:schemeClr val="accent1"/>
-          </a:fillRef>
-          <a:effectRef idx="2">
-            <a:schemeClr val="accent1"/>
-          </a:effectRef>
-          <a:fontRef idx="minor">
-            <a:schemeClr val="lt1"/>
-          </a:fontRef>
-        </p:style>
-        <p:txBody>
-          <a:bodyPr rtlCol="0" anchor="ctr"/>
-          <a:lstStyle/>
-          <a:p>
-            <a:pPr algn="ctr"/>
-          </a:p>
-        </p:txBody>
-      </p:sp>
-      <p:sp>
-        <p:nvSpPr>
-          <p:cNvPr id="19" name="Oval 18"/>
-          <p:cNvSpPr/>
-          <p:nvPr/>
-        </p:nvSpPr>
-        <p:spPr>
-          <a:xfrm>
-            <a:off x="848640" y="4910000"/>
-            <a:ext cx="660000" cy="660000"/>
-          </a:xfrm>
-          <a:prstGeom prst="ellipse">
             <a:avLst/>
           </a:prstGeom>
           <a:solidFill>
@@ -18422,9 +19458,53 @@
           </a:p>
         </p:txBody>
       </p:sp>
+      <p:sp>
+        <p:nvSpPr>
+          <p:cNvPr id="21" name="Oval 20"/>
+          <p:cNvSpPr/>
+          <p:nvPr/>
+        </p:nvSpPr>
+        <p:spPr>
+          <a:xfrm>
+            <a:off x="848640" y="4490000"/>
+            <a:ext cx="640000" cy="640000"/>
+          </a:xfrm>
+          <a:prstGeom prst="ellipse">
+            <a:avLst/>
+          </a:prstGeom>
+          <a:solidFill>
+            <a:srgbClr val="C88A2E"/>
+          </a:solidFill>
+          <a:ln>
+            <a:noFill/>
+          </a:ln>
+          <a:effectLst/>
+        </p:spPr>
+        <p:style>
+          <a:lnRef idx="1">
+            <a:schemeClr val="accent1"/>
+          </a:lnRef>
+          <a:fillRef idx="3">
+            <a:schemeClr val="accent1"/>
+          </a:fillRef>
+          <a:effectRef idx="2">
+            <a:schemeClr val="accent1"/>
+          </a:effectRef>
+          <a:fontRef idx="minor">
+            <a:schemeClr val="lt1"/>
+          </a:fontRef>
+        </p:style>
+        <p:txBody>
+          <a:bodyPr rtlCol="0" anchor="ctr"/>
+          <a:lstStyle/>
+          <a:p>
+            <a:pPr algn="ctr"/>
+          </a:p>
+        </p:txBody>
+      </p:sp>
       <p:pic>
         <p:nvPicPr>
-          <p:cNvPr id="20" name="Picture 19" descr="warning_tri_w.png"/>
+          <p:cNvPr id="22" name="Picture 21" descr="warning_tri_w.png"/>
           <p:cNvPicPr>
             <a:picLocks noChangeAspect="1"/>
           </p:cNvPicPr>
@@ -18444,8 +19524,8 @@
         </p:blipFill>
         <p:spPr>
           <a:xfrm>
-            <a:off x="980640" y="5042000"/>
-            <a:ext cx="396000" cy="396000"/>
+            <a:off x="976640" y="4618000"/>
+            <a:ext cx="384000" cy="384000"/>
           </a:xfrm>
           <a:prstGeom prst="rect">
             <a:avLst/>
@@ -18454,14 +19534,91 @@
       </p:pic>
       <p:sp>
         <p:nvSpPr>
-          <p:cNvPr id="21" name="TextBox 20"/>
+          <p:cNvPr id="23" name="TextBox 22"/>
           <p:cNvSpPr txBox="1"/>
           <p:nvPr/>
         </p:nvSpPr>
         <p:spPr>
           <a:xfrm>
-            <a:off x="1848640" y="4180000"/>
-            <a:ext cx="9130000" cy="2120000"/>
+            <a:off x="828640" y="5230000"/>
+            <a:ext cx="3050000" cy="910000"/>
+          </a:xfrm>
+          <a:prstGeom prst="rect">
+            <a:avLst/>
+          </a:prstGeom>
+          <a:noFill/>
+        </p:spPr>
+        <p:txBody>
+          <a:bodyPr wrap="square" lIns="50000" rIns="50000" tIns="20000" bIns="20000" anchor="t">
+            <a:spAutoFit/>
+          </a:bodyPr>
+          <a:lstStyle/>
+          <a:p>
+            <a:r>
+              <a:rPr sz="2000" b="1" i="0">
+                <a:solidFill>
+                  <a:srgbClr val="FFFFFF"/>
+                </a:solidFill>
+              </a:rPr>
+              <a:t>Mất bóng / nứt giòn</a:t>
+            </a:r>
+          </a:p>
+        </p:txBody>
+      </p:sp>
+      <p:sp>
+        <p:nvSpPr>
+          <p:cNvPr id="24" name="Rounded Rectangle 23"/>
+          <p:cNvSpPr/>
+          <p:nvPr/>
+        </p:nvSpPr>
+        <p:spPr>
+          <a:xfrm>
+            <a:off x="4298640" y="4190000"/>
+            <a:ext cx="3570000" cy="2110000"/>
+          </a:xfrm>
+          <a:prstGeom prst="roundRect">
+            <a:avLst/>
+          </a:prstGeom>
+          <a:solidFill>
+            <a:srgbClr val="F6EEDF"/>
+          </a:solidFill>
+          <a:ln>
+            <a:noFill/>
+          </a:ln>
+          <a:effectLst/>
+        </p:spPr>
+        <p:style>
+          <a:lnRef idx="1">
+            <a:schemeClr val="accent1"/>
+          </a:lnRef>
+          <a:fillRef idx="3">
+            <a:schemeClr val="accent1"/>
+          </a:fillRef>
+          <a:effectRef idx="2">
+            <a:schemeClr val="accent1"/>
+          </a:effectRef>
+          <a:fontRef idx="minor">
+            <a:schemeClr val="lt1"/>
+          </a:fontRef>
+        </p:style>
+        <p:txBody>
+          <a:bodyPr rtlCol="0" anchor="ctr"/>
+          <a:lstStyle/>
+          <a:p>
+            <a:pPr algn="ctr"/>
+          </a:p>
+        </p:txBody>
+      </p:sp>
+      <p:sp>
+        <p:nvSpPr>
+          <p:cNvPr id="25" name="TextBox 24"/>
+          <p:cNvSpPr txBox="1"/>
+          <p:nvPr/>
+        </p:nvSpPr>
+        <p:spPr>
+          <a:xfrm>
+            <a:off x="4538640" y="4340000"/>
+            <a:ext cx="3110000" cy="1810000"/>
           </a:xfrm>
           <a:prstGeom prst="rect">
             <a:avLst/>
@@ -18475,12 +19632,12 @@
           <a:lstStyle/>
           <a:p>
             <a:r>
-              <a:rPr sz="2158" b="1" i="0">
-                <a:solidFill>
-                  <a:srgbClr val="1F4E3D"/>
-                </a:solidFill>
-              </a:rPr>
-              <a:t>Mất bóng / nứt giòn</a:t>
+              <a:rPr sz="2000" b="1" i="0">
+                <a:solidFill>
+                  <a:srgbClr val="C88A2E"/>
+                </a:solidFill>
+              </a:rPr>
+              <a:t>Nguyên nhân</a:t>
             </a:r>
           </a:p>
           <a:p>
@@ -18490,7 +19647,84 @@
                   <a:srgbClr val="34404A"/>
                 </a:solidFill>
               </a:rPr>
-              <a:t>Nguyên nhân: vượt PVC, thiếu nhựa liên kết</a:t>
+              <a:t>vượt PVC, thiếu nhựa liên kết</a:t>
+            </a:r>
+          </a:p>
+        </p:txBody>
+      </p:sp>
+      <p:sp>
+        <p:nvSpPr>
+          <p:cNvPr id="26" name="Rounded Rectangle 25"/>
+          <p:cNvSpPr/>
+          <p:nvPr/>
+        </p:nvSpPr>
+        <p:spPr>
+          <a:xfrm>
+            <a:off x="8068640" y="4190000"/>
+            <a:ext cx="3570000" cy="2110000"/>
+          </a:xfrm>
+          <a:prstGeom prst="roundRect">
+            <a:avLst/>
+          </a:prstGeom>
+          <a:solidFill>
+            <a:srgbClr val="EEF4F0"/>
+          </a:solidFill>
+          <a:ln>
+            <a:noFill/>
+          </a:ln>
+          <a:effectLst/>
+        </p:spPr>
+        <p:style>
+          <a:lnRef idx="1">
+            <a:schemeClr val="accent1"/>
+          </a:lnRef>
+          <a:fillRef idx="3">
+            <a:schemeClr val="accent1"/>
+          </a:fillRef>
+          <a:effectRef idx="2">
+            <a:schemeClr val="accent1"/>
+          </a:effectRef>
+          <a:fontRef idx="minor">
+            <a:schemeClr val="lt1"/>
+          </a:fontRef>
+        </p:style>
+        <p:txBody>
+          <a:bodyPr rtlCol="0" anchor="ctr"/>
+          <a:lstStyle/>
+          <a:p>
+            <a:pPr algn="ctr"/>
+          </a:p>
+        </p:txBody>
+      </p:sp>
+      <p:sp>
+        <p:nvSpPr>
+          <p:cNvPr id="27" name="TextBox 26"/>
+          <p:cNvSpPr txBox="1"/>
+          <p:nvPr/>
+        </p:nvSpPr>
+        <p:spPr>
+          <a:xfrm>
+            <a:off x="8308640" y="4340000"/>
+            <a:ext cx="3110000" cy="1810000"/>
+          </a:xfrm>
+          <a:prstGeom prst="rect">
+            <a:avLst/>
+          </a:prstGeom>
+          <a:noFill/>
+        </p:spPr>
+        <p:txBody>
+          <a:bodyPr wrap="square" lIns="50000" rIns="50000" tIns="20000" bIns="20000" anchor="ctr">
+            <a:spAutoFit/>
+          </a:bodyPr>
+          <a:lstStyle/>
+          <a:p>
+            <a:r>
+              <a:rPr sz="2000" b="1" i="0">
+                <a:solidFill>
+                  <a:srgbClr val="2C7A5A"/>
+                </a:solidFill>
+              </a:rPr>
+              <a:t>Xử lý</a:t>
             </a:r>
           </a:p>
           <a:p>
@@ -18500,7 +19734,7 @@
                   <a:srgbClr val="34404A"/>
                 </a:solidFill>
               </a:rPr>
-              <a:t>Xử lý: cân đối PVC, tăng chất tạo màng dẻo</a:t>
+              <a:t>cân đối PVC, tăng chất tạo màng dẻo</a:t>
             </a:r>
           </a:p>
         </p:txBody>
@@ -19311,7 +20545,7 @@
           <a:blip r:embed="rId2">
             <a:extLst>
               <a:ext uri="{96DAC541-7B7A-43D3-8B79-37D633B846F1}">
-                <ns0:svgBlip xmlns:ns0="http://schemas.microsoft.com/office/drawing/2016/SVG/main" r:embed="rId7"/>
+                <ns0:svgBlip xmlns:ns0="http://schemas.microsoft.com/office/drawing/2016/SVG/main" r:embed="rId5"/>
               </a:ext>
             </a:extLst>
           </a:blip>
@@ -19374,7 +20608,7 @@
           <a:blip r:embed="rId3">
             <a:extLst>
               <a:ext uri="{96DAC541-7B7A-43D3-8B79-37D633B846F1}">
-                <ns1:svgBlip xmlns:ns1="http://schemas.microsoft.com/office/drawing/2016/SVG/main" r:embed="rId5"/>
+                <ns1:svgBlip xmlns:ns1="http://schemas.microsoft.com/office/drawing/2016/SVG/main" r:embed="rId4"/>
               </a:ext>
             </a:extLst>
           </a:blip>
@@ -19392,39 +20626,9 @@
           </a:prstGeom>
         </p:spPr>
       </p:pic>
-      <p:pic>
-        <p:nvPicPr>
-          <p:cNvPr id="6" name="Picture 5" descr="deco_drip_white.png"/>
-          <p:cNvPicPr>
-            <a:picLocks noChangeAspect="1"/>
-          </p:cNvPicPr>
-          <p:nvPr/>
-        </p:nvPicPr>
-        <p:blipFill>
-          <a:blip r:embed="rId4">
-            <a:extLst>
-              <a:ext uri="{96DAC541-7B7A-43D3-8B79-37D633B846F1}">
-                <ns2:svgBlip xmlns:ns2="http://schemas.microsoft.com/office/drawing/2016/SVG/main" r:embed="rId6"/>
-              </a:ext>
-            </a:extLst>
-          </a:blip>
-          <a:stretch>
-            <a:fillRect/>
-          </a:stretch>
-        </p:blipFill>
-        <p:spPr>
-          <a:xfrm>
-            <a:off x="780000" y="4820000"/>
-            <a:ext cx="880000" cy="1180000"/>
-          </a:xfrm>
-          <a:prstGeom prst="rect">
-            <a:avLst/>
-          </a:prstGeom>
-        </p:spPr>
-      </p:pic>
-      <p:sp>
-        <p:nvSpPr>
-          <p:cNvPr id="7" name="Rounded Rectangle 6"/>
+      <p:sp>
+        <p:nvSpPr>
+          <p:cNvPr id="6" name="Rounded Rectangle 5"/>
           <p:cNvSpPr/>
           <p:nvPr/>
         </p:nvSpPr>
@@ -19468,7 +20672,7 @@
       </p:sp>
       <p:sp>
         <p:nvSpPr>
-          <p:cNvPr id="8" name="Oval 7"/>
+          <p:cNvPr id="7" name="Oval 6"/>
           <p:cNvSpPr/>
           <p:nvPr/>
         </p:nvSpPr>
@@ -19520,7 +20724,7 @@
       </p:sp>
       <p:sp>
         <p:nvSpPr>
-          <p:cNvPr id="9" name="TextBox 8"/>
+          <p:cNvPr id="8" name="TextBox 7"/>
           <p:cNvSpPr txBox="1"/>
           <p:nvPr/>
         </p:nvSpPr>
@@ -19553,7 +20757,7 @@
       </p:sp>
       <p:sp>
         <p:nvSpPr>
-          <p:cNvPr id="10" name="TextBox 9"/>
+          <p:cNvPr id="9" name="TextBox 8"/>
           <p:cNvSpPr txBox="1"/>
           <p:nvPr/>
         </p:nvSpPr>
@@ -19658,7 +20862,7 @@
           <a:blip r:embed="rId2">
             <a:extLst>
               <a:ext uri="{96DAC541-7B7A-43D3-8B79-37D633B846F1}">
-                <ns0:svgBlip xmlns:ns0="http://schemas.microsoft.com/office/drawing/2016/SVG/main" r:embed="rId6"/>
+                <ns0:svgBlip xmlns:ns0="http://schemas.microsoft.com/office/drawing/2016/SVG/main" r:embed="rId4"/>
               </a:ext>
             </a:extLst>
           </a:blip>
@@ -19721,7 +20925,7 @@
           <a:blip r:embed="rId3">
             <a:extLst>
               <a:ext uri="{96DAC541-7B7A-43D3-8B79-37D633B846F1}">
-                <ns1:svgBlip xmlns:ns1="http://schemas.microsoft.com/office/drawing/2016/SVG/main" r:embed="rId7"/>
+                <ns1:svgBlip xmlns:ns1="http://schemas.microsoft.com/office/drawing/2016/SVG/main" r:embed="rId5"/>
               </a:ext>
             </a:extLst>
           </a:blip>
@@ -19739,39 +20943,9 @@
           </a:prstGeom>
         </p:spPr>
       </p:pic>
-      <p:pic>
-        <p:nvPicPr>
-          <p:cNvPr id="6" name="Picture 5" descr="deco_drip_white.png"/>
-          <p:cNvPicPr>
-            <a:picLocks noChangeAspect="1"/>
-          </p:cNvPicPr>
-          <p:nvPr/>
-        </p:nvPicPr>
-        <p:blipFill>
-          <a:blip r:embed="rId4">
-            <a:extLst>
-              <a:ext uri="{96DAC541-7B7A-43D3-8B79-37D633B846F1}">
-                <ns2:svgBlip xmlns:ns2="http://schemas.microsoft.com/office/drawing/2016/SVG/main" r:embed="rId5"/>
-              </a:ext>
-            </a:extLst>
-          </a:blip>
-          <a:stretch>
-            <a:fillRect/>
-          </a:stretch>
-        </p:blipFill>
-        <p:spPr>
-          <a:xfrm>
-            <a:off x="780000" y="4820000"/>
-            <a:ext cx="880000" cy="1180000"/>
-          </a:xfrm>
-          <a:prstGeom prst="rect">
-            <a:avLst/>
-          </a:prstGeom>
-        </p:spPr>
-      </p:pic>
-      <p:sp>
-        <p:nvSpPr>
-          <p:cNvPr id="7" name="Rounded Rectangle 6"/>
+      <p:sp>
+        <p:nvSpPr>
+          <p:cNvPr id="6" name="Rounded Rectangle 5"/>
           <p:cNvSpPr/>
           <p:nvPr/>
         </p:nvSpPr>
@@ -19815,7 +20989,7 @@
       </p:sp>
       <p:sp>
         <p:nvSpPr>
-          <p:cNvPr id="8" name="Oval 7"/>
+          <p:cNvPr id="7" name="Oval 6"/>
           <p:cNvSpPr/>
           <p:nvPr/>
         </p:nvSpPr>
@@ -19867,7 +21041,7 @@
       </p:sp>
       <p:sp>
         <p:nvSpPr>
-          <p:cNvPr id="9" name="TextBox 8"/>
+          <p:cNvPr id="8" name="TextBox 7"/>
           <p:cNvSpPr txBox="1"/>
           <p:nvPr/>
         </p:nvSpPr>
@@ -19900,7 +21074,7 @@
       </p:sp>
       <p:sp>
         <p:nvSpPr>
-          <p:cNvPr id="10" name="TextBox 9"/>
+          <p:cNvPr id="9" name="TextBox 8"/>
           <p:cNvSpPr txBox="1"/>
           <p:nvPr/>
         </p:nvSpPr>
@@ -21831,7 +23005,7 @@
         <p:spPr>
           <a:xfrm>
             <a:off x="548640" y="1830000"/>
-            <a:ext cx="11090000" cy="1336666"/>
+            <a:ext cx="3496666" cy="4470000"/>
           </a:xfrm>
           <a:prstGeom prst="roundRect">
             <a:avLst/>
@@ -21875,13 +23049,13 @@
         <p:spPr>
           <a:xfrm>
             <a:off x="548640" y="1830000"/>
-            <a:ext cx="80000" cy="1336666"/>
+            <a:ext cx="3496666" cy="130000"/>
           </a:xfrm>
           <a:prstGeom prst="roundRect">
             <a:avLst/>
           </a:prstGeom>
           <a:solidFill>
-            <a:srgbClr val="2C7A5A"/>
+            <a:srgbClr val="1F4E3D"/>
           </a:solidFill>
           <a:ln>
             <a:noFill/>
@@ -21918,8 +23092,8 @@
         </p:nvSpPr>
         <p:spPr>
           <a:xfrm>
-            <a:off x="848640" y="2168333"/>
-            <a:ext cx="660000" cy="660000"/>
+            <a:off x="1906973" y="2210000"/>
+            <a:ext cx="780000" cy="780000"/>
           </a:xfrm>
           <a:prstGeom prst="ellipse">
             <a:avLst/>
@@ -21976,8 +23150,8 @@
         </p:blipFill>
         <p:spPr>
           <a:xfrm>
-            <a:off x="980640" y="2300333"/>
-            <a:ext cx="396000" cy="396000"/>
+            <a:off x="2062973" y="2366000"/>
+            <a:ext cx="468000" cy="468000"/>
           </a:xfrm>
           <a:prstGeom prst="rect">
             <a:avLst/>
@@ -21992,8 +23166,8 @@
         </p:nvSpPr>
         <p:spPr>
           <a:xfrm>
-            <a:off x="1848640" y="1830000"/>
-            <a:ext cx="9130000" cy="1336666"/>
+            <a:off x="728640" y="3080000"/>
+            <a:ext cx="3136666" cy="2870000"/>
           </a:xfrm>
           <a:prstGeom prst="rect">
             <a:avLst/>
@@ -22001,28 +23175,41 @@
           <a:noFill/>
         </p:spPr>
         <p:txBody>
-          <a:bodyPr wrap="square" lIns="50000" rIns="50000" tIns="20000" bIns="20000" anchor="ctr">
+          <a:bodyPr wrap="square" lIns="50000" rIns="50000" tIns="20000" bIns="20000" anchor="t">
             <a:spAutoFit/>
           </a:bodyPr>
           <a:lstStyle/>
           <a:p>
-            <a:r>
-              <a:rPr sz="2158" b="1" i="0">
+            <a:pPr algn="ctr"/>
+            <a:r>
+              <a:rPr sz="2000" b="1" i="0">
                 <a:solidFill>
                   <a:srgbClr val="1F4E3D"/>
                 </a:solidFill>
               </a:rPr>
-              <a:t>Khí thải — hơi VOC</a:t>
-            </a:r>
-          </a:p>
-          <a:p>
+              <a:t>Khí thải VOC</a:t>
+            </a:r>
+          </a:p>
+          <a:p>
+            <a:pPr algn="ctr"/>
             <a:r>
               <a:rPr sz="2000" b="0" i="0">
                 <a:solidFill>
                   <a:srgbClr val="34404A"/>
                 </a:solidFill>
               </a:rPr>
-              <a:t>Thu qua chụp hút → than hoạt tính / buồng đốt</a:t>
+              <a:t>Chụp hút → than hoạt</a:t>
+            </a:r>
+          </a:p>
+          <a:p>
+            <a:pPr algn="ctr"/>
+            <a:r>
+              <a:rPr sz="2000" b="0" i="0">
+                <a:solidFill>
+                  <a:srgbClr val="34404A"/>
+                </a:solidFill>
+              </a:rPr>
+              <a:t>tính / buồng đốt</a:t>
             </a:r>
           </a:p>
         </p:txBody>
@@ -22035,8 +23222,8 @@
         </p:nvSpPr>
         <p:spPr>
           <a:xfrm>
-            <a:off x="548640" y="3396666"/>
-            <a:ext cx="11090000" cy="1336666"/>
+            <a:off x="4345306" y="1830000"/>
+            <a:ext cx="3496666" cy="4470000"/>
           </a:xfrm>
           <a:prstGeom prst="roundRect">
             <a:avLst/>
@@ -22079,8 +23266,8 @@
         </p:nvSpPr>
         <p:spPr>
           <a:xfrm>
-            <a:off x="548640" y="3396666"/>
-            <a:ext cx="80000" cy="1336666"/>
+            <a:off x="4345306" y="1830000"/>
+            <a:ext cx="3496666" cy="130000"/>
           </a:xfrm>
           <a:prstGeom prst="roundRect">
             <a:avLst/>
@@ -22123,14 +23310,14 @@
         </p:nvSpPr>
         <p:spPr>
           <a:xfrm>
-            <a:off x="848640" y="3734999"/>
-            <a:ext cx="660000" cy="660000"/>
+            <a:off x="5703639" y="2210000"/>
+            <a:ext cx="780000" cy="780000"/>
           </a:xfrm>
           <a:prstGeom prst="ellipse">
             <a:avLst/>
           </a:prstGeom>
           <a:solidFill>
-            <a:srgbClr val="1F4E3D"/>
+            <a:srgbClr val="2C7A5A"/>
           </a:solidFill>
           <a:ln>
             <a:noFill/>
@@ -22181,8 +23368,8 @@
         </p:blipFill>
         <p:spPr>
           <a:xfrm>
-            <a:off x="980640" y="3866999"/>
-            <a:ext cx="396000" cy="396000"/>
+            <a:off x="5859639" y="2366000"/>
+            <a:ext cx="468000" cy="468000"/>
           </a:xfrm>
           <a:prstGeom prst="rect">
             <a:avLst/>
@@ -22197,8 +23384,8 @@
         </p:nvSpPr>
         <p:spPr>
           <a:xfrm>
-            <a:off x="1848640" y="3396666"/>
-            <a:ext cx="9130000" cy="1336666"/>
+            <a:off x="4525306" y="3080000"/>
+            <a:ext cx="3136666" cy="2870000"/>
           </a:xfrm>
           <a:prstGeom prst="rect">
             <a:avLst/>
@@ -22206,28 +23393,41 @@
           <a:noFill/>
         </p:spPr>
         <p:txBody>
-          <a:bodyPr wrap="square" lIns="50000" rIns="50000" tIns="20000" bIns="20000" anchor="ctr">
+          <a:bodyPr wrap="square" lIns="50000" rIns="50000" tIns="20000" bIns="20000" anchor="t">
             <a:spAutoFit/>
           </a:bodyPr>
           <a:lstStyle/>
           <a:p>
-            <a:r>
-              <a:rPr sz="2158" b="1" i="0">
+            <a:pPr algn="ctr"/>
+            <a:r>
+              <a:rPr sz="2000" b="1" i="0">
                 <a:solidFill>
                   <a:srgbClr val="1F4E3D"/>
                 </a:solidFill>
               </a:rPr>
-              <a:t>Nước thải &amp; dung môi</a:t>
-            </a:r>
-          </a:p>
-          <a:p>
+              <a:t>Nước thải</a:t>
+            </a:r>
+          </a:p>
+          <a:p>
+            <a:pPr algn="ctr"/>
             <a:r>
               <a:rPr sz="2000" b="0" i="0">
                 <a:solidFill>
                   <a:srgbClr val="34404A"/>
                 </a:solidFill>
               </a:rPr>
-              <a:t>Lắng tách cặn, thu hồi dung môi tái chưng</a:t>
+              <a:t>Lắng tách cặn</a:t>
+            </a:r>
+          </a:p>
+          <a:p>
+            <a:pPr algn="ctr"/>
+            <a:r>
+              <a:rPr sz="2000" b="0" i="0">
+                <a:solidFill>
+                  <a:srgbClr val="34404A"/>
+                </a:solidFill>
+              </a:rPr>
+              <a:t>thu hồi dung môi</a:t>
             </a:r>
           </a:p>
         </p:txBody>
@@ -22240,8 +23440,8 @@
         </p:nvSpPr>
         <p:spPr>
           <a:xfrm>
-            <a:off x="548640" y="4963332"/>
-            <a:ext cx="11090000" cy="1336666"/>
+            <a:off x="8141972" y="1830000"/>
+            <a:ext cx="3496666" cy="4470000"/>
           </a:xfrm>
           <a:prstGeom prst="roundRect">
             <a:avLst/>
@@ -22284,14 +23484,14 @@
         </p:nvSpPr>
         <p:spPr>
           <a:xfrm>
-            <a:off x="548640" y="4963332"/>
-            <a:ext cx="80000" cy="1336666"/>
+            <a:off x="8141972" y="1830000"/>
+            <a:ext cx="3496666" cy="130000"/>
           </a:xfrm>
           <a:prstGeom prst="roundRect">
             <a:avLst/>
           </a:prstGeom>
           <a:solidFill>
-            <a:srgbClr val="2C7A5A"/>
+            <a:srgbClr val="7BA893"/>
           </a:solidFill>
           <a:ln>
             <a:noFill/>
@@ -22328,14 +23528,14 @@
         </p:nvSpPr>
         <p:spPr>
           <a:xfrm>
-            <a:off x="848640" y="5301665"/>
-            <a:ext cx="660000" cy="660000"/>
+            <a:off x="9500305" y="2210000"/>
+            <a:ext cx="780000" cy="780000"/>
           </a:xfrm>
           <a:prstGeom prst="ellipse">
             <a:avLst/>
           </a:prstGeom>
           <a:solidFill>
-            <a:srgbClr val="1F4E3D"/>
+            <a:srgbClr val="7BA893"/>
           </a:solidFill>
           <a:ln>
             <a:noFill/>
@@ -22386,8 +23586,8 @@
         </p:blipFill>
         <p:spPr>
           <a:xfrm>
-            <a:off x="980640" y="5433665"/>
-            <a:ext cx="396000" cy="396000"/>
+            <a:off x="9656305" y="2366000"/>
+            <a:ext cx="468000" cy="468000"/>
           </a:xfrm>
           <a:prstGeom prst="rect">
             <a:avLst/>
@@ -22402,8 +23602,8 @@
         </p:nvSpPr>
         <p:spPr>
           <a:xfrm>
-            <a:off x="1848640" y="4963332"/>
-            <a:ext cx="9130000" cy="1336666"/>
+            <a:off x="8321972" y="3080000"/>
+            <a:ext cx="3136666" cy="2870000"/>
           </a:xfrm>
           <a:prstGeom prst="rect">
             <a:avLst/>
@@ -22411,13 +23611,14 @@
           <a:noFill/>
         </p:spPr>
         <p:txBody>
-          <a:bodyPr wrap="square" lIns="50000" rIns="50000" tIns="20000" bIns="20000" anchor="ctr">
+          <a:bodyPr wrap="square" lIns="50000" rIns="50000" tIns="20000" bIns="20000" anchor="t">
             <a:spAutoFit/>
           </a:bodyPr>
           <a:lstStyle/>
           <a:p>
-            <a:r>
-              <a:rPr sz="2158" b="1" i="0">
+            <a:pPr algn="ctr"/>
+            <a:r>
+              <a:rPr sz="2000" b="1" i="0">
                 <a:solidFill>
                   <a:srgbClr val="1F4E3D"/>
                 </a:solidFill>
@@ -22426,13 +23627,25 @@
             </a:r>
           </a:p>
           <a:p>
+            <a:pPr algn="ctr"/>
             <a:r>
               <a:rPr sz="2000" b="0" i="0">
                 <a:solidFill>
                   <a:srgbClr val="34404A"/>
                 </a:solidFill>
               </a:rPr>
-              <a:t>Phân loại tại nguồn, hợp đồng đơn vị xử lý</a:t>
+              <a:t>Phân loại tại nguồn</a:t>
+            </a:r>
+          </a:p>
+          <a:p>
+            <a:pPr algn="ctr"/>
+            <a:r>
+              <a:rPr sz="2000" b="0" i="0">
+                <a:solidFill>
+                  <a:srgbClr val="34404A"/>
+                </a:solidFill>
+              </a:rPr>
+              <a:t>đơn vị xử lý</a:t>
             </a:r>
           </a:p>
         </p:txBody>
@@ -23243,7 +24456,7 @@
           <a:blip r:embed="rId2">
             <a:extLst>
               <a:ext uri="{96DAC541-7B7A-43D3-8B79-37D633B846F1}">
-                <ns0:svgBlip xmlns:ns0="http://schemas.microsoft.com/office/drawing/2016/SVG/main" r:embed="rId7"/>
+                <ns0:svgBlip xmlns:ns0="http://schemas.microsoft.com/office/drawing/2016/SVG/main" r:embed="rId5"/>
               </a:ext>
             </a:extLst>
           </a:blip>
@@ -23306,7 +24519,7 @@
           <a:blip r:embed="rId3">
             <a:extLst>
               <a:ext uri="{96DAC541-7B7A-43D3-8B79-37D633B846F1}">
-                <ns1:svgBlip xmlns:ns1="http://schemas.microsoft.com/office/drawing/2016/SVG/main" r:embed="rId6"/>
+                <ns1:svgBlip xmlns:ns1="http://schemas.microsoft.com/office/drawing/2016/SVG/main" r:embed="rId4"/>
               </a:ext>
             </a:extLst>
           </a:blip>
@@ -23324,39 +24537,9 @@
           </a:prstGeom>
         </p:spPr>
       </p:pic>
-      <p:pic>
-        <p:nvPicPr>
-          <p:cNvPr id="6" name="Picture 5" descr="deco_drip_white.png"/>
-          <p:cNvPicPr>
-            <a:picLocks noChangeAspect="1"/>
-          </p:cNvPicPr>
-          <p:nvPr/>
-        </p:nvPicPr>
-        <p:blipFill>
-          <a:blip r:embed="rId4">
-            <a:extLst>
-              <a:ext uri="{96DAC541-7B7A-43D3-8B79-37D633B846F1}">
-                <ns2:svgBlip xmlns:ns2="http://schemas.microsoft.com/office/drawing/2016/SVG/main" r:embed="rId5"/>
-              </a:ext>
-            </a:extLst>
-          </a:blip>
-          <a:stretch>
-            <a:fillRect/>
-          </a:stretch>
-        </p:blipFill>
-        <p:spPr>
-          <a:xfrm>
-            <a:off x="900000" y="4900000"/>
-            <a:ext cx="1000000" cy="1330000"/>
-          </a:xfrm>
-          <a:prstGeom prst="rect">
-            <a:avLst/>
-          </a:prstGeom>
-        </p:spPr>
-      </p:pic>
-      <p:sp>
-        <p:nvSpPr>
-          <p:cNvPr id="7" name="TextBox 6"/>
+      <p:sp>
+        <p:nvSpPr>
+          <p:cNvPr id="6" name="TextBox 5"/>
           <p:cNvSpPr txBox="1"/>
           <p:nvPr/>
         </p:nvSpPr>
@@ -23389,7 +24572,7 @@
       </p:sp>
       <p:sp>
         <p:nvSpPr>
-          <p:cNvPr id="8" name="TextBox 7"/>
+          <p:cNvPr id="7" name="TextBox 6"/>
           <p:cNvSpPr txBox="1"/>
           <p:nvPr/>
         </p:nvSpPr>
@@ -23494,7 +24677,7 @@
           <a:blip r:embed="rId2">
             <a:extLst>
               <a:ext uri="{96DAC541-7B7A-43D3-8B79-37D633B846F1}">
-                <ns0:svgBlip xmlns:ns0="http://schemas.microsoft.com/office/drawing/2016/SVG/main" r:embed="rId10"/>
+                <ns0:svgBlip xmlns:ns0="http://schemas.microsoft.com/office/drawing/2016/SVG/main" r:embed="rId11"/>
               </a:ext>
             </a:extLst>
           </a:blip>
@@ -23524,7 +24707,7 @@
           <a:blip r:embed="rId3">
             <a:extLst>
               <a:ext uri="{96DAC541-7B7A-43D3-8B79-37D633B846F1}">
-                <ns1:svgBlip xmlns:ns1="http://schemas.microsoft.com/office/drawing/2016/SVG/main" r:embed="rId12"/>
+                <ns1:svgBlip xmlns:ns1="http://schemas.microsoft.com/office/drawing/2016/SVG/main" r:embed="rId14"/>
               </a:ext>
             </a:extLst>
           </a:blip>
@@ -23672,7 +24855,7 @@
           <a:blip r:embed="rId4">
             <a:extLst>
               <a:ext uri="{96DAC541-7B7A-43D3-8B79-37D633B846F1}">
-                <ns2:svgBlip xmlns:ns2="http://schemas.microsoft.com/office/drawing/2016/SVG/main" r:embed="rId8"/>
+                <ns2:svgBlip xmlns:ns2="http://schemas.microsoft.com/office/drawing/2016/SVG/main" r:embed="rId9"/>
               </a:ext>
             </a:extLst>
           </a:blip>
@@ -23803,16 +24986,16 @@
       </p:sp>
       <p:sp>
         <p:nvSpPr>
-          <p:cNvPr id="12" name="Oval 11"/>
+          <p:cNvPr id="12" name="Rounded Rectangle 11"/>
           <p:cNvSpPr/>
           <p:nvPr/>
         </p:nvSpPr>
         <p:spPr>
           <a:xfrm>
-            <a:off x="640000" y="2426600"/>
-            <a:ext cx="716800" cy="716800"/>
-          </a:xfrm>
-          <a:prstGeom prst="ellipse">
+            <a:off x="548640" y="1830000"/>
+            <a:ext cx="4450000" cy="4470000"/>
+          </a:xfrm>
+          <a:prstGeom prst="roundRect">
             <a:avLst/>
           </a:prstGeom>
           <a:solidFill>
@@ -23845,9 +25028,53 @@
           </a:p>
         </p:txBody>
       </p:sp>
+      <p:sp>
+        <p:nvSpPr>
+          <p:cNvPr id="13" name="Oval 12"/>
+          <p:cNvSpPr/>
+          <p:nvPr/>
+        </p:nvSpPr>
+        <p:spPr>
+          <a:xfrm>
+            <a:off x="2148640" y="2350000"/>
+            <a:ext cx="1250000" cy="1250000"/>
+          </a:xfrm>
+          <a:prstGeom prst="ellipse">
+            <a:avLst/>
+          </a:prstGeom>
+          <a:solidFill>
+            <a:srgbClr val="C88A2E"/>
+          </a:solidFill>
+          <a:ln>
+            <a:noFill/>
+          </a:ln>
+          <a:effectLst/>
+        </p:spPr>
+        <p:style>
+          <a:lnRef idx="1">
+            <a:schemeClr val="accent1"/>
+          </a:lnRef>
+          <a:fillRef idx="3">
+            <a:schemeClr val="accent1"/>
+          </a:fillRef>
+          <a:effectRef idx="2">
+            <a:schemeClr val="accent1"/>
+          </a:effectRef>
+          <a:fontRef idx="minor">
+            <a:schemeClr val="lt1"/>
+          </a:fontRef>
+        </p:style>
+        <p:txBody>
+          <a:bodyPr rtlCol="0" anchor="ctr"/>
+          <a:lstStyle/>
+          <a:p>
+            <a:pPr algn="ctr"/>
+          </a:p>
+        </p:txBody>
+      </p:sp>
       <p:pic>
         <p:nvPicPr>
-          <p:cNvPr id="13" name="Picture 12" descr="factory_w.png"/>
+          <p:cNvPr id="14" name="Picture 13" descr="factory_w.png"/>
           <p:cNvPicPr>
             <a:picLocks noChangeAspect="1"/>
           </p:cNvPicPr>
@@ -23857,7 +25084,7 @@
           <a:blip r:embed="rId5">
             <a:extLst>
               <a:ext uri="{96DAC541-7B7A-43D3-8B79-37D633B846F1}">
-                <ns3:svgBlip xmlns:ns3="http://schemas.microsoft.com/office/drawing/2016/SVG/main" r:embed="rId9"/>
+                <ns3:svgBlip xmlns:ns3="http://schemas.microsoft.com/office/drawing/2016/SVG/main" r:embed="rId10"/>
               </a:ext>
             </a:extLst>
           </a:blip>
@@ -23867,8 +25094,8 @@
         </p:blipFill>
         <p:spPr>
           <a:xfrm>
-            <a:off x="783360" y="2569960"/>
-            <a:ext cx="430080" cy="430080"/>
+            <a:off x="2398640" y="2600000"/>
+            <a:ext cx="750000" cy="750000"/>
           </a:xfrm>
           <a:prstGeom prst="rect">
             <a:avLst/>
@@ -23877,14 +25104,14 @@
       </p:pic>
       <p:sp>
         <p:nvSpPr>
-          <p:cNvPr id="14" name="TextBox 13"/>
+          <p:cNvPr id="15" name="TextBox 14"/>
           <p:cNvSpPr txBox="1"/>
           <p:nvPr/>
         </p:nvSpPr>
         <p:spPr>
           <a:xfrm>
-            <a:off x="1736800" y="2145000"/>
-            <a:ext cx="9800000" cy="1280000"/>
+            <a:off x="798640" y="3930000"/>
+            <a:ext cx="3950000" cy="1700000"/>
           </a:xfrm>
           <a:prstGeom prst="rect">
             <a:avLst/>
@@ -23892,42 +25119,132 @@
           <a:noFill/>
         </p:spPr>
         <p:txBody>
-          <a:bodyPr wrap="square" lIns="50000" rIns="50000" tIns="20000" bIns="20000" anchor="ctr">
+          <a:bodyPr wrap="square" lIns="50000" rIns="50000" tIns="20000" bIns="20000" anchor="t">
             <a:spAutoFit/>
           </a:bodyPr>
           <a:lstStyle/>
           <a:p>
-            <a:r>
-              <a:rPr sz="2075" b="1" i="0">
-                <a:solidFill>
-                  <a:srgbClr val="1F4E3D"/>
-                </a:solidFill>
-              </a:rPr>
-              <a:t>Sản xuất sơn công nghiệp &amp; tàu biển</a:t>
-            </a:r>
-          </a:p>
-          <a:p>
+            <a:pPr algn="ctr"/>
+            <a:r>
+              <a:rPr sz="3000" b="1" i="0">
+                <a:solidFill>
+                  <a:srgbClr val="FFFFFF"/>
+                </a:solidFill>
+              </a:rPr>
+              <a:t>Sơn Hải Vân</a:t>
+            </a:r>
+          </a:p>
+          <a:p>
+            <a:pPr algn="ctr"/>
             <a:r>
               <a:rPr sz="2000" b="0" i="0">
                 <a:solidFill>
-                  <a:srgbClr val="34404A"/>
-                </a:solidFill>
-              </a:rPr>
-              <a:t>Chuyên dụng bảo vệ chống ăn mòn, chống cháy</a:t>
-            </a:r>
-          </a:p>
-        </p:txBody>
-      </p:sp>
-      <p:sp>
-        <p:nvSpPr>
-          <p:cNvPr id="15" name="Oval 14"/>
+                  <a:srgbClr val="CFE2D8"/>
+                </a:solidFill>
+              </a:rPr>
+              <a:t>Sơn công nghiệp &amp; tàu biển bảo vệ chuyên dụng</a:t>
+            </a:r>
+          </a:p>
+        </p:txBody>
+      </p:sp>
+      <p:sp>
+        <p:nvSpPr>
+          <p:cNvPr id="16" name="Rounded Rectangle 15"/>
           <p:cNvSpPr/>
           <p:nvPr/>
         </p:nvSpPr>
         <p:spPr>
           <a:xfrm>
-            <a:off x="640000" y="3706600"/>
-            <a:ext cx="716800" cy="716800"/>
+            <a:off x="5278640" y="1830000"/>
+            <a:ext cx="6360000" cy="1336666"/>
+          </a:xfrm>
+          <a:prstGeom prst="roundRect">
+            <a:avLst/>
+          </a:prstGeom>
+          <a:solidFill>
+            <a:srgbClr val="EEF4F0"/>
+          </a:solidFill>
+          <a:ln>
+            <a:noFill/>
+          </a:ln>
+          <a:effectLst/>
+        </p:spPr>
+        <p:style>
+          <a:lnRef idx="1">
+            <a:schemeClr val="accent1"/>
+          </a:lnRef>
+          <a:fillRef idx="3">
+            <a:schemeClr val="accent1"/>
+          </a:fillRef>
+          <a:effectRef idx="2">
+            <a:schemeClr val="accent1"/>
+          </a:effectRef>
+          <a:fontRef idx="minor">
+            <a:schemeClr val="lt1"/>
+          </a:fontRef>
+        </p:style>
+        <p:txBody>
+          <a:bodyPr rtlCol="0" anchor="ctr"/>
+          <a:lstStyle/>
+          <a:p>
+            <a:pPr algn="ctr"/>
+          </a:p>
+        </p:txBody>
+      </p:sp>
+      <p:sp>
+        <p:nvSpPr>
+          <p:cNvPr id="17" name="Rounded Rectangle 16"/>
+          <p:cNvSpPr/>
+          <p:nvPr/>
+        </p:nvSpPr>
+        <p:spPr>
+          <a:xfrm>
+            <a:off x="5278640" y="1830000"/>
+            <a:ext cx="80000" cy="1336666"/>
+          </a:xfrm>
+          <a:prstGeom prst="roundRect">
+            <a:avLst/>
+          </a:prstGeom>
+          <a:solidFill>
+            <a:srgbClr val="2C7A5A"/>
+          </a:solidFill>
+          <a:ln>
+            <a:noFill/>
+          </a:ln>
+          <a:effectLst/>
+        </p:spPr>
+        <p:style>
+          <a:lnRef idx="1">
+            <a:schemeClr val="accent1"/>
+          </a:lnRef>
+          <a:fillRef idx="3">
+            <a:schemeClr val="accent1"/>
+          </a:fillRef>
+          <a:effectRef idx="2">
+            <a:schemeClr val="accent1"/>
+          </a:effectRef>
+          <a:fontRef idx="minor">
+            <a:schemeClr val="lt1"/>
+          </a:fontRef>
+        </p:style>
+        <p:txBody>
+          <a:bodyPr rtlCol="0" anchor="ctr"/>
+          <a:lstStyle/>
+          <a:p>
+            <a:pPr algn="ctr"/>
+          </a:p>
+        </p:txBody>
+      </p:sp>
+      <p:sp>
+        <p:nvSpPr>
+          <p:cNvPr id="18" name="Oval 17"/>
+          <p:cNvSpPr/>
+          <p:nvPr/>
+        </p:nvSpPr>
+        <p:spPr>
+          <a:xfrm>
+            <a:off x="5558640" y="2198333"/>
+            <a:ext cx="600000" cy="600000"/>
           </a:xfrm>
           <a:prstGeom prst="ellipse">
             <a:avLst/>
@@ -23964,7 +25281,7 @@
       </p:sp>
       <p:pic>
         <p:nvPicPr>
-          <p:cNvPr id="16" name="Picture 15" descr="history_clock_w.png"/>
+          <p:cNvPr id="19" name="Picture 18" descr="history_clock_w.png"/>
           <p:cNvPicPr>
             <a:picLocks noChangeAspect="1"/>
           </p:cNvPicPr>
@@ -23974,7 +25291,7 @@
           <a:blip r:embed="rId6">
             <a:extLst>
               <a:ext uri="{96DAC541-7B7A-43D3-8B79-37D633B846F1}">
-                <ns4:svgBlip xmlns:ns4="http://schemas.microsoft.com/office/drawing/2016/SVG/main" r:embed="rId11"/>
+                <ns4:svgBlip xmlns:ns4="http://schemas.microsoft.com/office/drawing/2016/SVG/main" r:embed="rId12"/>
               </a:ext>
             </a:extLst>
           </a:blip>
@@ -23984,8 +25301,8 @@
         </p:blipFill>
         <p:spPr>
           <a:xfrm>
-            <a:off x="783360" y="3849960"/>
-            <a:ext cx="430080" cy="430080"/>
+            <a:off x="5678640" y="2318333"/>
+            <a:ext cx="360000" cy="360000"/>
           </a:xfrm>
           <a:prstGeom prst="rect">
             <a:avLst/>
@@ -23994,14 +25311,14 @@
       </p:pic>
       <p:sp>
         <p:nvSpPr>
-          <p:cNvPr id="17" name="TextBox 16"/>
+          <p:cNvPr id="20" name="TextBox 19"/>
           <p:cNvSpPr txBox="1"/>
           <p:nvPr/>
         </p:nvSpPr>
         <p:spPr>
           <a:xfrm>
-            <a:off x="1736800" y="3425000"/>
-            <a:ext cx="9800000" cy="1280000"/>
+            <a:off x="6478640" y="1830000"/>
+            <a:ext cx="4860000" cy="1336666"/>
           </a:xfrm>
           <a:prstGeom prst="rect">
             <a:avLst/>
@@ -24015,12 +25332,12 @@
           <a:lstStyle/>
           <a:p>
             <a:r>
-              <a:rPr sz="2075" b="1" i="0">
+              <a:rPr sz="2000" b="1" i="0">
                 <a:solidFill>
                   <a:srgbClr val="1F4E3D"/>
                 </a:solidFill>
               </a:rPr>
-              <a:t>Thành lập 2008 · sản xuất từ 2009</a:t>
+              <a:t>Thành lập 2008 · SX 2009</a:t>
             </a:r>
           </a:p>
           <a:p>
@@ -24030,21 +25347,109 @@
                   <a:srgbClr val="34404A"/>
                 </a:solidFill>
               </a:rPr>
-              <a:t>Đăng ký tại Sở KH&amp;ĐT TP. Hồ Chí Minh</a:t>
-            </a:r>
-          </a:p>
-        </p:txBody>
-      </p:sp>
-      <p:sp>
-        <p:nvSpPr>
-          <p:cNvPr id="18" name="Oval 17"/>
+              <a:t>Đăng ký tại Sở KH&amp;ĐT TP.HCM</a:t>
+            </a:r>
+          </a:p>
+        </p:txBody>
+      </p:sp>
+      <p:sp>
+        <p:nvSpPr>
+          <p:cNvPr id="21" name="Rounded Rectangle 20"/>
           <p:cNvSpPr/>
           <p:nvPr/>
         </p:nvSpPr>
         <p:spPr>
           <a:xfrm>
-            <a:off x="640000" y="4986600"/>
-            <a:ext cx="716800" cy="716800"/>
+            <a:off x="5278640" y="3396666"/>
+            <a:ext cx="6360000" cy="1336666"/>
+          </a:xfrm>
+          <a:prstGeom prst="roundRect">
+            <a:avLst/>
+          </a:prstGeom>
+          <a:solidFill>
+            <a:srgbClr val="EEF4F0"/>
+          </a:solidFill>
+          <a:ln>
+            <a:noFill/>
+          </a:ln>
+          <a:effectLst/>
+        </p:spPr>
+        <p:style>
+          <a:lnRef idx="1">
+            <a:schemeClr val="accent1"/>
+          </a:lnRef>
+          <a:fillRef idx="3">
+            <a:schemeClr val="accent1"/>
+          </a:fillRef>
+          <a:effectRef idx="2">
+            <a:schemeClr val="accent1"/>
+          </a:effectRef>
+          <a:fontRef idx="minor">
+            <a:schemeClr val="lt1"/>
+          </a:fontRef>
+        </p:style>
+        <p:txBody>
+          <a:bodyPr rtlCol="0" anchor="ctr"/>
+          <a:lstStyle/>
+          <a:p>
+            <a:pPr algn="ctr"/>
+          </a:p>
+        </p:txBody>
+      </p:sp>
+      <p:sp>
+        <p:nvSpPr>
+          <p:cNvPr id="22" name="Rounded Rectangle 21"/>
+          <p:cNvSpPr/>
+          <p:nvPr/>
+        </p:nvSpPr>
+        <p:spPr>
+          <a:xfrm>
+            <a:off x="5278640" y="3396666"/>
+            <a:ext cx="80000" cy="1336666"/>
+          </a:xfrm>
+          <a:prstGeom prst="roundRect">
+            <a:avLst/>
+          </a:prstGeom>
+          <a:solidFill>
+            <a:srgbClr val="2C7A5A"/>
+          </a:solidFill>
+          <a:ln>
+            <a:noFill/>
+          </a:ln>
+          <a:effectLst/>
+        </p:spPr>
+        <p:style>
+          <a:lnRef idx="1">
+            <a:schemeClr val="accent1"/>
+          </a:lnRef>
+          <a:fillRef idx="3">
+            <a:schemeClr val="accent1"/>
+          </a:fillRef>
+          <a:effectRef idx="2">
+            <a:schemeClr val="accent1"/>
+          </a:effectRef>
+          <a:fontRef idx="minor">
+            <a:schemeClr val="lt1"/>
+          </a:fontRef>
+        </p:style>
+        <p:txBody>
+          <a:bodyPr rtlCol="0" anchor="ctr"/>
+          <a:lstStyle/>
+          <a:p>
+            <a:pPr algn="ctr"/>
+          </a:p>
+        </p:txBody>
+      </p:sp>
+      <p:sp>
+        <p:nvSpPr>
+          <p:cNvPr id="23" name="Oval 22"/>
+          <p:cNvSpPr/>
+          <p:nvPr/>
+        </p:nvSpPr>
+        <p:spPr>
+          <a:xfrm>
+            <a:off x="5558640" y="3764999"/>
+            <a:ext cx="600000" cy="600000"/>
           </a:xfrm>
           <a:prstGeom prst="ellipse">
             <a:avLst/>
@@ -24081,7 +25486,7 @@
       </p:sp>
       <p:pic>
         <p:nvPicPr>
-          <p:cNvPr id="19" name="Picture 18" descr="target_w.png"/>
+          <p:cNvPr id="24" name="Picture 23" descr="target_w.png"/>
           <p:cNvPicPr>
             <a:picLocks noChangeAspect="1"/>
           </p:cNvPicPr>
@@ -24091,7 +25496,7 @@
           <a:blip r:embed="rId7">
             <a:extLst>
               <a:ext uri="{96DAC541-7B7A-43D3-8B79-37D633B846F1}">
-                <ns5:svgBlip xmlns:ns5="http://schemas.microsoft.com/office/drawing/2016/SVG/main" r:embed="rId13"/>
+                <ns5:svgBlip xmlns:ns5="http://schemas.microsoft.com/office/drawing/2016/SVG/main" r:embed="rId15"/>
               </a:ext>
             </a:extLst>
           </a:blip>
@@ -24101,8 +25506,8 @@
         </p:blipFill>
         <p:spPr>
           <a:xfrm>
-            <a:off x="783360" y="5129960"/>
-            <a:ext cx="430080" cy="430080"/>
+            <a:off x="5678640" y="3884999"/>
+            <a:ext cx="360000" cy="360000"/>
           </a:xfrm>
           <a:prstGeom prst="rect">
             <a:avLst/>
@@ -24111,14 +25516,14 @@
       </p:pic>
       <p:sp>
         <p:nvSpPr>
-          <p:cNvPr id="20" name="TextBox 19"/>
+          <p:cNvPr id="25" name="TextBox 24"/>
           <p:cNvSpPr txBox="1"/>
           <p:nvPr/>
         </p:nvSpPr>
         <p:spPr>
           <a:xfrm>
-            <a:off x="1736800" y="4705000"/>
-            <a:ext cx="9800000" cy="1280000"/>
+            <a:off x="6478640" y="3396666"/>
+            <a:ext cx="4860000" cy="1336666"/>
           </a:xfrm>
           <a:prstGeom prst="rect">
             <a:avLst/>
@@ -24132,12 +25537,12 @@
           <a:lstStyle/>
           <a:p>
             <a:r>
-              <a:rPr sz="2075" b="1" i="0">
+              <a:rPr sz="2000" b="1" i="0">
                 <a:solidFill>
                   <a:srgbClr val="1F4E3D"/>
                 </a:solidFill>
               </a:rPr>
-              <a:t>Doanh nghiệp vừa (SME) · mô hình B2B</a:t>
+              <a:t>Doanh nghiệp vừa (SME) · B2B</a:t>
             </a:r>
           </a:p>
           <a:p>
@@ -24147,7 +25552,212 @@
                   <a:srgbClr val="34404A"/>
                 </a:solidFill>
               </a:rPr>
-              <a:t>Một nhà máy sản xuất đặt tại Long An</a:t>
+              <a:t>Sản xuất theo dự án / hợp đồng</a:t>
+            </a:r>
+          </a:p>
+        </p:txBody>
+      </p:sp>
+      <p:sp>
+        <p:nvSpPr>
+          <p:cNvPr id="26" name="Rounded Rectangle 25"/>
+          <p:cNvSpPr/>
+          <p:nvPr/>
+        </p:nvSpPr>
+        <p:spPr>
+          <a:xfrm>
+            <a:off x="5278640" y="4963332"/>
+            <a:ext cx="6360000" cy="1336666"/>
+          </a:xfrm>
+          <a:prstGeom prst="roundRect">
+            <a:avLst/>
+          </a:prstGeom>
+          <a:solidFill>
+            <a:srgbClr val="EEF4F0"/>
+          </a:solidFill>
+          <a:ln>
+            <a:noFill/>
+          </a:ln>
+          <a:effectLst/>
+        </p:spPr>
+        <p:style>
+          <a:lnRef idx="1">
+            <a:schemeClr val="accent1"/>
+          </a:lnRef>
+          <a:fillRef idx="3">
+            <a:schemeClr val="accent1"/>
+          </a:fillRef>
+          <a:effectRef idx="2">
+            <a:schemeClr val="accent1"/>
+          </a:effectRef>
+          <a:fontRef idx="minor">
+            <a:schemeClr val="lt1"/>
+          </a:fontRef>
+        </p:style>
+        <p:txBody>
+          <a:bodyPr rtlCol="0" anchor="ctr"/>
+          <a:lstStyle/>
+          <a:p>
+            <a:pPr algn="ctr"/>
+          </a:p>
+        </p:txBody>
+      </p:sp>
+      <p:sp>
+        <p:nvSpPr>
+          <p:cNvPr id="27" name="Rounded Rectangle 26"/>
+          <p:cNvSpPr/>
+          <p:nvPr/>
+        </p:nvSpPr>
+        <p:spPr>
+          <a:xfrm>
+            <a:off x="5278640" y="4963332"/>
+            <a:ext cx="80000" cy="1336666"/>
+          </a:xfrm>
+          <a:prstGeom prst="roundRect">
+            <a:avLst/>
+          </a:prstGeom>
+          <a:solidFill>
+            <a:srgbClr val="2C7A5A"/>
+          </a:solidFill>
+          <a:ln>
+            <a:noFill/>
+          </a:ln>
+          <a:effectLst/>
+        </p:spPr>
+        <p:style>
+          <a:lnRef idx="1">
+            <a:schemeClr val="accent1"/>
+          </a:lnRef>
+          <a:fillRef idx="3">
+            <a:schemeClr val="accent1"/>
+          </a:fillRef>
+          <a:effectRef idx="2">
+            <a:schemeClr val="accent1"/>
+          </a:effectRef>
+          <a:fontRef idx="minor">
+            <a:schemeClr val="lt1"/>
+          </a:fontRef>
+        </p:style>
+        <p:txBody>
+          <a:bodyPr rtlCol="0" anchor="ctr"/>
+          <a:lstStyle/>
+          <a:p>
+            <a:pPr algn="ctr"/>
+          </a:p>
+        </p:txBody>
+      </p:sp>
+      <p:sp>
+        <p:nvSpPr>
+          <p:cNvPr id="28" name="Oval 27"/>
+          <p:cNvSpPr/>
+          <p:nvPr/>
+        </p:nvSpPr>
+        <p:spPr>
+          <a:xfrm>
+            <a:off x="5558640" y="5331665"/>
+            <a:ext cx="600000" cy="600000"/>
+          </a:xfrm>
+          <a:prstGeom prst="ellipse">
+            <a:avLst/>
+          </a:prstGeom>
+          <a:solidFill>
+            <a:srgbClr val="1F4E3D"/>
+          </a:solidFill>
+          <a:ln>
+            <a:noFill/>
+          </a:ln>
+          <a:effectLst/>
+        </p:spPr>
+        <p:style>
+          <a:lnRef idx="1">
+            <a:schemeClr val="accent1"/>
+          </a:lnRef>
+          <a:fillRef idx="3">
+            <a:schemeClr val="accent1"/>
+          </a:fillRef>
+          <a:effectRef idx="2">
+            <a:schemeClr val="accent1"/>
+          </a:effectRef>
+          <a:fontRef idx="minor">
+            <a:schemeClr val="lt1"/>
+          </a:fontRef>
+        </p:style>
+        <p:txBody>
+          <a:bodyPr rtlCol="0" anchor="ctr"/>
+          <a:lstStyle/>
+          <a:p>
+            <a:pPr algn="ctr"/>
+          </a:p>
+        </p:txBody>
+      </p:sp>
+      <p:pic>
+        <p:nvPicPr>
+          <p:cNvPr id="29" name="Picture 28" descr="paint_can_w.png"/>
+          <p:cNvPicPr>
+            <a:picLocks noChangeAspect="1"/>
+          </p:cNvPicPr>
+          <p:nvPr/>
+        </p:nvPicPr>
+        <p:blipFill>
+          <a:blip r:embed="rId8">
+            <a:extLst>
+              <a:ext uri="{96DAC541-7B7A-43D3-8B79-37D633B846F1}">
+                <ns6:svgBlip xmlns:ns6="http://schemas.microsoft.com/office/drawing/2016/SVG/main" r:embed="rId13"/>
+              </a:ext>
+            </a:extLst>
+          </a:blip>
+          <a:stretch>
+            <a:fillRect/>
+          </a:stretch>
+        </p:blipFill>
+        <p:spPr>
+          <a:xfrm>
+            <a:off x="5678640" y="5451665"/>
+            <a:ext cx="360000" cy="360000"/>
+          </a:xfrm>
+          <a:prstGeom prst="rect">
+            <a:avLst/>
+          </a:prstGeom>
+        </p:spPr>
+      </p:pic>
+      <p:sp>
+        <p:nvSpPr>
+          <p:cNvPr id="30" name="TextBox 29"/>
+          <p:cNvSpPr txBox="1"/>
+          <p:nvPr/>
+        </p:nvSpPr>
+        <p:spPr>
+          <a:xfrm>
+            <a:off x="6478640" y="4963332"/>
+            <a:ext cx="4860000" cy="1336666"/>
+          </a:xfrm>
+          <a:prstGeom prst="rect">
+            <a:avLst/>
+          </a:prstGeom>
+          <a:noFill/>
+        </p:spPr>
+        <p:txBody>
+          <a:bodyPr wrap="square" lIns="50000" rIns="50000" tIns="20000" bIns="20000" anchor="ctr">
+            <a:spAutoFit/>
+          </a:bodyPr>
+          <a:lstStyle/>
+          <a:p>
+            <a:r>
+              <a:rPr sz="2000" b="1" i="0">
+                <a:solidFill>
+                  <a:srgbClr val="1F4E3D"/>
+                </a:solidFill>
+              </a:rPr>
+              <a:t>Sơn chống ăn mòn, chống cháy</a:t>
+            </a:r>
+          </a:p>
+          <a:p>
+            <a:r>
+              <a:rPr sz="2000" b="0" i="0">
+                <a:solidFill>
+                  <a:srgbClr val="34404A"/>
+                </a:solidFill>
+              </a:rPr>
+              <a:t>Bảo vệ công trình &amp; hàng hải</a:t>
             </a:r>
           </a:p>
         </p:txBody>
@@ -25446,7 +27056,7 @@
           <a:blip r:embed="rId2">
             <a:extLst>
               <a:ext uri="{96DAC541-7B7A-43D3-8B79-37D633B846F1}">
-                <ns0:svgBlip xmlns:ns0="http://schemas.microsoft.com/office/drawing/2016/SVG/main" r:embed="rId6"/>
+                <ns0:svgBlip xmlns:ns0="http://schemas.microsoft.com/office/drawing/2016/SVG/main" r:embed="rId4"/>
               </a:ext>
             </a:extLst>
           </a:blip>
@@ -25509,7 +27119,7 @@
           <a:blip r:embed="rId3">
             <a:extLst>
               <a:ext uri="{96DAC541-7B7A-43D3-8B79-37D633B846F1}">
-                <ns1:svgBlip xmlns:ns1="http://schemas.microsoft.com/office/drawing/2016/SVG/main" r:embed="rId7"/>
+                <ns1:svgBlip xmlns:ns1="http://schemas.microsoft.com/office/drawing/2016/SVG/main" r:embed="rId5"/>
               </a:ext>
             </a:extLst>
           </a:blip>
@@ -25527,39 +27137,9 @@
           </a:prstGeom>
         </p:spPr>
       </p:pic>
-      <p:pic>
-        <p:nvPicPr>
-          <p:cNvPr id="6" name="Picture 5" descr="deco_drip_white.png"/>
-          <p:cNvPicPr>
-            <a:picLocks noChangeAspect="1"/>
-          </p:cNvPicPr>
-          <p:nvPr/>
-        </p:nvPicPr>
-        <p:blipFill>
-          <a:blip r:embed="rId4">
-            <a:extLst>
-              <a:ext uri="{96DAC541-7B7A-43D3-8B79-37D633B846F1}">
-                <ns2:svgBlip xmlns:ns2="http://schemas.microsoft.com/office/drawing/2016/SVG/main" r:embed="rId5"/>
-              </a:ext>
-            </a:extLst>
-          </a:blip>
-          <a:stretch>
-            <a:fillRect/>
-          </a:stretch>
-        </p:blipFill>
-        <p:spPr>
-          <a:xfrm>
-            <a:off x="780000" y="4820000"/>
-            <a:ext cx="880000" cy="1180000"/>
-          </a:xfrm>
-          <a:prstGeom prst="rect">
-            <a:avLst/>
-          </a:prstGeom>
-        </p:spPr>
-      </p:pic>
-      <p:sp>
-        <p:nvSpPr>
-          <p:cNvPr id="7" name="Rounded Rectangle 6"/>
+      <p:sp>
+        <p:nvSpPr>
+          <p:cNvPr id="6" name="Rounded Rectangle 5"/>
           <p:cNvSpPr/>
           <p:nvPr/>
         </p:nvSpPr>
@@ -25603,7 +27183,7 @@
       </p:sp>
       <p:sp>
         <p:nvSpPr>
-          <p:cNvPr id="8" name="Oval 7"/>
+          <p:cNvPr id="7" name="Oval 6"/>
           <p:cNvSpPr/>
           <p:nvPr/>
         </p:nvSpPr>
@@ -25655,7 +27235,7 @@
       </p:sp>
       <p:sp>
         <p:nvSpPr>
-          <p:cNvPr id="9" name="TextBox 8"/>
+          <p:cNvPr id="8" name="TextBox 7"/>
           <p:cNvSpPr txBox="1"/>
           <p:nvPr/>
         </p:nvSpPr>
@@ -25688,7 +27268,7 @@
       </p:sp>
       <p:sp>
         <p:nvSpPr>
-          <p:cNvPr id="10" name="TextBox 9"/>
+          <p:cNvPr id="9" name="TextBox 8"/>
           <p:cNvSpPr txBox="1"/>
           <p:nvPr/>
         </p:nvSpPr>

--- a/SuHeo/Báo cáo thực tập - Sơn Hải Vân.pptx
+++ b/SuHeo/Báo cáo thực tập - Sơn Hải Vân.pptx
@@ -7009,48 +7009,14 @@
         </p:blipFill>
         <p:spPr>
           <a:xfrm>
-            <a:off x="495847" y="1830000"/>
-            <a:ext cx="11200000" cy="4348235"/>
+            <a:off x="1891457" y="1855000"/>
+            <a:ext cx="8408780" cy="4420000"/>
           </a:xfrm>
           <a:prstGeom prst="rect">
             <a:avLst/>
           </a:prstGeom>
         </p:spPr>
       </p:pic>
-      <p:sp>
-        <p:nvSpPr>
-          <p:cNvPr id="13" name="TextBox 12"/>
-          <p:cNvSpPr txBox="1"/>
-          <p:nvPr/>
-        </p:nvSpPr>
-        <p:spPr>
-          <a:xfrm>
-            <a:off x="700000" y="6080000"/>
-            <a:ext cx="10800000" cy="360000"/>
-          </a:xfrm>
-          <a:prstGeom prst="rect">
-            <a:avLst/>
-          </a:prstGeom>
-          <a:noFill/>
-        </p:spPr>
-        <p:txBody>
-          <a:bodyPr wrap="square" lIns="50000" rIns="50000" tIns="20000" bIns="20000">
-            <a:spAutoFit/>
-          </a:bodyPr>
-          <a:lstStyle/>
-          <a:p>
-            <a:pPr algn="ctr"/>
-            <a:r>
-              <a:rPr sz="2000" b="0" i="1">
-                <a:solidFill>
-                  <a:srgbClr val="5B6E66"/>
-                </a:solidFill>
-              </a:rPr>
-              <a:t>Đầu vào → 6 công đoạn (có điểm Kiểm tra) → sản phẩm sơn phủ / sơn lót</a:t>
-            </a:r>
-          </a:p>
-        </p:txBody>
-      </p:sp>
     </p:spTree>
   </p:cSld>
   <p:clrMapOvr>

--- a/SuHeo/Báo cáo thực tập - Sơn Hải Vân.pptx
+++ b/SuHeo/Báo cáo thực tập - Sơn Hải Vân.pptx
@@ -4287,7 +4287,7 @@
           <a:blip r:embed="rId2">
             <a:extLst>
               <a:ext uri="{96DAC541-7B7A-43D3-8B79-37D633B846F1}">
-                <ns0:svgBlip xmlns:ns0="http://schemas.microsoft.com/office/drawing/2016/SVG/main" r:embed="rId6"/>
+                <ns0:svgBlip xmlns:ns0="http://schemas.microsoft.com/office/drawing/2016/SVG/main" r:embed="rId7"/>
               </a:ext>
             </a:extLst>
           </a:blip>
@@ -4317,7 +4317,7 @@
           <a:blip r:embed="rId3">
             <a:extLst>
               <a:ext uri="{96DAC541-7B7A-43D3-8B79-37D633B846F1}">
-                <ns1:svgBlip xmlns:ns1="http://schemas.microsoft.com/office/drawing/2016/SVG/main" r:embed="rId7"/>
+                <ns1:svgBlip xmlns:ns1="http://schemas.microsoft.com/office/drawing/2016/SVG/main" r:embed="rId8"/>
               </a:ext>
             </a:extLst>
           </a:blip>
@@ -4465,7 +4465,7 @@
           <a:blip r:embed="rId4">
             <a:extLst>
               <a:ext uri="{96DAC541-7B7A-43D3-8B79-37D633B846F1}">
-                <ns2:svgBlip xmlns:ns2="http://schemas.microsoft.com/office/drawing/2016/SVG/main" r:embed="rId5"/>
+                <ns2:svgBlip xmlns:ns2="http://schemas.microsoft.com/office/drawing/2016/SVG/main" r:embed="rId6"/>
               </a:ext>
             </a:extLst>
           </a:blip>
@@ -4603,7 +4603,7 @@
         <p:spPr>
           <a:xfrm>
             <a:off x="548640" y="1830000"/>
-            <a:ext cx="11090000" cy="1020000"/>
+            <a:ext cx="6550000" cy="1020000"/>
           </a:xfrm>
           <a:prstGeom prst="roundRect">
             <a:avLst/>
@@ -4646,8 +4646,8 @@
         </p:nvSpPr>
         <p:spPr>
           <a:xfrm>
-            <a:off x="900000" y="1830000"/>
-            <a:ext cx="10300000" cy="1020000"/>
+            <a:off x="820000" y="1830000"/>
+            <a:ext cx="6130000" cy="1020000"/>
           </a:xfrm>
           <a:prstGeom prst="rect">
             <a:avLst/>
@@ -4661,7 +4661,7 @@
           <a:lstStyle/>
           <a:p>
             <a:r>
-              <a:rPr sz="2075" b="1" i="0">
+              <a:rPr sz="2000" b="1" i="0">
                 <a:solidFill>
                   <a:srgbClr val="FFFFFF"/>
                 </a:solidFill>
@@ -4690,7 +4690,7 @@
         <p:spPr>
           <a:xfrm>
             <a:off x="548640" y="2980000"/>
-            <a:ext cx="11090000" cy="1020000"/>
+            <a:ext cx="6550000" cy="1020000"/>
           </a:xfrm>
           <a:prstGeom prst="roundRect">
             <a:avLst/>
@@ -4733,8 +4733,8 @@
         </p:nvSpPr>
         <p:spPr>
           <a:xfrm>
-            <a:off x="900000" y="2980000"/>
-            <a:ext cx="10300000" cy="1020000"/>
+            <a:off x="820000" y="2980000"/>
+            <a:ext cx="6130000" cy="1020000"/>
           </a:xfrm>
           <a:prstGeom prst="rect">
             <a:avLst/>
@@ -4748,7 +4748,7 @@
           <a:lstStyle/>
           <a:p>
             <a:r>
-              <a:rPr sz="2075" b="1" i="0">
+              <a:rPr sz="2000" b="1" i="0">
                 <a:solidFill>
                   <a:srgbClr val="FFFFFF"/>
                 </a:solidFill>
@@ -4777,7 +4777,7 @@
         <p:spPr>
           <a:xfrm>
             <a:off x="548640" y="4130000"/>
-            <a:ext cx="11090000" cy="1020000"/>
+            <a:ext cx="6550000" cy="1020000"/>
           </a:xfrm>
           <a:prstGeom prst="roundRect">
             <a:avLst/>
@@ -4820,8 +4820,8 @@
         </p:nvSpPr>
         <p:spPr>
           <a:xfrm>
-            <a:off x="900000" y="4130000"/>
-            <a:ext cx="10300000" cy="1020000"/>
+            <a:off x="820000" y="4130000"/>
+            <a:ext cx="6130000" cy="1020000"/>
           </a:xfrm>
           <a:prstGeom prst="rect">
             <a:avLst/>
@@ -4835,7 +4835,7 @@
           <a:lstStyle/>
           <a:p>
             <a:r>
-              <a:rPr sz="2075" b="1" i="0">
+              <a:rPr sz="2000" b="1" i="0">
                 <a:solidFill>
                   <a:srgbClr val="FFFFFF"/>
                 </a:solidFill>
@@ -4864,7 +4864,7 @@
         <p:spPr>
           <a:xfrm>
             <a:off x="548640" y="5280000"/>
-            <a:ext cx="11090000" cy="1020000"/>
+            <a:ext cx="6550000" cy="1020000"/>
           </a:xfrm>
           <a:prstGeom prst="roundRect">
             <a:avLst/>
@@ -4907,8 +4907,8 @@
         </p:nvSpPr>
         <p:spPr>
           <a:xfrm>
-            <a:off x="900000" y="5280000"/>
-            <a:ext cx="10300000" cy="1020000"/>
+            <a:off x="820000" y="5280000"/>
+            <a:ext cx="6130000" cy="1020000"/>
           </a:xfrm>
           <a:prstGeom prst="rect">
             <a:avLst/>
@@ -4922,7 +4922,7 @@
           <a:lstStyle/>
           <a:p>
             <a:r>
-              <a:rPr sz="2075" b="1" i="0">
+              <a:rPr sz="2000" b="1" i="0">
                 <a:solidFill>
                   <a:srgbClr val="FFFFFF"/>
                 </a:solidFill>
@@ -4938,6 +4938,108 @@
                 </a:solidFill>
               </a:rPr>
               <a:t>Đã xử lý bề mặt</a:t>
+            </a:r>
+          </a:p>
+        </p:txBody>
+      </p:sp>
+      <p:sp>
+        <p:nvSpPr>
+          <p:cNvPr id="20" name="Rectangle 19"/>
+          <p:cNvSpPr/>
+          <p:nvPr/>
+        </p:nvSpPr>
+        <p:spPr>
+          <a:xfrm>
+            <a:off x="7386000" y="2196217"/>
+            <a:ext cx="4288000" cy="3737565"/>
+          </a:xfrm>
+          <a:prstGeom prst="rect">
+            <a:avLst/>
+          </a:prstGeom>
+          <a:solidFill>
+            <a:srgbClr val="1F4E3D"/>
+          </a:solidFill>
+          <a:ln>
+            <a:noFill/>
+          </a:ln>
+          <a:effectLst/>
+        </p:spPr>
+        <p:style>
+          <a:lnRef idx="1">
+            <a:schemeClr val="accent1"/>
+          </a:lnRef>
+          <a:fillRef idx="3">
+            <a:schemeClr val="accent1"/>
+          </a:fillRef>
+          <a:effectRef idx="2">
+            <a:schemeClr val="accent1"/>
+          </a:effectRef>
+          <a:fontRef idx="minor">
+            <a:schemeClr val="lt1"/>
+          </a:fontRef>
+        </p:style>
+        <p:txBody>
+          <a:bodyPr rtlCol="0" anchor="ctr"/>
+          <a:lstStyle/>
+          <a:p>
+            <a:pPr algn="ctr"/>
+          </a:p>
+        </p:txBody>
+      </p:sp>
+      <p:pic>
+        <p:nvPicPr>
+          <p:cNvPr id="21" name="Picture 20" descr="ship_c.jpg"/>
+          <p:cNvPicPr>
+            <a:picLocks noChangeAspect="1"/>
+          </p:cNvPicPr>
+          <p:nvPr/>
+        </p:nvPicPr>
+        <p:blipFill>
+          <a:blip r:embed="rId5"/>
+          <a:stretch>
+            <a:fillRect/>
+          </a:stretch>
+        </p:blipFill>
+        <p:spPr>
+          <a:xfrm>
+            <a:off x="7420000" y="2230217"/>
+            <a:ext cx="4220000" cy="3669565"/>
+          </a:xfrm>
+          <a:prstGeom prst="rect">
+            <a:avLst/>
+          </a:prstGeom>
+        </p:spPr>
+      </p:pic>
+      <p:sp>
+        <p:nvSpPr>
+          <p:cNvPr id="22" name="TextBox 21"/>
+          <p:cNvSpPr txBox="1"/>
+          <p:nvPr/>
+        </p:nvSpPr>
+        <p:spPr>
+          <a:xfrm>
+            <a:off x="7386000" y="5949782"/>
+            <a:ext cx="4288000" cy="300000"/>
+          </a:xfrm>
+          <a:prstGeom prst="rect">
+            <a:avLst/>
+          </a:prstGeom>
+          <a:noFill/>
+        </p:spPr>
+        <p:txBody>
+          <a:bodyPr wrap="square" lIns="50000" rIns="50000" tIns="20000" bIns="20000">
+            <a:spAutoFit/>
+          </a:bodyPr>
+          <a:lstStyle/>
+          <a:p>
+            <a:pPr algn="ctr"/>
+            <a:r>
+              <a:rPr sz="1500" b="0" i="1">
+                <a:solidFill>
+                  <a:srgbClr val="5B6E66"/>
+                </a:solidFill>
+              </a:rPr>
+              <a:t>Sơn phủ bảo vệ thân tàu (minh họa)</a:t>
             </a:r>
           </a:p>
         </p:txBody>
@@ -21591,7 +21693,7 @@
           <a:blip r:embed="rId2">
             <a:extLst>
               <a:ext uri="{96DAC541-7B7A-43D3-8B79-37D633B846F1}">
-                <ns0:svgBlip xmlns:ns0="http://schemas.microsoft.com/office/drawing/2016/SVG/main" r:embed="rId10"/>
+                <ns0:svgBlip xmlns:ns0="http://schemas.microsoft.com/office/drawing/2016/SVG/main" r:embed="rId11"/>
               </a:ext>
             </a:extLst>
           </a:blip>
@@ -21621,7 +21723,7 @@
           <a:blip r:embed="rId3">
             <a:extLst>
               <a:ext uri="{96DAC541-7B7A-43D3-8B79-37D633B846F1}">
-                <ns1:svgBlip xmlns:ns1="http://schemas.microsoft.com/office/drawing/2016/SVG/main" r:embed="rId11"/>
+                <ns1:svgBlip xmlns:ns1="http://schemas.microsoft.com/office/drawing/2016/SVG/main" r:embed="rId12"/>
               </a:ext>
             </a:extLst>
           </a:blip>
@@ -21769,7 +21871,7 @@
           <a:blip r:embed="rId4">
             <a:extLst>
               <a:ext uri="{96DAC541-7B7A-43D3-8B79-37D633B846F1}">
-                <ns2:svgBlip xmlns:ns2="http://schemas.microsoft.com/office/drawing/2016/SVG/main" r:embed="rId7"/>
+                <ns2:svgBlip xmlns:ns2="http://schemas.microsoft.com/office/drawing/2016/SVG/main" r:embed="rId8"/>
               </a:ext>
             </a:extLst>
           </a:blip>
@@ -21907,7 +22009,7 @@
         <p:spPr>
           <a:xfrm>
             <a:off x="548640" y="1830000"/>
-            <a:ext cx="11090000" cy="2120000"/>
+            <a:ext cx="7050000" cy="2120000"/>
           </a:xfrm>
           <a:prstGeom prst="roundRect">
             <a:avLst/>
@@ -21950,8 +22052,8 @@
         </p:nvSpPr>
         <p:spPr>
           <a:xfrm>
-            <a:off x="820000" y="2390000"/>
-            <a:ext cx="1000000" cy="1000000"/>
+            <a:off x="820000" y="2415000"/>
+            <a:ext cx="950000" cy="950000"/>
           </a:xfrm>
           <a:prstGeom prst="ellipse">
             <a:avLst/>
@@ -21998,7 +22100,7 @@
           <a:blip r:embed="rId5">
             <a:extLst>
               <a:ext uri="{96DAC541-7B7A-43D3-8B79-37D633B846F1}">
-                <ns3:svgBlip xmlns:ns3="http://schemas.microsoft.com/office/drawing/2016/SVG/main" r:embed="rId8"/>
+                <ns3:svgBlip xmlns:ns3="http://schemas.microsoft.com/office/drawing/2016/SVG/main" r:embed="rId9"/>
               </a:ext>
             </a:extLst>
           </a:blip>
@@ -22008,8 +22110,8 @@
         </p:blipFill>
         <p:spPr>
           <a:xfrm>
-            <a:off x="1020000" y="2590000"/>
-            <a:ext cx="600000" cy="600000"/>
+            <a:off x="1010000" y="2605000"/>
+            <a:ext cx="570000" cy="570000"/>
           </a:xfrm>
           <a:prstGeom prst="rect">
             <a:avLst/>
@@ -22024,8 +22126,8 @@
         </p:nvSpPr>
         <p:spPr>
           <a:xfrm>
-            <a:off x="2100000" y="1950000"/>
-            <a:ext cx="9200000" cy="1880000"/>
+            <a:off x="1900000" y="1940000"/>
+            <a:ext cx="5550000" cy="1900000"/>
           </a:xfrm>
           <a:prstGeom prst="rect">
             <a:avLst/>
@@ -22039,7 +22141,7 @@
           <a:lstStyle/>
           <a:p>
             <a:r>
-              <a:rPr sz="2075" b="1" i="0">
+              <a:rPr sz="2000" b="1" i="0">
                 <a:solidFill>
                   <a:srgbClr val="1F4E3D"/>
                 </a:solidFill>
@@ -22094,7 +22196,7 @@
         <p:spPr>
           <a:xfrm>
             <a:off x="548640" y="4180000"/>
-            <a:ext cx="11090000" cy="2120000"/>
+            <a:ext cx="7050000" cy="2120000"/>
           </a:xfrm>
           <a:prstGeom prst="roundRect">
             <a:avLst/>
@@ -22137,8 +22239,8 @@
         </p:nvSpPr>
         <p:spPr>
           <a:xfrm>
-            <a:off x="820000" y="4740000"/>
-            <a:ext cx="1000000" cy="1000000"/>
+            <a:off x="820000" y="4765000"/>
+            <a:ext cx="950000" cy="950000"/>
           </a:xfrm>
           <a:prstGeom prst="ellipse">
             <a:avLst/>
@@ -22185,7 +22287,7 @@
           <a:blip r:embed="rId6">
             <a:extLst>
               <a:ext uri="{96DAC541-7B7A-43D3-8B79-37D633B846F1}">
-                <ns4:svgBlip xmlns:ns4="http://schemas.microsoft.com/office/drawing/2016/SVG/main" r:embed="rId9"/>
+                <ns4:svgBlip xmlns:ns4="http://schemas.microsoft.com/office/drawing/2016/SVG/main" r:embed="rId10"/>
               </a:ext>
             </a:extLst>
           </a:blip>
@@ -22195,8 +22297,8 @@
         </p:blipFill>
         <p:spPr>
           <a:xfrm>
-            <a:off x="1020000" y="4940000"/>
-            <a:ext cx="600000" cy="600000"/>
+            <a:off x="1010000" y="4955000"/>
+            <a:ext cx="570000" cy="570000"/>
           </a:xfrm>
           <a:prstGeom prst="rect">
             <a:avLst/>
@@ -22211,8 +22313,8 @@
         </p:nvSpPr>
         <p:spPr>
           <a:xfrm>
-            <a:off x="2100000" y="4300000"/>
-            <a:ext cx="9200000" cy="1880000"/>
+            <a:off x="1900000" y="4290000"/>
+            <a:ext cx="5550000" cy="1900000"/>
           </a:xfrm>
           <a:prstGeom prst="rect">
             <a:avLst/>
@@ -22226,7 +22328,7 @@
           <a:lstStyle/>
           <a:p>
             <a:r>
-              <a:rPr sz="2075" b="1" i="0">
+              <a:rPr sz="2000" b="1" i="0">
                 <a:solidFill>
                   <a:srgbClr val="1F4E3D"/>
                 </a:solidFill>
@@ -22268,6 +22370,108 @@
                 </a:solidFill>
               </a:rPr>
               <a:t>thông gió cưỡng bức, mặt nạ, quan trắc không khí</a:t>
+            </a:r>
+          </a:p>
+        </p:txBody>
+      </p:sp>
+      <p:sp>
+        <p:nvSpPr>
+          <p:cNvPr id="20" name="Rectangle 19"/>
+          <p:cNvSpPr/>
+          <p:nvPr/>
+        </p:nvSpPr>
+        <p:spPr>
+          <a:xfrm>
+            <a:off x="7864640" y="2404712"/>
+            <a:ext cx="3808000" cy="3320575"/>
+          </a:xfrm>
+          <a:prstGeom prst="rect">
+            <a:avLst/>
+          </a:prstGeom>
+          <a:solidFill>
+            <a:srgbClr val="1F4E3D"/>
+          </a:solidFill>
+          <a:ln>
+            <a:noFill/>
+          </a:ln>
+          <a:effectLst/>
+        </p:spPr>
+        <p:style>
+          <a:lnRef idx="1">
+            <a:schemeClr val="accent1"/>
+          </a:lnRef>
+          <a:fillRef idx="3">
+            <a:schemeClr val="accent1"/>
+          </a:fillRef>
+          <a:effectRef idx="2">
+            <a:schemeClr val="accent1"/>
+          </a:effectRef>
+          <a:fontRef idx="minor">
+            <a:schemeClr val="lt1"/>
+          </a:fontRef>
+        </p:style>
+        <p:txBody>
+          <a:bodyPr rtlCol="0" anchor="ctr"/>
+          <a:lstStyle/>
+          <a:p>
+            <a:pPr algn="ctr"/>
+          </a:p>
+        </p:txBody>
+      </p:sp>
+      <p:pic>
+        <p:nvPicPr>
+          <p:cNvPr id="21" name="Picture 20" descr="ppe_c.jpg"/>
+          <p:cNvPicPr>
+            <a:picLocks noChangeAspect="1"/>
+          </p:cNvPicPr>
+          <p:nvPr/>
+        </p:nvPicPr>
+        <p:blipFill>
+          <a:blip r:embed="rId7"/>
+          <a:stretch>
+            <a:fillRect/>
+          </a:stretch>
+        </p:blipFill>
+        <p:spPr>
+          <a:xfrm>
+            <a:off x="7898640" y="2438712"/>
+            <a:ext cx="3740000" cy="3252575"/>
+          </a:xfrm>
+          <a:prstGeom prst="rect">
+            <a:avLst/>
+          </a:prstGeom>
+        </p:spPr>
+      </p:pic>
+      <p:sp>
+        <p:nvSpPr>
+          <p:cNvPr id="22" name="TextBox 21"/>
+          <p:cNvSpPr txBox="1"/>
+          <p:nvPr/>
+        </p:nvSpPr>
+        <p:spPr>
+          <a:xfrm>
+            <a:off x="7864640" y="5741287"/>
+            <a:ext cx="3808000" cy="300000"/>
+          </a:xfrm>
+          <a:prstGeom prst="rect">
+            <a:avLst/>
+          </a:prstGeom>
+          <a:noFill/>
+        </p:spPr>
+        <p:txBody>
+          <a:bodyPr wrap="square" lIns="50000" rIns="50000" tIns="20000" bIns="20000">
+            <a:spAutoFit/>
+          </a:bodyPr>
+          <a:lstStyle/>
+          <a:p>
+            <a:pPr algn="ctr"/>
+            <a:r>
+              <a:rPr sz="1500" b="0" i="1">
+                <a:solidFill>
+                  <a:srgbClr val="5B6E66"/>
+                </a:solidFill>
+              </a:rPr>
+              <a:t>Trang bị bảo hộ khi làm việc</a:t>
             </a:r>
           </a:p>
         </p:txBody>
@@ -22705,8 +22909,8 @@
         </p:nvSpPr>
         <p:spPr>
           <a:xfrm>
-            <a:off x="820000" y="2390000"/>
-            <a:ext cx="1000000" cy="1000000"/>
+            <a:off x="820000" y="2415000"/>
+            <a:ext cx="950000" cy="950000"/>
           </a:xfrm>
           <a:prstGeom prst="ellipse">
             <a:avLst/>
@@ -22763,8 +22967,8 @@
         </p:blipFill>
         <p:spPr>
           <a:xfrm>
-            <a:off x="1020000" y="2590000"/>
-            <a:ext cx="600000" cy="600000"/>
+            <a:off x="1010000" y="2605000"/>
+            <a:ext cx="570000" cy="570000"/>
           </a:xfrm>
           <a:prstGeom prst="rect">
             <a:avLst/>
@@ -22779,8 +22983,8 @@
         </p:nvSpPr>
         <p:spPr>
           <a:xfrm>
-            <a:off x="2100000" y="1950000"/>
-            <a:ext cx="9200000" cy="1880000"/>
+            <a:off x="1900000" y="1940000"/>
+            <a:ext cx="9590000" cy="1900000"/>
           </a:xfrm>
           <a:prstGeom prst="rect">
             <a:avLst/>
@@ -22794,7 +22998,7 @@
           <a:lstStyle/>
           <a:p>
             <a:r>
-              <a:rPr sz="2075" b="1" i="0">
+              <a:rPr sz="2000" b="1" i="0">
                 <a:solidFill>
                   <a:srgbClr val="1F4E3D"/>
                 </a:solidFill>
@@ -22892,8 +23096,8 @@
         </p:nvSpPr>
         <p:spPr>
           <a:xfrm>
-            <a:off x="820000" y="4740000"/>
-            <a:ext cx="1000000" cy="1000000"/>
+            <a:off x="820000" y="4765000"/>
+            <a:ext cx="950000" cy="950000"/>
           </a:xfrm>
           <a:prstGeom prst="ellipse">
             <a:avLst/>
@@ -22950,8 +23154,8 @@
         </p:blipFill>
         <p:spPr>
           <a:xfrm>
-            <a:off x="1020000" y="4940000"/>
-            <a:ext cx="600000" cy="600000"/>
+            <a:off x="1010000" y="4955000"/>
+            <a:ext cx="570000" cy="570000"/>
           </a:xfrm>
           <a:prstGeom prst="rect">
             <a:avLst/>
@@ -22966,8 +23170,8 @@
         </p:nvSpPr>
         <p:spPr>
           <a:xfrm>
-            <a:off x="2100000" y="4300000"/>
-            <a:ext cx="9200000" cy="1880000"/>
+            <a:off x="1900000" y="4290000"/>
+            <a:ext cx="9590000" cy="1900000"/>
           </a:xfrm>
           <a:prstGeom prst="rect">
             <a:avLst/>
@@ -22981,7 +23185,7 @@
           <a:lstStyle/>
           <a:p>
             <a:r>
-              <a:rPr sz="2075" b="1" i="0">
+              <a:rPr sz="2000" b="1" i="0">
                 <a:solidFill>
                   <a:srgbClr val="1F4E3D"/>
                 </a:solidFill>
@@ -23101,7 +23305,7 @@
           <a:blip r:embed="rId2">
             <a:extLst>
               <a:ext uri="{96DAC541-7B7A-43D3-8B79-37D633B846F1}">
-                <ns0:svgBlip xmlns:ns0="http://schemas.microsoft.com/office/drawing/2016/SVG/main" r:embed="rId9"/>
+                <ns0:svgBlip xmlns:ns0="http://schemas.microsoft.com/office/drawing/2016/SVG/main" r:embed="rId10"/>
               </a:ext>
             </a:extLst>
           </a:blip>
@@ -23131,7 +23335,7 @@
           <a:blip r:embed="rId3">
             <a:extLst>
               <a:ext uri="{96DAC541-7B7A-43D3-8B79-37D633B846F1}">
-                <ns1:svgBlip xmlns:ns1="http://schemas.microsoft.com/office/drawing/2016/SVG/main" r:embed="rId12"/>
+                <ns1:svgBlip xmlns:ns1="http://schemas.microsoft.com/office/drawing/2016/SVG/main" r:embed="rId13"/>
               </a:ext>
             </a:extLst>
           </a:blip>
@@ -23279,7 +23483,7 @@
           <a:blip r:embed="rId4">
             <a:extLst>
               <a:ext uri="{96DAC541-7B7A-43D3-8B79-37D633B846F1}">
-                <ns2:svgBlip xmlns:ns2="http://schemas.microsoft.com/office/drawing/2016/SVG/main" r:embed="rId8"/>
+                <ns2:svgBlip xmlns:ns2="http://schemas.microsoft.com/office/drawing/2016/SVG/main" r:embed="rId9"/>
               </a:ext>
             </a:extLst>
           </a:blip>
@@ -23410,14 +23614,116 @@
       </p:sp>
       <p:sp>
         <p:nvSpPr>
-          <p:cNvPr id="12" name="Rounded Rectangle 11"/>
+          <p:cNvPr id="12" name="Rectangle 11"/>
           <p:cNvSpPr/>
           <p:nvPr/>
         </p:nvSpPr>
         <p:spPr>
           <a:xfrm>
-            <a:off x="548640" y="1830000"/>
-            <a:ext cx="3496666" cy="4470000"/>
+            <a:off x="514640" y="2138808"/>
+            <a:ext cx="4418000" cy="3852383"/>
+          </a:xfrm>
+          <a:prstGeom prst="rect">
+            <a:avLst/>
+          </a:prstGeom>
+          <a:solidFill>
+            <a:srgbClr val="1F4E3D"/>
+          </a:solidFill>
+          <a:ln>
+            <a:noFill/>
+          </a:ln>
+          <a:effectLst/>
+        </p:spPr>
+        <p:style>
+          <a:lnRef idx="1">
+            <a:schemeClr val="accent1"/>
+          </a:lnRef>
+          <a:fillRef idx="3">
+            <a:schemeClr val="accent1"/>
+          </a:fillRef>
+          <a:effectRef idx="2">
+            <a:schemeClr val="accent1"/>
+          </a:effectRef>
+          <a:fontRef idx="minor">
+            <a:schemeClr val="lt1"/>
+          </a:fontRef>
+        </p:style>
+        <p:txBody>
+          <a:bodyPr rtlCol="0" anchor="ctr"/>
+          <a:lstStyle/>
+          <a:p>
+            <a:pPr algn="ctr"/>
+          </a:p>
+        </p:txBody>
+      </p:sp>
+      <p:pic>
+        <p:nvPicPr>
+          <p:cNvPr id="13" name="Picture 12" descr="waste_c.jpg"/>
+          <p:cNvPicPr>
+            <a:picLocks noChangeAspect="1"/>
+          </p:cNvPicPr>
+          <p:nvPr/>
+        </p:nvPicPr>
+        <p:blipFill>
+          <a:blip r:embed="rId5"/>
+          <a:stretch>
+            <a:fillRect/>
+          </a:stretch>
+        </p:blipFill>
+        <p:spPr>
+          <a:xfrm>
+            <a:off x="548640" y="2172808"/>
+            <a:ext cx="4350000" cy="3784383"/>
+          </a:xfrm>
+          <a:prstGeom prst="rect">
+            <a:avLst/>
+          </a:prstGeom>
+        </p:spPr>
+      </p:pic>
+      <p:sp>
+        <p:nvSpPr>
+          <p:cNvPr id="14" name="TextBox 13"/>
+          <p:cNvSpPr txBox="1"/>
+          <p:nvPr/>
+        </p:nvSpPr>
+        <p:spPr>
+          <a:xfrm>
+            <a:off x="514640" y="6007191"/>
+            <a:ext cx="4418000" cy="300000"/>
+          </a:xfrm>
+          <a:prstGeom prst="rect">
+            <a:avLst/>
+          </a:prstGeom>
+          <a:noFill/>
+        </p:spPr>
+        <p:txBody>
+          <a:bodyPr wrap="square" lIns="50000" rIns="50000" tIns="20000" bIns="20000">
+            <a:spAutoFit/>
+          </a:bodyPr>
+          <a:lstStyle/>
+          <a:p>
+            <a:pPr algn="ctr"/>
+            <a:r>
+              <a:rPr sz="1500" b="0" i="1">
+                <a:solidFill>
+                  <a:srgbClr val="5B6E66"/>
+                </a:solidFill>
+              </a:rPr>
+              <a:t>Hệ thống xử lý nước thải</a:t>
+            </a:r>
+          </a:p>
+        </p:txBody>
+      </p:sp>
+      <p:sp>
+        <p:nvSpPr>
+          <p:cNvPr id="15" name="Rounded Rectangle 14"/>
+          <p:cNvSpPr/>
+          <p:nvPr/>
+        </p:nvSpPr>
+        <p:spPr>
+          <a:xfrm>
+            <a:off x="5218640" y="1830000"/>
+            <a:ext cx="6420000" cy="1336666"/>
           </a:xfrm>
           <a:prstGeom prst="roundRect">
             <a:avLst/>
@@ -23454,16 +23760,60 @@
       </p:sp>
       <p:sp>
         <p:nvSpPr>
-          <p:cNvPr id="13" name="Rounded Rectangle 12"/>
+          <p:cNvPr id="16" name="Rounded Rectangle 15"/>
           <p:cNvSpPr/>
           <p:nvPr/>
         </p:nvSpPr>
         <p:spPr>
           <a:xfrm>
-            <a:off x="548640" y="1830000"/>
-            <a:ext cx="3496666" cy="130000"/>
+            <a:off x="5218640" y="1830000"/>
+            <a:ext cx="80000" cy="1336666"/>
           </a:xfrm>
           <a:prstGeom prst="roundRect">
+            <a:avLst/>
+          </a:prstGeom>
+          <a:solidFill>
+            <a:srgbClr val="2C7A5A"/>
+          </a:solidFill>
+          <a:ln>
+            <a:noFill/>
+          </a:ln>
+          <a:effectLst/>
+        </p:spPr>
+        <p:style>
+          <a:lnRef idx="1">
+            <a:schemeClr val="accent1"/>
+          </a:lnRef>
+          <a:fillRef idx="3">
+            <a:schemeClr val="accent1"/>
+          </a:fillRef>
+          <a:effectRef idx="2">
+            <a:schemeClr val="accent1"/>
+          </a:effectRef>
+          <a:fontRef idx="minor">
+            <a:schemeClr val="lt1"/>
+          </a:fontRef>
+        </p:style>
+        <p:txBody>
+          <a:bodyPr rtlCol="0" anchor="ctr"/>
+          <a:lstStyle/>
+          <a:p>
+            <a:pPr algn="ctr"/>
+          </a:p>
+        </p:txBody>
+      </p:sp>
+      <p:sp>
+        <p:nvSpPr>
+          <p:cNvPr id="17" name="Oval 16"/>
+          <p:cNvSpPr/>
+          <p:nvPr/>
+        </p:nvSpPr>
+        <p:spPr>
+          <a:xfrm>
+            <a:off x="5498640" y="2188333"/>
+            <a:ext cx="620000" cy="620000"/>
+          </a:xfrm>
+          <a:prstGeom prst="ellipse">
             <a:avLst/>
           </a:prstGeom>
           <a:solidFill>
@@ -23496,16 +23846,177 @@
           </a:p>
         </p:txBody>
       </p:sp>
-      <p:sp>
-        <p:nvSpPr>
-          <p:cNvPr id="14" name="Oval 13"/>
+      <p:pic>
+        <p:nvPicPr>
+          <p:cNvPr id="18" name="Picture 17" descr="smoke_air_w.png"/>
+          <p:cNvPicPr>
+            <a:picLocks noChangeAspect="1"/>
+          </p:cNvPicPr>
+          <p:nvPr/>
+        </p:nvPicPr>
+        <p:blipFill>
+          <a:blip r:embed="rId6">
+            <a:extLst>
+              <a:ext uri="{96DAC541-7B7A-43D3-8B79-37D633B846F1}">
+                <ns3:svgBlip xmlns:ns3="http://schemas.microsoft.com/office/drawing/2016/SVG/main" r:embed="rId11"/>
+              </a:ext>
+            </a:extLst>
+          </a:blip>
+          <a:stretch>
+            <a:fillRect/>
+          </a:stretch>
+        </p:blipFill>
+        <p:spPr>
+          <a:xfrm>
+            <a:off x="5622640" y="2312333"/>
+            <a:ext cx="372000" cy="372000"/>
+          </a:xfrm>
+          <a:prstGeom prst="rect">
+            <a:avLst/>
+          </a:prstGeom>
+        </p:spPr>
+      </p:pic>
+      <p:sp>
+        <p:nvSpPr>
+          <p:cNvPr id="19" name="TextBox 18"/>
+          <p:cNvSpPr txBox="1"/>
+          <p:nvPr/>
+        </p:nvSpPr>
+        <p:spPr>
+          <a:xfrm>
+            <a:off x="6438640" y="1830000"/>
+            <a:ext cx="4900000" cy="1336666"/>
+          </a:xfrm>
+          <a:prstGeom prst="rect">
+            <a:avLst/>
+          </a:prstGeom>
+          <a:noFill/>
+        </p:spPr>
+        <p:txBody>
+          <a:bodyPr wrap="square" lIns="50000" rIns="50000" tIns="20000" bIns="20000" anchor="ctr">
+            <a:spAutoFit/>
+          </a:bodyPr>
+          <a:lstStyle/>
+          <a:p>
+            <a:r>
+              <a:rPr sz="2000" b="1" i="0">
+                <a:solidFill>
+                  <a:srgbClr val="1F4E3D"/>
+                </a:solidFill>
+              </a:rPr>
+              <a:t>Khí thải — hơi VOC</a:t>
+            </a:r>
+          </a:p>
+          <a:p>
+            <a:r>
+              <a:rPr sz="2000" b="0" i="0">
+                <a:solidFill>
+                  <a:srgbClr val="34404A"/>
+                </a:solidFill>
+              </a:rPr>
+              <a:t>Chụp hút → than hoạt tính / buồng đốt</a:t>
+            </a:r>
+          </a:p>
+        </p:txBody>
+      </p:sp>
+      <p:sp>
+        <p:nvSpPr>
+          <p:cNvPr id="20" name="Rounded Rectangle 19"/>
           <p:cNvSpPr/>
           <p:nvPr/>
         </p:nvSpPr>
         <p:spPr>
           <a:xfrm>
-            <a:off x="1906973" y="2210000"/>
-            <a:ext cx="780000" cy="780000"/>
+            <a:off x="5218640" y="3396666"/>
+            <a:ext cx="6420000" cy="1336666"/>
+          </a:xfrm>
+          <a:prstGeom prst="roundRect">
+            <a:avLst/>
+          </a:prstGeom>
+          <a:solidFill>
+            <a:srgbClr val="EEF4F0"/>
+          </a:solidFill>
+          <a:ln>
+            <a:noFill/>
+          </a:ln>
+          <a:effectLst/>
+        </p:spPr>
+        <p:style>
+          <a:lnRef idx="1">
+            <a:schemeClr val="accent1"/>
+          </a:lnRef>
+          <a:fillRef idx="3">
+            <a:schemeClr val="accent1"/>
+          </a:fillRef>
+          <a:effectRef idx="2">
+            <a:schemeClr val="accent1"/>
+          </a:effectRef>
+          <a:fontRef idx="minor">
+            <a:schemeClr val="lt1"/>
+          </a:fontRef>
+        </p:style>
+        <p:txBody>
+          <a:bodyPr rtlCol="0" anchor="ctr"/>
+          <a:lstStyle/>
+          <a:p>
+            <a:pPr algn="ctr"/>
+          </a:p>
+        </p:txBody>
+      </p:sp>
+      <p:sp>
+        <p:nvSpPr>
+          <p:cNvPr id="21" name="Rounded Rectangle 20"/>
+          <p:cNvSpPr/>
+          <p:nvPr/>
+        </p:nvSpPr>
+        <p:spPr>
+          <a:xfrm>
+            <a:off x="5218640" y="3396666"/>
+            <a:ext cx="80000" cy="1336666"/>
+          </a:xfrm>
+          <a:prstGeom prst="roundRect">
+            <a:avLst/>
+          </a:prstGeom>
+          <a:solidFill>
+            <a:srgbClr val="2C7A5A"/>
+          </a:solidFill>
+          <a:ln>
+            <a:noFill/>
+          </a:ln>
+          <a:effectLst/>
+        </p:spPr>
+        <p:style>
+          <a:lnRef idx="1">
+            <a:schemeClr val="accent1"/>
+          </a:lnRef>
+          <a:fillRef idx="3">
+            <a:schemeClr val="accent1"/>
+          </a:fillRef>
+          <a:effectRef idx="2">
+            <a:schemeClr val="accent1"/>
+          </a:effectRef>
+          <a:fontRef idx="minor">
+            <a:schemeClr val="lt1"/>
+          </a:fontRef>
+        </p:style>
+        <p:txBody>
+          <a:bodyPr rtlCol="0" anchor="ctr"/>
+          <a:lstStyle/>
+          <a:p>
+            <a:pPr algn="ctr"/>
+          </a:p>
+        </p:txBody>
+      </p:sp>
+      <p:sp>
+        <p:nvSpPr>
+          <p:cNvPr id="22" name="Oval 21"/>
+          <p:cNvSpPr/>
+          <p:nvPr/>
+        </p:nvSpPr>
+        <p:spPr>
+          <a:xfrm>
+            <a:off x="5498640" y="3754999"/>
+            <a:ext cx="620000" cy="620000"/>
           </a:xfrm>
           <a:prstGeom prst="ellipse">
             <a:avLst/>
@@ -23542,17 +24053,17 @@
       </p:sp>
       <p:pic>
         <p:nvPicPr>
-          <p:cNvPr id="15" name="Picture 14" descr="smoke_air_w.png"/>
+          <p:cNvPr id="23" name="Picture 22" descr="water_waste_w.png"/>
           <p:cNvPicPr>
             <a:picLocks noChangeAspect="1"/>
           </p:cNvPicPr>
           <p:nvPr/>
         </p:nvPicPr>
         <p:blipFill>
-          <a:blip r:embed="rId5">
+          <a:blip r:embed="rId7">
             <a:extLst>
               <a:ext uri="{96DAC541-7B7A-43D3-8B79-37D633B846F1}">
-                <ns3:svgBlip xmlns:ns3="http://schemas.microsoft.com/office/drawing/2016/SVG/main" r:embed="rId10"/>
+                <ns4:svgBlip xmlns:ns4="http://schemas.microsoft.com/office/drawing/2016/SVG/main" r:embed="rId14"/>
               </a:ext>
             </a:extLst>
           </a:blip>
@@ -23562,8 +24073,8 @@
         </p:blipFill>
         <p:spPr>
           <a:xfrm>
-            <a:off x="2062973" y="2366000"/>
-            <a:ext cx="468000" cy="468000"/>
+            <a:off x="5622640" y="3878999"/>
+            <a:ext cx="372000" cy="372000"/>
           </a:xfrm>
           <a:prstGeom prst="rect">
             <a:avLst/>
@@ -23572,14 +24083,14 @@
       </p:pic>
       <p:sp>
         <p:nvSpPr>
-          <p:cNvPr id="16" name="TextBox 15"/>
+          <p:cNvPr id="24" name="TextBox 23"/>
           <p:cNvSpPr txBox="1"/>
           <p:nvPr/>
         </p:nvSpPr>
         <p:spPr>
           <a:xfrm>
-            <a:off x="728640" y="3080000"/>
-            <a:ext cx="3136666" cy="2870000"/>
+            <a:off x="6438640" y="3396666"/>
+            <a:ext cx="4900000" cy="1336666"/>
           </a:xfrm>
           <a:prstGeom prst="rect">
             <a:avLst/>
@@ -23587,55 +24098,42 @@
           <a:noFill/>
         </p:spPr>
         <p:txBody>
-          <a:bodyPr wrap="square" lIns="50000" rIns="50000" tIns="20000" bIns="20000" anchor="t">
+          <a:bodyPr wrap="square" lIns="50000" rIns="50000" tIns="20000" bIns="20000" anchor="ctr">
             <a:spAutoFit/>
           </a:bodyPr>
           <a:lstStyle/>
           <a:p>
-            <a:pPr algn="ctr"/>
             <a:r>
               <a:rPr sz="2000" b="1" i="0">
                 <a:solidFill>
                   <a:srgbClr val="1F4E3D"/>
                 </a:solidFill>
               </a:rPr>
-              <a:t>Khí thải VOC</a:t>
-            </a:r>
-          </a:p>
-          <a:p>
-            <a:pPr algn="ctr"/>
+              <a:t>Nước thải &amp; dung môi</a:t>
+            </a:r>
+          </a:p>
+          <a:p>
             <a:r>
               <a:rPr sz="2000" b="0" i="0">
                 <a:solidFill>
                   <a:srgbClr val="34404A"/>
                 </a:solidFill>
               </a:rPr>
-              <a:t>Chụp hút → than hoạt</a:t>
-            </a:r>
-          </a:p>
-          <a:p>
-            <a:pPr algn="ctr"/>
-            <a:r>
-              <a:rPr sz="2000" b="0" i="0">
-                <a:solidFill>
-                  <a:srgbClr val="34404A"/>
-                </a:solidFill>
-              </a:rPr>
-              <a:t>tính / buồng đốt</a:t>
-            </a:r>
-          </a:p>
-        </p:txBody>
-      </p:sp>
-      <p:sp>
-        <p:nvSpPr>
-          <p:cNvPr id="17" name="Rounded Rectangle 16"/>
+              <a:t>Lắng tách cặn, thu hồi dung môi tái chưng</a:t>
+            </a:r>
+          </a:p>
+        </p:txBody>
+      </p:sp>
+      <p:sp>
+        <p:nvSpPr>
+          <p:cNvPr id="25" name="Rounded Rectangle 24"/>
           <p:cNvSpPr/>
           <p:nvPr/>
         </p:nvSpPr>
         <p:spPr>
           <a:xfrm>
-            <a:off x="4345306" y="1830000"/>
-            <a:ext cx="3496666" cy="4470000"/>
+            <a:off x="5218640" y="4963332"/>
+            <a:ext cx="6420000" cy="1336666"/>
           </a:xfrm>
           <a:prstGeom prst="roundRect">
             <a:avLst/>
@@ -23672,14 +24170,14 @@
       </p:sp>
       <p:sp>
         <p:nvSpPr>
-          <p:cNvPr id="18" name="Rounded Rectangle 17"/>
+          <p:cNvPr id="26" name="Rounded Rectangle 25"/>
           <p:cNvSpPr/>
           <p:nvPr/>
         </p:nvSpPr>
         <p:spPr>
           <a:xfrm>
-            <a:off x="4345306" y="1830000"/>
-            <a:ext cx="3496666" cy="130000"/>
+            <a:off x="5218640" y="4963332"/>
+            <a:ext cx="80000" cy="1336666"/>
           </a:xfrm>
           <a:prstGeom prst="roundRect">
             <a:avLst/>
@@ -23716,20 +24214,20 @@
       </p:sp>
       <p:sp>
         <p:nvSpPr>
-          <p:cNvPr id="19" name="Oval 18"/>
+          <p:cNvPr id="27" name="Oval 26"/>
           <p:cNvSpPr/>
           <p:nvPr/>
         </p:nvSpPr>
         <p:spPr>
           <a:xfrm>
-            <a:off x="5703639" y="2210000"/>
-            <a:ext cx="780000" cy="780000"/>
+            <a:off x="5498640" y="5321665"/>
+            <a:ext cx="620000" cy="620000"/>
           </a:xfrm>
           <a:prstGeom prst="ellipse">
             <a:avLst/>
           </a:prstGeom>
           <a:solidFill>
-            <a:srgbClr val="2C7A5A"/>
+            <a:srgbClr val="1F4E3D"/>
           </a:solidFill>
           <a:ln>
             <a:noFill/>
@@ -23760,17 +24258,17 @@
       </p:sp>
       <p:pic>
         <p:nvPicPr>
-          <p:cNvPr id="20" name="Picture 19" descr="water_waste_w.png"/>
+          <p:cNvPr id="28" name="Picture 27" descr="solid_waste_w.png"/>
           <p:cNvPicPr>
             <a:picLocks noChangeAspect="1"/>
           </p:cNvPicPr>
           <p:nvPr/>
         </p:nvPicPr>
         <p:blipFill>
-          <a:blip r:embed="rId6">
+          <a:blip r:embed="rId8">
             <a:extLst>
               <a:ext uri="{96DAC541-7B7A-43D3-8B79-37D633B846F1}">
-                <ns4:svgBlip xmlns:ns4="http://schemas.microsoft.com/office/drawing/2016/SVG/main" r:embed="rId13"/>
+                <ns5:svgBlip xmlns:ns5="http://schemas.microsoft.com/office/drawing/2016/SVG/main" r:embed="rId12"/>
               </a:ext>
             </a:extLst>
           </a:blip>
@@ -23780,8 +24278,8 @@
         </p:blipFill>
         <p:spPr>
           <a:xfrm>
-            <a:off x="5859639" y="2366000"/>
-            <a:ext cx="468000" cy="468000"/>
+            <a:off x="5622640" y="5445665"/>
+            <a:ext cx="372000" cy="372000"/>
           </a:xfrm>
           <a:prstGeom prst="rect">
             <a:avLst/>
@@ -23790,14 +24288,14 @@
       </p:pic>
       <p:sp>
         <p:nvSpPr>
-          <p:cNvPr id="21" name="TextBox 20"/>
+          <p:cNvPr id="29" name="TextBox 28"/>
           <p:cNvSpPr txBox="1"/>
           <p:nvPr/>
         </p:nvSpPr>
         <p:spPr>
           <a:xfrm>
-            <a:off x="4525306" y="3080000"/>
-            <a:ext cx="3136666" cy="2870000"/>
+            <a:off x="6438640" y="4963332"/>
+            <a:ext cx="4900000" cy="1336666"/>
           </a:xfrm>
           <a:prstGeom prst="rect">
             <a:avLst/>
@@ -23805,259 +24303,28 @@
           <a:noFill/>
         </p:spPr>
         <p:txBody>
-          <a:bodyPr wrap="square" lIns="50000" rIns="50000" tIns="20000" bIns="20000" anchor="t">
+          <a:bodyPr wrap="square" lIns="50000" rIns="50000" tIns="20000" bIns="20000" anchor="ctr">
             <a:spAutoFit/>
           </a:bodyPr>
           <a:lstStyle/>
           <a:p>
-            <a:pPr algn="ctr"/>
             <a:r>
               <a:rPr sz="2000" b="1" i="0">
                 <a:solidFill>
                   <a:srgbClr val="1F4E3D"/>
                 </a:solidFill>
               </a:rPr>
-              <a:t>Nước thải</a:t>
-            </a:r>
-          </a:p>
-          <a:p>
-            <a:pPr algn="ctr"/>
+              <a:t>Chất thải rắn</a:t>
+            </a:r>
+          </a:p>
+          <a:p>
             <a:r>
               <a:rPr sz="2000" b="0" i="0">
                 <a:solidFill>
                   <a:srgbClr val="34404A"/>
                 </a:solidFill>
               </a:rPr>
-              <a:t>Lắng tách cặn</a:t>
-            </a:r>
-          </a:p>
-          <a:p>
-            <a:pPr algn="ctr"/>
-            <a:r>
-              <a:rPr sz="2000" b="0" i="0">
-                <a:solidFill>
-                  <a:srgbClr val="34404A"/>
-                </a:solidFill>
-              </a:rPr>
-              <a:t>thu hồi dung môi</a:t>
-            </a:r>
-          </a:p>
-        </p:txBody>
-      </p:sp>
-      <p:sp>
-        <p:nvSpPr>
-          <p:cNvPr id="22" name="Rounded Rectangle 21"/>
-          <p:cNvSpPr/>
-          <p:nvPr/>
-        </p:nvSpPr>
-        <p:spPr>
-          <a:xfrm>
-            <a:off x="8141972" y="1830000"/>
-            <a:ext cx="3496666" cy="4470000"/>
-          </a:xfrm>
-          <a:prstGeom prst="roundRect">
-            <a:avLst/>
-          </a:prstGeom>
-          <a:solidFill>
-            <a:srgbClr val="EEF4F0"/>
-          </a:solidFill>
-          <a:ln>
-            <a:noFill/>
-          </a:ln>
-          <a:effectLst/>
-        </p:spPr>
-        <p:style>
-          <a:lnRef idx="1">
-            <a:schemeClr val="accent1"/>
-          </a:lnRef>
-          <a:fillRef idx="3">
-            <a:schemeClr val="accent1"/>
-          </a:fillRef>
-          <a:effectRef idx="2">
-            <a:schemeClr val="accent1"/>
-          </a:effectRef>
-          <a:fontRef idx="minor">
-            <a:schemeClr val="lt1"/>
-          </a:fontRef>
-        </p:style>
-        <p:txBody>
-          <a:bodyPr rtlCol="0" anchor="ctr"/>
-          <a:lstStyle/>
-          <a:p>
-            <a:pPr algn="ctr"/>
-          </a:p>
-        </p:txBody>
-      </p:sp>
-      <p:sp>
-        <p:nvSpPr>
-          <p:cNvPr id="23" name="Rounded Rectangle 22"/>
-          <p:cNvSpPr/>
-          <p:nvPr/>
-        </p:nvSpPr>
-        <p:spPr>
-          <a:xfrm>
-            <a:off x="8141972" y="1830000"/>
-            <a:ext cx="3496666" cy="130000"/>
-          </a:xfrm>
-          <a:prstGeom prst="roundRect">
-            <a:avLst/>
-          </a:prstGeom>
-          <a:solidFill>
-            <a:srgbClr val="7BA893"/>
-          </a:solidFill>
-          <a:ln>
-            <a:noFill/>
-          </a:ln>
-          <a:effectLst/>
-        </p:spPr>
-        <p:style>
-          <a:lnRef idx="1">
-            <a:schemeClr val="accent1"/>
-          </a:lnRef>
-          <a:fillRef idx="3">
-            <a:schemeClr val="accent1"/>
-          </a:fillRef>
-          <a:effectRef idx="2">
-            <a:schemeClr val="accent1"/>
-          </a:effectRef>
-          <a:fontRef idx="minor">
-            <a:schemeClr val="lt1"/>
-          </a:fontRef>
-        </p:style>
-        <p:txBody>
-          <a:bodyPr rtlCol="0" anchor="ctr"/>
-          <a:lstStyle/>
-          <a:p>
-            <a:pPr algn="ctr"/>
-          </a:p>
-        </p:txBody>
-      </p:sp>
-      <p:sp>
-        <p:nvSpPr>
-          <p:cNvPr id="24" name="Oval 23"/>
-          <p:cNvSpPr/>
-          <p:nvPr/>
-        </p:nvSpPr>
-        <p:spPr>
-          <a:xfrm>
-            <a:off x="9500305" y="2210000"/>
-            <a:ext cx="780000" cy="780000"/>
-          </a:xfrm>
-          <a:prstGeom prst="ellipse">
-            <a:avLst/>
-          </a:prstGeom>
-          <a:solidFill>
-            <a:srgbClr val="7BA893"/>
-          </a:solidFill>
-          <a:ln>
-            <a:noFill/>
-          </a:ln>
-          <a:effectLst/>
-        </p:spPr>
-        <p:style>
-          <a:lnRef idx="1">
-            <a:schemeClr val="accent1"/>
-          </a:lnRef>
-          <a:fillRef idx="3">
-            <a:schemeClr val="accent1"/>
-          </a:fillRef>
-          <a:effectRef idx="2">
-            <a:schemeClr val="accent1"/>
-          </a:effectRef>
-          <a:fontRef idx="minor">
-            <a:schemeClr val="lt1"/>
-          </a:fontRef>
-        </p:style>
-        <p:txBody>
-          <a:bodyPr rtlCol="0" anchor="ctr"/>
-          <a:lstStyle/>
-          <a:p>
-            <a:pPr algn="ctr"/>
-          </a:p>
-        </p:txBody>
-      </p:sp>
-      <p:pic>
-        <p:nvPicPr>
-          <p:cNvPr id="25" name="Picture 24" descr="solid_waste_w.png"/>
-          <p:cNvPicPr>
-            <a:picLocks noChangeAspect="1"/>
-          </p:cNvPicPr>
-          <p:nvPr/>
-        </p:nvPicPr>
-        <p:blipFill>
-          <a:blip r:embed="rId7">
-            <a:extLst>
-              <a:ext uri="{96DAC541-7B7A-43D3-8B79-37D633B846F1}">
-                <ns5:svgBlip xmlns:ns5="http://schemas.microsoft.com/office/drawing/2016/SVG/main" r:embed="rId11"/>
-              </a:ext>
-            </a:extLst>
-          </a:blip>
-          <a:stretch>
-            <a:fillRect/>
-          </a:stretch>
-        </p:blipFill>
-        <p:spPr>
-          <a:xfrm>
-            <a:off x="9656305" y="2366000"/>
-            <a:ext cx="468000" cy="468000"/>
-          </a:xfrm>
-          <a:prstGeom prst="rect">
-            <a:avLst/>
-          </a:prstGeom>
-        </p:spPr>
-      </p:pic>
-      <p:sp>
-        <p:nvSpPr>
-          <p:cNvPr id="26" name="TextBox 25"/>
-          <p:cNvSpPr txBox="1"/>
-          <p:nvPr/>
-        </p:nvSpPr>
-        <p:spPr>
-          <a:xfrm>
-            <a:off x="8321972" y="3080000"/>
-            <a:ext cx="3136666" cy="2870000"/>
-          </a:xfrm>
-          <a:prstGeom prst="rect">
-            <a:avLst/>
-          </a:prstGeom>
-          <a:noFill/>
-        </p:spPr>
-        <p:txBody>
-          <a:bodyPr wrap="square" lIns="50000" rIns="50000" tIns="20000" bIns="20000" anchor="t">
-            <a:spAutoFit/>
-          </a:bodyPr>
-          <a:lstStyle/>
-          <a:p>
-            <a:pPr algn="ctr"/>
-            <a:r>
-              <a:rPr sz="2000" b="1" i="0">
-                <a:solidFill>
-                  <a:srgbClr val="1F4E3D"/>
-                </a:solidFill>
-              </a:rPr>
-              <a:t>Chất thải rắn</a:t>
-            </a:r>
-          </a:p>
-          <a:p>
-            <a:pPr algn="ctr"/>
-            <a:r>
-              <a:rPr sz="2000" b="0" i="0">
-                <a:solidFill>
-                  <a:srgbClr val="34404A"/>
-                </a:solidFill>
-              </a:rPr>
-              <a:t>Phân loại tại nguồn</a:t>
-            </a:r>
-          </a:p>
-          <a:p>
-            <a:pPr algn="ctr"/>
-            <a:r>
-              <a:rPr sz="2000" b="0" i="0">
-                <a:solidFill>
-                  <a:srgbClr val="34404A"/>
-                </a:solidFill>
-              </a:rPr>
-              <a:t>đơn vị xử lý</a:t>
+              <a:t>Phân loại tại nguồn, đơn vị xử lý nguy hại</a:t>
             </a:r>
           </a:p>
         </p:txBody>

--- a/SuHeo/Báo cáo thực tập - Sơn Hải Vân.pptx
+++ b/SuHeo/Báo cáo thực tập - Sơn Hải Vân.pptx
@@ -3168,16 +3168,136 @@
           </a:p>
         </p:txBody>
       </p:sp>
-      <p:sp>
-        <p:nvSpPr>
-          <p:cNvPr id="3" name="Rectangle 2"/>
+      <p:pic>
+        <p:nvPicPr>
+          <p:cNvPr id="3" name="Picture 2" descr="hex_pale.png"/>
+          <p:cNvPicPr>
+            <a:picLocks noChangeAspect="1"/>
+          </p:cNvPicPr>
+          <p:nvPr/>
+        </p:nvPicPr>
+        <p:blipFill>
+          <a:blip r:embed="rId2">
+            <a:extLst>
+              <a:ext uri="{96DAC541-7B7A-43D3-8B79-37D633B846F1}">
+                <ns0:svgBlip xmlns:ns0="http://schemas.microsoft.com/office/drawing/2016/SVG/main" r:embed="rId6"/>
+              </a:ext>
+            </a:extLst>
+          </a:blip>
+          <a:stretch>
+            <a:fillRect/>
+          </a:stretch>
+        </p:blipFill>
+        <p:spPr>
+          <a:xfrm>
+            <a:off x="-620000" y="-380000"/>
+            <a:ext cx="3200000" cy="3200000"/>
+          </a:xfrm>
+          <a:prstGeom prst="rect">
+            <a:avLst/>
+          </a:prstGeom>
+        </p:spPr>
+      </p:pic>
+      <p:pic>
+        <p:nvPicPr>
+          <p:cNvPr id="4" name="Picture 3" descr="hex_pale.png"/>
+          <p:cNvPicPr>
+            <a:picLocks noChangeAspect="1"/>
+          </p:cNvPicPr>
+          <p:nvPr/>
+        </p:nvPicPr>
+        <p:blipFill>
+          <a:blip r:embed="rId2">
+            <a:extLst>
+              <a:ext uri="{96DAC541-7B7A-43D3-8B79-37D633B846F1}">
+                <ns1:svgBlip xmlns:ns1="http://schemas.microsoft.com/office/drawing/2016/SVG/main" r:embed="rId6"/>
+              </a:ext>
+            </a:extLst>
+          </a:blip>
+          <a:stretch>
+            <a:fillRect/>
+          </a:stretch>
+        </p:blipFill>
+        <p:spPr>
+          <a:xfrm>
+            <a:off x="9631695" y="4038000"/>
+            <a:ext cx="3200000" cy="3200000"/>
+          </a:xfrm>
+          <a:prstGeom prst="rect">
+            <a:avLst/>
+          </a:prstGeom>
+        </p:spPr>
+      </p:pic>
+      <p:pic>
+        <p:nvPicPr>
+          <p:cNvPr id="5" name="Picture 4" descr="swash_pale.png"/>
+          <p:cNvPicPr>
+            <a:picLocks noChangeAspect="1"/>
+          </p:cNvPicPr>
+          <p:nvPr/>
+        </p:nvPicPr>
+        <p:blipFill>
+          <a:blip r:embed="rId3">
+            <a:extLst>
+              <a:ext uri="{96DAC541-7B7A-43D3-8B79-37D633B846F1}">
+                <ns2:svgBlip xmlns:ns2="http://schemas.microsoft.com/office/drawing/2016/SVG/main" r:embed="rId7"/>
+              </a:ext>
+            </a:extLst>
+          </a:blip>
+          <a:stretch>
+            <a:fillRect/>
+          </a:stretch>
+        </p:blipFill>
+        <p:spPr>
+          <a:xfrm>
+            <a:off x="8841695" y="250000"/>
+            <a:ext cx="3400000" cy="1780000"/>
+          </a:xfrm>
+          <a:prstGeom prst="rect">
+            <a:avLst/>
+          </a:prstGeom>
+        </p:spPr>
+      </p:pic>
+      <p:pic>
+        <p:nvPicPr>
+          <p:cNvPr id="6" name="Picture 5" descr="swash_pale.png"/>
+          <p:cNvPicPr>
+            <a:picLocks noChangeAspect="1"/>
+          </p:cNvPicPr>
+          <p:nvPr/>
+        </p:nvPicPr>
+        <p:blipFill>
+          <a:blip r:embed="rId3">
+            <a:extLst>
+              <a:ext uri="{96DAC541-7B7A-43D3-8B79-37D633B846F1}">
+                <ns3:svgBlip xmlns:ns3="http://schemas.microsoft.com/office/drawing/2016/SVG/main" r:embed="rId7"/>
+              </a:ext>
+            </a:extLst>
+          </a:blip>
+          <a:stretch>
+            <a:fillRect/>
+          </a:stretch>
+        </p:blipFill>
+        <p:spPr>
+          <a:xfrm>
+            <a:off x="-560000" y="4808000"/>
+            <a:ext cx="3400000" cy="1780000"/>
+          </a:xfrm>
+          <a:prstGeom prst="rect">
+            <a:avLst/>
+          </a:prstGeom>
+        </p:spPr>
+      </p:pic>
+      <p:sp>
+        <p:nvSpPr>
+          <p:cNvPr id="7" name="Rectangle 6"/>
           <p:cNvSpPr/>
           <p:nvPr/>
         </p:nvSpPr>
         <p:spPr>
           <a:xfrm>
             <a:off x="0" y="0"/>
-            <a:ext cx="12191695" cy="92000"/>
+            <a:ext cx="150000" cy="6858000"/>
           </a:xfrm>
           <a:prstGeom prst="rect">
             <a:avLst/>
@@ -3214,14 +3334,14 @@
       </p:sp>
       <p:sp>
         <p:nvSpPr>
-          <p:cNvPr id="4" name="Rectangle 3"/>
+          <p:cNvPr id="8" name="Rectangle 7"/>
           <p:cNvSpPr/>
           <p:nvPr/>
         </p:nvSpPr>
         <p:spPr>
           <a:xfrm>
-            <a:off x="0" y="6766000"/>
-            <a:ext cx="12191695" cy="92000"/>
+            <a:off x="12041695" y="0"/>
+            <a:ext cx="150000" cy="6858000"/>
           </a:xfrm>
           <a:prstGeom prst="rect">
             <a:avLst/>
@@ -3256,16 +3376,104 @@
           </a:p>
         </p:txBody>
       </p:sp>
+      <p:sp>
+        <p:nvSpPr>
+          <p:cNvPr id="9" name="Rectangle 8"/>
+          <p:cNvSpPr/>
+          <p:nvPr/>
+        </p:nvSpPr>
+        <p:spPr>
+          <a:xfrm>
+            <a:off x="0" y="0"/>
+            <a:ext cx="12191695" cy="92000"/>
+          </a:xfrm>
+          <a:prstGeom prst="rect">
+            <a:avLst/>
+          </a:prstGeom>
+          <a:solidFill>
+            <a:srgbClr val="1F4E3D"/>
+          </a:solidFill>
+          <a:ln>
+            <a:noFill/>
+          </a:ln>
+          <a:effectLst/>
+        </p:spPr>
+        <p:style>
+          <a:lnRef idx="1">
+            <a:schemeClr val="accent1"/>
+          </a:lnRef>
+          <a:fillRef idx="3">
+            <a:schemeClr val="accent1"/>
+          </a:fillRef>
+          <a:effectRef idx="2">
+            <a:schemeClr val="accent1"/>
+          </a:effectRef>
+          <a:fontRef idx="minor">
+            <a:schemeClr val="lt1"/>
+          </a:fontRef>
+        </p:style>
+        <p:txBody>
+          <a:bodyPr rtlCol="0" anchor="ctr"/>
+          <a:lstStyle/>
+          <a:p>
+            <a:pPr algn="ctr"/>
+          </a:p>
+        </p:txBody>
+      </p:sp>
+      <p:sp>
+        <p:nvSpPr>
+          <p:cNvPr id="10" name="Rectangle 9"/>
+          <p:cNvSpPr/>
+          <p:nvPr/>
+        </p:nvSpPr>
+        <p:spPr>
+          <a:xfrm>
+            <a:off x="0" y="6766000"/>
+            <a:ext cx="12191695" cy="92000"/>
+          </a:xfrm>
+          <a:prstGeom prst="rect">
+            <a:avLst/>
+          </a:prstGeom>
+          <a:solidFill>
+            <a:srgbClr val="1F4E3D"/>
+          </a:solidFill>
+          <a:ln>
+            <a:noFill/>
+          </a:ln>
+          <a:effectLst/>
+        </p:spPr>
+        <p:style>
+          <a:lnRef idx="1">
+            <a:schemeClr val="accent1"/>
+          </a:lnRef>
+          <a:fillRef idx="3">
+            <a:schemeClr val="accent1"/>
+          </a:fillRef>
+          <a:effectRef idx="2">
+            <a:schemeClr val="accent1"/>
+          </a:effectRef>
+          <a:fontRef idx="minor">
+            <a:schemeClr val="lt1"/>
+          </a:fontRef>
+        </p:style>
+        <p:txBody>
+          <a:bodyPr rtlCol="0" anchor="ctr"/>
+          <a:lstStyle/>
+          <a:p>
+            <a:pPr algn="ctr"/>
+          </a:p>
+        </p:txBody>
+      </p:sp>
       <p:pic>
         <p:nvPicPr>
-          <p:cNvPr id="5" name="Picture 4" descr="iuh_logo.png"/>
+          <p:cNvPr id="11" name="Picture 10" descr="iuh_logo.png"/>
           <p:cNvPicPr>
             <a:picLocks noChangeAspect="1"/>
           </p:cNvPicPr>
           <p:nvPr/>
         </p:nvPicPr>
         <p:blipFill>
-          <a:blip r:embed="rId2"/>
+          <a:blip r:embed="rId4"/>
           <a:stretch>
             <a:fillRect/>
           </a:stretch>
@@ -3282,7 +3490,7 @@
       </p:pic>
       <p:sp>
         <p:nvSpPr>
-          <p:cNvPr id="6" name="TextBox 5"/>
+          <p:cNvPr id="12" name="TextBox 11"/>
           <p:cNvSpPr txBox="1"/>
           <p:nvPr/>
         </p:nvSpPr>
@@ -3327,7 +3535,7 @@
       </p:sp>
       <p:sp>
         <p:nvSpPr>
-          <p:cNvPr id="7" name="Rectangle 6"/>
+          <p:cNvPr id="13" name="Rectangle 12"/>
           <p:cNvSpPr/>
           <p:nvPr/>
         </p:nvSpPr>
@@ -3371,7 +3579,7 @@
       </p:sp>
       <p:sp>
         <p:nvSpPr>
-          <p:cNvPr id="8" name="TextBox 7"/>
+          <p:cNvPr id="14" name="TextBox 13"/>
           <p:cNvSpPr txBox="1"/>
           <p:nvPr/>
         </p:nvSpPr>
@@ -3405,7 +3613,7 @@
       </p:sp>
       <p:sp>
         <p:nvSpPr>
-          <p:cNvPr id="9" name="TextBox 8"/>
+          <p:cNvPr id="15" name="TextBox 14"/>
           <p:cNvSpPr txBox="1"/>
           <p:nvPr/>
         </p:nvSpPr>
@@ -3450,7 +3658,7 @@
       </p:sp>
       <p:sp>
         <p:nvSpPr>
-          <p:cNvPr id="10" name="TextBox 9"/>
+          <p:cNvPr id="16" name="TextBox 15"/>
           <p:cNvSpPr txBox="1"/>
           <p:nvPr/>
         </p:nvSpPr>
@@ -3484,14 +3692,14 @@
       </p:sp>
       <p:pic>
         <p:nvPicPr>
-          <p:cNvPr id="11" name="Picture 10" descr="shv_logo.png"/>
+          <p:cNvPr id="17" name="Picture 16" descr="shv_logo.png"/>
           <p:cNvPicPr>
             <a:picLocks noChangeAspect="1"/>
           </p:cNvPicPr>
           <p:nvPr/>
         </p:nvPicPr>
         <p:blipFill>
-          <a:blip r:embed="rId3"/>
+          <a:blip r:embed="rId5"/>
           <a:stretch>
             <a:fillRect/>
           </a:stretch>
@@ -3508,7 +3716,7 @@
       </p:pic>
       <p:sp>
         <p:nvSpPr>
-          <p:cNvPr id="12" name="TextBox 11"/>
+          <p:cNvPr id="18" name="TextBox 17"/>
           <p:cNvSpPr txBox="1"/>
           <p:nvPr/>
         </p:nvSpPr>
@@ -13178,7 +13386,7 @@
           <a:blip r:embed="rId2">
             <a:extLst>
               <a:ext uri="{96DAC541-7B7A-43D3-8B79-37D633B846F1}">
-                <ns0:svgBlip xmlns:ns0="http://schemas.microsoft.com/office/drawing/2016/SVG/main" r:embed="rId7"/>
+                <ns0:svgBlip xmlns:ns0="http://schemas.microsoft.com/office/drawing/2016/SVG/main" r:embed="rId8"/>
               </a:ext>
             </a:extLst>
           </a:blip>
@@ -13356,7 +13564,7 @@
           <a:blip r:embed="rId4">
             <a:extLst>
               <a:ext uri="{96DAC541-7B7A-43D3-8B79-37D633B846F1}">
-                <ns2:svgBlip xmlns:ns2="http://schemas.microsoft.com/office/drawing/2016/SVG/main" r:embed="rId6"/>
+                <ns2:svgBlip xmlns:ns2="http://schemas.microsoft.com/office/drawing/2016/SVG/main" r:embed="rId7"/>
               </a:ext>
             </a:extLst>
           </a:blip>
@@ -13485,53 +13693,9 @@
           </a:p>
         </p:txBody>
       </p:sp>
-      <p:sp>
-        <p:nvSpPr>
-          <p:cNvPr id="12" name="Oval 11"/>
-          <p:cNvSpPr/>
-          <p:nvPr/>
-        </p:nvSpPr>
-        <p:spPr>
-          <a:xfrm>
-            <a:off x="560000" y="1800000"/>
-            <a:ext cx="1350000" cy="1350000"/>
-          </a:xfrm>
-          <a:prstGeom prst="ellipse">
-            <a:avLst/>
-          </a:prstGeom>
-          <a:solidFill>
-            <a:srgbClr val="1F4E3D"/>
-          </a:solidFill>
-          <a:ln>
-            <a:noFill/>
-          </a:ln>
-          <a:effectLst/>
-        </p:spPr>
-        <p:style>
-          <a:lnRef idx="1">
-            <a:schemeClr val="accent1"/>
-          </a:lnRef>
-          <a:fillRef idx="3">
-            <a:schemeClr val="accent1"/>
-          </a:fillRef>
-          <a:effectRef idx="2">
-            <a:schemeClr val="accent1"/>
-          </a:effectRef>
-          <a:fontRef idx="minor">
-            <a:schemeClr val="lt1"/>
-          </a:fontRef>
-        </p:style>
-        <p:txBody>
-          <a:bodyPr rtlCol="0" anchor="ctr"/>
-          <a:lstStyle/>
-          <a:p>
-            <a:pPr algn="ctr"/>
-          </a:p>
-        </p:txBody>
-      </p:sp>
       <p:pic>
         <p:nvPicPr>
-          <p:cNvPr id="13" name="Picture 12" descr="stopwatch_w.png"/>
+          <p:cNvPr id="12" name="Picture 11" descr="big_qc_shop.png"/>
           <p:cNvPicPr>
             <a:picLocks noChangeAspect="1"/>
           </p:cNvPicPr>
@@ -13541,7 +13705,7 @@
           <a:blip r:embed="rId5">
             <a:extLst>
               <a:ext uri="{96DAC541-7B7A-43D3-8B79-37D633B846F1}">
-                <ns3:svgBlip xmlns:ns3="http://schemas.microsoft.com/office/drawing/2016/SVG/main" r:embed="rId8"/>
+                <ns3:svgBlip xmlns:ns3="http://schemas.microsoft.com/office/drawing/2016/SVG/main" r:embed="rId6"/>
               </a:ext>
             </a:extLst>
           </a:blip>
@@ -13551,293 +13715,14 @@
         </p:blipFill>
         <p:spPr>
           <a:xfrm>
-            <a:off x="830000" y="2070000"/>
-            <a:ext cx="810000" cy="810000"/>
+            <a:off x="550847" y="1847000"/>
+            <a:ext cx="11090000" cy="4436000"/>
           </a:xfrm>
           <a:prstGeom prst="rect">
             <a:avLst/>
           </a:prstGeom>
         </p:spPr>
       </p:pic>
-      <p:sp>
-        <p:nvSpPr>
-          <p:cNvPr id="14" name="TextBox 13"/>
-          <p:cNvSpPr txBox="1"/>
-          <p:nvPr/>
-        </p:nvSpPr>
-        <p:spPr>
-          <a:xfrm>
-            <a:off x="2150000" y="1900000"/>
-            <a:ext cx="9400000" cy="1150000"/>
-          </a:xfrm>
-          <a:prstGeom prst="rect">
-            <a:avLst/>
-          </a:prstGeom>
-          <a:noFill/>
-        </p:spPr>
-        <p:txBody>
-          <a:bodyPr wrap="square" lIns="50000" rIns="50000" tIns="20000" bIns="20000">
-            <a:spAutoFit/>
-          </a:bodyPr>
-          <a:lstStyle/>
-          <a:p>
-            <a:r>
-              <a:rPr sz="2000" b="0" i="1">
-                <a:solidFill>
-                  <a:srgbClr val="34404A"/>
-                </a:solidFill>
-              </a:rPr>
-              <a:t>Theo dõi từng mẻ, cho qua công đoạn — dụng cụ đo nhanh cầm tay.</a:t>
-            </a:r>
-          </a:p>
-        </p:txBody>
-      </p:sp>
-      <p:sp>
-        <p:nvSpPr>
-          <p:cNvPr id="15" name="TextBox 14"/>
-          <p:cNvSpPr txBox="1"/>
-          <p:nvPr/>
-        </p:nvSpPr>
-        <p:spPr>
-          <a:xfrm>
-            <a:off x="560000" y="3560000"/>
-            <a:ext cx="5850000" cy="650000"/>
-          </a:xfrm>
-          <a:prstGeom prst="rect">
-            <a:avLst/>
-          </a:prstGeom>
-          <a:noFill/>
-        </p:spPr>
-        <p:txBody>
-          <a:bodyPr wrap="square" lIns="50000" rIns="50000" tIns="20000" bIns="20000" anchor="ctr">
-            <a:spAutoFit/>
-          </a:bodyPr>
-          <a:lstStyle/>
-          <a:p>
-            <a:r>
-              <a:rPr sz="2000" b="1" i="0">
-                <a:solidFill>
-                  <a:srgbClr val="2C7A5A"/>
-                </a:solidFill>
-              </a:rPr>
-              <a:t>✔  </a:t>
-            </a:r>
-            <a:r>
-              <a:rPr sz="2000" b="0" i="0">
-                <a:solidFill>
-                  <a:srgbClr val="14332A"/>
-                </a:solidFill>
-              </a:rPr>
-              <a:t>Tỷ trọng</a:t>
-            </a:r>
-          </a:p>
-        </p:txBody>
-      </p:sp>
-      <p:sp>
-        <p:nvSpPr>
-          <p:cNvPr id="16" name="TextBox 15"/>
-          <p:cNvSpPr txBox="1"/>
-          <p:nvPr/>
-        </p:nvSpPr>
-        <p:spPr>
-          <a:xfrm>
-            <a:off x="6510000" y="3560000"/>
-            <a:ext cx="5850000" cy="650000"/>
-          </a:xfrm>
-          <a:prstGeom prst="rect">
-            <a:avLst/>
-          </a:prstGeom>
-          <a:noFill/>
-        </p:spPr>
-        <p:txBody>
-          <a:bodyPr wrap="square" lIns="50000" rIns="50000" tIns="20000" bIns="20000" anchor="ctr">
-            <a:spAutoFit/>
-          </a:bodyPr>
-          <a:lstStyle/>
-          <a:p>
-            <a:r>
-              <a:rPr sz="2000" b="1" i="0">
-                <a:solidFill>
-                  <a:srgbClr val="2C7A5A"/>
-                </a:solidFill>
-              </a:rPr>
-              <a:t>✔  </a:t>
-            </a:r>
-            <a:r>
-              <a:rPr sz="2000" b="0" i="0">
-                <a:solidFill>
-                  <a:srgbClr val="14332A"/>
-                </a:solidFill>
-              </a:rPr>
-              <a:t>Màu sắc</a:t>
-            </a:r>
-          </a:p>
-        </p:txBody>
-      </p:sp>
-      <p:sp>
-        <p:nvSpPr>
-          <p:cNvPr id="17" name="TextBox 16"/>
-          <p:cNvSpPr txBox="1"/>
-          <p:nvPr/>
-        </p:nvSpPr>
-        <p:spPr>
-          <a:xfrm>
-            <a:off x="560000" y="4210000"/>
-            <a:ext cx="5850000" cy="650000"/>
-          </a:xfrm>
-          <a:prstGeom prst="rect">
-            <a:avLst/>
-          </a:prstGeom>
-          <a:noFill/>
-        </p:spPr>
-        <p:txBody>
-          <a:bodyPr wrap="square" lIns="50000" rIns="50000" tIns="20000" bIns="20000" anchor="ctr">
-            <a:spAutoFit/>
-          </a:bodyPr>
-          <a:lstStyle/>
-          <a:p>
-            <a:r>
-              <a:rPr sz="2000" b="1" i="0">
-                <a:solidFill>
-                  <a:srgbClr val="2C7A5A"/>
-                </a:solidFill>
-              </a:rPr>
-              <a:t>✔  </a:t>
-            </a:r>
-            <a:r>
-              <a:rPr sz="2000" b="0" i="0">
-                <a:solidFill>
-                  <a:srgbClr val="14332A"/>
-                </a:solidFill>
-              </a:rPr>
-              <a:t>Độ phủ</a:t>
-            </a:r>
-          </a:p>
-        </p:txBody>
-      </p:sp>
-      <p:sp>
-        <p:nvSpPr>
-          <p:cNvPr id="18" name="TextBox 17"/>
-          <p:cNvSpPr txBox="1"/>
-          <p:nvPr/>
-        </p:nvSpPr>
-        <p:spPr>
-          <a:xfrm>
-            <a:off x="6510000" y="4210000"/>
-            <a:ext cx="5850000" cy="650000"/>
-          </a:xfrm>
-          <a:prstGeom prst="rect">
-            <a:avLst/>
-          </a:prstGeom>
-          <a:noFill/>
-        </p:spPr>
-        <p:txBody>
-          <a:bodyPr wrap="square" lIns="50000" rIns="50000" tIns="20000" bIns="20000" anchor="ctr">
-            <a:spAutoFit/>
-          </a:bodyPr>
-          <a:lstStyle/>
-          <a:p>
-            <a:r>
-              <a:rPr sz="2000" b="1" i="0">
-                <a:solidFill>
-                  <a:srgbClr val="2C7A5A"/>
-                </a:solidFill>
-              </a:rPr>
-              <a:t>✔  </a:t>
-            </a:r>
-            <a:r>
-              <a:rPr sz="2000" b="0" i="0">
-                <a:solidFill>
-                  <a:srgbClr val="14332A"/>
-                </a:solidFill>
-              </a:rPr>
-              <a:t>Độ mịn (Hegman)</a:t>
-            </a:r>
-          </a:p>
-        </p:txBody>
-      </p:sp>
-      <p:sp>
-        <p:nvSpPr>
-          <p:cNvPr id="19" name="TextBox 18"/>
-          <p:cNvSpPr txBox="1"/>
-          <p:nvPr/>
-        </p:nvSpPr>
-        <p:spPr>
-          <a:xfrm>
-            <a:off x="560000" y="4860000"/>
-            <a:ext cx="5850000" cy="650000"/>
-          </a:xfrm>
-          <a:prstGeom prst="rect">
-            <a:avLst/>
-          </a:prstGeom>
-          <a:noFill/>
-        </p:spPr>
-        <p:txBody>
-          <a:bodyPr wrap="square" lIns="50000" rIns="50000" tIns="20000" bIns="20000" anchor="ctr">
-            <a:spAutoFit/>
-          </a:bodyPr>
-          <a:lstStyle/>
-          <a:p>
-            <a:r>
-              <a:rPr sz="2000" b="1" i="0">
-                <a:solidFill>
-                  <a:srgbClr val="2C7A5A"/>
-                </a:solidFill>
-              </a:rPr>
-              <a:t>✔  </a:t>
-            </a:r>
-            <a:r>
-              <a:rPr sz="2000" b="0" i="0">
-                <a:solidFill>
-                  <a:srgbClr val="14332A"/>
-                </a:solidFill>
-              </a:rPr>
-              <a:t>Thời gian khô</a:t>
-            </a:r>
-          </a:p>
-        </p:txBody>
-      </p:sp>
-      <p:sp>
-        <p:nvSpPr>
-          <p:cNvPr id="20" name="TextBox 19"/>
-          <p:cNvSpPr txBox="1"/>
-          <p:nvPr/>
-        </p:nvSpPr>
-        <p:spPr>
-          <a:xfrm>
-            <a:off x="6510000" y="4860000"/>
-            <a:ext cx="5850000" cy="650000"/>
-          </a:xfrm>
-          <a:prstGeom prst="rect">
-            <a:avLst/>
-          </a:prstGeom>
-          <a:noFill/>
-        </p:spPr>
-        <p:txBody>
-          <a:bodyPr wrap="square" lIns="50000" rIns="50000" tIns="20000" bIns="20000" anchor="ctr">
-            <a:spAutoFit/>
-          </a:bodyPr>
-          <a:lstStyle/>
-          <a:p>
-            <a:r>
-              <a:rPr sz="2000" b="1" i="0">
-                <a:solidFill>
-                  <a:srgbClr val="2C7A5A"/>
-                </a:solidFill>
-              </a:rPr>
-              <a:t>✔  </a:t>
-            </a:r>
-            <a:r>
-              <a:rPr sz="2000" b="0" i="0">
-                <a:solidFill>
-                  <a:srgbClr val="14332A"/>
-                </a:solidFill>
-              </a:rPr>
-              <a:t>Độ nhớt (Stormer)</a:t>
-            </a:r>
-          </a:p>
-        </p:txBody>
-      </p:sp>
     </p:spTree>
   </p:cSld>
   <p:clrMapOvr>
@@ -13912,7 +13797,7 @@
           <a:blip r:embed="rId2">
             <a:extLst>
               <a:ext uri="{96DAC541-7B7A-43D3-8B79-37D633B846F1}">
-                <ns0:svgBlip xmlns:ns0="http://schemas.microsoft.com/office/drawing/2016/SVG/main" r:embed="rId7"/>
+                <ns0:svgBlip xmlns:ns0="http://schemas.microsoft.com/office/drawing/2016/SVG/main" r:embed="rId8"/>
               </a:ext>
             </a:extLst>
           </a:blip>
@@ -14090,7 +13975,7 @@
           <a:blip r:embed="rId4">
             <a:extLst>
               <a:ext uri="{96DAC541-7B7A-43D3-8B79-37D633B846F1}">
-                <ns2:svgBlip xmlns:ns2="http://schemas.microsoft.com/office/drawing/2016/SVG/main" r:embed="rId6"/>
+                <ns2:svgBlip xmlns:ns2="http://schemas.microsoft.com/office/drawing/2016/SVG/main" r:embed="rId7"/>
               </a:ext>
             </a:extLst>
           </a:blip>
@@ -14219,53 +14104,9 @@
           </a:p>
         </p:txBody>
       </p:sp>
-      <p:sp>
-        <p:nvSpPr>
-          <p:cNvPr id="12" name="Oval 11"/>
-          <p:cNvSpPr/>
-          <p:nvPr/>
-        </p:nvSpPr>
-        <p:spPr>
-          <a:xfrm>
-            <a:off x="560000" y="1800000"/>
-            <a:ext cx="1350000" cy="1350000"/>
-          </a:xfrm>
-          <a:prstGeom prst="ellipse">
-            <a:avLst/>
-          </a:prstGeom>
-          <a:solidFill>
-            <a:srgbClr val="1F4E3D"/>
-          </a:solidFill>
-          <a:ln>
-            <a:noFill/>
-          </a:ln>
-          <a:effectLst/>
-        </p:spPr>
-        <p:style>
-          <a:lnRef idx="1">
-            <a:schemeClr val="accent1"/>
-          </a:lnRef>
-          <a:fillRef idx="3">
-            <a:schemeClr val="accent1"/>
-          </a:fillRef>
-          <a:effectRef idx="2">
-            <a:schemeClr val="accent1"/>
-          </a:effectRef>
-          <a:fontRef idx="minor">
-            <a:schemeClr val="lt1"/>
-          </a:fontRef>
-        </p:style>
-        <p:txBody>
-          <a:bodyPr rtlCol="0" anchor="ctr"/>
-          <a:lstStyle/>
-          <a:p>
-            <a:pPr algn="ctr"/>
-          </a:p>
-        </p:txBody>
-      </p:sp>
       <p:pic>
         <p:nvPicPr>
-          <p:cNvPr id="13" name="Picture 12" descr="microscope_w.png"/>
+          <p:cNvPr id="12" name="Picture 11" descr="big_qc_lab.png"/>
           <p:cNvPicPr>
             <a:picLocks noChangeAspect="1"/>
           </p:cNvPicPr>
@@ -14275,7 +14116,7 @@
           <a:blip r:embed="rId5">
             <a:extLst>
               <a:ext uri="{96DAC541-7B7A-43D3-8B79-37D633B846F1}">
-                <ns3:svgBlip xmlns:ns3="http://schemas.microsoft.com/office/drawing/2016/SVG/main" r:embed="rId8"/>
+                <ns3:svgBlip xmlns:ns3="http://schemas.microsoft.com/office/drawing/2016/SVG/main" r:embed="rId6"/>
               </a:ext>
             </a:extLst>
           </a:blip>
@@ -14285,293 +14126,14 @@
         </p:blipFill>
         <p:spPr>
           <a:xfrm>
-            <a:off x="830000" y="2070000"/>
-            <a:ext cx="810000" cy="810000"/>
+            <a:off x="550847" y="1847000"/>
+            <a:ext cx="11090000" cy="4436000"/>
           </a:xfrm>
           <a:prstGeom prst="rect">
             <a:avLst/>
           </a:prstGeom>
         </p:spPr>
       </p:pic>
-      <p:sp>
-        <p:nvSpPr>
-          <p:cNvPr id="14" name="TextBox 13"/>
-          <p:cNvSpPr txBox="1"/>
-          <p:nvPr/>
-        </p:nvSpPr>
-        <p:spPr>
-          <a:xfrm>
-            <a:off x="2150000" y="1900000"/>
-            <a:ext cx="9400000" cy="1150000"/>
-          </a:xfrm>
-          <a:prstGeom prst="rect">
-            <a:avLst/>
-          </a:prstGeom>
-          <a:noFill/>
-        </p:spPr>
-        <p:txBody>
-          <a:bodyPr wrap="square" lIns="50000" rIns="50000" tIns="20000" bIns="20000">
-            <a:spAutoFit/>
-          </a:bodyPr>
-          <a:lstStyle/>
-          <a:p>
-            <a:r>
-              <a:rPr sz="2000" b="0" i="1">
-                <a:solidFill>
-                  <a:srgbClr val="34404A"/>
-                </a:solidFill>
-              </a:rPr>
-              <a:t>Đánh giá độ bền dài hạn của màng sơn — cơ sở nghiệm thu.</a:t>
-            </a:r>
-          </a:p>
-        </p:txBody>
-      </p:sp>
-      <p:sp>
-        <p:nvSpPr>
-          <p:cNvPr id="15" name="TextBox 14"/>
-          <p:cNvSpPr txBox="1"/>
-          <p:nvPr/>
-        </p:nvSpPr>
-        <p:spPr>
-          <a:xfrm>
-            <a:off x="560000" y="3560000"/>
-            <a:ext cx="5850000" cy="650000"/>
-          </a:xfrm>
-          <a:prstGeom prst="rect">
-            <a:avLst/>
-          </a:prstGeom>
-          <a:noFill/>
-        </p:spPr>
-        <p:txBody>
-          <a:bodyPr wrap="square" lIns="50000" rIns="50000" tIns="20000" bIns="20000" anchor="ctr">
-            <a:spAutoFit/>
-          </a:bodyPr>
-          <a:lstStyle/>
-          <a:p>
-            <a:r>
-              <a:rPr sz="2000" b="1" i="0">
-                <a:solidFill>
-                  <a:srgbClr val="2C7A5A"/>
-                </a:solidFill>
-              </a:rPr>
-              <a:t>✔  </a:t>
-            </a:r>
-            <a:r>
-              <a:rPr sz="2000" b="0" i="0">
-                <a:solidFill>
-                  <a:srgbClr val="14332A"/>
-                </a:solidFill>
-              </a:rPr>
-              <a:t>Độ bám dính (Pull-off)</a:t>
-            </a:r>
-          </a:p>
-        </p:txBody>
-      </p:sp>
-      <p:sp>
-        <p:nvSpPr>
-          <p:cNvPr id="16" name="TextBox 15"/>
-          <p:cNvSpPr txBox="1"/>
-          <p:nvPr/>
-        </p:nvSpPr>
-        <p:spPr>
-          <a:xfrm>
-            <a:off x="6510000" y="3560000"/>
-            <a:ext cx="5850000" cy="650000"/>
-          </a:xfrm>
-          <a:prstGeom prst="rect">
-            <a:avLst/>
-          </a:prstGeom>
-          <a:noFill/>
-        </p:spPr>
-        <p:txBody>
-          <a:bodyPr wrap="square" lIns="50000" rIns="50000" tIns="20000" bIns="20000" anchor="ctr">
-            <a:spAutoFit/>
-          </a:bodyPr>
-          <a:lstStyle/>
-          <a:p>
-            <a:r>
-              <a:rPr sz="2000" b="1" i="0">
-                <a:solidFill>
-                  <a:srgbClr val="2C7A5A"/>
-                </a:solidFill>
-              </a:rPr>
-              <a:t>✔  </a:t>
-            </a:r>
-            <a:r>
-              <a:rPr sz="2000" b="0" i="0">
-                <a:solidFill>
-                  <a:srgbClr val="14332A"/>
-                </a:solidFill>
-              </a:rPr>
-              <a:t>Bền uốn · va đập</a:t>
-            </a:r>
-          </a:p>
-        </p:txBody>
-      </p:sp>
-      <p:sp>
-        <p:nvSpPr>
-          <p:cNvPr id="17" name="TextBox 16"/>
-          <p:cNvSpPr txBox="1"/>
-          <p:nvPr/>
-        </p:nvSpPr>
-        <p:spPr>
-          <a:xfrm>
-            <a:off x="560000" y="4210000"/>
-            <a:ext cx="5850000" cy="650000"/>
-          </a:xfrm>
-          <a:prstGeom prst="rect">
-            <a:avLst/>
-          </a:prstGeom>
-          <a:noFill/>
-        </p:spPr>
-        <p:txBody>
-          <a:bodyPr wrap="square" lIns="50000" rIns="50000" tIns="20000" bIns="20000" anchor="ctr">
-            <a:spAutoFit/>
-          </a:bodyPr>
-          <a:lstStyle/>
-          <a:p>
-            <a:r>
-              <a:rPr sz="2000" b="1" i="0">
-                <a:solidFill>
-                  <a:srgbClr val="2C7A5A"/>
-                </a:solidFill>
-              </a:rPr>
-              <a:t>✔  </a:t>
-            </a:r>
-            <a:r>
-              <a:rPr sz="2000" b="0" i="0">
-                <a:solidFill>
-                  <a:srgbClr val="14332A"/>
-                </a:solidFill>
-              </a:rPr>
-              <a:t>Độ bóng · hàm rắn</a:t>
-            </a:r>
-          </a:p>
-        </p:txBody>
-      </p:sp>
-      <p:sp>
-        <p:nvSpPr>
-          <p:cNvPr id="18" name="TextBox 17"/>
-          <p:cNvSpPr txBox="1"/>
-          <p:nvPr/>
-        </p:nvSpPr>
-        <p:spPr>
-          <a:xfrm>
-            <a:off x="6510000" y="4210000"/>
-            <a:ext cx="5850000" cy="650000"/>
-          </a:xfrm>
-          <a:prstGeom prst="rect">
-            <a:avLst/>
-          </a:prstGeom>
-          <a:noFill/>
-        </p:spPr>
-        <p:txBody>
-          <a:bodyPr wrap="square" lIns="50000" rIns="50000" tIns="20000" bIns="20000" anchor="ctr">
-            <a:spAutoFit/>
-          </a:bodyPr>
-          <a:lstStyle/>
-          <a:p>
-            <a:r>
-              <a:rPr sz="2000" b="1" i="0">
-                <a:solidFill>
-                  <a:srgbClr val="2C7A5A"/>
-                </a:solidFill>
-              </a:rPr>
-              <a:t>✔  </a:t>
-            </a:r>
-            <a:r>
-              <a:rPr sz="2000" b="0" i="0">
-                <a:solidFill>
-                  <a:srgbClr val="14332A"/>
-                </a:solidFill>
-              </a:rPr>
-              <a:t>Phun sương muối</a:t>
-            </a:r>
-          </a:p>
-        </p:txBody>
-      </p:sp>
-      <p:sp>
-        <p:nvSpPr>
-          <p:cNvPr id="19" name="TextBox 18"/>
-          <p:cNvSpPr txBox="1"/>
-          <p:nvPr/>
-        </p:nvSpPr>
-        <p:spPr>
-          <a:xfrm>
-            <a:off x="560000" y="4860000"/>
-            <a:ext cx="5850000" cy="650000"/>
-          </a:xfrm>
-          <a:prstGeom prst="rect">
-            <a:avLst/>
-          </a:prstGeom>
-          <a:noFill/>
-        </p:spPr>
-        <p:txBody>
-          <a:bodyPr wrap="square" lIns="50000" rIns="50000" tIns="20000" bIns="20000" anchor="ctr">
-            <a:spAutoFit/>
-          </a:bodyPr>
-          <a:lstStyle/>
-          <a:p>
-            <a:r>
-              <a:rPr sz="2000" b="1" i="0">
-                <a:solidFill>
-                  <a:srgbClr val="2C7A5A"/>
-                </a:solidFill>
-              </a:rPr>
-              <a:t>✔  </a:t>
-            </a:r>
-            <a:r>
-              <a:rPr sz="2000" b="0" i="0">
-                <a:solidFill>
-                  <a:srgbClr val="14332A"/>
-                </a:solidFill>
-              </a:rPr>
-              <a:t>Lão hóa UV / QUV</a:t>
-            </a:r>
-          </a:p>
-        </p:txBody>
-      </p:sp>
-      <p:sp>
-        <p:nvSpPr>
-          <p:cNvPr id="20" name="TextBox 19"/>
-          <p:cNvSpPr txBox="1"/>
-          <p:nvPr/>
-        </p:nvSpPr>
-        <p:spPr>
-          <a:xfrm>
-            <a:off x="6510000" y="4860000"/>
-            <a:ext cx="5850000" cy="650000"/>
-          </a:xfrm>
-          <a:prstGeom prst="rect">
-            <a:avLst/>
-          </a:prstGeom>
-          <a:noFill/>
-        </p:spPr>
-        <p:txBody>
-          <a:bodyPr wrap="square" lIns="50000" rIns="50000" tIns="20000" bIns="20000" anchor="ctr">
-            <a:spAutoFit/>
-          </a:bodyPr>
-          <a:lstStyle/>
-          <a:p>
-            <a:r>
-              <a:rPr sz="2000" b="1" i="0">
-                <a:solidFill>
-                  <a:srgbClr val="2C7A5A"/>
-                </a:solidFill>
-              </a:rPr>
-              <a:t>✔  </a:t>
-            </a:r>
-            <a:r>
-              <a:rPr sz="2000" b="0" i="0">
-                <a:solidFill>
-                  <a:srgbClr val="14332A"/>
-                </a:solidFill>
-              </a:rPr>
-              <a:t>Đối chiếu TCVN / ASTM</a:t>
-            </a:r>
-          </a:p>
-        </p:txBody>
-      </p:sp>
     </p:spTree>
   </p:cSld>
   <p:clrMapOvr>

--- a/SuHeo/Báo cáo thực tập - Sơn Hải Vân.pptx
+++ b/SuHeo/Báo cáo thực tập - Sơn Hải Vân.pptx
@@ -14537,8 +14537,8 @@
         </p:blipFill>
         <p:spPr>
           <a:xfrm>
-            <a:off x="4033347" y="1865000"/>
-            <a:ext cx="4125000" cy="4400000"/>
+            <a:off x="3483347" y="1865000"/>
+            <a:ext cx="5225000" cy="4400000"/>
           </a:xfrm>
           <a:prstGeom prst="rect">
             <a:avLst/>
@@ -18292,20 +18292,276 @@
           <a:lstStyle/>
           <a:p>
             <a:pPr algn="ctr"/>
-            <a:r>
-              <a:rPr sz="2600" b="1" i="0">
-                <a:solidFill>
-                  <a:srgbClr val="FFFFFF"/>
-                </a:solidFill>
-              </a:rPr>
-              <a:t>0</a:t>
-            </a:r>
-          </a:p>
-        </p:txBody>
-      </p:sp>
-      <p:sp>
-        <p:nvSpPr>
-          <p:cNvPr id="6" name="TextBox 5"/>
+          </a:p>
+        </p:txBody>
+      </p:sp>
+      <p:sp>
+        <p:nvSpPr>
+          <p:cNvPr id="6" name="Oval 5"/>
+          <p:cNvSpPr/>
+          <p:nvPr/>
+        </p:nvSpPr>
+        <p:spPr>
+          <a:xfrm>
+            <a:off x="762000" y="690000"/>
+            <a:ext cx="66000" cy="66000"/>
+          </a:xfrm>
+          <a:prstGeom prst="ellipse">
+            <a:avLst/>
+          </a:prstGeom>
+          <a:solidFill>
+            <a:srgbClr val="FFFFFF"/>
+          </a:solidFill>
+          <a:ln>
+            <a:noFill/>
+          </a:ln>
+          <a:effectLst/>
+        </p:spPr>
+        <p:style>
+          <a:lnRef idx="1">
+            <a:schemeClr val="accent1"/>
+          </a:lnRef>
+          <a:fillRef idx="3">
+            <a:schemeClr val="accent1"/>
+          </a:fillRef>
+          <a:effectRef idx="2">
+            <a:schemeClr val="accent1"/>
+          </a:effectRef>
+          <a:fontRef idx="minor">
+            <a:schemeClr val="lt1"/>
+          </a:fontRef>
+        </p:style>
+        <p:txBody>
+          <a:bodyPr rtlCol="0" anchor="ctr"/>
+          <a:lstStyle/>
+          <a:p>
+            <a:pPr algn="ctr"/>
+          </a:p>
+        </p:txBody>
+      </p:sp>
+      <p:sp>
+        <p:nvSpPr>
+          <p:cNvPr id="7" name="Rounded Rectangle 6"/>
+          <p:cNvSpPr/>
+          <p:nvPr/>
+        </p:nvSpPr>
+        <p:spPr>
+          <a:xfrm>
+            <a:off x="872000" y="700000"/>
+            <a:ext cx="300000" cy="46000"/>
+          </a:xfrm>
+          <a:prstGeom prst="roundRect">
+            <a:avLst/>
+          </a:prstGeom>
+          <a:solidFill>
+            <a:srgbClr val="FFFFFF"/>
+          </a:solidFill>
+          <a:ln>
+            <a:noFill/>
+          </a:ln>
+          <a:effectLst/>
+        </p:spPr>
+        <p:style>
+          <a:lnRef idx="1">
+            <a:schemeClr val="accent1"/>
+          </a:lnRef>
+          <a:fillRef idx="3">
+            <a:schemeClr val="accent1"/>
+          </a:fillRef>
+          <a:effectRef idx="2">
+            <a:schemeClr val="accent1"/>
+          </a:effectRef>
+          <a:fontRef idx="minor">
+            <a:schemeClr val="lt1"/>
+          </a:fontRef>
+        </p:style>
+        <p:txBody>
+          <a:bodyPr rtlCol="0" anchor="ctr"/>
+          <a:lstStyle/>
+          <a:p>
+            <a:pPr algn="ctr"/>
+          </a:p>
+        </p:txBody>
+      </p:sp>
+      <p:sp>
+        <p:nvSpPr>
+          <p:cNvPr id="8" name="Oval 7"/>
+          <p:cNvSpPr/>
+          <p:nvPr/>
+        </p:nvSpPr>
+        <p:spPr>
+          <a:xfrm>
+            <a:off x="762000" y="830000"/>
+            <a:ext cx="66000" cy="66000"/>
+          </a:xfrm>
+          <a:prstGeom prst="ellipse">
+            <a:avLst/>
+          </a:prstGeom>
+          <a:solidFill>
+            <a:srgbClr val="FFFFFF"/>
+          </a:solidFill>
+          <a:ln>
+            <a:noFill/>
+          </a:ln>
+          <a:effectLst/>
+        </p:spPr>
+        <p:style>
+          <a:lnRef idx="1">
+            <a:schemeClr val="accent1"/>
+          </a:lnRef>
+          <a:fillRef idx="3">
+            <a:schemeClr val="accent1"/>
+          </a:fillRef>
+          <a:effectRef idx="2">
+            <a:schemeClr val="accent1"/>
+          </a:effectRef>
+          <a:fontRef idx="minor">
+            <a:schemeClr val="lt1"/>
+          </a:fontRef>
+        </p:style>
+        <p:txBody>
+          <a:bodyPr rtlCol="0" anchor="ctr"/>
+          <a:lstStyle/>
+          <a:p>
+            <a:pPr algn="ctr"/>
+          </a:p>
+        </p:txBody>
+      </p:sp>
+      <p:sp>
+        <p:nvSpPr>
+          <p:cNvPr id="9" name="Rounded Rectangle 8"/>
+          <p:cNvSpPr/>
+          <p:nvPr/>
+        </p:nvSpPr>
+        <p:spPr>
+          <a:xfrm>
+            <a:off x="872000" y="840000"/>
+            <a:ext cx="300000" cy="46000"/>
+          </a:xfrm>
+          <a:prstGeom prst="roundRect">
+            <a:avLst/>
+          </a:prstGeom>
+          <a:solidFill>
+            <a:srgbClr val="FFFFFF"/>
+          </a:solidFill>
+          <a:ln>
+            <a:noFill/>
+          </a:ln>
+          <a:effectLst/>
+        </p:spPr>
+        <p:style>
+          <a:lnRef idx="1">
+            <a:schemeClr val="accent1"/>
+          </a:lnRef>
+          <a:fillRef idx="3">
+            <a:schemeClr val="accent1"/>
+          </a:fillRef>
+          <a:effectRef idx="2">
+            <a:schemeClr val="accent1"/>
+          </a:effectRef>
+          <a:fontRef idx="minor">
+            <a:schemeClr val="lt1"/>
+          </a:fontRef>
+        </p:style>
+        <p:txBody>
+          <a:bodyPr rtlCol="0" anchor="ctr"/>
+          <a:lstStyle/>
+          <a:p>
+            <a:pPr algn="ctr"/>
+          </a:p>
+        </p:txBody>
+      </p:sp>
+      <p:sp>
+        <p:nvSpPr>
+          <p:cNvPr id="10" name="Oval 9"/>
+          <p:cNvSpPr/>
+          <p:nvPr/>
+        </p:nvSpPr>
+        <p:spPr>
+          <a:xfrm>
+            <a:off x="762000" y="970000"/>
+            <a:ext cx="66000" cy="66000"/>
+          </a:xfrm>
+          <a:prstGeom prst="ellipse">
+            <a:avLst/>
+          </a:prstGeom>
+          <a:solidFill>
+            <a:srgbClr val="FFFFFF"/>
+          </a:solidFill>
+          <a:ln>
+            <a:noFill/>
+          </a:ln>
+          <a:effectLst/>
+        </p:spPr>
+        <p:style>
+          <a:lnRef idx="1">
+            <a:schemeClr val="accent1"/>
+          </a:lnRef>
+          <a:fillRef idx="3">
+            <a:schemeClr val="accent1"/>
+          </a:fillRef>
+          <a:effectRef idx="2">
+            <a:schemeClr val="accent1"/>
+          </a:effectRef>
+          <a:fontRef idx="minor">
+            <a:schemeClr val="lt1"/>
+          </a:fontRef>
+        </p:style>
+        <p:txBody>
+          <a:bodyPr rtlCol="0" anchor="ctr"/>
+          <a:lstStyle/>
+          <a:p>
+            <a:pPr algn="ctr"/>
+          </a:p>
+        </p:txBody>
+      </p:sp>
+      <p:sp>
+        <p:nvSpPr>
+          <p:cNvPr id="11" name="Rounded Rectangle 10"/>
+          <p:cNvSpPr/>
+          <p:nvPr/>
+        </p:nvSpPr>
+        <p:spPr>
+          <a:xfrm>
+            <a:off x="872000" y="980000"/>
+            <a:ext cx="300000" cy="46000"/>
+          </a:xfrm>
+          <a:prstGeom prst="roundRect">
+            <a:avLst/>
+          </a:prstGeom>
+          <a:solidFill>
+            <a:srgbClr val="FFFFFF"/>
+          </a:solidFill>
+          <a:ln>
+            <a:noFill/>
+          </a:ln>
+          <a:effectLst/>
+        </p:spPr>
+        <p:style>
+          <a:lnRef idx="1">
+            <a:schemeClr val="accent1"/>
+          </a:lnRef>
+          <a:fillRef idx="3">
+            <a:schemeClr val="accent1"/>
+          </a:fillRef>
+          <a:effectRef idx="2">
+            <a:schemeClr val="accent1"/>
+          </a:effectRef>
+          <a:fontRef idx="minor">
+            <a:schemeClr val="lt1"/>
+          </a:fontRef>
+        </p:style>
+        <p:txBody>
+          <a:bodyPr rtlCol="0" anchor="ctr"/>
+          <a:lstStyle/>
+          <a:p>
+            <a:pPr algn="ctr"/>
+          </a:p>
+        </p:txBody>
+      </p:sp>
+      <p:sp>
+        <p:nvSpPr>
+          <p:cNvPr id="12" name="TextBox 11"/>
           <p:cNvSpPr txBox="1"/>
           <p:nvPr/>
         </p:nvSpPr>
@@ -18338,7 +18594,7 @@
       </p:sp>
       <p:sp>
         <p:nvSpPr>
-          <p:cNvPr id="7" name="TextBox 6"/>
+          <p:cNvPr id="13" name="TextBox 12"/>
           <p:cNvSpPr txBox="1"/>
           <p:nvPr/>
         </p:nvSpPr>
@@ -18371,7 +18627,7 @@
       </p:sp>
       <p:pic>
         <p:nvPicPr>
-          <p:cNvPr id="8" name="Picture 7" descr="brush_amber.png"/>
+          <p:cNvPr id="14" name="Picture 13" descr="brush_amber.png"/>
           <p:cNvPicPr>
             <a:picLocks noChangeAspect="1"/>
           </p:cNvPicPr>
@@ -18401,7 +18657,7 @@
       </p:pic>
       <p:sp>
         <p:nvSpPr>
-          <p:cNvPr id="9" name="Rectangle 8"/>
+          <p:cNvPr id="15" name="Rectangle 14"/>
           <p:cNvSpPr/>
           <p:nvPr/>
         </p:nvSpPr>
@@ -18445,7 +18701,7 @@
       </p:sp>
       <p:sp>
         <p:nvSpPr>
-          <p:cNvPr id="10" name="TextBox 9"/>
+          <p:cNvPr id="16" name="TextBox 15"/>
           <p:cNvSpPr txBox="1"/>
           <p:nvPr/>
         </p:nvSpPr>
@@ -18478,7 +18734,7 @@
       </p:sp>
       <p:sp>
         <p:nvSpPr>
-          <p:cNvPr id="11" name="TextBox 10"/>
+          <p:cNvPr id="17" name="TextBox 16"/>
           <p:cNvSpPr txBox="1"/>
           <p:nvPr/>
         </p:nvSpPr>
@@ -18512,7 +18768,7 @@
       </p:sp>
       <p:sp>
         <p:nvSpPr>
-          <p:cNvPr id="12" name="Rounded Rectangle 11"/>
+          <p:cNvPr id="18" name="Rounded Rectangle 17"/>
           <p:cNvSpPr/>
           <p:nvPr/>
         </p:nvSpPr>
@@ -18556,7 +18812,7 @@
       </p:sp>
       <p:sp>
         <p:nvSpPr>
-          <p:cNvPr id="13" name="Rounded Rectangle 12"/>
+          <p:cNvPr id="19" name="Rounded Rectangle 18"/>
           <p:cNvSpPr/>
           <p:nvPr/>
         </p:nvSpPr>
@@ -18600,7 +18856,7 @@
       </p:sp>
       <p:sp>
         <p:nvSpPr>
-          <p:cNvPr id="14" name="Oval 13"/>
+          <p:cNvPr id="20" name="Oval 19"/>
           <p:cNvSpPr/>
           <p:nvPr/>
         </p:nvSpPr>
@@ -18644,7 +18900,7 @@
       </p:sp>
       <p:pic>
         <p:nvPicPr>
-          <p:cNvPr id="15" name="Picture 14" descr="company_w.png"/>
+          <p:cNvPr id="21" name="Picture 20" descr="company_w.png"/>
           <p:cNvPicPr>
             <a:picLocks noChangeAspect="1"/>
           </p:cNvPicPr>
@@ -18674,7 +18930,7 @@
       </p:pic>
       <p:sp>
         <p:nvSpPr>
-          <p:cNvPr id="16" name="TextBox 15"/>
+          <p:cNvPr id="22" name="TextBox 21"/>
           <p:cNvSpPr txBox="1"/>
           <p:nvPr/>
         </p:nvSpPr>
@@ -18708,7 +18964,7 @@
       </p:sp>
       <p:sp>
         <p:nvSpPr>
-          <p:cNvPr id="17" name="Rounded Rectangle 16"/>
+          <p:cNvPr id="23" name="Rounded Rectangle 22"/>
           <p:cNvSpPr/>
           <p:nvPr/>
         </p:nvSpPr>
@@ -18752,7 +19008,7 @@
       </p:sp>
       <p:sp>
         <p:nvSpPr>
-          <p:cNvPr id="18" name="Rounded Rectangle 17"/>
+          <p:cNvPr id="24" name="Rounded Rectangle 23"/>
           <p:cNvSpPr/>
           <p:nvPr/>
         </p:nvSpPr>
@@ -18796,7 +19052,7 @@
       </p:sp>
       <p:sp>
         <p:nvSpPr>
-          <p:cNvPr id="19" name="Oval 18"/>
+          <p:cNvPr id="25" name="Oval 24"/>
           <p:cNvSpPr/>
           <p:nvPr/>
         </p:nvSpPr>
@@ -18840,7 +19096,7 @@
       </p:sp>
       <p:pic>
         <p:nvPicPr>
-          <p:cNvPr id="20" name="Picture 19" descr="materials_w.png"/>
+          <p:cNvPr id="26" name="Picture 25" descr="materials_w.png"/>
           <p:cNvPicPr>
             <a:picLocks noChangeAspect="1"/>
           </p:cNvPicPr>
@@ -18870,7 +19126,7 @@
       </p:pic>
       <p:sp>
         <p:nvSpPr>
-          <p:cNvPr id="21" name="TextBox 20"/>
+          <p:cNvPr id="27" name="TextBox 26"/>
           <p:cNvSpPr txBox="1"/>
           <p:nvPr/>
         </p:nvSpPr>
@@ -18904,7 +19160,7 @@
       </p:sp>
       <p:sp>
         <p:nvSpPr>
-          <p:cNvPr id="22" name="Rounded Rectangle 21"/>
+          <p:cNvPr id="28" name="Rounded Rectangle 27"/>
           <p:cNvSpPr/>
           <p:nvPr/>
         </p:nvSpPr>
@@ -18948,7 +19204,7 @@
       </p:sp>
       <p:sp>
         <p:nvSpPr>
-          <p:cNvPr id="23" name="Rounded Rectangle 22"/>
+          <p:cNvPr id="29" name="Rounded Rectangle 28"/>
           <p:cNvSpPr/>
           <p:nvPr/>
         </p:nvSpPr>
@@ -18992,7 +19248,7 @@
       </p:sp>
       <p:sp>
         <p:nvSpPr>
-          <p:cNvPr id="24" name="Oval 23"/>
+          <p:cNvPr id="30" name="Oval 29"/>
           <p:cNvSpPr/>
           <p:nvPr/>
         </p:nvSpPr>
@@ -19036,7 +19292,7 @@
       </p:sp>
       <p:pic>
         <p:nvPicPr>
-          <p:cNvPr id="25" name="Picture 24" descr="gear_proc_w.png"/>
+          <p:cNvPr id="31" name="Picture 30" descr="gear_proc_w.png"/>
           <p:cNvPicPr>
             <a:picLocks noChangeAspect="1"/>
           </p:cNvPicPr>
@@ -19066,7 +19322,7 @@
       </p:pic>
       <p:sp>
         <p:nvSpPr>
-          <p:cNvPr id="26" name="TextBox 25"/>
+          <p:cNvPr id="32" name="TextBox 31"/>
           <p:cNvSpPr txBox="1"/>
           <p:nvPr/>
         </p:nvSpPr>
@@ -19100,7 +19356,7 @@
       </p:sp>
       <p:sp>
         <p:nvSpPr>
-          <p:cNvPr id="27" name="Rounded Rectangle 26"/>
+          <p:cNvPr id="33" name="Rounded Rectangle 32"/>
           <p:cNvSpPr/>
           <p:nvPr/>
         </p:nvSpPr>
@@ -19144,7 +19400,7 @@
       </p:sp>
       <p:sp>
         <p:nvSpPr>
-          <p:cNvPr id="28" name="Rounded Rectangle 27"/>
+          <p:cNvPr id="34" name="Rounded Rectangle 33"/>
           <p:cNvSpPr/>
           <p:nvPr/>
         </p:nvSpPr>
@@ -19188,7 +19444,7 @@
       </p:sp>
       <p:sp>
         <p:nvSpPr>
-          <p:cNvPr id="29" name="Oval 28"/>
+          <p:cNvPr id="35" name="Oval 34"/>
           <p:cNvSpPr/>
           <p:nvPr/>
         </p:nvSpPr>
@@ -19232,7 +19488,7 @@
       </p:sp>
       <p:pic>
         <p:nvPicPr>
-          <p:cNvPr id="30" name="Picture 29" descr="quality_check_w.png"/>
+          <p:cNvPr id="36" name="Picture 35" descr="quality_check_w.png"/>
           <p:cNvPicPr>
             <a:picLocks noChangeAspect="1"/>
           </p:cNvPicPr>
@@ -19262,7 +19518,7 @@
       </p:pic>
       <p:sp>
         <p:nvSpPr>
-          <p:cNvPr id="31" name="TextBox 30"/>
+          <p:cNvPr id="37" name="TextBox 36"/>
           <p:cNvSpPr txBox="1"/>
           <p:nvPr/>
         </p:nvSpPr>
@@ -19296,7 +19552,7 @@
       </p:sp>
       <p:sp>
         <p:nvSpPr>
-          <p:cNvPr id="32" name="Rounded Rectangle 31"/>
+          <p:cNvPr id="38" name="Rounded Rectangle 37"/>
           <p:cNvSpPr/>
           <p:nvPr/>
         </p:nvSpPr>
@@ -19340,7 +19596,7 @@
       </p:sp>
       <p:sp>
         <p:nvSpPr>
-          <p:cNvPr id="33" name="Rounded Rectangle 32"/>
+          <p:cNvPr id="39" name="Rounded Rectangle 38"/>
           <p:cNvSpPr/>
           <p:nvPr/>
         </p:nvSpPr>
@@ -19384,7 +19640,7 @@
       </p:sp>
       <p:sp>
         <p:nvSpPr>
-          <p:cNvPr id="34" name="Oval 33"/>
+          <p:cNvPr id="40" name="Oval 39"/>
           <p:cNvSpPr/>
           <p:nvPr/>
         </p:nvSpPr>
@@ -19428,7 +19684,7 @@
       </p:sp>
       <p:pic>
         <p:nvPicPr>
-          <p:cNvPr id="35" name="Picture 34" descr="warning_tri_w.png"/>
+          <p:cNvPr id="41" name="Picture 40" descr="warning_tri_w.png"/>
           <p:cNvPicPr>
             <a:picLocks noChangeAspect="1"/>
           </p:cNvPicPr>
@@ -19458,7 +19714,7 @@
       </p:pic>
       <p:sp>
         <p:nvSpPr>
-          <p:cNvPr id="36" name="TextBox 35"/>
+          <p:cNvPr id="42" name="TextBox 41"/>
           <p:cNvSpPr txBox="1"/>
           <p:nvPr/>
         </p:nvSpPr>
@@ -19492,7 +19748,7 @@
       </p:sp>
       <p:sp>
         <p:nvSpPr>
-          <p:cNvPr id="37" name="Rounded Rectangle 36"/>
+          <p:cNvPr id="43" name="Rounded Rectangle 42"/>
           <p:cNvSpPr/>
           <p:nvPr/>
         </p:nvSpPr>
@@ -19536,7 +19792,7 @@
       </p:sp>
       <p:sp>
         <p:nvSpPr>
-          <p:cNvPr id="38" name="Rounded Rectangle 37"/>
+          <p:cNvPr id="44" name="Rounded Rectangle 43"/>
           <p:cNvSpPr/>
           <p:nvPr/>
         </p:nvSpPr>
@@ -19580,7 +19836,7 @@
       </p:sp>
       <p:sp>
         <p:nvSpPr>
-          <p:cNvPr id="39" name="Oval 38"/>
+          <p:cNvPr id="45" name="Oval 44"/>
           <p:cNvSpPr/>
           <p:nvPr/>
         </p:nvSpPr>
@@ -19624,7 +19880,7 @@
       </p:sp>
       <p:pic>
         <p:nvPicPr>
-          <p:cNvPr id="40" name="Picture 39" descr="safety_shield_w.png"/>
+          <p:cNvPr id="46" name="Picture 45" descr="safety_shield_w.png"/>
           <p:cNvPicPr>
             <a:picLocks noChangeAspect="1"/>
           </p:cNvPicPr>
@@ -19654,7 +19910,7 @@
       </p:pic>
       <p:sp>
         <p:nvSpPr>
-          <p:cNvPr id="41" name="TextBox 40"/>
+          <p:cNvPr id="47" name="TextBox 46"/>
           <p:cNvSpPr txBox="1"/>
           <p:nvPr/>
         </p:nvSpPr>

--- a/SuHeo/Báo cáo thực tập - Sơn Hải Vân.pptx
+++ b/SuHeo/Báo cáo thực tập - Sơn Hải Vân.pptx
@@ -3180,7 +3180,7 @@
           <a:blip r:embed="rId2">
             <a:extLst>
               <a:ext uri="{96DAC541-7B7A-43D3-8B79-37D633B846F1}">
-                <ns0:svgBlip xmlns:ns0="http://schemas.microsoft.com/office/drawing/2016/SVG/main" r:embed="rId6"/>
+                <ns0:svgBlip xmlns:ns0="http://schemas.microsoft.com/office/drawing/2016/SVG/main" r:embed="rId8"/>
               </a:ext>
             </a:extLst>
           </a:blip>
@@ -3190,8 +3190,8 @@
         </p:blipFill>
         <p:spPr>
           <a:xfrm>
-            <a:off x="-620000" y="-380000"/>
-            <a:ext cx="3200000" cy="3200000"/>
+            <a:off x="10141695" y="-450000"/>
+            <a:ext cx="2600000" cy="2600000"/>
           </a:xfrm>
           <a:prstGeom prst="rect">
             <a:avLst/>
@@ -3200,17 +3200,17 @@
       </p:pic>
       <p:pic>
         <p:nvPicPr>
-          <p:cNvPr id="4" name="Picture 3" descr="hex_pale.png"/>
+          <p:cNvPr id="4" name="Picture 3" descr="swash_pale.png"/>
           <p:cNvPicPr>
             <a:picLocks noChangeAspect="1"/>
           </p:cNvPicPr>
           <p:nvPr/>
         </p:nvPicPr>
         <p:blipFill>
-          <a:blip r:embed="rId2">
+          <a:blip r:embed="rId3">
             <a:extLst>
               <a:ext uri="{96DAC541-7B7A-43D3-8B79-37D633B846F1}">
-                <ns1:svgBlip xmlns:ns1="http://schemas.microsoft.com/office/drawing/2016/SVG/main" r:embed="rId6"/>
+                <ns1:svgBlip xmlns:ns1="http://schemas.microsoft.com/office/drawing/2016/SVG/main" r:embed="rId9"/>
               </a:ext>
             </a:extLst>
           </a:blip>
@@ -3220,24 +3220,526 @@
         </p:blipFill>
         <p:spPr>
           <a:xfrm>
-            <a:off x="9631695" y="4038000"/>
-            <a:ext cx="3200000" cy="3200000"/>
+            <a:off x="8991695" y="5358000"/>
+            <a:ext cx="3300000" cy="1730000"/>
           </a:xfrm>
           <a:prstGeom prst="rect">
             <a:avLst/>
           </a:prstGeom>
         </p:spPr>
       </p:pic>
+      <p:sp>
+        <p:nvSpPr>
+          <p:cNvPr id="5" name="Rectangle 4"/>
+          <p:cNvSpPr/>
+          <p:nvPr/>
+        </p:nvSpPr>
+        <p:spPr>
+          <a:xfrm>
+            <a:off x="0" y="0"/>
+            <a:ext cx="4600000" cy="6858000"/>
+          </a:xfrm>
+          <a:prstGeom prst="rect">
+            <a:avLst/>
+          </a:prstGeom>
+          <a:solidFill>
+            <a:srgbClr val="1F4E3D"/>
+          </a:solidFill>
+          <a:ln>
+            <a:noFill/>
+          </a:ln>
+          <a:effectLst/>
+        </p:spPr>
+        <p:style>
+          <a:lnRef idx="1">
+            <a:schemeClr val="accent1"/>
+          </a:lnRef>
+          <a:fillRef idx="3">
+            <a:schemeClr val="accent1"/>
+          </a:fillRef>
+          <a:effectRef idx="2">
+            <a:schemeClr val="accent1"/>
+          </a:effectRef>
+          <a:fontRef idx="minor">
+            <a:schemeClr val="lt1"/>
+          </a:fontRef>
+        </p:style>
+        <p:txBody>
+          <a:bodyPr rtlCol="0" anchor="ctr"/>
+          <a:lstStyle/>
+          <a:p>
+            <a:pPr algn="ctr"/>
+          </a:p>
+        </p:txBody>
+      </p:sp>
+      <p:sp>
+        <p:nvSpPr>
+          <p:cNvPr id="6" name="Rectangle 5"/>
+          <p:cNvSpPr/>
+          <p:nvPr/>
+        </p:nvSpPr>
+        <p:spPr>
+          <a:xfrm>
+            <a:off x="4600000" y="0"/>
+            <a:ext cx="70000" cy="6858000"/>
+          </a:xfrm>
+          <a:prstGeom prst="rect">
+            <a:avLst/>
+          </a:prstGeom>
+          <a:solidFill>
+            <a:srgbClr val="C88A2E"/>
+          </a:solidFill>
+          <a:ln>
+            <a:noFill/>
+          </a:ln>
+          <a:effectLst/>
+        </p:spPr>
+        <p:style>
+          <a:lnRef idx="1">
+            <a:schemeClr val="accent1"/>
+          </a:lnRef>
+          <a:fillRef idx="3">
+            <a:schemeClr val="accent1"/>
+          </a:fillRef>
+          <a:effectRef idx="2">
+            <a:schemeClr val="accent1"/>
+          </a:effectRef>
+          <a:fontRef idx="minor">
+            <a:schemeClr val="lt1"/>
+          </a:fontRef>
+        </p:style>
+        <p:txBody>
+          <a:bodyPr rtlCol="0" anchor="ctr"/>
+          <a:lstStyle/>
+          <a:p>
+            <a:pPr algn="ctr"/>
+          </a:p>
+        </p:txBody>
+      </p:sp>
+      <p:sp>
+        <p:nvSpPr>
+          <p:cNvPr id="7" name="Rounded Rectangle 6"/>
+          <p:cNvSpPr/>
+          <p:nvPr/>
+        </p:nvSpPr>
+        <p:spPr>
+          <a:xfrm>
+            <a:off x="650000" y="620000"/>
+            <a:ext cx="3300000" cy="1150000"/>
+          </a:xfrm>
+          <a:prstGeom prst="roundRect">
+            <a:avLst/>
+          </a:prstGeom>
+          <a:solidFill>
+            <a:srgbClr val="FFFFFF"/>
+          </a:solidFill>
+          <a:ln>
+            <a:noFill/>
+          </a:ln>
+          <a:effectLst/>
+        </p:spPr>
+        <p:style>
+          <a:lnRef idx="1">
+            <a:schemeClr val="accent1"/>
+          </a:lnRef>
+          <a:fillRef idx="3">
+            <a:schemeClr val="accent1"/>
+          </a:fillRef>
+          <a:effectRef idx="2">
+            <a:schemeClr val="accent1"/>
+          </a:effectRef>
+          <a:fontRef idx="minor">
+            <a:schemeClr val="lt1"/>
+          </a:fontRef>
+        </p:style>
+        <p:txBody>
+          <a:bodyPr rtlCol="0" anchor="ctr"/>
+          <a:lstStyle/>
+          <a:p>
+            <a:pPr algn="ctr"/>
+          </a:p>
+        </p:txBody>
+      </p:sp>
       <p:pic>
         <p:nvPicPr>
-          <p:cNvPr id="5" name="Picture 4" descr="swash_pale.png"/>
+          <p:cNvPr id="8" name="Picture 7" descr="iuh_logo.png"/>
           <p:cNvPicPr>
             <a:picLocks noChangeAspect="1"/>
           </p:cNvPicPr>
           <p:nvPr/>
         </p:nvPicPr>
         <p:blipFill>
-          <a:blip r:embed="rId3">
+          <a:blip r:embed="rId4"/>
+          <a:stretch>
+            <a:fillRect/>
+          </a:stretch>
+        </p:blipFill>
+        <p:spPr>
+          <a:xfrm>
+            <a:off x="875000" y="789000"/>
+            <a:ext cx="2850000" cy="812250"/>
+          </a:xfrm>
+          <a:prstGeom prst="rect">
+            <a:avLst/>
+          </a:prstGeom>
+        </p:spPr>
+      </p:pic>
+      <p:sp>
+        <p:nvSpPr>
+          <p:cNvPr id="9" name="TextBox 8"/>
+          <p:cNvSpPr txBox="1"/>
+          <p:nvPr/>
+        </p:nvSpPr>
+        <p:spPr>
+          <a:xfrm>
+            <a:off x="300000" y="1990000"/>
+            <a:ext cx="4000000" cy="980000"/>
+          </a:xfrm>
+          <a:prstGeom prst="rect">
+            <a:avLst/>
+          </a:prstGeom>
+          <a:noFill/>
+        </p:spPr>
+        <p:txBody>
+          <a:bodyPr wrap="square" lIns="50000" rIns="50000" tIns="20000" bIns="20000">
+            <a:spAutoFit/>
+          </a:bodyPr>
+          <a:lstStyle/>
+          <a:p>
+            <a:pPr algn="ctr"/>
+            <a:r>
+              <a:rPr sz="1600" b="1" i="0">
+                <a:solidFill>
+                  <a:srgbClr val="FFFFFF"/>
+                </a:solidFill>
+              </a:rPr>
+              <a:t>TRƯỜNG ĐẠI HỌC CÔNG NGHIỆP</a:t>
+            </a:r>
+          </a:p>
+          <a:p>
+            <a:pPr algn="ctr"/>
+            <a:r>
+              <a:rPr sz="1600" b="1" i="0">
+                <a:solidFill>
+                  <a:srgbClr val="FFFFFF"/>
+                </a:solidFill>
+              </a:rPr>
+              <a:t>TP. HỒ CHÍ MINH</a:t>
+            </a:r>
+          </a:p>
+          <a:p>
+            <a:pPr algn="ctr"/>
+            <a:r>
+              <a:rPr sz="1400" b="1" i="0">
+                <a:solidFill>
+                  <a:srgbClr val="CFE2D8"/>
+                </a:solidFill>
+              </a:rPr>
+              <a:t>KHOA CÔNG NGHỆ HÓA HỌC</a:t>
+            </a:r>
+          </a:p>
+        </p:txBody>
+      </p:sp>
+      <p:sp>
+        <p:nvSpPr>
+          <p:cNvPr id="10" name="Rectangle 9"/>
+          <p:cNvSpPr/>
+          <p:nvPr/>
+        </p:nvSpPr>
+        <p:spPr>
+          <a:xfrm>
+            <a:off x="1850000" y="3080000"/>
+            <a:ext cx="900000" cy="24000"/>
+          </a:xfrm>
+          <a:prstGeom prst="rect">
+            <a:avLst/>
+          </a:prstGeom>
+          <a:solidFill>
+            <a:srgbClr val="C88A2E"/>
+          </a:solidFill>
+          <a:ln>
+            <a:noFill/>
+          </a:ln>
+          <a:effectLst/>
+        </p:spPr>
+        <p:style>
+          <a:lnRef idx="1">
+            <a:schemeClr val="accent1"/>
+          </a:lnRef>
+          <a:fillRef idx="3">
+            <a:schemeClr val="accent1"/>
+          </a:fillRef>
+          <a:effectRef idx="2">
+            <a:schemeClr val="accent1"/>
+          </a:effectRef>
+          <a:fontRef idx="minor">
+            <a:schemeClr val="lt1"/>
+          </a:fontRef>
+        </p:style>
+        <p:txBody>
+          <a:bodyPr rtlCol="0" anchor="ctr"/>
+          <a:lstStyle/>
+          <a:p>
+            <a:pPr algn="ctr"/>
+          </a:p>
+        </p:txBody>
+      </p:sp>
+      <p:sp>
+        <p:nvSpPr>
+          <p:cNvPr id="11" name="TextBox 10"/>
+          <p:cNvSpPr txBox="1"/>
+          <p:nvPr/>
+        </p:nvSpPr>
+        <p:spPr>
+          <a:xfrm>
+            <a:off x="300000" y="3200000"/>
+            <a:ext cx="4000000" cy="320000"/>
+          </a:xfrm>
+          <a:prstGeom prst="rect">
+            <a:avLst/>
+          </a:prstGeom>
+          <a:noFill/>
+        </p:spPr>
+        <p:txBody>
+          <a:bodyPr wrap="square" lIns="50000" rIns="50000" tIns="20000" bIns="20000">
+            <a:spAutoFit/>
+          </a:bodyPr>
+          <a:lstStyle/>
+          <a:p>
+            <a:pPr algn="ctr"/>
+            <a:r>
+              <a:rPr sz="1300" b="1" i="0">
+                <a:solidFill>
+                  <a:srgbClr val="CFE2D8"/>
+                </a:solidFill>
+              </a:rPr>
+              <a:t>ĐƠN VỊ THỰC TẬP</a:t>
+            </a:r>
+          </a:p>
+        </p:txBody>
+      </p:sp>
+      <p:sp>
+        <p:nvSpPr>
+          <p:cNvPr id="12" name="Rounded Rectangle 11"/>
+          <p:cNvSpPr/>
+          <p:nvPr/>
+        </p:nvSpPr>
+        <p:spPr>
+          <a:xfrm>
+            <a:off x="650000" y="3560000"/>
+            <a:ext cx="3300000" cy="1000000"/>
+          </a:xfrm>
+          <a:prstGeom prst="roundRect">
+            <a:avLst/>
+          </a:prstGeom>
+          <a:solidFill>
+            <a:srgbClr val="FFFFFF"/>
+          </a:solidFill>
+          <a:ln>
+            <a:noFill/>
+          </a:ln>
+          <a:effectLst/>
+        </p:spPr>
+        <p:style>
+          <a:lnRef idx="1">
+            <a:schemeClr val="accent1"/>
+          </a:lnRef>
+          <a:fillRef idx="3">
+            <a:schemeClr val="accent1"/>
+          </a:fillRef>
+          <a:effectRef idx="2">
+            <a:schemeClr val="accent1"/>
+          </a:effectRef>
+          <a:fontRef idx="minor">
+            <a:schemeClr val="lt1"/>
+          </a:fontRef>
+        </p:style>
+        <p:txBody>
+          <a:bodyPr rtlCol="0" anchor="ctr"/>
+          <a:lstStyle/>
+          <a:p>
+            <a:pPr algn="ctr"/>
+          </a:p>
+        </p:txBody>
+      </p:sp>
+      <p:pic>
+        <p:nvPicPr>
+          <p:cNvPr id="13" name="Picture 12" descr="shv_logo.png"/>
+          <p:cNvPicPr>
+            <a:picLocks noChangeAspect="1"/>
+          </p:cNvPicPr>
+          <p:nvPr/>
+        </p:nvPicPr>
+        <p:blipFill>
+          <a:blip r:embed="rId5"/>
+          <a:stretch>
+            <a:fillRect/>
+          </a:stretch>
+        </p:blipFill>
+        <p:spPr>
+          <a:xfrm>
+            <a:off x="1100000" y="3667000"/>
+            <a:ext cx="2400000" cy="786000"/>
+          </a:xfrm>
+          <a:prstGeom prst="rect">
+            <a:avLst/>
+          </a:prstGeom>
+        </p:spPr>
+      </p:pic>
+      <p:sp>
+        <p:nvSpPr>
+          <p:cNvPr id="14" name="TextBox 13"/>
+          <p:cNvSpPr txBox="1"/>
+          <p:nvPr/>
+        </p:nvSpPr>
+        <p:spPr>
+          <a:xfrm>
+            <a:off x="300000" y="4680000"/>
+            <a:ext cx="4000000" cy="350000"/>
+          </a:xfrm>
+          <a:prstGeom prst="rect">
+            <a:avLst/>
+          </a:prstGeom>
+          <a:noFill/>
+        </p:spPr>
+        <p:txBody>
+          <a:bodyPr wrap="square" lIns="50000" rIns="50000" tIns="20000" bIns="20000">
+            <a:spAutoFit/>
+          </a:bodyPr>
+          <a:lstStyle/>
+          <a:p>
+            <a:pPr algn="ctr"/>
+            <a:r>
+              <a:rPr sz="1500" b="1" i="0">
+                <a:solidFill>
+                  <a:srgbClr val="FFFFFF"/>
+                </a:solidFill>
+              </a:rPr>
+              <a:t>Công ty TNHH Sơn Hải Vân</a:t>
+            </a:r>
+          </a:p>
+        </p:txBody>
+      </p:sp>
+      <p:sp>
+        <p:nvSpPr>
+          <p:cNvPr id="15" name="TextBox 14"/>
+          <p:cNvSpPr txBox="1"/>
+          <p:nvPr/>
+        </p:nvSpPr>
+        <p:spPr>
+          <a:xfrm>
+            <a:off x="300000" y="6260000"/>
+            <a:ext cx="4000000" cy="320000"/>
+          </a:xfrm>
+          <a:prstGeom prst="rect">
+            <a:avLst/>
+          </a:prstGeom>
+          <a:noFill/>
+        </p:spPr>
+        <p:txBody>
+          <a:bodyPr wrap="square" lIns="50000" rIns="50000" tIns="20000" bIns="20000">
+            <a:spAutoFit/>
+          </a:bodyPr>
+          <a:lstStyle/>
+          <a:p>
+            <a:pPr algn="ctr"/>
+            <a:r>
+              <a:rPr sz="1300" b="0" i="1">
+                <a:solidFill>
+                  <a:srgbClr val="CFE2D8"/>
+                </a:solidFill>
+              </a:rPr>
+              <a:t>TP. Hồ Chí Minh — 2026</a:t>
+            </a:r>
+          </a:p>
+        </p:txBody>
+      </p:sp>
+      <p:sp>
+        <p:nvSpPr>
+          <p:cNvPr id="16" name="TextBox 15"/>
+          <p:cNvSpPr txBox="1"/>
+          <p:nvPr/>
+        </p:nvSpPr>
+        <p:spPr>
+          <a:xfrm>
+            <a:off x="5150000" y="1150000"/>
+            <a:ext cx="6300000" cy="400000"/>
+          </a:xfrm>
+          <a:prstGeom prst="rect">
+            <a:avLst/>
+          </a:prstGeom>
+          <a:noFill/>
+        </p:spPr>
+        <p:txBody>
+          <a:bodyPr wrap="square" lIns="50000" rIns="50000" tIns="20000" bIns="20000">
+            <a:spAutoFit/>
+          </a:bodyPr>
+          <a:lstStyle/>
+          <a:p>
+            <a:r>
+              <a:rPr sz="1700" b="1" i="0">
+                <a:solidFill>
+                  <a:srgbClr val="C88A2E"/>
+                </a:solidFill>
+              </a:rPr>
+              <a:t>BÁO CÁO THỰC TẬP TỐT NGHIỆP</a:t>
+            </a:r>
+          </a:p>
+        </p:txBody>
+      </p:sp>
+      <p:sp>
+        <p:nvSpPr>
+          <p:cNvPr id="17" name="TextBox 16"/>
+          <p:cNvSpPr txBox="1"/>
+          <p:nvPr/>
+        </p:nvSpPr>
+        <p:spPr>
+          <a:xfrm>
+            <a:off x="5150000" y="1620000"/>
+            <a:ext cx="6500000" cy="1500000"/>
+          </a:xfrm>
+          <a:prstGeom prst="rect">
+            <a:avLst/>
+          </a:prstGeom>
+          <a:noFill/>
+        </p:spPr>
+        <p:txBody>
+          <a:bodyPr wrap="square" lIns="50000" rIns="50000" tIns="20000" bIns="20000">
+            <a:spAutoFit/>
+          </a:bodyPr>
+          <a:lstStyle/>
+          <a:p>
+            <a:r>
+              <a:rPr sz="3100" b="1" i="0">
+                <a:solidFill>
+                  <a:srgbClr val="1F4E3D"/>
+                </a:solidFill>
+              </a:rPr>
+              <a:t>Quy trình sản xuất &amp;</a:t>
+            </a:r>
+          </a:p>
+          <a:p>
+            <a:r>
+              <a:rPr sz="3100" b="1" i="0">
+                <a:solidFill>
+                  <a:srgbClr val="1F4E3D"/>
+                </a:solidFill>
+              </a:rPr>
+              <a:t>kiểm soát chất lượng sơn</a:t>
+            </a:r>
+          </a:p>
+        </p:txBody>
+      </p:sp>
+      <p:pic>
+        <p:nvPicPr>
+          <p:cNvPr id="18" name="Picture 17" descr="brush_amber.png"/>
+          <p:cNvPicPr>
+            <a:picLocks noChangeAspect="1"/>
+          </p:cNvPicPr>
+          <p:nvPr/>
+        </p:nvPicPr>
+        <p:blipFill>
+          <a:blip r:embed="rId6">
             <a:extLst>
               <a:ext uri="{96DAC541-7B7A-43D3-8B79-37D633B846F1}">
                 <ns2:svgBlip xmlns:ns2="http://schemas.microsoft.com/office/drawing/2016/SVG/main" r:embed="rId7"/>
@@ -3250,254 +3752,24 @@
         </p:blipFill>
         <p:spPr>
           <a:xfrm>
-            <a:off x="8841695" y="250000"/>
-            <a:ext cx="3400000" cy="1780000"/>
+            <a:off x="5190000" y="3170000"/>
+            <a:ext cx="1500000" cy="281000"/>
           </a:xfrm>
           <a:prstGeom prst="rect">
             <a:avLst/>
           </a:prstGeom>
         </p:spPr>
       </p:pic>
-      <p:pic>
-        <p:nvPicPr>
-          <p:cNvPr id="6" name="Picture 5" descr="swash_pale.png"/>
-          <p:cNvPicPr>
-            <a:picLocks noChangeAspect="1"/>
-          </p:cNvPicPr>
-          <p:nvPr/>
-        </p:nvPicPr>
-        <p:blipFill>
-          <a:blip r:embed="rId3">
-            <a:extLst>
-              <a:ext uri="{96DAC541-7B7A-43D3-8B79-37D633B846F1}">
-                <ns3:svgBlip xmlns:ns3="http://schemas.microsoft.com/office/drawing/2016/SVG/main" r:embed="rId7"/>
-              </a:ext>
-            </a:extLst>
-          </a:blip>
-          <a:stretch>
-            <a:fillRect/>
-          </a:stretch>
-        </p:blipFill>
-        <p:spPr>
-          <a:xfrm>
-            <a:off x="-560000" y="4808000"/>
-            <a:ext cx="3400000" cy="1780000"/>
-          </a:xfrm>
-          <a:prstGeom prst="rect">
-            <a:avLst/>
-          </a:prstGeom>
-        </p:spPr>
-      </p:pic>
-      <p:sp>
-        <p:nvSpPr>
-          <p:cNvPr id="7" name="Rectangle 6"/>
-          <p:cNvSpPr/>
-          <p:nvPr/>
-        </p:nvSpPr>
-        <p:spPr>
-          <a:xfrm>
-            <a:off x="0" y="0"/>
-            <a:ext cx="150000" cy="6858000"/>
-          </a:xfrm>
-          <a:prstGeom prst="rect">
-            <a:avLst/>
-          </a:prstGeom>
-          <a:solidFill>
-            <a:srgbClr val="1F4E3D"/>
-          </a:solidFill>
-          <a:ln>
-            <a:noFill/>
-          </a:ln>
-          <a:effectLst/>
-        </p:spPr>
-        <p:style>
-          <a:lnRef idx="1">
-            <a:schemeClr val="accent1"/>
-          </a:lnRef>
-          <a:fillRef idx="3">
-            <a:schemeClr val="accent1"/>
-          </a:fillRef>
-          <a:effectRef idx="2">
-            <a:schemeClr val="accent1"/>
-          </a:effectRef>
-          <a:fontRef idx="minor">
-            <a:schemeClr val="lt1"/>
-          </a:fontRef>
-        </p:style>
-        <p:txBody>
-          <a:bodyPr rtlCol="0" anchor="ctr"/>
-          <a:lstStyle/>
-          <a:p>
-            <a:pPr algn="ctr"/>
-          </a:p>
-        </p:txBody>
-      </p:sp>
-      <p:sp>
-        <p:nvSpPr>
-          <p:cNvPr id="8" name="Rectangle 7"/>
-          <p:cNvSpPr/>
-          <p:nvPr/>
-        </p:nvSpPr>
-        <p:spPr>
-          <a:xfrm>
-            <a:off x="12041695" y="0"/>
-            <a:ext cx="150000" cy="6858000"/>
-          </a:xfrm>
-          <a:prstGeom prst="rect">
-            <a:avLst/>
-          </a:prstGeom>
-          <a:solidFill>
-            <a:srgbClr val="1F4E3D"/>
-          </a:solidFill>
-          <a:ln>
-            <a:noFill/>
-          </a:ln>
-          <a:effectLst/>
-        </p:spPr>
-        <p:style>
-          <a:lnRef idx="1">
-            <a:schemeClr val="accent1"/>
-          </a:lnRef>
-          <a:fillRef idx="3">
-            <a:schemeClr val="accent1"/>
-          </a:fillRef>
-          <a:effectRef idx="2">
-            <a:schemeClr val="accent1"/>
-          </a:effectRef>
-          <a:fontRef idx="minor">
-            <a:schemeClr val="lt1"/>
-          </a:fontRef>
-        </p:style>
-        <p:txBody>
-          <a:bodyPr rtlCol="0" anchor="ctr"/>
-          <a:lstStyle/>
-          <a:p>
-            <a:pPr algn="ctr"/>
-          </a:p>
-        </p:txBody>
-      </p:sp>
-      <p:sp>
-        <p:nvSpPr>
-          <p:cNvPr id="9" name="Rectangle 8"/>
-          <p:cNvSpPr/>
-          <p:nvPr/>
-        </p:nvSpPr>
-        <p:spPr>
-          <a:xfrm>
-            <a:off x="0" y="0"/>
-            <a:ext cx="12191695" cy="92000"/>
-          </a:xfrm>
-          <a:prstGeom prst="rect">
-            <a:avLst/>
-          </a:prstGeom>
-          <a:solidFill>
-            <a:srgbClr val="1F4E3D"/>
-          </a:solidFill>
-          <a:ln>
-            <a:noFill/>
-          </a:ln>
-          <a:effectLst/>
-        </p:spPr>
-        <p:style>
-          <a:lnRef idx="1">
-            <a:schemeClr val="accent1"/>
-          </a:lnRef>
-          <a:fillRef idx="3">
-            <a:schemeClr val="accent1"/>
-          </a:fillRef>
-          <a:effectRef idx="2">
-            <a:schemeClr val="accent1"/>
-          </a:effectRef>
-          <a:fontRef idx="minor">
-            <a:schemeClr val="lt1"/>
-          </a:fontRef>
-        </p:style>
-        <p:txBody>
-          <a:bodyPr rtlCol="0" anchor="ctr"/>
-          <a:lstStyle/>
-          <a:p>
-            <a:pPr algn="ctr"/>
-          </a:p>
-        </p:txBody>
-      </p:sp>
-      <p:sp>
-        <p:nvSpPr>
-          <p:cNvPr id="10" name="Rectangle 9"/>
-          <p:cNvSpPr/>
-          <p:nvPr/>
-        </p:nvSpPr>
-        <p:spPr>
-          <a:xfrm>
-            <a:off x="0" y="6766000"/>
-            <a:ext cx="12191695" cy="92000"/>
-          </a:xfrm>
-          <a:prstGeom prst="rect">
-            <a:avLst/>
-          </a:prstGeom>
-          <a:solidFill>
-            <a:srgbClr val="1F4E3D"/>
-          </a:solidFill>
-          <a:ln>
-            <a:noFill/>
-          </a:ln>
-          <a:effectLst/>
-        </p:spPr>
-        <p:style>
-          <a:lnRef idx="1">
-            <a:schemeClr val="accent1"/>
-          </a:lnRef>
-          <a:fillRef idx="3">
-            <a:schemeClr val="accent1"/>
-          </a:fillRef>
-          <a:effectRef idx="2">
-            <a:schemeClr val="accent1"/>
-          </a:effectRef>
-          <a:fontRef idx="minor">
-            <a:schemeClr val="lt1"/>
-          </a:fontRef>
-        </p:style>
-        <p:txBody>
-          <a:bodyPr rtlCol="0" anchor="ctr"/>
-          <a:lstStyle/>
-          <a:p>
-            <a:pPr algn="ctr"/>
-          </a:p>
-        </p:txBody>
-      </p:sp>
-      <p:pic>
-        <p:nvPicPr>
-          <p:cNvPr id="11" name="Picture 10" descr="iuh_logo.png"/>
-          <p:cNvPicPr>
-            <a:picLocks noChangeAspect="1"/>
-          </p:cNvPicPr>
-          <p:nvPr/>
-        </p:nvPicPr>
-        <p:blipFill>
-          <a:blip r:embed="rId4"/>
-          <a:stretch>
-            <a:fillRect/>
-          </a:stretch>
-        </p:blipFill>
-        <p:spPr>
-          <a:xfrm>
-            <a:off x="4070847" y="380000"/>
-            <a:ext cx="4050000" cy="1154250"/>
-          </a:xfrm>
-          <a:prstGeom prst="rect">
-            <a:avLst/>
-          </a:prstGeom>
-        </p:spPr>
-      </p:pic>
-      <p:sp>
-        <p:nvSpPr>
-          <p:cNvPr id="12" name="TextBox 11"/>
+      <p:sp>
+        <p:nvSpPr>
+          <p:cNvPr id="19" name="TextBox 18"/>
           <p:cNvSpPr txBox="1"/>
           <p:nvPr/>
         </p:nvSpPr>
         <p:spPr>
           <a:xfrm>
-            <a:off x="900000" y="1660000"/>
-            <a:ext cx="10391695" cy="720000"/>
+            <a:off x="5150000" y="3620000"/>
+            <a:ext cx="6300000" cy="420000"/>
           </a:xfrm>
           <a:prstGeom prst="rect">
             <a:avLst/>
@@ -3510,39 +3782,27 @@
           </a:bodyPr>
           <a:lstStyle/>
           <a:p>
-            <a:pPr algn="ctr"/>
-            <a:r>
-              <a:rPr sz="1800" b="1" i="0">
-                <a:solidFill>
-                  <a:srgbClr val="1F4E3D"/>
-                </a:solidFill>
-              </a:rPr>
-              <a:t>TRƯỜNG ĐẠI HỌC CÔNG NGHIỆP TP. HỒ CHÍ MINH</a:t>
-            </a:r>
-          </a:p>
-          <a:p>
-            <a:pPr algn="ctr"/>
-            <a:r>
-              <a:rPr sz="1500" b="1" i="0">
-                <a:solidFill>
-                  <a:srgbClr val="5B6E66"/>
-                </a:solidFill>
-              </a:rPr>
-              <a:t>KHOA CÔNG NGHỆ HÓA HỌC</a:t>
-            </a:r>
-          </a:p>
-        </p:txBody>
-      </p:sp>
-      <p:sp>
-        <p:nvSpPr>
-          <p:cNvPr id="13" name="Rectangle 12"/>
+            <a:r>
+              <a:rPr sz="2100" b="1" i="0">
+                <a:solidFill>
+                  <a:srgbClr val="2C7A5A"/>
+                </a:solidFill>
+              </a:rPr>
+              <a:t>tại Công ty TNHH Sơn Hải Vân</a:t>
+            </a:r>
+          </a:p>
+        </p:txBody>
+      </p:sp>
+      <p:sp>
+        <p:nvSpPr>
+          <p:cNvPr id="20" name="Rectangle 19"/>
           <p:cNvSpPr/>
           <p:nvPr/>
         </p:nvSpPr>
         <p:spPr>
           <a:xfrm>
-            <a:off x="5195847" y="2410000"/>
-            <a:ext cx="1800000" cy="26000"/>
+            <a:off x="5150000" y="4430000"/>
+            <a:ext cx="50000" cy="1360000"/>
           </a:xfrm>
           <a:prstGeom prst="rect">
             <a:avLst/>
@@ -3579,14 +3839,14 @@
       </p:sp>
       <p:sp>
         <p:nvSpPr>
-          <p:cNvPr id="14" name="TextBox 13"/>
+          <p:cNvPr id="21" name="TextBox 20"/>
           <p:cNvSpPr txBox="1"/>
           <p:nvPr/>
         </p:nvSpPr>
         <p:spPr>
           <a:xfrm>
-            <a:off x="900000" y="2520000"/>
-            <a:ext cx="10391695" cy="360000"/>
+            <a:off x="5410000" y="4430000"/>
+            <a:ext cx="6200000" cy="1450000"/>
           </a:xfrm>
           <a:prstGeom prst="rect">
             <a:avLst/>
@@ -3599,173 +3859,75 @@
           </a:bodyPr>
           <a:lstStyle/>
           <a:p>
-            <a:pPr algn="ctr"/>
             <a:r>
               <a:rPr sz="1600" b="1" i="0">
                 <a:solidFill>
-                  <a:srgbClr val="C88A2E"/>
-                </a:solidFill>
-              </a:rPr>
-              <a:t>BÁO CÁO THỰC TẬP TỐT NGHIỆP</a:t>
-            </a:r>
-          </a:p>
-        </p:txBody>
-      </p:sp>
-      <p:sp>
-        <p:nvSpPr>
-          <p:cNvPr id="15" name="TextBox 14"/>
-          <p:cNvSpPr txBox="1"/>
-          <p:nvPr/>
-        </p:nvSpPr>
-        <p:spPr>
-          <a:xfrm>
-            <a:off x="800000" y="2880000"/>
-            <a:ext cx="10591695" cy="1120000"/>
-          </a:xfrm>
-          <a:prstGeom prst="rect">
-            <a:avLst/>
-          </a:prstGeom>
-          <a:noFill/>
-        </p:spPr>
-        <p:txBody>
-          <a:bodyPr wrap="square" lIns="50000" rIns="50000" tIns="20000" bIns="20000">
-            <a:spAutoFit/>
-          </a:bodyPr>
-          <a:lstStyle/>
-          <a:p>
-            <a:pPr algn="ctr"/>
-            <a:r>
-              <a:rPr sz="3100" b="1" i="0">
-                <a:solidFill>
                   <a:srgbClr val="1F4E3D"/>
                 </a:solidFill>
               </a:rPr>
-              <a:t>Quy trình sản xuất &amp; kiểm soát</a:t>
-            </a:r>
-          </a:p>
-          <a:p>
-            <a:pPr algn="ctr"/>
-            <a:r>
-              <a:rPr sz="3100" b="1" i="0">
+              <a:t>GVHD:  </a:t>
+            </a:r>
+            <a:r>
+              <a:rPr sz="1600" b="0" i="0">
+                <a:solidFill>
+                  <a:srgbClr val="14332A"/>
+                </a:solidFill>
+              </a:rPr>
+              <a:t>Lê Nhất Thống</a:t>
+            </a:r>
+          </a:p>
+          <a:p>
+            <a:r>
+              <a:rPr sz="1600" b="1" i="0">
                 <a:solidFill>
                   <a:srgbClr val="1F4E3D"/>
                 </a:solidFill>
               </a:rPr>
-              <a:t>chất lượng sơn</a:t>
-            </a:r>
-          </a:p>
-        </p:txBody>
-      </p:sp>
-      <p:sp>
-        <p:nvSpPr>
-          <p:cNvPr id="16" name="TextBox 15"/>
-          <p:cNvSpPr txBox="1"/>
-          <p:nvPr/>
-        </p:nvSpPr>
-        <p:spPr>
-          <a:xfrm>
-            <a:off x="800000" y="4080000"/>
-            <a:ext cx="10591695" cy="400000"/>
-          </a:xfrm>
-          <a:prstGeom prst="rect">
-            <a:avLst/>
-          </a:prstGeom>
-          <a:noFill/>
-        </p:spPr>
-        <p:txBody>
-          <a:bodyPr wrap="square" lIns="50000" rIns="50000" tIns="20000" bIns="20000">
-            <a:spAutoFit/>
-          </a:bodyPr>
-          <a:lstStyle/>
-          <a:p>
-            <a:pPr algn="ctr"/>
-            <a:r>
-              <a:rPr sz="2200" b="1" i="0">
-                <a:solidFill>
-                  <a:srgbClr val="2C7A5A"/>
-                </a:solidFill>
-              </a:rPr>
-              <a:t>tại Công ty TNHH Sơn Hải Vân</a:t>
-            </a:r>
-          </a:p>
-        </p:txBody>
-      </p:sp>
-      <p:pic>
-        <p:nvPicPr>
-          <p:cNvPr id="17" name="Picture 16" descr="shv_logo.png"/>
-          <p:cNvPicPr>
-            <a:picLocks noChangeAspect="1"/>
-          </p:cNvPicPr>
-          <p:nvPr/>
-        </p:nvPicPr>
-        <p:blipFill>
-          <a:blip r:embed="rId5"/>
-          <a:stretch>
-            <a:fillRect/>
-          </a:stretch>
-        </p:blipFill>
-        <p:spPr>
-          <a:xfrm>
-            <a:off x="4870847" y="4560000"/>
-            <a:ext cx="2450000" cy="802375"/>
-          </a:xfrm>
-          <a:prstGeom prst="rect">
-            <a:avLst/>
-          </a:prstGeom>
-        </p:spPr>
-      </p:pic>
-      <p:sp>
-        <p:nvSpPr>
-          <p:cNvPr id="18" name="TextBox 17"/>
-          <p:cNvSpPr txBox="1"/>
-          <p:nvPr/>
-        </p:nvSpPr>
-        <p:spPr>
-          <a:xfrm>
-            <a:off x="900000" y="5560000"/>
-            <a:ext cx="10391695" cy="760000"/>
-          </a:xfrm>
-          <a:prstGeom prst="rect">
-            <a:avLst/>
-          </a:prstGeom>
-          <a:noFill/>
-        </p:spPr>
-        <p:txBody>
-          <a:bodyPr wrap="square" lIns="50000" rIns="50000" tIns="20000" bIns="20000">
-            <a:spAutoFit/>
-          </a:bodyPr>
-          <a:lstStyle/>
-          <a:p>
-            <a:pPr algn="ctr"/>
+              <a:t>CBHD:  </a:t>
+            </a:r>
             <a:r>
               <a:rPr sz="1600" b="0" i="0">
                 <a:solidFill>
                   <a:srgbClr val="14332A"/>
                 </a:solidFill>
               </a:rPr>
-              <a:t>GVHD: Lê Nhất Thống        CBHD: Lê Quốc</a:t>
-            </a:r>
-          </a:p>
-          <a:p>
-            <a:pPr algn="ctr"/>
+              <a:t>Lê Quốc</a:t>
+            </a:r>
+          </a:p>
+          <a:p>
+            <a:r>
+              <a:rPr sz="1600" b="1" i="0">
+                <a:solidFill>
+                  <a:srgbClr val="1F4E3D"/>
+                </a:solidFill>
+              </a:rPr>
+              <a:t>Thực hiện:  </a:t>
+            </a:r>
             <a:r>
               <a:rPr sz="1600" b="0" i="0">
                 <a:solidFill>
                   <a:srgbClr val="14332A"/>
                 </a:solidFill>
               </a:rPr>
-              <a:t>Nhóm 8 SV thực tập  ·  Lớp DHHO18A–D  ·  Năm học 2025–2026</a:t>
-            </a:r>
-          </a:p>
-          <a:p>
-            <a:pPr algn="ctr"/>
-            <a:r>
-              <a:rPr sz="1400" b="0" i="1">
-                <a:solidFill>
-                  <a:srgbClr val="5B6E66"/>
-                </a:solidFill>
-              </a:rPr>
-              <a:t>TP. Hồ Chí Minh — 2026</a:t>
+              <a:t>Nhóm 8 SV thực tập · Lớp DHHO18A–D</a:t>
+            </a:r>
+          </a:p>
+          <a:p>
+            <a:r>
+              <a:rPr sz="1600" b="1" i="0">
+                <a:solidFill>
+                  <a:srgbClr val="1F4E3D"/>
+                </a:solidFill>
+              </a:rPr>
+              <a:t>Năm học:  </a:t>
+            </a:r>
+            <a:r>
+              <a:rPr sz="1600" b="0" i="0">
+                <a:solidFill>
+                  <a:srgbClr val="14332A"/>
+                </a:solidFill>
+              </a:rPr>
+              <a:t>2025–2026</a:t>
             </a:r>
           </a:p>
         </p:txBody>

--- a/SuHeo/Báo cáo thực tập - Sơn Hải Vân.pptx
+++ b/SuHeo/Báo cáo thực tập - Sơn Hải Vân.pptx
@@ -18365,7 +18365,7 @@
           <a:blip r:embed="rId2">
             <a:extLst>
               <a:ext uri="{96DAC541-7B7A-43D3-8B79-37D633B846F1}">
-                <ns0:svgBlip xmlns:ns0="http://schemas.microsoft.com/office/drawing/2016/SVG/main" r:embed="rId14"/>
+                <ns0:svgBlip xmlns:ns0="http://schemas.microsoft.com/office/drawing/2016/SVG/main" r:embed="rId8"/>
               </a:ext>
             </a:extLst>
           </a:blip>
@@ -18395,7 +18395,7 @@
           <a:blip r:embed="rId3">
             <a:extLst>
               <a:ext uri="{96DAC541-7B7A-43D3-8B79-37D633B846F1}">
-                <ns1:svgBlip xmlns:ns1="http://schemas.microsoft.com/office/drawing/2016/SVG/main" r:embed="rId18"/>
+                <ns1:svgBlip xmlns:ns1="http://schemas.microsoft.com/office/drawing/2016/SVG/main" r:embed="rId9"/>
               </a:ext>
             </a:extLst>
           </a:blip>
@@ -18799,7 +18799,7 @@
           <a:blip r:embed="rId4">
             <a:extLst>
               <a:ext uri="{96DAC541-7B7A-43D3-8B79-37D633B846F1}">
-                <ns2:svgBlip xmlns:ns2="http://schemas.microsoft.com/office/drawing/2016/SVG/main" r:embed="rId11"/>
+                <ns2:svgBlip xmlns:ns2="http://schemas.microsoft.com/office/drawing/2016/SVG/main" r:embed="rId7"/>
               </a:ext>
             </a:extLst>
           </a:blip>
@@ -18928,141 +18928,9 @@
           </a:p>
         </p:txBody>
       </p:sp>
-      <p:sp>
-        <p:nvSpPr>
-          <p:cNvPr id="18" name="Rounded Rectangle 17"/>
-          <p:cNvSpPr/>
-          <p:nvPr/>
-        </p:nvSpPr>
-        <p:spPr>
-          <a:xfrm>
-            <a:off x="548640" y="1830000"/>
-            <a:ext cx="3510000" cy="2100000"/>
-          </a:xfrm>
-          <a:prstGeom prst="roundRect">
-            <a:avLst/>
-          </a:prstGeom>
-          <a:solidFill>
-            <a:srgbClr val="EEF4F0"/>
-          </a:solidFill>
-          <a:ln>
-            <a:noFill/>
-          </a:ln>
-          <a:effectLst/>
-        </p:spPr>
-        <p:style>
-          <a:lnRef idx="1">
-            <a:schemeClr val="accent1"/>
-          </a:lnRef>
-          <a:fillRef idx="3">
-            <a:schemeClr val="accent1"/>
-          </a:fillRef>
-          <a:effectRef idx="2">
-            <a:schemeClr val="accent1"/>
-          </a:effectRef>
-          <a:fontRef idx="minor">
-            <a:schemeClr val="lt1"/>
-          </a:fontRef>
-        </p:style>
-        <p:txBody>
-          <a:bodyPr rtlCol="0" anchor="ctr"/>
-          <a:lstStyle/>
-          <a:p>
-            <a:pPr algn="ctr"/>
-          </a:p>
-        </p:txBody>
-      </p:sp>
-      <p:sp>
-        <p:nvSpPr>
-          <p:cNvPr id="19" name="Rounded Rectangle 18"/>
-          <p:cNvSpPr/>
-          <p:nvPr/>
-        </p:nvSpPr>
-        <p:spPr>
-          <a:xfrm>
-            <a:off x="548640" y="1830000"/>
-            <a:ext cx="3510000" cy="70000"/>
-          </a:xfrm>
-          <a:prstGeom prst="roundRect">
-            <a:avLst/>
-          </a:prstGeom>
-          <a:solidFill>
-            <a:srgbClr val="2C7A5A"/>
-          </a:solidFill>
-          <a:ln>
-            <a:noFill/>
-          </a:ln>
-          <a:effectLst/>
-        </p:spPr>
-        <p:style>
-          <a:lnRef idx="1">
-            <a:schemeClr val="accent1"/>
-          </a:lnRef>
-          <a:fillRef idx="3">
-            <a:schemeClr val="accent1"/>
-          </a:fillRef>
-          <a:effectRef idx="2">
-            <a:schemeClr val="accent1"/>
-          </a:effectRef>
-          <a:fontRef idx="minor">
-            <a:schemeClr val="lt1"/>
-          </a:fontRef>
-        </p:style>
-        <p:txBody>
-          <a:bodyPr rtlCol="0" anchor="ctr"/>
-          <a:lstStyle/>
-          <a:p>
-            <a:pPr algn="ctr"/>
-          </a:p>
-        </p:txBody>
-      </p:sp>
-      <p:sp>
-        <p:nvSpPr>
-          <p:cNvPr id="20" name="Oval 19"/>
-          <p:cNvSpPr/>
-          <p:nvPr/>
-        </p:nvSpPr>
-        <p:spPr>
-          <a:xfrm>
-            <a:off x="1893640" y="2060000"/>
-            <a:ext cx="820000" cy="820000"/>
-          </a:xfrm>
-          <a:prstGeom prst="ellipse">
-            <a:avLst/>
-          </a:prstGeom>
-          <a:solidFill>
-            <a:srgbClr val="1F4E3D"/>
-          </a:solidFill>
-          <a:ln>
-            <a:noFill/>
-          </a:ln>
-          <a:effectLst/>
-        </p:spPr>
-        <p:style>
-          <a:lnRef idx="1">
-            <a:schemeClr val="accent1"/>
-          </a:lnRef>
-          <a:fillRef idx="3">
-            <a:schemeClr val="accent1"/>
-          </a:fillRef>
-          <a:effectRef idx="2">
-            <a:schemeClr val="accent1"/>
-          </a:effectRef>
-          <a:fontRef idx="minor">
-            <a:schemeClr val="lt1"/>
-          </a:fontRef>
-        </p:style>
-        <p:txBody>
-          <a:bodyPr rtlCol="0" anchor="ctr"/>
-          <a:lstStyle/>
-          <a:p>
-            <a:pPr algn="ctr"/>
-          </a:p>
-        </p:txBody>
-      </p:sp>
       <p:pic>
         <p:nvPicPr>
-          <p:cNvPr id="21" name="Picture 20" descr="company_w.png"/>
+          <p:cNvPr id="18" name="Picture 17" descr="big_agenda.png"/>
           <p:cNvPicPr>
             <a:picLocks noChangeAspect="1"/>
           </p:cNvPicPr>
@@ -19072,7 +18940,7 @@
           <a:blip r:embed="rId5">
             <a:extLst>
               <a:ext uri="{96DAC541-7B7A-43D3-8B79-37D633B846F1}">
-                <ns3:svgBlip xmlns:ns3="http://schemas.microsoft.com/office/drawing/2016/SVG/main" r:embed="rId12"/>
+                <ns3:svgBlip xmlns:ns3="http://schemas.microsoft.com/office/drawing/2016/SVG/main" r:embed="rId6"/>
               </a:ext>
             </a:extLst>
           </a:blip>
@@ -19082,1028 +18950,14 @@
         </p:blipFill>
         <p:spPr>
           <a:xfrm>
-            <a:off x="2057640" y="2224000"/>
-            <a:ext cx="492000" cy="492000"/>
+            <a:off x="550847" y="1939417"/>
+            <a:ext cx="11090000" cy="4251166"/>
           </a:xfrm>
           <a:prstGeom prst="rect">
             <a:avLst/>
           </a:prstGeom>
         </p:spPr>
       </p:pic>
-      <p:sp>
-        <p:nvSpPr>
-          <p:cNvPr id="22" name="TextBox 21"/>
-          <p:cNvSpPr txBox="1"/>
-          <p:nvPr/>
-        </p:nvSpPr>
-        <p:spPr>
-          <a:xfrm>
-            <a:off x="668640" y="2940000"/>
-            <a:ext cx="3270000" cy="920000"/>
-          </a:xfrm>
-          <a:prstGeom prst="rect">
-            <a:avLst/>
-          </a:prstGeom>
-          <a:noFill/>
-        </p:spPr>
-        <p:txBody>
-          <a:bodyPr wrap="square" lIns="50000" rIns="50000" tIns="20000" bIns="20000" anchor="t">
-            <a:spAutoFit/>
-          </a:bodyPr>
-          <a:lstStyle/>
-          <a:p>
-            <a:pPr algn="ctr"/>
-            <a:r>
-              <a:rPr sz="2000" b="1" i="0">
-                <a:solidFill>
-                  <a:srgbClr val="1F4E3D"/>
-                </a:solidFill>
-              </a:rPr>
-              <a:t>Tổng quan về công ty</a:t>
-            </a:r>
-          </a:p>
-        </p:txBody>
-      </p:sp>
-      <p:sp>
-        <p:nvSpPr>
-          <p:cNvPr id="23" name="Rounded Rectangle 22"/>
-          <p:cNvSpPr/>
-          <p:nvPr/>
-        </p:nvSpPr>
-        <p:spPr>
-          <a:xfrm>
-            <a:off x="4338640" y="1830000"/>
-            <a:ext cx="3510000" cy="2100000"/>
-          </a:xfrm>
-          <a:prstGeom prst="roundRect">
-            <a:avLst/>
-          </a:prstGeom>
-          <a:solidFill>
-            <a:srgbClr val="EEF4F0"/>
-          </a:solidFill>
-          <a:ln>
-            <a:noFill/>
-          </a:ln>
-          <a:effectLst/>
-        </p:spPr>
-        <p:style>
-          <a:lnRef idx="1">
-            <a:schemeClr val="accent1"/>
-          </a:lnRef>
-          <a:fillRef idx="3">
-            <a:schemeClr val="accent1"/>
-          </a:fillRef>
-          <a:effectRef idx="2">
-            <a:schemeClr val="accent1"/>
-          </a:effectRef>
-          <a:fontRef idx="minor">
-            <a:schemeClr val="lt1"/>
-          </a:fontRef>
-        </p:style>
-        <p:txBody>
-          <a:bodyPr rtlCol="0" anchor="ctr"/>
-          <a:lstStyle/>
-          <a:p>
-            <a:pPr algn="ctr"/>
-          </a:p>
-        </p:txBody>
-      </p:sp>
-      <p:sp>
-        <p:nvSpPr>
-          <p:cNvPr id="24" name="Rounded Rectangle 23"/>
-          <p:cNvSpPr/>
-          <p:nvPr/>
-        </p:nvSpPr>
-        <p:spPr>
-          <a:xfrm>
-            <a:off x="4338640" y="1830000"/>
-            <a:ext cx="3510000" cy="70000"/>
-          </a:xfrm>
-          <a:prstGeom prst="roundRect">
-            <a:avLst/>
-          </a:prstGeom>
-          <a:solidFill>
-            <a:srgbClr val="2C7A5A"/>
-          </a:solidFill>
-          <a:ln>
-            <a:noFill/>
-          </a:ln>
-          <a:effectLst/>
-        </p:spPr>
-        <p:style>
-          <a:lnRef idx="1">
-            <a:schemeClr val="accent1"/>
-          </a:lnRef>
-          <a:fillRef idx="3">
-            <a:schemeClr val="accent1"/>
-          </a:fillRef>
-          <a:effectRef idx="2">
-            <a:schemeClr val="accent1"/>
-          </a:effectRef>
-          <a:fontRef idx="minor">
-            <a:schemeClr val="lt1"/>
-          </a:fontRef>
-        </p:style>
-        <p:txBody>
-          <a:bodyPr rtlCol="0" anchor="ctr"/>
-          <a:lstStyle/>
-          <a:p>
-            <a:pPr algn="ctr"/>
-          </a:p>
-        </p:txBody>
-      </p:sp>
-      <p:sp>
-        <p:nvSpPr>
-          <p:cNvPr id="25" name="Oval 24"/>
-          <p:cNvSpPr/>
-          <p:nvPr/>
-        </p:nvSpPr>
-        <p:spPr>
-          <a:xfrm>
-            <a:off x="5683640" y="2060000"/>
-            <a:ext cx="820000" cy="820000"/>
-          </a:xfrm>
-          <a:prstGeom prst="ellipse">
-            <a:avLst/>
-          </a:prstGeom>
-          <a:solidFill>
-            <a:srgbClr val="1F4E3D"/>
-          </a:solidFill>
-          <a:ln>
-            <a:noFill/>
-          </a:ln>
-          <a:effectLst/>
-        </p:spPr>
-        <p:style>
-          <a:lnRef idx="1">
-            <a:schemeClr val="accent1"/>
-          </a:lnRef>
-          <a:fillRef idx="3">
-            <a:schemeClr val="accent1"/>
-          </a:fillRef>
-          <a:effectRef idx="2">
-            <a:schemeClr val="accent1"/>
-          </a:effectRef>
-          <a:fontRef idx="minor">
-            <a:schemeClr val="lt1"/>
-          </a:fontRef>
-        </p:style>
-        <p:txBody>
-          <a:bodyPr rtlCol="0" anchor="ctr"/>
-          <a:lstStyle/>
-          <a:p>
-            <a:pPr algn="ctr"/>
-          </a:p>
-        </p:txBody>
-      </p:sp>
-      <p:pic>
-        <p:nvPicPr>
-          <p:cNvPr id="26" name="Picture 25" descr="materials_w.png"/>
-          <p:cNvPicPr>
-            <a:picLocks noChangeAspect="1"/>
-          </p:cNvPicPr>
-          <p:nvPr/>
-        </p:nvPicPr>
-        <p:blipFill>
-          <a:blip r:embed="rId6">
-            <a:extLst>
-              <a:ext uri="{96DAC541-7B7A-43D3-8B79-37D633B846F1}">
-                <ns4:svgBlip xmlns:ns4="http://schemas.microsoft.com/office/drawing/2016/SVG/main" r:embed="rId15"/>
-              </a:ext>
-            </a:extLst>
-          </a:blip>
-          <a:stretch>
-            <a:fillRect/>
-          </a:stretch>
-        </p:blipFill>
-        <p:spPr>
-          <a:xfrm>
-            <a:off x="5847640" y="2224000"/>
-            <a:ext cx="492000" cy="492000"/>
-          </a:xfrm>
-          <a:prstGeom prst="rect">
-            <a:avLst/>
-          </a:prstGeom>
-        </p:spPr>
-      </p:pic>
-      <p:sp>
-        <p:nvSpPr>
-          <p:cNvPr id="27" name="TextBox 26"/>
-          <p:cNvSpPr txBox="1"/>
-          <p:nvPr/>
-        </p:nvSpPr>
-        <p:spPr>
-          <a:xfrm>
-            <a:off x="4458640" y="2940000"/>
-            <a:ext cx="3270000" cy="920000"/>
-          </a:xfrm>
-          <a:prstGeom prst="rect">
-            <a:avLst/>
-          </a:prstGeom>
-          <a:noFill/>
-        </p:spPr>
-        <p:txBody>
-          <a:bodyPr wrap="square" lIns="50000" rIns="50000" tIns="20000" bIns="20000" anchor="t">
-            <a:spAutoFit/>
-          </a:bodyPr>
-          <a:lstStyle/>
-          <a:p>
-            <a:pPr algn="ctr"/>
-            <a:r>
-              <a:rPr sz="2000" b="1" i="0">
-                <a:solidFill>
-                  <a:srgbClr val="1F4E3D"/>
-                </a:solidFill>
-              </a:rPr>
-              <a:t>Nguyên vật liệu</a:t>
-            </a:r>
-          </a:p>
-        </p:txBody>
-      </p:sp>
-      <p:sp>
-        <p:nvSpPr>
-          <p:cNvPr id="28" name="Rounded Rectangle 27"/>
-          <p:cNvSpPr/>
-          <p:nvPr/>
-        </p:nvSpPr>
-        <p:spPr>
-          <a:xfrm>
-            <a:off x="8128640" y="1830000"/>
-            <a:ext cx="3510000" cy="2100000"/>
-          </a:xfrm>
-          <a:prstGeom prst="roundRect">
-            <a:avLst/>
-          </a:prstGeom>
-          <a:solidFill>
-            <a:srgbClr val="EEF4F0"/>
-          </a:solidFill>
-          <a:ln>
-            <a:noFill/>
-          </a:ln>
-          <a:effectLst/>
-        </p:spPr>
-        <p:style>
-          <a:lnRef idx="1">
-            <a:schemeClr val="accent1"/>
-          </a:lnRef>
-          <a:fillRef idx="3">
-            <a:schemeClr val="accent1"/>
-          </a:fillRef>
-          <a:effectRef idx="2">
-            <a:schemeClr val="accent1"/>
-          </a:effectRef>
-          <a:fontRef idx="minor">
-            <a:schemeClr val="lt1"/>
-          </a:fontRef>
-        </p:style>
-        <p:txBody>
-          <a:bodyPr rtlCol="0" anchor="ctr"/>
-          <a:lstStyle/>
-          <a:p>
-            <a:pPr algn="ctr"/>
-          </a:p>
-        </p:txBody>
-      </p:sp>
-      <p:sp>
-        <p:nvSpPr>
-          <p:cNvPr id="29" name="Rounded Rectangle 28"/>
-          <p:cNvSpPr/>
-          <p:nvPr/>
-        </p:nvSpPr>
-        <p:spPr>
-          <a:xfrm>
-            <a:off x="8128640" y="1830000"/>
-            <a:ext cx="3510000" cy="70000"/>
-          </a:xfrm>
-          <a:prstGeom prst="roundRect">
-            <a:avLst/>
-          </a:prstGeom>
-          <a:solidFill>
-            <a:srgbClr val="2C7A5A"/>
-          </a:solidFill>
-          <a:ln>
-            <a:noFill/>
-          </a:ln>
-          <a:effectLst/>
-        </p:spPr>
-        <p:style>
-          <a:lnRef idx="1">
-            <a:schemeClr val="accent1"/>
-          </a:lnRef>
-          <a:fillRef idx="3">
-            <a:schemeClr val="accent1"/>
-          </a:fillRef>
-          <a:effectRef idx="2">
-            <a:schemeClr val="accent1"/>
-          </a:effectRef>
-          <a:fontRef idx="minor">
-            <a:schemeClr val="lt1"/>
-          </a:fontRef>
-        </p:style>
-        <p:txBody>
-          <a:bodyPr rtlCol="0" anchor="ctr"/>
-          <a:lstStyle/>
-          <a:p>
-            <a:pPr algn="ctr"/>
-          </a:p>
-        </p:txBody>
-      </p:sp>
-      <p:sp>
-        <p:nvSpPr>
-          <p:cNvPr id="30" name="Oval 29"/>
-          <p:cNvSpPr/>
-          <p:nvPr/>
-        </p:nvSpPr>
-        <p:spPr>
-          <a:xfrm>
-            <a:off x="9473640" y="2060000"/>
-            <a:ext cx="820000" cy="820000"/>
-          </a:xfrm>
-          <a:prstGeom prst="ellipse">
-            <a:avLst/>
-          </a:prstGeom>
-          <a:solidFill>
-            <a:srgbClr val="1F4E3D"/>
-          </a:solidFill>
-          <a:ln>
-            <a:noFill/>
-          </a:ln>
-          <a:effectLst/>
-        </p:spPr>
-        <p:style>
-          <a:lnRef idx="1">
-            <a:schemeClr val="accent1"/>
-          </a:lnRef>
-          <a:fillRef idx="3">
-            <a:schemeClr val="accent1"/>
-          </a:fillRef>
-          <a:effectRef idx="2">
-            <a:schemeClr val="accent1"/>
-          </a:effectRef>
-          <a:fontRef idx="minor">
-            <a:schemeClr val="lt1"/>
-          </a:fontRef>
-        </p:style>
-        <p:txBody>
-          <a:bodyPr rtlCol="0" anchor="ctr"/>
-          <a:lstStyle/>
-          <a:p>
-            <a:pPr algn="ctr"/>
-          </a:p>
-        </p:txBody>
-      </p:sp>
-      <p:pic>
-        <p:nvPicPr>
-          <p:cNvPr id="31" name="Picture 30" descr="gear_proc_w.png"/>
-          <p:cNvPicPr>
-            <a:picLocks noChangeAspect="1"/>
-          </p:cNvPicPr>
-          <p:nvPr/>
-        </p:nvPicPr>
-        <p:blipFill>
-          <a:blip r:embed="rId7">
-            <a:extLst>
-              <a:ext uri="{96DAC541-7B7A-43D3-8B79-37D633B846F1}">
-                <ns5:svgBlip xmlns:ns5="http://schemas.microsoft.com/office/drawing/2016/SVG/main" r:embed="rId13"/>
-              </a:ext>
-            </a:extLst>
-          </a:blip>
-          <a:stretch>
-            <a:fillRect/>
-          </a:stretch>
-        </p:blipFill>
-        <p:spPr>
-          <a:xfrm>
-            <a:off x="9637640" y="2224000"/>
-            <a:ext cx="492000" cy="492000"/>
-          </a:xfrm>
-          <a:prstGeom prst="rect">
-            <a:avLst/>
-          </a:prstGeom>
-        </p:spPr>
-      </p:pic>
-      <p:sp>
-        <p:nvSpPr>
-          <p:cNvPr id="32" name="TextBox 31"/>
-          <p:cNvSpPr txBox="1"/>
-          <p:nvPr/>
-        </p:nvSpPr>
-        <p:spPr>
-          <a:xfrm>
-            <a:off x="8248640" y="2940000"/>
-            <a:ext cx="3270000" cy="920000"/>
-          </a:xfrm>
-          <a:prstGeom prst="rect">
-            <a:avLst/>
-          </a:prstGeom>
-          <a:noFill/>
-        </p:spPr>
-        <p:txBody>
-          <a:bodyPr wrap="square" lIns="50000" rIns="50000" tIns="20000" bIns="20000" anchor="t">
-            <a:spAutoFit/>
-          </a:bodyPr>
-          <a:lstStyle/>
-          <a:p>
-            <a:pPr algn="ctr"/>
-            <a:r>
-              <a:rPr sz="2000" b="1" i="0">
-                <a:solidFill>
-                  <a:srgbClr val="1F4E3D"/>
-                </a:solidFill>
-              </a:rPr>
-              <a:t>Quy trình công nghệ &amp; thiết bị</a:t>
-            </a:r>
-          </a:p>
-        </p:txBody>
-      </p:sp>
-      <p:sp>
-        <p:nvSpPr>
-          <p:cNvPr id="33" name="Rounded Rectangle 32"/>
-          <p:cNvSpPr/>
-          <p:nvPr/>
-        </p:nvSpPr>
-        <p:spPr>
-          <a:xfrm>
-            <a:off x="548640" y="4200000"/>
-            <a:ext cx="3510000" cy="2100000"/>
-          </a:xfrm>
-          <a:prstGeom prst="roundRect">
-            <a:avLst/>
-          </a:prstGeom>
-          <a:solidFill>
-            <a:srgbClr val="EEF4F0"/>
-          </a:solidFill>
-          <a:ln>
-            <a:noFill/>
-          </a:ln>
-          <a:effectLst/>
-        </p:spPr>
-        <p:style>
-          <a:lnRef idx="1">
-            <a:schemeClr val="accent1"/>
-          </a:lnRef>
-          <a:fillRef idx="3">
-            <a:schemeClr val="accent1"/>
-          </a:fillRef>
-          <a:effectRef idx="2">
-            <a:schemeClr val="accent1"/>
-          </a:effectRef>
-          <a:fontRef idx="minor">
-            <a:schemeClr val="lt1"/>
-          </a:fontRef>
-        </p:style>
-        <p:txBody>
-          <a:bodyPr rtlCol="0" anchor="ctr"/>
-          <a:lstStyle/>
-          <a:p>
-            <a:pPr algn="ctr"/>
-          </a:p>
-        </p:txBody>
-      </p:sp>
-      <p:sp>
-        <p:nvSpPr>
-          <p:cNvPr id="34" name="Rounded Rectangle 33"/>
-          <p:cNvSpPr/>
-          <p:nvPr/>
-        </p:nvSpPr>
-        <p:spPr>
-          <a:xfrm>
-            <a:off x="548640" y="4200000"/>
-            <a:ext cx="3510000" cy="70000"/>
-          </a:xfrm>
-          <a:prstGeom prst="roundRect">
-            <a:avLst/>
-          </a:prstGeom>
-          <a:solidFill>
-            <a:srgbClr val="2C7A5A"/>
-          </a:solidFill>
-          <a:ln>
-            <a:noFill/>
-          </a:ln>
-          <a:effectLst/>
-        </p:spPr>
-        <p:style>
-          <a:lnRef idx="1">
-            <a:schemeClr val="accent1"/>
-          </a:lnRef>
-          <a:fillRef idx="3">
-            <a:schemeClr val="accent1"/>
-          </a:fillRef>
-          <a:effectRef idx="2">
-            <a:schemeClr val="accent1"/>
-          </a:effectRef>
-          <a:fontRef idx="minor">
-            <a:schemeClr val="lt1"/>
-          </a:fontRef>
-        </p:style>
-        <p:txBody>
-          <a:bodyPr rtlCol="0" anchor="ctr"/>
-          <a:lstStyle/>
-          <a:p>
-            <a:pPr algn="ctr"/>
-          </a:p>
-        </p:txBody>
-      </p:sp>
-      <p:sp>
-        <p:nvSpPr>
-          <p:cNvPr id="35" name="Oval 34"/>
-          <p:cNvSpPr/>
-          <p:nvPr/>
-        </p:nvSpPr>
-        <p:spPr>
-          <a:xfrm>
-            <a:off x="1893640" y="4430000"/>
-            <a:ext cx="820000" cy="820000"/>
-          </a:xfrm>
-          <a:prstGeom prst="ellipse">
-            <a:avLst/>
-          </a:prstGeom>
-          <a:solidFill>
-            <a:srgbClr val="1F4E3D"/>
-          </a:solidFill>
-          <a:ln>
-            <a:noFill/>
-          </a:ln>
-          <a:effectLst/>
-        </p:spPr>
-        <p:style>
-          <a:lnRef idx="1">
-            <a:schemeClr val="accent1"/>
-          </a:lnRef>
-          <a:fillRef idx="3">
-            <a:schemeClr val="accent1"/>
-          </a:fillRef>
-          <a:effectRef idx="2">
-            <a:schemeClr val="accent1"/>
-          </a:effectRef>
-          <a:fontRef idx="minor">
-            <a:schemeClr val="lt1"/>
-          </a:fontRef>
-        </p:style>
-        <p:txBody>
-          <a:bodyPr rtlCol="0" anchor="ctr"/>
-          <a:lstStyle/>
-          <a:p>
-            <a:pPr algn="ctr"/>
-          </a:p>
-        </p:txBody>
-      </p:sp>
-      <p:pic>
-        <p:nvPicPr>
-          <p:cNvPr id="36" name="Picture 35" descr="quality_check_w.png"/>
-          <p:cNvPicPr>
-            <a:picLocks noChangeAspect="1"/>
-          </p:cNvPicPr>
-          <p:nvPr/>
-        </p:nvPicPr>
-        <p:blipFill>
-          <a:blip r:embed="rId8">
-            <a:extLst>
-              <a:ext uri="{96DAC541-7B7A-43D3-8B79-37D633B846F1}">
-                <ns6:svgBlip xmlns:ns6="http://schemas.microsoft.com/office/drawing/2016/SVG/main" r:embed="rId16"/>
-              </a:ext>
-            </a:extLst>
-          </a:blip>
-          <a:stretch>
-            <a:fillRect/>
-          </a:stretch>
-        </p:blipFill>
-        <p:spPr>
-          <a:xfrm>
-            <a:off x="2057640" y="4594000"/>
-            <a:ext cx="492000" cy="492000"/>
-          </a:xfrm>
-          <a:prstGeom prst="rect">
-            <a:avLst/>
-          </a:prstGeom>
-        </p:spPr>
-      </p:pic>
-      <p:sp>
-        <p:nvSpPr>
-          <p:cNvPr id="37" name="TextBox 36"/>
-          <p:cNvSpPr txBox="1"/>
-          <p:nvPr/>
-        </p:nvSpPr>
-        <p:spPr>
-          <a:xfrm>
-            <a:off x="668640" y="5310000"/>
-            <a:ext cx="3270000" cy="920000"/>
-          </a:xfrm>
-          <a:prstGeom prst="rect">
-            <a:avLst/>
-          </a:prstGeom>
-          <a:noFill/>
-        </p:spPr>
-        <p:txBody>
-          <a:bodyPr wrap="square" lIns="50000" rIns="50000" tIns="20000" bIns="20000" anchor="t">
-            <a:spAutoFit/>
-          </a:bodyPr>
-          <a:lstStyle/>
-          <a:p>
-            <a:pPr algn="ctr"/>
-            <a:r>
-              <a:rPr sz="2000" b="1" i="0">
-                <a:solidFill>
-                  <a:srgbClr val="1F4E3D"/>
-                </a:solidFill>
-              </a:rPr>
-              <a:t>Kiểm soát chất lượng (KCS)</a:t>
-            </a:r>
-          </a:p>
-        </p:txBody>
-      </p:sp>
-      <p:sp>
-        <p:nvSpPr>
-          <p:cNvPr id="38" name="Rounded Rectangle 37"/>
-          <p:cNvSpPr/>
-          <p:nvPr/>
-        </p:nvSpPr>
-        <p:spPr>
-          <a:xfrm>
-            <a:off x="4338640" y="4200000"/>
-            <a:ext cx="3510000" cy="2100000"/>
-          </a:xfrm>
-          <a:prstGeom prst="roundRect">
-            <a:avLst/>
-          </a:prstGeom>
-          <a:solidFill>
-            <a:srgbClr val="EEF4F0"/>
-          </a:solidFill>
-          <a:ln>
-            <a:noFill/>
-          </a:ln>
-          <a:effectLst/>
-        </p:spPr>
-        <p:style>
-          <a:lnRef idx="1">
-            <a:schemeClr val="accent1"/>
-          </a:lnRef>
-          <a:fillRef idx="3">
-            <a:schemeClr val="accent1"/>
-          </a:fillRef>
-          <a:effectRef idx="2">
-            <a:schemeClr val="accent1"/>
-          </a:effectRef>
-          <a:fontRef idx="minor">
-            <a:schemeClr val="lt1"/>
-          </a:fontRef>
-        </p:style>
-        <p:txBody>
-          <a:bodyPr rtlCol="0" anchor="ctr"/>
-          <a:lstStyle/>
-          <a:p>
-            <a:pPr algn="ctr"/>
-          </a:p>
-        </p:txBody>
-      </p:sp>
-      <p:sp>
-        <p:nvSpPr>
-          <p:cNvPr id="39" name="Rounded Rectangle 38"/>
-          <p:cNvSpPr/>
-          <p:nvPr/>
-        </p:nvSpPr>
-        <p:spPr>
-          <a:xfrm>
-            <a:off x="4338640" y="4200000"/>
-            <a:ext cx="3510000" cy="70000"/>
-          </a:xfrm>
-          <a:prstGeom prst="roundRect">
-            <a:avLst/>
-          </a:prstGeom>
-          <a:solidFill>
-            <a:srgbClr val="2C7A5A"/>
-          </a:solidFill>
-          <a:ln>
-            <a:noFill/>
-          </a:ln>
-          <a:effectLst/>
-        </p:spPr>
-        <p:style>
-          <a:lnRef idx="1">
-            <a:schemeClr val="accent1"/>
-          </a:lnRef>
-          <a:fillRef idx="3">
-            <a:schemeClr val="accent1"/>
-          </a:fillRef>
-          <a:effectRef idx="2">
-            <a:schemeClr val="accent1"/>
-          </a:effectRef>
-          <a:fontRef idx="minor">
-            <a:schemeClr val="lt1"/>
-          </a:fontRef>
-        </p:style>
-        <p:txBody>
-          <a:bodyPr rtlCol="0" anchor="ctr"/>
-          <a:lstStyle/>
-          <a:p>
-            <a:pPr algn="ctr"/>
-          </a:p>
-        </p:txBody>
-      </p:sp>
-      <p:sp>
-        <p:nvSpPr>
-          <p:cNvPr id="40" name="Oval 39"/>
-          <p:cNvSpPr/>
-          <p:nvPr/>
-        </p:nvSpPr>
-        <p:spPr>
-          <a:xfrm>
-            <a:off x="5683640" y="4430000"/>
-            <a:ext cx="820000" cy="820000"/>
-          </a:xfrm>
-          <a:prstGeom prst="ellipse">
-            <a:avLst/>
-          </a:prstGeom>
-          <a:solidFill>
-            <a:srgbClr val="1F4E3D"/>
-          </a:solidFill>
-          <a:ln>
-            <a:noFill/>
-          </a:ln>
-          <a:effectLst/>
-        </p:spPr>
-        <p:style>
-          <a:lnRef idx="1">
-            <a:schemeClr val="accent1"/>
-          </a:lnRef>
-          <a:fillRef idx="3">
-            <a:schemeClr val="accent1"/>
-          </a:fillRef>
-          <a:effectRef idx="2">
-            <a:schemeClr val="accent1"/>
-          </a:effectRef>
-          <a:fontRef idx="minor">
-            <a:schemeClr val="lt1"/>
-          </a:fontRef>
-        </p:style>
-        <p:txBody>
-          <a:bodyPr rtlCol="0" anchor="ctr"/>
-          <a:lstStyle/>
-          <a:p>
-            <a:pPr algn="ctr"/>
-          </a:p>
-        </p:txBody>
-      </p:sp>
-      <p:pic>
-        <p:nvPicPr>
-          <p:cNvPr id="41" name="Picture 40" descr="warning_tri_w.png"/>
-          <p:cNvPicPr>
-            <a:picLocks noChangeAspect="1"/>
-          </p:cNvPicPr>
-          <p:nvPr/>
-        </p:nvPicPr>
-        <p:blipFill>
-          <a:blip r:embed="rId9">
-            <a:extLst>
-              <a:ext uri="{96DAC541-7B7A-43D3-8B79-37D633B846F1}">
-                <ns7:svgBlip xmlns:ns7="http://schemas.microsoft.com/office/drawing/2016/SVG/main" r:embed="rId19"/>
-              </a:ext>
-            </a:extLst>
-          </a:blip>
-          <a:stretch>
-            <a:fillRect/>
-          </a:stretch>
-        </p:blipFill>
-        <p:spPr>
-          <a:xfrm>
-            <a:off x="5847640" y="4594000"/>
-            <a:ext cx="492000" cy="492000"/>
-          </a:xfrm>
-          <a:prstGeom prst="rect">
-            <a:avLst/>
-          </a:prstGeom>
-        </p:spPr>
-      </p:pic>
-      <p:sp>
-        <p:nvSpPr>
-          <p:cNvPr id="42" name="TextBox 41"/>
-          <p:cNvSpPr txBox="1"/>
-          <p:nvPr/>
-        </p:nvSpPr>
-        <p:spPr>
-          <a:xfrm>
-            <a:off x="4458640" y="5310000"/>
-            <a:ext cx="3270000" cy="920000"/>
-          </a:xfrm>
-          <a:prstGeom prst="rect">
-            <a:avLst/>
-          </a:prstGeom>
-          <a:noFill/>
-        </p:spPr>
-        <p:txBody>
-          <a:bodyPr wrap="square" lIns="50000" rIns="50000" tIns="20000" bIns="20000" anchor="t">
-            <a:spAutoFit/>
-          </a:bodyPr>
-          <a:lstStyle/>
-          <a:p>
-            <a:pPr algn="ctr"/>
-            <a:r>
-              <a:rPr sz="2000" b="1" i="0">
-                <a:solidFill>
-                  <a:srgbClr val="1F4E3D"/>
-                </a:solidFill>
-              </a:rPr>
-              <a:t>Những sự cố thường gặp</a:t>
-            </a:r>
-          </a:p>
-        </p:txBody>
-      </p:sp>
-      <p:sp>
-        <p:nvSpPr>
-          <p:cNvPr id="43" name="Rounded Rectangle 42"/>
-          <p:cNvSpPr/>
-          <p:nvPr/>
-        </p:nvSpPr>
-        <p:spPr>
-          <a:xfrm>
-            <a:off x="8128640" y="4200000"/>
-            <a:ext cx="3510000" cy="2100000"/>
-          </a:xfrm>
-          <a:prstGeom prst="roundRect">
-            <a:avLst/>
-          </a:prstGeom>
-          <a:solidFill>
-            <a:srgbClr val="EEF4F0"/>
-          </a:solidFill>
-          <a:ln>
-            <a:noFill/>
-          </a:ln>
-          <a:effectLst/>
-        </p:spPr>
-        <p:style>
-          <a:lnRef idx="1">
-            <a:schemeClr val="accent1"/>
-          </a:lnRef>
-          <a:fillRef idx="3">
-            <a:schemeClr val="accent1"/>
-          </a:fillRef>
-          <a:effectRef idx="2">
-            <a:schemeClr val="accent1"/>
-          </a:effectRef>
-          <a:fontRef idx="minor">
-            <a:schemeClr val="lt1"/>
-          </a:fontRef>
-        </p:style>
-        <p:txBody>
-          <a:bodyPr rtlCol="0" anchor="ctr"/>
-          <a:lstStyle/>
-          <a:p>
-            <a:pPr algn="ctr"/>
-          </a:p>
-        </p:txBody>
-      </p:sp>
-      <p:sp>
-        <p:nvSpPr>
-          <p:cNvPr id="44" name="Rounded Rectangle 43"/>
-          <p:cNvSpPr/>
-          <p:nvPr/>
-        </p:nvSpPr>
-        <p:spPr>
-          <a:xfrm>
-            <a:off x="8128640" y="4200000"/>
-            <a:ext cx="3510000" cy="70000"/>
-          </a:xfrm>
-          <a:prstGeom prst="roundRect">
-            <a:avLst/>
-          </a:prstGeom>
-          <a:solidFill>
-            <a:srgbClr val="2C7A5A"/>
-          </a:solidFill>
-          <a:ln>
-            <a:noFill/>
-          </a:ln>
-          <a:effectLst/>
-        </p:spPr>
-        <p:style>
-          <a:lnRef idx="1">
-            <a:schemeClr val="accent1"/>
-          </a:lnRef>
-          <a:fillRef idx="3">
-            <a:schemeClr val="accent1"/>
-          </a:fillRef>
-          <a:effectRef idx="2">
-            <a:schemeClr val="accent1"/>
-          </a:effectRef>
-          <a:fontRef idx="minor">
-            <a:schemeClr val="lt1"/>
-          </a:fontRef>
-        </p:style>
-        <p:txBody>
-          <a:bodyPr rtlCol="0" anchor="ctr"/>
-          <a:lstStyle/>
-          <a:p>
-            <a:pPr algn="ctr"/>
-          </a:p>
-        </p:txBody>
-      </p:sp>
-      <p:sp>
-        <p:nvSpPr>
-          <p:cNvPr id="45" name="Oval 44"/>
-          <p:cNvSpPr/>
-          <p:nvPr/>
-        </p:nvSpPr>
-        <p:spPr>
-          <a:xfrm>
-            <a:off x="9473640" y="4430000"/>
-            <a:ext cx="820000" cy="820000"/>
-          </a:xfrm>
-          <a:prstGeom prst="ellipse">
-            <a:avLst/>
-          </a:prstGeom>
-          <a:solidFill>
-            <a:srgbClr val="1F4E3D"/>
-          </a:solidFill>
-          <a:ln>
-            <a:noFill/>
-          </a:ln>
-          <a:effectLst/>
-        </p:spPr>
-        <p:style>
-          <a:lnRef idx="1">
-            <a:schemeClr val="accent1"/>
-          </a:lnRef>
-          <a:fillRef idx="3">
-            <a:schemeClr val="accent1"/>
-          </a:fillRef>
-          <a:effectRef idx="2">
-            <a:schemeClr val="accent1"/>
-          </a:effectRef>
-          <a:fontRef idx="minor">
-            <a:schemeClr val="lt1"/>
-          </a:fontRef>
-        </p:style>
-        <p:txBody>
-          <a:bodyPr rtlCol="0" anchor="ctr"/>
-          <a:lstStyle/>
-          <a:p>
-            <a:pPr algn="ctr"/>
-          </a:p>
-        </p:txBody>
-      </p:sp>
-      <p:pic>
-        <p:nvPicPr>
-          <p:cNvPr id="46" name="Picture 45" descr="safety_shield_w.png"/>
-          <p:cNvPicPr>
-            <a:picLocks noChangeAspect="1"/>
-          </p:cNvPicPr>
-          <p:nvPr/>
-        </p:nvPicPr>
-        <p:blipFill>
-          <a:blip r:embed="rId10">
-            <a:extLst>
-              <a:ext uri="{96DAC541-7B7A-43D3-8B79-37D633B846F1}">
-                <ns8:svgBlip xmlns:ns8="http://schemas.microsoft.com/office/drawing/2016/SVG/main" r:embed="rId17"/>
-              </a:ext>
-            </a:extLst>
-          </a:blip>
-          <a:stretch>
-            <a:fillRect/>
-          </a:stretch>
-        </p:blipFill>
-        <p:spPr>
-          <a:xfrm>
-            <a:off x="9637640" y="4594000"/>
-            <a:ext cx="492000" cy="492000"/>
-          </a:xfrm>
-          <a:prstGeom prst="rect">
-            <a:avLst/>
-          </a:prstGeom>
-        </p:spPr>
-      </p:pic>
-      <p:sp>
-        <p:nvSpPr>
-          <p:cNvPr id="47" name="TextBox 46"/>
-          <p:cNvSpPr txBox="1"/>
-          <p:nvPr/>
-        </p:nvSpPr>
-        <p:spPr>
-          <a:xfrm>
-            <a:off x="8248640" y="5310000"/>
-            <a:ext cx="3270000" cy="920000"/>
-          </a:xfrm>
-          <a:prstGeom prst="rect">
-            <a:avLst/>
-          </a:prstGeom>
-          <a:noFill/>
-        </p:spPr>
-        <p:txBody>
-          <a:bodyPr wrap="square" lIns="50000" rIns="50000" tIns="20000" bIns="20000" anchor="t">
-            <a:spAutoFit/>
-          </a:bodyPr>
-          <a:lstStyle/>
-          <a:p>
-            <a:pPr algn="ctr"/>
-            <a:r>
-              <a:rPr sz="2000" b="1" i="0">
-                <a:solidFill>
-                  <a:srgbClr val="1F4E3D"/>
-                </a:solidFill>
-              </a:rPr>
-              <a:t>An toàn lao động &amp; môi trường</a:t>
-            </a:r>
-          </a:p>
-        </p:txBody>
-      </p:sp>
     </p:spTree>
   </p:cSld>
   <p:clrMapOvr>
